--- a/配布/Copilot_Cowork_競合比較.pptx
+++ b/配布/Copilot_Cowork_競合比較.pptx
@@ -8775,7 +8775,7 @@
             <a:spLocks noGrp="1"/>
           </p:cNvSpPr>
           <p:nvPr>
-            <p:ph type="body" idx="17" sz="quarter"/>
+            <p:ph type="body" idx="18" sz="quarter"/>
           </p:nvPr>
         </p:nvSpPr>
         <p:spPr/>

--- a/配布/Copilot_Cowork_競合比較.pptx
+++ b/配布/Copilot_Cowork_競合比較.pptx
@@ -2,18 +2,18 @@
 <file path=ppt/presentation.xml><?xml version="1.0" encoding="utf-8"?>
 <p:presentation xmlns:a="http://schemas.openxmlformats.org/drawingml/2006/main" xmlns:r="http://schemas.openxmlformats.org/officeDocument/2006/relationships" xmlns:p="http://schemas.openxmlformats.org/presentationml/2006/main" saveSubsetFonts="1">
   <p:sldMasterIdLst>
-    <p:sldMasterId id="2147483695" r:id="rId4"/>
+    <p:sldMasterId id="2147483705" r:id="rId4"/>
   </p:sldMasterIdLst>
   <p:notesMasterIdLst>
-    <p:notesMasterId r:id="rId26"/>
+    <p:notesMasterId r:id="rId25"/>
   </p:notesMasterIdLst>
   <p:sldIdLst>
-    <p:sldId id="256" r:id="rId32"/>
-    <p:sldId id="257" r:id="rId33"/>
-    <p:sldId id="258" r:id="rId34"/>
-    <p:sldId id="259" r:id="rId35"/>
-    <p:sldId id="260" r:id="rId36"/>
-    <p:sldId id="261" r:id="rId37"/>
+    <p:sldId id="256" r:id="rId31"/>
+    <p:sldId id="257" r:id="rId32"/>
+    <p:sldId id="258" r:id="rId33"/>
+    <p:sldId id="259" r:id="rId34"/>
+    <p:sldId id="260" r:id="rId35"/>
+    <p:sldId id="261" r:id="rId36"/>
   </p:sldIdLst>
   <p:sldSz cx="12192000" cy="6858000"/>
   <p:notesSz cx="6858000" cy="9144000"/>
@@ -123,97 +123,26 @@
 <file path=ppt/changesInfos/changesInfo1.xml><?xml version="1.0" encoding="utf-8"?>
 <pc:chgInfo xmlns:a="http://schemas.openxmlformats.org/drawingml/2006/main" xmlns:r="http://schemas.openxmlformats.org/officeDocument/2006/relationships" xmlns:ac="http://schemas.microsoft.com/office/drawing/2013/main/command" xmlns:pc="http://schemas.microsoft.com/office/powerpoint/2013/main/command">
   <pc:docChgLst>
-    <pc:chgData name="杉村　麻記子" userId="7b6cb1e1-ca39-4bf7-a670-9ae758fae17a" providerId="ADAL" clId="{67970DCB-519A-4635-A8CB-5DD653ABF138}"/>
-    <pc:docChg chg="custSel addSld delSld modSld">
-      <pc:chgData name="杉村　麻記子" userId="7b6cb1e1-ca39-4bf7-a670-9ae758fae17a" providerId="ADAL" clId="{67970DCB-519A-4635-A8CB-5DD653ABF138}" dt="2025-10-03T07:47:21.627" v="386" actId="3626"/>
+    <pc:chgData name="杉村　麻記子" userId="7b6cb1e1-ca39-4bf7-a670-9ae758fae17a" providerId="ADAL" clId="{F08030B0-55D8-42BA-A35F-5EDC85AE88F6}"/>
+    <pc:docChg chg="delSld modSld">
+      <pc:chgData name="杉村　麻記子" userId="7b6cb1e1-ca39-4bf7-a670-9ae758fae17a" providerId="ADAL" clId="{F08030B0-55D8-42BA-A35F-5EDC85AE88F6}" dt="2025-10-03T07:39:20.942" v="4" actId="1076"/>
       <pc:docMkLst>
         <pc:docMk/>
       </pc:docMkLst>
       <pc:sldChg chg="addSp modSp mod">
-        <pc:chgData name="杉村　麻記子" userId="7b6cb1e1-ca39-4bf7-a670-9ae758fae17a" providerId="ADAL" clId="{67970DCB-519A-4635-A8CB-5DD653ABF138}" dt="2025-10-03T07:09:21.687" v="384" actId="6549"/>
+        <pc:chgData name="杉村　麻記子" userId="7b6cb1e1-ca39-4bf7-a670-9ae758fae17a" providerId="ADAL" clId="{F08030B0-55D8-42BA-A35F-5EDC85AE88F6}" dt="2025-10-03T07:39:20.942" v="4" actId="1076"/>
         <pc:sldMkLst>
           <pc:docMk/>
           <pc:sldMk cId="287944165" sldId="326"/>
         </pc:sldMkLst>
-        <pc:spChg chg="mod">
-          <ac:chgData name="杉村　麻記子" userId="7b6cb1e1-ca39-4bf7-a670-9ae758fae17a" providerId="ADAL" clId="{67970DCB-519A-4635-A8CB-5DD653ABF138}" dt="2025-10-03T06:58:37.833" v="17" actId="20577"/>
+        <pc:spChg chg="add mod">
+          <ac:chgData name="杉村　麻記子" userId="7b6cb1e1-ca39-4bf7-a670-9ae758fae17a" providerId="ADAL" clId="{F08030B0-55D8-42BA-A35F-5EDC85AE88F6}" dt="2025-10-03T07:39:20.942" v="4" actId="1076"/>
           <ac:spMkLst>
             <pc:docMk/>
             <pc:sldMk cId="287944165" sldId="326"/>
-            <ac:spMk id="3" creationId="{8EE5B39A-10E4-F34B-557A-8C8D0E1E21D7}"/>
+            <ac:spMk id="4" creationId="{261DA770-171D-0878-BBD4-ABC038BE8ED7}"/>
           </ac:spMkLst>
         </pc:spChg>
-        <pc:spChg chg="add mod">
-          <ac:chgData name="杉村　麻記子" userId="7b6cb1e1-ca39-4bf7-a670-9ae758fae17a" providerId="ADAL" clId="{67970DCB-519A-4635-A8CB-5DD653ABF138}" dt="2025-10-03T07:09:21.687" v="384" actId="6549"/>
-          <ac:spMkLst>
-            <pc:docMk/>
-            <pc:sldMk cId="287944165" sldId="326"/>
-            <ac:spMk id="4" creationId="{B7BF482B-07BF-EBBE-0143-55066F0FA7AB}"/>
-          </ac:spMkLst>
-        </pc:spChg>
-      </pc:sldChg>
-      <pc:sldChg chg="addSp delSp modSp new mod">
-        <pc:chgData name="杉村　麻記子" userId="7b6cb1e1-ca39-4bf7-a670-9ae758fae17a" providerId="ADAL" clId="{67970DCB-519A-4635-A8CB-5DD653ABF138}" dt="2025-10-03T07:47:21.627" v="386" actId="3626"/>
-        <pc:sldMkLst>
-          <pc:docMk/>
-          <pc:sldMk cId="2398358988" sldId="341"/>
-        </pc:sldMkLst>
-        <pc:spChg chg="mod">
-          <ac:chgData name="杉村　麻記子" userId="7b6cb1e1-ca39-4bf7-a670-9ae758fae17a" providerId="ADAL" clId="{67970DCB-519A-4635-A8CB-5DD653ABF138}" dt="2025-10-03T07:06:23.348" v="160" actId="20577"/>
-          <ac:spMkLst>
-            <pc:docMk/>
-            <pc:sldMk cId="2398358988" sldId="341"/>
-            <ac:spMk id="3" creationId="{D1011B48-B052-E9D2-8267-411A5CD46A04}"/>
-          </ac:spMkLst>
-        </pc:spChg>
-        <pc:spChg chg="add mod">
-          <ac:chgData name="杉村　麻記子" userId="7b6cb1e1-ca39-4bf7-a670-9ae758fae17a" providerId="ADAL" clId="{67970DCB-519A-4635-A8CB-5DD653ABF138}" dt="2025-10-03T07:07:58.288" v="204" actId="113"/>
-          <ac:spMkLst>
-            <pc:docMk/>
-            <pc:sldMk cId="2398358988" sldId="341"/>
-            <ac:spMk id="17" creationId="{0DBB36B9-921A-FC27-348A-19BA2026CAAB}"/>
-          </ac:spMkLst>
-        </pc:spChg>
-        <pc:picChg chg="add mod">
-          <ac:chgData name="杉村　麻記子" userId="7b6cb1e1-ca39-4bf7-a670-9ae758fae17a" providerId="ADAL" clId="{67970DCB-519A-4635-A8CB-5DD653ABF138}" dt="2025-10-03T07:47:21.627" v="386" actId="3626"/>
-          <ac:picMkLst>
-            <pc:docMk/>
-            <pc:sldMk cId="2398358988" sldId="341"/>
-            <ac:picMk id="4" creationId="{C7BFFC80-A77E-A68C-D106-D9DA902C055C}"/>
-          </ac:picMkLst>
-        </pc:picChg>
-        <pc:picChg chg="add mod">
-          <ac:chgData name="杉村　麻記子" userId="7b6cb1e1-ca39-4bf7-a670-9ae758fae17a" providerId="ADAL" clId="{67970DCB-519A-4635-A8CB-5DD653ABF138}" dt="2025-10-03T07:06:58.863" v="177" actId="1076"/>
-          <ac:picMkLst>
-            <pc:docMk/>
-            <pc:sldMk cId="2398358988" sldId="341"/>
-            <ac:picMk id="5" creationId="{0CEDB5D8-C612-17A6-50AC-E73030DBEF27}"/>
-          </ac:picMkLst>
-        </pc:picChg>
-        <pc:picChg chg="add mod">
-          <ac:chgData name="杉村　麻記子" userId="7b6cb1e1-ca39-4bf7-a670-9ae758fae17a" providerId="ADAL" clId="{67970DCB-519A-4635-A8CB-5DD653ABF138}" dt="2025-10-03T07:07:01.304" v="178" actId="1076"/>
-          <ac:picMkLst>
-            <pc:docMk/>
-            <pc:sldMk cId="2398358988" sldId="341"/>
-            <ac:picMk id="6" creationId="{4D45F399-E19B-737B-865A-9214378E4312}"/>
-          </ac:picMkLst>
-        </pc:picChg>
-        <pc:picChg chg="add mod">
-          <ac:chgData name="杉村　麻記子" userId="7b6cb1e1-ca39-4bf7-a670-9ae758fae17a" providerId="ADAL" clId="{67970DCB-519A-4635-A8CB-5DD653ABF138}" dt="2025-10-03T07:06:52.849" v="174" actId="1076"/>
-          <ac:picMkLst>
-            <pc:docMk/>
-            <pc:sldMk cId="2398358988" sldId="341"/>
-            <ac:picMk id="8" creationId="{F41F6C8F-86E2-1785-B82D-88DEAA941C1A}"/>
-          </ac:picMkLst>
-        </pc:picChg>
-        <pc:picChg chg="add mod">
-          <ac:chgData name="杉村　麻記子" userId="7b6cb1e1-ca39-4bf7-a670-9ae758fae17a" providerId="ADAL" clId="{67970DCB-519A-4635-A8CB-5DD653ABF138}" dt="2025-10-03T07:06:55.767" v="176" actId="14100"/>
-          <ac:picMkLst>
-            <pc:docMk/>
-            <pc:sldMk cId="2398358988" sldId="341"/>
-            <ac:picMk id="9" creationId="{84DFE333-7961-B5F8-1FD3-B7C38A925CDB}"/>
-          </ac:picMkLst>
-        </pc:picChg>
       </pc:sldChg>
     </pc:docChg>
   </pc:docChgLst>
@@ -300,9 +229,9 @@
             </a:lvl1pPr>
           </a:lstStyle>
           <a:p>
-            <a:fld id="{0C5BB469-E51E-4C58-A21C-1B1609F21C19}" type="datetimeFigureOut">
+            <a:fld id="{111B3B83-EABC-4039-9F7A-EC4B788C1C40}" type="datetimeFigureOut">
               <a:rPr kumimoji="1" lang="ja-JP" altLang="en-US" smtClean="0"/>
-              <a:t>2025/10/5</a:t>
+              <a:t>2025/10/7</a:t>
             </a:fld>
             <a:endParaRPr kumimoji="1" lang="ja-JP" altLang="en-US"/>
           </a:p>
@@ -490,7 +419,7 @@
             </a:lvl1pPr>
           </a:lstStyle>
           <a:p>
-            <a:fld id="{5D41A71E-2855-44A8-BCA5-F5A565FDDEF4}" type="slidenum">
+            <a:fld id="{5138D139-BD1B-4B66-BB08-DB0DB6B95EC5}" type="slidenum">
               <a:rPr kumimoji="1" lang="ja-JP" altLang="en-US" smtClean="0"/>
               <a:t>‹#›</a:t>
             </a:fld>
@@ -501,7 +430,7 @@
     </p:spTree>
     <p:extLst>
       <p:ext uri="{BB962C8B-B14F-4D97-AF65-F5344CB8AC3E}">
-        <p14:creationId xmlns:p14="http://schemas.microsoft.com/office/powerpoint/2010/main" val="2392449556"/>
+        <p14:creationId xmlns:p14="http://schemas.microsoft.com/office/powerpoint/2010/main" val="1132814674"/>
       </p:ext>
     </p:extLst>
   </p:cSld>
@@ -603,442 +532,6 @@
 
 <file path=ppt/slideLayouts/slideLayout1.xml><?xml version="1.0" encoding="utf-8"?>
 <p:sldLayout xmlns:a="http://schemas.openxmlformats.org/drawingml/2006/main" xmlns:r="http://schemas.openxmlformats.org/officeDocument/2006/relationships" xmlns:p="http://schemas.openxmlformats.org/presentationml/2006/main" preserve="1" userDrawn="1">
-  <p:cSld name="表紙（White）">
-    <p:bg>
-      <p:bgPr>
-        <a:blipFill dpi="0" rotWithShape="1">
-          <a:blip r:embed="rId2">
-            <a:lum/>
-          </a:blip>
-          <a:srcRect/>
-          <a:stretch>
-            <a:fillRect/>
-          </a:stretch>
-        </a:blipFill>
-        <a:effectLst/>
-      </p:bgPr>
-    </p:bg>
-    <p:spTree>
-      <p:nvGrpSpPr>
-        <p:cNvPr id="1" name=""/>
-        <p:cNvGrpSpPr/>
-        <p:nvPr/>
-      </p:nvGrpSpPr>
-      <p:grpSpPr>
-        <a:xfrm>
-          <a:off x="0" y="0"/>
-          <a:ext cx="0" cy="0"/>
-          <a:chOff x="0" y="0"/>
-          <a:chExt cx="0" cy="0"/>
-        </a:xfrm>
-      </p:grpSpPr>
-      <p:sp>
-        <p:nvSpPr>
-          <p:cNvPr id="2" name="Title 1">
-            <a:extLst>
-              <a:ext uri="{FF2B5EF4-FFF2-40B4-BE49-F238E27FC236}">
-                <a16:creationId xmlns:a16="http://schemas.microsoft.com/office/drawing/2014/main" id="{70F91195-F120-BCB2-5EE3-723E70C1FCC0}"/>
-              </a:ext>
-            </a:extLst>
-          </p:cNvPr>
-          <p:cNvSpPr>
-            <a:spLocks noGrp="1"/>
-          </p:cNvSpPr>
-          <p:nvPr>
-            <p:ph type="ctrTitle"/>
-          </p:nvPr>
-        </p:nvSpPr>
-        <p:spPr>
-          <a:xfrm>
-            <a:off x="814282" y="1989088"/>
-            <a:ext cx="10563436" cy="1371445"/>
-          </a:xfrm>
-          <a:prstGeom prst="rect">
-            <a:avLst/>
-          </a:prstGeom>
-        </p:spPr>
-        <p:txBody>
-          <a:bodyPr lIns="0" tIns="0" rIns="0" bIns="0" anchor="b">
-            <a:normAutofit/>
-          </a:bodyPr>
-          <a:lstStyle>
-            <a:lvl1pPr algn="l">
-              <a:defRPr sz="3600" b="1" i="0">
-                <a:solidFill>
-                  <a:srgbClr val="013C85"/>
-                </a:solidFill>
-                <a:latin typeface="Yu Gothic" panose="020B0400000000000000" pitchFamily="34" charset="-128"/>
-                <a:ea typeface="Yu Gothic" panose="020B0400000000000000" pitchFamily="34" charset="-128"/>
-              </a:defRPr>
-            </a:lvl1pPr>
-          </a:lstStyle>
-          <a:p>
-            <a:r>
-              <a:rPr lang="ja-JP" altLang="en-US"/>
-              <a:t>マスター タイトルの書式設定</a:t>
-            </a:r>
-            <a:endParaRPr lang="en-US" dirty="0"/>
-          </a:p>
-        </p:txBody>
-      </p:sp>
-      <p:sp>
-        <p:nvSpPr>
-          <p:cNvPr id="4" name="テキスト プレースホルダー 12">
-            <a:extLst>
-              <a:ext uri="{FF2B5EF4-FFF2-40B4-BE49-F238E27FC236}">
-                <a16:creationId xmlns:a16="http://schemas.microsoft.com/office/drawing/2014/main" id="{62214ACD-D9BE-40F6-D231-9138B52159B5}"/>
-              </a:ext>
-            </a:extLst>
-          </p:cNvPr>
-          <p:cNvSpPr>
-            <a:spLocks noGrp="1"/>
-          </p:cNvSpPr>
-          <p:nvPr>
-            <p:ph type="body" sz="quarter" idx="13"/>
-          </p:nvPr>
-        </p:nvSpPr>
-        <p:spPr>
-          <a:xfrm>
-            <a:off x="814282" y="5470206"/>
-            <a:ext cx="10563436" cy="360000"/>
-          </a:xfrm>
-          <a:prstGeom prst="rect">
-            <a:avLst/>
-          </a:prstGeom>
-        </p:spPr>
-        <p:txBody>
-          <a:bodyPr lIns="0" tIns="0" rIns="0" bIns="0">
-            <a:noAutofit/>
-          </a:bodyPr>
-          <a:lstStyle>
-            <a:lvl1pPr marL="0" indent="0">
-              <a:buNone/>
-              <a:defRPr sz="2400" b="0" i="0">
-                <a:solidFill>
-                  <a:srgbClr val="013C85"/>
-                </a:solidFill>
-                <a:latin typeface="Yu Gothic Medium" panose="020B0400000000000000" pitchFamily="34" charset="-128"/>
-                <a:ea typeface="Yu Gothic Medium" panose="020B0400000000000000" pitchFamily="34" charset="-128"/>
-              </a:defRPr>
-            </a:lvl1pPr>
-          </a:lstStyle>
-          <a:p>
-            <a:pPr lvl="0"/>
-            <a:r>
-              <a:rPr kumimoji="1" lang="ja-JP" altLang="en-US"/>
-              <a:t>マスター テキストの書式設定</a:t>
-            </a:r>
-          </a:p>
-        </p:txBody>
-      </p:sp>
-      <p:sp>
-        <p:nvSpPr>
-          <p:cNvPr id="5" name="テキスト プレースホルダー 12">
-            <a:extLst>
-              <a:ext uri="{FF2B5EF4-FFF2-40B4-BE49-F238E27FC236}">
-                <a16:creationId xmlns:a16="http://schemas.microsoft.com/office/drawing/2014/main" id="{8FC9C3C0-2F9D-131F-910E-8008929D8480}"/>
-              </a:ext>
-            </a:extLst>
-          </p:cNvPr>
-          <p:cNvSpPr>
-            <a:spLocks noGrp="1"/>
-          </p:cNvSpPr>
-          <p:nvPr>
-            <p:ph type="body" sz="quarter" idx="14"/>
-          </p:nvPr>
-        </p:nvSpPr>
-        <p:spPr>
-          <a:xfrm>
-            <a:off x="814282" y="5930984"/>
-            <a:ext cx="10563436" cy="360000"/>
-          </a:xfrm>
-          <a:prstGeom prst="rect">
-            <a:avLst/>
-          </a:prstGeom>
-        </p:spPr>
-        <p:txBody>
-          <a:bodyPr lIns="0" tIns="0" rIns="0" bIns="0">
-            <a:noAutofit/>
-          </a:bodyPr>
-          <a:lstStyle>
-            <a:lvl1pPr marL="0" indent="0">
-              <a:buNone/>
-              <a:defRPr sz="2400" b="0" i="0">
-                <a:solidFill>
-                  <a:srgbClr val="013C85"/>
-                </a:solidFill>
-                <a:latin typeface="Yu Gothic Medium" panose="020B0400000000000000" pitchFamily="34" charset="-128"/>
-                <a:ea typeface="Yu Gothic Medium" panose="020B0400000000000000" pitchFamily="34" charset="-128"/>
-              </a:defRPr>
-            </a:lvl1pPr>
-          </a:lstStyle>
-          <a:p>
-            <a:pPr lvl="0"/>
-            <a:r>
-              <a:rPr kumimoji="1" lang="ja-JP" altLang="en-US"/>
-              <a:t>マスター テキストの書式設定</a:t>
-            </a:r>
-          </a:p>
-        </p:txBody>
-      </p:sp>
-      <p:sp>
-        <p:nvSpPr>
-          <p:cNvPr id="6" name="テキスト プレースホルダー 12">
-            <a:extLst>
-              <a:ext uri="{FF2B5EF4-FFF2-40B4-BE49-F238E27FC236}">
-                <a16:creationId xmlns:a16="http://schemas.microsoft.com/office/drawing/2014/main" id="{6B053CD4-F3BD-5F69-E59C-A597A09B6F56}"/>
-              </a:ext>
-            </a:extLst>
-          </p:cNvPr>
-          <p:cNvSpPr>
-            <a:spLocks noGrp="1"/>
-          </p:cNvSpPr>
-          <p:nvPr>
-            <p:ph type="body" sz="quarter" idx="15"/>
-          </p:nvPr>
-        </p:nvSpPr>
-        <p:spPr>
-          <a:xfrm>
-            <a:off x="814282" y="3453206"/>
-            <a:ext cx="10563436" cy="947344"/>
-          </a:xfrm>
-          <a:prstGeom prst="rect">
-            <a:avLst/>
-          </a:prstGeom>
-        </p:spPr>
-        <p:txBody>
-          <a:bodyPr lIns="0" tIns="0" rIns="0" bIns="0">
-            <a:noAutofit/>
-          </a:bodyPr>
-          <a:lstStyle>
-            <a:lvl1pPr marL="0" indent="0">
-              <a:buNone/>
-              <a:defRPr sz="2400" b="0" i="0">
-                <a:solidFill>
-                  <a:srgbClr val="013C85"/>
-                </a:solidFill>
-                <a:latin typeface="Yu Gothic Medium" panose="020B0400000000000000" pitchFamily="34" charset="-128"/>
-                <a:ea typeface="Yu Gothic Medium" panose="020B0400000000000000" pitchFamily="34" charset="-128"/>
-              </a:defRPr>
-            </a:lvl1pPr>
-          </a:lstStyle>
-          <a:p>
-            <a:pPr lvl="0"/>
-            <a:r>
-              <a:rPr kumimoji="1" lang="ja-JP" altLang="en-US"/>
-              <a:t>マスター テキストの書式設定</a:t>
-            </a:r>
-          </a:p>
-        </p:txBody>
-      </p:sp>
-      <p:sp>
-        <p:nvSpPr>
-          <p:cNvPr id="9" name="テキスト プレースホルダー 12">
-            <a:extLst>
-              <a:ext uri="{FF2B5EF4-FFF2-40B4-BE49-F238E27FC236}">
-                <a16:creationId xmlns:a16="http://schemas.microsoft.com/office/drawing/2014/main" id="{92E9DB0B-9077-D203-7FE6-5988DC6DECE7}"/>
-              </a:ext>
-            </a:extLst>
-          </p:cNvPr>
-          <p:cNvSpPr>
-            <a:spLocks noGrp="1"/>
-          </p:cNvSpPr>
-          <p:nvPr>
-            <p:ph type="body" sz="quarter" idx="19"/>
-          </p:nvPr>
-        </p:nvSpPr>
-        <p:spPr>
-          <a:xfrm>
-            <a:off x="814282" y="5021958"/>
-            <a:ext cx="10563436" cy="360000"/>
-          </a:xfrm>
-          <a:prstGeom prst="rect">
-            <a:avLst/>
-          </a:prstGeom>
-        </p:spPr>
-        <p:txBody>
-          <a:bodyPr lIns="0" tIns="0" rIns="0" bIns="0">
-            <a:noAutofit/>
-          </a:bodyPr>
-          <a:lstStyle>
-            <a:lvl1pPr marL="0" indent="0">
-              <a:buNone/>
-              <a:defRPr sz="2400" b="0" i="0">
-                <a:solidFill>
-                  <a:srgbClr val="013C85"/>
-                </a:solidFill>
-                <a:latin typeface="Yu Gothic Medium" panose="020B0400000000000000" pitchFamily="34" charset="-128"/>
-                <a:ea typeface="Yu Gothic Medium" panose="020B0400000000000000" pitchFamily="34" charset="-128"/>
-              </a:defRPr>
-            </a:lvl1pPr>
-          </a:lstStyle>
-          <a:p>
-            <a:pPr lvl="0"/>
-            <a:r>
-              <a:rPr kumimoji="1" lang="ja-JP" altLang="en-US"/>
-              <a:t>マスター テキストの書式設定</a:t>
-            </a:r>
-          </a:p>
-        </p:txBody>
-      </p:sp>
-      <p:sp>
-        <p:nvSpPr>
-          <p:cNvPr id="3" name="テキスト プレースホルダー 12">
-            <a:extLst>
-              <a:ext uri="{FF2B5EF4-FFF2-40B4-BE49-F238E27FC236}">
-                <a16:creationId xmlns:a16="http://schemas.microsoft.com/office/drawing/2014/main" id="{EE60B748-7DA5-28DA-6FDB-CC4794F43AE4}"/>
-              </a:ext>
-            </a:extLst>
-          </p:cNvPr>
-          <p:cNvSpPr>
-            <a:spLocks noGrp="1"/>
-          </p:cNvSpPr>
-          <p:nvPr>
-            <p:ph type="body" sz="quarter" idx="17"/>
-          </p:nvPr>
-        </p:nvSpPr>
-        <p:spPr>
-          <a:xfrm>
-            <a:off x="814282" y="561890"/>
-            <a:ext cx="8640000" cy="432000"/>
-          </a:xfrm>
-          <a:prstGeom prst="rect">
-            <a:avLst/>
-          </a:prstGeom>
-        </p:spPr>
-        <p:txBody>
-          <a:bodyPr lIns="0" tIns="0" rIns="0" bIns="0">
-            <a:noAutofit/>
-          </a:bodyPr>
-          <a:lstStyle>
-            <a:lvl1pPr marL="0" indent="0">
-              <a:buNone/>
-              <a:defRPr sz="2400" b="1" i="0">
-                <a:solidFill>
-                  <a:srgbClr val="013C85"/>
-                </a:solidFill>
-                <a:latin typeface="Yu Gothic Medium" panose="020B0400000000000000" pitchFamily="34" charset="-128"/>
-                <a:ea typeface="Yu Gothic Medium" panose="020B0400000000000000" pitchFamily="34" charset="-128"/>
-              </a:defRPr>
-            </a:lvl1pPr>
-          </a:lstStyle>
-          <a:p>
-            <a:pPr lvl="0"/>
-            <a:r>
-              <a:rPr kumimoji="1" lang="ja-JP" altLang="en-US" dirty="0"/>
-              <a:t>マスター テキストの書式設定</a:t>
-            </a:r>
-          </a:p>
-        </p:txBody>
-      </p:sp>
-    </p:spTree>
-    <p:extLst>
-      <p:ext uri="{BB962C8B-B14F-4D97-AF65-F5344CB8AC3E}">
-        <p14:creationId xmlns:p14="http://schemas.microsoft.com/office/powerpoint/2010/main" val="182399948"/>
-      </p:ext>
-    </p:extLst>
-  </p:cSld>
-  <p:clrMapOvr>
-    <a:masterClrMapping/>
-  </p:clrMapOvr>
-  <p:extLst>
-    <p:ext uri="{DCECCB84-F9BA-43D5-87BE-67443E8EF086}">
-      <p15:sldGuideLst xmlns:p15="http://schemas.microsoft.com/office/powerpoint/2012/main"/>
-    </p:ext>
-  </p:extLst>
-</p:sldLayout>
-</file>
-
-<file path=ppt/slideLayouts/slideLayout10.xml><?xml version="1.0" encoding="utf-8"?>
-<p:sldLayout xmlns:a="http://schemas.openxmlformats.org/drawingml/2006/main" xmlns:r="http://schemas.openxmlformats.org/officeDocument/2006/relationships" xmlns:p="http://schemas.openxmlformats.org/presentationml/2006/main" preserve="1" userDrawn="1">
-  <p:cSld name="裏表紙（White）">
-    <p:bg>
-      <p:bgPr>
-        <a:blipFill dpi="0" rotWithShape="1">
-          <a:blip r:embed="rId2">
-            <a:lum/>
-          </a:blip>
-          <a:srcRect/>
-          <a:stretch>
-            <a:fillRect/>
-          </a:stretch>
-        </a:blipFill>
-        <a:effectLst/>
-      </p:bgPr>
-    </p:bg>
-    <p:spTree>
-      <p:nvGrpSpPr>
-        <p:cNvPr id="1" name=""/>
-        <p:cNvGrpSpPr/>
-        <p:nvPr/>
-      </p:nvGrpSpPr>
-      <p:grpSpPr>
-        <a:xfrm>
-          <a:off x="0" y="0"/>
-          <a:ext cx="0" cy="0"/>
-          <a:chOff x="0" y="0"/>
-          <a:chExt cx="0" cy="0"/>
-        </a:xfrm>
-      </p:grpSpPr>
-    </p:spTree>
-    <p:extLst>
-      <p:ext uri="{BB962C8B-B14F-4D97-AF65-F5344CB8AC3E}">
-        <p14:creationId xmlns:p14="http://schemas.microsoft.com/office/powerpoint/2010/main" val="3430363081"/>
-      </p:ext>
-    </p:extLst>
-  </p:cSld>
-  <p:clrMapOvr>
-    <a:masterClrMapping/>
-  </p:clrMapOvr>
-</p:sldLayout>
-</file>
-
-<file path=ppt/slideLayouts/slideLayout11.xml><?xml version="1.0" encoding="utf-8"?>
-<p:sldLayout xmlns:a="http://schemas.openxmlformats.org/drawingml/2006/main" xmlns:r="http://schemas.openxmlformats.org/officeDocument/2006/relationships" xmlns:p="http://schemas.openxmlformats.org/presentationml/2006/main" preserve="1" userDrawn="1">
-  <p:cSld name="裏表紙（BrandPromise）">
-    <p:bg>
-      <p:bgPr>
-        <a:blipFill dpi="0" rotWithShape="1">
-          <a:blip r:embed="rId2">
-            <a:lum/>
-          </a:blip>
-          <a:srcRect/>
-          <a:stretch>
-            <a:fillRect/>
-          </a:stretch>
-        </a:blipFill>
-        <a:effectLst/>
-      </p:bgPr>
-    </p:bg>
-    <p:spTree>
-      <p:nvGrpSpPr>
-        <p:cNvPr id="1" name=""/>
-        <p:cNvGrpSpPr/>
-        <p:nvPr/>
-      </p:nvGrpSpPr>
-      <p:grpSpPr>
-        <a:xfrm>
-          <a:off x="0" y="0"/>
-          <a:ext cx="0" cy="0"/>
-          <a:chOff x="0" y="0"/>
-          <a:chExt cx="0" cy="0"/>
-        </a:xfrm>
-      </p:grpSpPr>
-    </p:spTree>
-    <p:extLst>
-      <p:ext uri="{BB962C8B-B14F-4D97-AF65-F5344CB8AC3E}">
-        <p14:creationId xmlns:p14="http://schemas.microsoft.com/office/powerpoint/2010/main" val="3692022276"/>
-      </p:ext>
-    </p:extLst>
-  </p:cSld>
-  <p:clrMapOvr>
-    <a:masterClrMapping/>
-  </p:clrMapOvr>
-</p:sldLayout>
-</file>
-
-<file path=ppt/slideLayouts/slideLayout2.xml><?xml version="1.0" encoding="utf-8"?>
-<p:sldLayout xmlns:a="http://schemas.openxmlformats.org/drawingml/2006/main" xmlns:r="http://schemas.openxmlformats.org/officeDocument/2006/relationships" xmlns:p="http://schemas.openxmlformats.org/presentationml/2006/main" preserve="1" userDrawn="1">
   <p:cSld name="表紙（BrandPromise）">
     <p:bg>
       <p:bgPr>
@@ -1101,7 +594,7 @@
             <a:lvl1pPr algn="l">
               <a:defRPr sz="3600" b="1" i="0" baseline="0">
                 <a:solidFill>
-                  <a:schemeClr val="bg1"/>
+                  <a:schemeClr val="bg2"/>
                 </a:solidFill>
                 <a:latin typeface="游ゴシック" panose="020B0400000000000000" pitchFamily="50" charset="-128"/>
                 <a:ea typeface="游ゴシック" panose="020B0400000000000000" pitchFamily="50" charset="-128"/>
@@ -1110,7 +603,7 @@
           </a:lstStyle>
           <a:p>
             <a:r>
-              <a:rPr lang="ja-JP" altLang="en-US"/>
+              <a:rPr lang="ja-JP" altLang="en-US" dirty="0"/>
               <a:t>マスター タイトルの書式設定</a:t>
             </a:r>
             <a:endParaRPr lang="en-US" dirty="0"/>
@@ -1149,19 +642,29 @@
           <a:lstStyle>
             <a:lvl1pPr marL="0" indent="0">
               <a:buNone/>
-              <a:defRPr sz="2400" b="0" i="0" baseline="0">
+              <a:defRPr kumimoji="1" lang="ja-JP" altLang="en-US" sz="2400" b="0" i="0" kern="1200" dirty="0">
                 <a:solidFill>
                   <a:schemeClr val="bg1"/>
                 </a:solidFill>
-                <a:latin typeface="游ゴシック" panose="020B0400000000000000" pitchFamily="50" charset="-128"/>
-                <a:ea typeface="游ゴシック" panose="020B0400000000000000" pitchFamily="50" charset="-128"/>
+                <a:latin typeface="Yu Gothic Medium" panose="020B0400000000000000" pitchFamily="34" charset="-128"/>
+                <a:ea typeface="Yu Gothic Medium" panose="020B0400000000000000" pitchFamily="34" charset="-128"/>
+                <a:cs typeface="+mn-cs"/>
               </a:defRPr>
             </a:lvl1pPr>
           </a:lstStyle>
           <a:p>
-            <a:pPr lvl="0"/>
-            <a:r>
-              <a:rPr kumimoji="1" lang="ja-JP" altLang="en-US"/>
+            <a:pPr marL="0" lvl="0" indent="0" algn="l" defTabSz="914400" rtl="0" eaLnBrk="1" latinLnBrk="0" hangingPunct="1">
+              <a:lnSpc>
+                <a:spcPct val="90000"/>
+              </a:lnSpc>
+              <a:spcBef>
+                <a:spcPts val="1000"/>
+              </a:spcBef>
+              <a:buFont typeface="Arial" panose="020B0604020202020204" pitchFamily="34" charset="0"/>
+              <a:buNone/>
+            </a:pPr>
+            <a:r>
+              <a:rPr kumimoji="1" lang="ja-JP" altLang="en-US" dirty="0"/>
               <a:t>マスター テキストの書式設定</a:t>
             </a:r>
           </a:p>
@@ -1199,19 +702,29 @@
           <a:lstStyle>
             <a:lvl1pPr marL="0" indent="0">
               <a:buNone/>
-              <a:defRPr sz="2400" b="0" i="0" baseline="0">
+              <a:defRPr kumimoji="1" lang="ja-JP" altLang="en-US" sz="2400" b="0" i="0" kern="1200" dirty="0">
                 <a:solidFill>
                   <a:schemeClr val="bg1"/>
                 </a:solidFill>
-                <a:latin typeface="游ゴシック" panose="020B0400000000000000" pitchFamily="50" charset="-128"/>
-                <a:ea typeface="游ゴシック" panose="020B0400000000000000" pitchFamily="50" charset="-128"/>
+                <a:latin typeface="Yu Gothic Medium" panose="020B0400000000000000" pitchFamily="34" charset="-128"/>
+                <a:ea typeface="Yu Gothic Medium" panose="020B0400000000000000" pitchFamily="34" charset="-128"/>
+                <a:cs typeface="+mn-cs"/>
               </a:defRPr>
             </a:lvl1pPr>
           </a:lstStyle>
           <a:p>
-            <a:pPr lvl="0"/>
-            <a:r>
-              <a:rPr kumimoji="1" lang="ja-JP" altLang="en-US"/>
+            <a:pPr marL="0" lvl="0" indent="0" algn="l" defTabSz="914400" rtl="0" eaLnBrk="1" latinLnBrk="0" hangingPunct="1">
+              <a:lnSpc>
+                <a:spcPct val="90000"/>
+              </a:lnSpc>
+              <a:spcBef>
+                <a:spcPts val="1000"/>
+              </a:spcBef>
+              <a:buFont typeface="Arial" panose="020B0604020202020204" pitchFamily="34" charset="0"/>
+              <a:buNone/>
+            </a:pPr>
+            <a:r>
+              <a:rPr kumimoji="1" lang="ja-JP" altLang="en-US" dirty="0"/>
               <a:t>マスター テキストの書式設定</a:t>
             </a:r>
           </a:p>
@@ -1251,9 +764,9 @@
               <a:buNone/>
               <a:defRPr sz="2400" b="0" i="0" baseline="0">
                 <a:solidFill>
-                  <a:schemeClr val="bg1"/>
-                </a:solidFill>
-                <a:latin typeface="游ゴシック" panose="020B0400000000000000" pitchFamily="50" charset="-128"/>
+                  <a:schemeClr val="bg2"/>
+                </a:solidFill>
+                <a:latin typeface="+mj-lt"/>
                 <a:ea typeface="游ゴシック" panose="020B0400000000000000" pitchFamily="50" charset="-128"/>
               </a:defRPr>
             </a:lvl1pPr>
@@ -1261,7 +774,7 @@
           <a:p>
             <a:pPr lvl="0"/>
             <a:r>
-              <a:rPr kumimoji="1" lang="ja-JP" altLang="en-US"/>
+              <a:rPr kumimoji="1" lang="ja-JP" altLang="en-US" dirty="0"/>
               <a:t>マスター テキストの書式設定</a:t>
             </a:r>
           </a:p>
@@ -1299,19 +812,29 @@
           <a:lstStyle>
             <a:lvl1pPr marL="0" indent="0">
               <a:buNone/>
-              <a:defRPr sz="2400" b="0" i="0" baseline="0">
+              <a:defRPr kumimoji="1" lang="ja-JP" altLang="en-US" sz="2400" b="0" i="0" kern="1200" dirty="0">
                 <a:solidFill>
                   <a:schemeClr val="bg1"/>
                 </a:solidFill>
-                <a:latin typeface="游ゴシック" panose="020B0400000000000000" pitchFamily="50" charset="-128"/>
-                <a:ea typeface="游ゴシック" panose="020B0400000000000000" pitchFamily="50" charset="-128"/>
+                <a:latin typeface="Yu Gothic Medium" panose="020B0400000000000000" pitchFamily="34" charset="-128"/>
+                <a:ea typeface="Yu Gothic Medium" panose="020B0400000000000000" pitchFamily="34" charset="-128"/>
+                <a:cs typeface="+mn-cs"/>
               </a:defRPr>
             </a:lvl1pPr>
           </a:lstStyle>
           <a:p>
-            <a:pPr lvl="0"/>
-            <a:r>
-              <a:rPr kumimoji="1" lang="ja-JP" altLang="en-US"/>
+            <a:pPr marL="0" lvl="0" indent="0" algn="l" defTabSz="914400" rtl="0" eaLnBrk="1" latinLnBrk="0" hangingPunct="1">
+              <a:lnSpc>
+                <a:spcPct val="90000"/>
+              </a:lnSpc>
+              <a:spcBef>
+                <a:spcPts val="1000"/>
+              </a:spcBef>
+              <a:buFont typeface="Arial" panose="020B0604020202020204" pitchFamily="34" charset="0"/>
+              <a:buNone/>
+            </a:pPr>
+            <a:r>
+              <a:rPr kumimoji="1" lang="ja-JP" altLang="en-US" dirty="0"/>
               <a:t>マスター テキストの書式設定</a:t>
             </a:r>
           </a:p>
@@ -1319,10 +842,10 @@
       </p:sp>
       <p:sp>
         <p:nvSpPr>
-          <p:cNvPr id="9" name="テキスト プレースホルダー 12">
+          <p:cNvPr id="3" name="テキスト プレースホルダー 12">
             <a:extLst>
               <a:ext uri="{FF2B5EF4-FFF2-40B4-BE49-F238E27FC236}">
-                <a16:creationId xmlns:a16="http://schemas.microsoft.com/office/drawing/2014/main" id="{DE944634-006B-0CC4-1D48-DFAE926910BB}"/>
+                <a16:creationId xmlns:a16="http://schemas.microsoft.com/office/drawing/2014/main" id="{EC5E5A87-055B-CC48-B155-1E58CEE1FD6B}"/>
               </a:ext>
             </a:extLst>
           </p:cNvPr>
@@ -1330,13 +853,13 @@
             <a:spLocks noGrp="1"/>
           </p:cNvSpPr>
           <p:nvPr>
-            <p:ph type="body" sz="quarter" idx="18"/>
+            <p:ph type="body" sz="quarter" idx="17"/>
           </p:nvPr>
         </p:nvSpPr>
         <p:spPr>
           <a:xfrm>
-            <a:off x="5205306" y="561891"/>
-            <a:ext cx="4248976" cy="360000"/>
+            <a:off x="5205306" y="561890"/>
+            <a:ext cx="4248976" cy="432000"/>
           </a:xfrm>
           <a:prstGeom prst="rect">
             <a:avLst/>
@@ -1349,19 +872,29 @@
           <a:lstStyle>
             <a:lvl1pPr marL="0" indent="0">
               <a:buNone/>
-              <a:defRPr sz="2400" b="1" i="0" baseline="0">
+              <a:defRPr kumimoji="1" lang="ja-JP" altLang="en-US" sz="2400" b="1" i="0" kern="1200" dirty="0">
                 <a:solidFill>
                   <a:schemeClr val="bg1"/>
                 </a:solidFill>
-                <a:latin typeface="(日本語用のフォントを使用)"/>
-                <a:ea typeface="游ゴシック" panose="020B0400000000000000" pitchFamily="50" charset="-128"/>
+                <a:latin typeface="Yu Gothic Medium" panose="020B0400000000000000" pitchFamily="34" charset="-128"/>
+                <a:ea typeface="Yu Gothic Medium" panose="020B0400000000000000" pitchFamily="34" charset="-128"/>
+                <a:cs typeface="+mn-cs"/>
               </a:defRPr>
             </a:lvl1pPr>
           </a:lstStyle>
           <a:p>
-            <a:pPr lvl="0"/>
-            <a:r>
-              <a:rPr kumimoji="1" lang="ja-JP" altLang="en-US"/>
+            <a:pPr marL="0" lvl="0" indent="0" algn="l" defTabSz="914400" rtl="0" eaLnBrk="1" latinLnBrk="0" hangingPunct="1">
+              <a:lnSpc>
+                <a:spcPct val="90000"/>
+              </a:lnSpc>
+              <a:spcBef>
+                <a:spcPts val="1000"/>
+              </a:spcBef>
+              <a:buFont typeface="Arial" panose="020B0604020202020204" pitchFamily="34" charset="0"/>
+              <a:buNone/>
+            </a:pPr>
+            <a:r>
+              <a:rPr kumimoji="1" lang="ja-JP" altLang="en-US" dirty="0"/>
               <a:t>マスター テキストの書式設定</a:t>
             </a:r>
           </a:p>
@@ -1370,7 +903,7 @@
     </p:spTree>
     <p:extLst>
       <p:ext uri="{BB962C8B-B14F-4D97-AF65-F5344CB8AC3E}">
-        <p14:creationId xmlns:p14="http://schemas.microsoft.com/office/powerpoint/2010/main" val="894727487"/>
+        <p14:creationId xmlns:p14="http://schemas.microsoft.com/office/powerpoint/2010/main" val="502274274"/>
       </p:ext>
     </p:extLst>
   </p:cSld>
@@ -1385,9 +918,53 @@
 </p:sldLayout>
 </file>
 
-<file path=ppt/slideLayouts/slideLayout3.xml><?xml version="1.0" encoding="utf-8"?>
+<file path=ppt/slideLayouts/slideLayout10.xml><?xml version="1.0" encoding="utf-8"?>
 <p:sldLayout xmlns:a="http://schemas.openxmlformats.org/drawingml/2006/main" xmlns:r="http://schemas.openxmlformats.org/officeDocument/2006/relationships" xmlns:p="http://schemas.openxmlformats.org/presentationml/2006/main" preserve="1" userDrawn="1">
-  <p:cSld name="目次（White）">
+  <p:cSld name="裏表紙（BrandPromise）">
+    <p:bg>
+      <p:bgPr>
+        <a:blipFill dpi="0" rotWithShape="1">
+          <a:blip r:embed="rId2">
+            <a:lum/>
+          </a:blip>
+          <a:srcRect/>
+          <a:stretch>
+            <a:fillRect/>
+          </a:stretch>
+        </a:blipFill>
+        <a:effectLst/>
+      </p:bgPr>
+    </p:bg>
+    <p:spTree>
+      <p:nvGrpSpPr>
+        <p:cNvPr id="1" name=""/>
+        <p:cNvGrpSpPr/>
+        <p:nvPr/>
+      </p:nvGrpSpPr>
+      <p:grpSpPr>
+        <a:xfrm>
+          <a:off x="0" y="0"/>
+          <a:ext cx="0" cy="0"/>
+          <a:chOff x="0" y="0"/>
+          <a:chExt cx="0" cy="0"/>
+        </a:xfrm>
+      </p:grpSpPr>
+    </p:spTree>
+    <p:extLst>
+      <p:ext uri="{BB962C8B-B14F-4D97-AF65-F5344CB8AC3E}">
+        <p14:creationId xmlns:p14="http://schemas.microsoft.com/office/powerpoint/2010/main" val="225168324"/>
+      </p:ext>
+    </p:extLst>
+  </p:cSld>
+  <p:clrMapOvr>
+    <a:masterClrMapping/>
+  </p:clrMapOvr>
+</p:sldLayout>
+</file>
+
+<file path=ppt/slideLayouts/slideLayout2.xml><?xml version="1.0" encoding="utf-8"?>
+<p:sldLayout xmlns:a="http://schemas.openxmlformats.org/drawingml/2006/main" xmlns:r="http://schemas.openxmlformats.org/officeDocument/2006/relationships" xmlns:p="http://schemas.openxmlformats.org/presentationml/2006/main" preserve="1" userDrawn="1">
+  <p:cSld name="目次（BrandPromise）1">
     <p:bg>
       <p:bgPr>
         <a:blipFill dpi="0" rotWithShape="1">
@@ -1418,10 +995,10 @@
       </p:grpSpPr>
       <p:sp>
         <p:nvSpPr>
-          <p:cNvPr id="12" name="タイトル 11">
+          <p:cNvPr id="2" name="タイトル 1">
             <a:extLst>
               <a:ext uri="{FF2B5EF4-FFF2-40B4-BE49-F238E27FC236}">
-                <a16:creationId xmlns:a16="http://schemas.microsoft.com/office/drawing/2014/main" id="{F68FA6C3-7B99-178B-B61B-6F9C354A9599}"/>
+                <a16:creationId xmlns:a16="http://schemas.microsoft.com/office/drawing/2014/main" id="{A834B65B-0338-7BEC-DB85-C77E40F3B3AE}"/>
               </a:ext>
             </a:extLst>
           </p:cNvPr>
@@ -1434,23 +1011,23 @@
         </p:nvSpPr>
         <p:spPr>
           <a:xfrm>
-            <a:off x="390525" y="347572"/>
-            <a:ext cx="9367501" cy="432000"/>
+            <a:off x="396000" y="345600"/>
+            <a:ext cx="9360000" cy="364947"/>
           </a:xfrm>
           <a:prstGeom prst="rect">
             <a:avLst/>
           </a:prstGeom>
         </p:spPr>
         <p:txBody>
-          <a:bodyPr lIns="0" tIns="0" rIns="0"/>
+          <a:bodyPr lIns="0" tIns="0" rIns="0" bIns="0"/>
           <a:lstStyle>
             <a:lvl1pPr>
-              <a:defRPr kumimoji="1" lang="ja-JP" altLang="en-US" sz="2800" b="1" i="0" kern="1200" dirty="0">
-                <a:solidFill>
-                  <a:srgbClr val="013C85"/>
-                </a:solidFill>
-                <a:latin typeface="Yu Gothic" panose="020B0400000000000000" pitchFamily="34" charset="-128"/>
-                <a:ea typeface="Yu Gothic" panose="020B0400000000000000" pitchFamily="34" charset="-128"/>
+              <a:defRPr kumimoji="1" lang="ja-JP" altLang="en-US" sz="2800" b="1" i="0" kern="1200" baseline="0" dirty="0">
+                <a:solidFill>
+                  <a:schemeClr val="bg2"/>
+                </a:solidFill>
+                <a:latin typeface="游ゴシック" panose="020B0400000000000000" pitchFamily="50" charset="-128"/>
+                <a:ea typeface="游ゴシック" panose="020B0400000000000000" pitchFamily="50" charset="-128"/>
                 <a:cs typeface="+mn-cs"/>
               </a:defRPr>
             </a:lvl1pPr>
@@ -1475,10 +1052,10 @@
       </p:sp>
       <p:sp>
         <p:nvSpPr>
-          <p:cNvPr id="4" name="Date Placeholder 3">
+          <p:cNvPr id="7" name="Date Placeholder 3">
             <a:extLst>
               <a:ext uri="{FF2B5EF4-FFF2-40B4-BE49-F238E27FC236}">
-                <a16:creationId xmlns:a16="http://schemas.microsoft.com/office/drawing/2014/main" id="{7FDA9D96-0593-35C3-1979-E826592B79F1}"/>
+                <a16:creationId xmlns:a16="http://schemas.microsoft.com/office/drawing/2014/main" id="{8AE19E5A-C399-4861-2D7D-879AA1F0C84F}"/>
               </a:ext>
             </a:extLst>
           </p:cNvPr>
@@ -1596,27 +1173,31 @@
           <a:p>
             <a:pPr algn="l"/>
             <a:r>
-              <a:rPr kumimoji="1" lang="en" altLang="ja-JP" sz="700" dirty="0">
-                <a:solidFill>
-                  <a:srgbClr val="013C85"/>
-                </a:solidFill>
+              <a:rPr kumimoji="1" lang="en" altLang="ja-JP" sz="700" baseline="0" dirty="0">
+                <a:solidFill>
+                  <a:schemeClr val="bg2"/>
+                </a:solidFill>
+                <a:latin typeface="游ゴシック" panose="020B0400000000000000" pitchFamily="50" charset="-128"/>
+                <a:ea typeface="游ゴシック" panose="020B0400000000000000" pitchFamily="50" charset="-128"/>
               </a:rPr>
               <a:t>ⓒ ITOCHU Techno-Solutions Corporation</a:t>
             </a:r>
-            <a:endParaRPr kumimoji="1" lang="ja-JP" altLang="en-US" sz="700">
+            <a:endParaRPr kumimoji="1" lang="ja-JP" altLang="en-US" sz="700" baseline="0">
               <a:solidFill>
-                <a:srgbClr val="013C85"/>
+                <a:schemeClr val="bg2"/>
               </a:solidFill>
+              <a:latin typeface="游ゴシック" panose="020B0400000000000000" pitchFamily="50" charset="-128"/>
+              <a:ea typeface="游ゴシック" panose="020B0400000000000000" pitchFamily="50" charset="-128"/>
             </a:endParaRPr>
           </a:p>
         </p:txBody>
       </p:sp>
       <p:sp>
         <p:nvSpPr>
-          <p:cNvPr id="5" name="Slide Number Placeholder 5">
+          <p:cNvPr id="8" name="Slide Number Placeholder 5">
             <a:extLst>
               <a:ext uri="{FF2B5EF4-FFF2-40B4-BE49-F238E27FC236}">
-                <a16:creationId xmlns:a16="http://schemas.microsoft.com/office/drawing/2014/main" id="{5E565B7F-EA3C-5F4C-83F4-5E84A10FF4D0}"/>
+                <a16:creationId xmlns:a16="http://schemas.microsoft.com/office/drawing/2014/main" id="{5B88EED6-B583-2F6F-A5EB-452C22B7FA9E}"/>
               </a:ext>
             </a:extLst>
           </p:cNvPr>
@@ -1733,28 +1314,32 @@
           </a:lstStyle>
           <a:p>
             <a:fld id="{F61D7DA0-AA9A-8342-BE3E-6EB34F8DE2BC}" type="slidenum">
-              <a:rPr kumimoji="1" lang="ja-JP" altLang="en-US" sz="1600" smtClean="0">
-                <a:solidFill>
-                  <a:srgbClr val="013C85"/>
-                </a:solidFill>
+              <a:rPr kumimoji="1" lang="ja-JP" altLang="en-US" sz="1600" baseline="0" smtClean="0">
+                <a:solidFill>
+                  <a:schemeClr val="bg2"/>
+                </a:solidFill>
+                <a:latin typeface="游ゴシック" panose="020B0400000000000000" pitchFamily="50" charset="-128"/>
+                <a:ea typeface="游ゴシック" panose="020B0400000000000000" pitchFamily="50" charset="-128"/>
               </a:rPr>
               <a:pPr/>
               <a:t>‹#›</a:t>
             </a:fld>
-            <a:endParaRPr kumimoji="1" lang="ja-JP" altLang="en-US" sz="1600">
+            <a:endParaRPr kumimoji="1" lang="ja-JP" altLang="en-US" sz="1600" baseline="0">
               <a:solidFill>
-                <a:srgbClr val="013C85"/>
+                <a:schemeClr val="bg2"/>
               </a:solidFill>
+              <a:latin typeface="游ゴシック" panose="020B0400000000000000" pitchFamily="50" charset="-128"/>
+              <a:ea typeface="游ゴシック" panose="020B0400000000000000" pitchFamily="50" charset="-128"/>
             </a:endParaRPr>
           </a:p>
         </p:txBody>
       </p:sp>
       <p:sp>
         <p:nvSpPr>
-          <p:cNvPr id="2" name="テキスト プレースホルダー 12">
+          <p:cNvPr id="3" name="テキスト プレースホルダー 12">
             <a:extLst>
               <a:ext uri="{FF2B5EF4-FFF2-40B4-BE49-F238E27FC236}">
-                <a16:creationId xmlns:a16="http://schemas.microsoft.com/office/drawing/2014/main" id="{F3315ADE-16E8-091A-1BE1-CE1257C6D330}"/>
+                <a16:creationId xmlns:a16="http://schemas.microsoft.com/office/drawing/2014/main" id="{BFF33CFC-0549-1543-73EC-446B3C671DD5}"/>
               </a:ext>
             </a:extLst>
           </p:cNvPr>
@@ -1762,13 +1347,13 @@
             <a:spLocks noGrp="1"/>
           </p:cNvSpPr>
           <p:nvPr>
-            <p:ph type="body" sz="quarter" idx="15" hasCustomPrompt="1"/>
+            <p:ph type="body" sz="quarter" idx="17" hasCustomPrompt="1"/>
           </p:nvPr>
         </p:nvSpPr>
         <p:spPr>
           <a:xfrm>
-            <a:off x="814282" y="1736725"/>
-            <a:ext cx="540000" cy="3125834"/>
+            <a:off x="814282" y="1736726"/>
+            <a:ext cx="468000" cy="663575"/>
           </a:xfrm>
           <a:prstGeom prst="rect">
             <a:avLst/>
@@ -1781,50 +1366,15 @@
           <a:lstStyle>
             <a:lvl1pPr marL="0" indent="0" defTabSz="479968">
               <a:buNone/>
-              <a:defRPr sz="2400" b="1" i="0">
-                <a:solidFill>
-                  <a:srgbClr val="013C85"/>
-                </a:solidFill>
-                <a:latin typeface="Yu Gothic" panose="020B0400000000000000" pitchFamily="34" charset="-128"/>
-                <a:ea typeface="Yu Gothic" panose="020B0400000000000000" pitchFamily="34" charset="-128"/>
+              <a:defRPr sz="2400" b="1" i="0" baseline="0">
+                <a:solidFill>
+                  <a:schemeClr val="bg2"/>
+                </a:solidFill>
+                <a:latin typeface="游ゴシック" panose="020B0400000000000000" pitchFamily="50" charset="-128"/>
+                <a:ea typeface="游ゴシック" panose="020B0400000000000000" pitchFamily="50" charset="-128"/>
               </a:defRPr>
             </a:lvl1pPr>
           </a:lstStyle>
-          <a:p>
-            <a:pPr lvl="0"/>
-            <a:r>
-              <a:rPr kumimoji="1" lang="en-US" altLang="ja-JP" dirty="0"/>
-              <a:t>00</a:t>
-            </a:r>
-          </a:p>
-          <a:p>
-            <a:pPr lvl="0"/>
-            <a:r>
-              <a:rPr kumimoji="1" lang="en-US" altLang="ja-JP" dirty="0"/>
-              <a:t>00</a:t>
-            </a:r>
-          </a:p>
-          <a:p>
-            <a:pPr lvl="0"/>
-            <a:r>
-              <a:rPr kumimoji="1" lang="en-US" altLang="ja-JP" dirty="0"/>
-              <a:t>00</a:t>
-            </a:r>
-          </a:p>
-          <a:p>
-            <a:pPr lvl="0"/>
-            <a:r>
-              <a:rPr kumimoji="1" lang="en-US" altLang="ja-JP" dirty="0"/>
-              <a:t>00</a:t>
-            </a:r>
-          </a:p>
-          <a:p>
-            <a:pPr lvl="0"/>
-            <a:r>
-              <a:rPr kumimoji="1" lang="en-US" altLang="ja-JP" dirty="0"/>
-              <a:t>00</a:t>
-            </a:r>
-          </a:p>
           <a:p>
             <a:pPr lvl="0"/>
             <a:r>
@@ -1836,10 +1386,10 @@
       </p:sp>
       <p:sp>
         <p:nvSpPr>
-          <p:cNvPr id="3" name="テキスト プレースホルダー 12">
+          <p:cNvPr id="5" name="テキスト プレースホルダー 12">
             <a:extLst>
               <a:ext uri="{FF2B5EF4-FFF2-40B4-BE49-F238E27FC236}">
-                <a16:creationId xmlns:a16="http://schemas.microsoft.com/office/drawing/2014/main" id="{A111D72C-386D-D961-0695-CC2D826257FF}"/>
+                <a16:creationId xmlns:a16="http://schemas.microsoft.com/office/drawing/2014/main" id="{C2D53A55-D2D1-2FC9-17CB-D037E0C36CDA}"/>
               </a:ext>
             </a:extLst>
           </p:cNvPr>
@@ -1847,13 +1397,13 @@
             <a:spLocks noGrp="1"/>
           </p:cNvSpPr>
           <p:nvPr>
-            <p:ph type="body" sz="quarter" idx="17" hasCustomPrompt="1"/>
+            <p:ph type="body" sz="quarter" idx="19" hasCustomPrompt="1"/>
           </p:nvPr>
         </p:nvSpPr>
         <p:spPr>
           <a:xfrm>
-            <a:off x="1396791" y="1736725"/>
-            <a:ext cx="7012467" cy="3125834"/>
+            <a:off x="1301001" y="1736726"/>
+            <a:ext cx="4571687" cy="663575"/>
           </a:xfrm>
           <a:prstGeom prst="rect">
             <a:avLst/>
@@ -1867,400 +1417,49 @@
             <a:lvl1pPr marL="0" indent="0" defTabSz="479968">
               <a:buFont typeface="Arial" panose="020B0604020202020204" pitchFamily="34" charset="0"/>
               <a:buNone/>
-              <a:defRPr sz="2400" b="0" i="0">
-                <a:solidFill>
-                  <a:srgbClr val="013C85"/>
+              <a:defRPr kumimoji="1" lang="en-US" altLang="ja-JP" sz="2400" b="0" i="0" kern="1200" dirty="0">
+                <a:solidFill>
+                  <a:schemeClr val="bg1"/>
                 </a:solidFill>
                 <a:latin typeface="Yu Gothic Medium" panose="020B0400000000000000" pitchFamily="34" charset="-128"/>
                 <a:ea typeface="Yu Gothic Medium" panose="020B0400000000000000" pitchFamily="34" charset="-128"/>
+                <a:cs typeface="+mn-cs"/>
               </a:defRPr>
             </a:lvl1pPr>
             <a:lvl2pPr marL="457170" indent="0">
               <a:buNone/>
-              <a:defRPr/>
+              <a:defRPr>
+                <a:solidFill>
+                  <a:schemeClr val="bg1"/>
+                </a:solidFill>
+              </a:defRPr>
             </a:lvl2pPr>
           </a:lstStyle>
           <a:p>
-            <a:pPr lvl="0"/>
+            <a:pPr marL="0" lvl="0" indent="0" algn="l" defTabSz="479968" rtl="0" eaLnBrk="1" latinLnBrk="0" hangingPunct="1">
+              <a:lnSpc>
+                <a:spcPct val="90000"/>
+              </a:lnSpc>
+              <a:spcBef>
+                <a:spcPts val="1000"/>
+              </a:spcBef>
+              <a:buFont typeface="Arial" panose="020B0604020202020204" pitchFamily="34" charset="0"/>
+              <a:buNone/>
+            </a:pPr>
             <a:r>
               <a:rPr kumimoji="1" lang="ja-JP" altLang="en-US" dirty="0"/>
               <a:t>マスター テキストの書式設定</a:t>
             </a:r>
             <a:endParaRPr kumimoji="1" lang="en-US" altLang="ja-JP" dirty="0"/>
-          </a:p>
-          <a:p>
-            <a:pPr lvl="0"/>
-            <a:r>
-              <a:rPr kumimoji="1" lang="ja-JP" altLang="en-US" dirty="0"/>
-              <a:t>マスター テキストの書式設定</a:t>
-            </a:r>
-            <a:endParaRPr kumimoji="1" lang="en-US" altLang="ja-JP" dirty="0"/>
-          </a:p>
-          <a:p>
-            <a:pPr lvl="0"/>
-            <a:r>
-              <a:rPr kumimoji="1" lang="ja-JP" altLang="en-US" dirty="0"/>
-              <a:t>マスター テキストの書式設定</a:t>
-            </a:r>
-            <a:endParaRPr kumimoji="1" lang="en-US" altLang="ja-JP" dirty="0"/>
-          </a:p>
-          <a:p>
-            <a:pPr lvl="0"/>
-            <a:r>
-              <a:rPr kumimoji="1" lang="ja-JP" altLang="en-US" dirty="0"/>
-              <a:t>マスター テキストの書式設定</a:t>
-            </a:r>
-            <a:endParaRPr kumimoji="1" lang="en-US" altLang="ja-JP" dirty="0"/>
-          </a:p>
-          <a:p>
-            <a:pPr lvl="0"/>
-            <a:r>
-              <a:rPr kumimoji="1" lang="ja-JP" altLang="en-US" dirty="0"/>
-              <a:t>マスター テキストの書式設定</a:t>
-            </a:r>
-            <a:endParaRPr kumimoji="1" lang="en-US" altLang="ja-JP" dirty="0"/>
-          </a:p>
-          <a:p>
-            <a:pPr lvl="0"/>
-            <a:r>
-              <a:rPr kumimoji="1" lang="ja-JP" altLang="en-US" dirty="0"/>
-              <a:t>マスター テキストの書式設定</a:t>
-            </a:r>
-            <a:endParaRPr kumimoji="1" lang="en-US" altLang="ja-JP" dirty="0"/>
-          </a:p>
-        </p:txBody>
-      </p:sp>
-    </p:spTree>
-    <p:extLst>
-      <p:ext uri="{BB962C8B-B14F-4D97-AF65-F5344CB8AC3E}">
-        <p14:creationId xmlns:p14="http://schemas.microsoft.com/office/powerpoint/2010/main" val="325974553"/>
-      </p:ext>
-    </p:extLst>
-  </p:cSld>
-  <p:clrMapOvr>
-    <a:masterClrMapping/>
-  </p:clrMapOvr>
-</p:sldLayout>
-</file>
-
-<file path=ppt/slideLayouts/slideLayout4.xml><?xml version="1.0" encoding="utf-8"?>
-<p:sldLayout xmlns:a="http://schemas.openxmlformats.org/drawingml/2006/main" xmlns:r="http://schemas.openxmlformats.org/officeDocument/2006/relationships" xmlns:p="http://schemas.openxmlformats.org/presentationml/2006/main" preserve="1" userDrawn="1">
-  <p:cSld name="タイトルページ（White）">
-    <p:bg>
-      <p:bgPr>
-        <a:blipFill dpi="0" rotWithShape="1">
-          <a:blip r:embed="rId2" cstate="print">
-            <a:lum/>
-            <a:extLst>
-              <a:ext uri="{28A0092B-C50C-407E-A947-70E740481C1C}">
-                <a14:useLocalDpi xmlns:a14="http://schemas.microsoft.com/office/drawing/2010/main"/>
-              </a:ext>
-            </a:extLst>
-          </a:blip>
-          <a:srcRect/>
-          <a:stretch>
-            <a:fillRect/>
-          </a:stretch>
-        </a:blipFill>
-        <a:effectLst/>
-      </p:bgPr>
-    </p:bg>
-    <p:spTree>
-      <p:nvGrpSpPr>
-        <p:cNvPr id="1" name=""/>
-        <p:cNvGrpSpPr/>
-        <p:nvPr/>
-      </p:nvGrpSpPr>
-      <p:grpSpPr>
-        <a:xfrm>
-          <a:off x="0" y="0"/>
-          <a:ext cx="0" cy="0"/>
-          <a:chOff x="0" y="0"/>
-          <a:chExt cx="0" cy="0"/>
-        </a:xfrm>
-      </p:grpSpPr>
-      <p:sp>
-        <p:nvSpPr>
-          <p:cNvPr id="10" name="Date Placeholder 3">
-            <a:extLst>
-              <a:ext uri="{FF2B5EF4-FFF2-40B4-BE49-F238E27FC236}">
-                <a16:creationId xmlns:a16="http://schemas.microsoft.com/office/drawing/2014/main" id="{00911B44-43E5-C652-2977-C75C89E671A2}"/>
-              </a:ext>
-            </a:extLst>
-          </p:cNvPr>
-          <p:cNvSpPr txBox="1">
-            <a:spLocks/>
-          </p:cNvSpPr>
-          <p:nvPr userDrawn="1"/>
-        </p:nvSpPr>
-        <p:spPr>
-          <a:xfrm>
-            <a:off x="325402" y="6394865"/>
-            <a:ext cx="2743200" cy="331932"/>
-          </a:xfrm>
-          <a:prstGeom prst="rect">
-            <a:avLst/>
-          </a:prstGeom>
-        </p:spPr>
-        <p:txBody>
-          <a:bodyPr/>
-          <a:lstStyle>
-            <a:defPPr>
-              <a:defRPr lang="en-US"/>
-            </a:defPPr>
-            <a:lvl1pPr marL="0" algn="l" defTabSz="304670" rtl="0" eaLnBrk="1" latinLnBrk="0" hangingPunct="1">
-              <a:defRPr sz="2000" b="0" i="0" kern="1200">
-                <a:solidFill>
-                  <a:srgbClr val="003D86"/>
-                </a:solidFill>
-                <a:latin typeface="Yu Gothic Medium" panose="020B0400000000000000" pitchFamily="34" charset="-128"/>
-                <a:ea typeface="Yu Gothic Medium" panose="020B0400000000000000" pitchFamily="34" charset="-128"/>
-                <a:cs typeface="+mn-cs"/>
-              </a:defRPr>
-            </a:lvl1pPr>
-            <a:lvl2pPr marL="304670" algn="l" defTabSz="304670" rtl="0" eaLnBrk="1" latinLnBrk="0" hangingPunct="1">
-              <a:defRPr sz="1200" kern="1200">
-                <a:solidFill>
-                  <a:schemeClr val="tx1"/>
-                </a:solidFill>
-                <a:latin typeface="+mn-lt"/>
-                <a:ea typeface="+mn-ea"/>
-                <a:cs typeface="+mn-cs"/>
-              </a:defRPr>
-            </a:lvl2pPr>
-            <a:lvl3pPr marL="609336" algn="l" defTabSz="304670" rtl="0" eaLnBrk="1" latinLnBrk="0" hangingPunct="1">
-              <a:defRPr sz="1200" kern="1200">
-                <a:solidFill>
-                  <a:schemeClr val="tx1"/>
-                </a:solidFill>
-                <a:latin typeface="+mn-lt"/>
-                <a:ea typeface="+mn-ea"/>
-                <a:cs typeface="+mn-cs"/>
-              </a:defRPr>
-            </a:lvl3pPr>
-            <a:lvl4pPr marL="914005" algn="l" defTabSz="304670" rtl="0" eaLnBrk="1" latinLnBrk="0" hangingPunct="1">
-              <a:defRPr sz="1200" kern="1200">
-                <a:solidFill>
-                  <a:schemeClr val="tx1"/>
-                </a:solidFill>
-                <a:latin typeface="+mn-lt"/>
-                <a:ea typeface="+mn-ea"/>
-                <a:cs typeface="+mn-cs"/>
-              </a:defRPr>
-            </a:lvl4pPr>
-            <a:lvl5pPr marL="1218672" algn="l" defTabSz="304670" rtl="0" eaLnBrk="1" latinLnBrk="0" hangingPunct="1">
-              <a:defRPr sz="1200" kern="1200">
-                <a:solidFill>
-                  <a:schemeClr val="tx1"/>
-                </a:solidFill>
-                <a:latin typeface="+mn-lt"/>
-                <a:ea typeface="+mn-ea"/>
-                <a:cs typeface="+mn-cs"/>
-              </a:defRPr>
-            </a:lvl5pPr>
-            <a:lvl6pPr marL="1523340" algn="l" defTabSz="304670" rtl="0" eaLnBrk="1" latinLnBrk="0" hangingPunct="1">
-              <a:defRPr sz="1200" kern="1200">
-                <a:solidFill>
-                  <a:schemeClr val="tx1"/>
-                </a:solidFill>
-                <a:latin typeface="+mn-lt"/>
-                <a:ea typeface="+mn-ea"/>
-                <a:cs typeface="+mn-cs"/>
-              </a:defRPr>
-            </a:lvl6pPr>
-            <a:lvl7pPr marL="1828007" algn="l" defTabSz="304670" rtl="0" eaLnBrk="1" latinLnBrk="0" hangingPunct="1">
-              <a:defRPr sz="1200" kern="1200">
-                <a:solidFill>
-                  <a:schemeClr val="tx1"/>
-                </a:solidFill>
-                <a:latin typeface="+mn-lt"/>
-                <a:ea typeface="+mn-ea"/>
-                <a:cs typeface="+mn-cs"/>
-              </a:defRPr>
-            </a:lvl7pPr>
-            <a:lvl8pPr marL="2132675" algn="l" defTabSz="304670" rtl="0" eaLnBrk="1" latinLnBrk="0" hangingPunct="1">
-              <a:defRPr sz="1200" kern="1200">
-                <a:solidFill>
-                  <a:schemeClr val="tx1"/>
-                </a:solidFill>
-                <a:latin typeface="+mn-lt"/>
-                <a:ea typeface="+mn-ea"/>
-                <a:cs typeface="+mn-cs"/>
-              </a:defRPr>
-            </a:lvl8pPr>
-            <a:lvl9pPr marL="2437344" algn="l" defTabSz="304670" rtl="0" eaLnBrk="1" latinLnBrk="0" hangingPunct="1">
-              <a:defRPr sz="1200" kern="1200">
-                <a:solidFill>
-                  <a:schemeClr val="tx1"/>
-                </a:solidFill>
-                <a:latin typeface="+mn-lt"/>
-                <a:ea typeface="+mn-ea"/>
-                <a:cs typeface="+mn-cs"/>
-              </a:defRPr>
-            </a:lvl9pPr>
-          </a:lstStyle>
-          <a:p>
-            <a:pPr algn="l"/>
-            <a:r>
-              <a:rPr kumimoji="1" lang="en" altLang="ja-JP" sz="700" dirty="0">
-                <a:solidFill>
-                  <a:srgbClr val="013C85"/>
-                </a:solidFill>
-              </a:rPr>
-              <a:t>ⓒ ITOCHU Techno-Solutions Corporation</a:t>
-            </a:r>
-            <a:endParaRPr kumimoji="1" lang="ja-JP" altLang="en-US" sz="700">
-              <a:solidFill>
-                <a:srgbClr val="013C85"/>
-              </a:solidFill>
-            </a:endParaRPr>
           </a:p>
         </p:txBody>
       </p:sp>
       <p:sp>
         <p:nvSpPr>
-          <p:cNvPr id="11" name="Slide Number Placeholder 5">
+          <p:cNvPr id="9" name="テキスト プレースホルダー 12">
             <a:extLst>
               <a:ext uri="{FF2B5EF4-FFF2-40B4-BE49-F238E27FC236}">
-                <a16:creationId xmlns:a16="http://schemas.microsoft.com/office/drawing/2014/main" id="{01FA6925-A068-A444-1957-B0B944CDD944}"/>
-              </a:ext>
-            </a:extLst>
-          </p:cNvPr>
-          <p:cNvSpPr txBox="1">
-            <a:spLocks/>
-          </p:cNvSpPr>
-          <p:nvPr userDrawn="1"/>
-        </p:nvSpPr>
-        <p:spPr>
-          <a:xfrm>
-            <a:off x="9133618" y="6326799"/>
-            <a:ext cx="2743200" cy="299462"/>
-          </a:xfrm>
-          <a:prstGeom prst="rect">
-            <a:avLst/>
-          </a:prstGeom>
-        </p:spPr>
-        <p:txBody>
-          <a:bodyPr anchor="b"/>
-          <a:lstStyle>
-            <a:defPPr>
-              <a:defRPr lang="en-US"/>
-            </a:defPPr>
-            <a:lvl1pPr marL="0" algn="r" defTabSz="304670" rtl="0" eaLnBrk="1" latinLnBrk="0" hangingPunct="1">
-              <a:defRPr sz="1600" b="0" i="0" kern="1200">
-                <a:solidFill>
-                  <a:srgbClr val="003D86"/>
-                </a:solidFill>
-                <a:latin typeface="Yu Gothic Medium" panose="020B0400000000000000" pitchFamily="34" charset="-128"/>
-                <a:ea typeface="Yu Gothic Medium" panose="020B0400000000000000" pitchFamily="34" charset="-128"/>
-                <a:cs typeface="+mn-cs"/>
-              </a:defRPr>
-            </a:lvl1pPr>
-            <a:lvl2pPr marL="304670" algn="l" defTabSz="304670" rtl="0" eaLnBrk="1" latinLnBrk="0" hangingPunct="1">
-              <a:defRPr sz="1200" kern="1200">
-                <a:solidFill>
-                  <a:schemeClr val="tx1"/>
-                </a:solidFill>
-                <a:latin typeface="+mn-lt"/>
-                <a:ea typeface="+mn-ea"/>
-                <a:cs typeface="+mn-cs"/>
-              </a:defRPr>
-            </a:lvl2pPr>
-            <a:lvl3pPr marL="609336" algn="l" defTabSz="304670" rtl="0" eaLnBrk="1" latinLnBrk="0" hangingPunct="1">
-              <a:defRPr sz="1200" kern="1200">
-                <a:solidFill>
-                  <a:schemeClr val="tx1"/>
-                </a:solidFill>
-                <a:latin typeface="+mn-lt"/>
-                <a:ea typeface="+mn-ea"/>
-                <a:cs typeface="+mn-cs"/>
-              </a:defRPr>
-            </a:lvl3pPr>
-            <a:lvl4pPr marL="914005" algn="l" defTabSz="304670" rtl="0" eaLnBrk="1" latinLnBrk="0" hangingPunct="1">
-              <a:defRPr sz="1200" kern="1200">
-                <a:solidFill>
-                  <a:schemeClr val="tx1"/>
-                </a:solidFill>
-                <a:latin typeface="+mn-lt"/>
-                <a:ea typeface="+mn-ea"/>
-                <a:cs typeface="+mn-cs"/>
-              </a:defRPr>
-            </a:lvl4pPr>
-            <a:lvl5pPr marL="1218672" algn="l" defTabSz="304670" rtl="0" eaLnBrk="1" latinLnBrk="0" hangingPunct="1">
-              <a:defRPr sz="1200" kern="1200">
-                <a:solidFill>
-                  <a:schemeClr val="tx1"/>
-                </a:solidFill>
-                <a:latin typeface="+mn-lt"/>
-                <a:ea typeface="+mn-ea"/>
-                <a:cs typeface="+mn-cs"/>
-              </a:defRPr>
-            </a:lvl5pPr>
-            <a:lvl6pPr marL="1523340" algn="l" defTabSz="304670" rtl="0" eaLnBrk="1" latinLnBrk="0" hangingPunct="1">
-              <a:defRPr sz="1200" kern="1200">
-                <a:solidFill>
-                  <a:schemeClr val="tx1"/>
-                </a:solidFill>
-                <a:latin typeface="+mn-lt"/>
-                <a:ea typeface="+mn-ea"/>
-                <a:cs typeface="+mn-cs"/>
-              </a:defRPr>
-            </a:lvl6pPr>
-            <a:lvl7pPr marL="1828007" algn="l" defTabSz="304670" rtl="0" eaLnBrk="1" latinLnBrk="0" hangingPunct="1">
-              <a:defRPr sz="1200" kern="1200">
-                <a:solidFill>
-                  <a:schemeClr val="tx1"/>
-                </a:solidFill>
-                <a:latin typeface="+mn-lt"/>
-                <a:ea typeface="+mn-ea"/>
-                <a:cs typeface="+mn-cs"/>
-              </a:defRPr>
-            </a:lvl7pPr>
-            <a:lvl8pPr marL="2132675" algn="l" defTabSz="304670" rtl="0" eaLnBrk="1" latinLnBrk="0" hangingPunct="1">
-              <a:defRPr sz="1200" kern="1200">
-                <a:solidFill>
-                  <a:schemeClr val="tx1"/>
-                </a:solidFill>
-                <a:latin typeface="+mn-lt"/>
-                <a:ea typeface="+mn-ea"/>
-                <a:cs typeface="+mn-cs"/>
-              </a:defRPr>
-            </a:lvl8pPr>
-            <a:lvl9pPr marL="2437344" algn="l" defTabSz="304670" rtl="0" eaLnBrk="1" latinLnBrk="0" hangingPunct="1">
-              <a:defRPr sz="1200" kern="1200">
-                <a:solidFill>
-                  <a:schemeClr val="tx1"/>
-                </a:solidFill>
-                <a:latin typeface="+mn-lt"/>
-                <a:ea typeface="+mn-ea"/>
-                <a:cs typeface="+mn-cs"/>
-              </a:defRPr>
-            </a:lvl9pPr>
-          </a:lstStyle>
-          <a:p>
-            <a:fld id="{F61D7DA0-AA9A-8342-BE3E-6EB34F8DE2BC}" type="slidenum">
-              <a:rPr kumimoji="1" lang="ja-JP" altLang="en-US" sz="1600" smtClean="0">
-                <a:solidFill>
-                  <a:srgbClr val="013C85"/>
-                </a:solidFill>
-              </a:rPr>
-              <a:pPr/>
-              <a:t>‹#›</a:t>
-            </a:fld>
-            <a:endParaRPr kumimoji="1" lang="ja-JP" altLang="en-US" sz="1600">
-              <a:solidFill>
-                <a:srgbClr val="013C85"/>
-              </a:solidFill>
-            </a:endParaRPr>
-          </a:p>
-        </p:txBody>
-      </p:sp>
-      <p:sp>
-        <p:nvSpPr>
-          <p:cNvPr id="2" name="Title 1">
-            <a:extLst>
-              <a:ext uri="{FF2B5EF4-FFF2-40B4-BE49-F238E27FC236}">
-                <a16:creationId xmlns:a16="http://schemas.microsoft.com/office/drawing/2014/main" id="{736F0C50-C194-741F-5AEB-FAA6A9B44669}"/>
+                <a16:creationId xmlns:a16="http://schemas.microsoft.com/office/drawing/2014/main" id="{5BBBF76E-4B32-365C-5F2B-2ED1F2568EED}"/>
               </a:ext>
             </a:extLst>
           </p:cNvPr>
@@ -2268,62 +1467,13 @@
             <a:spLocks noGrp="1"/>
           </p:cNvSpPr>
           <p:nvPr>
-            <p:ph type="ctrTitle"/>
+            <p:ph type="body" sz="quarter" idx="20" hasCustomPrompt="1"/>
           </p:nvPr>
         </p:nvSpPr>
         <p:spPr>
           <a:xfrm>
-            <a:off x="814282" y="1921292"/>
-            <a:ext cx="10563436" cy="1371445"/>
-          </a:xfrm>
-          <a:prstGeom prst="rect">
-            <a:avLst/>
-          </a:prstGeom>
-        </p:spPr>
-        <p:txBody>
-          <a:bodyPr lIns="0" tIns="0" rIns="0" bIns="0" anchor="b">
-            <a:normAutofit/>
-          </a:bodyPr>
-          <a:lstStyle>
-            <a:lvl1pPr algn="l">
-              <a:defRPr sz="3000" b="1" i="0">
-                <a:solidFill>
-                  <a:srgbClr val="013C85"/>
-                </a:solidFill>
-                <a:latin typeface="Yu Gothic" panose="020B0400000000000000" pitchFamily="34" charset="-128"/>
-                <a:ea typeface="Yu Gothic" panose="020B0400000000000000" pitchFamily="34" charset="-128"/>
-              </a:defRPr>
-            </a:lvl1pPr>
-          </a:lstStyle>
-          <a:p>
-            <a:r>
-              <a:rPr lang="ja-JP" altLang="en-US"/>
-              <a:t>マスター タイトルの書式設定</a:t>
-            </a:r>
-            <a:endParaRPr lang="en-US" dirty="0"/>
-          </a:p>
-        </p:txBody>
-      </p:sp>
-      <p:sp>
-        <p:nvSpPr>
-          <p:cNvPr id="3" name="テキスト プレースホルダー 12">
-            <a:extLst>
-              <a:ext uri="{FF2B5EF4-FFF2-40B4-BE49-F238E27FC236}">
-                <a16:creationId xmlns:a16="http://schemas.microsoft.com/office/drawing/2014/main" id="{C8443232-A4D7-0B6A-2119-B6107EBFC188}"/>
-              </a:ext>
-            </a:extLst>
-          </p:cNvPr>
-          <p:cNvSpPr>
-            <a:spLocks noGrp="1"/>
-          </p:cNvSpPr>
-          <p:nvPr>
-            <p:ph type="body" sz="quarter" idx="15"/>
-          </p:nvPr>
-        </p:nvSpPr>
-        <p:spPr>
-          <a:xfrm>
-            <a:off x="814282" y="3471448"/>
-            <a:ext cx="10563436" cy="1481924"/>
+            <a:off x="814282" y="2659773"/>
+            <a:ext cx="468000" cy="663575"/>
           </a:xfrm>
           <a:prstGeom prst="rect">
             <a:avLst/>
@@ -2334,28 +1484,757 @@
             <a:noAutofit/>
           </a:bodyPr>
           <a:lstStyle>
-            <a:lvl1pPr marL="0" indent="0">
+            <a:lvl1pPr marL="0" indent="0" defTabSz="479968">
               <a:buNone/>
-              <a:defRPr sz="2400">
-                <a:solidFill>
-                  <a:srgbClr val="013C85"/>
-                </a:solidFill>
+              <a:defRPr sz="2400" b="1" i="0" baseline="0">
+                <a:solidFill>
+                  <a:schemeClr val="bg2"/>
+                </a:solidFill>
+                <a:latin typeface="游ゴシック" panose="020B0400000000000000" pitchFamily="50" charset="-128"/>
+                <a:ea typeface="游ゴシック" panose="020B0400000000000000" pitchFamily="50" charset="-128"/>
               </a:defRPr>
             </a:lvl1pPr>
           </a:lstStyle>
           <a:p>
             <a:pPr lvl="0"/>
             <a:r>
-              <a:rPr kumimoji="1" lang="ja-JP" altLang="en-US"/>
+              <a:rPr kumimoji="1" lang="en-US" altLang="ja-JP" dirty="0"/>
+              <a:t>00</a:t>
+            </a:r>
+          </a:p>
+        </p:txBody>
+      </p:sp>
+      <p:sp>
+        <p:nvSpPr>
+          <p:cNvPr id="10" name="テキスト プレースホルダー 12">
+            <a:extLst>
+              <a:ext uri="{FF2B5EF4-FFF2-40B4-BE49-F238E27FC236}">
+                <a16:creationId xmlns:a16="http://schemas.microsoft.com/office/drawing/2014/main" id="{72219218-2BF5-6F59-A39D-2D14AA64DB44}"/>
+              </a:ext>
+            </a:extLst>
+          </p:cNvPr>
+          <p:cNvSpPr>
+            <a:spLocks noGrp="1"/>
+          </p:cNvSpPr>
+          <p:nvPr>
+            <p:ph type="body" sz="quarter" idx="21"/>
+          </p:nvPr>
+        </p:nvSpPr>
+        <p:spPr>
+          <a:xfrm>
+            <a:off x="1301001" y="2659773"/>
+            <a:ext cx="4571687" cy="663575"/>
+          </a:xfrm>
+          <a:prstGeom prst="rect">
+            <a:avLst/>
+          </a:prstGeom>
+        </p:spPr>
+        <p:txBody>
+          <a:bodyPr lIns="0" tIns="0" rIns="0" bIns="0">
+            <a:noAutofit/>
+          </a:bodyPr>
+          <a:lstStyle>
+            <a:lvl1pPr marL="0" indent="0" defTabSz="479968">
+              <a:buNone/>
+              <a:defRPr kumimoji="1" lang="en-US" altLang="ja-JP" sz="2400" b="0" i="0" kern="1200" dirty="0">
+                <a:solidFill>
+                  <a:schemeClr val="bg1"/>
+                </a:solidFill>
+                <a:latin typeface="Yu Gothic Medium" panose="020B0400000000000000" pitchFamily="34" charset="-128"/>
+                <a:ea typeface="Yu Gothic Medium" panose="020B0400000000000000" pitchFamily="34" charset="-128"/>
+                <a:cs typeface="+mn-cs"/>
+              </a:defRPr>
+            </a:lvl1pPr>
+          </a:lstStyle>
+          <a:p>
+            <a:pPr marL="0" lvl="0" indent="0" algn="l" defTabSz="479968" rtl="0" eaLnBrk="1" latinLnBrk="0" hangingPunct="1">
+              <a:lnSpc>
+                <a:spcPct val="90000"/>
+              </a:lnSpc>
+              <a:spcBef>
+                <a:spcPts val="1000"/>
+              </a:spcBef>
+              <a:buFont typeface="Arial" panose="020B0604020202020204" pitchFamily="34" charset="0"/>
+              <a:buNone/>
+            </a:pPr>
+            <a:r>
+              <a:rPr kumimoji="1" lang="ja-JP" altLang="en-US" dirty="0"/>
               <a:t>マスター テキストの書式設定</a:t>
             </a:r>
+            <a:endParaRPr kumimoji="1" lang="en-US" altLang="ja-JP" dirty="0"/>
+          </a:p>
+        </p:txBody>
+      </p:sp>
+      <p:sp>
+        <p:nvSpPr>
+          <p:cNvPr id="11" name="テキスト プレースホルダー 12">
+            <a:extLst>
+              <a:ext uri="{FF2B5EF4-FFF2-40B4-BE49-F238E27FC236}">
+                <a16:creationId xmlns:a16="http://schemas.microsoft.com/office/drawing/2014/main" id="{EE512878-A966-CEA2-FC3B-8C9E8A1CB1ED}"/>
+              </a:ext>
+            </a:extLst>
+          </p:cNvPr>
+          <p:cNvSpPr>
+            <a:spLocks noGrp="1"/>
+          </p:cNvSpPr>
+          <p:nvPr>
+            <p:ph type="body" sz="quarter" idx="22" hasCustomPrompt="1"/>
+          </p:nvPr>
+        </p:nvSpPr>
+        <p:spPr>
+          <a:xfrm>
+            <a:off x="814282" y="3569588"/>
+            <a:ext cx="468000" cy="663575"/>
+          </a:xfrm>
+          <a:prstGeom prst="rect">
+            <a:avLst/>
+          </a:prstGeom>
+        </p:spPr>
+        <p:txBody>
+          <a:bodyPr lIns="0" tIns="0" rIns="0" bIns="0">
+            <a:noAutofit/>
+          </a:bodyPr>
+          <a:lstStyle>
+            <a:lvl1pPr marL="0" indent="0" defTabSz="479968">
+              <a:buNone/>
+              <a:defRPr sz="2400" b="1" i="0" baseline="0">
+                <a:solidFill>
+                  <a:schemeClr val="bg2"/>
+                </a:solidFill>
+                <a:latin typeface="游ゴシック" panose="020B0400000000000000" pitchFamily="50" charset="-128"/>
+                <a:ea typeface="游ゴシック" panose="020B0400000000000000" pitchFamily="50" charset="-128"/>
+              </a:defRPr>
+            </a:lvl1pPr>
+          </a:lstStyle>
+          <a:p>
+            <a:pPr lvl="0"/>
+            <a:r>
+              <a:rPr kumimoji="1" lang="en-US" altLang="ja-JP" dirty="0"/>
+              <a:t>00</a:t>
+            </a:r>
+          </a:p>
+        </p:txBody>
+      </p:sp>
+      <p:sp>
+        <p:nvSpPr>
+          <p:cNvPr id="12" name="テキスト プレースホルダー 12">
+            <a:extLst>
+              <a:ext uri="{FF2B5EF4-FFF2-40B4-BE49-F238E27FC236}">
+                <a16:creationId xmlns:a16="http://schemas.microsoft.com/office/drawing/2014/main" id="{F7FAB665-AC8F-2C72-C947-3AB07CC1FA94}"/>
+              </a:ext>
+            </a:extLst>
+          </p:cNvPr>
+          <p:cNvSpPr>
+            <a:spLocks noGrp="1"/>
+          </p:cNvSpPr>
+          <p:nvPr>
+            <p:ph type="body" sz="quarter" idx="23"/>
+          </p:nvPr>
+        </p:nvSpPr>
+        <p:spPr>
+          <a:xfrm>
+            <a:off x="1301001" y="3569588"/>
+            <a:ext cx="4571687" cy="663575"/>
+          </a:xfrm>
+          <a:prstGeom prst="rect">
+            <a:avLst/>
+          </a:prstGeom>
+        </p:spPr>
+        <p:txBody>
+          <a:bodyPr lIns="0" tIns="0" rIns="0" bIns="0">
+            <a:noAutofit/>
+          </a:bodyPr>
+          <a:lstStyle>
+            <a:lvl1pPr marL="0" indent="0" defTabSz="479968">
+              <a:buNone/>
+              <a:defRPr kumimoji="1" lang="en-US" altLang="ja-JP" sz="2400" b="0" i="0" kern="1200" dirty="0">
+                <a:solidFill>
+                  <a:schemeClr val="bg1"/>
+                </a:solidFill>
+                <a:latin typeface="Yu Gothic Medium" panose="020B0400000000000000" pitchFamily="34" charset="-128"/>
+                <a:ea typeface="Yu Gothic Medium" panose="020B0400000000000000" pitchFamily="34" charset="-128"/>
+                <a:cs typeface="+mn-cs"/>
+              </a:defRPr>
+            </a:lvl1pPr>
+          </a:lstStyle>
+          <a:p>
+            <a:pPr marL="0" lvl="0" indent="0" algn="l" defTabSz="479968" rtl="0" eaLnBrk="1" latinLnBrk="0" hangingPunct="1">
+              <a:lnSpc>
+                <a:spcPct val="90000"/>
+              </a:lnSpc>
+              <a:spcBef>
+                <a:spcPts val="1000"/>
+              </a:spcBef>
+              <a:buFont typeface="Arial" panose="020B0604020202020204" pitchFamily="34" charset="0"/>
+              <a:buNone/>
+            </a:pPr>
+            <a:r>
+              <a:rPr kumimoji="1" lang="ja-JP" altLang="en-US" dirty="0"/>
+              <a:t>マスター テキストの書式設定</a:t>
+            </a:r>
+            <a:endParaRPr kumimoji="1" lang="en-US" altLang="ja-JP" dirty="0"/>
+          </a:p>
+        </p:txBody>
+      </p:sp>
+      <p:sp>
+        <p:nvSpPr>
+          <p:cNvPr id="13" name="テキスト プレースホルダー 12">
+            <a:extLst>
+              <a:ext uri="{FF2B5EF4-FFF2-40B4-BE49-F238E27FC236}">
+                <a16:creationId xmlns:a16="http://schemas.microsoft.com/office/drawing/2014/main" id="{8B6417D6-654D-3B96-1007-DEAECEFD0C52}"/>
+              </a:ext>
+            </a:extLst>
+          </p:cNvPr>
+          <p:cNvSpPr>
+            <a:spLocks noGrp="1"/>
+          </p:cNvSpPr>
+          <p:nvPr>
+            <p:ph type="body" sz="quarter" idx="24" hasCustomPrompt="1"/>
+          </p:nvPr>
+        </p:nvSpPr>
+        <p:spPr>
+          <a:xfrm>
+            <a:off x="814282" y="4482833"/>
+            <a:ext cx="468000" cy="663575"/>
+          </a:xfrm>
+          <a:prstGeom prst="rect">
+            <a:avLst/>
+          </a:prstGeom>
+        </p:spPr>
+        <p:txBody>
+          <a:bodyPr lIns="0" tIns="0" rIns="0" bIns="0">
+            <a:noAutofit/>
+          </a:bodyPr>
+          <a:lstStyle>
+            <a:lvl1pPr marL="0" indent="0" defTabSz="479968">
+              <a:buNone/>
+              <a:defRPr sz="2400" b="1" i="0" baseline="0">
+                <a:solidFill>
+                  <a:schemeClr val="bg2"/>
+                </a:solidFill>
+                <a:latin typeface="游ゴシック" panose="020B0400000000000000" pitchFamily="50" charset="-128"/>
+                <a:ea typeface="游ゴシック" panose="020B0400000000000000" pitchFamily="50" charset="-128"/>
+              </a:defRPr>
+            </a:lvl1pPr>
+          </a:lstStyle>
+          <a:p>
+            <a:pPr lvl="0"/>
+            <a:r>
+              <a:rPr kumimoji="1" lang="en-US" altLang="ja-JP" dirty="0"/>
+              <a:t>00</a:t>
+            </a:r>
+          </a:p>
+        </p:txBody>
+      </p:sp>
+      <p:sp>
+        <p:nvSpPr>
+          <p:cNvPr id="14" name="テキスト プレースホルダー 12">
+            <a:extLst>
+              <a:ext uri="{FF2B5EF4-FFF2-40B4-BE49-F238E27FC236}">
+                <a16:creationId xmlns:a16="http://schemas.microsoft.com/office/drawing/2014/main" id="{5B1B1BFE-AB5A-3082-779B-03D370242C9B}"/>
+              </a:ext>
+            </a:extLst>
+          </p:cNvPr>
+          <p:cNvSpPr>
+            <a:spLocks noGrp="1"/>
+          </p:cNvSpPr>
+          <p:nvPr>
+            <p:ph type="body" sz="quarter" idx="25"/>
+          </p:nvPr>
+        </p:nvSpPr>
+        <p:spPr>
+          <a:xfrm>
+            <a:off x="1301001" y="4482833"/>
+            <a:ext cx="4571687" cy="663575"/>
+          </a:xfrm>
+          <a:prstGeom prst="rect">
+            <a:avLst/>
+          </a:prstGeom>
+        </p:spPr>
+        <p:txBody>
+          <a:bodyPr lIns="0" tIns="0" rIns="0" bIns="0">
+            <a:noAutofit/>
+          </a:bodyPr>
+          <a:lstStyle>
+            <a:lvl1pPr marL="0" indent="0" defTabSz="479968">
+              <a:buNone/>
+              <a:defRPr kumimoji="1" lang="en-US" altLang="ja-JP" sz="2400" b="0" i="0" kern="1200" dirty="0">
+                <a:solidFill>
+                  <a:schemeClr val="bg1"/>
+                </a:solidFill>
+                <a:latin typeface="Yu Gothic Medium" panose="020B0400000000000000" pitchFamily="34" charset="-128"/>
+                <a:ea typeface="Yu Gothic Medium" panose="020B0400000000000000" pitchFamily="34" charset="-128"/>
+                <a:cs typeface="+mn-cs"/>
+              </a:defRPr>
+            </a:lvl1pPr>
+          </a:lstStyle>
+          <a:p>
+            <a:pPr marL="0" lvl="0" indent="0" algn="l" defTabSz="479968" rtl="0" eaLnBrk="1" latinLnBrk="0" hangingPunct="1">
+              <a:lnSpc>
+                <a:spcPct val="90000"/>
+              </a:lnSpc>
+              <a:spcBef>
+                <a:spcPts val="1000"/>
+              </a:spcBef>
+              <a:buFont typeface="Arial" panose="020B0604020202020204" pitchFamily="34" charset="0"/>
+              <a:buNone/>
+            </a:pPr>
+            <a:r>
+              <a:rPr kumimoji="1" lang="ja-JP" altLang="en-US" dirty="0"/>
+              <a:t>マスター テキストの書式設定</a:t>
+            </a:r>
+            <a:endParaRPr kumimoji="1" lang="en-US" altLang="ja-JP" dirty="0"/>
+          </a:p>
+        </p:txBody>
+      </p:sp>
+      <p:sp>
+        <p:nvSpPr>
+          <p:cNvPr id="15" name="テキスト プレースホルダー 12">
+            <a:extLst>
+              <a:ext uri="{FF2B5EF4-FFF2-40B4-BE49-F238E27FC236}">
+                <a16:creationId xmlns:a16="http://schemas.microsoft.com/office/drawing/2014/main" id="{79263F1A-F880-AF75-7AC3-3F6C23F71974}"/>
+              </a:ext>
+            </a:extLst>
+          </p:cNvPr>
+          <p:cNvSpPr>
+            <a:spLocks noGrp="1"/>
+          </p:cNvSpPr>
+          <p:nvPr>
+            <p:ph type="body" sz="quarter" idx="26" hasCustomPrompt="1"/>
+          </p:nvPr>
+        </p:nvSpPr>
+        <p:spPr>
+          <a:xfrm>
+            <a:off x="6233990" y="1736726"/>
+            <a:ext cx="468000" cy="663575"/>
+          </a:xfrm>
+          <a:prstGeom prst="rect">
+            <a:avLst/>
+          </a:prstGeom>
+        </p:spPr>
+        <p:txBody>
+          <a:bodyPr lIns="0" tIns="0" rIns="0" bIns="0">
+            <a:noAutofit/>
+          </a:bodyPr>
+          <a:lstStyle>
+            <a:lvl1pPr marL="0" indent="0" defTabSz="479968">
+              <a:buNone/>
+              <a:defRPr sz="2400" b="1" i="0" baseline="0">
+                <a:solidFill>
+                  <a:schemeClr val="bg2"/>
+                </a:solidFill>
+                <a:latin typeface="游ゴシック" panose="020B0400000000000000" pitchFamily="50" charset="-128"/>
+                <a:ea typeface="游ゴシック" panose="020B0400000000000000" pitchFamily="50" charset="-128"/>
+              </a:defRPr>
+            </a:lvl1pPr>
+          </a:lstStyle>
+          <a:p>
+            <a:pPr lvl="0"/>
+            <a:r>
+              <a:rPr kumimoji="1" lang="en-US" altLang="ja-JP" dirty="0"/>
+              <a:t>00</a:t>
+            </a:r>
+          </a:p>
+        </p:txBody>
+      </p:sp>
+      <p:sp>
+        <p:nvSpPr>
+          <p:cNvPr id="16" name="テキスト プレースホルダー 12">
+            <a:extLst>
+              <a:ext uri="{FF2B5EF4-FFF2-40B4-BE49-F238E27FC236}">
+                <a16:creationId xmlns:a16="http://schemas.microsoft.com/office/drawing/2014/main" id="{C6202829-8413-3616-0EEE-5C30E27A25CD}"/>
+              </a:ext>
+            </a:extLst>
+          </p:cNvPr>
+          <p:cNvSpPr>
+            <a:spLocks noGrp="1"/>
+          </p:cNvSpPr>
+          <p:nvPr>
+            <p:ph type="body" sz="quarter" idx="27"/>
+          </p:nvPr>
+        </p:nvSpPr>
+        <p:spPr>
+          <a:xfrm>
+            <a:off x="6720709" y="1736726"/>
+            <a:ext cx="4571687" cy="663575"/>
+          </a:xfrm>
+          <a:prstGeom prst="rect">
+            <a:avLst/>
+          </a:prstGeom>
+        </p:spPr>
+        <p:txBody>
+          <a:bodyPr lIns="0" tIns="0" rIns="0" bIns="0">
+            <a:noAutofit/>
+          </a:bodyPr>
+          <a:lstStyle>
+            <a:lvl1pPr marL="0" indent="0" defTabSz="479968">
+              <a:buNone/>
+              <a:defRPr kumimoji="1" lang="en-US" altLang="ja-JP" sz="2400" b="0" i="0" kern="1200" dirty="0">
+                <a:solidFill>
+                  <a:schemeClr val="bg1"/>
+                </a:solidFill>
+                <a:latin typeface="Yu Gothic Medium" panose="020B0400000000000000" pitchFamily="34" charset="-128"/>
+                <a:ea typeface="Yu Gothic Medium" panose="020B0400000000000000" pitchFamily="34" charset="-128"/>
+                <a:cs typeface="+mn-cs"/>
+              </a:defRPr>
+            </a:lvl1pPr>
+          </a:lstStyle>
+          <a:p>
+            <a:pPr marL="0" lvl="0" indent="0" algn="l" defTabSz="479968" rtl="0" eaLnBrk="1" latinLnBrk="0" hangingPunct="1">
+              <a:lnSpc>
+                <a:spcPct val="90000"/>
+              </a:lnSpc>
+              <a:spcBef>
+                <a:spcPts val="1000"/>
+              </a:spcBef>
+              <a:buFont typeface="Arial" panose="020B0604020202020204" pitchFamily="34" charset="0"/>
+              <a:buNone/>
+            </a:pPr>
+            <a:r>
+              <a:rPr kumimoji="1" lang="ja-JP" altLang="en-US" dirty="0"/>
+              <a:t>マスター テキストの書式設定</a:t>
+            </a:r>
+            <a:endParaRPr kumimoji="1" lang="en-US" altLang="ja-JP" dirty="0"/>
+          </a:p>
+        </p:txBody>
+      </p:sp>
+      <p:sp>
+        <p:nvSpPr>
+          <p:cNvPr id="17" name="テキスト プレースホルダー 12">
+            <a:extLst>
+              <a:ext uri="{FF2B5EF4-FFF2-40B4-BE49-F238E27FC236}">
+                <a16:creationId xmlns:a16="http://schemas.microsoft.com/office/drawing/2014/main" id="{44A1FB7E-AF88-C752-6C70-639109338AE7}"/>
+              </a:ext>
+            </a:extLst>
+          </p:cNvPr>
+          <p:cNvSpPr>
+            <a:spLocks noGrp="1"/>
+          </p:cNvSpPr>
+          <p:nvPr>
+            <p:ph type="body" sz="quarter" idx="28" hasCustomPrompt="1"/>
+          </p:nvPr>
+        </p:nvSpPr>
+        <p:spPr>
+          <a:xfrm>
+            <a:off x="6233990" y="2659773"/>
+            <a:ext cx="468000" cy="663575"/>
+          </a:xfrm>
+          <a:prstGeom prst="rect">
+            <a:avLst/>
+          </a:prstGeom>
+        </p:spPr>
+        <p:txBody>
+          <a:bodyPr lIns="0" tIns="0" rIns="0" bIns="0">
+            <a:noAutofit/>
+          </a:bodyPr>
+          <a:lstStyle>
+            <a:lvl1pPr marL="0" indent="0" defTabSz="479968">
+              <a:buNone/>
+              <a:defRPr sz="2400" b="1" i="0" baseline="0">
+                <a:solidFill>
+                  <a:schemeClr val="bg2"/>
+                </a:solidFill>
+                <a:latin typeface="游ゴシック" panose="020B0400000000000000" pitchFamily="50" charset="-128"/>
+                <a:ea typeface="游ゴシック" panose="020B0400000000000000" pitchFamily="50" charset="-128"/>
+              </a:defRPr>
+            </a:lvl1pPr>
+          </a:lstStyle>
+          <a:p>
+            <a:pPr lvl="0"/>
+            <a:r>
+              <a:rPr kumimoji="1" lang="en-US" altLang="ja-JP" dirty="0"/>
+              <a:t>00</a:t>
+            </a:r>
+          </a:p>
+        </p:txBody>
+      </p:sp>
+      <p:sp>
+        <p:nvSpPr>
+          <p:cNvPr id="18" name="テキスト プレースホルダー 12">
+            <a:extLst>
+              <a:ext uri="{FF2B5EF4-FFF2-40B4-BE49-F238E27FC236}">
+                <a16:creationId xmlns:a16="http://schemas.microsoft.com/office/drawing/2014/main" id="{C05BF193-6E26-AC8C-89E9-EFD28A7B291A}"/>
+              </a:ext>
+            </a:extLst>
+          </p:cNvPr>
+          <p:cNvSpPr>
+            <a:spLocks noGrp="1"/>
+          </p:cNvSpPr>
+          <p:nvPr>
+            <p:ph type="body" sz="quarter" idx="29"/>
+          </p:nvPr>
+        </p:nvSpPr>
+        <p:spPr>
+          <a:xfrm>
+            <a:off x="6720709" y="2659773"/>
+            <a:ext cx="4571687" cy="663575"/>
+          </a:xfrm>
+          <a:prstGeom prst="rect">
+            <a:avLst/>
+          </a:prstGeom>
+        </p:spPr>
+        <p:txBody>
+          <a:bodyPr lIns="0" tIns="0" rIns="0" bIns="0">
+            <a:noAutofit/>
+          </a:bodyPr>
+          <a:lstStyle>
+            <a:lvl1pPr marL="0" indent="0" defTabSz="479968">
+              <a:buNone/>
+              <a:defRPr kumimoji="1" lang="en-US" altLang="ja-JP" sz="2400" b="0" i="0" kern="1200" dirty="0">
+                <a:solidFill>
+                  <a:schemeClr val="bg1"/>
+                </a:solidFill>
+                <a:latin typeface="Yu Gothic Medium" panose="020B0400000000000000" pitchFamily="34" charset="-128"/>
+                <a:ea typeface="Yu Gothic Medium" panose="020B0400000000000000" pitchFamily="34" charset="-128"/>
+                <a:cs typeface="+mn-cs"/>
+              </a:defRPr>
+            </a:lvl1pPr>
+          </a:lstStyle>
+          <a:p>
+            <a:pPr marL="0" lvl="0" indent="0" algn="l" defTabSz="479968" rtl="0" eaLnBrk="1" latinLnBrk="0" hangingPunct="1">
+              <a:lnSpc>
+                <a:spcPct val="90000"/>
+              </a:lnSpc>
+              <a:spcBef>
+                <a:spcPts val="1000"/>
+              </a:spcBef>
+              <a:buFont typeface="Arial" panose="020B0604020202020204" pitchFamily="34" charset="0"/>
+              <a:buNone/>
+            </a:pPr>
+            <a:r>
+              <a:rPr kumimoji="1" lang="ja-JP" altLang="en-US" dirty="0"/>
+              <a:t>マスター テキストの書式設定</a:t>
+            </a:r>
+            <a:endParaRPr kumimoji="1" lang="en-US" altLang="ja-JP" dirty="0"/>
+          </a:p>
+        </p:txBody>
+      </p:sp>
+      <p:sp>
+        <p:nvSpPr>
+          <p:cNvPr id="19" name="テキスト プレースホルダー 12">
+            <a:extLst>
+              <a:ext uri="{FF2B5EF4-FFF2-40B4-BE49-F238E27FC236}">
+                <a16:creationId xmlns:a16="http://schemas.microsoft.com/office/drawing/2014/main" id="{96D897ED-6C29-32CC-9E0C-A98B237197E4}"/>
+              </a:ext>
+            </a:extLst>
+          </p:cNvPr>
+          <p:cNvSpPr>
+            <a:spLocks noGrp="1"/>
+          </p:cNvSpPr>
+          <p:nvPr>
+            <p:ph type="body" sz="quarter" idx="30" hasCustomPrompt="1"/>
+          </p:nvPr>
+        </p:nvSpPr>
+        <p:spPr>
+          <a:xfrm>
+            <a:off x="6233990" y="3569588"/>
+            <a:ext cx="468000" cy="663575"/>
+          </a:xfrm>
+          <a:prstGeom prst="rect">
+            <a:avLst/>
+          </a:prstGeom>
+        </p:spPr>
+        <p:txBody>
+          <a:bodyPr lIns="0" tIns="0" rIns="0" bIns="0">
+            <a:noAutofit/>
+          </a:bodyPr>
+          <a:lstStyle>
+            <a:lvl1pPr marL="0" indent="0" defTabSz="479968">
+              <a:buNone/>
+              <a:defRPr sz="2400" b="1" i="0" baseline="0">
+                <a:solidFill>
+                  <a:schemeClr val="bg2"/>
+                </a:solidFill>
+                <a:latin typeface="游ゴシック" panose="020B0400000000000000" pitchFamily="50" charset="-128"/>
+                <a:ea typeface="游ゴシック" panose="020B0400000000000000" pitchFamily="50" charset="-128"/>
+              </a:defRPr>
+            </a:lvl1pPr>
+          </a:lstStyle>
+          <a:p>
+            <a:pPr lvl="0"/>
+            <a:r>
+              <a:rPr kumimoji="1" lang="en-US" altLang="ja-JP" dirty="0"/>
+              <a:t>00</a:t>
+            </a:r>
+          </a:p>
+        </p:txBody>
+      </p:sp>
+      <p:sp>
+        <p:nvSpPr>
+          <p:cNvPr id="20" name="テキスト プレースホルダー 12">
+            <a:extLst>
+              <a:ext uri="{FF2B5EF4-FFF2-40B4-BE49-F238E27FC236}">
+                <a16:creationId xmlns:a16="http://schemas.microsoft.com/office/drawing/2014/main" id="{9E7B7369-4B53-4C54-006E-CB7B544D3422}"/>
+              </a:ext>
+            </a:extLst>
+          </p:cNvPr>
+          <p:cNvSpPr>
+            <a:spLocks noGrp="1"/>
+          </p:cNvSpPr>
+          <p:nvPr>
+            <p:ph type="body" sz="quarter" idx="31"/>
+          </p:nvPr>
+        </p:nvSpPr>
+        <p:spPr>
+          <a:xfrm>
+            <a:off x="6720709" y="3569588"/>
+            <a:ext cx="4571687" cy="663575"/>
+          </a:xfrm>
+          <a:prstGeom prst="rect">
+            <a:avLst/>
+          </a:prstGeom>
+        </p:spPr>
+        <p:txBody>
+          <a:bodyPr lIns="0" tIns="0" rIns="0" bIns="0">
+            <a:noAutofit/>
+          </a:bodyPr>
+          <a:lstStyle>
+            <a:lvl1pPr marL="0" indent="0" defTabSz="479968">
+              <a:buNone/>
+              <a:defRPr kumimoji="1" lang="en-US" altLang="ja-JP" sz="2400" b="0" i="0" kern="1200" dirty="0">
+                <a:solidFill>
+                  <a:schemeClr val="bg1"/>
+                </a:solidFill>
+                <a:latin typeface="Yu Gothic Medium" panose="020B0400000000000000" pitchFamily="34" charset="-128"/>
+                <a:ea typeface="Yu Gothic Medium" panose="020B0400000000000000" pitchFamily="34" charset="-128"/>
+                <a:cs typeface="+mn-cs"/>
+              </a:defRPr>
+            </a:lvl1pPr>
+          </a:lstStyle>
+          <a:p>
+            <a:pPr marL="0" lvl="0" indent="0" algn="l" defTabSz="479968" rtl="0" eaLnBrk="1" latinLnBrk="0" hangingPunct="1">
+              <a:lnSpc>
+                <a:spcPct val="90000"/>
+              </a:lnSpc>
+              <a:spcBef>
+                <a:spcPts val="1000"/>
+              </a:spcBef>
+              <a:buFont typeface="Arial" panose="020B0604020202020204" pitchFamily="34" charset="0"/>
+              <a:buNone/>
+            </a:pPr>
+            <a:r>
+              <a:rPr kumimoji="1" lang="ja-JP" altLang="en-US" dirty="0"/>
+              <a:t>マスター テキストの書式設定</a:t>
+            </a:r>
+            <a:endParaRPr kumimoji="1" lang="en-US" altLang="ja-JP" dirty="0"/>
+          </a:p>
+        </p:txBody>
+      </p:sp>
+      <p:sp>
+        <p:nvSpPr>
+          <p:cNvPr id="21" name="テキスト プレースホルダー 12">
+            <a:extLst>
+              <a:ext uri="{FF2B5EF4-FFF2-40B4-BE49-F238E27FC236}">
+                <a16:creationId xmlns:a16="http://schemas.microsoft.com/office/drawing/2014/main" id="{0DBEA6BB-E5A1-EACF-2B35-FD0DEC242151}"/>
+              </a:ext>
+            </a:extLst>
+          </p:cNvPr>
+          <p:cNvSpPr>
+            <a:spLocks noGrp="1"/>
+          </p:cNvSpPr>
+          <p:nvPr>
+            <p:ph type="body" sz="quarter" idx="32" hasCustomPrompt="1"/>
+          </p:nvPr>
+        </p:nvSpPr>
+        <p:spPr>
+          <a:xfrm>
+            <a:off x="6233990" y="4482833"/>
+            <a:ext cx="468000" cy="663575"/>
+          </a:xfrm>
+          <a:prstGeom prst="rect">
+            <a:avLst/>
+          </a:prstGeom>
+        </p:spPr>
+        <p:txBody>
+          <a:bodyPr lIns="0" tIns="0" rIns="0" bIns="0">
+            <a:noAutofit/>
+          </a:bodyPr>
+          <a:lstStyle>
+            <a:lvl1pPr marL="0" indent="0" defTabSz="479968">
+              <a:buNone/>
+              <a:defRPr sz="2400" b="1" i="0" baseline="0">
+                <a:solidFill>
+                  <a:schemeClr val="bg2"/>
+                </a:solidFill>
+                <a:latin typeface="游ゴシック" panose="020B0400000000000000" pitchFamily="50" charset="-128"/>
+                <a:ea typeface="游ゴシック" panose="020B0400000000000000" pitchFamily="50" charset="-128"/>
+              </a:defRPr>
+            </a:lvl1pPr>
+          </a:lstStyle>
+          <a:p>
+            <a:pPr lvl="0"/>
+            <a:r>
+              <a:rPr kumimoji="1" lang="en-US" altLang="ja-JP" dirty="0"/>
+              <a:t>00</a:t>
+            </a:r>
+          </a:p>
+        </p:txBody>
+      </p:sp>
+      <p:sp>
+        <p:nvSpPr>
+          <p:cNvPr id="22" name="テキスト プレースホルダー 12">
+            <a:extLst>
+              <a:ext uri="{FF2B5EF4-FFF2-40B4-BE49-F238E27FC236}">
+                <a16:creationId xmlns:a16="http://schemas.microsoft.com/office/drawing/2014/main" id="{12D47016-60C8-2B2D-D9C9-E5162F8B9D95}"/>
+              </a:ext>
+            </a:extLst>
+          </p:cNvPr>
+          <p:cNvSpPr>
+            <a:spLocks noGrp="1"/>
+          </p:cNvSpPr>
+          <p:nvPr>
+            <p:ph type="body" sz="quarter" idx="33"/>
+          </p:nvPr>
+        </p:nvSpPr>
+        <p:spPr>
+          <a:xfrm>
+            <a:off x="6720709" y="4482833"/>
+            <a:ext cx="4571687" cy="663575"/>
+          </a:xfrm>
+          <a:prstGeom prst="rect">
+            <a:avLst/>
+          </a:prstGeom>
+        </p:spPr>
+        <p:txBody>
+          <a:bodyPr lIns="0" tIns="0" rIns="0" bIns="0">
+            <a:noAutofit/>
+          </a:bodyPr>
+          <a:lstStyle>
+            <a:lvl1pPr marL="0" indent="0" defTabSz="479968">
+              <a:buNone/>
+              <a:defRPr kumimoji="1" lang="en-US" altLang="ja-JP" sz="2400" b="0" i="0" kern="1200" dirty="0">
+                <a:solidFill>
+                  <a:schemeClr val="bg1"/>
+                </a:solidFill>
+                <a:latin typeface="Yu Gothic Medium" panose="020B0400000000000000" pitchFamily="34" charset="-128"/>
+                <a:ea typeface="Yu Gothic Medium" panose="020B0400000000000000" pitchFamily="34" charset="-128"/>
+                <a:cs typeface="+mn-cs"/>
+              </a:defRPr>
+            </a:lvl1pPr>
+          </a:lstStyle>
+          <a:p>
+            <a:pPr marL="0" lvl="0" indent="0" algn="l" defTabSz="479968" rtl="0" eaLnBrk="1" latinLnBrk="0" hangingPunct="1">
+              <a:lnSpc>
+                <a:spcPct val="90000"/>
+              </a:lnSpc>
+              <a:spcBef>
+                <a:spcPts val="1000"/>
+              </a:spcBef>
+              <a:buFont typeface="Arial" panose="020B0604020202020204" pitchFamily="34" charset="0"/>
+              <a:buNone/>
+            </a:pPr>
+            <a:r>
+              <a:rPr kumimoji="1" lang="ja-JP" altLang="en-US" dirty="0"/>
+              <a:t>マスター テキストの書式設定</a:t>
+            </a:r>
+            <a:endParaRPr kumimoji="1" lang="en-US" altLang="ja-JP" dirty="0"/>
           </a:p>
         </p:txBody>
       </p:sp>
     </p:spTree>
     <p:extLst>
       <p:ext uri="{BB962C8B-B14F-4D97-AF65-F5344CB8AC3E}">
-        <p14:creationId xmlns:p14="http://schemas.microsoft.com/office/powerpoint/2010/main" val="477627903"/>
+        <p14:creationId xmlns:p14="http://schemas.microsoft.com/office/powerpoint/2010/main" val="2360151924"/>
       </p:ext>
     </p:extLst>
   </p:cSld>
@@ -2370,9 +2249,9 @@
 </p:sldLayout>
 </file>
 
-<file path=ppt/slideLayouts/slideLayout5.xml><?xml version="1.0" encoding="utf-8"?>
+<file path=ppt/slideLayouts/slideLayout3.xml><?xml version="1.0" encoding="utf-8"?>
 <p:sldLayout xmlns:a="http://schemas.openxmlformats.org/drawingml/2006/main" xmlns:r="http://schemas.openxmlformats.org/officeDocument/2006/relationships" xmlns:p="http://schemas.openxmlformats.org/presentationml/2006/main" preserve="1" userDrawn="1">
-  <p:cSld name="タイトルページ（White_BrandPromise）1">
+  <p:cSld name="目次（BrandPromise）2">
     <p:bg>
       <p:bgPr>
         <a:blipFill dpi="0" rotWithShape="1">
@@ -2403,10 +2282,1017 @@
       </p:grpSpPr>
       <p:sp>
         <p:nvSpPr>
-          <p:cNvPr id="10" name="テキスト プレースホルダー 12">
+          <p:cNvPr id="9" name="Date Placeholder 3">
             <a:extLst>
               <a:ext uri="{FF2B5EF4-FFF2-40B4-BE49-F238E27FC236}">
-                <a16:creationId xmlns:a16="http://schemas.microsoft.com/office/drawing/2014/main" id="{A0D995C7-DCD1-BA44-4BF0-265113C3AE85}"/>
+                <a16:creationId xmlns:a16="http://schemas.microsoft.com/office/drawing/2014/main" id="{A3ADD520-9AEF-F30E-D910-19A35551EA38}"/>
+              </a:ext>
+            </a:extLst>
+          </p:cNvPr>
+          <p:cNvSpPr txBox="1">
+            <a:spLocks/>
+          </p:cNvSpPr>
+          <p:nvPr userDrawn="1"/>
+        </p:nvSpPr>
+        <p:spPr>
+          <a:xfrm>
+            <a:off x="325402" y="6394865"/>
+            <a:ext cx="2743200" cy="331932"/>
+          </a:xfrm>
+          <a:prstGeom prst="rect">
+            <a:avLst/>
+          </a:prstGeom>
+        </p:spPr>
+        <p:txBody>
+          <a:bodyPr/>
+          <a:lstStyle>
+            <a:defPPr>
+              <a:defRPr lang="en-US"/>
+            </a:defPPr>
+            <a:lvl1pPr marL="0" algn="l" defTabSz="304670" rtl="0" eaLnBrk="1" latinLnBrk="0" hangingPunct="1">
+              <a:defRPr sz="2000" b="0" i="0" kern="1200">
+                <a:solidFill>
+                  <a:srgbClr val="003D86"/>
+                </a:solidFill>
+                <a:latin typeface="Yu Gothic Medium" panose="020B0400000000000000" pitchFamily="34" charset="-128"/>
+                <a:ea typeface="Yu Gothic Medium" panose="020B0400000000000000" pitchFamily="34" charset="-128"/>
+                <a:cs typeface="+mn-cs"/>
+              </a:defRPr>
+            </a:lvl1pPr>
+            <a:lvl2pPr marL="304670" algn="l" defTabSz="304670" rtl="0" eaLnBrk="1" latinLnBrk="0" hangingPunct="1">
+              <a:defRPr sz="1200" kern="1200">
+                <a:solidFill>
+                  <a:schemeClr val="tx1"/>
+                </a:solidFill>
+                <a:latin typeface="+mn-lt"/>
+                <a:ea typeface="+mn-ea"/>
+                <a:cs typeface="+mn-cs"/>
+              </a:defRPr>
+            </a:lvl2pPr>
+            <a:lvl3pPr marL="609336" algn="l" defTabSz="304670" rtl="0" eaLnBrk="1" latinLnBrk="0" hangingPunct="1">
+              <a:defRPr sz="1200" kern="1200">
+                <a:solidFill>
+                  <a:schemeClr val="tx1"/>
+                </a:solidFill>
+                <a:latin typeface="+mn-lt"/>
+                <a:ea typeface="+mn-ea"/>
+                <a:cs typeface="+mn-cs"/>
+              </a:defRPr>
+            </a:lvl3pPr>
+            <a:lvl4pPr marL="914005" algn="l" defTabSz="304670" rtl="0" eaLnBrk="1" latinLnBrk="0" hangingPunct="1">
+              <a:defRPr sz="1200" kern="1200">
+                <a:solidFill>
+                  <a:schemeClr val="tx1"/>
+                </a:solidFill>
+                <a:latin typeface="+mn-lt"/>
+                <a:ea typeface="+mn-ea"/>
+                <a:cs typeface="+mn-cs"/>
+              </a:defRPr>
+            </a:lvl4pPr>
+            <a:lvl5pPr marL="1218672" algn="l" defTabSz="304670" rtl="0" eaLnBrk="1" latinLnBrk="0" hangingPunct="1">
+              <a:defRPr sz="1200" kern="1200">
+                <a:solidFill>
+                  <a:schemeClr val="tx1"/>
+                </a:solidFill>
+                <a:latin typeface="+mn-lt"/>
+                <a:ea typeface="+mn-ea"/>
+                <a:cs typeface="+mn-cs"/>
+              </a:defRPr>
+            </a:lvl5pPr>
+            <a:lvl6pPr marL="1523340" algn="l" defTabSz="304670" rtl="0" eaLnBrk="1" latinLnBrk="0" hangingPunct="1">
+              <a:defRPr sz="1200" kern="1200">
+                <a:solidFill>
+                  <a:schemeClr val="tx1"/>
+                </a:solidFill>
+                <a:latin typeface="+mn-lt"/>
+                <a:ea typeface="+mn-ea"/>
+                <a:cs typeface="+mn-cs"/>
+              </a:defRPr>
+            </a:lvl6pPr>
+            <a:lvl7pPr marL="1828007" algn="l" defTabSz="304670" rtl="0" eaLnBrk="1" latinLnBrk="0" hangingPunct="1">
+              <a:defRPr sz="1200" kern="1200">
+                <a:solidFill>
+                  <a:schemeClr val="tx1"/>
+                </a:solidFill>
+                <a:latin typeface="+mn-lt"/>
+                <a:ea typeface="+mn-ea"/>
+                <a:cs typeface="+mn-cs"/>
+              </a:defRPr>
+            </a:lvl7pPr>
+            <a:lvl8pPr marL="2132675" algn="l" defTabSz="304670" rtl="0" eaLnBrk="1" latinLnBrk="0" hangingPunct="1">
+              <a:defRPr sz="1200" kern="1200">
+                <a:solidFill>
+                  <a:schemeClr val="tx1"/>
+                </a:solidFill>
+                <a:latin typeface="+mn-lt"/>
+                <a:ea typeface="+mn-ea"/>
+                <a:cs typeface="+mn-cs"/>
+              </a:defRPr>
+            </a:lvl8pPr>
+            <a:lvl9pPr marL="2437344" algn="l" defTabSz="304670" rtl="0" eaLnBrk="1" latinLnBrk="0" hangingPunct="1">
+              <a:defRPr sz="1200" kern="1200">
+                <a:solidFill>
+                  <a:schemeClr val="tx1"/>
+                </a:solidFill>
+                <a:latin typeface="+mn-lt"/>
+                <a:ea typeface="+mn-ea"/>
+                <a:cs typeface="+mn-cs"/>
+              </a:defRPr>
+            </a:lvl9pPr>
+          </a:lstStyle>
+          <a:p>
+            <a:pPr algn="l"/>
+            <a:r>
+              <a:rPr kumimoji="1" lang="en" altLang="ja-JP" sz="700" baseline="0" dirty="0">
+                <a:solidFill>
+                  <a:schemeClr val="bg2"/>
+                </a:solidFill>
+                <a:latin typeface="游ゴシック" panose="020B0400000000000000" pitchFamily="50" charset="-128"/>
+                <a:ea typeface="游ゴシック" panose="020B0400000000000000" pitchFamily="50" charset="-128"/>
+              </a:rPr>
+              <a:t>ⓒ ITOCHU Techno-Solutions Corporation</a:t>
+            </a:r>
+            <a:endParaRPr kumimoji="1" lang="ja-JP" altLang="en-US" sz="700" baseline="0">
+              <a:solidFill>
+                <a:schemeClr val="bg2"/>
+              </a:solidFill>
+              <a:latin typeface="游ゴシック" panose="020B0400000000000000" pitchFamily="50" charset="-128"/>
+              <a:ea typeface="游ゴシック" panose="020B0400000000000000" pitchFamily="50" charset="-128"/>
+            </a:endParaRPr>
+          </a:p>
+        </p:txBody>
+      </p:sp>
+      <p:sp>
+        <p:nvSpPr>
+          <p:cNvPr id="10" name="Slide Number Placeholder 5">
+            <a:extLst>
+              <a:ext uri="{FF2B5EF4-FFF2-40B4-BE49-F238E27FC236}">
+                <a16:creationId xmlns:a16="http://schemas.microsoft.com/office/drawing/2014/main" id="{C4B143FC-CABC-9641-1F86-03195F7275A0}"/>
+              </a:ext>
+            </a:extLst>
+          </p:cNvPr>
+          <p:cNvSpPr txBox="1">
+            <a:spLocks/>
+          </p:cNvSpPr>
+          <p:nvPr userDrawn="1"/>
+        </p:nvSpPr>
+        <p:spPr>
+          <a:xfrm>
+            <a:off x="9133618" y="6326799"/>
+            <a:ext cx="2743200" cy="299462"/>
+          </a:xfrm>
+          <a:prstGeom prst="rect">
+            <a:avLst/>
+          </a:prstGeom>
+        </p:spPr>
+        <p:txBody>
+          <a:bodyPr anchor="b"/>
+          <a:lstStyle>
+            <a:defPPr>
+              <a:defRPr lang="en-US"/>
+            </a:defPPr>
+            <a:lvl1pPr marL="0" algn="r" defTabSz="304670" rtl="0" eaLnBrk="1" latinLnBrk="0" hangingPunct="1">
+              <a:defRPr sz="1600" b="0" i="0" kern="1200">
+                <a:solidFill>
+                  <a:srgbClr val="003D86"/>
+                </a:solidFill>
+                <a:latin typeface="Yu Gothic Medium" panose="020B0400000000000000" pitchFamily="34" charset="-128"/>
+                <a:ea typeface="Yu Gothic Medium" panose="020B0400000000000000" pitchFamily="34" charset="-128"/>
+                <a:cs typeface="+mn-cs"/>
+              </a:defRPr>
+            </a:lvl1pPr>
+            <a:lvl2pPr marL="304670" algn="l" defTabSz="304670" rtl="0" eaLnBrk="1" latinLnBrk="0" hangingPunct="1">
+              <a:defRPr sz="1200" kern="1200">
+                <a:solidFill>
+                  <a:schemeClr val="tx1"/>
+                </a:solidFill>
+                <a:latin typeface="+mn-lt"/>
+                <a:ea typeface="+mn-ea"/>
+                <a:cs typeface="+mn-cs"/>
+              </a:defRPr>
+            </a:lvl2pPr>
+            <a:lvl3pPr marL="609336" algn="l" defTabSz="304670" rtl="0" eaLnBrk="1" latinLnBrk="0" hangingPunct="1">
+              <a:defRPr sz="1200" kern="1200">
+                <a:solidFill>
+                  <a:schemeClr val="tx1"/>
+                </a:solidFill>
+                <a:latin typeface="+mn-lt"/>
+                <a:ea typeface="+mn-ea"/>
+                <a:cs typeface="+mn-cs"/>
+              </a:defRPr>
+            </a:lvl3pPr>
+            <a:lvl4pPr marL="914005" algn="l" defTabSz="304670" rtl="0" eaLnBrk="1" latinLnBrk="0" hangingPunct="1">
+              <a:defRPr sz="1200" kern="1200">
+                <a:solidFill>
+                  <a:schemeClr val="tx1"/>
+                </a:solidFill>
+                <a:latin typeface="+mn-lt"/>
+                <a:ea typeface="+mn-ea"/>
+                <a:cs typeface="+mn-cs"/>
+              </a:defRPr>
+            </a:lvl4pPr>
+            <a:lvl5pPr marL="1218672" algn="l" defTabSz="304670" rtl="0" eaLnBrk="1" latinLnBrk="0" hangingPunct="1">
+              <a:defRPr sz="1200" kern="1200">
+                <a:solidFill>
+                  <a:schemeClr val="tx1"/>
+                </a:solidFill>
+                <a:latin typeface="+mn-lt"/>
+                <a:ea typeface="+mn-ea"/>
+                <a:cs typeface="+mn-cs"/>
+              </a:defRPr>
+            </a:lvl5pPr>
+            <a:lvl6pPr marL="1523340" algn="l" defTabSz="304670" rtl="0" eaLnBrk="1" latinLnBrk="0" hangingPunct="1">
+              <a:defRPr sz="1200" kern="1200">
+                <a:solidFill>
+                  <a:schemeClr val="tx1"/>
+                </a:solidFill>
+                <a:latin typeface="+mn-lt"/>
+                <a:ea typeface="+mn-ea"/>
+                <a:cs typeface="+mn-cs"/>
+              </a:defRPr>
+            </a:lvl6pPr>
+            <a:lvl7pPr marL="1828007" algn="l" defTabSz="304670" rtl="0" eaLnBrk="1" latinLnBrk="0" hangingPunct="1">
+              <a:defRPr sz="1200" kern="1200">
+                <a:solidFill>
+                  <a:schemeClr val="tx1"/>
+                </a:solidFill>
+                <a:latin typeface="+mn-lt"/>
+                <a:ea typeface="+mn-ea"/>
+                <a:cs typeface="+mn-cs"/>
+              </a:defRPr>
+            </a:lvl7pPr>
+            <a:lvl8pPr marL="2132675" algn="l" defTabSz="304670" rtl="0" eaLnBrk="1" latinLnBrk="0" hangingPunct="1">
+              <a:defRPr sz="1200" kern="1200">
+                <a:solidFill>
+                  <a:schemeClr val="tx1"/>
+                </a:solidFill>
+                <a:latin typeface="+mn-lt"/>
+                <a:ea typeface="+mn-ea"/>
+                <a:cs typeface="+mn-cs"/>
+              </a:defRPr>
+            </a:lvl8pPr>
+            <a:lvl9pPr marL="2437344" algn="l" defTabSz="304670" rtl="0" eaLnBrk="1" latinLnBrk="0" hangingPunct="1">
+              <a:defRPr sz="1200" kern="1200">
+                <a:solidFill>
+                  <a:schemeClr val="tx1"/>
+                </a:solidFill>
+                <a:latin typeface="+mn-lt"/>
+                <a:ea typeface="+mn-ea"/>
+                <a:cs typeface="+mn-cs"/>
+              </a:defRPr>
+            </a:lvl9pPr>
+          </a:lstStyle>
+          <a:p>
+            <a:fld id="{F61D7DA0-AA9A-8342-BE3E-6EB34F8DE2BC}" type="slidenum">
+              <a:rPr kumimoji="1" lang="ja-JP" altLang="en-US" sz="1600" baseline="0" smtClean="0">
+                <a:solidFill>
+                  <a:schemeClr val="bg2"/>
+                </a:solidFill>
+                <a:latin typeface="游ゴシック" panose="020B0400000000000000" pitchFamily="50" charset="-128"/>
+                <a:ea typeface="游ゴシック" panose="020B0400000000000000" pitchFamily="50" charset="-128"/>
+              </a:rPr>
+              <a:pPr/>
+              <a:t>‹#›</a:t>
+            </a:fld>
+            <a:endParaRPr kumimoji="1" lang="ja-JP" altLang="en-US" sz="1600" baseline="0">
+              <a:solidFill>
+                <a:schemeClr val="bg2"/>
+              </a:solidFill>
+              <a:latin typeface="游ゴシック" panose="020B0400000000000000" pitchFamily="50" charset="-128"/>
+              <a:ea typeface="游ゴシック" panose="020B0400000000000000" pitchFamily="50" charset="-128"/>
+            </a:endParaRPr>
+          </a:p>
+        </p:txBody>
+      </p:sp>
+      <p:sp>
+        <p:nvSpPr>
+          <p:cNvPr id="3" name="テキスト プレースホルダー 12">
+            <a:extLst>
+              <a:ext uri="{FF2B5EF4-FFF2-40B4-BE49-F238E27FC236}">
+                <a16:creationId xmlns:a16="http://schemas.microsoft.com/office/drawing/2014/main" id="{999A443F-732A-B472-701F-E3FCA360DEE2}"/>
+              </a:ext>
+            </a:extLst>
+          </p:cNvPr>
+          <p:cNvSpPr>
+            <a:spLocks noGrp="1"/>
+          </p:cNvSpPr>
+          <p:nvPr>
+            <p:ph type="body" sz="quarter" idx="15" hasCustomPrompt="1"/>
+          </p:nvPr>
+        </p:nvSpPr>
+        <p:spPr>
+          <a:xfrm>
+            <a:off x="5215021" y="1736725"/>
+            <a:ext cx="540000" cy="3125834"/>
+          </a:xfrm>
+          <a:prstGeom prst="rect">
+            <a:avLst/>
+          </a:prstGeom>
+        </p:spPr>
+        <p:txBody>
+          <a:bodyPr lIns="0" tIns="0" rIns="0" bIns="0">
+            <a:noAutofit/>
+          </a:bodyPr>
+          <a:lstStyle>
+            <a:lvl1pPr marL="0" indent="0" defTabSz="479968">
+              <a:buNone/>
+              <a:defRPr sz="2400" b="1" i="0" baseline="0">
+                <a:solidFill>
+                  <a:schemeClr val="bg2"/>
+                </a:solidFill>
+                <a:latin typeface="游ゴシック" panose="020B0400000000000000" pitchFamily="50" charset="-128"/>
+                <a:ea typeface="游ゴシック" panose="020B0400000000000000" pitchFamily="50" charset="-128"/>
+              </a:defRPr>
+            </a:lvl1pPr>
+          </a:lstStyle>
+          <a:p>
+            <a:pPr lvl="0"/>
+            <a:r>
+              <a:rPr kumimoji="1" lang="en-US" altLang="ja-JP" dirty="0"/>
+              <a:t>00</a:t>
+            </a:r>
+          </a:p>
+          <a:p>
+            <a:pPr lvl="0"/>
+            <a:r>
+              <a:rPr kumimoji="1" lang="en-US" altLang="ja-JP" dirty="0"/>
+              <a:t>00</a:t>
+            </a:r>
+          </a:p>
+          <a:p>
+            <a:pPr lvl="0"/>
+            <a:r>
+              <a:rPr kumimoji="1" lang="en-US" altLang="ja-JP" dirty="0"/>
+              <a:t>00</a:t>
+            </a:r>
+          </a:p>
+          <a:p>
+            <a:pPr lvl="0"/>
+            <a:r>
+              <a:rPr kumimoji="1" lang="en-US" altLang="ja-JP" dirty="0"/>
+              <a:t>00</a:t>
+            </a:r>
+          </a:p>
+          <a:p>
+            <a:pPr lvl="0"/>
+            <a:r>
+              <a:rPr kumimoji="1" lang="en-US" altLang="ja-JP" dirty="0"/>
+              <a:t>00</a:t>
+            </a:r>
+          </a:p>
+          <a:p>
+            <a:pPr lvl="0"/>
+            <a:r>
+              <a:rPr kumimoji="1" lang="en-US" altLang="ja-JP" dirty="0"/>
+              <a:t>00</a:t>
+            </a:r>
+          </a:p>
+        </p:txBody>
+      </p:sp>
+      <p:sp>
+        <p:nvSpPr>
+          <p:cNvPr id="4" name="テキスト プレースホルダー 12">
+            <a:extLst>
+              <a:ext uri="{FF2B5EF4-FFF2-40B4-BE49-F238E27FC236}">
+                <a16:creationId xmlns:a16="http://schemas.microsoft.com/office/drawing/2014/main" id="{F23E55FC-F091-22F3-23B3-53139762959B}"/>
+              </a:ext>
+            </a:extLst>
+          </p:cNvPr>
+          <p:cNvSpPr>
+            <a:spLocks noGrp="1"/>
+          </p:cNvSpPr>
+          <p:nvPr>
+            <p:ph type="body" sz="quarter" idx="17"/>
+          </p:nvPr>
+        </p:nvSpPr>
+        <p:spPr>
+          <a:xfrm>
+            <a:off x="5797530" y="1736725"/>
+            <a:ext cx="5580188" cy="3125834"/>
+          </a:xfrm>
+          <a:prstGeom prst="rect">
+            <a:avLst/>
+          </a:prstGeom>
+        </p:spPr>
+        <p:txBody>
+          <a:bodyPr lIns="0" tIns="0" rIns="0" bIns="0">
+            <a:noAutofit/>
+          </a:bodyPr>
+          <a:lstStyle>
+            <a:lvl1pPr marL="0" indent="0" defTabSz="479968">
+              <a:buClr>
+                <a:schemeClr val="bg1"/>
+              </a:buClr>
+              <a:buFontTx/>
+              <a:buNone/>
+              <a:defRPr sz="2400" b="0" i="0" baseline="0">
+                <a:solidFill>
+                  <a:schemeClr val="bg2"/>
+                </a:solidFill>
+                <a:latin typeface="游ゴシック" panose="020B0400000000000000" pitchFamily="50" charset="-128"/>
+                <a:ea typeface="游ゴシック" panose="020B0400000000000000" pitchFamily="50" charset="-128"/>
+              </a:defRPr>
+            </a:lvl1pPr>
+          </a:lstStyle>
+          <a:p>
+            <a:pPr lvl="0"/>
+            <a:r>
+              <a:rPr kumimoji="1" lang="ja-JP" altLang="en-US" dirty="0"/>
+              <a:t>マスター テキストの書式設定</a:t>
+            </a:r>
+            <a:endParaRPr kumimoji="1" lang="en-US" altLang="ja-JP" dirty="0"/>
+          </a:p>
+          <a:p>
+            <a:pPr lvl="0"/>
+            <a:r>
+              <a:rPr kumimoji="1" lang="ja-JP" altLang="en-US" dirty="0"/>
+              <a:t>マスター テキストの書式設定</a:t>
+            </a:r>
+            <a:endParaRPr kumimoji="1" lang="en-US" altLang="ja-JP" dirty="0"/>
+          </a:p>
+          <a:p>
+            <a:pPr lvl="0"/>
+            <a:r>
+              <a:rPr kumimoji="1" lang="ja-JP" altLang="en-US" dirty="0"/>
+              <a:t>マスター テキストの書式設定</a:t>
+            </a:r>
+            <a:endParaRPr kumimoji="1" lang="en-US" altLang="ja-JP" dirty="0"/>
+          </a:p>
+          <a:p>
+            <a:pPr lvl="0"/>
+            <a:r>
+              <a:rPr kumimoji="1" lang="ja-JP" altLang="en-US" dirty="0"/>
+              <a:t>マスター テキストの書式設定</a:t>
+            </a:r>
+            <a:endParaRPr kumimoji="1" lang="en-US" altLang="ja-JP" dirty="0"/>
+          </a:p>
+          <a:p>
+            <a:pPr lvl="0"/>
+            <a:r>
+              <a:rPr kumimoji="1" lang="ja-JP" altLang="en-US" dirty="0"/>
+              <a:t>マスター テキストの書式設定</a:t>
+            </a:r>
+            <a:endParaRPr kumimoji="1" lang="en-US" altLang="ja-JP" dirty="0"/>
+          </a:p>
+          <a:p>
+            <a:pPr lvl="0"/>
+            <a:r>
+              <a:rPr kumimoji="1" lang="ja-JP" altLang="en-US" dirty="0"/>
+              <a:t>マスター テキストの書式設定</a:t>
+            </a:r>
+            <a:endParaRPr kumimoji="1" lang="en-US" altLang="ja-JP" dirty="0"/>
+          </a:p>
+        </p:txBody>
+      </p:sp>
+      <p:sp>
+        <p:nvSpPr>
+          <p:cNvPr id="6" name="タイトル 1">
+            <a:extLst>
+              <a:ext uri="{FF2B5EF4-FFF2-40B4-BE49-F238E27FC236}">
+                <a16:creationId xmlns:a16="http://schemas.microsoft.com/office/drawing/2014/main" id="{7A730699-D02B-17D3-E676-0A461999EAF2}"/>
+              </a:ext>
+            </a:extLst>
+          </p:cNvPr>
+          <p:cNvSpPr>
+            <a:spLocks noGrp="1"/>
+          </p:cNvSpPr>
+          <p:nvPr>
+            <p:ph type="title" hasCustomPrompt="1"/>
+          </p:nvPr>
+        </p:nvSpPr>
+        <p:spPr>
+          <a:xfrm>
+            <a:off x="396000" y="345600"/>
+            <a:ext cx="9360000" cy="364947"/>
+          </a:xfrm>
+          <a:prstGeom prst="rect">
+            <a:avLst/>
+          </a:prstGeom>
+        </p:spPr>
+        <p:txBody>
+          <a:bodyPr lIns="0" tIns="0" rIns="0" bIns="0"/>
+          <a:lstStyle>
+            <a:lvl1pPr>
+              <a:defRPr kumimoji="1" lang="ja-JP" altLang="en-US" sz="2800" b="1" i="0" kern="1200" baseline="0" dirty="0">
+                <a:solidFill>
+                  <a:schemeClr val="bg2"/>
+                </a:solidFill>
+                <a:latin typeface="游ゴシック" panose="020B0400000000000000" pitchFamily="50" charset="-128"/>
+                <a:ea typeface="游ゴシック" panose="020B0400000000000000" pitchFamily="50" charset="-128"/>
+                <a:cs typeface="+mn-cs"/>
+              </a:defRPr>
+            </a:lvl1pPr>
+          </a:lstStyle>
+          <a:p>
+            <a:pPr marL="0" lvl="0" indent="0" algn="l" defTabSz="914400" rtl="0" eaLnBrk="1" latinLnBrk="0" hangingPunct="1">
+              <a:lnSpc>
+                <a:spcPct val="90000"/>
+              </a:lnSpc>
+              <a:spcBef>
+                <a:spcPts val="1000"/>
+              </a:spcBef>
+              <a:buFont typeface="Arial" panose="020B0604020202020204" pitchFamily="34" charset="0"/>
+              <a:buNone/>
+            </a:pPr>
+            <a:r>
+              <a:rPr kumimoji="1" lang="ja-JP" altLang="en-US" dirty="0"/>
+              <a:t>目次</a:t>
+            </a:r>
+          </a:p>
+        </p:txBody>
+      </p:sp>
+    </p:spTree>
+    <p:extLst>
+      <p:ext uri="{BB962C8B-B14F-4D97-AF65-F5344CB8AC3E}">
+        <p14:creationId xmlns:p14="http://schemas.microsoft.com/office/powerpoint/2010/main" val="3716961781"/>
+      </p:ext>
+    </p:extLst>
+  </p:cSld>
+  <p:clrMapOvr>
+    <a:masterClrMapping/>
+  </p:clrMapOvr>
+</p:sldLayout>
+</file>
+
+<file path=ppt/slideLayouts/slideLayout4.xml><?xml version="1.0" encoding="utf-8"?>
+<p:sldLayout xmlns:a="http://schemas.openxmlformats.org/drawingml/2006/main" xmlns:r="http://schemas.openxmlformats.org/officeDocument/2006/relationships" xmlns:p="http://schemas.openxmlformats.org/presentationml/2006/main" preserve="1" userDrawn="1">
+  <p:cSld name="タイトルページ（BrandPromise）1">
+    <p:bg>
+      <p:bgPr>
+        <a:blipFill dpi="0" rotWithShape="1">
+          <a:blip r:embed="rId2">
+            <a:lum/>
+          </a:blip>
+          <a:srcRect/>
+          <a:stretch>
+            <a:fillRect/>
+          </a:stretch>
+        </a:blipFill>
+        <a:effectLst/>
+      </p:bgPr>
+    </p:bg>
+    <p:spTree>
+      <p:nvGrpSpPr>
+        <p:cNvPr id="1" name=""/>
+        <p:cNvGrpSpPr/>
+        <p:nvPr/>
+      </p:nvGrpSpPr>
+      <p:grpSpPr>
+        <a:xfrm>
+          <a:off x="0" y="0"/>
+          <a:ext cx="0" cy="0"/>
+          <a:chOff x="0" y="0"/>
+          <a:chExt cx="0" cy="0"/>
+        </a:xfrm>
+      </p:grpSpPr>
+      <p:sp>
+        <p:nvSpPr>
+          <p:cNvPr id="7" name="Date Placeholder 3">
+            <a:extLst>
+              <a:ext uri="{FF2B5EF4-FFF2-40B4-BE49-F238E27FC236}">
+                <a16:creationId xmlns:a16="http://schemas.microsoft.com/office/drawing/2014/main" id="{8AE19E5A-C399-4861-2D7D-879AA1F0C84F}"/>
+              </a:ext>
+            </a:extLst>
+          </p:cNvPr>
+          <p:cNvSpPr txBox="1">
+            <a:spLocks/>
+          </p:cNvSpPr>
+          <p:nvPr userDrawn="1"/>
+        </p:nvSpPr>
+        <p:spPr>
+          <a:xfrm>
+            <a:off x="325402" y="6394865"/>
+            <a:ext cx="2743200" cy="331932"/>
+          </a:xfrm>
+          <a:prstGeom prst="rect">
+            <a:avLst/>
+          </a:prstGeom>
+        </p:spPr>
+        <p:txBody>
+          <a:bodyPr/>
+          <a:lstStyle>
+            <a:defPPr>
+              <a:defRPr lang="en-US"/>
+            </a:defPPr>
+            <a:lvl1pPr marL="0" algn="l" defTabSz="304670" rtl="0" eaLnBrk="1" latinLnBrk="0" hangingPunct="1">
+              <a:defRPr sz="2000" b="0" i="0" kern="1200">
+                <a:solidFill>
+                  <a:srgbClr val="003D86"/>
+                </a:solidFill>
+                <a:latin typeface="Yu Gothic Medium" panose="020B0400000000000000" pitchFamily="34" charset="-128"/>
+                <a:ea typeface="Yu Gothic Medium" panose="020B0400000000000000" pitchFamily="34" charset="-128"/>
+                <a:cs typeface="+mn-cs"/>
+              </a:defRPr>
+            </a:lvl1pPr>
+            <a:lvl2pPr marL="304670" algn="l" defTabSz="304670" rtl="0" eaLnBrk="1" latinLnBrk="0" hangingPunct="1">
+              <a:defRPr sz="1200" kern="1200">
+                <a:solidFill>
+                  <a:schemeClr val="tx1"/>
+                </a:solidFill>
+                <a:latin typeface="+mn-lt"/>
+                <a:ea typeface="+mn-ea"/>
+                <a:cs typeface="+mn-cs"/>
+              </a:defRPr>
+            </a:lvl2pPr>
+            <a:lvl3pPr marL="609336" algn="l" defTabSz="304670" rtl="0" eaLnBrk="1" latinLnBrk="0" hangingPunct="1">
+              <a:defRPr sz="1200" kern="1200">
+                <a:solidFill>
+                  <a:schemeClr val="tx1"/>
+                </a:solidFill>
+                <a:latin typeface="+mn-lt"/>
+                <a:ea typeface="+mn-ea"/>
+                <a:cs typeface="+mn-cs"/>
+              </a:defRPr>
+            </a:lvl3pPr>
+            <a:lvl4pPr marL="914005" algn="l" defTabSz="304670" rtl="0" eaLnBrk="1" latinLnBrk="0" hangingPunct="1">
+              <a:defRPr sz="1200" kern="1200">
+                <a:solidFill>
+                  <a:schemeClr val="tx1"/>
+                </a:solidFill>
+                <a:latin typeface="+mn-lt"/>
+                <a:ea typeface="+mn-ea"/>
+                <a:cs typeface="+mn-cs"/>
+              </a:defRPr>
+            </a:lvl4pPr>
+            <a:lvl5pPr marL="1218672" algn="l" defTabSz="304670" rtl="0" eaLnBrk="1" latinLnBrk="0" hangingPunct="1">
+              <a:defRPr sz="1200" kern="1200">
+                <a:solidFill>
+                  <a:schemeClr val="tx1"/>
+                </a:solidFill>
+                <a:latin typeface="+mn-lt"/>
+                <a:ea typeface="+mn-ea"/>
+                <a:cs typeface="+mn-cs"/>
+              </a:defRPr>
+            </a:lvl5pPr>
+            <a:lvl6pPr marL="1523340" algn="l" defTabSz="304670" rtl="0" eaLnBrk="1" latinLnBrk="0" hangingPunct="1">
+              <a:defRPr sz="1200" kern="1200">
+                <a:solidFill>
+                  <a:schemeClr val="tx1"/>
+                </a:solidFill>
+                <a:latin typeface="+mn-lt"/>
+                <a:ea typeface="+mn-ea"/>
+                <a:cs typeface="+mn-cs"/>
+              </a:defRPr>
+            </a:lvl6pPr>
+            <a:lvl7pPr marL="1828007" algn="l" defTabSz="304670" rtl="0" eaLnBrk="1" latinLnBrk="0" hangingPunct="1">
+              <a:defRPr sz="1200" kern="1200">
+                <a:solidFill>
+                  <a:schemeClr val="tx1"/>
+                </a:solidFill>
+                <a:latin typeface="+mn-lt"/>
+                <a:ea typeface="+mn-ea"/>
+                <a:cs typeface="+mn-cs"/>
+              </a:defRPr>
+            </a:lvl7pPr>
+            <a:lvl8pPr marL="2132675" algn="l" defTabSz="304670" rtl="0" eaLnBrk="1" latinLnBrk="0" hangingPunct="1">
+              <a:defRPr sz="1200" kern="1200">
+                <a:solidFill>
+                  <a:schemeClr val="tx1"/>
+                </a:solidFill>
+                <a:latin typeface="+mn-lt"/>
+                <a:ea typeface="+mn-ea"/>
+                <a:cs typeface="+mn-cs"/>
+              </a:defRPr>
+            </a:lvl8pPr>
+            <a:lvl9pPr marL="2437344" algn="l" defTabSz="304670" rtl="0" eaLnBrk="1" latinLnBrk="0" hangingPunct="1">
+              <a:defRPr sz="1200" kern="1200">
+                <a:solidFill>
+                  <a:schemeClr val="tx1"/>
+                </a:solidFill>
+                <a:latin typeface="+mn-lt"/>
+                <a:ea typeface="+mn-ea"/>
+                <a:cs typeface="+mn-cs"/>
+              </a:defRPr>
+            </a:lvl9pPr>
+          </a:lstStyle>
+          <a:p>
+            <a:pPr algn="l"/>
+            <a:r>
+              <a:rPr kumimoji="1" lang="en" altLang="ja-JP" sz="700" baseline="0" dirty="0">
+                <a:solidFill>
+                  <a:schemeClr val="bg2"/>
+                </a:solidFill>
+                <a:latin typeface="游ゴシック" panose="020B0400000000000000" pitchFamily="50" charset="-128"/>
+                <a:ea typeface="游ゴシック" panose="020B0400000000000000" pitchFamily="50" charset="-128"/>
+              </a:rPr>
+              <a:t>ⓒ ITOCHU Techno-Solutions Corporation</a:t>
+            </a:r>
+            <a:endParaRPr kumimoji="1" lang="ja-JP" altLang="en-US" sz="700" baseline="0">
+              <a:solidFill>
+                <a:schemeClr val="bg2"/>
+              </a:solidFill>
+              <a:latin typeface="游ゴシック" panose="020B0400000000000000" pitchFamily="50" charset="-128"/>
+              <a:ea typeface="游ゴシック" panose="020B0400000000000000" pitchFamily="50" charset="-128"/>
+            </a:endParaRPr>
+          </a:p>
+        </p:txBody>
+      </p:sp>
+      <p:sp>
+        <p:nvSpPr>
+          <p:cNvPr id="8" name="Slide Number Placeholder 5">
+            <a:extLst>
+              <a:ext uri="{FF2B5EF4-FFF2-40B4-BE49-F238E27FC236}">
+                <a16:creationId xmlns:a16="http://schemas.microsoft.com/office/drawing/2014/main" id="{5B88EED6-B583-2F6F-A5EB-452C22B7FA9E}"/>
+              </a:ext>
+            </a:extLst>
+          </p:cNvPr>
+          <p:cNvSpPr txBox="1">
+            <a:spLocks/>
+          </p:cNvSpPr>
+          <p:nvPr userDrawn="1"/>
+        </p:nvSpPr>
+        <p:spPr>
+          <a:xfrm>
+            <a:off x="9133618" y="6326799"/>
+            <a:ext cx="2743200" cy="299462"/>
+          </a:xfrm>
+          <a:prstGeom prst="rect">
+            <a:avLst/>
+          </a:prstGeom>
+        </p:spPr>
+        <p:txBody>
+          <a:bodyPr anchor="b"/>
+          <a:lstStyle>
+            <a:defPPr>
+              <a:defRPr lang="en-US"/>
+            </a:defPPr>
+            <a:lvl1pPr marL="0" algn="r" defTabSz="304670" rtl="0" eaLnBrk="1" latinLnBrk="0" hangingPunct="1">
+              <a:defRPr sz="1600" b="0" i="0" kern="1200">
+                <a:solidFill>
+                  <a:srgbClr val="003D86"/>
+                </a:solidFill>
+                <a:latin typeface="Yu Gothic Medium" panose="020B0400000000000000" pitchFamily="34" charset="-128"/>
+                <a:ea typeface="Yu Gothic Medium" panose="020B0400000000000000" pitchFamily="34" charset="-128"/>
+                <a:cs typeface="+mn-cs"/>
+              </a:defRPr>
+            </a:lvl1pPr>
+            <a:lvl2pPr marL="304670" algn="l" defTabSz="304670" rtl="0" eaLnBrk="1" latinLnBrk="0" hangingPunct="1">
+              <a:defRPr sz="1200" kern="1200">
+                <a:solidFill>
+                  <a:schemeClr val="tx1"/>
+                </a:solidFill>
+                <a:latin typeface="+mn-lt"/>
+                <a:ea typeface="+mn-ea"/>
+                <a:cs typeface="+mn-cs"/>
+              </a:defRPr>
+            </a:lvl2pPr>
+            <a:lvl3pPr marL="609336" algn="l" defTabSz="304670" rtl="0" eaLnBrk="1" latinLnBrk="0" hangingPunct="1">
+              <a:defRPr sz="1200" kern="1200">
+                <a:solidFill>
+                  <a:schemeClr val="tx1"/>
+                </a:solidFill>
+                <a:latin typeface="+mn-lt"/>
+                <a:ea typeface="+mn-ea"/>
+                <a:cs typeface="+mn-cs"/>
+              </a:defRPr>
+            </a:lvl3pPr>
+            <a:lvl4pPr marL="914005" algn="l" defTabSz="304670" rtl="0" eaLnBrk="1" latinLnBrk="0" hangingPunct="1">
+              <a:defRPr sz="1200" kern="1200">
+                <a:solidFill>
+                  <a:schemeClr val="tx1"/>
+                </a:solidFill>
+                <a:latin typeface="+mn-lt"/>
+                <a:ea typeface="+mn-ea"/>
+                <a:cs typeface="+mn-cs"/>
+              </a:defRPr>
+            </a:lvl4pPr>
+            <a:lvl5pPr marL="1218672" algn="l" defTabSz="304670" rtl="0" eaLnBrk="1" latinLnBrk="0" hangingPunct="1">
+              <a:defRPr sz="1200" kern="1200">
+                <a:solidFill>
+                  <a:schemeClr val="tx1"/>
+                </a:solidFill>
+                <a:latin typeface="+mn-lt"/>
+                <a:ea typeface="+mn-ea"/>
+                <a:cs typeface="+mn-cs"/>
+              </a:defRPr>
+            </a:lvl5pPr>
+            <a:lvl6pPr marL="1523340" algn="l" defTabSz="304670" rtl="0" eaLnBrk="1" latinLnBrk="0" hangingPunct="1">
+              <a:defRPr sz="1200" kern="1200">
+                <a:solidFill>
+                  <a:schemeClr val="tx1"/>
+                </a:solidFill>
+                <a:latin typeface="+mn-lt"/>
+                <a:ea typeface="+mn-ea"/>
+                <a:cs typeface="+mn-cs"/>
+              </a:defRPr>
+            </a:lvl6pPr>
+            <a:lvl7pPr marL="1828007" algn="l" defTabSz="304670" rtl="0" eaLnBrk="1" latinLnBrk="0" hangingPunct="1">
+              <a:defRPr sz="1200" kern="1200">
+                <a:solidFill>
+                  <a:schemeClr val="tx1"/>
+                </a:solidFill>
+                <a:latin typeface="+mn-lt"/>
+                <a:ea typeface="+mn-ea"/>
+                <a:cs typeface="+mn-cs"/>
+              </a:defRPr>
+            </a:lvl7pPr>
+            <a:lvl8pPr marL="2132675" algn="l" defTabSz="304670" rtl="0" eaLnBrk="1" latinLnBrk="0" hangingPunct="1">
+              <a:defRPr sz="1200" kern="1200">
+                <a:solidFill>
+                  <a:schemeClr val="tx1"/>
+                </a:solidFill>
+                <a:latin typeface="+mn-lt"/>
+                <a:ea typeface="+mn-ea"/>
+                <a:cs typeface="+mn-cs"/>
+              </a:defRPr>
+            </a:lvl8pPr>
+            <a:lvl9pPr marL="2437344" algn="l" defTabSz="304670" rtl="0" eaLnBrk="1" latinLnBrk="0" hangingPunct="1">
+              <a:defRPr sz="1200" kern="1200">
+                <a:solidFill>
+                  <a:schemeClr val="tx1"/>
+                </a:solidFill>
+                <a:latin typeface="+mn-lt"/>
+                <a:ea typeface="+mn-ea"/>
+                <a:cs typeface="+mn-cs"/>
+              </a:defRPr>
+            </a:lvl9pPr>
+          </a:lstStyle>
+          <a:p>
+            <a:fld id="{F61D7DA0-AA9A-8342-BE3E-6EB34F8DE2BC}" type="slidenum">
+              <a:rPr kumimoji="1" lang="ja-JP" altLang="en-US" sz="1600" baseline="0" smtClean="0">
+                <a:solidFill>
+                  <a:schemeClr val="bg2"/>
+                </a:solidFill>
+                <a:latin typeface="游ゴシック" panose="020B0400000000000000" pitchFamily="50" charset="-128"/>
+                <a:ea typeface="游ゴシック" panose="020B0400000000000000" pitchFamily="50" charset="-128"/>
+              </a:rPr>
+              <a:pPr/>
+              <a:t>‹#›</a:t>
+            </a:fld>
+            <a:endParaRPr kumimoji="1" lang="ja-JP" altLang="en-US" sz="1600" baseline="0">
+              <a:solidFill>
+                <a:schemeClr val="bg2"/>
+              </a:solidFill>
+              <a:latin typeface="游ゴシック" panose="020B0400000000000000" pitchFamily="50" charset="-128"/>
+              <a:ea typeface="游ゴシック" panose="020B0400000000000000" pitchFamily="50" charset="-128"/>
+            </a:endParaRPr>
+          </a:p>
+        </p:txBody>
+      </p:sp>
+      <p:sp>
+        <p:nvSpPr>
+          <p:cNvPr id="3" name="Title 1">
+            <a:extLst>
+              <a:ext uri="{FF2B5EF4-FFF2-40B4-BE49-F238E27FC236}">
+                <a16:creationId xmlns:a16="http://schemas.microsoft.com/office/drawing/2014/main" id="{FEF48B94-E222-7D77-2CFF-9E2FB718F00A}"/>
+              </a:ext>
+            </a:extLst>
+          </p:cNvPr>
+          <p:cNvSpPr>
+            <a:spLocks noGrp="1"/>
+          </p:cNvSpPr>
+          <p:nvPr>
+            <p:ph type="ctrTitle"/>
+          </p:nvPr>
+        </p:nvSpPr>
+        <p:spPr>
+          <a:xfrm>
+            <a:off x="814282" y="1921292"/>
+            <a:ext cx="10563436" cy="1371445"/>
+          </a:xfrm>
+          <a:prstGeom prst="rect">
+            <a:avLst/>
+          </a:prstGeom>
+        </p:spPr>
+        <p:txBody>
+          <a:bodyPr lIns="0" tIns="0" rIns="0" bIns="0" anchor="b">
+            <a:normAutofit/>
+          </a:bodyPr>
+          <a:lstStyle>
+            <a:lvl1pPr algn="l">
+              <a:defRPr sz="3000" b="1" i="0" baseline="0">
+                <a:solidFill>
+                  <a:schemeClr val="bg2"/>
+                </a:solidFill>
+                <a:latin typeface="游ゴシック" panose="020B0400000000000000" pitchFamily="50" charset="-128"/>
+                <a:ea typeface="游ゴシック" panose="020B0400000000000000" pitchFamily="50" charset="-128"/>
+              </a:defRPr>
+            </a:lvl1pPr>
+          </a:lstStyle>
+          <a:p>
+            <a:r>
+              <a:rPr lang="ja-JP" altLang="en-US" dirty="0"/>
+              <a:t>マスター タイトルの書式設定</a:t>
+            </a:r>
+            <a:endParaRPr lang="en-US" dirty="0"/>
+          </a:p>
+        </p:txBody>
+      </p:sp>
+      <p:sp>
+        <p:nvSpPr>
+          <p:cNvPr id="5" name="テキスト プレースホルダー 12">
+            <a:extLst>
+              <a:ext uri="{FF2B5EF4-FFF2-40B4-BE49-F238E27FC236}">
+                <a16:creationId xmlns:a16="http://schemas.microsoft.com/office/drawing/2014/main" id="{8F53CC41-86F1-5FEB-59ED-3C83DAC49FB2}"/>
+              </a:ext>
+            </a:extLst>
+          </p:cNvPr>
+          <p:cNvSpPr>
+            <a:spLocks noGrp="1"/>
+          </p:cNvSpPr>
+          <p:nvPr>
+            <p:ph type="body" sz="quarter" idx="15"/>
+          </p:nvPr>
+        </p:nvSpPr>
+        <p:spPr>
+          <a:xfrm>
+            <a:off x="814282" y="3471448"/>
+            <a:ext cx="10563436" cy="1481924"/>
+          </a:xfrm>
+          <a:prstGeom prst="rect">
+            <a:avLst/>
+          </a:prstGeom>
+        </p:spPr>
+        <p:txBody>
+          <a:bodyPr lIns="0" tIns="0" rIns="0" bIns="0">
+            <a:noAutofit/>
+          </a:bodyPr>
+          <a:lstStyle>
+            <a:lvl1pPr marL="0" indent="0">
+              <a:buNone/>
+              <a:defRPr kumimoji="1" lang="ja-JP" altLang="en-US" sz="2400" kern="1200" dirty="0">
+                <a:solidFill>
+                  <a:schemeClr val="bg1"/>
+                </a:solidFill>
+                <a:latin typeface="+mn-lt"/>
+                <a:ea typeface="+mn-ea"/>
+                <a:cs typeface="+mn-cs"/>
+              </a:defRPr>
+            </a:lvl1pPr>
+          </a:lstStyle>
+          <a:p>
+            <a:pPr marL="0" lvl="0" indent="0" algn="l" defTabSz="914400" rtl="0" eaLnBrk="1" latinLnBrk="0" hangingPunct="1">
+              <a:lnSpc>
+                <a:spcPct val="90000"/>
+              </a:lnSpc>
+              <a:spcBef>
+                <a:spcPts val="1000"/>
+              </a:spcBef>
+              <a:buFont typeface="Arial" panose="020B0604020202020204" pitchFamily="34" charset="0"/>
+              <a:buNone/>
+            </a:pPr>
+            <a:r>
+              <a:rPr kumimoji="1" lang="ja-JP" altLang="en-US" dirty="0"/>
+              <a:t>マスター テキストの書式設定</a:t>
+            </a:r>
+          </a:p>
+        </p:txBody>
+      </p:sp>
+    </p:spTree>
+    <p:extLst>
+      <p:ext uri="{BB962C8B-B14F-4D97-AF65-F5344CB8AC3E}">
+        <p14:creationId xmlns:p14="http://schemas.microsoft.com/office/powerpoint/2010/main" val="2067355872"/>
+      </p:ext>
+    </p:extLst>
+  </p:cSld>
+  <p:clrMapOvr>
+    <a:masterClrMapping/>
+  </p:clrMapOvr>
+  <p:extLst>
+    <p:ext uri="{DCECCB84-F9BA-43D5-87BE-67443E8EF086}">
+      <p15:sldGuideLst xmlns:p15="http://schemas.microsoft.com/office/powerpoint/2012/main"/>
+    </p:ext>
+  </p:extLst>
+</p:sldLayout>
+</file>
+
+<file path=ppt/slideLayouts/slideLayout5.xml><?xml version="1.0" encoding="utf-8"?>
+<p:sldLayout xmlns:a="http://schemas.openxmlformats.org/drawingml/2006/main" xmlns:r="http://schemas.openxmlformats.org/officeDocument/2006/relationships" xmlns:p="http://schemas.openxmlformats.org/presentationml/2006/main" preserve="1" userDrawn="1">
+  <p:cSld name="タイトルページ（BrandPromise）2">
+    <p:bg>
+      <p:bgPr>
+        <a:blipFill dpi="0" rotWithShape="1">
+          <a:blip r:embed="rId2">
+            <a:lum/>
+          </a:blip>
+          <a:srcRect/>
+          <a:stretch>
+            <a:fillRect/>
+          </a:stretch>
+        </a:blipFill>
+        <a:effectLst/>
+      </p:bgPr>
+    </p:bg>
+    <p:spTree>
+      <p:nvGrpSpPr>
+        <p:cNvPr id="1" name=""/>
+        <p:cNvGrpSpPr/>
+        <p:nvPr/>
+      </p:nvGrpSpPr>
+      <p:grpSpPr>
+        <a:xfrm>
+          <a:off x="0" y="0"/>
+          <a:ext cx="0" cy="0"/>
+          <a:chOff x="0" y="0"/>
+          <a:chExt cx="0" cy="0"/>
+        </a:xfrm>
+      </p:grpSpPr>
+      <p:sp>
+        <p:nvSpPr>
+          <p:cNvPr id="7" name="テキスト プレースホルダー 12">
+            <a:extLst>
+              <a:ext uri="{FF2B5EF4-FFF2-40B4-BE49-F238E27FC236}">
+                <a16:creationId xmlns:a16="http://schemas.microsoft.com/office/drawing/2014/main" id="{B49D2075-5F46-8658-D08C-83AAD1EE03E9}"/>
               </a:ext>
             </a:extLst>
           </p:cNvPr>
@@ -2433,15 +3319,27 @@
           <a:lstStyle>
             <a:lvl1pPr marL="0" indent="0">
               <a:buNone/>
-              <a:defRPr sz="2400">
-                <a:solidFill>
-                  <a:srgbClr val="013C85"/>
-                </a:solidFill>
+              <a:defRPr kumimoji="1" lang="ja-JP" altLang="en-US" sz="2400" kern="1200" dirty="0">
+                <a:solidFill>
+                  <a:schemeClr val="bg1"/>
+                </a:solidFill>
+                <a:latin typeface="+mn-lt"/>
+                <a:ea typeface="+mn-ea"/>
+                <a:cs typeface="+mn-cs"/>
               </a:defRPr>
             </a:lvl1pPr>
           </a:lstStyle>
           <a:p>
-            <a:pPr lvl="0"/>
+            <a:pPr marL="0" lvl="0" indent="0" algn="l" defTabSz="914400" rtl="0" eaLnBrk="1" latinLnBrk="0" hangingPunct="1">
+              <a:lnSpc>
+                <a:spcPct val="90000"/>
+              </a:lnSpc>
+              <a:spcBef>
+                <a:spcPts val="1000"/>
+              </a:spcBef>
+              <a:buFont typeface="Arial" panose="020B0604020202020204" pitchFamily="34" charset="0"/>
+              <a:buNone/>
+            </a:pPr>
             <a:r>
               <a:rPr kumimoji="1" lang="ja-JP" altLang="en-US" dirty="0"/>
               <a:t>マスター テキストの書式設定</a:t>
@@ -2451,10 +3349,10 @@
       </p:sp>
       <p:sp>
         <p:nvSpPr>
-          <p:cNvPr id="11" name="Title 1">
+          <p:cNvPr id="8" name="Title 1">
             <a:extLst>
               <a:ext uri="{FF2B5EF4-FFF2-40B4-BE49-F238E27FC236}">
-                <a16:creationId xmlns:a16="http://schemas.microsoft.com/office/drawing/2014/main" id="{52AB5FDC-733A-C70A-FB12-285C92099A91}"/>
+                <a16:creationId xmlns:a16="http://schemas.microsoft.com/office/drawing/2014/main" id="{4B3C6615-4460-A918-DCD4-E3A933B13474}"/>
               </a:ext>
             </a:extLst>
           </p:cNvPr>
@@ -2480,12 +3378,12 @@
           </a:bodyPr>
           <a:lstStyle>
             <a:lvl1pPr algn="l">
-              <a:defRPr sz="3000" b="1" i="0">
-                <a:solidFill>
-                  <a:srgbClr val="013C85"/>
-                </a:solidFill>
-                <a:latin typeface="Yu Gothic" panose="020B0400000000000000" pitchFamily="34" charset="-128"/>
-                <a:ea typeface="Yu Gothic" panose="020B0400000000000000" pitchFamily="34" charset="-128"/>
+              <a:defRPr sz="3000" b="1" i="0" baseline="0">
+                <a:solidFill>
+                  <a:schemeClr val="bg2"/>
+                </a:solidFill>
+                <a:latin typeface="游ゴシック" panose="020B0400000000000000" pitchFamily="50" charset="-128"/>
+                <a:ea typeface="游ゴシック" panose="020B0400000000000000" pitchFamily="50" charset="-128"/>
               </a:defRPr>
             </a:lvl1pPr>
           </a:lstStyle>
@@ -2503,7 +3401,7 @@
           <p:cNvPr id="2" name="Slide Number Placeholder 5">
             <a:extLst>
               <a:ext uri="{FF2B5EF4-FFF2-40B4-BE49-F238E27FC236}">
-                <a16:creationId xmlns:a16="http://schemas.microsoft.com/office/drawing/2014/main" id="{556FBD49-6E8D-D0D0-1E72-1F8FE69ED2CA}"/>
+                <a16:creationId xmlns:a16="http://schemas.microsoft.com/office/drawing/2014/main" id="{8A4F962E-989C-44C8-D7C4-364E76AA8CE8}"/>
               </a:ext>
             </a:extLst>
           </p:cNvPr>
@@ -2620,18 +3518,22 @@
           </a:lstStyle>
           <a:p>
             <a:fld id="{F61D7DA0-AA9A-8342-BE3E-6EB34F8DE2BC}" type="slidenum">
-              <a:rPr kumimoji="1" lang="ja-JP" altLang="en-US" sz="1600" smtClean="0">
-                <a:solidFill>
-                  <a:srgbClr val="013C85"/>
-                </a:solidFill>
+              <a:rPr kumimoji="1" lang="ja-JP" altLang="en-US" sz="1600" baseline="0" smtClean="0">
+                <a:solidFill>
+                  <a:schemeClr val="bg2"/>
+                </a:solidFill>
+                <a:latin typeface="游ゴシック" panose="020B0400000000000000" pitchFamily="50" charset="-128"/>
+                <a:ea typeface="游ゴシック" panose="020B0400000000000000" pitchFamily="50" charset="-128"/>
               </a:rPr>
               <a:pPr/>
               <a:t>‹#›</a:t>
             </a:fld>
-            <a:endParaRPr kumimoji="1" lang="ja-JP" altLang="en-US" sz="1600" dirty="0">
+            <a:endParaRPr kumimoji="1" lang="ja-JP" altLang="en-US" sz="1600" baseline="0">
               <a:solidFill>
-                <a:srgbClr val="013C85"/>
+                <a:schemeClr val="bg2"/>
               </a:solidFill>
+              <a:latin typeface="游ゴシック" panose="020B0400000000000000" pitchFamily="50" charset="-128"/>
+              <a:ea typeface="游ゴシック" panose="020B0400000000000000" pitchFamily="50" charset="-128"/>
             </a:endParaRPr>
           </a:p>
         </p:txBody>
@@ -2641,7 +3543,7 @@
           <p:cNvPr id="3" name="Date Placeholder 3">
             <a:extLst>
               <a:ext uri="{FF2B5EF4-FFF2-40B4-BE49-F238E27FC236}">
-                <a16:creationId xmlns:a16="http://schemas.microsoft.com/office/drawing/2014/main" id="{78D78511-D148-0EF9-172D-DA2C6D03DE7E}"/>
+                <a16:creationId xmlns:a16="http://schemas.microsoft.com/office/drawing/2014/main" id="{59873948-0703-919A-CCC3-D30E5E5D2DAB}"/>
               </a:ext>
             </a:extLst>
           </p:cNvPr>
@@ -2759,17 +3661,21 @@
           <a:p>
             <a:pPr algn="l"/>
             <a:r>
-              <a:rPr kumimoji="1" lang="en" altLang="ja-JP" sz="700" dirty="0">
-                <a:solidFill>
-                  <a:schemeClr val="bg1"/>
-                </a:solidFill>
+              <a:rPr kumimoji="1" lang="en" altLang="ja-JP" sz="700" baseline="0" dirty="0">
+                <a:solidFill>
+                  <a:schemeClr val="bg2"/>
+                </a:solidFill>
+                <a:latin typeface="游ゴシック" panose="020B0400000000000000" pitchFamily="50" charset="-128"/>
+                <a:ea typeface="游ゴシック" panose="020B0400000000000000" pitchFamily="50" charset="-128"/>
               </a:rPr>
               <a:t>ⓒ ITOCHU Techno-Solutions Corporation</a:t>
             </a:r>
-            <a:endParaRPr kumimoji="1" lang="ja-JP" altLang="en-US" sz="700">
+            <a:endParaRPr kumimoji="1" lang="ja-JP" altLang="en-US" sz="700" baseline="0">
               <a:solidFill>
-                <a:schemeClr val="bg1"/>
+                <a:schemeClr val="bg2"/>
               </a:solidFill>
+              <a:latin typeface="游ゴシック" panose="020B0400000000000000" pitchFamily="50" charset="-128"/>
+              <a:ea typeface="游ゴシック" panose="020B0400000000000000" pitchFamily="50" charset="-128"/>
             </a:endParaRPr>
           </a:p>
         </p:txBody>
@@ -2777,7 +3683,7 @@
     </p:spTree>
     <p:extLst>
       <p:ext uri="{BB962C8B-B14F-4D97-AF65-F5344CB8AC3E}">
-        <p14:creationId xmlns:p14="http://schemas.microsoft.com/office/powerpoint/2010/main" val="3874680849"/>
+        <p14:creationId xmlns:p14="http://schemas.microsoft.com/office/powerpoint/2010/main" val="3725994275"/>
       </p:ext>
     </p:extLst>
   </p:cSld>
@@ -2794,17 +3700,12 @@
 
 <file path=ppt/slideLayouts/slideLayout6.xml><?xml version="1.0" encoding="utf-8"?>
 <p:sldLayout xmlns:a="http://schemas.openxmlformats.org/drawingml/2006/main" xmlns:r="http://schemas.openxmlformats.org/officeDocument/2006/relationships" xmlns:p="http://schemas.openxmlformats.org/presentationml/2006/main" preserve="1" userDrawn="1">
-  <p:cSld name="本文ページ（White）_1">
+  <p:cSld name="本文ページ（BrandPromise）1_1">
     <p:bg>
       <p:bgPr>
         <a:blipFill dpi="0" rotWithShape="1">
-          <a:blip r:embed="rId2" cstate="print">
+          <a:blip r:embed="rId2">
             <a:lum/>
-            <a:extLst>
-              <a:ext uri="{28A0092B-C50C-407E-A947-70E740481C1C}">
-                <a14:useLocalDpi xmlns:a14="http://schemas.microsoft.com/office/drawing/2010/main"/>
-              </a:ext>
-            </a:extLst>
           </a:blip>
           <a:srcRect/>
           <a:stretch>
@@ -2830,10 +3731,67 @@
       </p:grpSpPr>
       <p:sp>
         <p:nvSpPr>
-          <p:cNvPr id="8" name="Date Placeholder 3">
+          <p:cNvPr id="3" name="タイトル 2">
             <a:extLst>
               <a:ext uri="{FF2B5EF4-FFF2-40B4-BE49-F238E27FC236}">
-                <a16:creationId xmlns:a16="http://schemas.microsoft.com/office/drawing/2014/main" id="{4817DC41-1215-A6C0-4C88-636C2EFE7AD2}"/>
+                <a16:creationId xmlns:a16="http://schemas.microsoft.com/office/drawing/2014/main" id="{B675AF0F-7B87-9248-402A-36410A0B8967}"/>
+              </a:ext>
+            </a:extLst>
+          </p:cNvPr>
+          <p:cNvSpPr>
+            <a:spLocks noGrp="1"/>
+          </p:cNvSpPr>
+          <p:nvPr>
+            <p:ph type="title" hasCustomPrompt="1"/>
+          </p:nvPr>
+        </p:nvSpPr>
+        <p:spPr>
+          <a:xfrm>
+            <a:off x="399600" y="349200"/>
+            <a:ext cx="9358425" cy="430371"/>
+          </a:xfrm>
+          <a:prstGeom prst="rect">
+            <a:avLst/>
+          </a:prstGeom>
+        </p:spPr>
+        <p:txBody>
+          <a:bodyPr lIns="0" tIns="0" rIns="0"/>
+          <a:lstStyle>
+            <a:lvl1pPr>
+              <a:defRPr kumimoji="1" lang="ja-JP" altLang="en-US" sz="2800" b="1" i="0" kern="1200" dirty="0">
+                <a:solidFill>
+                  <a:schemeClr val="bg2"/>
+                </a:solidFill>
+                <a:latin typeface="Yu Gothic" panose="020B0400000000000000" pitchFamily="34" charset="-128"/>
+                <a:ea typeface="Yu Gothic" panose="020B0400000000000000" pitchFamily="34" charset="-128"/>
+                <a:cs typeface="+mn-cs"/>
+              </a:defRPr>
+            </a:lvl1pPr>
+          </a:lstStyle>
+          <a:p>
+            <a:pPr marL="0" lvl="0" indent="0" algn="l" defTabSz="914400" rtl="0" eaLnBrk="1" latinLnBrk="0" hangingPunct="1">
+              <a:lnSpc>
+                <a:spcPct val="90000"/>
+              </a:lnSpc>
+              <a:spcBef>
+                <a:spcPts val="1000"/>
+              </a:spcBef>
+              <a:buFont typeface="Arial" panose="020B0604020202020204" pitchFamily="34" charset="0"/>
+              <a:buNone/>
+            </a:pPr>
+            <a:r>
+              <a:rPr kumimoji="1" lang="ja-JP" altLang="en-US" dirty="0"/>
+              <a:t>タイトルの書式設定</a:t>
+            </a:r>
+          </a:p>
+        </p:txBody>
+      </p:sp>
+      <p:sp>
+        <p:nvSpPr>
+          <p:cNvPr id="2" name="Date Placeholder 3">
+            <a:extLst>
+              <a:ext uri="{FF2B5EF4-FFF2-40B4-BE49-F238E27FC236}">
+                <a16:creationId xmlns:a16="http://schemas.microsoft.com/office/drawing/2014/main" id="{2D05F00B-A01F-4E34-DFB1-FFDA344A1B1F}"/>
               </a:ext>
             </a:extLst>
           </p:cNvPr>
@@ -2953,14 +3911,14 @@
             <a:r>
               <a:rPr kumimoji="1" lang="en" altLang="ja-JP" sz="700" dirty="0">
                 <a:solidFill>
-                  <a:srgbClr val="013C85"/>
+                  <a:schemeClr val="bg2"/>
                 </a:solidFill>
               </a:rPr>
               <a:t>ⓒ ITOCHU Techno-Solutions Corporation</a:t>
             </a:r>
             <a:endParaRPr kumimoji="1" lang="ja-JP" altLang="en-US" sz="700">
               <a:solidFill>
-                <a:srgbClr val="013C85"/>
+                <a:schemeClr val="bg2"/>
               </a:solidFill>
             </a:endParaRPr>
           </a:p>
@@ -2968,10 +3926,10 @@
       </p:sp>
       <p:sp>
         <p:nvSpPr>
-          <p:cNvPr id="9" name="Slide Number Placeholder 5">
+          <p:cNvPr id="5" name="Slide Number Placeholder 5">
             <a:extLst>
               <a:ext uri="{FF2B5EF4-FFF2-40B4-BE49-F238E27FC236}">
-                <a16:creationId xmlns:a16="http://schemas.microsoft.com/office/drawing/2014/main" id="{023D640A-F364-BA6E-7B4B-222DF43A1541}"/>
+                <a16:creationId xmlns:a16="http://schemas.microsoft.com/office/drawing/2014/main" id="{88415C5B-2E93-D069-B675-2017D40F5759}"/>
               </a:ext>
             </a:extLst>
           </p:cNvPr>
@@ -3090,7 +4048,7 @@
             <a:fld id="{F61D7DA0-AA9A-8342-BE3E-6EB34F8DE2BC}" type="slidenum">
               <a:rPr kumimoji="1" lang="ja-JP" altLang="en-US" sz="1600" smtClean="0">
                 <a:solidFill>
-                  <a:srgbClr val="013C85"/>
+                  <a:schemeClr val="bg2"/>
                 </a:solidFill>
               </a:rPr>
               <a:pPr/>
@@ -3098,7 +4056,7 @@
             </a:fld>
             <a:endParaRPr kumimoji="1" lang="ja-JP" altLang="en-US" sz="1600">
               <a:solidFill>
-                <a:srgbClr val="013C85"/>
+                <a:schemeClr val="bg2"/>
               </a:solidFill>
             </a:endParaRPr>
           </a:p>
@@ -3106,10 +4064,10 @@
       </p:sp>
       <p:sp>
         <p:nvSpPr>
-          <p:cNvPr id="5" name="テキスト プレースホルダー 12">
+          <p:cNvPr id="9" name="テキスト プレースホルダー 12">
             <a:extLst>
               <a:ext uri="{FF2B5EF4-FFF2-40B4-BE49-F238E27FC236}">
-                <a16:creationId xmlns:a16="http://schemas.microsoft.com/office/drawing/2014/main" id="{D2BF2330-A7EB-FA53-0870-3EF26ACA6F67}"/>
+                <a16:creationId xmlns:a16="http://schemas.microsoft.com/office/drawing/2014/main" id="{595AE3B8-559D-4355-5E2D-72148584185D}"/>
               </a:ext>
             </a:extLst>
           </p:cNvPr>
@@ -3134,63 +4092,52 @@
             <a:noAutofit/>
           </a:bodyPr>
           <a:lstStyle>
-            <a:lvl1pPr marL="176213" indent="-176213" defTabSz="479968">
-              <a:spcBef>
-                <a:spcPts val="600"/>
-              </a:spcBef>
+            <a:lvl1pPr marL="180975" indent="-180975" defTabSz="479968">
               <a:buFont typeface="Arial" panose="020B0604020202020204" pitchFamily="34" charset="0"/>
               <a:buChar char="•"/>
+              <a:tabLst/>
               <a:defRPr sz="2800" b="0" i="0">
                 <a:solidFill>
-                  <a:srgbClr val="013C85"/>
+                  <a:schemeClr val="bg2"/>
                 </a:solidFill>
                 <a:latin typeface="Yu Gothic Medium" panose="020B0400000000000000" pitchFamily="34" charset="-128"/>
                 <a:ea typeface="Yu Gothic Medium" panose="020B0400000000000000" pitchFamily="34" charset="-128"/>
               </a:defRPr>
             </a:lvl1pPr>
-            <a:lvl2pPr marL="442913" indent="-136525">
-              <a:spcBef>
-                <a:spcPts val="600"/>
-              </a:spcBef>
+            <a:lvl2pPr marL="447675" indent="-180975">
               <a:defRPr b="0" i="0">
                 <a:solidFill>
-                  <a:srgbClr val="013C85"/>
+                  <a:schemeClr val="bg2"/>
                 </a:solidFill>
                 <a:latin typeface="Yu Gothic Medium" panose="020B0400000000000000" pitchFamily="34" charset="-128"/>
                 <a:ea typeface="Yu Gothic Medium" panose="020B0400000000000000" pitchFamily="34" charset="-128"/>
               </a:defRPr>
             </a:lvl2pPr>
-            <a:lvl3pPr marL="720725" indent="-146050">
-              <a:spcBef>
-                <a:spcPts val="600"/>
-              </a:spcBef>
+            <a:lvl3pPr marL="719138" indent="-180975">
               <a:defRPr b="0" i="0">
                 <a:solidFill>
-                  <a:srgbClr val="013C85"/>
+                  <a:schemeClr val="bg2"/>
                 </a:solidFill>
                 <a:latin typeface="Yu Gothic Medium" panose="020B0400000000000000" pitchFamily="34" charset="-128"/>
                 <a:ea typeface="Yu Gothic Medium" panose="020B0400000000000000" pitchFamily="34" charset="-128"/>
               </a:defRPr>
             </a:lvl3pPr>
-            <a:lvl4pPr marL="989013" indent="-136525">
-              <a:spcBef>
-                <a:spcPts val="600"/>
-              </a:spcBef>
+            <a:lvl4pPr marL="985838" indent="-180975">
               <a:defRPr b="0" i="0">
                 <a:solidFill>
-                  <a:srgbClr val="013C85"/>
+                  <a:schemeClr val="bg2"/>
                 </a:solidFill>
                 <a:latin typeface="Yu Gothic Medium" panose="020B0400000000000000" pitchFamily="34" charset="-128"/>
                 <a:ea typeface="Yu Gothic Medium" panose="020B0400000000000000" pitchFamily="34" charset="-128"/>
               </a:defRPr>
             </a:lvl4pPr>
-            <a:lvl5pPr marL="1255713" indent="-136525">
-              <a:spcBef>
-                <a:spcPts val="600"/>
-              </a:spcBef>
+            <a:lvl5pPr marL="1257300" indent="-180975">
+              <a:tabLst>
+                <a:tab pos="1076325" algn="l"/>
+              </a:tabLst>
               <a:defRPr b="0" i="0">
                 <a:solidFill>
-                  <a:srgbClr val="013C85"/>
+                  <a:schemeClr val="bg2"/>
                 </a:solidFill>
                 <a:latin typeface="Yu Gothic Medium" panose="020B0400000000000000" pitchFamily="34" charset="-128"/>
                 <a:ea typeface="Yu Gothic Medium" panose="020B0400000000000000" pitchFamily="34" charset="-128"/>
@@ -3252,70 +4199,13 @@
               <a:t>テキスト</a:t>
             </a:r>
             <a:endParaRPr kumimoji="1" lang="en-US" altLang="ja-JP" dirty="0"/>
-          </a:p>
-        </p:txBody>
-      </p:sp>
-      <p:sp>
-        <p:nvSpPr>
-          <p:cNvPr id="10" name="タイトル 11">
-            <a:extLst>
-              <a:ext uri="{FF2B5EF4-FFF2-40B4-BE49-F238E27FC236}">
-                <a16:creationId xmlns:a16="http://schemas.microsoft.com/office/drawing/2014/main" id="{AC814E34-4A98-288C-085A-C235D2DD9ED6}"/>
-              </a:ext>
-            </a:extLst>
-          </p:cNvPr>
-          <p:cNvSpPr>
-            <a:spLocks noGrp="1"/>
-          </p:cNvSpPr>
-          <p:nvPr>
-            <p:ph type="title" hasCustomPrompt="1"/>
-          </p:nvPr>
-        </p:nvSpPr>
-        <p:spPr>
-          <a:xfrm>
-            <a:off x="390525" y="347572"/>
-            <a:ext cx="9367501" cy="432000"/>
-          </a:xfrm>
-          <a:prstGeom prst="rect">
-            <a:avLst/>
-          </a:prstGeom>
-        </p:spPr>
-        <p:txBody>
-          <a:bodyPr lIns="0" tIns="0" rIns="0"/>
-          <a:lstStyle>
-            <a:lvl1pPr>
-              <a:defRPr kumimoji="1" lang="ja-JP" altLang="en-US" sz="2800" b="1" i="0" kern="1200" dirty="0">
-                <a:solidFill>
-                  <a:srgbClr val="013C85"/>
-                </a:solidFill>
-                <a:latin typeface="Yu Gothic" panose="020B0400000000000000" pitchFamily="34" charset="-128"/>
-                <a:ea typeface="Yu Gothic" panose="020B0400000000000000" pitchFamily="34" charset="-128"/>
-                <a:cs typeface="+mn-cs"/>
-              </a:defRPr>
-            </a:lvl1pPr>
-          </a:lstStyle>
-          <a:p>
-            <a:pPr marL="0" lvl="0" indent="0" algn="l" defTabSz="914400" rtl="0" eaLnBrk="1" latinLnBrk="0" hangingPunct="1">
-              <a:lnSpc>
-                <a:spcPct val="90000"/>
-              </a:lnSpc>
-              <a:spcBef>
-                <a:spcPts val="1000"/>
-              </a:spcBef>
-              <a:buFont typeface="Arial" panose="020B0604020202020204" pitchFamily="34" charset="0"/>
-              <a:buNone/>
-            </a:pPr>
-            <a:r>
-              <a:rPr kumimoji="1" lang="ja-JP" altLang="en-US" dirty="0"/>
-              <a:t>タイトルの書式設定</a:t>
-            </a:r>
           </a:p>
         </p:txBody>
       </p:sp>
     </p:spTree>
     <p:extLst>
       <p:ext uri="{BB962C8B-B14F-4D97-AF65-F5344CB8AC3E}">
-        <p14:creationId xmlns:p14="http://schemas.microsoft.com/office/powerpoint/2010/main" val="1134157832"/>
+        <p14:creationId xmlns:p14="http://schemas.microsoft.com/office/powerpoint/2010/main" val="1462911218"/>
       </p:ext>
     </p:extLst>
   </p:cSld>
@@ -3332,17 +4222,12 @@
 
 <file path=ppt/slideLayouts/slideLayout7.xml><?xml version="1.0" encoding="utf-8"?>
 <p:sldLayout xmlns:a="http://schemas.openxmlformats.org/drawingml/2006/main" xmlns:r="http://schemas.openxmlformats.org/officeDocument/2006/relationships" xmlns:p="http://schemas.openxmlformats.org/presentationml/2006/main" preserve="1" userDrawn="1">
-  <p:cSld name="本文ページ（White）_2">
+  <p:cSld name="本文ページ（BrandPromise）1_2">
     <p:bg>
       <p:bgPr>
         <a:blipFill dpi="0" rotWithShape="1">
-          <a:blip r:embed="rId2" cstate="print">
+          <a:blip r:embed="rId2">
             <a:lum/>
-            <a:extLst>
-              <a:ext uri="{28A0092B-C50C-407E-A947-70E740481C1C}">
-                <a14:useLocalDpi xmlns:a14="http://schemas.microsoft.com/office/drawing/2010/main"/>
-              </a:ext>
-            </a:extLst>
           </a:blip>
           <a:srcRect/>
           <a:stretch>
@@ -3368,10 +4253,10 @@
       </p:grpSpPr>
       <p:sp>
         <p:nvSpPr>
-          <p:cNvPr id="4" name="テキスト プレースホルダー 12">
+          <p:cNvPr id="2" name="テキスト プレースホルダー 12">
             <a:extLst>
               <a:ext uri="{FF2B5EF4-FFF2-40B4-BE49-F238E27FC236}">
-                <a16:creationId xmlns:a16="http://schemas.microsoft.com/office/drawing/2014/main" id="{F9155394-BEEF-1B33-612E-CF22A49FB2C2}"/>
+                <a16:creationId xmlns:a16="http://schemas.microsoft.com/office/drawing/2014/main" id="{DBD829DC-0049-3F39-DBDB-7DA5131862B2}"/>
               </a:ext>
             </a:extLst>
           </p:cNvPr>
@@ -3379,13 +4264,13 @@
             <a:spLocks noGrp="1"/>
           </p:cNvSpPr>
           <p:nvPr>
-            <p:ph type="body" sz="quarter" idx="19" hasCustomPrompt="1"/>
+            <p:ph type="body" sz="quarter" idx="15" hasCustomPrompt="1"/>
           </p:nvPr>
         </p:nvSpPr>
         <p:spPr>
           <a:xfrm>
-            <a:off x="6428054" y="1268414"/>
-            <a:ext cx="4949027" cy="4944102"/>
+            <a:off x="816856" y="1270414"/>
+            <a:ext cx="4948042" cy="4944102"/>
           </a:xfrm>
           <a:prstGeom prst="rect">
             <a:avLst/>
@@ -3396,63 +4281,51 @@
             <a:noAutofit/>
           </a:bodyPr>
           <a:lstStyle>
-            <a:lvl1pPr marL="176213" indent="-176213" defTabSz="479968">
-              <a:spcBef>
-                <a:spcPts val="600"/>
-              </a:spcBef>
+            <a:lvl1pPr marL="179388" indent="-179388" defTabSz="479968">
               <a:buFont typeface="Arial" panose="020B0604020202020204" pitchFamily="34" charset="0"/>
               <a:buChar char="•"/>
               <a:defRPr sz="2800" b="0" i="0">
                 <a:solidFill>
-                  <a:srgbClr val="013C85"/>
+                  <a:schemeClr val="bg2"/>
                 </a:solidFill>
                 <a:latin typeface="Yu Gothic Medium" panose="020B0400000000000000" pitchFamily="34" charset="-128"/>
                 <a:ea typeface="Yu Gothic Medium" panose="020B0400000000000000" pitchFamily="34" charset="-128"/>
               </a:defRPr>
             </a:lvl1pPr>
-            <a:lvl2pPr marL="442913" indent="-136525">
-              <a:spcBef>
-                <a:spcPts val="600"/>
-              </a:spcBef>
+            <a:lvl2pPr marL="447675" indent="-180975">
               <a:defRPr b="0" i="0">
                 <a:solidFill>
-                  <a:srgbClr val="013C85"/>
+                  <a:schemeClr val="bg2"/>
                 </a:solidFill>
                 <a:latin typeface="Yu Gothic Medium" panose="020B0400000000000000" pitchFamily="34" charset="-128"/>
                 <a:ea typeface="Yu Gothic Medium" panose="020B0400000000000000" pitchFamily="34" charset="-128"/>
               </a:defRPr>
             </a:lvl2pPr>
-            <a:lvl3pPr marL="720725" indent="-146050">
-              <a:spcBef>
-                <a:spcPts val="600"/>
-              </a:spcBef>
+            <a:lvl3pPr marL="719138" indent="-180975">
               <a:defRPr b="0" i="0">
                 <a:solidFill>
-                  <a:srgbClr val="013C85"/>
+                  <a:schemeClr val="bg2"/>
                 </a:solidFill>
                 <a:latin typeface="Yu Gothic Medium" panose="020B0400000000000000" pitchFamily="34" charset="-128"/>
                 <a:ea typeface="Yu Gothic Medium" panose="020B0400000000000000" pitchFamily="34" charset="-128"/>
               </a:defRPr>
             </a:lvl3pPr>
-            <a:lvl4pPr marL="989013" indent="-136525">
-              <a:spcBef>
-                <a:spcPts val="600"/>
-              </a:spcBef>
+            <a:lvl4pPr marL="985838" indent="-180975">
               <a:defRPr b="0" i="0">
                 <a:solidFill>
-                  <a:srgbClr val="013C85"/>
+                  <a:schemeClr val="bg2"/>
                 </a:solidFill>
                 <a:latin typeface="Yu Gothic Medium" panose="020B0400000000000000" pitchFamily="34" charset="-128"/>
                 <a:ea typeface="Yu Gothic Medium" panose="020B0400000000000000" pitchFamily="34" charset="-128"/>
               </a:defRPr>
             </a:lvl4pPr>
-            <a:lvl5pPr marL="1255713" indent="-136525">
-              <a:spcBef>
-                <a:spcPts val="600"/>
-              </a:spcBef>
+            <a:lvl5pPr marL="1257300" indent="-180975">
+              <a:tabLst>
+                <a:tab pos="1076325" algn="l"/>
+              </a:tabLst>
               <a:defRPr b="0" i="0">
                 <a:solidFill>
-                  <a:srgbClr val="013C85"/>
+                  <a:schemeClr val="bg2"/>
                 </a:solidFill>
                 <a:latin typeface="Yu Gothic Medium" panose="020B0400000000000000" pitchFamily="34" charset="-128"/>
                 <a:ea typeface="Yu Gothic Medium" panose="020B0400000000000000" pitchFamily="34" charset="-128"/>
@@ -3519,10 +4392,10 @@
       </p:sp>
       <p:sp>
         <p:nvSpPr>
-          <p:cNvPr id="2" name="テキスト プレースホルダー 12">
+          <p:cNvPr id="6" name="テキスト プレースホルダー 12">
             <a:extLst>
               <a:ext uri="{FF2B5EF4-FFF2-40B4-BE49-F238E27FC236}">
-                <a16:creationId xmlns:a16="http://schemas.microsoft.com/office/drawing/2014/main" id="{5F10BDFD-D91E-C798-6FA4-23E8F647FEDC}"/>
+                <a16:creationId xmlns:a16="http://schemas.microsoft.com/office/drawing/2014/main" id="{310E6BF0-BCEE-7DAB-3F79-2F0B87294F08}"/>
               </a:ext>
             </a:extLst>
           </p:cNvPr>
@@ -3535,8 +4408,8 @@
         </p:nvSpPr>
         <p:spPr>
           <a:xfrm>
-            <a:off x="814918" y="1268414"/>
-            <a:ext cx="4948392" cy="4944102"/>
+            <a:off x="6424529" y="1270414"/>
+            <a:ext cx="4950615" cy="4944102"/>
           </a:xfrm>
           <a:prstGeom prst="rect">
             <a:avLst/>
@@ -3547,63 +4420,51 @@
             <a:noAutofit/>
           </a:bodyPr>
           <a:lstStyle>
-            <a:lvl1pPr marL="176213" indent="-176213" defTabSz="479968">
-              <a:spcBef>
-                <a:spcPts val="600"/>
-              </a:spcBef>
+            <a:lvl1pPr marL="179388" indent="-179388" defTabSz="479968">
               <a:buFont typeface="Arial" panose="020B0604020202020204" pitchFamily="34" charset="0"/>
               <a:buChar char="•"/>
               <a:defRPr sz="2800" b="0" i="0">
                 <a:solidFill>
-                  <a:srgbClr val="013C85"/>
+                  <a:schemeClr val="bg2"/>
                 </a:solidFill>
                 <a:latin typeface="Yu Gothic Medium" panose="020B0400000000000000" pitchFamily="34" charset="-128"/>
                 <a:ea typeface="Yu Gothic Medium" panose="020B0400000000000000" pitchFamily="34" charset="-128"/>
               </a:defRPr>
             </a:lvl1pPr>
-            <a:lvl2pPr marL="442913" indent="-136525">
-              <a:spcBef>
-                <a:spcPts val="600"/>
-              </a:spcBef>
+            <a:lvl2pPr marL="447675" indent="-180975">
               <a:defRPr b="0" i="0">
                 <a:solidFill>
-                  <a:srgbClr val="013C85"/>
+                  <a:schemeClr val="bg2"/>
                 </a:solidFill>
                 <a:latin typeface="Yu Gothic Medium" panose="020B0400000000000000" pitchFamily="34" charset="-128"/>
                 <a:ea typeface="Yu Gothic Medium" panose="020B0400000000000000" pitchFamily="34" charset="-128"/>
               </a:defRPr>
             </a:lvl2pPr>
-            <a:lvl3pPr marL="720725" indent="-146050">
-              <a:spcBef>
-                <a:spcPts val="600"/>
-              </a:spcBef>
+            <a:lvl3pPr marL="719138" indent="-180975">
               <a:defRPr b="0" i="0">
                 <a:solidFill>
-                  <a:srgbClr val="013C85"/>
+                  <a:schemeClr val="bg2"/>
                 </a:solidFill>
                 <a:latin typeface="Yu Gothic Medium" panose="020B0400000000000000" pitchFamily="34" charset="-128"/>
                 <a:ea typeface="Yu Gothic Medium" panose="020B0400000000000000" pitchFamily="34" charset="-128"/>
               </a:defRPr>
             </a:lvl3pPr>
-            <a:lvl4pPr marL="989013" indent="-136525">
-              <a:spcBef>
-                <a:spcPts val="600"/>
-              </a:spcBef>
+            <a:lvl4pPr marL="985838" indent="-180975">
               <a:defRPr b="0" i="0">
                 <a:solidFill>
-                  <a:srgbClr val="013C85"/>
+                  <a:schemeClr val="bg2"/>
                 </a:solidFill>
                 <a:latin typeface="Yu Gothic Medium" panose="020B0400000000000000" pitchFamily="34" charset="-128"/>
                 <a:ea typeface="Yu Gothic Medium" panose="020B0400000000000000" pitchFamily="34" charset="-128"/>
               </a:defRPr>
             </a:lvl4pPr>
-            <a:lvl5pPr marL="1255713" indent="-136525">
-              <a:spcBef>
-                <a:spcPts val="600"/>
-              </a:spcBef>
+            <a:lvl5pPr marL="1257300" indent="-180975">
+              <a:tabLst>
+                <a:tab pos="1076325" algn="l"/>
+              </a:tabLst>
               <a:defRPr b="0" i="0">
                 <a:solidFill>
-                  <a:srgbClr val="013C85"/>
+                  <a:schemeClr val="bg2"/>
                 </a:solidFill>
                 <a:latin typeface="Yu Gothic Medium" panose="020B0400000000000000" pitchFamily="34" charset="-128"/>
                 <a:ea typeface="Yu Gothic Medium" panose="020B0400000000000000" pitchFamily="34" charset="-128"/>
@@ -3670,10 +4531,10 @@
       </p:sp>
       <p:sp>
         <p:nvSpPr>
-          <p:cNvPr id="8" name="Date Placeholder 3">
+          <p:cNvPr id="9" name="Date Placeholder 3">
             <a:extLst>
               <a:ext uri="{FF2B5EF4-FFF2-40B4-BE49-F238E27FC236}">
-                <a16:creationId xmlns:a16="http://schemas.microsoft.com/office/drawing/2014/main" id="{4817DC41-1215-A6C0-4C88-636C2EFE7AD2}"/>
+                <a16:creationId xmlns:a16="http://schemas.microsoft.com/office/drawing/2014/main" id="{2EFA939F-E277-912C-B89E-E2784FE7CCE1}"/>
               </a:ext>
             </a:extLst>
           </p:cNvPr>
@@ -3793,14 +4654,14 @@
             <a:r>
               <a:rPr kumimoji="1" lang="en" altLang="ja-JP" sz="700" dirty="0">
                 <a:solidFill>
-                  <a:srgbClr val="013C85"/>
+                  <a:schemeClr val="bg2"/>
                 </a:solidFill>
               </a:rPr>
               <a:t>ⓒ ITOCHU Techno-Solutions Corporation</a:t>
             </a:r>
             <a:endParaRPr kumimoji="1" lang="ja-JP" altLang="en-US" sz="700">
               <a:solidFill>
-                <a:srgbClr val="013C85"/>
+                <a:schemeClr val="bg2"/>
               </a:solidFill>
             </a:endParaRPr>
           </a:p>
@@ -3808,10 +4669,10 @@
       </p:sp>
       <p:sp>
         <p:nvSpPr>
-          <p:cNvPr id="9" name="Slide Number Placeholder 5">
+          <p:cNvPr id="10" name="Slide Number Placeholder 5">
             <a:extLst>
               <a:ext uri="{FF2B5EF4-FFF2-40B4-BE49-F238E27FC236}">
-                <a16:creationId xmlns:a16="http://schemas.microsoft.com/office/drawing/2014/main" id="{023D640A-F364-BA6E-7B4B-222DF43A1541}"/>
+                <a16:creationId xmlns:a16="http://schemas.microsoft.com/office/drawing/2014/main" id="{9977001E-1F62-7C8A-1040-7F6370353716}"/>
               </a:ext>
             </a:extLst>
           </p:cNvPr>
@@ -3930,7 +4791,7 @@
             <a:fld id="{F61D7DA0-AA9A-8342-BE3E-6EB34F8DE2BC}" type="slidenum">
               <a:rPr kumimoji="1" lang="ja-JP" altLang="en-US" sz="1600" smtClean="0">
                 <a:solidFill>
-                  <a:srgbClr val="013C85"/>
+                  <a:schemeClr val="bg2"/>
                 </a:solidFill>
               </a:rPr>
               <a:pPr/>
@@ -3938,7 +4799,7 @@
             </a:fld>
             <a:endParaRPr kumimoji="1" lang="ja-JP" altLang="en-US" sz="1600">
               <a:solidFill>
-                <a:srgbClr val="013C85"/>
+                <a:schemeClr val="bg2"/>
               </a:solidFill>
             </a:endParaRPr>
           </a:p>
@@ -3946,10 +4807,10 @@
       </p:sp>
       <p:sp>
         <p:nvSpPr>
-          <p:cNvPr id="5" name="タイトル 11">
+          <p:cNvPr id="3" name="タイトル 2">
             <a:extLst>
               <a:ext uri="{FF2B5EF4-FFF2-40B4-BE49-F238E27FC236}">
-                <a16:creationId xmlns:a16="http://schemas.microsoft.com/office/drawing/2014/main" id="{5018D083-D2AC-153C-8510-2B3811294C6B}"/>
+                <a16:creationId xmlns:a16="http://schemas.microsoft.com/office/drawing/2014/main" id="{3CD246A4-20A9-4983-E3D8-F7845E4F5953}"/>
               </a:ext>
             </a:extLst>
           </p:cNvPr>
@@ -3962,8 +4823,8 @@
         </p:nvSpPr>
         <p:spPr>
           <a:xfrm>
-            <a:off x="390525" y="347572"/>
-            <a:ext cx="9367501" cy="432000"/>
+            <a:off x="399600" y="349200"/>
+            <a:ext cx="9358425" cy="430371"/>
           </a:xfrm>
           <a:prstGeom prst="rect">
             <a:avLst/>
@@ -3975,7 +4836,7 @@
             <a:lvl1pPr>
               <a:defRPr kumimoji="1" lang="ja-JP" altLang="en-US" sz="2800" b="1" i="0" kern="1200" dirty="0">
                 <a:solidFill>
-                  <a:srgbClr val="013C85"/>
+                  <a:schemeClr val="bg2"/>
                 </a:solidFill>
                 <a:latin typeface="Yu Gothic" panose="020B0400000000000000" pitchFamily="34" charset="-128"/>
                 <a:ea typeface="Yu Gothic" panose="020B0400000000000000" pitchFamily="34" charset="-128"/>
@@ -4004,7 +4865,7 @@
     </p:spTree>
     <p:extLst>
       <p:ext uri="{BB962C8B-B14F-4D97-AF65-F5344CB8AC3E}">
-        <p14:creationId xmlns:p14="http://schemas.microsoft.com/office/powerpoint/2010/main" val="1877634845"/>
+        <p14:creationId xmlns:p14="http://schemas.microsoft.com/office/powerpoint/2010/main" val="2273962277"/>
       </p:ext>
     </p:extLst>
   </p:cSld>
@@ -4021,17 +4882,12 @@
 
 <file path=ppt/slideLayouts/slideLayout8.xml><?xml version="1.0" encoding="utf-8"?>
 <p:sldLayout xmlns:a="http://schemas.openxmlformats.org/drawingml/2006/main" xmlns:r="http://schemas.openxmlformats.org/officeDocument/2006/relationships" xmlns:p="http://schemas.openxmlformats.org/presentationml/2006/main" preserve="1" userDrawn="1">
-  <p:cSld name="本文ページ（Photo）1">
+  <p:cSld name="本文ページ（BrandPromise）2_1">
     <p:bg>
       <p:bgPr>
         <a:blipFill dpi="0" rotWithShape="1">
-          <a:blip r:embed="rId2" cstate="print">
+          <a:blip r:embed="rId2">
             <a:lum/>
-            <a:extLst>
-              <a:ext uri="{28A0092B-C50C-407E-A947-70E740481C1C}">
-                <a14:useLocalDpi xmlns:a14="http://schemas.microsoft.com/office/drawing/2010/main"/>
-              </a:ext>
-            </a:extLst>
           </a:blip>
           <a:srcRect/>
           <a:stretch>
@@ -4057,218 +4913,148 @@
       </p:grpSpPr>
       <p:sp>
         <p:nvSpPr>
-          <p:cNvPr id="5" name="タイトル 4">
+          <p:cNvPr id="2" name="Date Placeholder 3">
             <a:extLst>
               <a:ext uri="{FF2B5EF4-FFF2-40B4-BE49-F238E27FC236}">
-                <a16:creationId xmlns:a16="http://schemas.microsoft.com/office/drawing/2014/main" id="{15C3FDE2-46C8-2463-C44C-91188DA0B022}"/>
+                <a16:creationId xmlns:a16="http://schemas.microsoft.com/office/drawing/2014/main" id="{C039158A-9C9D-D34B-0201-33A03E4B1F2D}"/>
               </a:ext>
             </a:extLst>
           </p:cNvPr>
-          <p:cNvSpPr>
-            <a:spLocks noGrp="1"/>
+          <p:cNvSpPr txBox="1">
+            <a:spLocks/>
           </p:cNvSpPr>
-          <p:nvPr>
-            <p:ph type="title" hasCustomPrompt="1"/>
-          </p:nvPr>
+          <p:nvPr userDrawn="1"/>
         </p:nvSpPr>
         <p:spPr>
           <a:xfrm>
-            <a:off x="6429600" y="1741550"/>
-            <a:ext cx="4947481" cy="365125"/>
+            <a:off x="325402" y="6394865"/>
+            <a:ext cx="2743200" cy="331932"/>
           </a:xfrm>
           <a:prstGeom prst="rect">
             <a:avLst/>
           </a:prstGeom>
         </p:spPr>
         <p:txBody>
-          <a:bodyPr lIns="0" tIns="0" rIns="0" bIns="0"/>
+          <a:bodyPr/>
           <a:lstStyle>
-            <a:lvl1pPr>
-              <a:defRPr kumimoji="1" lang="ja-JP" altLang="en-US" sz="2800" b="1" i="0" kern="1200" dirty="0">
-                <a:solidFill>
-                  <a:srgbClr val="013C85"/>
-                </a:solidFill>
-                <a:latin typeface="Yu Gothic" panose="020B0400000000000000" pitchFamily="34" charset="-128"/>
-                <a:ea typeface="Yu Gothic" panose="020B0400000000000000" pitchFamily="34" charset="-128"/>
+            <a:defPPr>
+              <a:defRPr lang="en-US"/>
+            </a:defPPr>
+            <a:lvl1pPr marL="0" algn="l" defTabSz="304670" rtl="0" eaLnBrk="1" latinLnBrk="0" hangingPunct="1">
+              <a:defRPr sz="2000" b="0" i="0" kern="1200">
+                <a:solidFill>
+                  <a:srgbClr val="003D86"/>
+                </a:solidFill>
+                <a:latin typeface="Yu Gothic Medium" panose="020B0400000000000000" pitchFamily="34" charset="-128"/>
+                <a:ea typeface="Yu Gothic Medium" panose="020B0400000000000000" pitchFamily="34" charset="-128"/>
                 <a:cs typeface="+mn-cs"/>
               </a:defRPr>
             </a:lvl1pPr>
+            <a:lvl2pPr marL="304670" algn="l" defTabSz="304670" rtl="0" eaLnBrk="1" latinLnBrk="0" hangingPunct="1">
+              <a:defRPr sz="1200" kern="1200">
+                <a:solidFill>
+                  <a:schemeClr val="tx1"/>
+                </a:solidFill>
+                <a:latin typeface="+mn-lt"/>
+                <a:ea typeface="+mn-ea"/>
+                <a:cs typeface="+mn-cs"/>
+              </a:defRPr>
+            </a:lvl2pPr>
+            <a:lvl3pPr marL="609336" algn="l" defTabSz="304670" rtl="0" eaLnBrk="1" latinLnBrk="0" hangingPunct="1">
+              <a:defRPr sz="1200" kern="1200">
+                <a:solidFill>
+                  <a:schemeClr val="tx1"/>
+                </a:solidFill>
+                <a:latin typeface="+mn-lt"/>
+                <a:ea typeface="+mn-ea"/>
+                <a:cs typeface="+mn-cs"/>
+              </a:defRPr>
+            </a:lvl3pPr>
+            <a:lvl4pPr marL="914005" algn="l" defTabSz="304670" rtl="0" eaLnBrk="1" latinLnBrk="0" hangingPunct="1">
+              <a:defRPr sz="1200" kern="1200">
+                <a:solidFill>
+                  <a:schemeClr val="tx1"/>
+                </a:solidFill>
+                <a:latin typeface="+mn-lt"/>
+                <a:ea typeface="+mn-ea"/>
+                <a:cs typeface="+mn-cs"/>
+              </a:defRPr>
+            </a:lvl4pPr>
+            <a:lvl5pPr marL="1218672" algn="l" defTabSz="304670" rtl="0" eaLnBrk="1" latinLnBrk="0" hangingPunct="1">
+              <a:defRPr sz="1200" kern="1200">
+                <a:solidFill>
+                  <a:schemeClr val="tx1"/>
+                </a:solidFill>
+                <a:latin typeface="+mn-lt"/>
+                <a:ea typeface="+mn-ea"/>
+                <a:cs typeface="+mn-cs"/>
+              </a:defRPr>
+            </a:lvl5pPr>
+            <a:lvl6pPr marL="1523340" algn="l" defTabSz="304670" rtl="0" eaLnBrk="1" latinLnBrk="0" hangingPunct="1">
+              <a:defRPr sz="1200" kern="1200">
+                <a:solidFill>
+                  <a:schemeClr val="tx1"/>
+                </a:solidFill>
+                <a:latin typeface="+mn-lt"/>
+                <a:ea typeface="+mn-ea"/>
+                <a:cs typeface="+mn-cs"/>
+              </a:defRPr>
+            </a:lvl6pPr>
+            <a:lvl7pPr marL="1828007" algn="l" defTabSz="304670" rtl="0" eaLnBrk="1" latinLnBrk="0" hangingPunct="1">
+              <a:defRPr sz="1200" kern="1200">
+                <a:solidFill>
+                  <a:schemeClr val="tx1"/>
+                </a:solidFill>
+                <a:latin typeface="+mn-lt"/>
+                <a:ea typeface="+mn-ea"/>
+                <a:cs typeface="+mn-cs"/>
+              </a:defRPr>
+            </a:lvl7pPr>
+            <a:lvl8pPr marL="2132675" algn="l" defTabSz="304670" rtl="0" eaLnBrk="1" latinLnBrk="0" hangingPunct="1">
+              <a:defRPr sz="1200" kern="1200">
+                <a:solidFill>
+                  <a:schemeClr val="tx1"/>
+                </a:solidFill>
+                <a:latin typeface="+mn-lt"/>
+                <a:ea typeface="+mn-ea"/>
+                <a:cs typeface="+mn-cs"/>
+              </a:defRPr>
+            </a:lvl8pPr>
+            <a:lvl9pPr marL="2437344" algn="l" defTabSz="304670" rtl="0" eaLnBrk="1" latinLnBrk="0" hangingPunct="1">
+              <a:defRPr sz="1200" kern="1200">
+                <a:solidFill>
+                  <a:schemeClr val="tx1"/>
+                </a:solidFill>
+                <a:latin typeface="+mn-lt"/>
+                <a:ea typeface="+mn-ea"/>
+                <a:cs typeface="+mn-cs"/>
+              </a:defRPr>
+            </a:lvl9pPr>
           </a:lstStyle>
           <a:p>
-            <a:pPr marL="0" lvl="0" indent="0" algn="l" defTabSz="914400" rtl="0" eaLnBrk="1" latinLnBrk="0" hangingPunct="1">
-              <a:lnSpc>
-                <a:spcPct val="90000"/>
-              </a:lnSpc>
-              <a:spcBef>
-                <a:spcPts val="1000"/>
-              </a:spcBef>
-              <a:buFont typeface="Arial" panose="020B0604020202020204" pitchFamily="34" charset="0"/>
-              <a:buNone/>
-            </a:pPr>
-            <a:r>
-              <a:rPr kumimoji="1" lang="ja-JP" altLang="en-US" dirty="0"/>
-              <a:t>タイトルの書式設定</a:t>
-            </a:r>
+            <a:pPr algn="l"/>
+            <a:r>
+              <a:rPr kumimoji="1" lang="en" altLang="ja-JP" sz="700" dirty="0">
+                <a:solidFill>
+                  <a:schemeClr val="bg2"/>
+                </a:solidFill>
+              </a:rPr>
+              <a:t>ⓒ ITOCHU Techno-Solutions Corporation</a:t>
+            </a:r>
+            <a:endParaRPr kumimoji="1" lang="ja-JP" altLang="en-US" sz="700">
+              <a:solidFill>
+                <a:schemeClr val="bg2"/>
+              </a:solidFill>
+            </a:endParaRPr>
           </a:p>
         </p:txBody>
       </p:sp>
       <p:sp>
         <p:nvSpPr>
-          <p:cNvPr id="2" name="テキスト プレースホルダー 12">
+          <p:cNvPr id="3" name="Slide Number Placeholder 5">
             <a:extLst>
               <a:ext uri="{FF2B5EF4-FFF2-40B4-BE49-F238E27FC236}">
-                <a16:creationId xmlns:a16="http://schemas.microsoft.com/office/drawing/2014/main" id="{422F49F7-97F3-7D1C-8735-21766B5E5CD8}"/>
-              </a:ext>
-            </a:extLst>
-          </p:cNvPr>
-          <p:cNvSpPr>
-            <a:spLocks noGrp="1"/>
-          </p:cNvSpPr>
-          <p:nvPr>
-            <p:ph type="body" sz="quarter" idx="19" hasCustomPrompt="1"/>
-          </p:nvPr>
-        </p:nvSpPr>
-        <p:spPr>
-          <a:xfrm>
-            <a:off x="6428054" y="2630076"/>
-            <a:ext cx="4949027" cy="3582440"/>
-          </a:xfrm>
-          <a:prstGeom prst="rect">
-            <a:avLst/>
-          </a:prstGeom>
-        </p:spPr>
-        <p:txBody>
-          <a:bodyPr lIns="0" tIns="0" rIns="0" bIns="0">
-            <a:noAutofit/>
-          </a:bodyPr>
-          <a:lstStyle>
-            <a:lvl1pPr marL="176213" indent="-176213" defTabSz="479968">
-              <a:spcBef>
-                <a:spcPts val="600"/>
-              </a:spcBef>
-              <a:buFont typeface="Arial" panose="020B0604020202020204" pitchFamily="34" charset="0"/>
-              <a:buChar char="•"/>
-              <a:defRPr sz="2800" b="0" i="0">
-                <a:solidFill>
-                  <a:srgbClr val="013C85"/>
-                </a:solidFill>
-                <a:latin typeface="Yu Gothic Medium" panose="020B0400000000000000" pitchFamily="34" charset="-128"/>
-                <a:ea typeface="Yu Gothic Medium" panose="020B0400000000000000" pitchFamily="34" charset="-128"/>
-              </a:defRPr>
-            </a:lvl1pPr>
-            <a:lvl2pPr marL="442913" indent="-136525">
-              <a:spcBef>
-                <a:spcPts val="600"/>
-              </a:spcBef>
-              <a:defRPr b="0" i="0">
-                <a:solidFill>
-                  <a:srgbClr val="013C85"/>
-                </a:solidFill>
-                <a:latin typeface="Yu Gothic Medium" panose="020B0400000000000000" pitchFamily="34" charset="-128"/>
-                <a:ea typeface="Yu Gothic Medium" panose="020B0400000000000000" pitchFamily="34" charset="-128"/>
-              </a:defRPr>
-            </a:lvl2pPr>
-            <a:lvl3pPr marL="720725" indent="-146050">
-              <a:spcBef>
-                <a:spcPts val="600"/>
-              </a:spcBef>
-              <a:defRPr b="0" i="0">
-                <a:solidFill>
-                  <a:srgbClr val="013C85"/>
-                </a:solidFill>
-                <a:latin typeface="Yu Gothic Medium" panose="020B0400000000000000" pitchFamily="34" charset="-128"/>
-                <a:ea typeface="Yu Gothic Medium" panose="020B0400000000000000" pitchFamily="34" charset="-128"/>
-              </a:defRPr>
-            </a:lvl3pPr>
-            <a:lvl4pPr marL="989013" indent="-136525">
-              <a:spcBef>
-                <a:spcPts val="600"/>
-              </a:spcBef>
-              <a:defRPr b="0" i="0">
-                <a:solidFill>
-                  <a:srgbClr val="013C85"/>
-                </a:solidFill>
-                <a:latin typeface="Yu Gothic Medium" panose="020B0400000000000000" pitchFamily="34" charset="-128"/>
-                <a:ea typeface="Yu Gothic Medium" panose="020B0400000000000000" pitchFamily="34" charset="-128"/>
-              </a:defRPr>
-            </a:lvl4pPr>
-            <a:lvl5pPr marL="1255713" indent="-136525">
-              <a:spcBef>
-                <a:spcPts val="600"/>
-              </a:spcBef>
-              <a:defRPr b="0" i="0">
-                <a:solidFill>
-                  <a:srgbClr val="013C85"/>
-                </a:solidFill>
-                <a:latin typeface="Yu Gothic Medium" panose="020B0400000000000000" pitchFamily="34" charset="-128"/>
-                <a:ea typeface="Yu Gothic Medium" panose="020B0400000000000000" pitchFamily="34" charset="-128"/>
-              </a:defRPr>
-            </a:lvl5pPr>
-            <a:lvl6pPr>
-              <a:defRPr b="0" i="0">
-                <a:solidFill>
-                  <a:schemeClr val="bg1"/>
-                </a:solidFill>
-                <a:latin typeface="Yu Gothic Medium" panose="020B0400000000000000" pitchFamily="34" charset="-128"/>
-                <a:ea typeface="Yu Gothic Medium" panose="020B0400000000000000" pitchFamily="34" charset="-128"/>
-              </a:defRPr>
-            </a:lvl6pPr>
-            <a:lvl7pPr>
-              <a:defRPr b="0" i="0">
-                <a:solidFill>
-                  <a:schemeClr val="bg1"/>
-                </a:solidFill>
-              </a:defRPr>
-            </a:lvl7pPr>
-          </a:lstStyle>
-          <a:p>
-            <a:pPr lvl="0"/>
-            <a:r>
-              <a:rPr kumimoji="1" lang="ja-JP" altLang="en-US" dirty="0"/>
-              <a:t>テキストの書式設定</a:t>
-            </a:r>
-            <a:endParaRPr kumimoji="1" lang="en-US" altLang="ja-JP" dirty="0"/>
-          </a:p>
-          <a:p>
-            <a:pPr lvl="1"/>
-            <a:r>
-              <a:rPr kumimoji="1" lang="ja-JP" altLang="en-US" dirty="0"/>
-              <a:t>テキスト</a:t>
-            </a:r>
-            <a:endParaRPr kumimoji="1" lang="en-US" altLang="ja-JP" dirty="0"/>
-          </a:p>
-          <a:p>
-            <a:pPr lvl="2"/>
-            <a:r>
-              <a:rPr kumimoji="1" lang="ja-JP" altLang="en-US" dirty="0"/>
-              <a:t>テキスト</a:t>
-            </a:r>
-            <a:endParaRPr kumimoji="1" lang="en-US" altLang="ja-JP" dirty="0"/>
-          </a:p>
-          <a:p>
-            <a:pPr lvl="3"/>
-            <a:r>
-              <a:rPr kumimoji="1" lang="ja-JP" altLang="en-US" dirty="0"/>
-              <a:t>テキスト</a:t>
-            </a:r>
-            <a:endParaRPr kumimoji="1" lang="en-US" altLang="ja-JP" dirty="0"/>
-          </a:p>
-          <a:p>
-            <a:pPr lvl="4"/>
-            <a:r>
-              <a:rPr kumimoji="1" lang="ja-JP" altLang="en-US" dirty="0"/>
-              <a:t>テキスト</a:t>
-            </a:r>
-            <a:endParaRPr kumimoji="1" lang="en-US" altLang="ja-JP" dirty="0"/>
-          </a:p>
-        </p:txBody>
-      </p:sp>
-      <p:sp>
-        <p:nvSpPr>
-          <p:cNvPr id="16" name="Slide Number Placeholder 5">
-            <a:extLst>
-              <a:ext uri="{FF2B5EF4-FFF2-40B4-BE49-F238E27FC236}">
-                <a16:creationId xmlns:a16="http://schemas.microsoft.com/office/drawing/2014/main" id="{7897D687-90EE-4A4F-C8E7-8CBB9A645AD9}"/>
+                <a16:creationId xmlns:a16="http://schemas.microsoft.com/office/drawing/2014/main" id="{DD437AEB-C021-E2F2-EE89-620ED1D0A22F}"/>
               </a:ext>
             </a:extLst>
           </p:cNvPr>
@@ -4387,7 +5173,7 @@
             <a:fld id="{F61D7DA0-AA9A-8342-BE3E-6EB34F8DE2BC}" type="slidenum">
               <a:rPr kumimoji="1" lang="ja-JP" altLang="en-US" sz="1600" smtClean="0">
                 <a:solidFill>
-                  <a:srgbClr val="013C85"/>
+                  <a:schemeClr val="bg2"/>
                 </a:solidFill>
               </a:rPr>
               <a:pPr/>
@@ -4395,7 +5181,7 @@
             </a:fld>
             <a:endParaRPr kumimoji="1" lang="ja-JP" altLang="en-US" sz="1600">
               <a:solidFill>
-                <a:srgbClr val="013C85"/>
+                <a:schemeClr val="bg2"/>
               </a:solidFill>
             </a:endParaRPr>
           </a:p>
@@ -4403,10 +5189,10 @@
       </p:sp>
       <p:sp>
         <p:nvSpPr>
-          <p:cNvPr id="3" name="図プレースホルダー 16">
+          <p:cNvPr id="9" name="テキスト プレースホルダー 12">
             <a:extLst>
               <a:ext uri="{FF2B5EF4-FFF2-40B4-BE49-F238E27FC236}">
-                <a16:creationId xmlns:a16="http://schemas.microsoft.com/office/drawing/2014/main" id="{0250B0A2-D4B9-A4DC-0554-2326F56D8D5C}"/>
+                <a16:creationId xmlns:a16="http://schemas.microsoft.com/office/drawing/2014/main" id="{85CF175B-6024-9305-048C-39B5542FA51D}"/>
               </a:ext>
             </a:extLst>
           </p:cNvPr>
@@ -4414,61 +5200,522 @@
             <a:spLocks noGrp="1"/>
           </p:cNvSpPr>
           <p:nvPr>
-            <p:ph type="pic" sz="quarter" idx="10"/>
+            <p:ph type="body" sz="quarter" idx="15" hasCustomPrompt="1"/>
           </p:nvPr>
         </p:nvSpPr>
         <p:spPr>
           <a:xfrm>
-            <a:off x="0" y="0"/>
-            <a:ext cx="6095206" cy="6858000"/>
+            <a:off x="814918" y="1268414"/>
+            <a:ext cx="10562800" cy="4944102"/>
           </a:xfrm>
           <a:prstGeom prst="rect">
             <a:avLst/>
           </a:prstGeom>
-          <a:solidFill>
-            <a:srgbClr val="CACACA"/>
-          </a:solidFill>
         </p:spPr>
         <p:txBody>
-          <a:bodyPr/>
+          <a:bodyPr lIns="0" tIns="0" rIns="0" bIns="0">
+            <a:noAutofit/>
+          </a:bodyPr>
           <a:lstStyle>
-            <a:lvl1pPr>
-              <a:defRPr lang="ja-JP" altLang="en-US" sz="1800">
-                <a:solidFill>
-                  <a:schemeClr val="accent6"/>
-                </a:solidFill>
+            <a:lvl1pPr marL="179388" indent="-179388" defTabSz="479968">
+              <a:buFont typeface="Arial" panose="020B0604020202020204" pitchFamily="34" charset="0"/>
+              <a:buChar char="•"/>
+              <a:defRPr sz="2800" b="0" i="0">
+                <a:solidFill>
+                  <a:schemeClr val="bg2"/>
+                </a:solidFill>
+                <a:latin typeface="Yu Gothic Medium" panose="020B0400000000000000" pitchFamily="34" charset="-128"/>
+                <a:ea typeface="Yu Gothic Medium" panose="020B0400000000000000" pitchFamily="34" charset="-128"/>
               </a:defRPr>
             </a:lvl1pPr>
+            <a:lvl2pPr marL="447675" indent="-180975">
+              <a:defRPr b="0" i="0">
+                <a:solidFill>
+                  <a:schemeClr val="bg2"/>
+                </a:solidFill>
+                <a:latin typeface="Yu Gothic Medium" panose="020B0400000000000000" pitchFamily="34" charset="-128"/>
+                <a:ea typeface="Yu Gothic Medium" panose="020B0400000000000000" pitchFamily="34" charset="-128"/>
+              </a:defRPr>
+            </a:lvl2pPr>
+            <a:lvl3pPr marL="719138" indent="-180975">
+              <a:defRPr b="0" i="0">
+                <a:solidFill>
+                  <a:schemeClr val="bg2"/>
+                </a:solidFill>
+                <a:latin typeface="Yu Gothic Medium" panose="020B0400000000000000" pitchFamily="34" charset="-128"/>
+                <a:ea typeface="Yu Gothic Medium" panose="020B0400000000000000" pitchFamily="34" charset="-128"/>
+              </a:defRPr>
+            </a:lvl3pPr>
+            <a:lvl4pPr marL="985838" indent="-180975">
+              <a:defRPr b="0" i="0">
+                <a:solidFill>
+                  <a:schemeClr val="bg2"/>
+                </a:solidFill>
+                <a:latin typeface="Yu Gothic Medium" panose="020B0400000000000000" pitchFamily="34" charset="-128"/>
+                <a:ea typeface="Yu Gothic Medium" panose="020B0400000000000000" pitchFamily="34" charset="-128"/>
+              </a:defRPr>
+            </a:lvl4pPr>
+            <a:lvl5pPr marL="1257300" indent="-180975">
+              <a:tabLst>
+                <a:tab pos="1076325" algn="l"/>
+              </a:tabLst>
+              <a:defRPr b="0" i="0">
+                <a:solidFill>
+                  <a:schemeClr val="bg2"/>
+                </a:solidFill>
+                <a:latin typeface="Yu Gothic Medium" panose="020B0400000000000000" pitchFamily="34" charset="-128"/>
+                <a:ea typeface="Yu Gothic Medium" panose="020B0400000000000000" pitchFamily="34" charset="-128"/>
+              </a:defRPr>
+            </a:lvl5pPr>
+            <a:lvl6pPr>
+              <a:defRPr b="0" i="0">
+                <a:solidFill>
+                  <a:schemeClr val="bg1"/>
+                </a:solidFill>
+                <a:latin typeface="Yu Gothic Medium" panose="020B0400000000000000" pitchFamily="34" charset="-128"/>
+                <a:ea typeface="Yu Gothic Medium" panose="020B0400000000000000" pitchFamily="34" charset="-128"/>
+              </a:defRPr>
+            </a:lvl6pPr>
+            <a:lvl7pPr>
+              <a:defRPr b="0" i="0">
+                <a:solidFill>
+                  <a:schemeClr val="bg1"/>
+                </a:solidFill>
+              </a:defRPr>
+            </a:lvl7pPr>
           </a:lstStyle>
           <a:p>
-            <a:pPr marL="0" lvl="0" indent="0" algn="ctr">
-              <a:lnSpc>
-                <a:spcPct val="100000"/>
-              </a:lnSpc>
-              <a:buNone/>
-            </a:pPr>
+            <a:pPr lvl="0"/>
+            <a:r>
+              <a:rPr kumimoji="1" lang="ja-JP" altLang="en-US" dirty="0"/>
+              <a:t>テキストの書式設定</a:t>
+            </a:r>
             <a:endParaRPr kumimoji="1" lang="en-US" altLang="ja-JP" dirty="0"/>
           </a:p>
           <a:p>
-            <a:pPr marL="0" lvl="0" indent="0" algn="ctr">
-              <a:lnSpc>
-                <a:spcPct val="100000"/>
-              </a:lnSpc>
-              <a:buNone/>
-            </a:pPr>
-            <a:r>
-              <a:rPr kumimoji="1" lang="ja-JP" altLang="en-US"/>
-              <a:t>下のアイコンをクリックして画像を入れてください。</a:t>
-            </a:r>
+            <a:pPr lvl="1"/>
+            <a:r>
+              <a:rPr kumimoji="1" lang="ja-JP" altLang="en-US" dirty="0"/>
+              <a:t>テキスト</a:t>
+            </a:r>
+            <a:endParaRPr kumimoji="1" lang="en-US" altLang="ja-JP" dirty="0"/>
+          </a:p>
+          <a:p>
+            <a:pPr lvl="2"/>
+            <a:r>
+              <a:rPr kumimoji="1" lang="ja-JP" altLang="en-US" dirty="0"/>
+              <a:t>テキスト</a:t>
+            </a:r>
+            <a:endParaRPr kumimoji="1" lang="en-US" altLang="ja-JP" dirty="0"/>
+          </a:p>
+          <a:p>
+            <a:pPr lvl="3"/>
+            <a:r>
+              <a:rPr kumimoji="1" lang="ja-JP" altLang="en-US" dirty="0"/>
+              <a:t>テキスト</a:t>
+            </a:r>
+            <a:endParaRPr kumimoji="1" lang="en-US" altLang="ja-JP" dirty="0"/>
+          </a:p>
+          <a:p>
+            <a:pPr lvl="4"/>
+            <a:r>
+              <a:rPr kumimoji="1" lang="ja-JP" altLang="en-US" dirty="0"/>
+              <a:t>テキスト</a:t>
+            </a:r>
+            <a:endParaRPr kumimoji="1" lang="en-US" altLang="ja-JP" dirty="0"/>
           </a:p>
         </p:txBody>
       </p:sp>
       <p:sp>
         <p:nvSpPr>
-          <p:cNvPr id="4" name="Date Placeholder 3">
+          <p:cNvPr id="4" name="タイトル 2">
             <a:extLst>
               <a:ext uri="{FF2B5EF4-FFF2-40B4-BE49-F238E27FC236}">
-                <a16:creationId xmlns:a16="http://schemas.microsoft.com/office/drawing/2014/main" id="{F6F674F5-4E57-E04C-7651-6DF5B186CA40}"/>
+                <a16:creationId xmlns:a16="http://schemas.microsoft.com/office/drawing/2014/main" id="{DC4D89E1-6019-CD11-5098-6FDF8AC7601D}"/>
+              </a:ext>
+            </a:extLst>
+          </p:cNvPr>
+          <p:cNvSpPr>
+            <a:spLocks noGrp="1"/>
+          </p:cNvSpPr>
+          <p:nvPr>
+            <p:ph type="title" hasCustomPrompt="1"/>
+          </p:nvPr>
+        </p:nvSpPr>
+        <p:spPr>
+          <a:xfrm>
+            <a:off x="399600" y="349200"/>
+            <a:ext cx="9358425" cy="430371"/>
+          </a:xfrm>
+          <a:prstGeom prst="rect">
+            <a:avLst/>
+          </a:prstGeom>
+        </p:spPr>
+        <p:txBody>
+          <a:bodyPr lIns="0" tIns="0" rIns="0"/>
+          <a:lstStyle>
+            <a:lvl1pPr>
+              <a:defRPr kumimoji="1" lang="ja-JP" altLang="en-US" sz="2800" b="1" i="0" kern="1200" dirty="0">
+                <a:solidFill>
+                  <a:schemeClr val="bg2"/>
+                </a:solidFill>
+                <a:latin typeface="Yu Gothic" panose="020B0400000000000000" pitchFamily="34" charset="-128"/>
+                <a:ea typeface="Yu Gothic" panose="020B0400000000000000" pitchFamily="34" charset="-128"/>
+                <a:cs typeface="+mn-cs"/>
+              </a:defRPr>
+            </a:lvl1pPr>
+          </a:lstStyle>
+          <a:p>
+            <a:pPr marL="0" lvl="0" indent="0" algn="l" defTabSz="914400" rtl="0" eaLnBrk="1" latinLnBrk="0" hangingPunct="1">
+              <a:lnSpc>
+                <a:spcPct val="90000"/>
+              </a:lnSpc>
+              <a:spcBef>
+                <a:spcPts val="1000"/>
+              </a:spcBef>
+              <a:buFont typeface="Arial" panose="020B0604020202020204" pitchFamily="34" charset="0"/>
+              <a:buNone/>
+            </a:pPr>
+            <a:r>
+              <a:rPr kumimoji="1" lang="ja-JP" altLang="en-US" dirty="0"/>
+              <a:t>タイトルの書式設定</a:t>
+            </a:r>
+          </a:p>
+        </p:txBody>
+      </p:sp>
+    </p:spTree>
+    <p:extLst>
+      <p:ext uri="{BB962C8B-B14F-4D97-AF65-F5344CB8AC3E}">
+        <p14:creationId xmlns:p14="http://schemas.microsoft.com/office/powerpoint/2010/main" val="1465738429"/>
+      </p:ext>
+    </p:extLst>
+  </p:cSld>
+  <p:clrMapOvr>
+    <a:masterClrMapping/>
+  </p:clrMapOvr>
+  <p:extLst>
+    <p:ext uri="{DCECCB84-F9BA-43D5-87BE-67443E8EF086}">
+      <p15:sldGuideLst xmlns:p15="http://schemas.microsoft.com/office/powerpoint/2012/main"/>
+    </p:ext>
+  </p:extLst>
+</p:sldLayout>
+</file>
+
+<file path=ppt/slideLayouts/slideLayout9.xml><?xml version="1.0" encoding="utf-8"?>
+<p:sldLayout xmlns:a="http://schemas.openxmlformats.org/drawingml/2006/main" xmlns:r="http://schemas.openxmlformats.org/officeDocument/2006/relationships" xmlns:p="http://schemas.openxmlformats.org/presentationml/2006/main" preserve="1" userDrawn="1">
+  <p:cSld name="本文ページ（BrandPromise）2_2">
+    <p:bg>
+      <p:bgPr>
+        <a:blipFill dpi="0" rotWithShape="1">
+          <a:blip r:embed="rId2">
+            <a:lum/>
+          </a:blip>
+          <a:srcRect/>
+          <a:stretch>
+            <a:fillRect/>
+          </a:stretch>
+        </a:blipFill>
+        <a:effectLst/>
+      </p:bgPr>
+    </p:bg>
+    <p:spTree>
+      <p:nvGrpSpPr>
+        <p:cNvPr id="1" name=""/>
+        <p:cNvGrpSpPr/>
+        <p:nvPr/>
+      </p:nvGrpSpPr>
+      <p:grpSpPr>
+        <a:xfrm>
+          <a:off x="0" y="0"/>
+          <a:ext cx="0" cy="0"/>
+          <a:chOff x="0" y="0"/>
+          <a:chExt cx="0" cy="0"/>
+        </a:xfrm>
+      </p:grpSpPr>
+      <p:sp>
+        <p:nvSpPr>
+          <p:cNvPr id="2" name="テキスト プレースホルダー 12">
+            <a:extLst>
+              <a:ext uri="{FF2B5EF4-FFF2-40B4-BE49-F238E27FC236}">
+                <a16:creationId xmlns:a16="http://schemas.microsoft.com/office/drawing/2014/main" id="{5411DECF-C299-69A5-0451-143896502498}"/>
+              </a:ext>
+            </a:extLst>
+          </p:cNvPr>
+          <p:cNvSpPr>
+            <a:spLocks noGrp="1"/>
+          </p:cNvSpPr>
+          <p:nvPr>
+            <p:ph type="body" sz="quarter" idx="15" hasCustomPrompt="1"/>
+          </p:nvPr>
+        </p:nvSpPr>
+        <p:spPr>
+          <a:xfrm>
+            <a:off x="817200" y="1270800"/>
+            <a:ext cx="4948042" cy="4944102"/>
+          </a:xfrm>
+          <a:prstGeom prst="rect">
+            <a:avLst/>
+          </a:prstGeom>
+        </p:spPr>
+        <p:txBody>
+          <a:bodyPr lIns="0" tIns="0" rIns="0" bIns="0">
+            <a:noAutofit/>
+          </a:bodyPr>
+          <a:lstStyle>
+            <a:lvl1pPr marL="179388" indent="-179388" defTabSz="479968">
+              <a:buFont typeface="Arial" panose="020B0604020202020204" pitchFamily="34" charset="0"/>
+              <a:buChar char="•"/>
+              <a:defRPr sz="2800" b="0" i="0">
+                <a:solidFill>
+                  <a:schemeClr val="bg2"/>
+                </a:solidFill>
+                <a:latin typeface="Yu Gothic Medium" panose="020B0400000000000000" pitchFamily="34" charset="-128"/>
+                <a:ea typeface="Yu Gothic Medium" panose="020B0400000000000000" pitchFamily="34" charset="-128"/>
+              </a:defRPr>
+            </a:lvl1pPr>
+            <a:lvl2pPr marL="447675" indent="-180975">
+              <a:defRPr b="0" i="0">
+                <a:solidFill>
+                  <a:schemeClr val="bg2"/>
+                </a:solidFill>
+                <a:latin typeface="Yu Gothic Medium" panose="020B0400000000000000" pitchFamily="34" charset="-128"/>
+                <a:ea typeface="Yu Gothic Medium" panose="020B0400000000000000" pitchFamily="34" charset="-128"/>
+              </a:defRPr>
+            </a:lvl2pPr>
+            <a:lvl3pPr marL="719138" indent="-180975">
+              <a:defRPr b="0" i="0">
+                <a:solidFill>
+                  <a:schemeClr val="bg2"/>
+                </a:solidFill>
+                <a:latin typeface="Yu Gothic Medium" panose="020B0400000000000000" pitchFamily="34" charset="-128"/>
+                <a:ea typeface="Yu Gothic Medium" panose="020B0400000000000000" pitchFamily="34" charset="-128"/>
+              </a:defRPr>
+            </a:lvl3pPr>
+            <a:lvl4pPr marL="985838" indent="-180975">
+              <a:defRPr b="0" i="0">
+                <a:solidFill>
+                  <a:schemeClr val="bg2"/>
+                </a:solidFill>
+                <a:latin typeface="Yu Gothic Medium" panose="020B0400000000000000" pitchFamily="34" charset="-128"/>
+                <a:ea typeface="Yu Gothic Medium" panose="020B0400000000000000" pitchFamily="34" charset="-128"/>
+              </a:defRPr>
+            </a:lvl4pPr>
+            <a:lvl5pPr marL="1257300" indent="-180975">
+              <a:tabLst>
+                <a:tab pos="1076325" algn="l"/>
+              </a:tabLst>
+              <a:defRPr b="0" i="0">
+                <a:solidFill>
+                  <a:schemeClr val="bg2"/>
+                </a:solidFill>
+                <a:latin typeface="Yu Gothic Medium" panose="020B0400000000000000" pitchFamily="34" charset="-128"/>
+                <a:ea typeface="Yu Gothic Medium" panose="020B0400000000000000" pitchFamily="34" charset="-128"/>
+              </a:defRPr>
+            </a:lvl5pPr>
+            <a:lvl6pPr>
+              <a:defRPr b="0" i="0">
+                <a:solidFill>
+                  <a:schemeClr val="bg1"/>
+                </a:solidFill>
+                <a:latin typeface="Yu Gothic Medium" panose="020B0400000000000000" pitchFamily="34" charset="-128"/>
+                <a:ea typeface="Yu Gothic Medium" panose="020B0400000000000000" pitchFamily="34" charset="-128"/>
+              </a:defRPr>
+            </a:lvl6pPr>
+            <a:lvl7pPr>
+              <a:defRPr b="0" i="0">
+                <a:solidFill>
+                  <a:schemeClr val="bg1"/>
+                </a:solidFill>
+              </a:defRPr>
+            </a:lvl7pPr>
+          </a:lstStyle>
+          <a:p>
+            <a:pPr lvl="0"/>
+            <a:r>
+              <a:rPr kumimoji="1" lang="ja-JP" altLang="en-US" dirty="0"/>
+              <a:t>テキストの書式設定</a:t>
+            </a:r>
+            <a:endParaRPr kumimoji="1" lang="en-US" altLang="ja-JP" dirty="0"/>
+          </a:p>
+          <a:p>
+            <a:pPr lvl="1"/>
+            <a:r>
+              <a:rPr kumimoji="1" lang="ja-JP" altLang="en-US" dirty="0"/>
+              <a:t>テキスト</a:t>
+            </a:r>
+            <a:endParaRPr kumimoji="1" lang="en-US" altLang="ja-JP" dirty="0"/>
+          </a:p>
+          <a:p>
+            <a:pPr lvl="2"/>
+            <a:r>
+              <a:rPr kumimoji="1" lang="ja-JP" altLang="en-US" dirty="0"/>
+              <a:t>テキスト</a:t>
+            </a:r>
+            <a:endParaRPr kumimoji="1" lang="en-US" altLang="ja-JP" dirty="0"/>
+          </a:p>
+          <a:p>
+            <a:pPr lvl="3"/>
+            <a:r>
+              <a:rPr kumimoji="1" lang="ja-JP" altLang="en-US" dirty="0"/>
+              <a:t>テキスト</a:t>
+            </a:r>
+            <a:endParaRPr kumimoji="1" lang="en-US" altLang="ja-JP" dirty="0"/>
+          </a:p>
+          <a:p>
+            <a:pPr lvl="4"/>
+            <a:r>
+              <a:rPr kumimoji="1" lang="ja-JP" altLang="en-US" dirty="0"/>
+              <a:t>テキスト</a:t>
+            </a:r>
+            <a:endParaRPr kumimoji="1" lang="en-US" altLang="ja-JP" dirty="0"/>
+          </a:p>
+        </p:txBody>
+      </p:sp>
+      <p:sp>
+        <p:nvSpPr>
+          <p:cNvPr id="3" name="テキスト プレースホルダー 12">
+            <a:extLst>
+              <a:ext uri="{FF2B5EF4-FFF2-40B4-BE49-F238E27FC236}">
+                <a16:creationId xmlns:a16="http://schemas.microsoft.com/office/drawing/2014/main" id="{8F4F74A1-4514-B98B-404D-67FD74B13826}"/>
+              </a:ext>
+            </a:extLst>
+          </p:cNvPr>
+          <p:cNvSpPr>
+            <a:spLocks noGrp="1"/>
+          </p:cNvSpPr>
+          <p:nvPr>
+            <p:ph type="body" sz="quarter" idx="18" hasCustomPrompt="1"/>
+          </p:nvPr>
+        </p:nvSpPr>
+        <p:spPr>
+          <a:xfrm>
+            <a:off x="6428585" y="1282919"/>
+            <a:ext cx="4950615" cy="4944102"/>
+          </a:xfrm>
+          <a:prstGeom prst="rect">
+            <a:avLst/>
+          </a:prstGeom>
+        </p:spPr>
+        <p:txBody>
+          <a:bodyPr lIns="0" tIns="0" rIns="0" bIns="0">
+            <a:noAutofit/>
+          </a:bodyPr>
+          <a:lstStyle>
+            <a:lvl1pPr marL="179388" indent="-179388" defTabSz="479968">
+              <a:buFont typeface="Arial" panose="020B0604020202020204" pitchFamily="34" charset="0"/>
+              <a:buChar char="•"/>
+              <a:defRPr sz="2800" b="0" i="0">
+                <a:solidFill>
+                  <a:schemeClr val="bg2"/>
+                </a:solidFill>
+                <a:latin typeface="Yu Gothic Medium" panose="020B0400000000000000" pitchFamily="34" charset="-128"/>
+                <a:ea typeface="Yu Gothic Medium" panose="020B0400000000000000" pitchFamily="34" charset="-128"/>
+              </a:defRPr>
+            </a:lvl1pPr>
+            <a:lvl2pPr marL="447675" indent="-180975">
+              <a:defRPr b="0" i="0">
+                <a:solidFill>
+                  <a:schemeClr val="bg2"/>
+                </a:solidFill>
+                <a:latin typeface="Yu Gothic Medium" panose="020B0400000000000000" pitchFamily="34" charset="-128"/>
+                <a:ea typeface="Yu Gothic Medium" panose="020B0400000000000000" pitchFamily="34" charset="-128"/>
+              </a:defRPr>
+            </a:lvl2pPr>
+            <a:lvl3pPr marL="719138" indent="-180975">
+              <a:defRPr b="0" i="0">
+                <a:solidFill>
+                  <a:schemeClr val="bg2"/>
+                </a:solidFill>
+                <a:latin typeface="Yu Gothic Medium" panose="020B0400000000000000" pitchFamily="34" charset="-128"/>
+                <a:ea typeface="Yu Gothic Medium" panose="020B0400000000000000" pitchFamily="34" charset="-128"/>
+              </a:defRPr>
+            </a:lvl3pPr>
+            <a:lvl4pPr marL="985838" indent="-180975">
+              <a:defRPr b="0" i="0">
+                <a:solidFill>
+                  <a:schemeClr val="bg2"/>
+                </a:solidFill>
+                <a:latin typeface="Yu Gothic Medium" panose="020B0400000000000000" pitchFamily="34" charset="-128"/>
+                <a:ea typeface="Yu Gothic Medium" panose="020B0400000000000000" pitchFamily="34" charset="-128"/>
+              </a:defRPr>
+            </a:lvl4pPr>
+            <a:lvl5pPr marL="1257300" indent="-180975">
+              <a:tabLst>
+                <a:tab pos="1076325" algn="l"/>
+              </a:tabLst>
+              <a:defRPr b="0" i="0">
+                <a:solidFill>
+                  <a:schemeClr val="bg2"/>
+                </a:solidFill>
+                <a:latin typeface="Yu Gothic Medium" panose="020B0400000000000000" pitchFamily="34" charset="-128"/>
+                <a:ea typeface="Yu Gothic Medium" panose="020B0400000000000000" pitchFamily="34" charset="-128"/>
+              </a:defRPr>
+            </a:lvl5pPr>
+            <a:lvl6pPr>
+              <a:defRPr b="0" i="0">
+                <a:solidFill>
+                  <a:schemeClr val="bg1"/>
+                </a:solidFill>
+                <a:latin typeface="Yu Gothic Medium" panose="020B0400000000000000" pitchFamily="34" charset="-128"/>
+                <a:ea typeface="Yu Gothic Medium" panose="020B0400000000000000" pitchFamily="34" charset="-128"/>
+              </a:defRPr>
+            </a:lvl6pPr>
+            <a:lvl7pPr>
+              <a:defRPr b="0" i="0">
+                <a:solidFill>
+                  <a:schemeClr val="bg1"/>
+                </a:solidFill>
+              </a:defRPr>
+            </a:lvl7pPr>
+          </a:lstStyle>
+          <a:p>
+            <a:pPr lvl="0"/>
+            <a:r>
+              <a:rPr kumimoji="1" lang="ja-JP" altLang="en-US" dirty="0"/>
+              <a:t>テキストの書式設定</a:t>
+            </a:r>
+            <a:endParaRPr kumimoji="1" lang="en-US" altLang="ja-JP" dirty="0"/>
+          </a:p>
+          <a:p>
+            <a:pPr lvl="1"/>
+            <a:r>
+              <a:rPr kumimoji="1" lang="ja-JP" altLang="en-US" dirty="0"/>
+              <a:t>テキスト</a:t>
+            </a:r>
+            <a:endParaRPr kumimoji="1" lang="en-US" altLang="ja-JP" dirty="0"/>
+          </a:p>
+          <a:p>
+            <a:pPr lvl="2"/>
+            <a:r>
+              <a:rPr kumimoji="1" lang="ja-JP" altLang="en-US" dirty="0"/>
+              <a:t>テキスト</a:t>
+            </a:r>
+            <a:endParaRPr kumimoji="1" lang="en-US" altLang="ja-JP" dirty="0"/>
+          </a:p>
+          <a:p>
+            <a:pPr lvl="3"/>
+            <a:r>
+              <a:rPr kumimoji="1" lang="ja-JP" altLang="en-US" dirty="0"/>
+              <a:t>テキスト</a:t>
+            </a:r>
+            <a:endParaRPr kumimoji="1" lang="en-US" altLang="ja-JP" dirty="0"/>
+          </a:p>
+          <a:p>
+            <a:pPr lvl="4"/>
+            <a:r>
+              <a:rPr kumimoji="1" lang="ja-JP" altLang="en-US" dirty="0"/>
+              <a:t>テキスト</a:t>
+            </a:r>
+            <a:endParaRPr kumimoji="1" lang="en-US" altLang="ja-JP" dirty="0"/>
+          </a:p>
+        </p:txBody>
+      </p:sp>
+      <p:sp>
+        <p:nvSpPr>
+          <p:cNvPr id="5" name="Date Placeholder 3">
+            <a:extLst>
+              <a:ext uri="{FF2B5EF4-FFF2-40B4-BE49-F238E27FC236}">
+                <a16:creationId xmlns:a16="http://schemas.microsoft.com/office/drawing/2014/main" id="{A3D03859-B735-5B46-EA88-4FE6F7498165}"/>
               </a:ext>
             </a:extLst>
           </p:cNvPr>
@@ -4588,269 +5835,25 @@
             <a:r>
               <a:rPr kumimoji="1" lang="en" altLang="ja-JP" sz="700" dirty="0">
                 <a:solidFill>
-                  <a:srgbClr val="013C85"/>
+                  <a:schemeClr val="bg2"/>
                 </a:solidFill>
               </a:rPr>
               <a:t>ⓒ ITOCHU Techno-Solutions Corporation</a:t>
             </a:r>
-            <a:endParaRPr kumimoji="1" lang="ja-JP" altLang="en-US" sz="700" dirty="0">
+            <a:endParaRPr kumimoji="1" lang="ja-JP" altLang="en-US" sz="700">
               <a:solidFill>
-                <a:srgbClr val="013C85"/>
+                <a:schemeClr val="bg2"/>
               </a:solidFill>
             </a:endParaRPr>
-          </a:p>
-        </p:txBody>
-      </p:sp>
-    </p:spTree>
-    <p:extLst>
-      <p:ext uri="{BB962C8B-B14F-4D97-AF65-F5344CB8AC3E}">
-        <p14:creationId xmlns:p14="http://schemas.microsoft.com/office/powerpoint/2010/main" val="4137657078"/>
-      </p:ext>
-    </p:extLst>
-  </p:cSld>
-  <p:clrMapOvr>
-    <a:masterClrMapping/>
-  </p:clrMapOvr>
-</p:sldLayout>
-</file>
-
-<file path=ppt/slideLayouts/slideLayout9.xml><?xml version="1.0" encoding="utf-8"?>
-<p:sldLayout xmlns:a="http://schemas.openxmlformats.org/drawingml/2006/main" xmlns:r="http://schemas.openxmlformats.org/officeDocument/2006/relationships" xmlns:p="http://schemas.openxmlformats.org/presentationml/2006/main" preserve="1" userDrawn="1">
-  <p:cSld name="本文ページ（Photo）2">
-    <p:bg>
-      <p:bgPr>
-        <a:blipFill dpi="0" rotWithShape="1">
-          <a:blip r:embed="rId2" cstate="print">
-            <a:lum/>
-            <a:extLst>
-              <a:ext uri="{28A0092B-C50C-407E-A947-70E740481C1C}">
-                <a14:useLocalDpi xmlns:a14="http://schemas.microsoft.com/office/drawing/2010/main"/>
-              </a:ext>
-            </a:extLst>
-          </a:blip>
-          <a:srcRect/>
-          <a:stretch>
-            <a:fillRect/>
-          </a:stretch>
-        </a:blipFill>
-        <a:effectLst/>
-      </p:bgPr>
-    </p:bg>
-    <p:spTree>
-      <p:nvGrpSpPr>
-        <p:cNvPr id="1" name=""/>
-        <p:cNvGrpSpPr/>
-        <p:nvPr/>
-      </p:nvGrpSpPr>
-      <p:grpSpPr>
-        <a:xfrm>
-          <a:off x="0" y="0"/>
-          <a:ext cx="0" cy="0"/>
-          <a:chOff x="0" y="0"/>
-          <a:chExt cx="0" cy="0"/>
-        </a:xfrm>
-      </p:grpSpPr>
-      <p:sp>
-        <p:nvSpPr>
-          <p:cNvPr id="10" name="図プレースホルダー 16">
-            <a:extLst>
-              <a:ext uri="{FF2B5EF4-FFF2-40B4-BE49-F238E27FC236}">
-                <a16:creationId xmlns:a16="http://schemas.microsoft.com/office/drawing/2014/main" id="{40FE2F04-6B75-1C75-F9DF-825DA93754B6}"/>
-              </a:ext>
-            </a:extLst>
-          </p:cNvPr>
-          <p:cNvSpPr>
-            <a:spLocks noGrp="1"/>
-          </p:cNvSpPr>
-          <p:nvPr>
-            <p:ph type="pic" sz="quarter" idx="10"/>
-          </p:nvPr>
-        </p:nvSpPr>
-        <p:spPr>
-          <a:xfrm>
-            <a:off x="0" y="1736726"/>
-            <a:ext cx="12192000" cy="5121275"/>
-          </a:xfrm>
-          <a:prstGeom prst="rect">
-            <a:avLst/>
-          </a:prstGeom>
-          <a:solidFill>
-            <a:srgbClr val="CACACA"/>
-          </a:solidFill>
-        </p:spPr>
-        <p:txBody>
-          <a:bodyPr/>
-          <a:lstStyle>
-            <a:lvl1pPr marL="0" indent="0" algn="ctr">
-              <a:lnSpc>
-                <a:spcPct val="100000"/>
-              </a:lnSpc>
-              <a:buNone/>
-              <a:defRPr sz="1800">
-                <a:solidFill>
-                  <a:schemeClr val="accent6"/>
-                </a:solidFill>
-              </a:defRPr>
-            </a:lvl1pPr>
-          </a:lstStyle>
-          <a:p>
-            <a:endParaRPr kumimoji="1" lang="en-US" altLang="ja-JP" dirty="0"/>
-          </a:p>
-          <a:p>
-            <a:endParaRPr kumimoji="1" lang="en-US" altLang="ja-JP" dirty="0"/>
-          </a:p>
-          <a:p>
-            <a:r>
-              <a:rPr kumimoji="1" lang="ja-JP" altLang="en-US"/>
-              <a:t>下のアイコンをクリックして画像を入れてください。</a:t>
-            </a:r>
           </a:p>
         </p:txBody>
       </p:sp>
       <p:sp>
         <p:nvSpPr>
-          <p:cNvPr id="8" name="Date Placeholder 3">
+          <p:cNvPr id="6" name="Slide Number Placeholder 5">
             <a:extLst>
               <a:ext uri="{FF2B5EF4-FFF2-40B4-BE49-F238E27FC236}">
-                <a16:creationId xmlns:a16="http://schemas.microsoft.com/office/drawing/2014/main" id="{3F42955C-2661-77B4-7E94-6C49CE94C967}"/>
-              </a:ext>
-            </a:extLst>
-          </p:cNvPr>
-          <p:cNvSpPr txBox="1">
-            <a:spLocks/>
-          </p:cNvSpPr>
-          <p:nvPr userDrawn="1"/>
-        </p:nvSpPr>
-        <p:spPr>
-          <a:xfrm>
-            <a:off x="325402" y="6394865"/>
-            <a:ext cx="2743200" cy="331932"/>
-          </a:xfrm>
-          <a:prstGeom prst="rect">
-            <a:avLst/>
-          </a:prstGeom>
-        </p:spPr>
-        <p:txBody>
-          <a:bodyPr/>
-          <a:lstStyle>
-            <a:defPPr>
-              <a:defRPr lang="en-US"/>
-            </a:defPPr>
-            <a:lvl1pPr marL="0" algn="l" defTabSz="304670" rtl="0" eaLnBrk="1" latinLnBrk="0" hangingPunct="1">
-              <a:defRPr sz="2000" b="0" i="0" kern="1200">
-                <a:solidFill>
-                  <a:srgbClr val="003D86"/>
-                </a:solidFill>
-                <a:latin typeface="Yu Gothic Medium" panose="020B0400000000000000" pitchFamily="34" charset="-128"/>
-                <a:ea typeface="Yu Gothic Medium" panose="020B0400000000000000" pitchFamily="34" charset="-128"/>
-                <a:cs typeface="+mn-cs"/>
-              </a:defRPr>
-            </a:lvl1pPr>
-            <a:lvl2pPr marL="304670" algn="l" defTabSz="304670" rtl="0" eaLnBrk="1" latinLnBrk="0" hangingPunct="1">
-              <a:defRPr sz="1200" kern="1200">
-                <a:solidFill>
-                  <a:schemeClr val="tx1"/>
-                </a:solidFill>
-                <a:latin typeface="+mn-lt"/>
-                <a:ea typeface="+mn-ea"/>
-                <a:cs typeface="+mn-cs"/>
-              </a:defRPr>
-            </a:lvl2pPr>
-            <a:lvl3pPr marL="609336" algn="l" defTabSz="304670" rtl="0" eaLnBrk="1" latinLnBrk="0" hangingPunct="1">
-              <a:defRPr sz="1200" kern="1200">
-                <a:solidFill>
-                  <a:schemeClr val="tx1"/>
-                </a:solidFill>
-                <a:latin typeface="+mn-lt"/>
-                <a:ea typeface="+mn-ea"/>
-                <a:cs typeface="+mn-cs"/>
-              </a:defRPr>
-            </a:lvl3pPr>
-            <a:lvl4pPr marL="914005" algn="l" defTabSz="304670" rtl="0" eaLnBrk="1" latinLnBrk="0" hangingPunct="1">
-              <a:defRPr sz="1200" kern="1200">
-                <a:solidFill>
-                  <a:schemeClr val="tx1"/>
-                </a:solidFill>
-                <a:latin typeface="+mn-lt"/>
-                <a:ea typeface="+mn-ea"/>
-                <a:cs typeface="+mn-cs"/>
-              </a:defRPr>
-            </a:lvl4pPr>
-            <a:lvl5pPr marL="1218672" algn="l" defTabSz="304670" rtl="0" eaLnBrk="1" latinLnBrk="0" hangingPunct="1">
-              <a:defRPr sz="1200" kern="1200">
-                <a:solidFill>
-                  <a:schemeClr val="tx1"/>
-                </a:solidFill>
-                <a:latin typeface="+mn-lt"/>
-                <a:ea typeface="+mn-ea"/>
-                <a:cs typeface="+mn-cs"/>
-              </a:defRPr>
-            </a:lvl5pPr>
-            <a:lvl6pPr marL="1523340" algn="l" defTabSz="304670" rtl="0" eaLnBrk="1" latinLnBrk="0" hangingPunct="1">
-              <a:defRPr sz="1200" kern="1200">
-                <a:solidFill>
-                  <a:schemeClr val="tx1"/>
-                </a:solidFill>
-                <a:latin typeface="+mn-lt"/>
-                <a:ea typeface="+mn-ea"/>
-                <a:cs typeface="+mn-cs"/>
-              </a:defRPr>
-            </a:lvl6pPr>
-            <a:lvl7pPr marL="1828007" algn="l" defTabSz="304670" rtl="0" eaLnBrk="1" latinLnBrk="0" hangingPunct="1">
-              <a:defRPr sz="1200" kern="1200">
-                <a:solidFill>
-                  <a:schemeClr val="tx1"/>
-                </a:solidFill>
-                <a:latin typeface="+mn-lt"/>
-                <a:ea typeface="+mn-ea"/>
-                <a:cs typeface="+mn-cs"/>
-              </a:defRPr>
-            </a:lvl7pPr>
-            <a:lvl8pPr marL="2132675" algn="l" defTabSz="304670" rtl="0" eaLnBrk="1" latinLnBrk="0" hangingPunct="1">
-              <a:defRPr sz="1200" kern="1200">
-                <a:solidFill>
-                  <a:schemeClr val="tx1"/>
-                </a:solidFill>
-                <a:latin typeface="+mn-lt"/>
-                <a:ea typeface="+mn-ea"/>
-                <a:cs typeface="+mn-cs"/>
-              </a:defRPr>
-            </a:lvl8pPr>
-            <a:lvl9pPr marL="2437344" algn="l" defTabSz="304670" rtl="0" eaLnBrk="1" latinLnBrk="0" hangingPunct="1">
-              <a:defRPr sz="1200" kern="1200">
-                <a:solidFill>
-                  <a:schemeClr val="tx1"/>
-                </a:solidFill>
-                <a:latin typeface="+mn-lt"/>
-                <a:ea typeface="+mn-ea"/>
-                <a:cs typeface="+mn-cs"/>
-              </a:defRPr>
-            </a:lvl9pPr>
-          </a:lstStyle>
-          <a:p>
-            <a:pPr algn="l"/>
-            <a:r>
-              <a:rPr kumimoji="1" lang="en" altLang="ja-JP" sz="700" dirty="0">
-                <a:solidFill>
-                  <a:srgbClr val="013C85"/>
-                </a:solidFill>
-              </a:rPr>
-              <a:t>ⓒ ITOCHU Techno-Solutions Corporation</a:t>
-            </a:r>
-            <a:endParaRPr kumimoji="1" lang="ja-JP" altLang="en-US" sz="700">
-              <a:solidFill>
-                <a:srgbClr val="013C85"/>
-              </a:solidFill>
-            </a:endParaRPr>
-          </a:p>
-        </p:txBody>
-      </p:sp>
-      <p:sp>
-        <p:nvSpPr>
-          <p:cNvPr id="9" name="Slide Number Placeholder 5">
-            <a:extLst>
-              <a:ext uri="{FF2B5EF4-FFF2-40B4-BE49-F238E27FC236}">
-                <a16:creationId xmlns:a16="http://schemas.microsoft.com/office/drawing/2014/main" id="{3121B00E-FCA3-D75D-90B2-7E55D24110B4}"/>
+                <a16:creationId xmlns:a16="http://schemas.microsoft.com/office/drawing/2014/main" id="{DE052843-D2AD-DFE5-DECC-ED205632FF2D}"/>
               </a:ext>
             </a:extLst>
           </p:cNvPr>
@@ -4969,7 +5972,7 @@
             <a:fld id="{F61D7DA0-AA9A-8342-BE3E-6EB34F8DE2BC}" type="slidenum">
               <a:rPr kumimoji="1" lang="ja-JP" altLang="en-US" sz="1600" smtClean="0">
                 <a:solidFill>
-                  <a:srgbClr val="013C85"/>
+                  <a:schemeClr val="bg2"/>
                 </a:solidFill>
               </a:rPr>
               <a:pPr/>
@@ -4977,7 +5980,7 @@
             </a:fld>
             <a:endParaRPr kumimoji="1" lang="ja-JP" altLang="en-US" sz="1600">
               <a:solidFill>
-                <a:srgbClr val="013C85"/>
+                <a:schemeClr val="bg2"/>
               </a:solidFill>
             </a:endParaRPr>
           </a:p>
@@ -4985,10 +5988,10 @@
       </p:sp>
       <p:sp>
         <p:nvSpPr>
-          <p:cNvPr id="2" name="タイトル 11">
+          <p:cNvPr id="4" name="タイトル 2">
             <a:extLst>
               <a:ext uri="{FF2B5EF4-FFF2-40B4-BE49-F238E27FC236}">
-                <a16:creationId xmlns:a16="http://schemas.microsoft.com/office/drawing/2014/main" id="{4888B4B8-7FA4-9F5C-FE43-6ADC1EAC8415}"/>
+                <a16:creationId xmlns:a16="http://schemas.microsoft.com/office/drawing/2014/main" id="{124C8BBD-F76E-BFF3-575B-EF57C8A464F2}"/>
               </a:ext>
             </a:extLst>
           </p:cNvPr>
@@ -5001,8 +6004,8 @@
         </p:nvSpPr>
         <p:spPr>
           <a:xfrm>
-            <a:off x="390525" y="347572"/>
-            <a:ext cx="9367501" cy="432000"/>
+            <a:off x="399600" y="349200"/>
+            <a:ext cx="9358425" cy="430371"/>
           </a:xfrm>
           <a:prstGeom prst="rect">
             <a:avLst/>
@@ -5014,7 +6017,7 @@
             <a:lvl1pPr>
               <a:defRPr kumimoji="1" lang="ja-JP" altLang="en-US" sz="2800" b="1" i="0" kern="1200" dirty="0">
                 <a:solidFill>
-                  <a:srgbClr val="013C85"/>
+                  <a:schemeClr val="bg2"/>
                 </a:solidFill>
                 <a:latin typeface="Yu Gothic" panose="020B0400000000000000" pitchFamily="34" charset="-128"/>
                 <a:ea typeface="Yu Gothic" panose="020B0400000000000000" pitchFamily="34" charset="-128"/>
@@ -5043,7 +6046,7 @@
     </p:spTree>
     <p:extLst>
       <p:ext uri="{BB962C8B-B14F-4D97-AF65-F5344CB8AC3E}">
-        <p14:creationId xmlns:p14="http://schemas.microsoft.com/office/powerpoint/2010/main" val="258015100"/>
+        <p14:creationId xmlns:p14="http://schemas.microsoft.com/office/powerpoint/2010/main" val="4072945920"/>
       </p:ext>
     </p:extLst>
   </p:cSld>
@@ -5064,7 +6067,7 @@
     <p:bg>
       <p:bgPr>
         <a:solidFill>
-          <a:schemeClr val="bg1"/>
+          <a:srgbClr val="012548"/>
         </a:solidFill>
         <a:effectLst/>
       </p:bgPr>
@@ -5085,10 +6088,10 @@
       </p:grpSpPr>
       <p:grpSp>
         <p:nvGrpSpPr>
-          <p:cNvPr id="65" name="グループ化 64">
+          <p:cNvPr id="102" name="グループ化 101">
             <a:extLst>
               <a:ext uri="{FF2B5EF4-FFF2-40B4-BE49-F238E27FC236}">
-                <a16:creationId xmlns:a16="http://schemas.microsoft.com/office/drawing/2014/main" id="{EED62C00-AD48-7AF3-194D-CC4BC9825C72}"/>
+                <a16:creationId xmlns:a16="http://schemas.microsoft.com/office/drawing/2014/main" id="{2A6515A1-C749-A0BC-346F-9E9C625C5863}"/>
               </a:ext>
             </a:extLst>
           </p:cNvPr>
@@ -5099,16 +6102,16 @@
           <a:xfrm>
             <a:off x="-2646410" y="0"/>
             <a:ext cx="2427336" cy="3886563"/>
-            <a:chOff x="-3408411" y="-34199"/>
-            <a:chExt cx="2905039" cy="4651444"/>
+            <a:chOff x="-2646410" y="0"/>
+            <a:chExt cx="2427336" cy="3886563"/>
           </a:xfrm>
         </p:grpSpPr>
         <p:grpSp>
           <p:nvGrpSpPr>
-            <p:cNvPr id="16" name="グループ化 15">
+            <p:cNvPr id="103" name="グループ化 102">
               <a:extLst>
                 <a:ext uri="{FF2B5EF4-FFF2-40B4-BE49-F238E27FC236}">
-                  <a16:creationId xmlns:a16="http://schemas.microsoft.com/office/drawing/2014/main" id="{0F59455B-5281-DE42-39E8-C312BDE2B366}"/>
+                  <a16:creationId xmlns:a16="http://schemas.microsoft.com/office/drawing/2014/main" id="{19C9587B-15BF-A9AB-0C96-71EB75119A11}"/>
                 </a:ext>
               </a:extLst>
             </p:cNvPr>
@@ -5117,18 +6120,18 @@
           </p:nvGrpSpPr>
           <p:grpSpPr>
             <a:xfrm>
-              <a:off x="-3408411" y="-29139"/>
-              <a:ext cx="452006" cy="2227375"/>
-              <a:chOff x="-3408411" y="-29139"/>
-              <a:chExt cx="452006" cy="2227375"/>
+              <a:off x="-2646407" y="4228"/>
+              <a:ext cx="377678" cy="1861107"/>
+              <a:chOff x="-3408415" y="-29139"/>
+              <a:chExt cx="452007" cy="2227368"/>
             </a:xfrm>
           </p:grpSpPr>
           <p:grpSp>
             <p:nvGrpSpPr>
-              <p:cNvPr id="17" name="グループ化 16">
+              <p:cNvPr id="146" name="グループ化 145">
                 <a:extLst>
                   <a:ext uri="{FF2B5EF4-FFF2-40B4-BE49-F238E27FC236}">
-                    <a16:creationId xmlns:a16="http://schemas.microsoft.com/office/drawing/2014/main" id="{82ACF8B8-85A7-F98B-9397-34A96E5A0208}"/>
+                    <a16:creationId xmlns:a16="http://schemas.microsoft.com/office/drawing/2014/main" id="{B6FE1A51-6305-DC4F-77C3-52DABE489F12}"/>
                   </a:ext>
                 </a:extLst>
               </p:cNvPr>
@@ -5137,18 +6140,18 @@
             </p:nvGrpSpPr>
             <p:grpSpPr>
               <a:xfrm>
-                <a:off x="-3408411" y="123410"/>
-                <a:ext cx="452006" cy="2074826"/>
+                <a:off x="-3408415" y="123410"/>
+                <a:ext cx="452007" cy="2074819"/>
                 <a:chOff x="-2709812" y="0"/>
                 <a:chExt cx="763449" cy="3504430"/>
               </a:xfrm>
             </p:grpSpPr>
             <p:sp>
               <p:nvSpPr>
-                <p:cNvPr id="19" name="正方形/長方形 18">
+                <p:cNvPr id="148" name="正方形/長方形 147">
                   <a:extLst>
                     <a:ext uri="{FF2B5EF4-FFF2-40B4-BE49-F238E27FC236}">
-                      <a16:creationId xmlns:a16="http://schemas.microsoft.com/office/drawing/2014/main" id="{97DA814D-8025-8603-8CA2-584DD1154C48}"/>
+                      <a16:creationId xmlns:a16="http://schemas.microsoft.com/office/drawing/2014/main" id="{C5DBBDCB-3CE3-30FC-A7B9-01E60F0D3B6B}"/>
                     </a:ext>
                   </a:extLst>
                 </p:cNvPr>
@@ -5164,7 +6167,7 @@
                   <a:avLst/>
                 </a:prstGeom>
                 <a:solidFill>
-                  <a:schemeClr val="tx2"/>
+                  <a:schemeClr val="accent1"/>
                 </a:solidFill>
                 <a:ln>
                   <a:noFill/>
@@ -5190,7 +6193,7 @@
                 <a:bodyPr rtlCol="0" anchor="ctr"/>
                 <a:lstStyle/>
                 <a:p>
-                  <a:pPr marL="0" marR="0" lvl="0" indent="0" algn="ctr" defTabSz="914400" rtl="0" eaLnBrk="1" fontAlgn="auto" latinLnBrk="0" hangingPunct="1">
+                  <a:pPr marR="0" lvl="0" indent="0" algn="ctr" fontAlgn="auto">
                     <a:lnSpc>
                       <a:spcPct val="100000"/>
                     </a:lnSpc>
@@ -5205,9 +6208,8 @@
                     <a:buFontTx/>
                     <a:buNone/>
                     <a:tabLst/>
-                    <a:defRPr/>
                   </a:pPr>
-                  <a:endParaRPr kumimoji="1" lang="ja-JP" altLang="en-US" sz="1800" b="0" i="0" u="none" strike="noStrike" kern="1200" cap="none" spc="0" normalizeH="0" baseline="0" noProof="0" dirty="0">
+                  <a:endParaRPr lang="ja-JP" altLang="en-US" b="0" i="0" u="none" strike="noStrike" cap="none" spc="0" normalizeH="0" baseline="0" noProof="0" dirty="0">
                     <a:ln>
                       <a:noFill/>
                     </a:ln>
@@ -5219,17 +6221,16 @@
                     <a:uFillTx/>
                     <a:latin typeface="游ゴシック Medium"/>
                     <a:ea typeface="游ゴシック Medium"/>
-                    <a:cs typeface="+mn-cs"/>
                   </a:endParaRPr>
                 </a:p>
               </p:txBody>
             </p:sp>
             <p:sp>
               <p:nvSpPr>
-                <p:cNvPr id="20" name="正方形/長方形 19">
+                <p:cNvPr id="149" name="正方形/長方形 148">
                   <a:extLst>
                     <a:ext uri="{FF2B5EF4-FFF2-40B4-BE49-F238E27FC236}">
-                      <a16:creationId xmlns:a16="http://schemas.microsoft.com/office/drawing/2014/main" id="{DFDF1A98-77F5-DE9E-F244-EE1B568A7C6F}"/>
+                      <a16:creationId xmlns:a16="http://schemas.microsoft.com/office/drawing/2014/main" id="{B55946F3-4F27-B931-8272-0BE2CFD6E60E}"/>
                     </a:ext>
                   </a:extLst>
                 </p:cNvPr>
@@ -5245,7 +6246,7 @@
                   <a:avLst/>
                 </a:prstGeom>
                 <a:solidFill>
-                  <a:schemeClr val="tx2">
+                  <a:schemeClr val="accent1">
                     <a:lumMod val="60000"/>
                     <a:lumOff val="40000"/>
                   </a:schemeClr>
@@ -5274,7 +6275,7 @@
                 <a:bodyPr rtlCol="0" anchor="ctr"/>
                 <a:lstStyle/>
                 <a:p>
-                  <a:pPr marL="0" marR="0" lvl="0" indent="0" algn="ctr" defTabSz="914400" rtl="0" eaLnBrk="1" fontAlgn="auto" latinLnBrk="0" hangingPunct="1">
+                  <a:pPr marR="0" lvl="0" indent="0" algn="ctr" fontAlgn="auto">
                     <a:lnSpc>
                       <a:spcPct val="100000"/>
                     </a:lnSpc>
@@ -5289,9 +6290,8 @@
                     <a:buFontTx/>
                     <a:buNone/>
                     <a:tabLst/>
-                    <a:defRPr/>
                   </a:pPr>
-                  <a:endParaRPr kumimoji="1" lang="ja-JP" altLang="en-US" sz="1800" b="0" i="0" u="none" strike="noStrike" kern="1200" cap="none" spc="0" normalizeH="0" baseline="0" noProof="0" dirty="0">
+                  <a:endParaRPr lang="ja-JP" altLang="en-US" b="0" i="0" u="none" strike="noStrike" cap="none" spc="0" normalizeH="0" baseline="0" noProof="0" dirty="0">
                     <a:ln>
                       <a:noFill/>
                     </a:ln>
@@ -5303,17 +6303,16 @@
                     <a:uFillTx/>
                     <a:latin typeface="游ゴシック Medium"/>
                     <a:ea typeface="游ゴシック Medium"/>
-                    <a:cs typeface="+mn-cs"/>
                   </a:endParaRPr>
                 </a:p>
               </p:txBody>
             </p:sp>
             <p:sp>
               <p:nvSpPr>
-                <p:cNvPr id="21" name="正方形/長方形 20">
+                <p:cNvPr id="150" name="正方形/長方形 149">
                   <a:extLst>
                     <a:ext uri="{FF2B5EF4-FFF2-40B4-BE49-F238E27FC236}">
-                      <a16:creationId xmlns:a16="http://schemas.microsoft.com/office/drawing/2014/main" id="{5742F9F2-CF6B-8534-DF0E-1FDF7D74BF2A}"/>
+                      <a16:creationId xmlns:a16="http://schemas.microsoft.com/office/drawing/2014/main" id="{236D03E7-F13E-9EBA-BD8C-AC69BCD60757}"/>
                     </a:ext>
                   </a:extLst>
                 </p:cNvPr>
@@ -5329,7 +6328,7 @@
                   <a:avLst/>
                 </a:prstGeom>
                 <a:solidFill>
-                  <a:schemeClr val="tx2">
+                  <a:schemeClr val="accent1">
                     <a:lumMod val="40000"/>
                     <a:lumOff val="60000"/>
                   </a:schemeClr>
@@ -5358,7 +6357,7 @@
                 <a:bodyPr rtlCol="0" anchor="ctr"/>
                 <a:lstStyle/>
                 <a:p>
-                  <a:pPr marL="0" marR="0" lvl="0" indent="0" algn="ctr" defTabSz="914400" rtl="0" eaLnBrk="1" fontAlgn="auto" latinLnBrk="0" hangingPunct="1">
+                  <a:pPr marR="0" lvl="0" indent="0" algn="ctr" fontAlgn="auto">
                     <a:lnSpc>
                       <a:spcPct val="100000"/>
                     </a:lnSpc>
@@ -5373,9 +6372,8 @@
                     <a:buFontTx/>
                     <a:buNone/>
                     <a:tabLst/>
-                    <a:defRPr/>
                   </a:pPr>
-                  <a:endParaRPr kumimoji="1" lang="ja-JP" altLang="en-US" sz="1800" b="0" i="0" u="none" strike="noStrike" kern="1200" cap="none" spc="0" normalizeH="0" baseline="0" noProof="0">
+                  <a:endParaRPr lang="ja-JP" altLang="en-US" b="0" i="0" u="none" strike="noStrike" cap="none" spc="0" normalizeH="0" baseline="0" noProof="0">
                     <a:ln>
                       <a:noFill/>
                     </a:ln>
@@ -5387,17 +6385,16 @@
                     <a:uFillTx/>
                     <a:latin typeface="游ゴシック Medium"/>
                     <a:ea typeface="游ゴシック Medium"/>
-                    <a:cs typeface="+mn-cs"/>
                   </a:endParaRPr>
                 </a:p>
               </p:txBody>
             </p:sp>
             <p:sp>
               <p:nvSpPr>
-                <p:cNvPr id="22" name="正方形/長方形 21">
+                <p:cNvPr id="151" name="正方形/長方形 150">
                   <a:extLst>
                     <a:ext uri="{FF2B5EF4-FFF2-40B4-BE49-F238E27FC236}">
-                      <a16:creationId xmlns:a16="http://schemas.microsoft.com/office/drawing/2014/main" id="{BB30B969-1224-5BC2-5E31-392961F25AD6}"/>
+                      <a16:creationId xmlns:a16="http://schemas.microsoft.com/office/drawing/2014/main" id="{DA49A960-13EB-D5D9-8D00-6EFE7F3E2818}"/>
                     </a:ext>
                   </a:extLst>
                 </p:cNvPr>
@@ -5413,7 +6410,7 @@
                   <a:avLst/>
                 </a:prstGeom>
                 <a:solidFill>
-                  <a:schemeClr val="tx2">
+                  <a:schemeClr val="accent1">
                     <a:lumMod val="20000"/>
                     <a:lumOff val="80000"/>
                   </a:schemeClr>
@@ -5442,7 +6439,7 @@
                 <a:bodyPr rtlCol="0" anchor="ctr"/>
                 <a:lstStyle/>
                 <a:p>
-                  <a:pPr marL="0" marR="0" lvl="0" indent="0" algn="ctr" defTabSz="914400" rtl="0" eaLnBrk="1" fontAlgn="auto" latinLnBrk="0" hangingPunct="1">
+                  <a:pPr marR="0" lvl="0" indent="0" algn="ctr" fontAlgn="auto">
                     <a:lnSpc>
                       <a:spcPct val="100000"/>
                     </a:lnSpc>
@@ -5457,9 +6454,8 @@
                     <a:buFontTx/>
                     <a:buNone/>
                     <a:tabLst/>
-                    <a:defRPr/>
                   </a:pPr>
-                  <a:endParaRPr kumimoji="1" lang="ja-JP" altLang="en-US" sz="1800" b="0" i="0" u="none" strike="noStrike" kern="1200" cap="none" spc="0" normalizeH="0" baseline="0" noProof="0">
+                  <a:endParaRPr lang="ja-JP" altLang="en-US" b="0" i="0" u="none" strike="noStrike" cap="none" spc="0" normalizeH="0" baseline="0" noProof="0">
                     <a:ln>
                       <a:noFill/>
                     </a:ln>
@@ -5471,7 +6467,6 @@
                     <a:uFillTx/>
                     <a:latin typeface="游ゴシック Medium"/>
                     <a:ea typeface="游ゴシック Medium"/>
-                    <a:cs typeface="+mn-cs"/>
                   </a:endParaRPr>
                 </a:p>
               </p:txBody>
@@ -5479,10 +6474,10 @@
           </p:grpSp>
           <p:sp>
             <p:nvSpPr>
-              <p:cNvPr id="18" name="正方形/長方形 17">
+              <p:cNvPr id="147" name="正方形/長方形 146">
                 <a:extLst>
                   <a:ext uri="{FF2B5EF4-FFF2-40B4-BE49-F238E27FC236}">
-                    <a16:creationId xmlns:a16="http://schemas.microsoft.com/office/drawing/2014/main" id="{B262310C-E9AD-7B13-0054-A7AF780090D8}"/>
+                    <a16:creationId xmlns:a16="http://schemas.microsoft.com/office/drawing/2014/main" id="{7A7151D1-90FE-BC82-CEDE-BC2863D2D256}"/>
                   </a:ext>
                 </a:extLst>
               </p:cNvPr>
@@ -5576,10 +6571,10 @@
         </p:grpSp>
         <p:grpSp>
           <p:nvGrpSpPr>
-            <p:cNvPr id="23" name="グループ化 22">
+            <p:cNvPr id="104" name="グループ化 103">
               <a:extLst>
                 <a:ext uri="{FF2B5EF4-FFF2-40B4-BE49-F238E27FC236}">
-                  <a16:creationId xmlns:a16="http://schemas.microsoft.com/office/drawing/2014/main" id="{D1D2B1C1-E265-F854-94B7-9315597DD751}"/>
+                  <a16:creationId xmlns:a16="http://schemas.microsoft.com/office/drawing/2014/main" id="{BB3B4968-03F7-EFB5-9D05-1226DCE43BC3}"/>
                 </a:ext>
               </a:extLst>
             </p:cNvPr>
@@ -5588,18 +6583,18 @@
           </p:nvGrpSpPr>
           <p:grpSpPr>
             <a:xfrm>
-              <a:off x="-2590733" y="-34199"/>
-              <a:ext cx="452006" cy="2232435"/>
+              <a:off x="-1963191" y="0"/>
+              <a:ext cx="377678" cy="1865335"/>
               <a:chOff x="-2590733" y="-34199"/>
               <a:chExt cx="452006" cy="2232435"/>
             </a:xfrm>
           </p:grpSpPr>
           <p:grpSp>
             <p:nvGrpSpPr>
-              <p:cNvPr id="24" name="グループ化 23">
+              <p:cNvPr id="140" name="グループ化 139">
                 <a:extLst>
                   <a:ext uri="{FF2B5EF4-FFF2-40B4-BE49-F238E27FC236}">
-                    <a16:creationId xmlns:a16="http://schemas.microsoft.com/office/drawing/2014/main" id="{FA4DAD84-5EE0-F743-9370-AFDAD826B7D6}"/>
+                    <a16:creationId xmlns:a16="http://schemas.microsoft.com/office/drawing/2014/main" id="{40870C4B-4B8C-762F-1233-8CA263DD493D}"/>
                   </a:ext>
                 </a:extLst>
               </p:cNvPr>
@@ -5616,10 +6611,10 @@
             </p:grpSpPr>
             <p:sp>
               <p:nvSpPr>
-                <p:cNvPr id="26" name="正方形/長方形 25">
+                <p:cNvPr id="142" name="正方形/長方形 141">
                   <a:extLst>
                     <a:ext uri="{FF2B5EF4-FFF2-40B4-BE49-F238E27FC236}">
-                      <a16:creationId xmlns:a16="http://schemas.microsoft.com/office/drawing/2014/main" id="{BFAD886E-E7B3-D408-6409-853716C19E1B}"/>
+                      <a16:creationId xmlns:a16="http://schemas.microsoft.com/office/drawing/2014/main" id="{07B4AAAF-C516-C67C-186D-AB136F2C776D}"/>
                     </a:ext>
                   </a:extLst>
                 </p:cNvPr>
@@ -5635,7 +6630,7 @@
                   <a:avLst/>
                 </a:prstGeom>
                 <a:solidFill>
-                  <a:schemeClr val="accent1"/>
+                  <a:schemeClr val="tx2"/>
                 </a:solidFill>
                 <a:ln>
                   <a:noFill/>
@@ -5661,7 +6656,7 @@
                 <a:bodyPr rtlCol="0" anchor="ctr"/>
                 <a:lstStyle/>
                 <a:p>
-                  <a:pPr marL="0" marR="0" lvl="0" indent="0" algn="ctr" defTabSz="914400" rtl="0" eaLnBrk="1" fontAlgn="auto" latinLnBrk="0" hangingPunct="1">
+                  <a:pPr marR="0" lvl="0" indent="0" algn="ctr" fontAlgn="auto">
                     <a:lnSpc>
                       <a:spcPct val="100000"/>
                     </a:lnSpc>
@@ -5676,9 +6671,8 @@
                     <a:buFontTx/>
                     <a:buNone/>
                     <a:tabLst/>
-                    <a:defRPr/>
                   </a:pPr>
-                  <a:endParaRPr kumimoji="1" lang="ja-JP" altLang="en-US" sz="1800" b="0" i="0" u="none" strike="noStrike" kern="1200" cap="none" spc="0" normalizeH="0" baseline="0" noProof="0" dirty="0">
+                  <a:endParaRPr lang="ja-JP" altLang="en-US" b="0" i="0" u="none" strike="noStrike" cap="none" spc="0" normalizeH="0" baseline="0" noProof="0" dirty="0">
                     <a:ln>
                       <a:noFill/>
                     </a:ln>
@@ -5690,17 +6684,16 @@
                     <a:uFillTx/>
                     <a:latin typeface="游ゴシック Medium"/>
                     <a:ea typeface="游ゴシック Medium"/>
-                    <a:cs typeface="+mn-cs"/>
                   </a:endParaRPr>
                 </a:p>
               </p:txBody>
             </p:sp>
             <p:sp>
               <p:nvSpPr>
-                <p:cNvPr id="27" name="正方形/長方形 26">
+                <p:cNvPr id="143" name="正方形/長方形 142">
                   <a:extLst>
                     <a:ext uri="{FF2B5EF4-FFF2-40B4-BE49-F238E27FC236}">
-                      <a16:creationId xmlns:a16="http://schemas.microsoft.com/office/drawing/2014/main" id="{D14DE5AB-49BD-BEDC-2579-AB4B2C7B1653}"/>
+                      <a16:creationId xmlns:a16="http://schemas.microsoft.com/office/drawing/2014/main" id="{AABC157E-89C4-C3A2-79E3-A95F9497C9D7}"/>
                     </a:ext>
                   </a:extLst>
                 </p:cNvPr>
@@ -5716,7 +6709,7 @@
                   <a:avLst/>
                 </a:prstGeom>
                 <a:solidFill>
-                  <a:schemeClr val="accent1">
+                  <a:schemeClr val="tx2">
                     <a:lumMod val="60000"/>
                     <a:lumOff val="40000"/>
                   </a:schemeClr>
@@ -5745,7 +6738,7 @@
                 <a:bodyPr rtlCol="0" anchor="ctr"/>
                 <a:lstStyle/>
                 <a:p>
-                  <a:pPr marL="0" marR="0" lvl="0" indent="0" algn="ctr" defTabSz="914400" rtl="0" eaLnBrk="1" fontAlgn="auto" latinLnBrk="0" hangingPunct="1">
+                  <a:pPr marR="0" lvl="0" indent="0" algn="ctr" fontAlgn="auto">
                     <a:lnSpc>
                       <a:spcPct val="100000"/>
                     </a:lnSpc>
@@ -5760,9 +6753,8 @@
                     <a:buFontTx/>
                     <a:buNone/>
                     <a:tabLst/>
-                    <a:defRPr/>
                   </a:pPr>
-                  <a:endParaRPr kumimoji="1" lang="ja-JP" altLang="en-US" sz="1800" b="0" i="0" u="none" strike="noStrike" kern="1200" cap="none" spc="0" normalizeH="0" baseline="0" noProof="0" dirty="0">
+                  <a:endParaRPr lang="ja-JP" altLang="en-US" b="0" i="0" u="none" strike="noStrike" cap="none" spc="0" normalizeH="0" baseline="0" noProof="0" dirty="0">
                     <a:ln>
                       <a:noFill/>
                     </a:ln>
@@ -5774,17 +6766,16 @@
                     <a:uFillTx/>
                     <a:latin typeface="游ゴシック Medium"/>
                     <a:ea typeface="游ゴシック Medium"/>
-                    <a:cs typeface="+mn-cs"/>
                   </a:endParaRPr>
                 </a:p>
               </p:txBody>
             </p:sp>
             <p:sp>
               <p:nvSpPr>
-                <p:cNvPr id="28" name="正方形/長方形 27">
+                <p:cNvPr id="144" name="正方形/長方形 143">
                   <a:extLst>
                     <a:ext uri="{FF2B5EF4-FFF2-40B4-BE49-F238E27FC236}">
-                      <a16:creationId xmlns:a16="http://schemas.microsoft.com/office/drawing/2014/main" id="{4DA2DCF3-7B00-CE8D-6715-576FBED1DF6A}"/>
+                      <a16:creationId xmlns:a16="http://schemas.microsoft.com/office/drawing/2014/main" id="{3E8B0085-338C-84C0-240F-C5979C644520}"/>
                     </a:ext>
                   </a:extLst>
                 </p:cNvPr>
@@ -5800,7 +6791,7 @@
                   <a:avLst/>
                 </a:prstGeom>
                 <a:solidFill>
-                  <a:schemeClr val="accent1">
+                  <a:schemeClr val="tx2">
                     <a:lumMod val="40000"/>
                     <a:lumOff val="60000"/>
                   </a:schemeClr>
@@ -5829,7 +6820,7 @@
                 <a:bodyPr rtlCol="0" anchor="ctr"/>
                 <a:lstStyle/>
                 <a:p>
-                  <a:pPr marL="0" marR="0" lvl="0" indent="0" algn="ctr" defTabSz="914400" rtl="0" eaLnBrk="1" fontAlgn="auto" latinLnBrk="0" hangingPunct="1">
+                  <a:pPr marR="0" lvl="0" indent="0" algn="ctr" fontAlgn="auto">
                     <a:lnSpc>
                       <a:spcPct val="100000"/>
                     </a:lnSpc>
@@ -5844,9 +6835,8 @@
                     <a:buFontTx/>
                     <a:buNone/>
                     <a:tabLst/>
-                    <a:defRPr/>
                   </a:pPr>
-                  <a:endParaRPr kumimoji="1" lang="ja-JP" altLang="en-US" sz="1800" b="0" i="0" u="none" strike="noStrike" kern="1200" cap="none" spc="0" normalizeH="0" baseline="0" noProof="0">
+                  <a:endParaRPr lang="ja-JP" altLang="en-US" b="0" i="0" u="none" strike="noStrike" cap="none" spc="0" normalizeH="0" baseline="0" noProof="0">
                     <a:ln>
                       <a:noFill/>
                     </a:ln>
@@ -5858,17 +6848,16 @@
                     <a:uFillTx/>
                     <a:latin typeface="游ゴシック Medium"/>
                     <a:ea typeface="游ゴシック Medium"/>
-                    <a:cs typeface="+mn-cs"/>
                   </a:endParaRPr>
                 </a:p>
               </p:txBody>
             </p:sp>
             <p:sp>
               <p:nvSpPr>
-                <p:cNvPr id="29" name="正方形/長方形 28">
+                <p:cNvPr id="145" name="正方形/長方形 144">
                   <a:extLst>
                     <a:ext uri="{FF2B5EF4-FFF2-40B4-BE49-F238E27FC236}">
-                      <a16:creationId xmlns:a16="http://schemas.microsoft.com/office/drawing/2014/main" id="{4FA8FB96-7411-F404-15EE-D6FD3C578FFB}"/>
+                      <a16:creationId xmlns:a16="http://schemas.microsoft.com/office/drawing/2014/main" id="{1EAE1E9D-4608-F208-B806-081AF05F2419}"/>
                     </a:ext>
                   </a:extLst>
                 </p:cNvPr>
@@ -5884,7 +6873,7 @@
                   <a:avLst/>
                 </a:prstGeom>
                 <a:solidFill>
-                  <a:schemeClr val="accent1">
+                  <a:schemeClr val="tx2">
                     <a:lumMod val="20000"/>
                     <a:lumOff val="80000"/>
                   </a:schemeClr>
@@ -5913,7 +6902,7 @@
                 <a:bodyPr rtlCol="0" anchor="ctr"/>
                 <a:lstStyle/>
                 <a:p>
-                  <a:pPr marL="0" marR="0" lvl="0" indent="0" algn="ctr" defTabSz="914400" rtl="0" eaLnBrk="1" fontAlgn="auto" latinLnBrk="0" hangingPunct="1">
+                  <a:pPr marR="0" lvl="0" indent="0" algn="ctr" fontAlgn="auto">
                     <a:lnSpc>
                       <a:spcPct val="100000"/>
                     </a:lnSpc>
@@ -5928,9 +6917,8 @@
                     <a:buFontTx/>
                     <a:buNone/>
                     <a:tabLst/>
-                    <a:defRPr/>
                   </a:pPr>
-                  <a:endParaRPr kumimoji="1" lang="ja-JP" altLang="en-US" sz="1800" b="0" i="0" u="none" strike="noStrike" kern="1200" cap="none" spc="0" normalizeH="0" baseline="0" noProof="0">
+                  <a:endParaRPr lang="ja-JP" altLang="en-US" b="0" i="0" u="none" strike="noStrike" cap="none" spc="0" normalizeH="0" baseline="0" noProof="0">
                     <a:ln>
                       <a:noFill/>
                     </a:ln>
@@ -5942,7 +6930,6 @@
                     <a:uFillTx/>
                     <a:latin typeface="游ゴシック Medium"/>
                     <a:ea typeface="游ゴシック Medium"/>
-                    <a:cs typeface="+mn-cs"/>
                   </a:endParaRPr>
                 </a:p>
               </p:txBody>
@@ -5950,10 +6937,10 @@
           </p:grpSp>
           <p:sp>
             <p:nvSpPr>
-              <p:cNvPr id="25" name="正方形/長方形 24">
+              <p:cNvPr id="141" name="正方形/長方形 140">
                 <a:extLst>
                   <a:ext uri="{FF2B5EF4-FFF2-40B4-BE49-F238E27FC236}">
-                    <a16:creationId xmlns:a16="http://schemas.microsoft.com/office/drawing/2014/main" id="{A0DD36E8-4320-DBF7-0D3D-45A68D633977}"/>
+                    <a16:creationId xmlns:a16="http://schemas.microsoft.com/office/drawing/2014/main" id="{45281B4E-3FC9-2CAE-9D3A-531038B9295A}"/>
                   </a:ext>
                 </a:extLst>
               </p:cNvPr>
@@ -6033,10 +7020,10 @@
         </p:grpSp>
         <p:grpSp>
           <p:nvGrpSpPr>
-            <p:cNvPr id="30" name="グループ化 29">
+            <p:cNvPr id="105" name="グループ化 104">
               <a:extLst>
                 <a:ext uri="{FF2B5EF4-FFF2-40B4-BE49-F238E27FC236}">
-                  <a16:creationId xmlns:a16="http://schemas.microsoft.com/office/drawing/2014/main" id="{12562C27-C356-1E41-85F7-11A3ACC3A3EA}"/>
+                  <a16:creationId xmlns:a16="http://schemas.microsoft.com/office/drawing/2014/main" id="{2E766990-C27E-EA55-1781-F033EDF09B32}"/>
                 </a:ext>
               </a:extLst>
             </p:cNvPr>
@@ -6045,18 +7032,18 @@
           </p:nvGrpSpPr>
           <p:grpSpPr>
             <a:xfrm>
-              <a:off x="-3408411" y="2381088"/>
-              <a:ext cx="452006" cy="2236157"/>
+              <a:off x="-2646410" y="2018118"/>
+              <a:ext cx="377678" cy="1868445"/>
               <a:chOff x="-3408411" y="2381088"/>
               <a:chExt cx="452006" cy="2236157"/>
             </a:xfrm>
           </p:grpSpPr>
           <p:grpSp>
             <p:nvGrpSpPr>
-              <p:cNvPr id="31" name="グループ化 30">
+              <p:cNvPr id="134" name="グループ化 133">
                 <a:extLst>
                   <a:ext uri="{FF2B5EF4-FFF2-40B4-BE49-F238E27FC236}">
-                    <a16:creationId xmlns:a16="http://schemas.microsoft.com/office/drawing/2014/main" id="{FA6BB45A-FE1D-F266-F7F4-29E0384727A0}"/>
+                    <a16:creationId xmlns:a16="http://schemas.microsoft.com/office/drawing/2014/main" id="{F2683BAA-BB59-78DB-06E7-869C1221F5D6}"/>
                   </a:ext>
                 </a:extLst>
               </p:cNvPr>
@@ -6073,10 +7060,10 @@
             </p:grpSpPr>
             <p:sp>
               <p:nvSpPr>
-                <p:cNvPr id="33" name="正方形/長方形 32">
+                <p:cNvPr id="136" name="正方形/長方形 135">
                   <a:extLst>
                     <a:ext uri="{FF2B5EF4-FFF2-40B4-BE49-F238E27FC236}">
-                      <a16:creationId xmlns:a16="http://schemas.microsoft.com/office/drawing/2014/main" id="{DFC8C0F4-B5A2-DB04-0B2E-ADB60F3502A1}"/>
+                      <a16:creationId xmlns:a16="http://schemas.microsoft.com/office/drawing/2014/main" id="{7D1A4794-6B14-F565-B081-495B32B5C4FF}"/>
                     </a:ext>
                   </a:extLst>
                 </p:cNvPr>
@@ -6154,10 +7141,10 @@
             </p:sp>
             <p:sp>
               <p:nvSpPr>
-                <p:cNvPr id="34" name="正方形/長方形 33">
+                <p:cNvPr id="137" name="正方形/長方形 136">
                   <a:extLst>
                     <a:ext uri="{FF2B5EF4-FFF2-40B4-BE49-F238E27FC236}">
-                      <a16:creationId xmlns:a16="http://schemas.microsoft.com/office/drawing/2014/main" id="{CBCC2BA2-61EE-E17B-0EB2-2F30D55A6097}"/>
+                      <a16:creationId xmlns:a16="http://schemas.microsoft.com/office/drawing/2014/main" id="{3DFEE7B0-E14B-4F30-E950-763555BBEE1F}"/>
                     </a:ext>
                   </a:extLst>
                 </p:cNvPr>
@@ -6238,10 +7225,10 @@
             </p:sp>
             <p:sp>
               <p:nvSpPr>
-                <p:cNvPr id="35" name="正方形/長方形 34">
+                <p:cNvPr id="138" name="正方形/長方形 137">
                   <a:extLst>
                     <a:ext uri="{FF2B5EF4-FFF2-40B4-BE49-F238E27FC236}">
-                      <a16:creationId xmlns:a16="http://schemas.microsoft.com/office/drawing/2014/main" id="{F83CDCD7-0B74-4AA2-88F4-79B1F13B0042}"/>
+                      <a16:creationId xmlns:a16="http://schemas.microsoft.com/office/drawing/2014/main" id="{2FC9360E-B924-EA87-A03C-E03C9061289F}"/>
                     </a:ext>
                   </a:extLst>
                 </p:cNvPr>
@@ -6322,10 +7309,10 @@
             </p:sp>
             <p:sp>
               <p:nvSpPr>
-                <p:cNvPr id="36" name="正方形/長方形 35">
+                <p:cNvPr id="139" name="正方形/長方形 138">
                   <a:extLst>
                     <a:ext uri="{FF2B5EF4-FFF2-40B4-BE49-F238E27FC236}">
-                      <a16:creationId xmlns:a16="http://schemas.microsoft.com/office/drawing/2014/main" id="{86F85031-5E6A-7164-8E47-142FD7B8F152}"/>
+                      <a16:creationId xmlns:a16="http://schemas.microsoft.com/office/drawing/2014/main" id="{8BD22451-53EC-469E-E205-88E7CA78C936}"/>
                     </a:ext>
                   </a:extLst>
                 </p:cNvPr>
@@ -6407,10 +7394,10 @@
           </p:grpSp>
           <p:sp>
             <p:nvSpPr>
-              <p:cNvPr id="32" name="正方形/長方形 31">
+              <p:cNvPr id="135" name="正方形/長方形 134">
                 <a:extLst>
                   <a:ext uri="{FF2B5EF4-FFF2-40B4-BE49-F238E27FC236}">
-                    <a16:creationId xmlns:a16="http://schemas.microsoft.com/office/drawing/2014/main" id="{D0D5B04F-ADBF-3EAD-AE4B-F2D6415D02A2}"/>
+                    <a16:creationId xmlns:a16="http://schemas.microsoft.com/office/drawing/2014/main" id="{D582AC40-7A97-BBE5-3EE2-BA527C697A33}"/>
                   </a:ext>
                 </a:extLst>
               </p:cNvPr>
@@ -6504,10 +7491,10 @@
         </p:grpSp>
         <p:grpSp>
           <p:nvGrpSpPr>
-            <p:cNvPr id="37" name="グループ化 36">
+            <p:cNvPr id="106" name="グループ化 105">
               <a:extLst>
                 <a:ext uri="{FF2B5EF4-FFF2-40B4-BE49-F238E27FC236}">
-                  <a16:creationId xmlns:a16="http://schemas.microsoft.com/office/drawing/2014/main" id="{7B46D15A-B11B-BA07-4B55-CCCDA2EA7AB8}"/>
+                  <a16:creationId xmlns:a16="http://schemas.microsoft.com/office/drawing/2014/main" id="{3066F049-37DA-95B9-6155-1BBB19F2BF45}"/>
                 </a:ext>
               </a:extLst>
             </p:cNvPr>
@@ -6516,18 +7503,18 @@
           </p:nvGrpSpPr>
           <p:grpSpPr>
             <a:xfrm>
-              <a:off x="-2841043" y="2381088"/>
-              <a:ext cx="952625" cy="2236157"/>
-              <a:chOff x="-2841043" y="2381088"/>
-              <a:chExt cx="952625" cy="2236157"/>
+              <a:off x="-2061270" y="2018118"/>
+              <a:ext cx="573838" cy="1868445"/>
+              <a:chOff x="-2708115" y="2381088"/>
+              <a:chExt cx="686770" cy="2236157"/>
             </a:xfrm>
           </p:grpSpPr>
           <p:grpSp>
             <p:nvGrpSpPr>
-              <p:cNvPr id="38" name="グループ化 37">
+              <p:cNvPr id="128" name="グループ化 127">
                 <a:extLst>
                   <a:ext uri="{FF2B5EF4-FFF2-40B4-BE49-F238E27FC236}">
-                    <a16:creationId xmlns:a16="http://schemas.microsoft.com/office/drawing/2014/main" id="{049050F2-409F-6CB1-BD67-5744209856EC}"/>
+                    <a16:creationId xmlns:a16="http://schemas.microsoft.com/office/drawing/2014/main" id="{AD7F60A5-E7D5-8761-B432-943E2E8E9F01}"/>
                   </a:ext>
                 </a:extLst>
               </p:cNvPr>
@@ -6544,10 +7531,10 @@
             </p:grpSpPr>
             <p:sp>
               <p:nvSpPr>
-                <p:cNvPr id="40" name="正方形/長方形 39">
+                <p:cNvPr id="130" name="正方形/長方形 129">
                   <a:extLst>
                     <a:ext uri="{FF2B5EF4-FFF2-40B4-BE49-F238E27FC236}">
-                      <a16:creationId xmlns:a16="http://schemas.microsoft.com/office/drawing/2014/main" id="{3B1F422E-249D-8C28-A702-EA62A2A5D199}"/>
+                      <a16:creationId xmlns:a16="http://schemas.microsoft.com/office/drawing/2014/main" id="{E2AF2B24-2F6F-FB67-BB2F-4247C0F08AB5}"/>
                     </a:ext>
                   </a:extLst>
                 </p:cNvPr>
@@ -6625,10 +7612,10 @@
             </p:sp>
             <p:sp>
               <p:nvSpPr>
-                <p:cNvPr id="41" name="正方形/長方形 40">
+                <p:cNvPr id="131" name="正方形/長方形 130">
                   <a:extLst>
                     <a:ext uri="{FF2B5EF4-FFF2-40B4-BE49-F238E27FC236}">
-                      <a16:creationId xmlns:a16="http://schemas.microsoft.com/office/drawing/2014/main" id="{94944F50-BC30-98A8-7764-C921E316E6BC}"/>
+                      <a16:creationId xmlns:a16="http://schemas.microsoft.com/office/drawing/2014/main" id="{6427A5AE-FA19-A10B-C2DE-2DEECBF4A238}"/>
                     </a:ext>
                   </a:extLst>
                 </p:cNvPr>
@@ -6709,10 +7696,10 @@
             </p:sp>
             <p:sp>
               <p:nvSpPr>
-                <p:cNvPr id="42" name="正方形/長方形 41">
+                <p:cNvPr id="132" name="正方形/長方形 131">
                   <a:extLst>
                     <a:ext uri="{FF2B5EF4-FFF2-40B4-BE49-F238E27FC236}">
-                      <a16:creationId xmlns:a16="http://schemas.microsoft.com/office/drawing/2014/main" id="{0AD08146-13BB-49BE-40B8-80979EBE24AE}"/>
+                      <a16:creationId xmlns:a16="http://schemas.microsoft.com/office/drawing/2014/main" id="{1CAF8E8D-D934-9FDF-C688-38672487728E}"/>
                     </a:ext>
                   </a:extLst>
                 </p:cNvPr>
@@ -6793,10 +7780,10 @@
             </p:sp>
             <p:sp>
               <p:nvSpPr>
-                <p:cNvPr id="43" name="正方形/長方形 42">
+                <p:cNvPr id="133" name="正方形/長方形 132">
                   <a:extLst>
                     <a:ext uri="{FF2B5EF4-FFF2-40B4-BE49-F238E27FC236}">
-                      <a16:creationId xmlns:a16="http://schemas.microsoft.com/office/drawing/2014/main" id="{F2C600FE-6B1C-A381-6F8A-FB39F0906DDF}"/>
+                      <a16:creationId xmlns:a16="http://schemas.microsoft.com/office/drawing/2014/main" id="{D159FC81-2728-81BE-B71E-F6D3D3238539}"/>
                     </a:ext>
                   </a:extLst>
                 </p:cNvPr>
@@ -6878,10 +7865,10 @@
           </p:grpSp>
           <p:sp>
             <p:nvSpPr>
-              <p:cNvPr id="39" name="正方形/長方形 38">
+              <p:cNvPr id="129" name="正方形/長方形 128">
                 <a:extLst>
                   <a:ext uri="{FF2B5EF4-FFF2-40B4-BE49-F238E27FC236}">
-                    <a16:creationId xmlns:a16="http://schemas.microsoft.com/office/drawing/2014/main" id="{71FD3F90-C16E-E56C-FCD5-9F9147DC3655}"/>
+                    <a16:creationId xmlns:a16="http://schemas.microsoft.com/office/drawing/2014/main" id="{DCF544CF-1A01-E6C7-05D6-57979C5646DF}"/>
                   </a:ext>
                 </a:extLst>
               </p:cNvPr>
@@ -6890,8 +7877,8 @@
             </p:nvSpPr>
             <p:spPr>
               <a:xfrm>
-                <a:off x="-2841043" y="2381088"/>
-                <a:ext cx="952625" cy="106570"/>
+                <a:off x="-2708115" y="2381088"/>
+                <a:ext cx="686770" cy="106570"/>
               </a:xfrm>
               <a:prstGeom prst="rect">
                 <a:avLst/>
@@ -6939,6 +7926,23 @@
                   <a:defRPr/>
                 </a:pPr>
                 <a:r>
+                  <a:rPr kumimoji="1" lang="en-US" altLang="ja-JP" sz="1200" b="0" i="0" u="none" strike="noStrike" kern="1200" cap="none" spc="0" normalizeH="0" baseline="0" noProof="0" dirty="0">
+                    <a:ln>
+                      <a:noFill/>
+                    </a:ln>
+                    <a:solidFill>
+                      <a:srgbClr val="000000"/>
+                    </a:solidFill>
+                    <a:effectLst/>
+                    <a:uLnTx/>
+                    <a:uFillTx/>
+                    <a:latin typeface="游ゴシック Medium"/>
+                    <a:ea typeface="游ゴシック Medium"/>
+                    <a:cs typeface="+mn-cs"/>
+                  </a:rPr>
+                  <a:t>6</a:t>
+                </a:r>
+                <a:r>
                   <a:rPr kumimoji="1" lang="ja-JP" altLang="en-US" sz="1200" b="0" i="0" u="none" strike="noStrike" kern="1200" cap="none" spc="0" normalizeH="0" baseline="0" noProof="0" dirty="0">
                     <a:ln>
                       <a:noFill/>
@@ -6949,11 +7953,11 @@
                     <a:effectLst/>
                     <a:uLnTx/>
                     <a:uFillTx/>
-                    <a:latin typeface="+mn-lt"/>
-                    <a:ea typeface="+mn-ea"/>
+                    <a:latin typeface="游ゴシック Medium"/>
+                    <a:ea typeface="游ゴシック Medium"/>
                     <a:cs typeface="+mn-cs"/>
                   </a:rPr>
-                  <a:t>アクセント</a:t>
+                  <a:t>　</a:t>
                 </a:r>
               </a:p>
             </p:txBody>
@@ -6961,10 +7965,10 @@
         </p:grpSp>
         <p:grpSp>
           <p:nvGrpSpPr>
-            <p:cNvPr id="44" name="グループ化 43">
+            <p:cNvPr id="107" name="グループ化 106">
               <a:extLst>
                 <a:ext uri="{FF2B5EF4-FFF2-40B4-BE49-F238E27FC236}">
-                  <a16:creationId xmlns:a16="http://schemas.microsoft.com/office/drawing/2014/main" id="{45287B80-A7AE-DC26-6D19-191937BABF8C}"/>
+                  <a16:creationId xmlns:a16="http://schemas.microsoft.com/office/drawing/2014/main" id="{0A5CED1E-AFBF-9F55-9F4C-69096769B199}"/>
                 </a:ext>
               </a:extLst>
             </p:cNvPr>
@@ -6973,18 +7977,18 @@
           </p:nvGrpSpPr>
           <p:grpSpPr>
             <a:xfrm>
-              <a:off x="-1773055" y="-29139"/>
-              <a:ext cx="452006" cy="2227375"/>
+              <a:off x="-1279971" y="4228"/>
+              <a:ext cx="377678" cy="1861107"/>
               <a:chOff x="-1773055" y="-29139"/>
               <a:chExt cx="452006" cy="2227375"/>
             </a:xfrm>
           </p:grpSpPr>
           <p:grpSp>
             <p:nvGrpSpPr>
-              <p:cNvPr id="45" name="グループ化 44">
+              <p:cNvPr id="122" name="グループ化 121">
                 <a:extLst>
                   <a:ext uri="{FF2B5EF4-FFF2-40B4-BE49-F238E27FC236}">
-                    <a16:creationId xmlns:a16="http://schemas.microsoft.com/office/drawing/2014/main" id="{05E72D4E-8753-5D4D-9926-BA772C15FD96}"/>
+                    <a16:creationId xmlns:a16="http://schemas.microsoft.com/office/drawing/2014/main" id="{023E381B-5D05-3C14-DF2B-5BC258628EA8}"/>
                   </a:ext>
                 </a:extLst>
               </p:cNvPr>
@@ -7001,10 +8005,10 @@
             </p:grpSpPr>
             <p:sp>
               <p:nvSpPr>
-                <p:cNvPr id="47" name="正方形/長方形 46">
+                <p:cNvPr id="124" name="正方形/長方形 123">
                   <a:extLst>
                     <a:ext uri="{FF2B5EF4-FFF2-40B4-BE49-F238E27FC236}">
-                      <a16:creationId xmlns:a16="http://schemas.microsoft.com/office/drawing/2014/main" id="{73D96849-1B9C-EA08-475D-AD19CD8AE117}"/>
+                      <a16:creationId xmlns:a16="http://schemas.microsoft.com/office/drawing/2014/main" id="{B7F1742F-83FF-F6CF-5E40-7F0AF56FCB09}"/>
                     </a:ext>
                   </a:extLst>
                 </p:cNvPr>
@@ -7082,10 +8086,10 @@
             </p:sp>
             <p:sp>
               <p:nvSpPr>
-                <p:cNvPr id="48" name="正方形/長方形 47">
+                <p:cNvPr id="125" name="正方形/長方形 124">
                   <a:extLst>
                     <a:ext uri="{FF2B5EF4-FFF2-40B4-BE49-F238E27FC236}">
-                      <a16:creationId xmlns:a16="http://schemas.microsoft.com/office/drawing/2014/main" id="{9C380EA7-E53F-98B1-183F-83F17AAD2B44}"/>
+                      <a16:creationId xmlns:a16="http://schemas.microsoft.com/office/drawing/2014/main" id="{A3272A49-1BCD-717D-0268-966D21623E22}"/>
                     </a:ext>
                   </a:extLst>
                 </p:cNvPr>
@@ -7166,10 +8170,10 @@
             </p:sp>
             <p:sp>
               <p:nvSpPr>
-                <p:cNvPr id="49" name="正方形/長方形 48">
+                <p:cNvPr id="126" name="正方形/長方形 125">
                   <a:extLst>
                     <a:ext uri="{FF2B5EF4-FFF2-40B4-BE49-F238E27FC236}">
-                      <a16:creationId xmlns:a16="http://schemas.microsoft.com/office/drawing/2014/main" id="{5AA57D7E-ACC6-DCB6-3DD9-37646DC61EA4}"/>
+                      <a16:creationId xmlns:a16="http://schemas.microsoft.com/office/drawing/2014/main" id="{DED85DD5-E50D-766F-8623-6B50C9CFA87A}"/>
                     </a:ext>
                   </a:extLst>
                 </p:cNvPr>
@@ -7250,10 +8254,10 @@
             </p:sp>
             <p:sp>
               <p:nvSpPr>
-                <p:cNvPr id="50" name="正方形/長方形 49">
+                <p:cNvPr id="127" name="正方形/長方形 126">
                   <a:extLst>
                     <a:ext uri="{FF2B5EF4-FFF2-40B4-BE49-F238E27FC236}">
-                      <a16:creationId xmlns:a16="http://schemas.microsoft.com/office/drawing/2014/main" id="{10F1B29E-C007-822F-7D91-9ED825B8000E}"/>
+                      <a16:creationId xmlns:a16="http://schemas.microsoft.com/office/drawing/2014/main" id="{1FE065B6-0F30-3D92-DD0E-7A91C29FF69E}"/>
                     </a:ext>
                   </a:extLst>
                 </p:cNvPr>
@@ -7335,10 +8339,10 @@
           </p:grpSp>
           <p:sp>
             <p:nvSpPr>
-              <p:cNvPr id="46" name="正方形/長方形 45">
+              <p:cNvPr id="123" name="正方形/長方形 122">
                 <a:extLst>
                   <a:ext uri="{FF2B5EF4-FFF2-40B4-BE49-F238E27FC236}">
-                    <a16:creationId xmlns:a16="http://schemas.microsoft.com/office/drawing/2014/main" id="{8B0AA1E8-2C46-3E1F-6531-63EFE682182E}"/>
+                    <a16:creationId xmlns:a16="http://schemas.microsoft.com/office/drawing/2014/main" id="{4B82D84B-34A8-26AB-7924-585AF7B5A387}"/>
                   </a:ext>
                 </a:extLst>
               </p:cNvPr>
@@ -7432,10 +8436,10 @@
         </p:grpSp>
         <p:grpSp>
           <p:nvGrpSpPr>
-            <p:cNvPr id="51" name="グループ化 50">
+            <p:cNvPr id="108" name="グループ化 107">
               <a:extLst>
                 <a:ext uri="{FF2B5EF4-FFF2-40B4-BE49-F238E27FC236}">
-                  <a16:creationId xmlns:a16="http://schemas.microsoft.com/office/drawing/2014/main" id="{37BE7498-F33A-356E-CEF5-7C9C05E52D16}"/>
+                  <a16:creationId xmlns:a16="http://schemas.microsoft.com/office/drawing/2014/main" id="{6B0EDBF4-D181-DB2B-3469-AB949D9B5BFD}"/>
                 </a:ext>
               </a:extLst>
             </p:cNvPr>
@@ -7444,18 +8448,18 @@
           </p:nvGrpSpPr>
           <p:grpSpPr>
             <a:xfrm>
-              <a:off x="-955378" y="-34199"/>
-              <a:ext cx="452006" cy="2232435"/>
+              <a:off x="-596752" y="0"/>
+              <a:ext cx="377678" cy="1865335"/>
               <a:chOff x="-955378" y="-34199"/>
               <a:chExt cx="452006" cy="2232435"/>
             </a:xfrm>
           </p:grpSpPr>
           <p:grpSp>
             <p:nvGrpSpPr>
-              <p:cNvPr id="52" name="グループ化 51">
+              <p:cNvPr id="116" name="グループ化 115">
                 <a:extLst>
                   <a:ext uri="{FF2B5EF4-FFF2-40B4-BE49-F238E27FC236}">
-                    <a16:creationId xmlns:a16="http://schemas.microsoft.com/office/drawing/2014/main" id="{9378C161-EDC6-2D3A-276A-2369FDBBA018}"/>
+                    <a16:creationId xmlns:a16="http://schemas.microsoft.com/office/drawing/2014/main" id="{40AAA9F9-DCF7-86B4-A99E-D7A5C0D8FED8}"/>
                   </a:ext>
                 </a:extLst>
               </p:cNvPr>
@@ -7472,10 +8476,10 @@
             </p:grpSpPr>
             <p:sp>
               <p:nvSpPr>
-                <p:cNvPr id="54" name="正方形/長方形 53">
+                <p:cNvPr id="118" name="正方形/長方形 117">
                   <a:extLst>
                     <a:ext uri="{FF2B5EF4-FFF2-40B4-BE49-F238E27FC236}">
-                      <a16:creationId xmlns:a16="http://schemas.microsoft.com/office/drawing/2014/main" id="{A634CFE2-975D-CE1A-0FF6-84E4CD035692}"/>
+                      <a16:creationId xmlns:a16="http://schemas.microsoft.com/office/drawing/2014/main" id="{95EE3A91-4193-4D56-20B6-8B0DC98830E6}"/>
                     </a:ext>
                   </a:extLst>
                 </p:cNvPr>
@@ -7553,10 +8557,10 @@
             </p:sp>
             <p:sp>
               <p:nvSpPr>
-                <p:cNvPr id="55" name="正方形/長方形 54">
+                <p:cNvPr id="119" name="正方形/長方形 118">
                   <a:extLst>
                     <a:ext uri="{FF2B5EF4-FFF2-40B4-BE49-F238E27FC236}">
-                      <a16:creationId xmlns:a16="http://schemas.microsoft.com/office/drawing/2014/main" id="{414ED0BE-A96F-16AA-841E-4E62E286CD5F}"/>
+                      <a16:creationId xmlns:a16="http://schemas.microsoft.com/office/drawing/2014/main" id="{04C6B256-A8A6-EFEE-A8B7-727ED1490A1D}"/>
                     </a:ext>
                   </a:extLst>
                 </p:cNvPr>
@@ -7637,10 +8641,10 @@
             </p:sp>
             <p:sp>
               <p:nvSpPr>
-                <p:cNvPr id="56" name="正方形/長方形 55">
+                <p:cNvPr id="120" name="正方形/長方形 119">
                   <a:extLst>
                     <a:ext uri="{FF2B5EF4-FFF2-40B4-BE49-F238E27FC236}">
-                      <a16:creationId xmlns:a16="http://schemas.microsoft.com/office/drawing/2014/main" id="{F3749076-C728-8BC0-7533-69438AFD6161}"/>
+                      <a16:creationId xmlns:a16="http://schemas.microsoft.com/office/drawing/2014/main" id="{5656D044-813D-8F3F-39AF-CCB0602F4EB6}"/>
                     </a:ext>
                   </a:extLst>
                 </p:cNvPr>
@@ -7721,10 +8725,10 @@
             </p:sp>
             <p:sp>
               <p:nvSpPr>
-                <p:cNvPr id="57" name="正方形/長方形 56">
+                <p:cNvPr id="121" name="正方形/長方形 120">
                   <a:extLst>
                     <a:ext uri="{FF2B5EF4-FFF2-40B4-BE49-F238E27FC236}">
-                      <a16:creationId xmlns:a16="http://schemas.microsoft.com/office/drawing/2014/main" id="{519A1ADA-EFC6-EC54-A584-0C3EC6F79E9C}"/>
+                      <a16:creationId xmlns:a16="http://schemas.microsoft.com/office/drawing/2014/main" id="{06A491B0-B518-8721-DBB2-F26C8B566B9B}"/>
                     </a:ext>
                   </a:extLst>
                 </p:cNvPr>
@@ -7806,10 +8810,10 @@
           </p:grpSp>
           <p:sp>
             <p:nvSpPr>
-              <p:cNvPr id="53" name="正方形/長方形 52">
+              <p:cNvPr id="117" name="正方形/長方形 116">
                 <a:extLst>
                   <a:ext uri="{FF2B5EF4-FFF2-40B4-BE49-F238E27FC236}">
-                    <a16:creationId xmlns:a16="http://schemas.microsoft.com/office/drawing/2014/main" id="{594E350D-812A-C83F-D2AE-470F3B91EEA3}"/>
+                    <a16:creationId xmlns:a16="http://schemas.microsoft.com/office/drawing/2014/main" id="{E073D5D5-DDBE-EE82-CE72-8A5B42EA1680}"/>
                   </a:ext>
                 </a:extLst>
               </p:cNvPr>
@@ -7889,10 +8893,10 @@
         </p:grpSp>
         <p:grpSp>
           <p:nvGrpSpPr>
-            <p:cNvPr id="58" name="グループ化 57">
+            <p:cNvPr id="109" name="グループ化 108">
               <a:extLst>
                 <a:ext uri="{FF2B5EF4-FFF2-40B4-BE49-F238E27FC236}">
-                  <a16:creationId xmlns:a16="http://schemas.microsoft.com/office/drawing/2014/main" id="{41EA08B1-9AD3-6E4A-5326-4A9C95BCE863}"/>
+                  <a16:creationId xmlns:a16="http://schemas.microsoft.com/office/drawing/2014/main" id="{AD002CB7-4376-DB68-5EB0-AA01AA4F437E}"/>
                 </a:ext>
               </a:extLst>
             </p:cNvPr>
@@ -7901,18 +8905,18 @@
           </p:nvGrpSpPr>
           <p:grpSpPr>
             <a:xfrm>
-              <a:off x="-2001755" y="2381088"/>
-              <a:ext cx="909406" cy="2236157"/>
+              <a:off x="-1471064" y="2018118"/>
+              <a:ext cx="759864" cy="1868445"/>
               <a:chOff x="-2001755" y="2381088"/>
               <a:chExt cx="909406" cy="2236157"/>
             </a:xfrm>
           </p:grpSpPr>
           <p:grpSp>
             <p:nvGrpSpPr>
-              <p:cNvPr id="59" name="グループ化 58">
+              <p:cNvPr id="110" name="グループ化 109">
                 <a:extLst>
                   <a:ext uri="{FF2B5EF4-FFF2-40B4-BE49-F238E27FC236}">
-                    <a16:creationId xmlns:a16="http://schemas.microsoft.com/office/drawing/2014/main" id="{BFD74164-31D1-4C3E-0B2D-83C6C35F6841}"/>
+                    <a16:creationId xmlns:a16="http://schemas.microsoft.com/office/drawing/2014/main" id="{7D4E3791-B8FC-B255-0AFF-79FEED2E0CD5}"/>
                   </a:ext>
                 </a:extLst>
               </p:cNvPr>
@@ -7929,10 +8933,10 @@
             </p:grpSpPr>
             <p:sp>
               <p:nvSpPr>
-                <p:cNvPr id="61" name="正方形/長方形 60">
+                <p:cNvPr id="112" name="正方形/長方形 111">
                   <a:extLst>
                     <a:ext uri="{FF2B5EF4-FFF2-40B4-BE49-F238E27FC236}">
-                      <a16:creationId xmlns:a16="http://schemas.microsoft.com/office/drawing/2014/main" id="{8F096219-E83C-2CC8-7948-D46D6AEFB1E8}"/>
+                      <a16:creationId xmlns:a16="http://schemas.microsoft.com/office/drawing/2014/main" id="{2889D937-03E5-EF51-3CB8-FAC88D3A84A8}"/>
                     </a:ext>
                   </a:extLst>
                 </p:cNvPr>
@@ -8010,10 +9014,10 @@
             </p:sp>
             <p:sp>
               <p:nvSpPr>
-                <p:cNvPr id="62" name="正方形/長方形 61">
+                <p:cNvPr id="113" name="正方形/長方形 112">
                   <a:extLst>
                     <a:ext uri="{FF2B5EF4-FFF2-40B4-BE49-F238E27FC236}">
-                      <a16:creationId xmlns:a16="http://schemas.microsoft.com/office/drawing/2014/main" id="{373B9FF0-FF11-AC4A-F5E7-02F757D6685E}"/>
+                      <a16:creationId xmlns:a16="http://schemas.microsoft.com/office/drawing/2014/main" id="{95F57B1B-29D1-91D8-2222-2194A05CE9FA}"/>
                     </a:ext>
                   </a:extLst>
                 </p:cNvPr>
@@ -8094,10 +9098,10 @@
             </p:sp>
             <p:sp>
               <p:nvSpPr>
-                <p:cNvPr id="63" name="正方形/長方形 62">
+                <p:cNvPr id="114" name="正方形/長方形 113">
                   <a:extLst>
                     <a:ext uri="{FF2B5EF4-FFF2-40B4-BE49-F238E27FC236}">
-                      <a16:creationId xmlns:a16="http://schemas.microsoft.com/office/drawing/2014/main" id="{0A5E5E4D-6967-E631-4B1E-697450DC1156}"/>
+                      <a16:creationId xmlns:a16="http://schemas.microsoft.com/office/drawing/2014/main" id="{FDB56576-C641-A72F-3B69-C6966BEB231D}"/>
                     </a:ext>
                   </a:extLst>
                 </p:cNvPr>
@@ -8178,10 +9182,10 @@
             </p:sp>
             <p:sp>
               <p:nvSpPr>
-                <p:cNvPr id="64" name="正方形/長方形 63">
+                <p:cNvPr id="115" name="正方形/長方形 114">
                   <a:extLst>
                     <a:ext uri="{FF2B5EF4-FFF2-40B4-BE49-F238E27FC236}">
-                      <a16:creationId xmlns:a16="http://schemas.microsoft.com/office/drawing/2014/main" id="{4837D0C0-EBB2-895D-801A-386863D73692}"/>
+                      <a16:creationId xmlns:a16="http://schemas.microsoft.com/office/drawing/2014/main" id="{7A2D6452-CCFB-C707-E69D-E6E0C8DB562E}"/>
                     </a:ext>
                   </a:extLst>
                 </p:cNvPr>
@@ -8263,10 +9267,10 @@
           </p:grpSp>
           <p:sp>
             <p:nvSpPr>
-              <p:cNvPr id="60" name="正方形/長方形 59">
+              <p:cNvPr id="111" name="正方形/長方形 110">
                 <a:extLst>
                   <a:ext uri="{FF2B5EF4-FFF2-40B4-BE49-F238E27FC236}">
-                    <a16:creationId xmlns:a16="http://schemas.microsoft.com/office/drawing/2014/main" id="{E105363E-D87F-3EAE-F562-CB7789853B68}"/>
+                    <a16:creationId xmlns:a16="http://schemas.microsoft.com/office/drawing/2014/main" id="{57FEB6A0-EAC7-6854-E2E3-B57600242B05}"/>
                   </a:ext>
                 </a:extLst>
               </p:cNvPr>
@@ -8338,7 +9342,7 @@
                     <a:ea typeface="游ゴシック Medium"/>
                     <a:cs typeface="+mn-cs"/>
                   </a:rPr>
-                  <a:t>黒</a:t>
+                  <a:t>アクセント</a:t>
                 </a:r>
               </a:p>
             </p:txBody>
@@ -8348,23 +9352,22 @@
     </p:spTree>
     <p:extLst>
       <p:ext uri="{BB962C8B-B14F-4D97-AF65-F5344CB8AC3E}">
-        <p14:creationId xmlns:p14="http://schemas.microsoft.com/office/powerpoint/2010/main" val="695801203"/>
+        <p14:creationId xmlns:p14="http://schemas.microsoft.com/office/powerpoint/2010/main" val="1277211589"/>
       </p:ext>
     </p:extLst>
   </p:cSld>
   <p:clrMap bg1="lt1" tx1="dk1" bg2="lt2" tx2="dk2" accent1="accent1" accent2="accent2" accent3="accent3" accent4="accent4" accent5="accent5" accent6="accent6" hlink="hlink" folHlink="folHlink"/>
   <p:sldLayoutIdLst>
-    <p:sldLayoutId id="2147483696" r:id="rId1"/>
-    <p:sldLayoutId id="2147483721" r:id="rId2"/>
-    <p:sldLayoutId id="2147483697" r:id="rId3"/>
-    <p:sldLayoutId id="2147483698" r:id="rId4"/>
-    <p:sldLayoutId id="2147483699" r:id="rId5"/>
-    <p:sldLayoutId id="2147483700" r:id="rId6"/>
-    <p:sldLayoutId id="2147483701" r:id="rId7"/>
-    <p:sldLayoutId id="2147483702" r:id="rId8"/>
-    <p:sldLayoutId id="2147483703" r:id="rId9"/>
-    <p:sldLayoutId id="2147483717" r:id="rId10"/>
-    <p:sldLayoutId id="2147483720" r:id="rId11"/>
+    <p:sldLayoutId id="2147483706" r:id="rId1"/>
+    <p:sldLayoutId id="2147483707" r:id="rId2"/>
+    <p:sldLayoutId id="2147483708" r:id="rId3"/>
+    <p:sldLayoutId id="2147483709" r:id="rId4"/>
+    <p:sldLayoutId id="2147483710" r:id="rId5"/>
+    <p:sldLayoutId id="2147483711" r:id="rId6"/>
+    <p:sldLayoutId id="2147483712" r:id="rId7"/>
+    <p:sldLayoutId id="2147483713" r:id="rId8"/>
+    <p:sldLayoutId id="2147483714" r:id="rId9"/>
+    <p:sldLayoutId id="2147483715" r:id="rId10"/>
   </p:sldLayoutIdLst>
   <p:txStyles>
     <p:titleStyle>
@@ -8664,7 +9667,7 @@
             <a:srgbClr val="F26B43"/>
           </p15:clr>
         </p15:guide>
-        <p15:guide id="4" orient="horz" pos="1093">
+        <p15:guide id="4" orient="horz" pos="1094">
           <p15:clr>
             <a:srgbClr val="F26B43"/>
           </p15:clr>
@@ -8775,7 +9778,7 @@
             <a:spLocks noGrp="1"/>
           </p:cNvSpPr>
           <p:nvPr>
-            <p:ph type="body" idx="18" sz="quarter"/>
+            <p:ph type="body" idx="17" sz="quarter"/>
           </p:nvPr>
         </p:nvSpPr>
         <p:spPr/>
@@ -8814,7 +9817,7 @@
       <p:grpSpPr/>
       <p:sp>
         <p:nvSpPr>
-          <p:cNvPr id="3" name="Title 2"/>
+          <p:cNvPr id="2" name="Title 1"/>
           <p:cNvSpPr>
             <a:spLocks noGrp="1"/>
           </p:cNvSpPr>
@@ -8840,7 +9843,7 @@
       </p:sp>
       <p:sp>
         <p:nvSpPr>
-          <p:cNvPr id="4" name="TextBox 3"/>
+          <p:cNvPr id="3" name="TextBox 2"/>
           <p:cNvSpPr txBox="1"/>
           <p:nvPr/>
         </p:nvSpPr>
@@ -8871,7 +9874,7 @@
             <a:r>
               <a:rPr sz="1300" b="0">
                 <a:solidFill>
-                  <a:srgbClr val="6B7177"/>
+                  <a:srgbClr val="B9C6DA"/>
                 </a:solidFill>
                 <a:latin typeface="游ゴシック Medium"/>
                 <a:ea typeface="游ゴシック Medium"/>
@@ -8884,7 +9887,7 @@
       </p:sp>
       <p:graphicFrame>
         <p:nvGraphicFramePr>
-          <p:cNvPr id="5" name="Table 4"/>
+          <p:cNvPr id="4" name="Table 3"/>
           <p:cNvGraphicFramePr>
             <a:graphicFrameLocks noGrp="1"/>
           </p:cNvGraphicFramePr>
@@ -9281,7 +10284,7 @@
       </p:graphicFrame>
       <p:sp>
         <p:nvSpPr>
-          <p:cNvPr id="6" name="TextBox 5"/>
+          <p:cNvPr id="5" name="TextBox 4"/>
           <p:cNvSpPr txBox="1"/>
           <p:nvPr/>
         </p:nvSpPr>
@@ -9312,7 +10315,7 @@
             <a:r>
               <a:rPr sz="1300" b="1">
                 <a:solidFill>
-                  <a:srgbClr val="003D86"/>
+                  <a:srgbClr val="8FB9EC"/>
                 </a:solidFill>
                 <a:latin typeface="游ゴシック Medium"/>
                 <a:ea typeface="游ゴシック Medium"/>
@@ -9323,7 +10326,7 @@
             <a:r>
               <a:rPr sz="1300" b="0">
                 <a:solidFill>
-                  <a:srgbClr val="262B30"/>
+                  <a:srgbClr val="E8EDF4"/>
                 </a:solidFill>
                 <a:latin typeface="游ゴシック Medium"/>
                 <a:ea typeface="游ゴシック Medium"/>
@@ -9336,7 +10339,7 @@
       </p:sp>
       <p:sp>
         <p:nvSpPr>
-          <p:cNvPr id="7" name="TextBox 6"/>
+          <p:cNvPr id="6" name="TextBox 5"/>
           <p:cNvSpPr txBox="1"/>
           <p:nvPr/>
         </p:nvSpPr>
@@ -9367,7 +10370,7 @@
             <a:r>
               <a:rPr sz="1200" b="1">
                 <a:solidFill>
-                  <a:srgbClr val="003D86"/>
+                  <a:srgbClr val="8FB9EC"/>
                 </a:solidFill>
                 <a:latin typeface="游ゴシック Medium"/>
                 <a:ea typeface="游ゴシック Medium"/>
@@ -9378,7 +10381,7 @@
             <a:r>
               <a:rPr sz="1200" b="0">
                 <a:solidFill>
-                  <a:srgbClr val="262B30"/>
+                  <a:srgbClr val="E8EDF4"/>
                 </a:solidFill>
                 <a:latin typeface="游ゴシック Medium"/>
                 <a:ea typeface="游ゴシック Medium"/>
@@ -9409,7 +10412,7 @@
       <p:grpSpPr/>
       <p:sp>
         <p:nvSpPr>
-          <p:cNvPr id="3" name="Title 2"/>
+          <p:cNvPr id="2" name="Title 1"/>
           <p:cNvSpPr>
             <a:spLocks noGrp="1"/>
           </p:cNvSpPr>
@@ -9435,7 +10438,7 @@
       </p:sp>
       <p:sp>
         <p:nvSpPr>
-          <p:cNvPr id="4" name="TextBox 3"/>
+          <p:cNvPr id="3" name="TextBox 2"/>
           <p:cNvSpPr txBox="1"/>
           <p:nvPr/>
         </p:nvSpPr>
@@ -9466,7 +10469,7 @@
             <a:r>
               <a:rPr sz="1300" b="0">
                 <a:solidFill>
-                  <a:srgbClr val="6B7177"/>
+                  <a:srgbClr val="B9C6DA"/>
                 </a:solidFill>
                 <a:latin typeface="游ゴシック Medium"/>
                 <a:ea typeface="游ゴシック Medium"/>
@@ -9479,7 +10482,7 @@
       </p:sp>
       <p:sp>
         <p:nvSpPr>
-          <p:cNvPr id="5" name="Rectangle 4"/>
+          <p:cNvPr id="4" name="Rectangle 3"/>
           <p:cNvSpPr/>
           <p:nvPr/>
         </p:nvSpPr>
@@ -9492,7 +10495,7 @@
             <a:avLst/>
           </a:prstGeom>
           <a:solidFill>
-            <a:srgbClr val="005CCA"/>
+            <a:srgbClr val="8FB9EC"/>
           </a:solidFill>
           <a:ln>
             <a:noFill/>
@@ -9523,7 +10526,7 @@
       </p:sp>
       <p:sp>
         <p:nvSpPr>
-          <p:cNvPr id="6" name="TextBox 5"/>
+          <p:cNvPr id="5" name="TextBox 4"/>
           <p:cNvSpPr txBox="1"/>
           <p:nvPr/>
         </p:nvSpPr>
@@ -9554,7 +10557,7 @@
             <a:r>
               <a:rPr sz="1600" b="1">
                 <a:solidFill>
-                  <a:srgbClr val="003D86"/>
+                  <a:srgbClr val="FFFFFF"/>
                 </a:solidFill>
                 <a:latin typeface="游ゴシック Medium"/>
                 <a:ea typeface="游ゴシック Medium"/>
@@ -9567,7 +10570,7 @@
       </p:sp>
       <p:sp>
         <p:nvSpPr>
-          <p:cNvPr id="7" name="TextBox 6"/>
+          <p:cNvPr id="6" name="TextBox 5"/>
           <p:cNvSpPr txBox="1"/>
           <p:nvPr/>
         </p:nvSpPr>
@@ -9598,7 +10601,7 @@
             <a:r>
               <a:rPr sz="1300" b="0">
                 <a:solidFill>
-                  <a:srgbClr val="262B30"/>
+                  <a:srgbClr val="E8EDF4"/>
                 </a:solidFill>
                 <a:latin typeface="游ゴシック Medium"/>
                 <a:ea typeface="游ゴシック Medium"/>
@@ -9611,7 +10614,7 @@
       </p:sp>
       <p:sp>
         <p:nvSpPr>
-          <p:cNvPr id="8" name="Rectangle 7"/>
+          <p:cNvPr id="7" name="Rectangle 6"/>
           <p:cNvSpPr/>
           <p:nvPr/>
         </p:nvSpPr>
@@ -9624,7 +10627,7 @@
             <a:avLst/>
           </a:prstGeom>
           <a:solidFill>
-            <a:srgbClr val="005CCA"/>
+            <a:srgbClr val="8FB9EC"/>
           </a:solidFill>
           <a:ln>
             <a:noFill/>
@@ -9655,7 +10658,7 @@
       </p:sp>
       <p:sp>
         <p:nvSpPr>
-          <p:cNvPr id="9" name="TextBox 8"/>
+          <p:cNvPr id="8" name="TextBox 7"/>
           <p:cNvSpPr txBox="1"/>
           <p:nvPr/>
         </p:nvSpPr>
@@ -9686,7 +10689,7 @@
             <a:r>
               <a:rPr sz="1600" b="1">
                 <a:solidFill>
-                  <a:srgbClr val="003D86"/>
+                  <a:srgbClr val="FFFFFF"/>
                 </a:solidFill>
                 <a:latin typeface="游ゴシック Medium"/>
                 <a:ea typeface="游ゴシック Medium"/>
@@ -9699,7 +10702,7 @@
       </p:sp>
       <p:sp>
         <p:nvSpPr>
-          <p:cNvPr id="10" name="TextBox 9"/>
+          <p:cNvPr id="9" name="TextBox 8"/>
           <p:cNvSpPr txBox="1"/>
           <p:nvPr/>
         </p:nvSpPr>
@@ -9730,7 +10733,7 @@
             <a:r>
               <a:rPr sz="1300" b="0">
                 <a:solidFill>
-                  <a:srgbClr val="262B30"/>
+                  <a:srgbClr val="E8EDF4"/>
                 </a:solidFill>
                 <a:latin typeface="游ゴシック Medium"/>
                 <a:ea typeface="游ゴシック Medium"/>
@@ -9743,7 +10746,7 @@
       </p:sp>
       <p:sp>
         <p:nvSpPr>
-          <p:cNvPr id="11" name="Rectangle 10"/>
+          <p:cNvPr id="10" name="Rectangle 9"/>
           <p:cNvSpPr/>
           <p:nvPr/>
         </p:nvSpPr>
@@ -9756,7 +10759,7 @@
             <a:avLst/>
           </a:prstGeom>
           <a:solidFill>
-            <a:srgbClr val="005CCA"/>
+            <a:srgbClr val="8FB9EC"/>
           </a:solidFill>
           <a:ln>
             <a:noFill/>
@@ -9787,7 +10790,7 @@
       </p:sp>
       <p:sp>
         <p:nvSpPr>
-          <p:cNvPr id="12" name="TextBox 11"/>
+          <p:cNvPr id="11" name="TextBox 10"/>
           <p:cNvSpPr txBox="1"/>
           <p:nvPr/>
         </p:nvSpPr>
@@ -9818,7 +10821,7 @@
             <a:r>
               <a:rPr sz="1600" b="1">
                 <a:solidFill>
-                  <a:srgbClr val="003D86"/>
+                  <a:srgbClr val="FFFFFF"/>
                 </a:solidFill>
                 <a:latin typeface="游ゴシック Medium"/>
                 <a:ea typeface="游ゴシック Medium"/>
@@ -9831,7 +10834,7 @@
       </p:sp>
       <p:sp>
         <p:nvSpPr>
-          <p:cNvPr id="13" name="TextBox 12"/>
+          <p:cNvPr id="12" name="TextBox 11"/>
           <p:cNvSpPr txBox="1"/>
           <p:nvPr/>
         </p:nvSpPr>
@@ -9862,7 +10865,7 @@
             <a:r>
               <a:rPr sz="1300" b="0">
                 <a:solidFill>
-                  <a:srgbClr val="262B30"/>
+                  <a:srgbClr val="E8EDF4"/>
                 </a:solidFill>
                 <a:latin typeface="游ゴシック Medium"/>
                 <a:ea typeface="游ゴシック Medium"/>
@@ -9875,7 +10878,7 @@
       </p:sp>
       <p:sp>
         <p:nvSpPr>
-          <p:cNvPr id="14" name="Rectangle 13"/>
+          <p:cNvPr id="13" name="Rectangle 12"/>
           <p:cNvSpPr/>
           <p:nvPr/>
         </p:nvSpPr>
@@ -9888,7 +10891,7 @@
             <a:avLst/>
           </a:prstGeom>
           <a:solidFill>
-            <a:srgbClr val="005CCA"/>
+            <a:srgbClr val="8FB9EC"/>
           </a:solidFill>
           <a:ln>
             <a:noFill/>
@@ -9919,7 +10922,7 @@
       </p:sp>
       <p:sp>
         <p:nvSpPr>
-          <p:cNvPr id="15" name="TextBox 14"/>
+          <p:cNvPr id="14" name="TextBox 13"/>
           <p:cNvSpPr txBox="1"/>
           <p:nvPr/>
         </p:nvSpPr>
@@ -9950,7 +10953,7 @@
             <a:r>
               <a:rPr sz="1600" b="1">
                 <a:solidFill>
-                  <a:srgbClr val="003D86"/>
+                  <a:srgbClr val="FFFFFF"/>
                 </a:solidFill>
                 <a:latin typeface="游ゴシック Medium"/>
                 <a:ea typeface="游ゴシック Medium"/>
@@ -9963,7 +10966,7 @@
       </p:sp>
       <p:sp>
         <p:nvSpPr>
-          <p:cNvPr id="16" name="TextBox 15"/>
+          <p:cNvPr id="15" name="TextBox 14"/>
           <p:cNvSpPr txBox="1"/>
           <p:nvPr/>
         </p:nvSpPr>
@@ -9994,7 +10997,7 @@
             <a:r>
               <a:rPr sz="1300" b="0">
                 <a:solidFill>
-                  <a:srgbClr val="262B30"/>
+                  <a:srgbClr val="E8EDF4"/>
                 </a:solidFill>
                 <a:latin typeface="游ゴシック Medium"/>
                 <a:ea typeface="游ゴシック Medium"/>
@@ -10007,7 +11010,7 @@
       </p:sp>
       <p:sp>
         <p:nvSpPr>
-          <p:cNvPr id="17" name="TextBox 16"/>
+          <p:cNvPr id="16" name="TextBox 15"/>
           <p:cNvSpPr txBox="1"/>
           <p:nvPr/>
         </p:nvSpPr>
@@ -10038,7 +11041,7 @@
             <a:r>
               <a:rPr sz="1400" b="1">
                 <a:solidFill>
-                  <a:srgbClr val="003D86"/>
+                  <a:srgbClr val="8FB9EC"/>
                 </a:solidFill>
                 <a:latin typeface="游ゴシック Medium"/>
                 <a:ea typeface="游ゴシック Medium"/>
@@ -10049,7 +11052,7 @@
             <a:r>
               <a:rPr sz="1400" b="0">
                 <a:solidFill>
-                  <a:srgbClr val="262B30"/>
+                  <a:srgbClr val="E8EDF4"/>
                 </a:solidFill>
                 <a:latin typeface="游ゴシック Medium"/>
                 <a:ea typeface="游ゴシック Medium"/>
@@ -10080,7 +11083,7 @@
       <p:grpSpPr/>
       <p:sp>
         <p:nvSpPr>
-          <p:cNvPr id="3" name="Title 2"/>
+          <p:cNvPr id="2" name="Title 1"/>
           <p:cNvSpPr>
             <a:spLocks noGrp="1"/>
           </p:cNvSpPr>
@@ -10106,7 +11109,7 @@
       </p:sp>
       <p:sp>
         <p:nvSpPr>
-          <p:cNvPr id="4" name="TextBox 3"/>
+          <p:cNvPr id="3" name="TextBox 2"/>
           <p:cNvSpPr txBox="1"/>
           <p:nvPr/>
         </p:nvSpPr>
@@ -10137,7 +11140,7 @@
             <a:r>
               <a:rPr sz="1300" b="0">
                 <a:solidFill>
-                  <a:srgbClr val="6B7177"/>
+                  <a:srgbClr val="B9C6DA"/>
                 </a:solidFill>
                 <a:latin typeface="游ゴシック Medium"/>
                 <a:ea typeface="游ゴシック Medium"/>
@@ -10150,7 +11153,7 @@
       </p:sp>
       <p:sp>
         <p:nvSpPr>
-          <p:cNvPr id="5" name="Rectangle 4"/>
+          <p:cNvPr id="4" name="Rectangle 3"/>
           <p:cNvSpPr/>
           <p:nvPr/>
         </p:nvSpPr>
@@ -10196,7 +11199,7 @@
       </p:sp>
       <p:sp>
         <p:nvSpPr>
-          <p:cNvPr id="6" name="TextBox 5"/>
+          <p:cNvPr id="5" name="TextBox 4"/>
           <p:cNvSpPr txBox="1"/>
           <p:nvPr/>
         </p:nvSpPr>
@@ -10240,7 +11243,7 @@
       </p:sp>
       <p:sp>
         <p:nvSpPr>
-          <p:cNvPr id="7" name="TextBox 6"/>
+          <p:cNvPr id="6" name="TextBox 5"/>
           <p:cNvSpPr txBox="1"/>
           <p:nvPr/>
         </p:nvSpPr>
@@ -10284,7 +11287,7 @@
       </p:sp>
       <p:sp>
         <p:nvSpPr>
-          <p:cNvPr id="8" name="TextBox 7"/>
+          <p:cNvPr id="7" name="TextBox 6"/>
           <p:cNvSpPr txBox="1"/>
           <p:nvPr/>
         </p:nvSpPr>
@@ -10435,7 +11438,7 @@
       </p:sp>
       <p:sp>
         <p:nvSpPr>
-          <p:cNvPr id="9" name="Rectangle 8"/>
+          <p:cNvPr id="8" name="Rectangle 7"/>
           <p:cNvSpPr/>
           <p:nvPr/>
         </p:nvSpPr>
@@ -10481,7 +11484,7 @@
       </p:sp>
       <p:sp>
         <p:nvSpPr>
-          <p:cNvPr id="10" name="TextBox 9"/>
+          <p:cNvPr id="9" name="TextBox 8"/>
           <p:cNvSpPr txBox="1"/>
           <p:nvPr/>
         </p:nvSpPr>
@@ -10525,7 +11528,7 @@
       </p:sp>
       <p:sp>
         <p:nvSpPr>
-          <p:cNvPr id="11" name="TextBox 10"/>
+          <p:cNvPr id="10" name="TextBox 9"/>
           <p:cNvSpPr txBox="1"/>
           <p:nvPr/>
         </p:nvSpPr>
@@ -10569,7 +11572,7 @@
       </p:sp>
       <p:sp>
         <p:nvSpPr>
-          <p:cNvPr id="12" name="TextBox 11"/>
+          <p:cNvPr id="11" name="TextBox 10"/>
           <p:cNvSpPr txBox="1"/>
           <p:nvPr/>
         </p:nvSpPr>
@@ -10720,7 +11723,7 @@
       </p:sp>
       <p:sp>
         <p:nvSpPr>
-          <p:cNvPr id="13" name="TextBox 12"/>
+          <p:cNvPr id="12" name="TextBox 11"/>
           <p:cNvSpPr txBox="1"/>
           <p:nvPr/>
         </p:nvSpPr>
@@ -10751,7 +11754,7 @@
             <a:r>
               <a:rPr sz="1400" b="1">
                 <a:solidFill>
-                  <a:srgbClr val="003D86"/>
+                  <a:srgbClr val="8FB9EC"/>
                 </a:solidFill>
                 <a:latin typeface="游ゴシック Medium"/>
                 <a:ea typeface="游ゴシック Medium"/>
@@ -10772,7 +11775,7 @@
             <a:r>
               <a:rPr sz="1300" b="0">
                 <a:solidFill>
-                  <a:srgbClr val="262B30"/>
+                  <a:srgbClr val="E8EDF4"/>
                 </a:solidFill>
                 <a:latin typeface="游ゴシック Medium"/>
                 <a:ea typeface="游ゴシック Medium"/>
@@ -10793,7 +11796,7 @@
             <a:r>
               <a:rPr sz="1300" b="0">
                 <a:solidFill>
-                  <a:srgbClr val="262B30"/>
+                  <a:srgbClr val="E8EDF4"/>
                 </a:solidFill>
                 <a:latin typeface="游ゴシック Medium"/>
                 <a:ea typeface="游ゴシック Medium"/>
@@ -10824,7 +11827,7 @@
       <p:grpSpPr/>
       <p:sp>
         <p:nvSpPr>
-          <p:cNvPr id="3" name="Title 2"/>
+          <p:cNvPr id="2" name="Title 1"/>
           <p:cNvSpPr>
             <a:spLocks noGrp="1"/>
           </p:cNvSpPr>
@@ -10850,7 +11853,7 @@
       </p:sp>
       <p:sp>
         <p:nvSpPr>
-          <p:cNvPr id="4" name="TextBox 3"/>
+          <p:cNvPr id="3" name="TextBox 2"/>
           <p:cNvSpPr txBox="1"/>
           <p:nvPr/>
         </p:nvSpPr>
@@ -10881,7 +11884,7 @@
             <a:r>
               <a:rPr sz="1300" b="0">
                 <a:solidFill>
-                  <a:srgbClr val="6B7177"/>
+                  <a:srgbClr val="B9C6DA"/>
                 </a:solidFill>
                 <a:latin typeface="游ゴシック Medium"/>
                 <a:ea typeface="游ゴシック Medium"/>
@@ -10894,7 +11897,7 @@
       </p:sp>
       <p:sp>
         <p:nvSpPr>
-          <p:cNvPr id="5" name="Rectangle 4"/>
+          <p:cNvPr id="4" name="Rectangle 3"/>
           <p:cNvSpPr/>
           <p:nvPr/>
         </p:nvSpPr>
@@ -10940,7 +11943,7 @@
       </p:sp>
       <p:sp>
         <p:nvSpPr>
-          <p:cNvPr id="6" name="TextBox 5"/>
+          <p:cNvPr id="5" name="TextBox 4"/>
           <p:cNvSpPr txBox="1"/>
           <p:nvPr/>
         </p:nvSpPr>
@@ -10984,7 +11987,7 @@
       </p:sp>
       <p:sp>
         <p:nvSpPr>
-          <p:cNvPr id="7" name="TextBox 6"/>
+          <p:cNvPr id="6" name="TextBox 5"/>
           <p:cNvSpPr txBox="1"/>
           <p:nvPr/>
         </p:nvSpPr>
@@ -11028,7 +12031,7 @@
       </p:sp>
       <p:sp>
         <p:nvSpPr>
-          <p:cNvPr id="8" name="TextBox 7"/>
+          <p:cNvPr id="7" name="TextBox 6"/>
           <p:cNvSpPr txBox="1"/>
           <p:nvPr/>
         </p:nvSpPr>
@@ -11147,7 +12150,7 @@
       </p:sp>
       <p:sp>
         <p:nvSpPr>
-          <p:cNvPr id="9" name="Rectangle 8"/>
+          <p:cNvPr id="8" name="Rectangle 7"/>
           <p:cNvSpPr/>
           <p:nvPr/>
         </p:nvSpPr>
@@ -11193,7 +12196,7 @@
       </p:sp>
       <p:sp>
         <p:nvSpPr>
-          <p:cNvPr id="10" name="TextBox 9"/>
+          <p:cNvPr id="9" name="TextBox 8"/>
           <p:cNvSpPr txBox="1"/>
           <p:nvPr/>
         </p:nvSpPr>
@@ -11237,7 +12240,7 @@
       </p:sp>
       <p:sp>
         <p:nvSpPr>
-          <p:cNvPr id="11" name="TextBox 10"/>
+          <p:cNvPr id="10" name="TextBox 9"/>
           <p:cNvSpPr txBox="1"/>
           <p:nvPr/>
         </p:nvSpPr>
@@ -11281,7 +12284,7 @@
       </p:sp>
       <p:sp>
         <p:nvSpPr>
-          <p:cNvPr id="12" name="TextBox 11"/>
+          <p:cNvPr id="11" name="TextBox 10"/>
           <p:cNvSpPr txBox="1"/>
           <p:nvPr/>
         </p:nvSpPr>
@@ -11400,7 +12403,7 @@
       </p:sp>
       <p:sp>
         <p:nvSpPr>
-          <p:cNvPr id="13" name="Rectangle 12"/>
+          <p:cNvPr id="12" name="Rectangle 11"/>
           <p:cNvSpPr/>
           <p:nvPr/>
         </p:nvSpPr>
@@ -11446,7 +12449,7 @@
       </p:sp>
       <p:sp>
         <p:nvSpPr>
-          <p:cNvPr id="14" name="TextBox 13"/>
+          <p:cNvPr id="13" name="TextBox 12"/>
           <p:cNvSpPr txBox="1"/>
           <p:nvPr/>
         </p:nvSpPr>
@@ -11490,7 +12493,7 @@
       </p:sp>
       <p:sp>
         <p:nvSpPr>
-          <p:cNvPr id="15" name="TextBox 14"/>
+          <p:cNvPr id="14" name="TextBox 13"/>
           <p:cNvSpPr txBox="1"/>
           <p:nvPr/>
         </p:nvSpPr>
@@ -11534,7 +12537,7 @@
       </p:sp>
       <p:sp>
         <p:nvSpPr>
-          <p:cNvPr id="16" name="TextBox 15"/>
+          <p:cNvPr id="15" name="TextBox 14"/>
           <p:cNvSpPr txBox="1"/>
           <p:nvPr/>
         </p:nvSpPr>
@@ -11653,7 +12656,7 @@
       </p:sp>
       <p:sp>
         <p:nvSpPr>
-          <p:cNvPr id="17" name="TextBox 16"/>
+          <p:cNvPr id="16" name="TextBox 15"/>
           <p:cNvSpPr txBox="1"/>
           <p:nvPr/>
         </p:nvSpPr>
@@ -11684,7 +12687,7 @@
             <a:r>
               <a:rPr sz="1400" b="1">
                 <a:solidFill>
-                  <a:srgbClr val="003D86"/>
+                  <a:srgbClr val="8FB9EC"/>
                 </a:solidFill>
                 <a:latin typeface="游ゴシック Medium"/>
                 <a:ea typeface="游ゴシック Medium"/>
@@ -11695,7 +12698,7 @@
             <a:r>
               <a:rPr sz="1400" b="0">
                 <a:solidFill>
-                  <a:srgbClr val="262B30"/>
+                  <a:srgbClr val="E8EDF4"/>
                 </a:solidFill>
                 <a:latin typeface="游ゴシック Medium"/>
                 <a:ea typeface="游ゴシック Medium"/>
@@ -11726,7 +12729,7 @@
       <p:grpSpPr/>
       <p:sp>
         <p:nvSpPr>
-          <p:cNvPr id="3" name="Title 2"/>
+          <p:cNvPr id="2" name="Title 1"/>
           <p:cNvSpPr>
             <a:spLocks noGrp="1"/>
           </p:cNvSpPr>
@@ -11752,7 +12755,7 @@
       </p:sp>
       <p:sp>
         <p:nvSpPr>
-          <p:cNvPr id="4" name="Rectangle 3"/>
+          <p:cNvPr id="3" name="Rectangle 2"/>
           <p:cNvSpPr/>
           <p:nvPr/>
         </p:nvSpPr>
@@ -11765,7 +12768,7 @@
             <a:avLst/>
           </a:prstGeom>
           <a:solidFill>
-            <a:srgbClr val="005CCA"/>
+            <a:srgbClr val="8FB9EC"/>
           </a:solidFill>
           <a:ln>
             <a:noFill/>
@@ -11796,7 +12799,7 @@
       </p:sp>
       <p:sp>
         <p:nvSpPr>
-          <p:cNvPr id="5" name="TextBox 4"/>
+          <p:cNvPr id="4" name="TextBox 3"/>
           <p:cNvSpPr txBox="1"/>
           <p:nvPr/>
         </p:nvSpPr>
@@ -11827,7 +12830,7 @@
             <a:r>
               <a:rPr sz="1600" b="1">
                 <a:solidFill>
-                  <a:srgbClr val="262B30"/>
+                  <a:srgbClr val="FFFFFF"/>
                 </a:solidFill>
                 <a:latin typeface="游ゴシック Medium"/>
                 <a:ea typeface="游ゴシック Medium"/>
@@ -11848,7 +12851,7 @@
             <a:r>
               <a:rPr sz="1500" b="0">
                 <a:solidFill>
-                  <a:srgbClr val="005CCA"/>
+                  <a:srgbClr val="8FB9EC"/>
                 </a:solidFill>
                 <a:latin typeface="游ゴシック Medium"/>
                 <a:ea typeface="游ゴシック Medium"/>
@@ -11861,7 +12864,7 @@
       </p:sp>
       <p:sp>
         <p:nvSpPr>
-          <p:cNvPr id="6" name="Rectangle 5"/>
+          <p:cNvPr id="5" name="Rectangle 4"/>
           <p:cNvSpPr/>
           <p:nvPr/>
         </p:nvSpPr>
@@ -11874,7 +12877,7 @@
             <a:avLst/>
           </a:prstGeom>
           <a:solidFill>
-            <a:srgbClr val="005CCA"/>
+            <a:srgbClr val="8FB9EC"/>
           </a:solidFill>
           <a:ln>
             <a:noFill/>
@@ -11905,7 +12908,7 @@
       </p:sp>
       <p:sp>
         <p:nvSpPr>
-          <p:cNvPr id="7" name="TextBox 6"/>
+          <p:cNvPr id="6" name="TextBox 5"/>
           <p:cNvSpPr txBox="1"/>
           <p:nvPr/>
         </p:nvSpPr>
@@ -11936,7 +12939,7 @@
             <a:r>
               <a:rPr sz="1600" b="1">
                 <a:solidFill>
-                  <a:srgbClr val="262B30"/>
+                  <a:srgbClr val="FFFFFF"/>
                 </a:solidFill>
                 <a:latin typeface="游ゴシック Medium"/>
                 <a:ea typeface="游ゴシック Medium"/>
@@ -11957,7 +12960,7 @@
             <a:r>
               <a:rPr sz="1500" b="0">
                 <a:solidFill>
-                  <a:srgbClr val="005CCA"/>
+                  <a:srgbClr val="8FB9EC"/>
                 </a:solidFill>
                 <a:latin typeface="游ゴシック Medium"/>
                 <a:ea typeface="游ゴシック Medium"/>
@@ -11970,7 +12973,7 @@
       </p:sp>
       <p:sp>
         <p:nvSpPr>
-          <p:cNvPr id="8" name="Rectangle 7"/>
+          <p:cNvPr id="7" name="Rectangle 6"/>
           <p:cNvSpPr/>
           <p:nvPr/>
         </p:nvSpPr>
@@ -11983,7 +12986,7 @@
             <a:avLst/>
           </a:prstGeom>
           <a:solidFill>
-            <a:srgbClr val="005CCA"/>
+            <a:srgbClr val="8FB9EC"/>
           </a:solidFill>
           <a:ln>
             <a:noFill/>
@@ -12014,7 +13017,7 @@
       </p:sp>
       <p:sp>
         <p:nvSpPr>
-          <p:cNvPr id="9" name="TextBox 8"/>
+          <p:cNvPr id="8" name="TextBox 7"/>
           <p:cNvSpPr txBox="1"/>
           <p:nvPr/>
         </p:nvSpPr>
@@ -12045,7 +13048,7 @@
             <a:r>
               <a:rPr sz="1600" b="1">
                 <a:solidFill>
-                  <a:srgbClr val="262B30"/>
+                  <a:srgbClr val="FFFFFF"/>
                 </a:solidFill>
                 <a:latin typeface="游ゴシック Medium"/>
                 <a:ea typeface="游ゴシック Medium"/>
@@ -12066,7 +13069,7 @@
             <a:r>
               <a:rPr sz="1500" b="0">
                 <a:solidFill>
-                  <a:srgbClr val="005CCA"/>
+                  <a:srgbClr val="8FB9EC"/>
                 </a:solidFill>
                 <a:latin typeface="游ゴシック Medium"/>
                 <a:ea typeface="游ゴシック Medium"/>
@@ -12079,7 +13082,7 @@
       </p:sp>
       <p:sp>
         <p:nvSpPr>
-          <p:cNvPr id="10" name="TextBox 9"/>
+          <p:cNvPr id="9" name="TextBox 8"/>
           <p:cNvSpPr txBox="1"/>
           <p:nvPr/>
         </p:nvSpPr>
@@ -12110,7 +13113,7 @@
             <a:r>
               <a:rPr sz="1300" b="1">
                 <a:solidFill>
-                  <a:srgbClr val="003D86"/>
+                  <a:srgbClr val="8FB9EC"/>
                 </a:solidFill>
                 <a:latin typeface="游ゴシック Medium"/>
                 <a:ea typeface="游ゴシック Medium"/>
@@ -12121,7 +13124,7 @@
             <a:r>
               <a:rPr sz="1300" b="0">
                 <a:solidFill>
-                  <a:srgbClr val="262B30"/>
+                  <a:srgbClr val="E8EDF4"/>
                 </a:solidFill>
                 <a:latin typeface="游ゴシック Medium"/>
                 <a:ea typeface="游ゴシック Medium"/>
@@ -12141,9 +13144,9 @@
 </file>
 
 <file path=ppt/theme/theme1.xml><?xml version="1.0" encoding="utf-8"?>
-<a:theme xmlns:a="http://schemas.openxmlformats.org/drawingml/2006/main" name="2025_White_ver.1">
+<a:theme xmlns:a="http://schemas.openxmlformats.org/drawingml/2006/main" name="2025_BusinessPromise_ver.1">
   <a:themeElements>
-    <a:clrScheme name="ユーザー定義 59">
+    <a:clrScheme name="ユーザー定義 23">
       <a:dk1>
         <a:srgbClr val="003D86"/>
       </a:dk1>
@@ -12154,31 +13157,31 @@
         <a:srgbClr val="003D86"/>
       </a:dk2>
       <a:lt2>
-        <a:srgbClr val="000000"/>
+        <a:srgbClr val="FFFFFF"/>
       </a:lt2>
       <a:accent1>
         <a:srgbClr val="005CCA"/>
       </a:accent1>
       <a:accent2>
-        <a:srgbClr val="01B1C9"/>
+        <a:srgbClr val="43AF86"/>
       </a:accent2>
       <a:accent3>
-        <a:srgbClr val="009244"/>
+        <a:srgbClr val="E39A49"/>
       </a:accent3>
       <a:accent4>
-        <a:srgbClr val="FFFF00"/>
+        <a:srgbClr val="A961BF"/>
       </a:accent4>
       <a:accent5>
-        <a:srgbClr val="E80000"/>
+        <a:srgbClr val="C2C2C2"/>
       </a:accent5>
       <a:accent6>
-        <a:srgbClr val="000000"/>
+        <a:srgbClr val="EE5454"/>
       </a:accent6>
       <a:hlink>
         <a:srgbClr val="4C8DDA"/>
       </a:hlink>
       <a:folHlink>
-        <a:srgbClr val="98BEE9"/>
+        <a:srgbClr val="99BEEA"/>
       </a:folHlink>
     </a:clrScheme>
     <a:fontScheme name="ユーザー定義 1">
@@ -12334,9 +13337,6 @@
   <a:objectDefaults>
     <a:spDef>
       <a:spPr>
-        <a:solidFill>
-          <a:schemeClr val="tx2"/>
-        </a:solidFill>
         <a:ln>
           <a:noFill/>
         </a:ln>
@@ -12344,7 +13344,10 @@
       <a:bodyPr rtlCol="0" anchor="ctr"/>
       <a:lstStyle>
         <a:defPPr algn="ctr">
-          <a:defRPr kumimoji="1" dirty="0" smtClean="0"/>
+          <a:defRPr kumimoji="1" dirty="0">
+            <a:latin typeface="游ゴシック" panose="020B0400000000000000" pitchFamily="50" charset="-128"/>
+            <a:ea typeface="游ゴシック" panose="020B0400000000000000" pitchFamily="50" charset="-128"/>
+          </a:defRPr>
         </a:defPPr>
       </a:lstStyle>
       <a:style>
@@ -12366,11 +13369,7 @@
     </a:spDef>
     <a:lnDef>
       <a:spPr>
-        <a:ln w="12700">
-          <a:solidFill>
-            <a:schemeClr val="tx2"/>
-          </a:solidFill>
-        </a:ln>
+        <a:ln w="12700"/>
       </a:spPr>
       <a:bodyPr/>
       <a:lstStyle/>
@@ -12389,6 +13388,25 @@
         </a:fontRef>
       </a:style>
     </a:lnDef>
+    <a:txDef>
+      <a:spPr>
+        <a:noFill/>
+      </a:spPr>
+      <a:bodyPr wrap="square" rtlCol="0">
+        <a:spAutoFit/>
+      </a:bodyPr>
+      <a:lstStyle>
+        <a:defPPr algn="l">
+          <a:defRPr kumimoji="1" dirty="0" smtClean="0">
+            <a:solidFill>
+              <a:schemeClr val="bg1"/>
+            </a:solidFill>
+            <a:latin typeface="游ゴシック" panose="020B0400000000000000" pitchFamily="50" charset="-128"/>
+            <a:ea typeface="游ゴシック" panose="020B0400000000000000" pitchFamily="50" charset="-128"/>
+          </a:defRPr>
+        </a:defPPr>
+      </a:lstStyle>
+    </a:txDef>
   </a:objectDefaults>
   <a:extraClrSchemeLst/>
   <a:extLst>
@@ -12715,6 +13733,26 @@
 </file>
 
 <file path=customXml/item1.xml><?xml version="1.0" encoding="utf-8"?>
+<?mso-contentType ?>
+<FormTemplates xmlns="http://schemas.microsoft.com/sharepoint/v3/contenttype/forms">
+  <Display>DocumentLibraryForm</Display>
+  <Edit>DocumentLibraryForm</Edit>
+  <New>DocumentLibraryForm</New>
+</FormTemplates>
+</file>
+
+<file path=customXml/item2.xml><?xml version="1.0" encoding="utf-8"?>
+<p:properties xmlns:p="http://schemas.microsoft.com/office/2006/metadata/properties" xmlns:xsi="http://www.w3.org/2001/XMLSchema-instance" xmlns:pc="http://schemas.microsoft.com/office/infopath/2007/PartnerControls">
+  <documentManagement>
+    <TaxCatchAll xmlns="5d54735c-8563-480c-aa17-13e507c6fcf6" xsi:nil="true"/>
+    <lcf76f155ced4ddcb4097134ff3c332f xmlns="768ecba8-f556-413e-93cf-a669b10e85e2">
+      <Terms xmlns="http://schemas.microsoft.com/office/infopath/2007/PartnerControls"/>
+    </lcf76f155ced4ddcb4097134ff3c332f>
+  </documentManagement>
+</p:properties>
+</file>
+
+<file path=customXml/item3.xml><?xml version="1.0" encoding="utf-8"?>
 <ct:contentTypeSchema xmlns:ct="http://schemas.microsoft.com/office/2006/metadata/contentType" xmlns:ma="http://schemas.microsoft.com/office/2006/metadata/properties/metaAttributes" ct:_="" ma:_="" ma:contentTypeName="ドキュメント" ma:contentTypeID="0x010100CAA98F3332D97A45A4456E8DA039AEBC" ma:contentTypeVersion="12" ma:contentTypeDescription="新しいドキュメントを作成します。" ma:contentTypeScope="" ma:versionID="a9dd5d2222e388c7d315e043965fb87e">
   <xsd:schema xmlns:xsd="http://www.w3.org/2001/XMLSchema" xmlns:xs="http://www.w3.org/2001/XMLSchema" xmlns:p="http://schemas.microsoft.com/office/2006/metadata/properties" xmlns:ns2="768ecba8-f556-413e-93cf-a669b10e85e2" xmlns:ns3="5d54735c-8563-480c-aa17-13e507c6fcf6" targetNamespace="http://schemas.microsoft.com/office/2006/metadata/properties" ma:root="true" ma:fieldsID="3be956df6bb9cabc9cd1a95b5e82f7fe" ns2:_="" ns3:_="">
     <xsd:import namespace="768ecba8-f556-413e-93cf-a669b10e85e2"/>
@@ -12915,51 +13953,25 @@
 </ct:contentTypeSchema>
 </file>
 
-<file path=customXml/item2.xml><?xml version="1.0" encoding="utf-8"?>
-<p:properties xmlns:p="http://schemas.microsoft.com/office/2006/metadata/properties" xmlns:xsi="http://www.w3.org/2001/XMLSchema-instance" xmlns:pc="http://schemas.microsoft.com/office/infopath/2007/PartnerControls">
-  <documentManagement>
-    <TaxCatchAll xmlns="5d54735c-8563-480c-aa17-13e507c6fcf6" xsi:nil="true"/>
-    <lcf76f155ced4ddcb4097134ff3c332f xmlns="768ecba8-f556-413e-93cf-a669b10e85e2">
-      <Terms xmlns="http://schemas.microsoft.com/office/infopath/2007/PartnerControls"/>
-    </lcf76f155ced4ddcb4097134ff3c332f>
-  </documentManagement>
-</p:properties>
-</file>
-
-<file path=customXml/item3.xml><?xml version="1.0" encoding="utf-8"?>
-<?mso-contentType ?>
-<FormTemplates xmlns="http://schemas.microsoft.com/sharepoint/v3/contenttype/forms">
-  <Display>DocumentLibraryForm</Display>
-  <Edit>DocumentLibraryForm</Edit>
-  <New>DocumentLibraryForm</New>
-</FormTemplates>
-</file>
-
 <file path=customXml/itemProps1.xml><?xml version="1.0" encoding="utf-8"?>
-<ds:datastoreItem xmlns:ds="http://schemas.openxmlformats.org/officeDocument/2006/customXml" ds:itemID="{3C297DEA-7133-44D9-8C5E-398C1765FB91}"/>
+<ds:datastoreItem xmlns:ds="http://schemas.openxmlformats.org/officeDocument/2006/customXml" ds:itemID="{458AE83B-8FBF-46E4-95C5-6FC34C176263}">
+  <ds:schemaRefs>
+    <ds:schemaRef ds:uri="http://schemas.microsoft.com/sharepoint/v3/contenttype/forms"/>
+  </ds:schemaRefs>
+</ds:datastoreItem>
 </file>
 
 <file path=customXml/itemProps2.xml><?xml version="1.0" encoding="utf-8"?>
 <ds:datastoreItem xmlns:ds="http://schemas.openxmlformats.org/officeDocument/2006/customXml" ds:itemID="{3FFB5523-FEB7-4908-9109-C2FCB7452423}">
   <ds:schemaRefs>
     <ds:schemaRef ds:uri="http://schemas.microsoft.com/office/2006/metadata/properties"/>
-    <ds:schemaRef ds:uri="http://purl.org/dc/terms/"/>
+    <ds:schemaRef ds:uri="http://schemas.microsoft.com/office/infopath/2007/PartnerControls"/>
     <ds:schemaRef ds:uri="5d54735c-8563-480c-aa17-13e507c6fcf6"/>
-    <ds:schemaRef ds:uri="http://purl.org/dc/dcmitype/"/>
-    <ds:schemaRef ds:uri="http://schemas.microsoft.com/office/2006/documentManagement/types"/>
-    <ds:schemaRef ds:uri="http://schemas.openxmlformats.org/package/2006/metadata/core-properties"/>
-    <ds:schemaRef ds:uri="http://purl.org/dc/elements/1.1/"/>
-    <ds:schemaRef ds:uri="http://schemas.microsoft.com/office/infopath/2007/PartnerControls"/>
     <ds:schemaRef ds:uri="768ecba8-f556-413e-93cf-a669b10e85e2"/>
-    <ds:schemaRef ds:uri="http://www.w3.org/XML/1998/namespace"/>
   </ds:schemaRefs>
 </ds:datastoreItem>
 </file>
 
 <file path=customXml/itemProps3.xml><?xml version="1.0" encoding="utf-8"?>
-<ds:datastoreItem xmlns:ds="http://schemas.openxmlformats.org/officeDocument/2006/customXml" ds:itemID="{458AE83B-8FBF-46E4-95C5-6FC34C176263}">
-  <ds:schemaRefs>
-    <ds:schemaRef ds:uri="http://schemas.microsoft.com/sharepoint/v3/contenttype/forms"/>
-  </ds:schemaRefs>
-</ds:datastoreItem>
+<ds:datastoreItem xmlns:ds="http://schemas.openxmlformats.org/officeDocument/2006/customXml" ds:itemID="{B1F9275D-B4EB-4C8E-9255-310B2138FDF9}"/>
 </file>
--- a/配布/Copilot_Cowork_競合比較.pptx
+++ b/配布/Copilot_Cowork_競合比較.pptx
@@ -5,15 +5,15 @@
     <p:sldMasterId id="2147483705" r:id="rId4"/>
   </p:sldMasterIdLst>
   <p:notesMasterIdLst>
-    <p:notesMasterId r:id="rId25"/>
+    <p:notesMasterId r:id="rId11"/>
   </p:notesMasterIdLst>
   <p:sldIdLst>
-    <p:sldId id="256" r:id="rId31"/>
-    <p:sldId id="257" r:id="rId32"/>
-    <p:sldId id="258" r:id="rId33"/>
-    <p:sldId id="259" r:id="rId34"/>
-    <p:sldId id="260" r:id="rId35"/>
-    <p:sldId id="261" r:id="rId36"/>
+    <p:sldId id="256" r:id="rId5"/>
+    <p:sldId id="257" r:id="rId6"/>
+    <p:sldId id="258" r:id="rId7"/>
+    <p:sldId id="259" r:id="rId8"/>
+    <p:sldId id="260" r:id="rId9"/>
+    <p:sldId id="261" r:id="rId10"/>
   </p:sldIdLst>
   <p:sldSz cx="12192000" cy="6858000"/>
   <p:notesSz cx="6858000" cy="9144000"/>
@@ -231,7 +231,7 @@
           <a:p>
             <a:fld id="{111B3B83-EABC-4039-9F7A-EC4B788C1C40}" type="datetimeFigureOut">
               <a:rPr kumimoji="1" lang="ja-JP" altLang="en-US" smtClean="0"/>
-              <a:t>2025/10/7</a:t>
+              <a:t>2026/10/20</a:t>
             </a:fld>
             <a:endParaRPr kumimoji="1" lang="ja-JP" altLang="en-US"/>
           </a:p>
@@ -528,6 +528,90 @@
     </a:lvl9pPr>
   </p:notesStyle>
 </p:notesMaster>
+</file>
+
+<file path=ppt/notesSlides/notesSlide1.xml><?xml version="1.0" encoding="utf-8"?>
+<p:notes xmlns:a="http://schemas.openxmlformats.org/drawingml/2006/main" xmlns:r="http://schemas.openxmlformats.org/officeDocument/2006/relationships" xmlns:p="http://schemas.openxmlformats.org/presentationml/2006/main">
+  <p:cSld>
+    <p:spTree>
+      <p:nvGrpSpPr>
+        <p:cNvPr id="1" name=""/>
+        <p:cNvGrpSpPr/>
+        <p:nvPr/>
+      </p:nvGrpSpPr>
+      <p:grpSpPr>
+        <a:xfrm>
+          <a:off x="0" y="0"/>
+          <a:ext cx="0" cy="0"/>
+          <a:chOff x="0" y="0"/>
+          <a:chExt cx="0" cy="0"/>
+        </a:xfrm>
+      </p:grpSpPr>
+      <p:sp>
+        <p:nvSpPr>
+          <p:cNvPr id="2" name="スライド イメージ プレースホルダー 1"/>
+          <p:cNvSpPr>
+            <a:spLocks noGrp="1" noRot="1" noChangeAspect="1"/>
+          </p:cNvSpPr>
+          <p:nvPr>
+            <p:ph type="sldImg"/>
+          </p:nvPr>
+        </p:nvSpPr>
+        <p:spPr/>
+      </p:sp>
+      <p:sp>
+        <p:nvSpPr>
+          <p:cNvPr id="3" name="ノート プレースホルダー 2"/>
+          <p:cNvSpPr>
+            <a:spLocks noGrp="1"/>
+          </p:cNvSpPr>
+          <p:nvPr>
+            <p:ph type="body" idx="1"/>
+          </p:nvPr>
+        </p:nvSpPr>
+        <p:spPr/>
+        <p:txBody>
+          <a:bodyPr/>
+          <a:lstStyle/>
+          <a:p>
+            <a:endParaRPr kumimoji="1" lang="ja-JP" altLang="en-US"/>
+          </a:p>
+        </p:txBody>
+      </p:sp>
+      <p:sp>
+        <p:nvSpPr>
+          <p:cNvPr id="4" name="スライド番号プレースホルダー 3"/>
+          <p:cNvSpPr>
+            <a:spLocks noGrp="1"/>
+          </p:cNvSpPr>
+          <p:nvPr>
+            <p:ph type="sldNum" sz="quarter" idx="5"/>
+          </p:nvPr>
+        </p:nvSpPr>
+        <p:spPr/>
+        <p:txBody>
+          <a:bodyPr/>
+          <a:lstStyle/>
+          <a:p>
+            <a:fld id="{5138D139-BD1B-4B66-BB08-DB0DB6B95EC5}" type="slidenum">
+              <a:rPr kumimoji="1" lang="ja-JP" altLang="en-US" smtClean="0"/>
+              <a:t>2</a:t>
+            </a:fld>
+            <a:endParaRPr kumimoji="1" lang="ja-JP" altLang="en-US"/>
+          </a:p>
+        </p:txBody>
+      </p:sp>
+    </p:spTree>
+    <p:extLst>
+      <p:ext uri="{BB962C8B-B14F-4D97-AF65-F5344CB8AC3E}">
+        <p14:creationId xmlns:p14="http://schemas.microsoft.com/office/powerpoint/2010/main" val="2667071363"/>
+      </p:ext>
+    </p:extLst>
+  </p:cSld>
+  <p:clrMapOvr>
+    <a:masterClrMapping/>
+  </p:clrMapOvr>
+</p:notes>
 </file>
 
 <file path=ppt/slideLayouts/slideLayout1.xml><?xml version="1.0" encoding="utf-8"?>
@@ -9684,7 +9768,7 @@
 </file>
 
 <file path=ppt/slides/slide1.xml><?xml version="1.0" encoding="utf-8"?>
-<p:sld xmlns:a="http://schemas.openxmlformats.org/drawingml/2006/main" xmlns:p="http://schemas.openxmlformats.org/presentationml/2006/main" xmlns:r="http://schemas.openxmlformats.org/officeDocument/2006/relationships">
+<p:sld xmlns:a="http://schemas.openxmlformats.org/drawingml/2006/main" xmlns:r="http://schemas.openxmlformats.org/officeDocument/2006/relationships" xmlns:p="http://schemas.openxmlformats.org/presentationml/2006/main">
   <p:cSld>
     <p:spTree>
       <p:nvGrpSpPr>
@@ -9692,7 +9776,14 @@
         <p:cNvGrpSpPr/>
         <p:nvPr/>
       </p:nvGrpSpPr>
-      <p:grpSpPr/>
+      <p:grpSpPr>
+        <a:xfrm>
+          <a:off x="0" y="0"/>
+          <a:ext cx="0" cy="0"/>
+          <a:chOff x="0" y="0"/>
+          <a:chExt cx="0" cy="0"/>
+        </a:xfrm>
+      </p:grpSpPr>
       <p:sp>
         <p:nvSpPr>
           <p:cNvPr id="2" name="Title 1"/>
@@ -9709,13 +9800,42 @@
           <a:lstStyle/>
           <a:p>
             <a:r>
-              <a:rPr>
+              <a:rPr dirty="0">
                 <a:latin typeface="游ゴシック Medium"/>
                 <a:ea typeface="游ゴシック Medium"/>
                 <a:cs typeface="游ゴシック Medium"/>
               </a:rPr>
-              <a:t>Claude Code / Cowork と周辺ツールの位置づけ</a:t>
-            </a:r>
+              <a:t>Claude Code / </a:t>
+            </a:r>
+            <a:r>
+              <a:rPr dirty="0" err="1">
+                <a:latin typeface="游ゴシック Medium"/>
+                <a:ea typeface="游ゴシック Medium"/>
+                <a:cs typeface="游ゴシック Medium"/>
+              </a:rPr>
+              <a:t>Cowork</a:t>
+            </a:r>
+            <a:r>
+              <a:rPr dirty="0">
+                <a:latin typeface="游ゴシック Medium"/>
+                <a:ea typeface="游ゴシック Medium"/>
+                <a:cs typeface="游ゴシック Medium"/>
+              </a:rPr>
+              <a:t> </a:t>
+            </a:r>
+            <a:r>
+              <a:rPr dirty="0" err="1">
+                <a:latin typeface="游ゴシック Medium"/>
+                <a:ea typeface="游ゴシック Medium"/>
+                <a:cs typeface="游ゴシック Medium"/>
+              </a:rPr>
+              <a:t>と周辺ツールの位置づけ</a:t>
+            </a:r>
+            <a:endParaRPr dirty="0">
+              <a:latin typeface="游ゴシック Medium"/>
+              <a:ea typeface="游ゴシック Medium"/>
+              <a:cs typeface="游ゴシック Medium"/>
+            </a:endParaRPr>
           </a:p>
         </p:txBody>
       </p:sp>
@@ -9726,10 +9846,15 @@
             <a:spLocks noGrp="1"/>
           </p:cNvSpPr>
           <p:nvPr>
-            <p:ph type="body" idx="13" sz="quarter"/>
+            <p:ph type="body" sz="quarter" idx="13"/>
           </p:nvPr>
         </p:nvSpPr>
-        <p:spPr/>
+        <p:spPr>
+          <a:xfrm>
+            <a:off x="5205306" y="5470206"/>
+            <a:ext cx="6172412" cy="947344"/>
+          </a:xfrm>
+        </p:spPr>
         <p:txBody>
           <a:bodyPr/>
           <a:lstStyle/>
@@ -9752,7 +9877,7 @@
             <a:spLocks noGrp="1"/>
           </p:cNvSpPr>
           <p:nvPr>
-            <p:ph type="body" idx="15" sz="quarter"/>
+            <p:ph type="body" sz="quarter" idx="15"/>
           </p:nvPr>
         </p:nvSpPr>
         <p:spPr/>
@@ -9760,14 +9885,11 @@
           <a:bodyPr/>
           <a:lstStyle/>
           <a:p>
-            <a:r>
-              <a:rPr>
-                <a:latin typeface="游ゴシック Medium"/>
-                <a:ea typeface="游ゴシック Medium"/>
-                <a:cs typeface="游ゴシック Medium"/>
-              </a:rPr>
-              <a:t>Microsoft 365 Copilot との補完から、Claude Cowork と Claude Code の使い分けへ。競合ツールは参考として整理します。</a:t>
-            </a:r>
+            <a:endParaRPr dirty="0">
+              <a:latin typeface="游ゴシック Medium"/>
+              <a:ea typeface="游ゴシック Medium"/>
+              <a:cs typeface="游ゴシック Medium"/>
+            </a:endParaRPr>
           </a:p>
         </p:txBody>
       </p:sp>
@@ -9778,7 +9900,7 @@
             <a:spLocks noGrp="1"/>
           </p:cNvSpPr>
           <p:nvPr>
-            <p:ph type="body" idx="17" sz="quarter"/>
+            <p:ph type="body" sz="quarter" idx="17"/>
           </p:nvPr>
         </p:nvSpPr>
         <p:spPr/>
@@ -9786,14 +9908,11 @@
           <a:bodyPr/>
           <a:lstStyle/>
           <a:p>
-            <a:r>
-              <a:rPr>
-                <a:latin typeface="游ゴシック Medium"/>
-                <a:ea typeface="游ゴシック Medium"/>
-                <a:cs typeface="游ゴシック Medium"/>
-              </a:rPr>
-              <a:t>AIエージェントの地図</a:t>
-            </a:r>
+            <a:endParaRPr>
+              <a:latin typeface="游ゴシック Medium"/>
+              <a:ea typeface="游ゴシック Medium"/>
+              <a:cs typeface="游ゴシック Medium"/>
+            </a:endParaRPr>
           </a:p>
         </p:txBody>
       </p:sp>
@@ -9806,7 +9925,7 @@
 </file>
 
 <file path=ppt/slides/slide2.xml><?xml version="1.0" encoding="utf-8"?>
-<p:sld xmlns:a="http://schemas.openxmlformats.org/drawingml/2006/main" xmlns:p="http://schemas.openxmlformats.org/presentationml/2006/main" xmlns:r="http://schemas.openxmlformats.org/officeDocument/2006/relationships">
+<p:sld xmlns:a="http://schemas.openxmlformats.org/drawingml/2006/main" xmlns:r="http://schemas.openxmlformats.org/officeDocument/2006/relationships" xmlns:p="http://schemas.openxmlformats.org/presentationml/2006/main">
   <p:cSld>
     <p:spTree>
       <p:nvGrpSpPr>
@@ -9814,7 +9933,14 @@
         <p:cNvGrpSpPr/>
         <p:nvPr/>
       </p:nvGrpSpPr>
-      <p:grpSpPr/>
+      <p:grpSpPr>
+        <a:xfrm>
+          <a:off x="0" y="0"/>
+          <a:ext cx="0" cy="0"/>
+          <a:chOff x="0" y="0"/>
+          <a:chExt cx="0" cy="0"/>
+        </a:xfrm>
+      </p:grpSpPr>
       <p:sp>
         <p:nvSpPr>
           <p:cNvPr id="2" name="Title 1"/>
@@ -9858,7 +9984,7 @@
           <a:noFill/>
         </p:spPr>
         <p:txBody>
-          <a:bodyPr wrap="square" anchor="t" lIns="0" rIns="0" tIns="0" bIns="0">
+          <a:bodyPr wrap="square" lIns="0" tIns="0" rIns="0" bIns="0" anchor="t">
             <a:spAutoFit/>
           </a:bodyPr>
           <a:lstStyle/>
@@ -9872,7 +9998,7 @@
               </a:spcAft>
             </a:pPr>
             <a:r>
-              <a:rPr sz="1300" b="0">
+              <a:rPr sz="1300" b="0" dirty="0" err="1">
                 <a:solidFill>
                   <a:srgbClr val="B9C6DA"/>
                 </a:solidFill>
@@ -9880,7 +10006,18 @@
                 <a:ea typeface="游ゴシック Medium"/>
                 <a:cs typeface="游ゴシック Medium"/>
               </a:rPr>
-              <a:t>似た作業はどちらもできます。差が出るのは、仕事の“難所”がどちらの強みに当たるかです。</a:t>
+              <a:t>似た作業はどちらもできます。差が出るのは、仕事の“難所”がどちらの強みに当たるかです</a:t>
+            </a:r>
+            <a:r>
+              <a:rPr sz="1300" b="0" dirty="0">
+                <a:solidFill>
+                  <a:srgbClr val="B9C6DA"/>
+                </a:solidFill>
+                <a:latin typeface="游ゴシック Medium"/>
+                <a:ea typeface="游ゴシック Medium"/>
+                <a:cs typeface="游ゴシック Medium"/>
+              </a:rPr>
+              <a:t>。</a:t>
             </a:r>
           </a:p>
         </p:txBody>
@@ -9904,14 +10041,32 @@
                 <a:tableStyleId>{5C22544A-7EE6-4342-B048-85BDC9FD1C3A}</a:tableStyleId>
               </a:tblPr>
               <a:tblGrid>
-                <a:gridCol w="1920240"/>
-                <a:gridCol w="4526280"/>
-                <a:gridCol w="4114800"/>
+                <a:gridCol w="1920240">
+                  <a:extLst>
+                    <a:ext uri="{9D8B030D-6E8A-4147-A177-3AD203B41FA5}">
+                      <a16:colId xmlns:a16="http://schemas.microsoft.com/office/drawing/2014/main" val="20000"/>
+                    </a:ext>
+                  </a:extLst>
+                </a:gridCol>
+                <a:gridCol w="4526280">
+                  <a:extLst>
+                    <a:ext uri="{9D8B030D-6E8A-4147-A177-3AD203B41FA5}">
+                      <a16:colId xmlns:a16="http://schemas.microsoft.com/office/drawing/2014/main" val="20001"/>
+                    </a:ext>
+                  </a:extLst>
+                </a:gridCol>
+                <a:gridCol w="4114800">
+                  <a:extLst>
+                    <a:ext uri="{9D8B030D-6E8A-4147-A177-3AD203B41FA5}">
+                      <a16:colId xmlns:a16="http://schemas.microsoft.com/office/drawing/2014/main" val="20002"/>
+                    </a:ext>
+                  </a:extLst>
+                </a:gridCol>
               </a:tblGrid>
               <a:tr h="493776">
                 <a:tc>
                   <a:txBody>
-                    <a:bodyPr wrap="square"/>
+                    <a:bodyPr/>
                     <a:lstStyle/>
                     <a:p>
                       <a:r>
@@ -9927,7 +10082,7 @@
                       </a:r>
                     </a:p>
                   </a:txBody>
-                  <a:tcPr marL="91440" marR="91440" marT="45720" marB="45720" anchor="ctr">
+                  <a:tcPr anchor="ctr">
                     <a:solidFill>
                       <a:srgbClr val="003D86"/>
                     </a:solidFill>
@@ -9935,7 +10090,7 @@
                 </a:tc>
                 <a:tc>
                   <a:txBody>
-                    <a:bodyPr wrap="square"/>
+                    <a:bodyPr/>
                     <a:lstStyle/>
                     <a:p>
                       <a:r>
@@ -9951,7 +10106,7 @@
                       </a:r>
                     </a:p>
                   </a:txBody>
-                  <a:tcPr marL="91440" marR="91440" marT="45720" marB="45720" anchor="ctr">
+                  <a:tcPr anchor="ctr">
                     <a:solidFill>
                       <a:srgbClr val="003D86"/>
                     </a:solidFill>
@@ -9959,7 +10114,7 @@
                 </a:tc>
                 <a:tc>
                   <a:txBody>
-                    <a:bodyPr wrap="square"/>
+                    <a:bodyPr/>
                     <a:lstStyle/>
                     <a:p>
                       <a:r>
@@ -9975,17 +10130,22 @@
                       </a:r>
                     </a:p>
                   </a:txBody>
-                  <a:tcPr marL="91440" marR="91440" marT="45720" marB="45720" anchor="ctr">
+                  <a:tcPr anchor="ctr">
                     <a:solidFill>
                       <a:srgbClr val="003D86"/>
                     </a:solidFill>
                   </a:tcPr>
                 </a:tc>
+                <a:extLst>
+                  <a:ext uri="{0D108BD9-81ED-4DB2-BD59-A6C34878D82A}">
+                    <a16:rowId xmlns:a16="http://schemas.microsoft.com/office/drawing/2014/main" val="10000"/>
+                  </a:ext>
+                </a:extLst>
               </a:tr>
               <a:tr h="493776">
                 <a:tc>
                   <a:txBody>
-                    <a:bodyPr wrap="square"/>
+                    <a:bodyPr/>
                     <a:lstStyle/>
                     <a:p>
                       <a:r>
@@ -10001,7 +10161,7 @@
                       </a:r>
                     </a:p>
                   </a:txBody>
-                  <a:tcPr marL="91440" marR="91440" marT="45720" marB="45720" anchor="ctr">
+                  <a:tcPr anchor="ctr">
                     <a:solidFill>
                       <a:srgbClr val="EAF1F9"/>
                     </a:solidFill>
@@ -10009,7 +10169,7 @@
                 </a:tc>
                 <a:tc>
                   <a:txBody>
-                    <a:bodyPr wrap="square"/>
+                    <a:bodyPr/>
                     <a:lstStyle/>
                     <a:p>
                       <a:r>
@@ -10025,7 +10185,7 @@
                       </a:r>
                     </a:p>
                   </a:txBody>
-                  <a:tcPr marL="91440" marR="91440" marT="45720" marB="45720" anchor="ctr">
+                  <a:tcPr anchor="ctr">
                     <a:solidFill>
                       <a:srgbClr val="EAF1F9"/>
                     </a:solidFill>
@@ -10033,7 +10193,7 @@
                 </a:tc>
                 <a:tc>
                   <a:txBody>
-                    <a:bodyPr wrap="square"/>
+                    <a:bodyPr/>
                     <a:lstStyle/>
                     <a:p>
                       <a:r>
@@ -10049,17 +10209,22 @@
                       </a:r>
                     </a:p>
                   </a:txBody>
-                  <a:tcPr marL="91440" marR="91440" marT="45720" marB="45720" anchor="ctr">
+                  <a:tcPr anchor="ctr">
                     <a:solidFill>
                       <a:srgbClr val="EAF1F9"/>
                     </a:solidFill>
                   </a:tcPr>
                 </a:tc>
+                <a:extLst>
+                  <a:ext uri="{0D108BD9-81ED-4DB2-BD59-A6C34878D82A}">
+                    <a16:rowId xmlns:a16="http://schemas.microsoft.com/office/drawing/2014/main" val="10001"/>
+                  </a:ext>
+                </a:extLst>
               </a:tr>
               <a:tr h="493776">
                 <a:tc>
                   <a:txBody>
-                    <a:bodyPr wrap="square"/>
+                    <a:bodyPr/>
                     <a:lstStyle/>
                     <a:p>
                       <a:r>
@@ -10075,7 +10240,7 @@
                       </a:r>
                     </a:p>
                   </a:txBody>
-                  <a:tcPr marL="91440" marR="91440" marT="45720" marB="45720" anchor="ctr">
+                  <a:tcPr anchor="ctr">
                     <a:solidFill>
                       <a:srgbClr val="F2F5F8"/>
                     </a:solidFill>
@@ -10083,7 +10248,7 @@
                 </a:tc>
                 <a:tc>
                   <a:txBody>
-                    <a:bodyPr wrap="square"/>
+                    <a:bodyPr/>
                     <a:lstStyle/>
                     <a:p>
                       <a:r>
@@ -10099,7 +10264,7 @@
                       </a:r>
                     </a:p>
                   </a:txBody>
-                  <a:tcPr marL="91440" marR="91440" marT="45720" marB="45720" anchor="ctr">
+                  <a:tcPr anchor="ctr">
                     <a:solidFill>
                       <a:srgbClr val="FFFFFF"/>
                     </a:solidFill>
@@ -10107,7 +10272,7 @@
                 </a:tc>
                 <a:tc>
                   <a:txBody>
-                    <a:bodyPr wrap="square"/>
+                    <a:bodyPr/>
                     <a:lstStyle/>
                     <a:p>
                       <a:r>
@@ -10123,17 +10288,22 @@
                       </a:r>
                     </a:p>
                   </a:txBody>
-                  <a:tcPr marL="91440" marR="91440" marT="45720" marB="45720" anchor="ctr">
+                  <a:tcPr anchor="ctr">
                     <a:solidFill>
                       <a:srgbClr val="FFFFFF"/>
                     </a:solidFill>
                   </a:tcPr>
                 </a:tc>
+                <a:extLst>
+                  <a:ext uri="{0D108BD9-81ED-4DB2-BD59-A6C34878D82A}">
+                    <a16:rowId xmlns:a16="http://schemas.microsoft.com/office/drawing/2014/main" val="10002"/>
+                  </a:ext>
+                </a:extLst>
               </a:tr>
               <a:tr h="493776">
                 <a:tc>
                   <a:txBody>
-                    <a:bodyPr wrap="square"/>
+                    <a:bodyPr/>
                     <a:lstStyle/>
                     <a:p>
                       <a:r>
@@ -10149,7 +10319,7 @@
                       </a:r>
                     </a:p>
                   </a:txBody>
-                  <a:tcPr marL="91440" marR="91440" marT="45720" marB="45720" anchor="ctr">
+                  <a:tcPr anchor="ctr">
                     <a:solidFill>
                       <a:srgbClr val="F2F5F8"/>
                     </a:solidFill>
@@ -10157,7 +10327,7 @@
                 </a:tc>
                 <a:tc>
                   <a:txBody>
-                    <a:bodyPr wrap="square"/>
+                    <a:bodyPr/>
                     <a:lstStyle/>
                     <a:p>
                       <a:r>
@@ -10169,11 +10339,11 @@
                           <a:ea typeface="游ゴシック Medium"/>
                           <a:cs typeface="游ゴシック Medium"/>
                         </a:rPr>
-                        <a:t>自社テナント(Graph / Work IQ)を自動参照</a:t>
+                        <a:t>自社テナント(Graph / Work IQ)を自動参照（ローカルは個別アップロードのみ）</a:t>
                       </a:r>
                     </a:p>
                   </a:txBody>
-                  <a:tcPr marL="91440" marR="91440" marT="45720" marB="45720" anchor="ctr">
+                  <a:tcPr anchor="ctr">
                     <a:solidFill>
                       <a:srgbClr val="FFFFFF"/>
                     </a:solidFill>
@@ -10181,7 +10351,7 @@
                 </a:tc>
                 <a:tc>
                   <a:txBody>
-                    <a:bodyPr wrap="square"/>
+                    <a:bodyPr/>
                     <a:lstStyle/>
                     <a:p>
                       <a:r>
@@ -10197,17 +10367,22 @@
                       </a:r>
                     </a:p>
                   </a:txBody>
-                  <a:tcPr marL="91440" marR="91440" marT="45720" marB="45720" anchor="ctr">
+                  <a:tcPr anchor="ctr">
                     <a:solidFill>
                       <a:srgbClr val="FFFFFF"/>
                     </a:solidFill>
                   </a:tcPr>
                 </a:tc>
+                <a:extLst>
+                  <a:ext uri="{0D108BD9-81ED-4DB2-BD59-A6C34878D82A}">
+                    <a16:rowId xmlns:a16="http://schemas.microsoft.com/office/drawing/2014/main" val="10003"/>
+                  </a:ext>
+                </a:extLst>
               </a:tr>
               <a:tr h="493776">
                 <a:tc>
                   <a:txBody>
-                    <a:bodyPr wrap="square"/>
+                    <a:bodyPr/>
                     <a:lstStyle/>
                     <a:p>
                       <a:r>
@@ -10223,7 +10398,7 @@
                       </a:r>
                     </a:p>
                   </a:txBody>
-                  <a:tcPr marL="91440" marR="91440" marT="45720" marB="45720" anchor="ctr">
+                  <a:tcPr anchor="ctr">
                     <a:solidFill>
                       <a:srgbClr val="F2F5F8"/>
                     </a:solidFill>
@@ -10231,7 +10406,7 @@
                 </a:tc>
                 <a:tc>
                   <a:txBody>
-                    <a:bodyPr wrap="square"/>
+                    <a:bodyPr/>
                     <a:lstStyle/>
                     <a:p>
                       <a:r>
@@ -10247,7 +10422,7 @@
                       </a:r>
                     </a:p>
                   </a:txBody>
-                  <a:tcPr marL="91440" marR="91440" marT="45720" marB="45720" anchor="ctr">
+                  <a:tcPr anchor="ctr">
                     <a:solidFill>
                       <a:srgbClr val="FFFFFF"/>
                     </a:solidFill>
@@ -10255,7 +10430,7 @@
                 </a:tc>
                 <a:tc>
                   <a:txBody>
-                    <a:bodyPr wrap="square"/>
+                    <a:bodyPr/>
                     <a:lstStyle/>
                     <a:p>
                       <a:r>
@@ -10271,12 +10446,17 @@
                       </a:r>
                     </a:p>
                   </a:txBody>
-                  <a:tcPr marL="91440" marR="91440" marT="45720" marB="45720" anchor="ctr">
+                  <a:tcPr anchor="ctr">
                     <a:solidFill>
                       <a:srgbClr val="FFFFFF"/>
                     </a:solidFill>
                   </a:tcPr>
                 </a:tc>
+                <a:extLst>
+                  <a:ext uri="{0D108BD9-81ED-4DB2-BD59-A6C34878D82A}">
+                    <a16:rowId xmlns:a16="http://schemas.microsoft.com/office/drawing/2014/main" val="10004"/>
+                  </a:ext>
+                </a:extLst>
               </a:tr>
             </a:tbl>
           </a:graphicData>
@@ -10291,7 +10471,7 @@
         <p:spPr>
           <a:xfrm>
             <a:off x="813816" y="4114800"/>
-            <a:ext cx="10561320" cy="640080"/>
+            <a:ext cx="10561320" cy="451406"/>
           </a:xfrm>
           <a:prstGeom prst="rect">
             <a:avLst/>
@@ -10299,7 +10479,7 @@
           <a:noFill/>
         </p:spPr>
         <p:txBody>
-          <a:bodyPr wrap="square" anchor="t" lIns="0" rIns="0" tIns="0" bIns="0">
+          <a:bodyPr wrap="square" lIns="0" tIns="0" rIns="0" bIns="0" anchor="t">
             <a:spAutoFit/>
           </a:bodyPr>
           <a:lstStyle/>
@@ -10313,7 +10493,7 @@
               </a:spcAft>
             </a:pPr>
             <a:r>
-              <a:rPr sz="1300" b="1">
+              <a:rPr sz="1300" b="1" dirty="0" err="1">
                 <a:solidFill>
                   <a:srgbClr val="8FB9EC"/>
                 </a:solidFill>
@@ -10321,18 +10501,157 @@
                 <a:ea typeface="游ゴシック Medium"/>
                 <a:cs typeface="游ゴシック Medium"/>
               </a:rPr>
-              <a:t>例：</a:t>
-            </a:r>
-            <a:r>
-              <a:rPr sz="1300" b="0">
-                <a:solidFill>
-                  <a:srgbClr val="E8EDF4"/>
+              <a:t>例</a:t>
+            </a:r>
+            <a:r>
+              <a:rPr sz="1300" b="1" dirty="0">
+                <a:solidFill>
+                  <a:srgbClr val="8FB9EC"/>
                 </a:solidFill>
                 <a:latin typeface="游ゴシック Medium"/>
                 <a:ea typeface="游ゴシック Medium"/>
                 <a:cs typeface="游ゴシック Medium"/>
               </a:rPr>
-              <a:t>「競合3社の決算を比べたい」→ 社内に資料があれば Copilot で要約。公開データやCSVから作るなら Cowork が取得・解析してダッシュボード化。</a:t>
+              <a:t>：</a:t>
+            </a:r>
+            <a:r>
+              <a:rPr sz="1300" b="0" dirty="0">
+                <a:solidFill>
+                  <a:srgbClr val="E8EDF4"/>
+                </a:solidFill>
+                <a:latin typeface="游ゴシック Medium"/>
+                <a:ea typeface="游ゴシック Medium"/>
+                <a:cs typeface="游ゴシック Medium"/>
+              </a:rPr>
+              <a:t>「競合3社の決算を比べたい」→ </a:t>
+            </a:r>
+            <a:r>
+              <a:rPr sz="1300" b="0" dirty="0" err="1">
+                <a:solidFill>
+                  <a:srgbClr val="E8EDF4"/>
+                </a:solidFill>
+                <a:latin typeface="游ゴシック Medium"/>
+                <a:ea typeface="游ゴシック Medium"/>
+                <a:cs typeface="游ゴシック Medium"/>
+              </a:rPr>
+              <a:t>社内に資料があれば</a:t>
+            </a:r>
+            <a:r>
+              <a:rPr sz="1300" b="0" dirty="0">
+                <a:solidFill>
+                  <a:srgbClr val="E8EDF4"/>
+                </a:solidFill>
+                <a:latin typeface="游ゴシック Medium"/>
+                <a:ea typeface="游ゴシック Medium"/>
+                <a:cs typeface="游ゴシック Medium"/>
+              </a:rPr>
+              <a:t> Copilot </a:t>
+            </a:r>
+            <a:r>
+              <a:rPr sz="1300" b="0" dirty="0" err="1">
+                <a:solidFill>
+                  <a:srgbClr val="E8EDF4"/>
+                </a:solidFill>
+                <a:latin typeface="游ゴシック Medium"/>
+                <a:ea typeface="游ゴシック Medium"/>
+                <a:cs typeface="游ゴシック Medium"/>
+              </a:rPr>
+              <a:t>で要約</a:t>
+            </a:r>
+            <a:r>
+              <a:rPr sz="1300" b="0" dirty="0">
+                <a:solidFill>
+                  <a:srgbClr val="E8EDF4"/>
+                </a:solidFill>
+                <a:latin typeface="游ゴシック Medium"/>
+                <a:ea typeface="游ゴシック Medium"/>
+                <a:cs typeface="游ゴシック Medium"/>
+              </a:rPr>
+              <a:t>。</a:t>
+            </a:r>
+            <a:endParaRPr lang="en-US" sz="1300" b="0" dirty="0">
+              <a:solidFill>
+                <a:srgbClr val="E8EDF4"/>
+              </a:solidFill>
+              <a:latin typeface="游ゴシック Medium"/>
+              <a:ea typeface="游ゴシック Medium"/>
+              <a:cs typeface="游ゴシック Medium"/>
+            </a:endParaRPr>
+          </a:p>
+          <a:p>
+            <a:pPr algn="l">
+              <a:spcBef>
+                <a:spcPts val="0"/>
+              </a:spcBef>
+              <a:spcAft>
+                <a:spcPts val="400"/>
+              </a:spcAft>
+            </a:pPr>
+            <a:r>
+              <a:rPr sz="1300" b="0" dirty="0" err="1">
+                <a:solidFill>
+                  <a:srgbClr val="E8EDF4"/>
+                </a:solidFill>
+                <a:latin typeface="游ゴシック Medium"/>
+                <a:ea typeface="游ゴシック Medium"/>
+                <a:cs typeface="游ゴシック Medium"/>
+              </a:rPr>
+              <a:t>公開データやCSVから作るなら</a:t>
+            </a:r>
+            <a:r>
+              <a:rPr sz="1300" b="0" dirty="0">
+                <a:solidFill>
+                  <a:srgbClr val="E8EDF4"/>
+                </a:solidFill>
+                <a:latin typeface="游ゴシック Medium"/>
+                <a:ea typeface="游ゴシック Medium"/>
+                <a:cs typeface="游ゴシック Medium"/>
+              </a:rPr>
+              <a:t> </a:t>
+            </a:r>
+            <a:r>
+              <a:rPr sz="1300" b="0" dirty="0" err="1">
+                <a:solidFill>
+                  <a:srgbClr val="E8EDF4"/>
+                </a:solidFill>
+                <a:latin typeface="游ゴシック Medium"/>
+                <a:ea typeface="游ゴシック Medium"/>
+                <a:cs typeface="游ゴシック Medium"/>
+              </a:rPr>
+              <a:t>Cowork</a:t>
+            </a:r>
+            <a:r>
+              <a:rPr sz="1300" b="0" dirty="0">
+                <a:solidFill>
+                  <a:srgbClr val="E8EDF4"/>
+                </a:solidFill>
+                <a:latin typeface="游ゴシック Medium"/>
+                <a:ea typeface="游ゴシック Medium"/>
+                <a:cs typeface="游ゴシック Medium"/>
+              </a:rPr>
+              <a:t> </a:t>
+            </a:r>
+            <a:r>
+              <a:rPr sz="1300" b="0" dirty="0" err="1">
+                <a:solidFill>
+                  <a:srgbClr val="E8EDF4"/>
+                </a:solidFill>
+                <a:latin typeface="游ゴシック Medium"/>
+                <a:ea typeface="游ゴシック Medium"/>
+                <a:cs typeface="游ゴシック Medium"/>
+              </a:rPr>
+              <a:t>が取得・解析してダッシュボード化</a:t>
+            </a:r>
+            <a:r>
+              <a:rPr sz="1300" b="0" dirty="0">
+                <a:solidFill>
+                  <a:srgbClr val="E8EDF4"/>
+                </a:solidFill>
+                <a:latin typeface="游ゴシック Medium"/>
+                <a:ea typeface="游ゴシック Medium"/>
+                <a:cs typeface="游ゴシック Medium"/>
+              </a:rPr>
+              <a:t>。</a:t>
             </a:r>
           </a:p>
         </p:txBody>
@@ -10346,7 +10665,7 @@
         <p:spPr>
           <a:xfrm>
             <a:off x="813816" y="5029200"/>
-            <a:ext cx="10561320" cy="640080"/>
+            <a:ext cx="10561320" cy="184666"/>
           </a:xfrm>
           <a:prstGeom prst="rect">
             <a:avLst/>
@@ -10354,7 +10673,7 @@
           <a:noFill/>
         </p:spPr>
         <p:txBody>
-          <a:bodyPr wrap="square" anchor="t" lIns="0" rIns="0" tIns="0" bIns="0">
+          <a:bodyPr wrap="square" lIns="0" tIns="0" rIns="0" bIns="0" anchor="t">
             <a:spAutoFit/>
           </a:bodyPr>
           <a:lstStyle/>
@@ -10368,18 +10687,18 @@
               </a:spcAft>
             </a:pPr>
             <a:r>
-              <a:rPr sz="1200" b="1">
-                <a:solidFill>
-                  <a:srgbClr val="8FB9EC"/>
+              <a:rPr sz="1200" b="0" dirty="0" err="1">
+                <a:solidFill>
+                  <a:srgbClr val="E8EDF4"/>
                 </a:solidFill>
                 <a:latin typeface="游ゴシック Medium"/>
                 <a:ea typeface="游ゴシック Medium"/>
                 <a:cs typeface="游ゴシック Medium"/>
               </a:rPr>
-              <a:t>注意：</a:t>
-            </a:r>
-            <a:r>
-              <a:rPr sz="1200" b="0">
+              <a:t>統治は</a:t>
+            </a:r>
+            <a:r>
+              <a:rPr sz="1200" b="0" dirty="0">
                 <a:solidFill>
                   <a:srgbClr val="E8EDF4"/>
                 </a:solidFill>
@@ -10387,8 +10706,71 @@
                 <a:ea typeface="游ゴシック Medium"/>
                 <a:cs typeface="游ゴシック Medium"/>
               </a:rPr>
-              <a:t>統治は Copilot が M365準拠、Cowork は権限確認・フォルダ単位の制限。両者とも自律エージェント機能を持ち、「Cowork」は両社が使う名称です。</a:t>
-            </a:r>
+              <a:t> Copilot </a:t>
+            </a:r>
+            <a:r>
+              <a:rPr sz="1200" b="0" dirty="0" err="1">
+                <a:solidFill>
+                  <a:srgbClr val="E8EDF4"/>
+                </a:solidFill>
+                <a:latin typeface="游ゴシック Medium"/>
+                <a:ea typeface="游ゴシック Medium"/>
+                <a:cs typeface="游ゴシック Medium"/>
+              </a:rPr>
+              <a:t>が</a:t>
+            </a:r>
+            <a:r>
+              <a:rPr sz="1200" b="0" dirty="0">
+                <a:solidFill>
+                  <a:srgbClr val="E8EDF4"/>
+                </a:solidFill>
+                <a:latin typeface="游ゴシック Medium"/>
+                <a:ea typeface="游ゴシック Medium"/>
+                <a:cs typeface="游ゴシック Medium"/>
+              </a:rPr>
+              <a:t> M365準拠、Cowork </a:t>
+            </a:r>
+            <a:r>
+              <a:rPr sz="1200" b="0" dirty="0" err="1">
+                <a:solidFill>
+                  <a:srgbClr val="E8EDF4"/>
+                </a:solidFill>
+                <a:latin typeface="游ゴシック Medium"/>
+                <a:ea typeface="游ゴシック Medium"/>
+                <a:cs typeface="游ゴシック Medium"/>
+              </a:rPr>
+              <a:t>は権限確認・フォルダ単位の制限。両者とも自律エージェント機能を持</a:t>
+            </a:r>
+            <a:r>
+              <a:rPr lang="en-US" sz="1200" dirty="0" err="1">
+                <a:solidFill>
+                  <a:srgbClr val="E8EDF4"/>
+                </a:solidFill>
+                <a:latin typeface="游ゴシック Medium"/>
+                <a:ea typeface="游ゴシック Medium"/>
+                <a:cs typeface="游ゴシック Medium"/>
+              </a:rPr>
+              <a:t>つ</a:t>
+            </a:r>
+            <a:r>
+              <a:rPr lang="en-US" sz="1200" dirty="0">
+                <a:solidFill>
+                  <a:srgbClr val="E8EDF4"/>
+                </a:solidFill>
+                <a:latin typeface="游ゴシック Medium"/>
+                <a:ea typeface="游ゴシック Medium"/>
+                <a:cs typeface="游ゴシック Medium"/>
+              </a:rPr>
+              <a:t>。</a:t>
+            </a:r>
+            <a:endParaRPr sz="1200" b="0" dirty="0">
+              <a:solidFill>
+                <a:srgbClr val="E8EDF4"/>
+              </a:solidFill>
+              <a:latin typeface="游ゴシック Medium"/>
+              <a:ea typeface="游ゴシック Medium"/>
+              <a:cs typeface="游ゴシック Medium"/>
+            </a:endParaRPr>
           </a:p>
         </p:txBody>
       </p:sp>
@@ -10401,7 +10783,7 @@
 </file>
 
 <file path=ppt/slides/slide3.xml><?xml version="1.0" encoding="utf-8"?>
-<p:sld xmlns:a="http://schemas.openxmlformats.org/drawingml/2006/main" xmlns:p="http://schemas.openxmlformats.org/presentationml/2006/main" xmlns:r="http://schemas.openxmlformats.org/officeDocument/2006/relationships">
+<p:sld xmlns:a="http://schemas.openxmlformats.org/drawingml/2006/main" xmlns:r="http://schemas.openxmlformats.org/officeDocument/2006/relationships" xmlns:p="http://schemas.openxmlformats.org/presentationml/2006/main">
   <p:cSld>
     <p:spTree>
       <p:nvGrpSpPr>
@@ -10409,7 +10791,14 @@
         <p:cNvGrpSpPr/>
         <p:nvPr/>
       </p:nvGrpSpPr>
-      <p:grpSpPr/>
+      <p:grpSpPr>
+        <a:xfrm>
+          <a:off x="0" y="0"/>
+          <a:ext cx="0" cy="0"/>
+          <a:chOff x="0" y="0"/>
+          <a:chExt cx="0" cy="0"/>
+        </a:xfrm>
+      </p:grpSpPr>
       <p:sp>
         <p:nvSpPr>
           <p:cNvPr id="2" name="Title 1"/>
@@ -10431,8 +10820,45 @@
                 <a:ea typeface="游ゴシック Medium"/>
                 <a:cs typeface="游ゴシック Medium"/>
               </a:rPr>
-              <a:t>Copilotを使っている人が Claude Cowork を足す理由</a:t>
-            </a:r>
+              <a:t>Copilot</a:t>
+            </a:r>
+            <a:r>
+              <a:rPr lang="en-US" dirty="0">
+                <a:latin typeface="游ゴシック Medium"/>
+                <a:ea typeface="游ゴシック Medium"/>
+                <a:cs typeface="游ゴシック Medium"/>
+              </a:rPr>
+              <a:t> </a:t>
+            </a:r>
+            <a:r>
+              <a:rPr lang="ja-JP" altLang="en-US">
+                <a:latin typeface="游ゴシック Medium"/>
+                <a:ea typeface="游ゴシック Medium"/>
+                <a:cs typeface="游ゴシック Medium"/>
+              </a:rPr>
+              <a:t>に</a:t>
+            </a:r>
+            <a:r>
+              <a:rPr lang="en-US" altLang="ja-JP" dirty="0">
+                <a:latin typeface="游ゴシック Medium"/>
+                <a:ea typeface="游ゴシック Medium"/>
+                <a:cs typeface="游ゴシック Medium"/>
+              </a:rPr>
+              <a:t> Claude Cowork </a:t>
+            </a:r>
+            <a:r>
+              <a:rPr lang="ja-JP" altLang="en-US">
+                <a:latin typeface="游ゴシック Medium"/>
+                <a:ea typeface="游ゴシック Medium"/>
+                <a:cs typeface="游ゴシック Medium"/>
+              </a:rPr>
+              <a:t>を加えるメリット</a:t>
+            </a:r>
+            <a:endParaRPr>
+              <a:latin typeface="游ゴシック Medium"/>
+              <a:ea typeface="游ゴシック Medium"/>
+              <a:cs typeface="游ゴシック Medium"/>
+            </a:endParaRPr>
           </a:p>
         </p:txBody>
       </p:sp>
@@ -10445,7 +10871,7 @@
         <p:spPr>
           <a:xfrm>
             <a:off x="813816" y="1024128"/>
-            <a:ext cx="10561320" cy="457200"/>
+            <a:ext cx="10561320" cy="200055"/>
           </a:xfrm>
           <a:prstGeom prst="rect">
             <a:avLst/>
@@ -10453,7 +10879,7 @@
           <a:noFill/>
         </p:spPr>
         <p:txBody>
-          <a:bodyPr wrap="square" anchor="t" lIns="0" rIns="0" tIns="0" bIns="0">
+          <a:bodyPr wrap="square" lIns="0" tIns="0" rIns="0" bIns="0" anchor="t">
             <a:spAutoFit/>
           </a:bodyPr>
           <a:lstStyle/>
@@ -10467,7 +10893,7 @@
               </a:spcAft>
             </a:pPr>
             <a:r>
-              <a:rPr sz="1300" b="0">
+              <a:rPr sz="1300" b="0" dirty="0" err="1">
                 <a:solidFill>
                   <a:srgbClr val="B9C6DA"/>
                 </a:solidFill>
@@ -10475,7 +10901,40 @@
                 <a:ea typeface="游ゴシック Medium"/>
                 <a:cs typeface="游ゴシック Medium"/>
               </a:rPr>
-              <a:t>置き換えではなく役割分担です。CopilotだけではカバーしにくいデータやタスクをClaude Coworkが担います。</a:t>
+              <a:t>CopilotだけではカバーしにくいデータやタスクをClaude</a:t>
+            </a:r>
+            <a:r>
+              <a:rPr sz="1300" b="0" dirty="0">
+                <a:solidFill>
+                  <a:srgbClr val="B9C6DA"/>
+                </a:solidFill>
+                <a:latin typeface="游ゴシック Medium"/>
+                <a:ea typeface="游ゴシック Medium"/>
+                <a:cs typeface="游ゴシック Medium"/>
+              </a:rPr>
+              <a:t> </a:t>
+            </a:r>
+            <a:r>
+              <a:rPr sz="1300" b="0" dirty="0" err="1">
+                <a:solidFill>
+                  <a:srgbClr val="B9C6DA"/>
+                </a:solidFill>
+                <a:latin typeface="游ゴシック Medium"/>
+                <a:ea typeface="游ゴシック Medium"/>
+                <a:cs typeface="游ゴシック Medium"/>
+              </a:rPr>
+              <a:t>Coworkが担います</a:t>
+            </a:r>
+            <a:r>
+              <a:rPr sz="1300" b="0" dirty="0">
+                <a:solidFill>
+                  <a:srgbClr val="B9C6DA"/>
+                </a:solidFill>
+                <a:latin typeface="游ゴシック Medium"/>
+                <a:ea typeface="游ゴシック Medium"/>
+                <a:cs typeface="游ゴシック Medium"/>
+              </a:rPr>
+              <a:t>。</a:t>
             </a:r>
           </a:p>
         </p:txBody>
@@ -10521,6 +10980,7 @@
           <a:lstStyle/>
           <a:p>
             <a:pPr algn="ctr"/>
+            <a:endParaRPr/>
           </a:p>
         </p:txBody>
       </p:sp>
@@ -10541,7 +11001,7 @@
           <a:noFill/>
         </p:spPr>
         <p:txBody>
-          <a:bodyPr wrap="square" anchor="t" lIns="0" rIns="0" tIns="0" bIns="0">
+          <a:bodyPr wrap="square" lIns="0" tIns="0" rIns="0" bIns="0" anchor="t">
             <a:spAutoFit/>
           </a:bodyPr>
           <a:lstStyle/>
@@ -10585,7 +11045,7 @@
           <a:noFill/>
         </p:spPr>
         <p:txBody>
-          <a:bodyPr wrap="square" anchor="t" lIns="0" rIns="0" tIns="0" bIns="0">
+          <a:bodyPr wrap="square" lIns="0" tIns="0" rIns="0" bIns="0" anchor="t">
             <a:spAutoFit/>
           </a:bodyPr>
           <a:lstStyle/>
@@ -10653,6 +11113,7 @@
           <a:lstStyle/>
           <a:p>
             <a:pPr algn="ctr"/>
+            <a:endParaRPr/>
           </a:p>
         </p:txBody>
       </p:sp>
@@ -10673,7 +11134,7 @@
           <a:noFill/>
         </p:spPr>
         <p:txBody>
-          <a:bodyPr wrap="square" anchor="t" lIns="0" rIns="0" tIns="0" bIns="0">
+          <a:bodyPr wrap="square" lIns="0" tIns="0" rIns="0" bIns="0" anchor="t">
             <a:spAutoFit/>
           </a:bodyPr>
           <a:lstStyle/>
@@ -10717,7 +11178,7 @@
           <a:noFill/>
         </p:spPr>
         <p:txBody>
-          <a:bodyPr wrap="square" anchor="t" lIns="0" rIns="0" tIns="0" bIns="0">
+          <a:bodyPr wrap="square" lIns="0" tIns="0" rIns="0" bIns="0" anchor="t">
             <a:spAutoFit/>
           </a:bodyPr>
           <a:lstStyle/>
@@ -10785,6 +11246,7 @@
           <a:lstStyle/>
           <a:p>
             <a:pPr algn="ctr"/>
+            <a:endParaRPr/>
           </a:p>
         </p:txBody>
       </p:sp>
@@ -10805,7 +11267,7 @@
           <a:noFill/>
         </p:spPr>
         <p:txBody>
-          <a:bodyPr wrap="square" anchor="t" lIns="0" rIns="0" tIns="0" bIns="0">
+          <a:bodyPr wrap="square" lIns="0" tIns="0" rIns="0" bIns="0" anchor="t">
             <a:spAutoFit/>
           </a:bodyPr>
           <a:lstStyle/>
@@ -10849,7 +11311,7 @@
           <a:noFill/>
         </p:spPr>
         <p:txBody>
-          <a:bodyPr wrap="square" anchor="t" lIns="0" rIns="0" tIns="0" bIns="0">
+          <a:bodyPr wrap="square" lIns="0" tIns="0" rIns="0" bIns="0" anchor="t">
             <a:spAutoFit/>
           </a:bodyPr>
           <a:lstStyle/>
@@ -10917,6 +11379,7 @@
           <a:lstStyle/>
           <a:p>
             <a:pPr algn="ctr"/>
+            <a:endParaRPr/>
           </a:p>
         </p:txBody>
       </p:sp>
@@ -10937,7 +11400,7 @@
           <a:noFill/>
         </p:spPr>
         <p:txBody>
-          <a:bodyPr wrap="square" anchor="t" lIns="0" rIns="0" tIns="0" bIns="0">
+          <a:bodyPr wrap="square" lIns="0" tIns="0" rIns="0" bIns="0" anchor="t">
             <a:spAutoFit/>
           </a:bodyPr>
           <a:lstStyle/>
@@ -10981,7 +11444,7 @@
           <a:noFill/>
         </p:spPr>
         <p:txBody>
-          <a:bodyPr wrap="square" anchor="t" lIns="0" rIns="0" tIns="0" bIns="0">
+          <a:bodyPr wrap="square" lIns="0" tIns="0" rIns="0" bIns="0" anchor="t">
             <a:spAutoFit/>
           </a:bodyPr>
           <a:lstStyle/>
@@ -11025,7 +11488,7 @@
           <a:noFill/>
         </p:spPr>
         <p:txBody>
-          <a:bodyPr wrap="square" anchor="t" lIns="0" rIns="0" tIns="0" bIns="0">
+          <a:bodyPr wrap="square" lIns="0" tIns="0" rIns="0" bIns="0" anchor="t">
             <a:spAutoFit/>
           </a:bodyPr>
           <a:lstStyle/>
@@ -11072,7 +11535,7 @@
 </file>
 
 <file path=ppt/slides/slide4.xml><?xml version="1.0" encoding="utf-8"?>
-<p:sld xmlns:a="http://schemas.openxmlformats.org/drawingml/2006/main" xmlns:p="http://schemas.openxmlformats.org/presentationml/2006/main" xmlns:r="http://schemas.openxmlformats.org/officeDocument/2006/relationships">
+<p:sld xmlns:a="http://schemas.openxmlformats.org/drawingml/2006/main" xmlns:r="http://schemas.openxmlformats.org/officeDocument/2006/relationships" xmlns:p="http://schemas.openxmlformats.org/presentationml/2006/main">
   <p:cSld>
     <p:spTree>
       <p:nvGrpSpPr>
@@ -11080,7 +11543,14 @@
         <p:cNvGrpSpPr/>
         <p:nvPr/>
       </p:nvGrpSpPr>
-      <p:grpSpPr/>
+      <p:grpSpPr>
+        <a:xfrm>
+          <a:off x="0" y="0"/>
+          <a:ext cx="0" cy="0"/>
+          <a:chOff x="0" y="0"/>
+          <a:chExt cx="0" cy="0"/>
+        </a:xfrm>
+      </p:grpSpPr>
       <p:sp>
         <p:nvSpPr>
           <p:cNvPr id="2" name="Title 1"/>
@@ -11124,7 +11594,7 @@
           <a:noFill/>
         </p:spPr>
         <p:txBody>
-          <a:bodyPr wrap="square" anchor="t" lIns="0" rIns="0" tIns="0" bIns="0">
+          <a:bodyPr wrap="square" lIns="0" tIns="0" rIns="0" bIns="0" anchor="t">
             <a:spAutoFit/>
           </a:bodyPr>
           <a:lstStyle/>
@@ -11194,6 +11664,7 @@
           <a:lstStyle/>
           <a:p>
             <a:pPr algn="ctr"/>
+            <a:endParaRPr/>
           </a:p>
         </p:txBody>
       </p:sp>
@@ -11214,7 +11685,7 @@
           <a:noFill/>
         </p:spPr>
         <p:txBody>
-          <a:bodyPr wrap="square" anchor="t" lIns="0" rIns="0" tIns="0" bIns="0">
+          <a:bodyPr wrap="square" lIns="0" tIns="0" rIns="0" bIns="0" anchor="t">
             <a:spAutoFit/>
           </a:bodyPr>
           <a:lstStyle/>
@@ -11258,7 +11729,7 @@
           <a:noFill/>
         </p:spPr>
         <p:txBody>
-          <a:bodyPr wrap="square" anchor="t" lIns="0" rIns="0" tIns="0" bIns="0">
+          <a:bodyPr wrap="square" lIns="0" tIns="0" rIns="0" bIns="0" anchor="t">
             <a:spAutoFit/>
           </a:bodyPr>
           <a:lstStyle/>
@@ -11302,7 +11773,7 @@
           <a:noFill/>
         </p:spPr>
         <p:txBody>
-          <a:bodyPr wrap="square" anchor="t" lIns="0" rIns="0" tIns="0" bIns="0">
+          <a:bodyPr wrap="square" lIns="0" tIns="0" rIns="0" bIns="0" anchor="t">
             <a:spAutoFit/>
           </a:bodyPr>
           <a:lstStyle/>
@@ -11479,6 +11950,7 @@
           <a:lstStyle/>
           <a:p>
             <a:pPr algn="ctr"/>
+            <a:endParaRPr/>
           </a:p>
         </p:txBody>
       </p:sp>
@@ -11499,7 +11971,7 @@
           <a:noFill/>
         </p:spPr>
         <p:txBody>
-          <a:bodyPr wrap="square" anchor="t" lIns="0" rIns="0" tIns="0" bIns="0">
+          <a:bodyPr wrap="square" lIns="0" tIns="0" rIns="0" bIns="0" anchor="t">
             <a:spAutoFit/>
           </a:bodyPr>
           <a:lstStyle/>
@@ -11543,7 +12015,7 @@
           <a:noFill/>
         </p:spPr>
         <p:txBody>
-          <a:bodyPr wrap="square" anchor="t" lIns="0" rIns="0" tIns="0" bIns="0">
+          <a:bodyPr wrap="square" lIns="0" tIns="0" rIns="0" bIns="0" anchor="t">
             <a:spAutoFit/>
           </a:bodyPr>
           <a:lstStyle/>
@@ -11587,7 +12059,7 @@
           <a:noFill/>
         </p:spPr>
         <p:txBody>
-          <a:bodyPr wrap="square" anchor="t" lIns="0" rIns="0" tIns="0" bIns="0">
+          <a:bodyPr wrap="square" lIns="0" tIns="0" rIns="0" bIns="0" anchor="t">
             <a:spAutoFit/>
           </a:bodyPr>
           <a:lstStyle/>
@@ -11738,7 +12210,7 @@
           <a:noFill/>
         </p:spPr>
         <p:txBody>
-          <a:bodyPr wrap="square" anchor="t" lIns="0" rIns="0" tIns="0" bIns="0">
+          <a:bodyPr wrap="square" lIns="0" tIns="0" rIns="0" bIns="0" anchor="t">
             <a:spAutoFit/>
           </a:bodyPr>
           <a:lstStyle/>
@@ -11816,7 +12288,7 @@
 </file>
 
 <file path=ppt/slides/slide5.xml><?xml version="1.0" encoding="utf-8"?>
-<p:sld xmlns:a="http://schemas.openxmlformats.org/drawingml/2006/main" xmlns:p="http://schemas.openxmlformats.org/presentationml/2006/main" xmlns:r="http://schemas.openxmlformats.org/officeDocument/2006/relationships">
+<p:sld xmlns:a="http://schemas.openxmlformats.org/drawingml/2006/main" xmlns:r="http://schemas.openxmlformats.org/officeDocument/2006/relationships" xmlns:p="http://schemas.openxmlformats.org/presentationml/2006/main">
   <p:cSld>
     <p:spTree>
       <p:nvGrpSpPr>
@@ -11824,7 +12296,14 @@
         <p:cNvGrpSpPr/>
         <p:nvPr/>
       </p:nvGrpSpPr>
-      <p:grpSpPr/>
+      <p:grpSpPr>
+        <a:xfrm>
+          <a:off x="0" y="0"/>
+          <a:ext cx="0" cy="0"/>
+          <a:chOff x="0" y="0"/>
+          <a:chExt cx="0" cy="0"/>
+        </a:xfrm>
+      </p:grpSpPr>
       <p:sp>
         <p:nvSpPr>
           <p:cNvPr id="2" name="Title 1"/>
@@ -11868,7 +12347,7 @@
           <a:noFill/>
         </p:spPr>
         <p:txBody>
-          <a:bodyPr wrap="square" anchor="t" lIns="0" rIns="0" tIns="0" bIns="0">
+          <a:bodyPr wrap="square" lIns="0" tIns="0" rIns="0" bIns="0" anchor="t">
             <a:spAutoFit/>
           </a:bodyPr>
           <a:lstStyle/>
@@ -11938,6 +12417,7 @@
           <a:lstStyle/>
           <a:p>
             <a:pPr algn="ctr"/>
+            <a:endParaRPr/>
           </a:p>
         </p:txBody>
       </p:sp>
@@ -11958,7 +12438,7 @@
           <a:noFill/>
         </p:spPr>
         <p:txBody>
-          <a:bodyPr wrap="square" anchor="t" lIns="0" rIns="0" tIns="0" bIns="0">
+          <a:bodyPr wrap="square" lIns="0" tIns="0" rIns="0" bIns="0" anchor="t">
             <a:spAutoFit/>
           </a:bodyPr>
           <a:lstStyle/>
@@ -12002,7 +12482,7 @@
           <a:noFill/>
         </p:spPr>
         <p:txBody>
-          <a:bodyPr wrap="square" anchor="t" lIns="0" rIns="0" tIns="0" bIns="0">
+          <a:bodyPr wrap="square" lIns="0" tIns="0" rIns="0" bIns="0" anchor="t">
             <a:spAutoFit/>
           </a:bodyPr>
           <a:lstStyle/>
@@ -12046,7 +12526,7 @@
           <a:noFill/>
         </p:spPr>
         <p:txBody>
-          <a:bodyPr wrap="square" anchor="t" lIns="0" rIns="0" tIns="0" bIns="0">
+          <a:bodyPr wrap="square" lIns="0" tIns="0" rIns="0" bIns="0" anchor="t">
             <a:spAutoFit/>
           </a:bodyPr>
           <a:lstStyle/>
@@ -12191,6 +12671,7 @@
           <a:lstStyle/>
           <a:p>
             <a:pPr algn="ctr"/>
+            <a:endParaRPr/>
           </a:p>
         </p:txBody>
       </p:sp>
@@ -12211,7 +12692,7 @@
           <a:noFill/>
         </p:spPr>
         <p:txBody>
-          <a:bodyPr wrap="square" anchor="t" lIns="0" rIns="0" tIns="0" bIns="0">
+          <a:bodyPr wrap="square" lIns="0" tIns="0" rIns="0" bIns="0" anchor="t">
             <a:spAutoFit/>
           </a:bodyPr>
           <a:lstStyle/>
@@ -12255,7 +12736,7 @@
           <a:noFill/>
         </p:spPr>
         <p:txBody>
-          <a:bodyPr wrap="square" anchor="t" lIns="0" rIns="0" tIns="0" bIns="0">
+          <a:bodyPr wrap="square" lIns="0" tIns="0" rIns="0" bIns="0" anchor="t">
             <a:spAutoFit/>
           </a:bodyPr>
           <a:lstStyle/>
@@ -12299,7 +12780,7 @@
           <a:noFill/>
         </p:spPr>
         <p:txBody>
-          <a:bodyPr wrap="square" anchor="t" lIns="0" rIns="0" tIns="0" bIns="0">
+          <a:bodyPr wrap="square" lIns="0" tIns="0" rIns="0" bIns="0" anchor="t">
             <a:spAutoFit/>
           </a:bodyPr>
           <a:lstStyle/>
@@ -12444,6 +12925,7 @@
           <a:lstStyle/>
           <a:p>
             <a:pPr algn="ctr"/>
+            <a:endParaRPr/>
           </a:p>
         </p:txBody>
       </p:sp>
@@ -12464,7 +12946,7 @@
           <a:noFill/>
         </p:spPr>
         <p:txBody>
-          <a:bodyPr wrap="square" anchor="t" lIns="0" rIns="0" tIns="0" bIns="0">
+          <a:bodyPr wrap="square" lIns="0" tIns="0" rIns="0" bIns="0" anchor="t">
             <a:spAutoFit/>
           </a:bodyPr>
           <a:lstStyle/>
@@ -12508,7 +12990,7 @@
           <a:noFill/>
         </p:spPr>
         <p:txBody>
-          <a:bodyPr wrap="square" anchor="t" lIns="0" rIns="0" tIns="0" bIns="0">
+          <a:bodyPr wrap="square" lIns="0" tIns="0" rIns="0" bIns="0" anchor="t">
             <a:spAutoFit/>
           </a:bodyPr>
           <a:lstStyle/>
@@ -12552,7 +13034,7 @@
           <a:noFill/>
         </p:spPr>
         <p:txBody>
-          <a:bodyPr wrap="square" anchor="t" lIns="0" rIns="0" tIns="0" bIns="0">
+          <a:bodyPr wrap="square" lIns="0" tIns="0" rIns="0" bIns="0" anchor="t">
             <a:spAutoFit/>
           </a:bodyPr>
           <a:lstStyle/>
@@ -12671,7 +13153,7 @@
           <a:noFill/>
         </p:spPr>
         <p:txBody>
-          <a:bodyPr wrap="square" anchor="t" lIns="0" rIns="0" tIns="0" bIns="0">
+          <a:bodyPr wrap="square" lIns="0" tIns="0" rIns="0" bIns="0" anchor="t">
             <a:spAutoFit/>
           </a:bodyPr>
           <a:lstStyle/>
@@ -12718,7 +13200,7 @@
 </file>
 
 <file path=ppt/slides/slide6.xml><?xml version="1.0" encoding="utf-8"?>
-<p:sld xmlns:a="http://schemas.openxmlformats.org/drawingml/2006/main" xmlns:p="http://schemas.openxmlformats.org/presentationml/2006/main" xmlns:r="http://schemas.openxmlformats.org/officeDocument/2006/relationships">
+<p:sld xmlns:a="http://schemas.openxmlformats.org/drawingml/2006/main" xmlns:r="http://schemas.openxmlformats.org/officeDocument/2006/relationships" xmlns:p="http://schemas.openxmlformats.org/presentationml/2006/main">
   <p:cSld>
     <p:spTree>
       <p:nvGrpSpPr>
@@ -12726,7 +13208,14 @@
         <p:cNvGrpSpPr/>
         <p:nvPr/>
       </p:nvGrpSpPr>
-      <p:grpSpPr/>
+      <p:grpSpPr>
+        <a:xfrm>
+          <a:off x="0" y="0"/>
+          <a:ext cx="0" cy="0"/>
+          <a:chOff x="0" y="0"/>
+          <a:chExt cx="0" cy="0"/>
+        </a:xfrm>
+      </p:grpSpPr>
       <p:sp>
         <p:nvSpPr>
           <p:cNvPr id="2" name="Title 1"/>
@@ -12794,6 +13283,7 @@
           <a:lstStyle/>
           <a:p>
             <a:pPr algn="ctr"/>
+            <a:endParaRPr/>
           </a:p>
         </p:txBody>
       </p:sp>
@@ -12814,7 +13304,7 @@
           <a:noFill/>
         </p:spPr>
         <p:txBody>
-          <a:bodyPr wrap="square" anchor="t" lIns="0" rIns="0" tIns="0" bIns="0">
+          <a:bodyPr wrap="square" lIns="0" tIns="0" rIns="0" bIns="0" anchor="t">
             <a:spAutoFit/>
           </a:bodyPr>
           <a:lstStyle/>
@@ -12903,6 +13393,7 @@
           <a:lstStyle/>
           <a:p>
             <a:pPr algn="ctr"/>
+            <a:endParaRPr/>
           </a:p>
         </p:txBody>
       </p:sp>
@@ -12923,7 +13414,7 @@
           <a:noFill/>
         </p:spPr>
         <p:txBody>
-          <a:bodyPr wrap="square" anchor="t" lIns="0" rIns="0" tIns="0" bIns="0">
+          <a:bodyPr wrap="square" lIns="0" tIns="0" rIns="0" bIns="0" anchor="t">
             <a:spAutoFit/>
           </a:bodyPr>
           <a:lstStyle/>
@@ -13012,6 +13503,7 @@
           <a:lstStyle/>
           <a:p>
             <a:pPr algn="ctr"/>
+            <a:endParaRPr/>
           </a:p>
         </p:txBody>
       </p:sp>
@@ -13032,7 +13524,7 @@
           <a:noFill/>
         </p:spPr>
         <p:txBody>
-          <a:bodyPr wrap="square" anchor="t" lIns="0" rIns="0" tIns="0" bIns="0">
+          <a:bodyPr wrap="square" lIns="0" tIns="0" rIns="0" bIns="0" anchor="t">
             <a:spAutoFit/>
           </a:bodyPr>
           <a:lstStyle/>
@@ -13097,7 +13589,7 @@
           <a:noFill/>
         </p:spPr>
         <p:txBody>
-          <a:bodyPr wrap="square" anchor="t" lIns="0" rIns="0" tIns="0" bIns="0">
+          <a:bodyPr wrap="square" lIns="0" tIns="0" rIns="0" bIns="0" anchor="t">
             <a:spAutoFit/>
           </a:bodyPr>
           <a:lstStyle/>
@@ -13733,15 +14225,6 @@
 </file>
 
 <file path=customXml/item1.xml><?xml version="1.0" encoding="utf-8"?>
-<?mso-contentType ?>
-<FormTemplates xmlns="http://schemas.microsoft.com/sharepoint/v3/contenttype/forms">
-  <Display>DocumentLibraryForm</Display>
-  <Edit>DocumentLibraryForm</Edit>
-  <New>DocumentLibraryForm</New>
-</FormTemplates>
-</file>
-
-<file path=customXml/item2.xml><?xml version="1.0" encoding="utf-8"?>
 <p:properties xmlns:p="http://schemas.microsoft.com/office/2006/metadata/properties" xmlns:xsi="http://www.w3.org/2001/XMLSchema-instance" xmlns:pc="http://schemas.microsoft.com/office/infopath/2007/PartnerControls">
   <documentManagement>
     <TaxCatchAll xmlns="5d54735c-8563-480c-aa17-13e507c6fcf6" xsi:nil="true"/>
@@ -13750,6 +14233,15 @@
     </lcf76f155ced4ddcb4097134ff3c332f>
   </documentManagement>
 </p:properties>
+</file>
+
+<file path=customXml/item2.xml><?xml version="1.0" encoding="utf-8"?>
+<?mso-contentType ?>
+<FormTemplates xmlns="http://schemas.microsoft.com/sharepoint/v3/contenttype/forms">
+  <Display>DocumentLibraryForm</Display>
+  <Edit>DocumentLibraryForm</Edit>
+  <New>DocumentLibraryForm</New>
+</FormTemplates>
 </file>
 
 <file path=customXml/item3.xml><?xml version="1.0" encoding="utf-8"?>
@@ -13954,14 +14446,6 @@
 </file>
 
 <file path=customXml/itemProps1.xml><?xml version="1.0" encoding="utf-8"?>
-<ds:datastoreItem xmlns:ds="http://schemas.openxmlformats.org/officeDocument/2006/customXml" ds:itemID="{458AE83B-8FBF-46E4-95C5-6FC34C176263}">
-  <ds:schemaRefs>
-    <ds:schemaRef ds:uri="http://schemas.microsoft.com/sharepoint/v3/contenttype/forms"/>
-  </ds:schemaRefs>
-</ds:datastoreItem>
-</file>
-
-<file path=customXml/itemProps2.xml><?xml version="1.0" encoding="utf-8"?>
 <ds:datastoreItem xmlns:ds="http://schemas.openxmlformats.org/officeDocument/2006/customXml" ds:itemID="{3FFB5523-FEB7-4908-9109-C2FCB7452423}">
   <ds:schemaRefs>
     <ds:schemaRef ds:uri="http://schemas.microsoft.com/office/2006/metadata/properties"/>
@@ -13972,6 +14456,29 @@
 </ds:datastoreItem>
 </file>
 
+<file path=customXml/itemProps2.xml><?xml version="1.0" encoding="utf-8"?>
+<ds:datastoreItem xmlns:ds="http://schemas.openxmlformats.org/officeDocument/2006/customXml" ds:itemID="{458AE83B-8FBF-46E4-95C5-6FC34C176263}">
+  <ds:schemaRefs>
+    <ds:schemaRef ds:uri="http://schemas.microsoft.com/sharepoint/v3/contenttype/forms"/>
+  </ds:schemaRefs>
+</ds:datastoreItem>
+</file>
+
 <file path=customXml/itemProps3.xml><?xml version="1.0" encoding="utf-8"?>
-<ds:datastoreItem xmlns:ds="http://schemas.openxmlformats.org/officeDocument/2006/customXml" ds:itemID="{B1F9275D-B4EB-4C8E-9255-310B2138FDF9}"/>
+<ds:datastoreItem xmlns:ds="http://schemas.openxmlformats.org/officeDocument/2006/customXml" ds:itemID="{B1F9275D-B4EB-4C8E-9255-310B2138FDF9}">
+  <ds:schemaRefs>
+    <ds:schemaRef ds:uri="http://schemas.microsoft.com/office/2006/metadata/contentType"/>
+    <ds:schemaRef ds:uri="http://schemas.microsoft.com/office/2006/metadata/properties/metaAttributes"/>
+    <ds:schemaRef ds:uri="http://www.w3.org/2001/XMLSchema"/>
+    <ds:schemaRef ds:uri="http://schemas.microsoft.com/office/2006/metadata/properties"/>
+    <ds:schemaRef ds:uri="768ecba8-f556-413e-93cf-a669b10e85e2"/>
+    <ds:schemaRef ds:uri="5d54735c-8563-480c-aa17-13e507c6fcf6"/>
+    <ds:schemaRef ds:uri="http://schemas.microsoft.com/office/2006/documentManagement/types"/>
+    <ds:schemaRef ds:uri="http://schemas.microsoft.com/office/infopath/2007/PartnerControls"/>
+    <ds:schemaRef ds:uri="http://schemas.openxmlformats.org/package/2006/metadata/core-properties"/>
+    <ds:schemaRef ds:uri="http://purl.org/dc/elements/1.1/"/>
+    <ds:schemaRef ds:uri="http://purl.org/dc/terms/"/>
+    <ds:schemaRef ds:uri="http://schemas.microsoft.com/internal/obd"/>
+  </ds:schemaRefs>
+</ds:datastoreItem>
 </file>
--- a/配布/Copilot_Cowork_競合比較.pptx
+++ b/配布/Copilot_Cowork_競合比較.pptx
@@ -5,15 +5,19 @@
     <p:sldMasterId id="2147483705" r:id="rId4"/>
   </p:sldMasterIdLst>
   <p:notesMasterIdLst>
-    <p:notesMasterId r:id="rId11"/>
+    <p:notesMasterId r:id="rId13"/>
   </p:notesMasterIdLst>
   <p:sldIdLst>
     <p:sldId id="256" r:id="rId5"/>
-    <p:sldId id="257" r:id="rId6"/>
-    <p:sldId id="258" r:id="rId7"/>
-    <p:sldId id="259" r:id="rId8"/>
-    <p:sldId id="260" r:id="rId9"/>
-    <p:sldId id="261" r:id="rId10"/>
+    <p:sldId id="262" r:id="rId6"/>
+    <p:sldId id="264" r:id="rId19"/>
+    <p:sldId id="263" r:id="rId7"/>
+    <p:sldId id="265" r:id="rId20"/>
+    <p:sldId id="257" r:id="rId8"/>
+    <p:sldId id="258" r:id="rId9"/>
+    <p:sldId id="259" r:id="rId10"/>
+    <p:sldId id="260" r:id="rId11"/>
+    <p:sldId id="261" r:id="rId12"/>
   </p:sldIdLst>
   <p:sldSz cx="12192000" cy="6858000"/>
   <p:notesSz cx="6858000" cy="9144000"/>
@@ -595,7 +599,7 @@
           <a:p>
             <a:fld id="{5138D139-BD1B-4B66-BB08-DB0DB6B95EC5}" type="slidenum">
               <a:rPr kumimoji="1" lang="ja-JP" altLang="en-US" smtClean="0"/>
-              <a:t>2</a:t>
+              <a:t>4</a:t>
             </a:fld>
             <a:endParaRPr kumimoji="1" lang="ja-JP" altLang="en-US"/>
           </a:p>
@@ -9924,7 +9928,1083 @@
 </p:sld>
 </file>
 
+<file path=ppt/slides/slide10.xml><?xml version="1.0" encoding="utf-8"?>
+<p:sld xmlns:a="http://schemas.openxmlformats.org/drawingml/2006/main" xmlns:p="http://schemas.openxmlformats.org/presentationml/2006/main" xmlns:r="http://schemas.openxmlformats.org/officeDocument/2006/relationships">
+  <p:cSld>
+    <p:spTree>
+      <p:nvGrpSpPr>
+        <p:cNvPr id="1" name=""/>
+        <p:cNvGrpSpPr/>
+        <p:nvPr/>
+      </p:nvGrpSpPr>
+      <p:grpSpPr/>
+      <p:sp>
+        <p:nvSpPr>
+          <p:cNvPr id="2" name="Title 1"/>
+          <p:cNvSpPr>
+            <a:spLocks noGrp="1"/>
+          </p:cNvSpPr>
+          <p:nvPr>
+            <p:ph type="title"/>
+          </p:nvPr>
+        </p:nvSpPr>
+        <p:spPr/>
+        <p:txBody>
+          <a:bodyPr/>
+          <a:lstStyle/>
+          <a:p>
+            <a:r>
+              <a:rPr>
+                <a:latin typeface="游ゴシック Medium"/>
+                <a:ea typeface="游ゴシック Medium"/>
+                <a:cs typeface="游ゴシック Medium"/>
+              </a:rPr>
+              <a:t>Claude Cowork でできること</a:t>
+            </a:r>
+          </a:p>
+        </p:txBody>
+      </p:sp>
+      <p:sp>
+        <p:nvSpPr>
+          <p:cNvPr id="3" name="TextBox 2"/>
+          <p:cNvSpPr txBox="1"/>
+          <p:nvPr/>
+        </p:nvSpPr>
+        <p:spPr>
+          <a:xfrm>
+            <a:off x="813816" y="1024128"/>
+            <a:ext cx="10561320" cy="457200"/>
+          </a:xfrm>
+          <a:prstGeom prst="rect">
+            <a:avLst/>
+          </a:prstGeom>
+          <a:noFill/>
+        </p:spPr>
+        <p:txBody>
+          <a:bodyPr wrap="square" anchor="t" lIns="0" rIns="0" tIns="0" bIns="0">
+            <a:spAutoFit/>
+          </a:bodyPr>
+          <a:lstStyle/>
+          <a:p>
+            <a:pPr algn="l">
+              <a:spcBef>
+                <a:spcPts val="0"/>
+              </a:spcBef>
+              <a:spcAft>
+                <a:spcPts val="400"/>
+              </a:spcAft>
+            </a:pPr>
+            <a:r>
+              <a:rPr sz="1300" b="0">
+                <a:solidFill>
+                  <a:srgbClr val="B9C6DA"/>
+                </a:solidFill>
+                <a:latin typeface="游ゴシック Medium"/>
+                <a:ea typeface="游ゴシック Medium"/>
+                <a:cs typeface="游ゴシック Medium"/>
+              </a:rPr>
+              <a:t>ターミナル不要で、まとまった作業を丸ごと任せられる自律エージェントです。</a:t>
+            </a:r>
+          </a:p>
+        </p:txBody>
+      </p:sp>
+      <p:sp>
+        <p:nvSpPr>
+          <p:cNvPr id="4" name="Rectangle 3"/>
+          <p:cNvSpPr/>
+          <p:nvPr/>
+        </p:nvSpPr>
+        <p:spPr>
+          <a:xfrm>
+            <a:off x="813816" y="1527048"/>
+            <a:ext cx="137160" cy="137160"/>
+          </a:xfrm>
+          <a:prstGeom prst="rect">
+            <a:avLst/>
+          </a:prstGeom>
+          <a:solidFill>
+            <a:srgbClr val="8FB9EC"/>
+          </a:solidFill>
+          <a:ln>
+            <a:noFill/>
+          </a:ln>
+          <a:effectLst/>
+        </p:spPr>
+        <p:style>
+          <a:lnRef idx="1">
+            <a:schemeClr val="accent1"/>
+          </a:lnRef>
+          <a:fillRef idx="3">
+            <a:schemeClr val="accent1"/>
+          </a:fillRef>
+          <a:effectRef idx="2">
+            <a:schemeClr val="accent1"/>
+          </a:effectRef>
+          <a:fontRef idx="minor">
+            <a:schemeClr val="lt1"/>
+          </a:fontRef>
+        </p:style>
+        <p:txBody>
+          <a:bodyPr rtlCol="0" anchor="ctr"/>
+          <a:lstStyle/>
+          <a:p>
+            <a:pPr algn="ctr"/>
+          </a:p>
+        </p:txBody>
+      </p:sp>
+      <p:sp>
+        <p:nvSpPr>
+          <p:cNvPr id="5" name="TextBox 4"/>
+          <p:cNvSpPr txBox="1"/>
+          <p:nvPr/>
+        </p:nvSpPr>
+        <p:spPr>
+          <a:xfrm>
+            <a:off x="1133856" y="1444752"/>
+            <a:ext cx="10241280" cy="365760"/>
+          </a:xfrm>
+          <a:prstGeom prst="rect">
+            <a:avLst/>
+          </a:prstGeom>
+          <a:noFill/>
+        </p:spPr>
+        <p:txBody>
+          <a:bodyPr wrap="square" anchor="t" lIns="0" rIns="0" tIns="0" bIns="0">
+            <a:spAutoFit/>
+          </a:bodyPr>
+          <a:lstStyle/>
+          <a:p>
+            <a:pPr algn="l">
+              <a:spcBef>
+                <a:spcPts val="0"/>
+              </a:spcBef>
+              <a:spcAft>
+                <a:spcPts val="400"/>
+              </a:spcAft>
+            </a:pPr>
+            <a:r>
+              <a:rPr sz="1600" b="1">
+                <a:solidFill>
+                  <a:srgbClr val="FFFFFF"/>
+                </a:solidFill>
+                <a:latin typeface="游ゴシック Medium"/>
+                <a:ea typeface="游ゴシック Medium"/>
+                <a:cs typeface="游ゴシック Medium"/>
+              </a:rPr>
+              <a:t>コード不要で自律実行</a:t>
+            </a:r>
+          </a:p>
+        </p:txBody>
+      </p:sp>
+      <p:sp>
+        <p:nvSpPr>
+          <p:cNvPr id="6" name="TextBox 5"/>
+          <p:cNvSpPr txBox="1"/>
+          <p:nvPr/>
+        </p:nvSpPr>
+        <p:spPr>
+          <a:xfrm>
+            <a:off x="1133856" y="1819656"/>
+            <a:ext cx="10241280" cy="411480"/>
+          </a:xfrm>
+          <a:prstGeom prst="rect">
+            <a:avLst/>
+          </a:prstGeom>
+          <a:noFill/>
+        </p:spPr>
+        <p:txBody>
+          <a:bodyPr wrap="square" anchor="t" lIns="0" rIns="0" tIns="0" bIns="0">
+            <a:spAutoFit/>
+          </a:bodyPr>
+          <a:lstStyle/>
+          <a:p>
+            <a:pPr algn="l">
+              <a:spcBef>
+                <a:spcPts val="0"/>
+              </a:spcBef>
+              <a:spcAft>
+                <a:spcPts val="400"/>
+              </a:spcAft>
+            </a:pPr>
+            <a:r>
+              <a:rPr sz="1300" b="0">
+                <a:solidFill>
+                  <a:srgbClr val="E8EDF4"/>
+                </a:solidFill>
+                <a:latin typeface="游ゴシック Medium"/>
+                <a:ea typeface="游ゴシック Medium"/>
+                <a:cs typeface="游ゴシック Medium"/>
+              </a:rPr>
+              <a:t>コマンドを書かずに、複数ステップの作業を計画→実行できる。</a:t>
+            </a:r>
+          </a:p>
+        </p:txBody>
+      </p:sp>
+      <p:sp>
+        <p:nvSpPr>
+          <p:cNvPr id="7" name="Rectangle 6"/>
+          <p:cNvSpPr/>
+          <p:nvPr/>
+        </p:nvSpPr>
+        <p:spPr>
+          <a:xfrm>
+            <a:off x="813816" y="2309774"/>
+            <a:ext cx="137160" cy="137160"/>
+          </a:xfrm>
+          <a:prstGeom prst="rect">
+            <a:avLst/>
+          </a:prstGeom>
+          <a:solidFill>
+            <a:srgbClr val="8FB9EC"/>
+          </a:solidFill>
+          <a:ln>
+            <a:noFill/>
+          </a:ln>
+          <a:effectLst/>
+        </p:spPr>
+        <p:style>
+          <a:lnRef idx="1">
+            <a:schemeClr val="accent1"/>
+          </a:lnRef>
+          <a:fillRef idx="3">
+            <a:schemeClr val="accent1"/>
+          </a:fillRef>
+          <a:effectRef idx="2">
+            <a:schemeClr val="accent1"/>
+          </a:effectRef>
+          <a:fontRef idx="minor">
+            <a:schemeClr val="lt1"/>
+          </a:fontRef>
+        </p:style>
+        <p:txBody>
+          <a:bodyPr rtlCol="0" anchor="ctr"/>
+          <a:lstStyle/>
+          <a:p>
+            <a:pPr algn="ctr"/>
+          </a:p>
+        </p:txBody>
+      </p:sp>
+      <p:sp>
+        <p:nvSpPr>
+          <p:cNvPr id="8" name="TextBox 7"/>
+          <p:cNvSpPr txBox="1"/>
+          <p:nvPr/>
+        </p:nvSpPr>
+        <p:spPr>
+          <a:xfrm>
+            <a:off x="1133856" y="2227478"/>
+            <a:ext cx="10241280" cy="365760"/>
+          </a:xfrm>
+          <a:prstGeom prst="rect">
+            <a:avLst/>
+          </a:prstGeom>
+          <a:noFill/>
+        </p:spPr>
+        <p:txBody>
+          <a:bodyPr wrap="square" anchor="t" lIns="0" rIns="0" tIns="0" bIns="0">
+            <a:spAutoFit/>
+          </a:bodyPr>
+          <a:lstStyle/>
+          <a:p>
+            <a:pPr algn="l">
+              <a:spcBef>
+                <a:spcPts val="0"/>
+              </a:spcBef>
+              <a:spcAft>
+                <a:spcPts val="400"/>
+              </a:spcAft>
+            </a:pPr>
+            <a:r>
+              <a:rPr sz="1600" b="1">
+                <a:solidFill>
+                  <a:srgbClr val="FFFFFF"/>
+                </a:solidFill>
+                <a:latin typeface="游ゴシック Medium"/>
+                <a:ea typeface="游ゴシック Medium"/>
+                <a:cs typeface="游ゴシック Medium"/>
+              </a:rPr>
+              <a:t>ローカルのファイルを直接扱う</a:t>
+            </a:r>
+          </a:p>
+        </p:txBody>
+      </p:sp>
+      <p:sp>
+        <p:nvSpPr>
+          <p:cNvPr id="9" name="TextBox 8"/>
+          <p:cNvSpPr txBox="1"/>
+          <p:nvPr/>
+        </p:nvSpPr>
+        <p:spPr>
+          <a:xfrm>
+            <a:off x="1133856" y="2602382"/>
+            <a:ext cx="10241280" cy="411480"/>
+          </a:xfrm>
+          <a:prstGeom prst="rect">
+            <a:avLst/>
+          </a:prstGeom>
+          <a:noFill/>
+        </p:spPr>
+        <p:txBody>
+          <a:bodyPr wrap="square" anchor="t" lIns="0" rIns="0" tIns="0" bIns="0">
+            <a:spAutoFit/>
+          </a:bodyPr>
+          <a:lstStyle/>
+          <a:p>
+            <a:pPr algn="l">
+              <a:spcBef>
+                <a:spcPts val="0"/>
+              </a:spcBef>
+              <a:spcAft>
+                <a:spcPts val="400"/>
+              </a:spcAft>
+            </a:pPr>
+            <a:r>
+              <a:rPr sz="1300" b="0">
+                <a:solidFill>
+                  <a:srgbClr val="E8EDF4"/>
+                </a:solidFill>
+                <a:latin typeface="游ゴシック Medium"/>
+                <a:ea typeface="游ゴシック Medium"/>
+                <a:cs typeface="游ゴシック Medium"/>
+              </a:rPr>
+              <a:t>選んだフォルダのファイルを、アップロードなしで読み書き・新規作成。</a:t>
+            </a:r>
+          </a:p>
+        </p:txBody>
+      </p:sp>
+      <p:sp>
+        <p:nvSpPr>
+          <p:cNvPr id="10" name="Rectangle 9"/>
+          <p:cNvSpPr/>
+          <p:nvPr/>
+        </p:nvSpPr>
+        <p:spPr>
+          <a:xfrm>
+            <a:off x="813816" y="3092500"/>
+            <a:ext cx="137160" cy="137160"/>
+          </a:xfrm>
+          <a:prstGeom prst="rect">
+            <a:avLst/>
+          </a:prstGeom>
+          <a:solidFill>
+            <a:srgbClr val="8FB9EC"/>
+          </a:solidFill>
+          <a:ln>
+            <a:noFill/>
+          </a:ln>
+          <a:effectLst/>
+        </p:spPr>
+        <p:style>
+          <a:lnRef idx="1">
+            <a:schemeClr val="accent1"/>
+          </a:lnRef>
+          <a:fillRef idx="3">
+            <a:schemeClr val="accent1"/>
+          </a:fillRef>
+          <a:effectRef idx="2">
+            <a:schemeClr val="accent1"/>
+          </a:effectRef>
+          <a:fontRef idx="minor">
+            <a:schemeClr val="lt1"/>
+          </a:fontRef>
+        </p:style>
+        <p:txBody>
+          <a:bodyPr rtlCol="0" anchor="ctr"/>
+          <a:lstStyle/>
+          <a:p>
+            <a:pPr algn="ctr"/>
+          </a:p>
+        </p:txBody>
+      </p:sp>
+      <p:sp>
+        <p:nvSpPr>
+          <p:cNvPr id="11" name="TextBox 10"/>
+          <p:cNvSpPr txBox="1"/>
+          <p:nvPr/>
+        </p:nvSpPr>
+        <p:spPr>
+          <a:xfrm>
+            <a:off x="1133856" y="3010204"/>
+            <a:ext cx="10241280" cy="365760"/>
+          </a:xfrm>
+          <a:prstGeom prst="rect">
+            <a:avLst/>
+          </a:prstGeom>
+          <a:noFill/>
+        </p:spPr>
+        <p:txBody>
+          <a:bodyPr wrap="square" anchor="t" lIns="0" rIns="0" tIns="0" bIns="0">
+            <a:spAutoFit/>
+          </a:bodyPr>
+          <a:lstStyle/>
+          <a:p>
+            <a:pPr algn="l">
+              <a:spcBef>
+                <a:spcPts val="0"/>
+              </a:spcBef>
+              <a:spcAft>
+                <a:spcPts val="400"/>
+              </a:spcAft>
+            </a:pPr>
+            <a:r>
+              <a:rPr sz="1600" b="1">
+                <a:solidFill>
+                  <a:srgbClr val="FFFFFF"/>
+                </a:solidFill>
+                <a:latin typeface="游ゴシック Medium"/>
+                <a:ea typeface="游ゴシック Medium"/>
+                <a:cs typeface="游ゴシック Medium"/>
+              </a:rPr>
+              <a:t>Web・外部ツール・コードまで</a:t>
+            </a:r>
+          </a:p>
+        </p:txBody>
+      </p:sp>
+      <p:sp>
+        <p:nvSpPr>
+          <p:cNvPr id="12" name="TextBox 11"/>
+          <p:cNvSpPr txBox="1"/>
+          <p:nvPr/>
+        </p:nvSpPr>
+        <p:spPr>
+          <a:xfrm>
+            <a:off x="1133856" y="3385108"/>
+            <a:ext cx="10241280" cy="411480"/>
+          </a:xfrm>
+          <a:prstGeom prst="rect">
+            <a:avLst/>
+          </a:prstGeom>
+          <a:noFill/>
+        </p:spPr>
+        <p:txBody>
+          <a:bodyPr wrap="square" anchor="t" lIns="0" rIns="0" tIns="0" bIns="0">
+            <a:spAutoFit/>
+          </a:bodyPr>
+          <a:lstStyle/>
+          <a:p>
+            <a:pPr algn="l">
+              <a:spcBef>
+                <a:spcPts val="0"/>
+              </a:spcBef>
+              <a:spcAft>
+                <a:spcPts val="400"/>
+              </a:spcAft>
+            </a:pPr>
+            <a:r>
+              <a:rPr sz="1300" b="0">
+                <a:solidFill>
+                  <a:srgbClr val="E8EDF4"/>
+                </a:solidFill>
+                <a:latin typeface="游ゴシック Medium"/>
+                <a:ea typeface="游ゴシック Medium"/>
+                <a:cs typeface="游ゴシック Medium"/>
+              </a:rPr>
+              <a:t>Web参照、外部ツール連携(MCP)、コード実行まで任せられる。</a:t>
+            </a:r>
+          </a:p>
+        </p:txBody>
+      </p:sp>
+      <p:sp>
+        <p:nvSpPr>
+          <p:cNvPr id="13" name="Rectangle 12"/>
+          <p:cNvSpPr/>
+          <p:nvPr/>
+        </p:nvSpPr>
+        <p:spPr>
+          <a:xfrm>
+            <a:off x="813816" y="3875227"/>
+            <a:ext cx="137160" cy="137160"/>
+          </a:xfrm>
+          <a:prstGeom prst="rect">
+            <a:avLst/>
+          </a:prstGeom>
+          <a:solidFill>
+            <a:srgbClr val="8FB9EC"/>
+          </a:solidFill>
+          <a:ln>
+            <a:noFill/>
+          </a:ln>
+          <a:effectLst/>
+        </p:spPr>
+        <p:style>
+          <a:lnRef idx="1">
+            <a:schemeClr val="accent1"/>
+          </a:lnRef>
+          <a:fillRef idx="3">
+            <a:schemeClr val="accent1"/>
+          </a:fillRef>
+          <a:effectRef idx="2">
+            <a:schemeClr val="accent1"/>
+          </a:effectRef>
+          <a:fontRef idx="minor">
+            <a:schemeClr val="lt1"/>
+          </a:fontRef>
+        </p:style>
+        <p:txBody>
+          <a:bodyPr rtlCol="0" anchor="ctr"/>
+          <a:lstStyle/>
+          <a:p>
+            <a:pPr algn="ctr"/>
+          </a:p>
+        </p:txBody>
+      </p:sp>
+      <p:sp>
+        <p:nvSpPr>
+          <p:cNvPr id="14" name="TextBox 13"/>
+          <p:cNvSpPr txBox="1"/>
+          <p:nvPr/>
+        </p:nvSpPr>
+        <p:spPr>
+          <a:xfrm>
+            <a:off x="1133856" y="3792931"/>
+            <a:ext cx="10241280" cy="365760"/>
+          </a:xfrm>
+          <a:prstGeom prst="rect">
+            <a:avLst/>
+          </a:prstGeom>
+          <a:noFill/>
+        </p:spPr>
+        <p:txBody>
+          <a:bodyPr wrap="square" anchor="t" lIns="0" rIns="0" tIns="0" bIns="0">
+            <a:spAutoFit/>
+          </a:bodyPr>
+          <a:lstStyle/>
+          <a:p>
+            <a:pPr algn="l">
+              <a:spcBef>
+                <a:spcPts val="0"/>
+              </a:spcBef>
+              <a:spcAft>
+                <a:spcPts val="400"/>
+              </a:spcAft>
+            </a:pPr>
+            <a:r>
+              <a:rPr sz="1600" b="1">
+                <a:solidFill>
+                  <a:srgbClr val="FFFFFF"/>
+                </a:solidFill>
+                <a:latin typeface="游ゴシック Medium"/>
+                <a:ea typeface="游ゴシック Medium"/>
+                <a:cs typeface="游ゴシック Medium"/>
+              </a:rPr>
+              <a:t>多様な成果物を生成</a:t>
+            </a:r>
+          </a:p>
+        </p:txBody>
+      </p:sp>
+      <p:sp>
+        <p:nvSpPr>
+          <p:cNvPr id="15" name="TextBox 14"/>
+          <p:cNvSpPr txBox="1"/>
+          <p:nvPr/>
+        </p:nvSpPr>
+        <p:spPr>
+          <a:xfrm>
+            <a:off x="1133856" y="4167835"/>
+            <a:ext cx="10241280" cy="411480"/>
+          </a:xfrm>
+          <a:prstGeom prst="rect">
+            <a:avLst/>
+          </a:prstGeom>
+          <a:noFill/>
+        </p:spPr>
+        <p:txBody>
+          <a:bodyPr wrap="square" anchor="t" lIns="0" rIns="0" tIns="0" bIns="0">
+            <a:spAutoFit/>
+          </a:bodyPr>
+          <a:lstStyle/>
+          <a:p>
+            <a:pPr algn="l">
+              <a:spcBef>
+                <a:spcPts val="0"/>
+              </a:spcBef>
+              <a:spcAft>
+                <a:spcPts val="400"/>
+              </a:spcAft>
+            </a:pPr>
+            <a:r>
+              <a:rPr sz="1300" b="0">
+                <a:solidFill>
+                  <a:srgbClr val="E8EDF4"/>
+                </a:solidFill>
+                <a:latin typeface="游ゴシック Medium"/>
+                <a:ea typeface="游ゴシック Medium"/>
+                <a:cs typeface="游ゴシック Medium"/>
+              </a:rPr>
+              <a:t>文書・スライド・表・レポートに加え、独自ツールやダッシュボードも。</a:t>
+            </a:r>
+          </a:p>
+        </p:txBody>
+      </p:sp>
+      <p:sp>
+        <p:nvSpPr>
+          <p:cNvPr id="16" name="Rectangle 15"/>
+          <p:cNvSpPr/>
+          <p:nvPr/>
+        </p:nvSpPr>
+        <p:spPr>
+          <a:xfrm>
+            <a:off x="813816" y="4657953"/>
+            <a:ext cx="137160" cy="137160"/>
+          </a:xfrm>
+          <a:prstGeom prst="rect">
+            <a:avLst/>
+          </a:prstGeom>
+          <a:solidFill>
+            <a:srgbClr val="8FB9EC"/>
+          </a:solidFill>
+          <a:ln>
+            <a:noFill/>
+          </a:ln>
+          <a:effectLst/>
+        </p:spPr>
+        <p:style>
+          <a:lnRef idx="1">
+            <a:schemeClr val="accent1"/>
+          </a:lnRef>
+          <a:fillRef idx="3">
+            <a:schemeClr val="accent1"/>
+          </a:fillRef>
+          <a:effectRef idx="2">
+            <a:schemeClr val="accent1"/>
+          </a:effectRef>
+          <a:fontRef idx="minor">
+            <a:schemeClr val="lt1"/>
+          </a:fontRef>
+        </p:style>
+        <p:txBody>
+          <a:bodyPr rtlCol="0" anchor="ctr"/>
+          <a:lstStyle/>
+          <a:p>
+            <a:pPr algn="ctr"/>
+          </a:p>
+        </p:txBody>
+      </p:sp>
+      <p:sp>
+        <p:nvSpPr>
+          <p:cNvPr id="17" name="TextBox 16"/>
+          <p:cNvSpPr txBox="1"/>
+          <p:nvPr/>
+        </p:nvSpPr>
+        <p:spPr>
+          <a:xfrm>
+            <a:off x="1133856" y="4575657"/>
+            <a:ext cx="10241280" cy="365760"/>
+          </a:xfrm>
+          <a:prstGeom prst="rect">
+            <a:avLst/>
+          </a:prstGeom>
+          <a:noFill/>
+        </p:spPr>
+        <p:txBody>
+          <a:bodyPr wrap="square" anchor="t" lIns="0" rIns="0" tIns="0" bIns="0">
+            <a:spAutoFit/>
+          </a:bodyPr>
+          <a:lstStyle/>
+          <a:p>
+            <a:pPr algn="l">
+              <a:spcBef>
+                <a:spcPts val="0"/>
+              </a:spcBef>
+              <a:spcAft>
+                <a:spcPts val="400"/>
+              </a:spcAft>
+            </a:pPr>
+            <a:r>
+              <a:rPr sz="1600" b="1">
+                <a:solidFill>
+                  <a:srgbClr val="FFFFFF"/>
+                </a:solidFill>
+                <a:latin typeface="游ゴシック Medium"/>
+                <a:ea typeface="游ゴシック Medium"/>
+                <a:cs typeface="游ゴシック Medium"/>
+              </a:rPr>
+              <a:t>定期実行で自動化</a:t>
+            </a:r>
+          </a:p>
+        </p:txBody>
+      </p:sp>
+      <p:sp>
+        <p:nvSpPr>
+          <p:cNvPr id="18" name="TextBox 17"/>
+          <p:cNvSpPr txBox="1"/>
+          <p:nvPr/>
+        </p:nvSpPr>
+        <p:spPr>
+          <a:xfrm>
+            <a:off x="1133856" y="4950561"/>
+            <a:ext cx="10241280" cy="411480"/>
+          </a:xfrm>
+          <a:prstGeom prst="rect">
+            <a:avLst/>
+          </a:prstGeom>
+          <a:noFill/>
+        </p:spPr>
+        <p:txBody>
+          <a:bodyPr wrap="square" anchor="t" lIns="0" rIns="0" tIns="0" bIns="0">
+            <a:spAutoFit/>
+          </a:bodyPr>
+          <a:lstStyle/>
+          <a:p>
+            <a:pPr algn="l">
+              <a:spcBef>
+                <a:spcPts val="0"/>
+              </a:spcBef>
+              <a:spcAft>
+                <a:spcPts val="400"/>
+              </a:spcAft>
+            </a:pPr>
+            <a:r>
+              <a:rPr sz="1300" b="0">
+                <a:solidFill>
+                  <a:srgbClr val="E8EDF4"/>
+                </a:solidFill>
+                <a:latin typeface="游ゴシック Medium"/>
+                <a:ea typeface="游ゴシック Medium"/>
+                <a:cs typeface="游ゴシック Medium"/>
+              </a:rPr>
+              <a:t>作ったタスクをスケジュール実行し、繰り返し処理を自動化できる。</a:t>
+            </a:r>
+          </a:p>
+        </p:txBody>
+      </p:sp>
+    </p:spTree>
+  </p:cSld>
+  <p:clrMapOvr>
+    <a:masterClrMapping/>
+  </p:clrMapOvr>
+</p:sld>
+</file>
+
 <file path=ppt/slides/slide2.xml><?xml version="1.0" encoding="utf-8"?>
+<p:sld xmlns:a="http://schemas.openxmlformats.org/drawingml/2006/main" xmlns:r="http://schemas.openxmlformats.org/officeDocument/2006/relationships" xmlns:p="http://schemas.openxmlformats.org/presentationml/2006/main">
+  <p:cSld>
+    <p:spTree>
+      <p:nvGrpSpPr>
+        <p:cNvPr id="1" name=""/>
+        <p:cNvGrpSpPr/>
+        <p:nvPr/>
+      </p:nvGrpSpPr>
+      <p:grpSpPr>
+        <a:xfrm>
+          <a:off x="0" y="0"/>
+          <a:ext cx="0" cy="0"/>
+          <a:chOff x="0" y="0"/>
+          <a:chExt cx="0" cy="0"/>
+        </a:xfrm>
+      </p:grpSpPr>
+      <p:sp>
+        <p:nvSpPr>
+          <p:cNvPr id="4" name="タイトル 3">
+            <a:extLst>
+              <a:ext uri="{FF2B5EF4-FFF2-40B4-BE49-F238E27FC236}">
+                <a16:creationId xmlns:a16="http://schemas.microsoft.com/office/drawing/2014/main" id="{097E97DB-B53A-043D-E3F7-908B7EB6F271}"/>
+              </a:ext>
+            </a:extLst>
+          </p:cNvPr>
+          <p:cNvSpPr>
+            <a:spLocks noGrp="1"/>
+          </p:cNvSpPr>
+          <p:nvPr>
+            <p:ph type="title"/>
+          </p:nvPr>
+        </p:nvSpPr>
+        <p:spPr/>
+        <p:txBody>
+          <a:bodyPr/>
+          <a:lstStyle/>
+          <a:p>
+            <a:r>
+              <a:rPr lang="en-US" altLang="ja-JP" dirty="0"/>
+              <a:t>Microsoft 365 Copilot</a:t>
+            </a:r>
+            <a:endParaRPr lang="ja-JP" altLang="en-US"/>
+          </a:p>
+        </p:txBody>
+      </p:sp>
+      <p:pic>
+        <p:nvPicPr>
+          <p:cNvPr id="7" name="図 6">
+            <a:extLst>
+              <a:ext uri="{FF2B5EF4-FFF2-40B4-BE49-F238E27FC236}">
+                <a16:creationId xmlns:a16="http://schemas.microsoft.com/office/drawing/2014/main" id="{430DF768-4277-157F-94FA-EB15D808616A}"/>
+              </a:ext>
+            </a:extLst>
+          </p:cNvPr>
+          <p:cNvPicPr>
+            <a:picLocks noChangeAspect="1"/>
+          </p:cNvPicPr>
+          <p:nvPr/>
+        </p:nvPicPr>
+        <p:blipFill>
+          <a:blip r:embed="rId2">
+            <a:extLst>
+              <a:ext uri="{28A0092B-C50C-407E-A947-70E740481C1C}">
+                <a14:useLocalDpi xmlns:a14="http://schemas.microsoft.com/office/drawing/2010/main" val="0"/>
+              </a:ext>
+            </a:extLst>
+          </a:blip>
+          <a:stretch>
+            <a:fillRect/>
+          </a:stretch>
+        </p:blipFill>
+        <p:spPr>
+          <a:xfrm>
+            <a:off x="2208276" y="1252728"/>
+            <a:ext cx="7772400" cy="5505874"/>
+          </a:xfrm>
+          <a:prstGeom prst="rect">
+            <a:avLst/>
+          </a:prstGeom>
+        </p:spPr>
+      </p:pic>
+      <p:sp>
+        <p:nvSpPr>
+          <p:cNvPr id="8" name="TextBox 2">
+            <a:extLst>
+              <a:ext uri="{FF2B5EF4-FFF2-40B4-BE49-F238E27FC236}">
+                <a16:creationId xmlns:a16="http://schemas.microsoft.com/office/drawing/2014/main" id="{2494084B-435C-753D-B27E-EEC95279D1F1}"/>
+              </a:ext>
+            </a:extLst>
+          </p:cNvPr>
+          <p:cNvSpPr txBox="1"/>
+          <p:nvPr/>
+        </p:nvSpPr>
+        <p:spPr>
+          <a:xfrm>
+            <a:off x="813816" y="1024128"/>
+            <a:ext cx="10561320" cy="200055"/>
+          </a:xfrm>
+          <a:prstGeom prst="rect">
+            <a:avLst/>
+          </a:prstGeom>
+          <a:noFill/>
+        </p:spPr>
+        <p:txBody>
+          <a:bodyPr wrap="square" lIns="0" tIns="0" rIns="0" bIns="0" anchor="t">
+            <a:spAutoFit/>
+          </a:bodyPr>
+          <a:lstStyle/>
+          <a:p>
+            <a:pPr algn="l">
+              <a:spcBef>
+                <a:spcPts val="0"/>
+              </a:spcBef>
+              <a:spcAft>
+                <a:spcPts val="400"/>
+              </a:spcAft>
+            </a:pPr>
+            <a:r>
+              <a:rPr lang="en-US" sz="1300" b="0" dirty="0">
+                <a:solidFill>
+                  <a:srgbClr val="B9C6DA"/>
+                </a:solidFill>
+                <a:latin typeface="游ゴシック Medium"/>
+                <a:ea typeface="游ゴシック Medium"/>
+                <a:cs typeface="游ゴシック Medium"/>
+              </a:rPr>
+              <a:t>Microsoft </a:t>
+            </a:r>
+            <a:r>
+              <a:rPr lang="en-US" sz="1300" b="0" dirty="0" err="1">
+                <a:solidFill>
+                  <a:srgbClr val="B9C6DA"/>
+                </a:solidFill>
+                <a:latin typeface="游ゴシック Medium"/>
+                <a:ea typeface="游ゴシック Medium"/>
+                <a:cs typeface="游ゴシック Medium"/>
+              </a:rPr>
+              <a:t>製品との相性が良く、エクセルやワードの編集がしやすい</a:t>
+            </a:r>
+            <a:r>
+              <a:rPr lang="en-US" sz="1300" b="0" dirty="0">
+                <a:solidFill>
+                  <a:srgbClr val="B9C6DA"/>
+                </a:solidFill>
+                <a:latin typeface="游ゴシック Medium"/>
+                <a:ea typeface="游ゴシック Medium"/>
+                <a:cs typeface="游ゴシック Medium"/>
+              </a:rPr>
+              <a:t>。</a:t>
+            </a:r>
+            <a:endParaRPr sz="1300" b="0" dirty="0">
+              <a:solidFill>
+                <a:srgbClr val="B9C6DA"/>
+              </a:solidFill>
+              <a:latin typeface="游ゴシック Medium"/>
+              <a:ea typeface="游ゴシック Medium"/>
+              <a:cs typeface="游ゴシック Medium"/>
+            </a:endParaRPr>
+          </a:p>
+        </p:txBody>
+      </p:sp>
+    </p:spTree>
+    <p:extLst>
+      <p:ext uri="{BB962C8B-B14F-4D97-AF65-F5344CB8AC3E}">
+        <p14:creationId xmlns:p14="http://schemas.microsoft.com/office/powerpoint/2010/main" val="1660456451"/>
+      </p:ext>
+    </p:extLst>
+  </p:cSld>
+  <p:clrMapOvr>
+    <a:masterClrMapping/>
+  </p:clrMapOvr>
+</p:sld>
+</file>
+
+<file path=ppt/slides/slide3.xml><?xml version="1.0" encoding="utf-8"?>
+<p:sld xmlns:a="http://schemas.openxmlformats.org/drawingml/2006/main" xmlns:r="http://schemas.openxmlformats.org/officeDocument/2006/relationships" xmlns:p="http://schemas.openxmlformats.org/presentationml/2006/main">
+  <p:cSld>
+    <p:spTree>
+      <p:nvGrpSpPr>
+        <p:cNvPr id="1" name=""/>
+        <p:cNvGrpSpPr/>
+        <p:nvPr/>
+      </p:nvGrpSpPr>
+      <p:grpSpPr>
+        <a:xfrm>
+          <a:off x="0" y="0"/>
+          <a:ext cx="0" cy="0"/>
+          <a:chOff x="0" y="0"/>
+          <a:chExt cx="0" cy="0"/>
+        </a:xfrm>
+      </p:grpSpPr>
+      <p:sp>
+        <p:nvSpPr>
+          <p:cNvPr id="4" name="タイトル 3">
+            <a:extLst>
+              <a:ext uri="{FF2B5EF4-FFF2-40B4-BE49-F238E27FC236}">
+                <a16:creationId xmlns:a16="http://schemas.microsoft.com/office/drawing/2014/main" id="{097E97DB-B53A-043D-E3F7-908B7EB6F271}"/>
+              </a:ext>
+            </a:extLst>
+          </p:cNvPr>
+          <p:cNvSpPr>
+            <a:spLocks noGrp="1"/>
+          </p:cNvSpPr>
+          <p:nvPr>
+            <p:ph type="title"/>
+          </p:nvPr>
+        </p:nvSpPr>
+        <p:spPr/>
+        <p:txBody>
+          <a:bodyPr/>
+          <a:lstStyle/>
+          <a:p>
+            <a:r>
+              <a:rPr lang="en-US" altLang="ja-JP" dirty="0"/>
+              <a:t>Claude Cowork</a:t>
+            </a:r>
+            <a:endParaRPr lang="ja-JP" altLang="en-US"/>
+          </a:p>
+        </p:txBody>
+      </p:sp>
+      <p:pic>
+        <p:nvPicPr>
+          <p:cNvPr id="3" name="図 2">
+            <a:extLst>
+              <a:ext uri="{FF2B5EF4-FFF2-40B4-BE49-F238E27FC236}">
+                <a16:creationId xmlns:a16="http://schemas.microsoft.com/office/drawing/2014/main" id="{C5E46195-B4B3-FFB3-4837-D89C5FCD7278}"/>
+              </a:ext>
+            </a:extLst>
+          </p:cNvPr>
+          <p:cNvPicPr>
+            <a:picLocks noChangeAspect="1"/>
+          </p:cNvPicPr>
+          <p:nvPr/>
+        </p:nvPicPr>
+        <p:blipFill>
+          <a:blip r:embed="rId2">
+            <a:extLst>
+              <a:ext uri="{28A0092B-C50C-407E-A947-70E740481C1C}">
+                <a14:useLocalDpi xmlns:a14="http://schemas.microsoft.com/office/drawing/2010/main" val="0"/>
+              </a:ext>
+            </a:extLst>
+          </a:blip>
+          <a:stretch>
+            <a:fillRect/>
+          </a:stretch>
+        </p:blipFill>
+        <p:spPr>
+          <a:xfrm>
+            <a:off x="2209800" y="1430579"/>
+            <a:ext cx="7772400" cy="4606442"/>
+          </a:xfrm>
+          <a:prstGeom prst="rect">
+            <a:avLst/>
+          </a:prstGeom>
+        </p:spPr>
+      </p:pic>
+      <p:sp>
+        <p:nvSpPr>
+          <p:cNvPr id="5" name="TextBox 2">
+            <a:extLst>
+              <a:ext uri="{FF2B5EF4-FFF2-40B4-BE49-F238E27FC236}">
+                <a16:creationId xmlns:a16="http://schemas.microsoft.com/office/drawing/2014/main" id="{5E6C7504-A2BD-274D-D8CC-A1D8B3CA005E}"/>
+              </a:ext>
+            </a:extLst>
+          </p:cNvPr>
+          <p:cNvSpPr txBox="1"/>
+          <p:nvPr/>
+        </p:nvSpPr>
+        <p:spPr>
+          <a:xfrm>
+            <a:off x="813816" y="1024128"/>
+            <a:ext cx="10561320" cy="200055"/>
+          </a:xfrm>
+          <a:prstGeom prst="rect">
+            <a:avLst/>
+          </a:prstGeom>
+          <a:noFill/>
+        </p:spPr>
+        <p:txBody>
+          <a:bodyPr wrap="square" lIns="0" tIns="0" rIns="0" bIns="0" anchor="t">
+            <a:spAutoFit/>
+          </a:bodyPr>
+          <a:lstStyle/>
+          <a:p>
+            <a:pPr algn="l">
+              <a:spcBef>
+                <a:spcPts val="0"/>
+              </a:spcBef>
+              <a:spcAft>
+                <a:spcPts val="400"/>
+              </a:spcAft>
+            </a:pPr>
+            <a:r>
+              <a:rPr lang="en-US" sz="1300" dirty="0" err="1">
+                <a:solidFill>
+                  <a:srgbClr val="B9C6DA"/>
+                </a:solidFill>
+                <a:latin typeface="游ゴシック Medium"/>
+                <a:ea typeface="游ゴシック Medium"/>
+                <a:cs typeface="游ゴシック Medium"/>
+              </a:rPr>
+              <a:t>プロジェクトを作成し、フォルダを指定することで包括的にファイルを扱う</a:t>
+            </a:r>
+            <a:endParaRPr sz="1300" b="0" dirty="0">
+              <a:solidFill>
+                <a:srgbClr val="B9C6DA"/>
+              </a:solidFill>
+              <a:latin typeface="游ゴシック Medium"/>
+              <a:ea typeface="游ゴシック Medium"/>
+              <a:cs typeface="游ゴシック Medium"/>
+            </a:endParaRPr>
+          </a:p>
+        </p:txBody>
+      </p:sp>
+    </p:spTree>
+    <p:extLst>
+      <p:ext uri="{BB962C8B-B14F-4D97-AF65-F5344CB8AC3E}">
+        <p14:creationId xmlns:p14="http://schemas.microsoft.com/office/powerpoint/2010/main" val="719471143"/>
+      </p:ext>
+    </p:extLst>
+  </p:cSld>
+  <p:clrMapOvr>
+    <a:masterClrMapping/>
+  </p:clrMapOvr>
+</p:sld>
+</file>
+
+<file path=ppt/slides/slide4.xml><?xml version="1.0" encoding="utf-8"?>
 <p:sld xmlns:a="http://schemas.openxmlformats.org/drawingml/2006/main" xmlns:r="http://schemas.openxmlformats.org/officeDocument/2006/relationships" xmlns:p="http://schemas.openxmlformats.org/presentationml/2006/main">
   <p:cSld>
     <p:spTree>
@@ -10782,7 +11862,7 @@
 </p:sld>
 </file>
 
-<file path=ppt/slides/slide3.xml><?xml version="1.0" encoding="utf-8"?>
+<file path=ppt/slides/slide5.xml><?xml version="1.0" encoding="utf-8"?>
 <p:sld xmlns:a="http://schemas.openxmlformats.org/drawingml/2006/main" xmlns:r="http://schemas.openxmlformats.org/officeDocument/2006/relationships" xmlns:p="http://schemas.openxmlformats.org/presentationml/2006/main">
   <p:cSld>
     <p:spTree>
@@ -11534,7 +12614,7 @@
 </p:sld>
 </file>
 
-<file path=ppt/slides/slide4.xml><?xml version="1.0" encoding="utf-8"?>
+<file path=ppt/slides/slide6.xml><?xml version="1.0" encoding="utf-8"?>
 <p:sld xmlns:a="http://schemas.openxmlformats.org/drawingml/2006/main" xmlns:r="http://schemas.openxmlformats.org/officeDocument/2006/relationships" xmlns:p="http://schemas.openxmlformats.org/presentationml/2006/main">
   <p:cSld>
     <p:spTree>
@@ -12287,7 +13367,7 @@
 </p:sld>
 </file>
 
-<file path=ppt/slides/slide5.xml><?xml version="1.0" encoding="utf-8"?>
+<file path=ppt/slides/slide7.xml><?xml version="1.0" encoding="utf-8"?>
 <p:sld xmlns:a="http://schemas.openxmlformats.org/drawingml/2006/main" xmlns:r="http://schemas.openxmlformats.org/officeDocument/2006/relationships" xmlns:p="http://schemas.openxmlformats.org/presentationml/2006/main">
   <p:cSld>
     <p:spTree>
@@ -13199,7 +14279,7 @@
 </p:sld>
 </file>
 
-<file path=ppt/slides/slide6.xml><?xml version="1.0" encoding="utf-8"?>
+<file path=ppt/slides/slide8.xml><?xml version="1.0" encoding="utf-8"?>
 <p:sld xmlns:a="http://schemas.openxmlformats.org/drawingml/2006/main" xmlns:r="http://schemas.openxmlformats.org/officeDocument/2006/relationships" xmlns:p="http://schemas.openxmlformats.org/presentationml/2006/main">
   <p:cSld>
     <p:spTree>
@@ -13623,6 +14703,754 @@
                 <a:cs typeface="游ゴシック Medium"/>
               </a:rPr>
               <a:t>「Cowork」は両社が使う名称です。CopilotもClaudeを利用でき、モデルの違いより「どこに根ざすか」で選びます。</a:t>
+            </a:r>
+          </a:p>
+        </p:txBody>
+      </p:sp>
+    </p:spTree>
+  </p:cSld>
+  <p:clrMapOvr>
+    <a:masterClrMapping/>
+  </p:clrMapOvr>
+</p:sld>
+</file>
+
+<file path=ppt/slides/slide9.xml><?xml version="1.0" encoding="utf-8"?>
+<p:sld xmlns:a="http://schemas.openxmlformats.org/drawingml/2006/main" xmlns:p="http://schemas.openxmlformats.org/presentationml/2006/main" xmlns:r="http://schemas.openxmlformats.org/officeDocument/2006/relationships">
+  <p:cSld>
+    <p:spTree>
+      <p:nvGrpSpPr>
+        <p:cNvPr id="1" name=""/>
+        <p:cNvGrpSpPr/>
+        <p:nvPr/>
+      </p:nvGrpSpPr>
+      <p:grpSpPr/>
+      <p:sp>
+        <p:nvSpPr>
+          <p:cNvPr id="2" name="Title 1"/>
+          <p:cNvSpPr>
+            <a:spLocks noGrp="1"/>
+          </p:cNvSpPr>
+          <p:nvPr>
+            <p:ph type="title"/>
+          </p:nvPr>
+        </p:nvSpPr>
+        <p:spPr/>
+        <p:txBody>
+          <a:bodyPr/>
+          <a:lstStyle/>
+          <a:p>
+            <a:r>
+              <a:rPr>
+                <a:latin typeface="游ゴシック Medium"/>
+                <a:ea typeface="游ゴシック Medium"/>
+                <a:cs typeface="游ゴシック Medium"/>
+              </a:rPr>
+              <a:t>Microsoft 365 Copilot でできること</a:t>
+            </a:r>
+          </a:p>
+        </p:txBody>
+      </p:sp>
+      <p:sp>
+        <p:nvSpPr>
+          <p:cNvPr id="3" name="TextBox 2"/>
+          <p:cNvSpPr txBox="1"/>
+          <p:nvPr/>
+        </p:nvSpPr>
+        <p:spPr>
+          <a:xfrm>
+            <a:off x="813816" y="1024128"/>
+            <a:ext cx="10561320" cy="457200"/>
+          </a:xfrm>
+          <a:prstGeom prst="rect">
+            <a:avLst/>
+          </a:prstGeom>
+          <a:noFill/>
+        </p:spPr>
+        <p:txBody>
+          <a:bodyPr wrap="square" anchor="t" lIns="0" rIns="0" tIns="0" bIns="0">
+            <a:spAutoFit/>
+          </a:bodyPr>
+          <a:lstStyle/>
+          <a:p>
+            <a:pPr algn="l">
+              <a:spcBef>
+                <a:spcPts val="0"/>
+              </a:spcBef>
+              <a:spcAft>
+                <a:spcPts val="400"/>
+              </a:spcAft>
+            </a:pPr>
+            <a:r>
+              <a:rPr sz="1300" b="0">
+                <a:solidFill>
+                  <a:srgbClr val="B9C6DA"/>
+                </a:solidFill>
+                <a:latin typeface="游ゴシック Medium"/>
+                <a:ea typeface="游ゴシック Medium"/>
+                <a:cs typeface="游ゴシック Medium"/>
+              </a:rPr>
+              <a:t>使い慣れた Microsoft 製品の中で、自社データを使って日常業務を支援します。</a:t>
+            </a:r>
+          </a:p>
+        </p:txBody>
+      </p:sp>
+      <p:sp>
+        <p:nvSpPr>
+          <p:cNvPr id="4" name="Rectangle 3"/>
+          <p:cNvSpPr/>
+          <p:nvPr/>
+        </p:nvSpPr>
+        <p:spPr>
+          <a:xfrm>
+            <a:off x="813816" y="1527048"/>
+            <a:ext cx="137160" cy="137160"/>
+          </a:xfrm>
+          <a:prstGeom prst="rect">
+            <a:avLst/>
+          </a:prstGeom>
+          <a:solidFill>
+            <a:srgbClr val="8FB9EC"/>
+          </a:solidFill>
+          <a:ln>
+            <a:noFill/>
+          </a:ln>
+          <a:effectLst/>
+        </p:spPr>
+        <p:style>
+          <a:lnRef idx="1">
+            <a:schemeClr val="accent1"/>
+          </a:lnRef>
+          <a:fillRef idx="3">
+            <a:schemeClr val="accent1"/>
+          </a:fillRef>
+          <a:effectRef idx="2">
+            <a:schemeClr val="accent1"/>
+          </a:effectRef>
+          <a:fontRef idx="minor">
+            <a:schemeClr val="lt1"/>
+          </a:fontRef>
+        </p:style>
+        <p:txBody>
+          <a:bodyPr rtlCol="0" anchor="ctr"/>
+          <a:lstStyle/>
+          <a:p>
+            <a:pPr algn="ctr"/>
+          </a:p>
+        </p:txBody>
+      </p:sp>
+      <p:sp>
+        <p:nvSpPr>
+          <p:cNvPr id="5" name="TextBox 4"/>
+          <p:cNvSpPr txBox="1"/>
+          <p:nvPr/>
+        </p:nvSpPr>
+        <p:spPr>
+          <a:xfrm>
+            <a:off x="1133856" y="1444752"/>
+            <a:ext cx="10241280" cy="365760"/>
+          </a:xfrm>
+          <a:prstGeom prst="rect">
+            <a:avLst/>
+          </a:prstGeom>
+          <a:noFill/>
+        </p:spPr>
+        <p:txBody>
+          <a:bodyPr wrap="square" anchor="t" lIns="0" rIns="0" tIns="0" bIns="0">
+            <a:spAutoFit/>
+          </a:bodyPr>
+          <a:lstStyle/>
+          <a:p>
+            <a:pPr algn="l">
+              <a:spcBef>
+                <a:spcPts val="0"/>
+              </a:spcBef>
+              <a:spcAft>
+                <a:spcPts val="400"/>
+              </a:spcAft>
+            </a:pPr>
+            <a:r>
+              <a:rPr sz="1600" b="1">
+                <a:solidFill>
+                  <a:srgbClr val="FFFFFF"/>
+                </a:solidFill>
+                <a:latin typeface="游ゴシック Medium"/>
+                <a:ea typeface="游ゴシック Medium"/>
+                <a:cs typeface="游ゴシック Medium"/>
+              </a:rPr>
+              <a:t>Officeアプリの中で使える</a:t>
+            </a:r>
+          </a:p>
+        </p:txBody>
+      </p:sp>
+      <p:sp>
+        <p:nvSpPr>
+          <p:cNvPr id="6" name="TextBox 5"/>
+          <p:cNvSpPr txBox="1"/>
+          <p:nvPr/>
+        </p:nvSpPr>
+        <p:spPr>
+          <a:xfrm>
+            <a:off x="1133856" y="1819656"/>
+            <a:ext cx="10241280" cy="411480"/>
+          </a:xfrm>
+          <a:prstGeom prst="rect">
+            <a:avLst/>
+          </a:prstGeom>
+          <a:noFill/>
+        </p:spPr>
+        <p:txBody>
+          <a:bodyPr wrap="square" anchor="t" lIns="0" rIns="0" tIns="0" bIns="0">
+            <a:spAutoFit/>
+          </a:bodyPr>
+          <a:lstStyle/>
+          <a:p>
+            <a:pPr algn="l">
+              <a:spcBef>
+                <a:spcPts val="0"/>
+              </a:spcBef>
+              <a:spcAft>
+                <a:spcPts val="400"/>
+              </a:spcAft>
+            </a:pPr>
+            <a:r>
+              <a:rPr sz="1300" b="0">
+                <a:solidFill>
+                  <a:srgbClr val="E8EDF4"/>
+                </a:solidFill>
+                <a:latin typeface="游ゴシック Medium"/>
+                <a:ea typeface="游ゴシック Medium"/>
+                <a:cs typeface="游ゴシック Medium"/>
+              </a:rPr>
+              <a:t>Word・Excel・PowerPoint・Outlook・Teams から直接呼び出せる。</a:t>
+            </a:r>
+          </a:p>
+        </p:txBody>
+      </p:sp>
+      <p:sp>
+        <p:nvSpPr>
+          <p:cNvPr id="7" name="Rectangle 6"/>
+          <p:cNvSpPr/>
+          <p:nvPr/>
+        </p:nvSpPr>
+        <p:spPr>
+          <a:xfrm>
+            <a:off x="813816" y="2309774"/>
+            <a:ext cx="137160" cy="137160"/>
+          </a:xfrm>
+          <a:prstGeom prst="rect">
+            <a:avLst/>
+          </a:prstGeom>
+          <a:solidFill>
+            <a:srgbClr val="8FB9EC"/>
+          </a:solidFill>
+          <a:ln>
+            <a:noFill/>
+          </a:ln>
+          <a:effectLst/>
+        </p:spPr>
+        <p:style>
+          <a:lnRef idx="1">
+            <a:schemeClr val="accent1"/>
+          </a:lnRef>
+          <a:fillRef idx="3">
+            <a:schemeClr val="accent1"/>
+          </a:fillRef>
+          <a:effectRef idx="2">
+            <a:schemeClr val="accent1"/>
+          </a:effectRef>
+          <a:fontRef idx="minor">
+            <a:schemeClr val="lt1"/>
+          </a:fontRef>
+        </p:style>
+        <p:txBody>
+          <a:bodyPr rtlCol="0" anchor="ctr"/>
+          <a:lstStyle/>
+          <a:p>
+            <a:pPr algn="ctr"/>
+          </a:p>
+        </p:txBody>
+      </p:sp>
+      <p:sp>
+        <p:nvSpPr>
+          <p:cNvPr id="8" name="TextBox 7"/>
+          <p:cNvSpPr txBox="1"/>
+          <p:nvPr/>
+        </p:nvSpPr>
+        <p:spPr>
+          <a:xfrm>
+            <a:off x="1133856" y="2227478"/>
+            <a:ext cx="10241280" cy="365760"/>
+          </a:xfrm>
+          <a:prstGeom prst="rect">
+            <a:avLst/>
+          </a:prstGeom>
+          <a:noFill/>
+        </p:spPr>
+        <p:txBody>
+          <a:bodyPr wrap="square" anchor="t" lIns="0" rIns="0" tIns="0" bIns="0">
+            <a:spAutoFit/>
+          </a:bodyPr>
+          <a:lstStyle/>
+          <a:p>
+            <a:pPr algn="l">
+              <a:spcBef>
+                <a:spcPts val="0"/>
+              </a:spcBef>
+              <a:spcAft>
+                <a:spcPts val="400"/>
+              </a:spcAft>
+            </a:pPr>
+            <a:r>
+              <a:rPr sz="1600" b="1">
+                <a:solidFill>
+                  <a:srgbClr val="FFFFFF"/>
+                </a:solidFill>
+                <a:latin typeface="游ゴシック Medium"/>
+                <a:ea typeface="游ゴシック Medium"/>
+                <a:cs typeface="游ゴシック Medium"/>
+              </a:rPr>
+              <a:t>自社データを自動で活用</a:t>
+            </a:r>
+          </a:p>
+        </p:txBody>
+      </p:sp>
+      <p:sp>
+        <p:nvSpPr>
+          <p:cNvPr id="9" name="TextBox 8"/>
+          <p:cNvSpPr txBox="1"/>
+          <p:nvPr/>
+        </p:nvSpPr>
+        <p:spPr>
+          <a:xfrm>
+            <a:off x="1133856" y="2602382"/>
+            <a:ext cx="10241280" cy="411480"/>
+          </a:xfrm>
+          <a:prstGeom prst="rect">
+            <a:avLst/>
+          </a:prstGeom>
+          <a:noFill/>
+        </p:spPr>
+        <p:txBody>
+          <a:bodyPr wrap="square" anchor="t" lIns="0" rIns="0" tIns="0" bIns="0">
+            <a:spAutoFit/>
+          </a:bodyPr>
+          <a:lstStyle/>
+          <a:p>
+            <a:pPr algn="l">
+              <a:spcBef>
+                <a:spcPts val="0"/>
+              </a:spcBef>
+              <a:spcAft>
+                <a:spcPts val="400"/>
+              </a:spcAft>
+            </a:pPr>
+            <a:r>
+              <a:rPr sz="1300" b="0">
+                <a:solidFill>
+                  <a:srgbClr val="E8EDF4"/>
+                </a:solidFill>
+                <a:latin typeface="游ゴシック Medium"/>
+                <a:ea typeface="游ゴシック Medium"/>
+                <a:cs typeface="游ゴシック Medium"/>
+              </a:rPr>
+              <a:t>メール・文書・会議・予定を参照して、要約・下書き・分析ができる。</a:t>
+            </a:r>
+          </a:p>
+        </p:txBody>
+      </p:sp>
+      <p:sp>
+        <p:nvSpPr>
+          <p:cNvPr id="10" name="Rectangle 9"/>
+          <p:cNvSpPr/>
+          <p:nvPr/>
+        </p:nvSpPr>
+        <p:spPr>
+          <a:xfrm>
+            <a:off x="813816" y="3092500"/>
+            <a:ext cx="137160" cy="137160"/>
+          </a:xfrm>
+          <a:prstGeom prst="rect">
+            <a:avLst/>
+          </a:prstGeom>
+          <a:solidFill>
+            <a:srgbClr val="8FB9EC"/>
+          </a:solidFill>
+          <a:ln>
+            <a:noFill/>
+          </a:ln>
+          <a:effectLst/>
+        </p:spPr>
+        <p:style>
+          <a:lnRef idx="1">
+            <a:schemeClr val="accent1"/>
+          </a:lnRef>
+          <a:fillRef idx="3">
+            <a:schemeClr val="accent1"/>
+          </a:fillRef>
+          <a:effectRef idx="2">
+            <a:schemeClr val="accent1"/>
+          </a:effectRef>
+          <a:fontRef idx="minor">
+            <a:schemeClr val="lt1"/>
+          </a:fontRef>
+        </p:style>
+        <p:txBody>
+          <a:bodyPr rtlCol="0" anchor="ctr"/>
+          <a:lstStyle/>
+          <a:p>
+            <a:pPr algn="ctr"/>
+          </a:p>
+        </p:txBody>
+      </p:sp>
+      <p:sp>
+        <p:nvSpPr>
+          <p:cNvPr id="11" name="TextBox 10"/>
+          <p:cNvSpPr txBox="1"/>
+          <p:nvPr/>
+        </p:nvSpPr>
+        <p:spPr>
+          <a:xfrm>
+            <a:off x="1133856" y="3010204"/>
+            <a:ext cx="10241280" cy="365760"/>
+          </a:xfrm>
+          <a:prstGeom prst="rect">
+            <a:avLst/>
+          </a:prstGeom>
+          <a:noFill/>
+        </p:spPr>
+        <p:txBody>
+          <a:bodyPr wrap="square" anchor="t" lIns="0" rIns="0" tIns="0" bIns="0">
+            <a:spAutoFit/>
+          </a:bodyPr>
+          <a:lstStyle/>
+          <a:p>
+            <a:pPr algn="l">
+              <a:spcBef>
+                <a:spcPts val="0"/>
+              </a:spcBef>
+              <a:spcAft>
+                <a:spcPts val="400"/>
+              </a:spcAft>
+            </a:pPr>
+            <a:r>
+              <a:rPr sz="1600" b="1">
+                <a:solidFill>
+                  <a:srgbClr val="FFFFFF"/>
+                </a:solidFill>
+                <a:latin typeface="游ゴシック Medium"/>
+                <a:ea typeface="游ゴシック Medium"/>
+                <a:cs typeface="游ゴシック Medium"/>
+              </a:rPr>
+              <a:t>会議・メールを効率化</a:t>
+            </a:r>
+          </a:p>
+        </p:txBody>
+      </p:sp>
+      <p:sp>
+        <p:nvSpPr>
+          <p:cNvPr id="12" name="TextBox 11"/>
+          <p:cNvSpPr txBox="1"/>
+          <p:nvPr/>
+        </p:nvSpPr>
+        <p:spPr>
+          <a:xfrm>
+            <a:off x="1133856" y="3385108"/>
+            <a:ext cx="10241280" cy="411480"/>
+          </a:xfrm>
+          <a:prstGeom prst="rect">
+            <a:avLst/>
+          </a:prstGeom>
+          <a:noFill/>
+        </p:spPr>
+        <p:txBody>
+          <a:bodyPr wrap="square" anchor="t" lIns="0" rIns="0" tIns="0" bIns="0">
+            <a:spAutoFit/>
+          </a:bodyPr>
+          <a:lstStyle/>
+          <a:p>
+            <a:pPr algn="l">
+              <a:spcBef>
+                <a:spcPts val="0"/>
+              </a:spcBef>
+              <a:spcAft>
+                <a:spcPts val="400"/>
+              </a:spcAft>
+            </a:pPr>
+            <a:r>
+              <a:rPr sz="1300" b="0">
+                <a:solidFill>
+                  <a:srgbClr val="E8EDF4"/>
+                </a:solidFill>
+                <a:latin typeface="游ゴシック Medium"/>
+                <a:ea typeface="游ゴシック Medium"/>
+                <a:cs typeface="游ゴシック Medium"/>
+              </a:rPr>
+              <a:t>Teams会議の要約やアクション抽出、メールの下書き・整理。</a:t>
+            </a:r>
+          </a:p>
+        </p:txBody>
+      </p:sp>
+      <p:sp>
+        <p:nvSpPr>
+          <p:cNvPr id="13" name="Rectangle 12"/>
+          <p:cNvSpPr/>
+          <p:nvPr/>
+        </p:nvSpPr>
+        <p:spPr>
+          <a:xfrm>
+            <a:off x="813816" y="3875227"/>
+            <a:ext cx="137160" cy="137160"/>
+          </a:xfrm>
+          <a:prstGeom prst="rect">
+            <a:avLst/>
+          </a:prstGeom>
+          <a:solidFill>
+            <a:srgbClr val="8FB9EC"/>
+          </a:solidFill>
+          <a:ln>
+            <a:noFill/>
+          </a:ln>
+          <a:effectLst/>
+        </p:spPr>
+        <p:style>
+          <a:lnRef idx="1">
+            <a:schemeClr val="accent1"/>
+          </a:lnRef>
+          <a:fillRef idx="3">
+            <a:schemeClr val="accent1"/>
+          </a:fillRef>
+          <a:effectRef idx="2">
+            <a:schemeClr val="accent1"/>
+          </a:effectRef>
+          <a:fontRef idx="minor">
+            <a:schemeClr val="lt1"/>
+          </a:fontRef>
+        </p:style>
+        <p:txBody>
+          <a:bodyPr rtlCol="0" anchor="ctr"/>
+          <a:lstStyle/>
+          <a:p>
+            <a:pPr algn="ctr"/>
+          </a:p>
+        </p:txBody>
+      </p:sp>
+      <p:sp>
+        <p:nvSpPr>
+          <p:cNvPr id="14" name="TextBox 13"/>
+          <p:cNvSpPr txBox="1"/>
+          <p:nvPr/>
+        </p:nvSpPr>
+        <p:spPr>
+          <a:xfrm>
+            <a:off x="1133856" y="3792931"/>
+            <a:ext cx="10241280" cy="365760"/>
+          </a:xfrm>
+          <a:prstGeom prst="rect">
+            <a:avLst/>
+          </a:prstGeom>
+          <a:noFill/>
+        </p:spPr>
+        <p:txBody>
+          <a:bodyPr wrap="square" anchor="t" lIns="0" rIns="0" tIns="0" bIns="0">
+            <a:spAutoFit/>
+          </a:bodyPr>
+          <a:lstStyle/>
+          <a:p>
+            <a:pPr algn="l">
+              <a:spcBef>
+                <a:spcPts val="0"/>
+              </a:spcBef>
+              <a:spcAft>
+                <a:spcPts val="400"/>
+              </a:spcAft>
+            </a:pPr>
+            <a:r>
+              <a:rPr sz="1600" b="1">
+                <a:solidFill>
+                  <a:srgbClr val="FFFFFF"/>
+                </a:solidFill>
+                <a:latin typeface="游ゴシック Medium"/>
+                <a:ea typeface="游ゴシック Medium"/>
+                <a:cs typeface="游ゴシック Medium"/>
+              </a:rPr>
+              <a:t>資料・データ作成</a:t>
+            </a:r>
+          </a:p>
+        </p:txBody>
+      </p:sp>
+      <p:sp>
+        <p:nvSpPr>
+          <p:cNvPr id="15" name="TextBox 14"/>
+          <p:cNvSpPr txBox="1"/>
+          <p:nvPr/>
+        </p:nvSpPr>
+        <p:spPr>
+          <a:xfrm>
+            <a:off x="1133856" y="4167835"/>
+            <a:ext cx="10241280" cy="411480"/>
+          </a:xfrm>
+          <a:prstGeom prst="rect">
+            <a:avLst/>
+          </a:prstGeom>
+          <a:noFill/>
+        </p:spPr>
+        <p:txBody>
+          <a:bodyPr wrap="square" anchor="t" lIns="0" rIns="0" tIns="0" bIns="0">
+            <a:spAutoFit/>
+          </a:bodyPr>
+          <a:lstStyle/>
+          <a:p>
+            <a:pPr algn="l">
+              <a:spcBef>
+                <a:spcPts val="0"/>
+              </a:spcBef>
+              <a:spcAft>
+                <a:spcPts val="400"/>
+              </a:spcAft>
+            </a:pPr>
+            <a:r>
+              <a:rPr sz="1300" b="0">
+                <a:solidFill>
+                  <a:srgbClr val="E8EDF4"/>
+                </a:solidFill>
+                <a:latin typeface="游ゴシック Medium"/>
+                <a:ea typeface="游ゴシック Medium"/>
+                <a:cs typeface="游ゴシック Medium"/>
+              </a:rPr>
+              <a:t>PowerPointのスライド生成、Excelのデータ分析・数式・グラフ作成。</a:t>
+            </a:r>
+          </a:p>
+        </p:txBody>
+      </p:sp>
+      <p:sp>
+        <p:nvSpPr>
+          <p:cNvPr id="16" name="Rectangle 15"/>
+          <p:cNvSpPr/>
+          <p:nvPr/>
+        </p:nvSpPr>
+        <p:spPr>
+          <a:xfrm>
+            <a:off x="813816" y="4657953"/>
+            <a:ext cx="137160" cy="137160"/>
+          </a:xfrm>
+          <a:prstGeom prst="rect">
+            <a:avLst/>
+          </a:prstGeom>
+          <a:solidFill>
+            <a:srgbClr val="8FB9EC"/>
+          </a:solidFill>
+          <a:ln>
+            <a:noFill/>
+          </a:ln>
+          <a:effectLst/>
+        </p:spPr>
+        <p:style>
+          <a:lnRef idx="1">
+            <a:schemeClr val="accent1"/>
+          </a:lnRef>
+          <a:fillRef idx="3">
+            <a:schemeClr val="accent1"/>
+          </a:fillRef>
+          <a:effectRef idx="2">
+            <a:schemeClr val="accent1"/>
+          </a:effectRef>
+          <a:fontRef idx="minor">
+            <a:schemeClr val="lt1"/>
+          </a:fontRef>
+        </p:style>
+        <p:txBody>
+          <a:bodyPr rtlCol="0" anchor="ctr"/>
+          <a:lstStyle/>
+          <a:p>
+            <a:pPr algn="ctr"/>
+          </a:p>
+        </p:txBody>
+      </p:sp>
+      <p:sp>
+        <p:nvSpPr>
+          <p:cNvPr id="17" name="TextBox 16"/>
+          <p:cNvSpPr txBox="1"/>
+          <p:nvPr/>
+        </p:nvSpPr>
+        <p:spPr>
+          <a:xfrm>
+            <a:off x="1133856" y="4575657"/>
+            <a:ext cx="10241280" cy="365760"/>
+          </a:xfrm>
+          <a:prstGeom prst="rect">
+            <a:avLst/>
+          </a:prstGeom>
+          <a:noFill/>
+        </p:spPr>
+        <p:txBody>
+          <a:bodyPr wrap="square" anchor="t" lIns="0" rIns="0" tIns="0" bIns="0">
+            <a:spAutoFit/>
+          </a:bodyPr>
+          <a:lstStyle/>
+          <a:p>
+            <a:pPr algn="l">
+              <a:spcBef>
+                <a:spcPts val="0"/>
+              </a:spcBef>
+              <a:spcAft>
+                <a:spcPts val="400"/>
+              </a:spcAft>
+            </a:pPr>
+            <a:r>
+              <a:rPr sz="1600" b="1">
+                <a:solidFill>
+                  <a:srgbClr val="FFFFFF"/>
+                </a:solidFill>
+                <a:latin typeface="游ゴシック Medium"/>
+                <a:ea typeface="游ゴシック Medium"/>
+                <a:cs typeface="游ゴシック Medium"/>
+              </a:rPr>
+              <a:t>エージェントで自動化</a:t>
+            </a:r>
+          </a:p>
+        </p:txBody>
+      </p:sp>
+      <p:sp>
+        <p:nvSpPr>
+          <p:cNvPr id="18" name="TextBox 17"/>
+          <p:cNvSpPr txBox="1"/>
+          <p:nvPr/>
+        </p:nvSpPr>
+        <p:spPr>
+          <a:xfrm>
+            <a:off x="1133856" y="4950561"/>
+            <a:ext cx="10241280" cy="411480"/>
+          </a:xfrm>
+          <a:prstGeom prst="rect">
+            <a:avLst/>
+          </a:prstGeom>
+          <a:noFill/>
+        </p:spPr>
+        <p:txBody>
+          <a:bodyPr wrap="square" anchor="t" lIns="0" rIns="0" tIns="0" bIns="0">
+            <a:spAutoFit/>
+          </a:bodyPr>
+          <a:lstStyle/>
+          <a:p>
+            <a:pPr algn="l">
+              <a:spcBef>
+                <a:spcPts val="0"/>
+              </a:spcBef>
+              <a:spcAft>
+                <a:spcPts val="400"/>
+              </a:spcAft>
+            </a:pPr>
+            <a:r>
+              <a:rPr sz="1300" b="0">
+                <a:solidFill>
+                  <a:srgbClr val="E8EDF4"/>
+                </a:solidFill>
+                <a:latin typeface="游ゴシック Medium"/>
+                <a:ea typeface="游ゴシック Medium"/>
+                <a:cs typeface="游ゴシック Medium"/>
+              </a:rPr>
+              <a:t>Copilot Studio で業務プロセス用のエージェントを作成できる。</a:t>
             </a:r>
           </a:p>
         </p:txBody>
@@ -14225,26 +16053,6 @@
 </file>
 
 <file path=customXml/item1.xml><?xml version="1.0" encoding="utf-8"?>
-<p:properties xmlns:p="http://schemas.microsoft.com/office/2006/metadata/properties" xmlns:xsi="http://www.w3.org/2001/XMLSchema-instance" xmlns:pc="http://schemas.microsoft.com/office/infopath/2007/PartnerControls">
-  <documentManagement>
-    <TaxCatchAll xmlns="5d54735c-8563-480c-aa17-13e507c6fcf6" xsi:nil="true"/>
-    <lcf76f155ced4ddcb4097134ff3c332f xmlns="768ecba8-f556-413e-93cf-a669b10e85e2">
-      <Terms xmlns="http://schemas.microsoft.com/office/infopath/2007/PartnerControls"/>
-    </lcf76f155ced4ddcb4097134ff3c332f>
-  </documentManagement>
-</p:properties>
-</file>
-
-<file path=customXml/item2.xml><?xml version="1.0" encoding="utf-8"?>
-<?mso-contentType ?>
-<FormTemplates xmlns="http://schemas.microsoft.com/sharepoint/v3/contenttype/forms">
-  <Display>DocumentLibraryForm</Display>
-  <Edit>DocumentLibraryForm</Edit>
-  <New>DocumentLibraryForm</New>
-</FormTemplates>
-</file>
-
-<file path=customXml/item3.xml><?xml version="1.0" encoding="utf-8"?>
 <ct:contentTypeSchema xmlns:ct="http://schemas.microsoft.com/office/2006/metadata/contentType" xmlns:ma="http://schemas.microsoft.com/office/2006/metadata/properties/metaAttributes" ct:_="" ma:_="" ma:contentTypeName="ドキュメント" ma:contentTypeID="0x010100CAA98F3332D97A45A4456E8DA039AEBC" ma:contentTypeVersion="12" ma:contentTypeDescription="新しいドキュメントを作成します。" ma:contentTypeScope="" ma:versionID="a9dd5d2222e388c7d315e043965fb87e">
   <xsd:schema xmlns:xsd="http://www.w3.org/2001/XMLSchema" xmlns:xs="http://www.w3.org/2001/XMLSchema" xmlns:p="http://schemas.microsoft.com/office/2006/metadata/properties" xmlns:ns2="768ecba8-f556-413e-93cf-a669b10e85e2" xmlns:ns3="5d54735c-8563-480c-aa17-13e507c6fcf6" targetNamespace="http://schemas.microsoft.com/office/2006/metadata/properties" ma:root="true" ma:fieldsID="3be956df6bb9cabc9cd1a95b5e82f7fe" ns2:_="" ns3:_="">
     <xsd:import namespace="768ecba8-f556-413e-93cf-a669b10e85e2"/>
@@ -14445,26 +16253,27 @@
 </ct:contentTypeSchema>
 </file>
 
-<file path=customXml/itemProps1.xml><?xml version="1.0" encoding="utf-8"?>
-<ds:datastoreItem xmlns:ds="http://schemas.openxmlformats.org/officeDocument/2006/customXml" ds:itemID="{3FFB5523-FEB7-4908-9109-C2FCB7452423}">
-  <ds:schemaRefs>
-    <ds:schemaRef ds:uri="http://schemas.microsoft.com/office/2006/metadata/properties"/>
-    <ds:schemaRef ds:uri="http://schemas.microsoft.com/office/infopath/2007/PartnerControls"/>
-    <ds:schemaRef ds:uri="5d54735c-8563-480c-aa17-13e507c6fcf6"/>
-    <ds:schemaRef ds:uri="768ecba8-f556-413e-93cf-a669b10e85e2"/>
-  </ds:schemaRefs>
-</ds:datastoreItem>
+<file path=customXml/item2.xml><?xml version="1.0" encoding="utf-8"?>
+<?mso-contentType ?>
+<FormTemplates xmlns="http://schemas.microsoft.com/sharepoint/v3/contenttype/forms">
+  <Display>DocumentLibraryForm</Display>
+  <Edit>DocumentLibraryForm</Edit>
+  <New>DocumentLibraryForm</New>
+</FormTemplates>
 </file>
 
-<file path=customXml/itemProps2.xml><?xml version="1.0" encoding="utf-8"?>
-<ds:datastoreItem xmlns:ds="http://schemas.openxmlformats.org/officeDocument/2006/customXml" ds:itemID="{458AE83B-8FBF-46E4-95C5-6FC34C176263}">
-  <ds:schemaRefs>
-    <ds:schemaRef ds:uri="http://schemas.microsoft.com/sharepoint/v3/contenttype/forms"/>
-  </ds:schemaRefs>
-</ds:datastoreItem>
+<file path=customXml/item3.xml><?xml version="1.0" encoding="utf-8"?>
+<p:properties xmlns:p="http://schemas.microsoft.com/office/2006/metadata/properties" xmlns:xsi="http://www.w3.org/2001/XMLSchema-instance" xmlns:pc="http://schemas.microsoft.com/office/infopath/2007/PartnerControls">
+  <documentManagement>
+    <TaxCatchAll xmlns="5d54735c-8563-480c-aa17-13e507c6fcf6" xsi:nil="true"/>
+    <lcf76f155ced4ddcb4097134ff3c332f xmlns="768ecba8-f556-413e-93cf-a669b10e85e2">
+      <Terms xmlns="http://schemas.microsoft.com/office/infopath/2007/PartnerControls"/>
+    </lcf76f155ced4ddcb4097134ff3c332f>
+  </documentManagement>
+</p:properties>
 </file>
 
-<file path=customXml/itemProps3.xml><?xml version="1.0" encoding="utf-8"?>
+<file path=customXml/itemProps1.xml><?xml version="1.0" encoding="utf-8"?>
 <ds:datastoreItem xmlns:ds="http://schemas.openxmlformats.org/officeDocument/2006/customXml" ds:itemID="{B1F9275D-B4EB-4C8E-9255-310B2138FDF9}">
   <ds:schemaRefs>
     <ds:schemaRef ds:uri="http://schemas.microsoft.com/office/2006/metadata/contentType"/>
@@ -14481,4 +16290,23 @@
     <ds:schemaRef ds:uri="http://schemas.microsoft.com/internal/obd"/>
   </ds:schemaRefs>
 </ds:datastoreItem>
+</file>
+
+<file path=customXml/itemProps2.xml><?xml version="1.0" encoding="utf-8"?>
+<ds:datastoreItem xmlns:ds="http://schemas.openxmlformats.org/officeDocument/2006/customXml" ds:itemID="{458AE83B-8FBF-46E4-95C5-6FC34C176263}">
+  <ds:schemaRefs>
+    <ds:schemaRef ds:uri="http://schemas.microsoft.com/sharepoint/v3/contenttype/forms"/>
+  </ds:schemaRefs>
+</ds:datastoreItem>
+</file>
+
+<file path=customXml/itemProps3.xml><?xml version="1.0" encoding="utf-8"?>
+<ds:datastoreItem xmlns:ds="http://schemas.openxmlformats.org/officeDocument/2006/customXml" ds:itemID="{3FFB5523-FEB7-4908-9109-C2FCB7452423}">
+  <ds:schemaRefs>
+    <ds:schemaRef ds:uri="http://schemas.microsoft.com/office/2006/metadata/properties"/>
+    <ds:schemaRef ds:uri="http://schemas.microsoft.com/office/infopath/2007/PartnerControls"/>
+    <ds:schemaRef ds:uri="5d54735c-8563-480c-aa17-13e507c6fcf6"/>
+    <ds:schemaRef ds:uri="768ecba8-f556-413e-93cf-a669b10e85e2"/>
+  </ds:schemaRefs>
+</ds:datastoreItem>
 </file>
--- a/配布/Copilot_Cowork_競合比較.pptx
+++ b/配布/Copilot_Cowork_競合比較.pptx
@@ -5,19 +5,21 @@
     <p:sldMasterId id="2147483705" r:id="rId4"/>
   </p:sldMasterIdLst>
   <p:notesMasterIdLst>
-    <p:notesMasterId r:id="rId13"/>
+    <p:notesMasterId r:id="rId16"/>
   </p:notesMasterIdLst>
   <p:sldIdLst>
     <p:sldId id="256" r:id="rId5"/>
     <p:sldId id="262" r:id="rId6"/>
-    <p:sldId id="264" r:id="rId19"/>
-    <p:sldId id="263" r:id="rId7"/>
-    <p:sldId id="265" r:id="rId20"/>
-    <p:sldId id="257" r:id="rId8"/>
-    <p:sldId id="258" r:id="rId9"/>
-    <p:sldId id="259" r:id="rId10"/>
-    <p:sldId id="260" r:id="rId11"/>
-    <p:sldId id="261" r:id="rId12"/>
+    <p:sldId id="264" r:id="rId7"/>
+    <p:sldId id="263" r:id="rId8"/>
+    <p:sldId id="265" r:id="rId9"/>
+    <p:sldId id="257" r:id="rId10"/>
+    <p:sldId id="258" r:id="rId11"/>
+    <p:sldId id="266" r:id="rId12"/>
+    <p:sldId id="267" r:id="rId22"/>
+    <p:sldId id="259" r:id="rId13"/>
+    <p:sldId id="260" r:id="rId14"/>
+    <p:sldId id="261" r:id="rId15"/>
   </p:sldIdLst>
   <p:sldSz cx="12192000" cy="6858000"/>
   <p:notesSz cx="6858000" cy="9144000"/>
@@ -599,7 +601,7 @@
           <a:p>
             <a:fld id="{5138D139-BD1B-4B66-BB08-DB0DB6B95EC5}" type="slidenum">
               <a:rPr kumimoji="1" lang="ja-JP" altLang="en-US" smtClean="0"/>
-              <a:t>4</a:t>
+              <a:t>6</a:t>
             </a:fld>
             <a:endParaRPr kumimoji="1" lang="ja-JP" altLang="en-US"/>
           </a:p>
@@ -9929,7 +9931,7 @@
 </file>
 
 <file path=ppt/slides/slide10.xml><?xml version="1.0" encoding="utf-8"?>
-<p:sld xmlns:a="http://schemas.openxmlformats.org/drawingml/2006/main" xmlns:p="http://schemas.openxmlformats.org/presentationml/2006/main" xmlns:r="http://schemas.openxmlformats.org/officeDocument/2006/relationships">
+<p:sld xmlns:a="http://schemas.openxmlformats.org/drawingml/2006/main" xmlns:r="http://schemas.openxmlformats.org/officeDocument/2006/relationships" xmlns:p="http://schemas.openxmlformats.org/presentationml/2006/main">
   <p:cSld>
     <p:spTree>
       <p:nvGrpSpPr>
@@ -9937,7 +9939,14 @@
         <p:cNvGrpSpPr/>
         <p:nvPr/>
       </p:nvGrpSpPr>
-      <p:grpSpPr/>
+      <p:grpSpPr>
+        <a:xfrm>
+          <a:off x="0" y="0"/>
+          <a:ext cx="0" cy="0"/>
+          <a:chOff x="0" y="0"/>
+          <a:chExt cx="0" cy="0"/>
+        </a:xfrm>
+      </p:grpSpPr>
       <p:sp>
         <p:nvSpPr>
           <p:cNvPr id="2" name="Title 1"/>
@@ -9959,7 +9968,7 @@
                 <a:ea typeface="游ゴシック Medium"/>
                 <a:cs typeface="游ゴシック Medium"/>
               </a:rPr>
-              <a:t>Claude Cowork でできること</a:t>
+              <a:t>【参考】Claude Code と同じ土俵の競合ツール</a:t>
             </a:r>
           </a:p>
         </p:txBody>
@@ -9981,7 +9990,7 @@
           <a:noFill/>
         </p:spPr>
         <p:txBody>
-          <a:bodyPr wrap="square" anchor="t" lIns="0" rIns="0" tIns="0" bIns="0">
+          <a:bodyPr wrap="square" lIns="0" tIns="0" rIns="0" bIns="0" anchor="t">
             <a:spAutoFit/>
           </a:bodyPr>
           <a:lstStyle/>
@@ -10003,7 +10012,1348 @@
                 <a:ea typeface="游ゴシック Medium"/>
                 <a:cs typeface="游ゴシック Medium"/>
               </a:rPr>
-              <a:t>ターミナル不要で、まとまった作業を丸ごと任せられる自律エージェントです。</a:t>
+              <a:t>Claude Code と同じ土俵のツール。ターミナル(CLI)からコードやファイルを自律操作して開発を進めます。</a:t>
+            </a:r>
+          </a:p>
+        </p:txBody>
+      </p:sp>
+      <p:sp>
+        <p:nvSpPr>
+          <p:cNvPr id="4" name="Rectangle 3"/>
+          <p:cNvSpPr/>
+          <p:nvPr/>
+        </p:nvSpPr>
+        <p:spPr>
+          <a:xfrm>
+            <a:off x="813816" y="1600200"/>
+            <a:ext cx="3346704" cy="2834640"/>
+          </a:xfrm>
+          <a:prstGeom prst="rect">
+            <a:avLst/>
+          </a:prstGeom>
+          <a:solidFill>
+            <a:srgbClr val="FFFFFF"/>
+          </a:solidFill>
+          <a:ln w="12700">
+            <a:solidFill>
+              <a:srgbClr val="D9DEE4"/>
+            </a:solidFill>
+          </a:ln>
+          <a:effectLst/>
+        </p:spPr>
+        <p:style>
+          <a:lnRef idx="1">
+            <a:schemeClr val="accent1"/>
+          </a:lnRef>
+          <a:fillRef idx="3">
+            <a:schemeClr val="accent1"/>
+          </a:fillRef>
+          <a:effectRef idx="2">
+            <a:schemeClr val="accent1"/>
+          </a:effectRef>
+          <a:fontRef idx="minor">
+            <a:schemeClr val="lt1"/>
+          </a:fontRef>
+        </p:style>
+        <p:txBody>
+          <a:bodyPr rtlCol="0" anchor="ctr"/>
+          <a:lstStyle/>
+          <a:p>
+            <a:pPr algn="ctr"/>
+            <a:endParaRPr/>
+          </a:p>
+        </p:txBody>
+      </p:sp>
+      <p:sp>
+        <p:nvSpPr>
+          <p:cNvPr id="5" name="TextBox 4"/>
+          <p:cNvSpPr txBox="1"/>
+          <p:nvPr/>
+        </p:nvSpPr>
+        <p:spPr>
+          <a:xfrm>
+            <a:off x="1069848" y="1819656"/>
+            <a:ext cx="2834640" cy="411480"/>
+          </a:xfrm>
+          <a:prstGeom prst="rect">
+            <a:avLst/>
+          </a:prstGeom>
+          <a:noFill/>
+        </p:spPr>
+        <p:txBody>
+          <a:bodyPr wrap="square" lIns="0" tIns="0" rIns="0" bIns="0" anchor="t">
+            <a:spAutoFit/>
+          </a:bodyPr>
+          <a:lstStyle/>
+          <a:p>
+            <a:pPr algn="l">
+              <a:spcBef>
+                <a:spcPts val="0"/>
+              </a:spcBef>
+              <a:spcAft>
+                <a:spcPts val="400"/>
+              </a:spcAft>
+            </a:pPr>
+            <a:r>
+              <a:rPr sz="1700" b="1">
+                <a:solidFill>
+                  <a:srgbClr val="005CCA"/>
+                </a:solidFill>
+                <a:latin typeface="游ゴシック Medium"/>
+                <a:ea typeface="游ゴシック Medium"/>
+                <a:cs typeface="游ゴシック Medium"/>
+              </a:rPr>
+              <a:t>Claude Code</a:t>
+            </a:r>
+          </a:p>
+        </p:txBody>
+      </p:sp>
+      <p:sp>
+        <p:nvSpPr>
+          <p:cNvPr id="6" name="TextBox 5"/>
+          <p:cNvSpPr txBox="1"/>
+          <p:nvPr/>
+        </p:nvSpPr>
+        <p:spPr>
+          <a:xfrm>
+            <a:off x="1069848" y="2203704"/>
+            <a:ext cx="2834640" cy="274320"/>
+          </a:xfrm>
+          <a:prstGeom prst="rect">
+            <a:avLst/>
+          </a:prstGeom>
+          <a:noFill/>
+        </p:spPr>
+        <p:txBody>
+          <a:bodyPr wrap="square" lIns="0" tIns="0" rIns="0" bIns="0" anchor="t">
+            <a:spAutoFit/>
+          </a:bodyPr>
+          <a:lstStyle/>
+          <a:p>
+            <a:pPr algn="l">
+              <a:spcBef>
+                <a:spcPts val="0"/>
+              </a:spcBef>
+              <a:spcAft>
+                <a:spcPts val="400"/>
+              </a:spcAft>
+            </a:pPr>
+            <a:r>
+              <a:rPr sz="1100" b="0">
+                <a:solidFill>
+                  <a:srgbClr val="6B7177"/>
+                </a:solidFill>
+                <a:latin typeface="游ゴシック Medium"/>
+                <a:ea typeface="游ゴシック Medium"/>
+                <a:cs typeface="游ゴシック Medium"/>
+              </a:rPr>
+              <a:t>Anthropic</a:t>
+            </a:r>
+          </a:p>
+        </p:txBody>
+      </p:sp>
+      <p:sp>
+        <p:nvSpPr>
+          <p:cNvPr id="7" name="TextBox 6"/>
+          <p:cNvSpPr txBox="1"/>
+          <p:nvPr/>
+        </p:nvSpPr>
+        <p:spPr>
+          <a:xfrm>
+            <a:off x="1069848" y="2587752"/>
+            <a:ext cx="2834640" cy="1737360"/>
+          </a:xfrm>
+          <a:prstGeom prst="rect">
+            <a:avLst/>
+          </a:prstGeom>
+          <a:noFill/>
+        </p:spPr>
+        <p:txBody>
+          <a:bodyPr wrap="square" lIns="0" tIns="0" rIns="0" bIns="0" anchor="t">
+            <a:spAutoFit/>
+          </a:bodyPr>
+          <a:lstStyle/>
+          <a:p>
+            <a:pPr algn="l">
+              <a:spcBef>
+                <a:spcPts val="0"/>
+              </a:spcBef>
+              <a:spcAft>
+                <a:spcPts val="800"/>
+              </a:spcAft>
+            </a:pPr>
+            <a:r>
+              <a:rPr sz="1100" b="1">
+                <a:solidFill>
+                  <a:srgbClr val="262B30"/>
+                </a:solidFill>
+                <a:latin typeface="游ゴシック Medium"/>
+                <a:ea typeface="游ゴシック Medium"/>
+                <a:cs typeface="游ゴシック Medium"/>
+              </a:rPr>
+              <a:t>形態：</a:t>
+            </a:r>
+            <a:r>
+              <a:rPr sz="1100" b="0">
+                <a:solidFill>
+                  <a:srgbClr val="262B30"/>
+                </a:solidFill>
+                <a:latin typeface="游ゴシック Medium"/>
+                <a:ea typeface="游ゴシック Medium"/>
+                <a:cs typeface="游ゴシック Medium"/>
+              </a:rPr>
+              <a:t>CLI＋デスクトップの自律型</a:t>
+            </a:r>
+          </a:p>
+          <a:p>
+            <a:pPr algn="l">
+              <a:spcBef>
+                <a:spcPts val="0"/>
+              </a:spcBef>
+              <a:spcAft>
+                <a:spcPts val="800"/>
+              </a:spcAft>
+            </a:pPr>
+            <a:r>
+              <a:rPr sz="1100" b="1">
+                <a:solidFill>
+                  <a:srgbClr val="262B30"/>
+                </a:solidFill>
+                <a:latin typeface="游ゴシック Medium"/>
+                <a:ea typeface="游ゴシック Medium"/>
+                <a:cs typeface="游ゴシック Medium"/>
+              </a:rPr>
+              <a:t>モデル：</a:t>
+            </a:r>
+            <a:r>
+              <a:rPr sz="1100" b="0">
+                <a:solidFill>
+                  <a:srgbClr val="262B30"/>
+                </a:solidFill>
+                <a:latin typeface="游ゴシック Medium"/>
+                <a:ea typeface="游ゴシック Medium"/>
+                <a:cs typeface="游ゴシック Medium"/>
+              </a:rPr>
+              <a:t>Claude</a:t>
+            </a:r>
+          </a:p>
+          <a:p>
+            <a:pPr algn="l">
+              <a:spcBef>
+                <a:spcPts val="0"/>
+              </a:spcBef>
+              <a:spcAft>
+                <a:spcPts val="800"/>
+              </a:spcAft>
+            </a:pPr>
+            <a:r>
+              <a:rPr sz="1100" b="1">
+                <a:solidFill>
+                  <a:srgbClr val="262B30"/>
+                </a:solidFill>
+                <a:latin typeface="游ゴシック Medium"/>
+                <a:ea typeface="游ゴシック Medium"/>
+                <a:cs typeface="游ゴシック Medium"/>
+              </a:rPr>
+              <a:t>特徴：</a:t>
+            </a:r>
+            <a:r>
+              <a:rPr sz="1100" b="0">
+                <a:solidFill>
+                  <a:srgbClr val="262B30"/>
+                </a:solidFill>
+                <a:latin typeface="游ゴシック Medium"/>
+                <a:ea typeface="游ゴシック Medium"/>
+                <a:cs typeface="游ゴシック Medium"/>
+              </a:rPr>
+              <a:t>スキルやMCPで拡張できる</a:t>
+            </a:r>
+          </a:p>
+        </p:txBody>
+      </p:sp>
+      <p:sp>
+        <p:nvSpPr>
+          <p:cNvPr id="8" name="Rectangle 7"/>
+          <p:cNvSpPr/>
+          <p:nvPr/>
+        </p:nvSpPr>
+        <p:spPr>
+          <a:xfrm>
+            <a:off x="4421124" y="1600200"/>
+            <a:ext cx="3346704" cy="2834640"/>
+          </a:xfrm>
+          <a:prstGeom prst="rect">
+            <a:avLst/>
+          </a:prstGeom>
+          <a:solidFill>
+            <a:srgbClr val="FFFFFF"/>
+          </a:solidFill>
+          <a:ln w="12700">
+            <a:solidFill>
+              <a:srgbClr val="D9DEE4"/>
+            </a:solidFill>
+          </a:ln>
+          <a:effectLst/>
+        </p:spPr>
+        <p:style>
+          <a:lnRef idx="1">
+            <a:schemeClr val="accent1"/>
+          </a:lnRef>
+          <a:fillRef idx="3">
+            <a:schemeClr val="accent1"/>
+          </a:fillRef>
+          <a:effectRef idx="2">
+            <a:schemeClr val="accent1"/>
+          </a:effectRef>
+          <a:fontRef idx="minor">
+            <a:schemeClr val="lt1"/>
+          </a:fontRef>
+        </p:style>
+        <p:txBody>
+          <a:bodyPr rtlCol="0" anchor="ctr"/>
+          <a:lstStyle/>
+          <a:p>
+            <a:pPr algn="ctr"/>
+            <a:endParaRPr/>
+          </a:p>
+        </p:txBody>
+      </p:sp>
+      <p:sp>
+        <p:nvSpPr>
+          <p:cNvPr id="9" name="TextBox 8"/>
+          <p:cNvSpPr txBox="1"/>
+          <p:nvPr/>
+        </p:nvSpPr>
+        <p:spPr>
+          <a:xfrm>
+            <a:off x="4677156" y="1819656"/>
+            <a:ext cx="2834640" cy="411480"/>
+          </a:xfrm>
+          <a:prstGeom prst="rect">
+            <a:avLst/>
+          </a:prstGeom>
+          <a:noFill/>
+        </p:spPr>
+        <p:txBody>
+          <a:bodyPr wrap="square" lIns="0" tIns="0" rIns="0" bIns="0" anchor="t">
+            <a:spAutoFit/>
+          </a:bodyPr>
+          <a:lstStyle/>
+          <a:p>
+            <a:pPr algn="l">
+              <a:spcBef>
+                <a:spcPts val="0"/>
+              </a:spcBef>
+              <a:spcAft>
+                <a:spcPts val="400"/>
+              </a:spcAft>
+            </a:pPr>
+            <a:r>
+              <a:rPr sz="1700" b="1">
+                <a:solidFill>
+                  <a:srgbClr val="005CCA"/>
+                </a:solidFill>
+                <a:latin typeface="游ゴシック Medium"/>
+                <a:ea typeface="游ゴシック Medium"/>
+                <a:cs typeface="游ゴシック Medium"/>
+              </a:rPr>
+              <a:t>OpenAI Codex</a:t>
+            </a:r>
+          </a:p>
+        </p:txBody>
+      </p:sp>
+      <p:sp>
+        <p:nvSpPr>
+          <p:cNvPr id="10" name="TextBox 9"/>
+          <p:cNvSpPr txBox="1"/>
+          <p:nvPr/>
+        </p:nvSpPr>
+        <p:spPr>
+          <a:xfrm>
+            <a:off x="4677156" y="2203704"/>
+            <a:ext cx="2834640" cy="274320"/>
+          </a:xfrm>
+          <a:prstGeom prst="rect">
+            <a:avLst/>
+          </a:prstGeom>
+          <a:noFill/>
+        </p:spPr>
+        <p:txBody>
+          <a:bodyPr wrap="square" lIns="0" tIns="0" rIns="0" bIns="0" anchor="t">
+            <a:spAutoFit/>
+          </a:bodyPr>
+          <a:lstStyle/>
+          <a:p>
+            <a:pPr algn="l">
+              <a:spcBef>
+                <a:spcPts val="0"/>
+              </a:spcBef>
+              <a:spcAft>
+                <a:spcPts val="400"/>
+              </a:spcAft>
+            </a:pPr>
+            <a:r>
+              <a:rPr sz="1100" b="0">
+                <a:solidFill>
+                  <a:srgbClr val="6B7177"/>
+                </a:solidFill>
+                <a:latin typeface="游ゴシック Medium"/>
+                <a:ea typeface="游ゴシック Medium"/>
+                <a:cs typeface="游ゴシック Medium"/>
+              </a:rPr>
+              <a:t>OpenAI</a:t>
+            </a:r>
+          </a:p>
+        </p:txBody>
+      </p:sp>
+      <p:sp>
+        <p:nvSpPr>
+          <p:cNvPr id="11" name="TextBox 10"/>
+          <p:cNvSpPr txBox="1"/>
+          <p:nvPr/>
+        </p:nvSpPr>
+        <p:spPr>
+          <a:xfrm>
+            <a:off x="4677156" y="2587752"/>
+            <a:ext cx="2834640" cy="1737360"/>
+          </a:xfrm>
+          <a:prstGeom prst="rect">
+            <a:avLst/>
+          </a:prstGeom>
+          <a:noFill/>
+        </p:spPr>
+        <p:txBody>
+          <a:bodyPr wrap="square" lIns="0" tIns="0" rIns="0" bIns="0" anchor="t">
+            <a:spAutoFit/>
+          </a:bodyPr>
+          <a:lstStyle/>
+          <a:p>
+            <a:pPr algn="l">
+              <a:spcBef>
+                <a:spcPts val="0"/>
+              </a:spcBef>
+              <a:spcAft>
+                <a:spcPts val="800"/>
+              </a:spcAft>
+            </a:pPr>
+            <a:r>
+              <a:rPr sz="1100" b="1">
+                <a:solidFill>
+                  <a:srgbClr val="262B30"/>
+                </a:solidFill>
+                <a:latin typeface="游ゴシック Medium"/>
+                <a:ea typeface="游ゴシック Medium"/>
+                <a:cs typeface="游ゴシック Medium"/>
+              </a:rPr>
+              <a:t>形態：</a:t>
+            </a:r>
+            <a:r>
+              <a:rPr sz="1100" b="0">
+                <a:solidFill>
+                  <a:srgbClr val="262B30"/>
+                </a:solidFill>
+                <a:latin typeface="游ゴシック Medium"/>
+                <a:ea typeface="游ゴシック Medium"/>
+                <a:cs typeface="游ゴシック Medium"/>
+              </a:rPr>
+              <a:t>CLI(OSS)＋クラウド＋IDE拡張</a:t>
+            </a:r>
+          </a:p>
+          <a:p>
+            <a:pPr algn="l">
+              <a:spcBef>
+                <a:spcPts val="0"/>
+              </a:spcBef>
+              <a:spcAft>
+                <a:spcPts val="800"/>
+              </a:spcAft>
+            </a:pPr>
+            <a:r>
+              <a:rPr sz="1100" b="1">
+                <a:solidFill>
+                  <a:srgbClr val="262B30"/>
+                </a:solidFill>
+                <a:latin typeface="游ゴシック Medium"/>
+                <a:ea typeface="游ゴシック Medium"/>
+                <a:cs typeface="游ゴシック Medium"/>
+              </a:rPr>
+              <a:t>モデル：</a:t>
+            </a:r>
+            <a:r>
+              <a:rPr sz="1100" b="0">
+                <a:solidFill>
+                  <a:srgbClr val="262B30"/>
+                </a:solidFill>
+                <a:latin typeface="游ゴシック Medium"/>
+                <a:ea typeface="游ゴシック Medium"/>
+                <a:cs typeface="游ゴシック Medium"/>
+              </a:rPr>
+              <a:t>GPT-5-codex 系</a:t>
+            </a:r>
+          </a:p>
+          <a:p>
+            <a:pPr algn="l">
+              <a:spcBef>
+                <a:spcPts val="0"/>
+              </a:spcBef>
+              <a:spcAft>
+                <a:spcPts val="800"/>
+              </a:spcAft>
+            </a:pPr>
+            <a:r>
+              <a:rPr sz="1100" b="1">
+                <a:solidFill>
+                  <a:srgbClr val="262B30"/>
+                </a:solidFill>
+                <a:latin typeface="游ゴシック Medium"/>
+                <a:ea typeface="游ゴシック Medium"/>
+                <a:cs typeface="游ゴシック Medium"/>
+              </a:rPr>
+              <a:t>特徴：</a:t>
+            </a:r>
+            <a:r>
+              <a:rPr sz="1100" b="0">
+                <a:solidFill>
+                  <a:srgbClr val="262B30"/>
+                </a:solidFill>
+                <a:latin typeface="游ゴシック Medium"/>
+                <a:ea typeface="游ゴシック Medium"/>
+                <a:cs typeface="游ゴシック Medium"/>
+              </a:rPr>
+              <a:t>ローカルとクラウドを行き来</a:t>
+            </a:r>
+          </a:p>
+        </p:txBody>
+      </p:sp>
+      <p:sp>
+        <p:nvSpPr>
+          <p:cNvPr id="12" name="Rectangle 11"/>
+          <p:cNvSpPr/>
+          <p:nvPr/>
+        </p:nvSpPr>
+        <p:spPr>
+          <a:xfrm>
+            <a:off x="8028432" y="1600200"/>
+            <a:ext cx="3346704" cy="2834640"/>
+          </a:xfrm>
+          <a:prstGeom prst="rect">
+            <a:avLst/>
+          </a:prstGeom>
+          <a:solidFill>
+            <a:srgbClr val="FFFFFF"/>
+          </a:solidFill>
+          <a:ln w="12700">
+            <a:solidFill>
+              <a:srgbClr val="D9DEE4"/>
+            </a:solidFill>
+          </a:ln>
+          <a:effectLst/>
+        </p:spPr>
+        <p:style>
+          <a:lnRef idx="1">
+            <a:schemeClr val="accent1"/>
+          </a:lnRef>
+          <a:fillRef idx="3">
+            <a:schemeClr val="accent1"/>
+          </a:fillRef>
+          <a:effectRef idx="2">
+            <a:schemeClr val="accent1"/>
+          </a:effectRef>
+          <a:fontRef idx="minor">
+            <a:schemeClr val="lt1"/>
+          </a:fontRef>
+        </p:style>
+        <p:txBody>
+          <a:bodyPr rtlCol="0" anchor="ctr"/>
+          <a:lstStyle/>
+          <a:p>
+            <a:pPr algn="ctr"/>
+            <a:endParaRPr/>
+          </a:p>
+        </p:txBody>
+      </p:sp>
+      <p:sp>
+        <p:nvSpPr>
+          <p:cNvPr id="13" name="TextBox 12"/>
+          <p:cNvSpPr txBox="1"/>
+          <p:nvPr/>
+        </p:nvSpPr>
+        <p:spPr>
+          <a:xfrm>
+            <a:off x="8284464" y="1819656"/>
+            <a:ext cx="2834640" cy="411480"/>
+          </a:xfrm>
+          <a:prstGeom prst="rect">
+            <a:avLst/>
+          </a:prstGeom>
+          <a:noFill/>
+        </p:spPr>
+        <p:txBody>
+          <a:bodyPr wrap="square" lIns="0" tIns="0" rIns="0" bIns="0" anchor="t">
+            <a:spAutoFit/>
+          </a:bodyPr>
+          <a:lstStyle/>
+          <a:p>
+            <a:pPr algn="l">
+              <a:spcBef>
+                <a:spcPts val="0"/>
+              </a:spcBef>
+              <a:spcAft>
+                <a:spcPts val="400"/>
+              </a:spcAft>
+            </a:pPr>
+            <a:r>
+              <a:rPr sz="1700" b="1">
+                <a:solidFill>
+                  <a:srgbClr val="005CCA"/>
+                </a:solidFill>
+                <a:latin typeface="游ゴシック Medium"/>
+                <a:ea typeface="游ゴシック Medium"/>
+                <a:cs typeface="游ゴシック Medium"/>
+              </a:rPr>
+              <a:t>Gemini CLI</a:t>
+            </a:r>
+          </a:p>
+        </p:txBody>
+      </p:sp>
+      <p:sp>
+        <p:nvSpPr>
+          <p:cNvPr id="14" name="TextBox 13"/>
+          <p:cNvSpPr txBox="1"/>
+          <p:nvPr/>
+        </p:nvSpPr>
+        <p:spPr>
+          <a:xfrm>
+            <a:off x="8284464" y="2203704"/>
+            <a:ext cx="2834640" cy="274320"/>
+          </a:xfrm>
+          <a:prstGeom prst="rect">
+            <a:avLst/>
+          </a:prstGeom>
+          <a:noFill/>
+        </p:spPr>
+        <p:txBody>
+          <a:bodyPr wrap="square" lIns="0" tIns="0" rIns="0" bIns="0" anchor="t">
+            <a:spAutoFit/>
+          </a:bodyPr>
+          <a:lstStyle/>
+          <a:p>
+            <a:pPr algn="l">
+              <a:spcBef>
+                <a:spcPts val="0"/>
+              </a:spcBef>
+              <a:spcAft>
+                <a:spcPts val="400"/>
+              </a:spcAft>
+            </a:pPr>
+            <a:r>
+              <a:rPr sz="1100" b="0">
+                <a:solidFill>
+                  <a:srgbClr val="6B7177"/>
+                </a:solidFill>
+                <a:latin typeface="游ゴシック Medium"/>
+                <a:ea typeface="游ゴシック Medium"/>
+                <a:cs typeface="游ゴシック Medium"/>
+              </a:rPr>
+              <a:t>Google</a:t>
+            </a:r>
+          </a:p>
+        </p:txBody>
+      </p:sp>
+      <p:sp>
+        <p:nvSpPr>
+          <p:cNvPr id="15" name="TextBox 14"/>
+          <p:cNvSpPr txBox="1"/>
+          <p:nvPr/>
+        </p:nvSpPr>
+        <p:spPr>
+          <a:xfrm>
+            <a:off x="8284464" y="2587752"/>
+            <a:ext cx="2834640" cy="1737360"/>
+          </a:xfrm>
+          <a:prstGeom prst="rect">
+            <a:avLst/>
+          </a:prstGeom>
+          <a:noFill/>
+        </p:spPr>
+        <p:txBody>
+          <a:bodyPr wrap="square" lIns="0" tIns="0" rIns="0" bIns="0" anchor="t">
+            <a:spAutoFit/>
+          </a:bodyPr>
+          <a:lstStyle/>
+          <a:p>
+            <a:pPr algn="l">
+              <a:spcBef>
+                <a:spcPts val="0"/>
+              </a:spcBef>
+              <a:spcAft>
+                <a:spcPts val="800"/>
+              </a:spcAft>
+            </a:pPr>
+            <a:r>
+              <a:rPr sz="1100" b="1">
+                <a:solidFill>
+                  <a:srgbClr val="262B30"/>
+                </a:solidFill>
+                <a:latin typeface="游ゴシック Medium"/>
+                <a:ea typeface="游ゴシック Medium"/>
+                <a:cs typeface="游ゴシック Medium"/>
+              </a:rPr>
+              <a:t>形態：</a:t>
+            </a:r>
+            <a:r>
+              <a:rPr sz="1100" b="0">
+                <a:solidFill>
+                  <a:srgbClr val="262B30"/>
+                </a:solidFill>
+                <a:latin typeface="游ゴシック Medium"/>
+                <a:ea typeface="游ゴシック Medium"/>
+                <a:cs typeface="游ゴシック Medium"/>
+              </a:rPr>
+              <a:t>OSSのターミナル型エージェント</a:t>
+            </a:r>
+          </a:p>
+          <a:p>
+            <a:pPr algn="l">
+              <a:spcBef>
+                <a:spcPts val="0"/>
+              </a:spcBef>
+              <a:spcAft>
+                <a:spcPts val="800"/>
+              </a:spcAft>
+            </a:pPr>
+            <a:r>
+              <a:rPr sz="1100" b="1">
+                <a:solidFill>
+                  <a:srgbClr val="262B30"/>
+                </a:solidFill>
+                <a:latin typeface="游ゴシック Medium"/>
+                <a:ea typeface="游ゴシック Medium"/>
+                <a:cs typeface="游ゴシック Medium"/>
+              </a:rPr>
+              <a:t>モデル：</a:t>
+            </a:r>
+            <a:r>
+              <a:rPr sz="1100" b="0">
+                <a:solidFill>
+                  <a:srgbClr val="262B30"/>
+                </a:solidFill>
+                <a:latin typeface="游ゴシック Medium"/>
+                <a:ea typeface="游ゴシック Medium"/>
+                <a:cs typeface="游ゴシック Medium"/>
+              </a:rPr>
+              <a:t>Gemini</a:t>
+            </a:r>
+          </a:p>
+          <a:p>
+            <a:pPr algn="l">
+              <a:spcBef>
+                <a:spcPts val="0"/>
+              </a:spcBef>
+              <a:spcAft>
+                <a:spcPts val="800"/>
+              </a:spcAft>
+            </a:pPr>
+            <a:r>
+              <a:rPr sz="1100" b="1">
+                <a:solidFill>
+                  <a:srgbClr val="262B30"/>
+                </a:solidFill>
+                <a:latin typeface="游ゴシック Medium"/>
+                <a:ea typeface="游ゴシック Medium"/>
+                <a:cs typeface="游ゴシック Medium"/>
+              </a:rPr>
+              <a:t>特徴：</a:t>
+            </a:r>
+            <a:r>
+              <a:rPr sz="1100" b="0">
+                <a:solidFill>
+                  <a:srgbClr val="262B30"/>
+                </a:solidFill>
+                <a:latin typeface="游ゴシック Medium"/>
+                <a:ea typeface="游ゴシック Medium"/>
+                <a:cs typeface="游ゴシック Medium"/>
+              </a:rPr>
+              <a:t>後継のAntigravity CLIへ移行中</a:t>
+            </a:r>
+          </a:p>
+        </p:txBody>
+      </p:sp>
+      <p:sp>
+        <p:nvSpPr>
+          <p:cNvPr id="16" name="TextBox 15"/>
+          <p:cNvSpPr txBox="1"/>
+          <p:nvPr/>
+        </p:nvSpPr>
+        <p:spPr>
+          <a:xfrm>
+            <a:off x="813816" y="4663440"/>
+            <a:ext cx="10561320" cy="640080"/>
+          </a:xfrm>
+          <a:prstGeom prst="rect">
+            <a:avLst/>
+          </a:prstGeom>
+          <a:noFill/>
+        </p:spPr>
+        <p:txBody>
+          <a:bodyPr wrap="square" lIns="0" tIns="0" rIns="0" bIns="0" anchor="t">
+            <a:spAutoFit/>
+          </a:bodyPr>
+          <a:lstStyle/>
+          <a:p>
+            <a:pPr algn="l">
+              <a:spcBef>
+                <a:spcPts val="0"/>
+              </a:spcBef>
+              <a:spcAft>
+                <a:spcPts val="400"/>
+              </a:spcAft>
+            </a:pPr>
+            <a:r>
+              <a:rPr sz="1400" b="1">
+                <a:solidFill>
+                  <a:srgbClr val="8FB9EC"/>
+                </a:solidFill>
+                <a:latin typeface="游ゴシック Medium"/>
+                <a:ea typeface="游ゴシック Medium"/>
+                <a:cs typeface="游ゴシック Medium"/>
+              </a:rPr>
+              <a:t>選ぶ基準：</a:t>
+            </a:r>
+            <a:r>
+              <a:rPr sz="1400" b="0">
+                <a:solidFill>
+                  <a:srgbClr val="E8EDF4"/>
+                </a:solidFill>
+                <a:latin typeface="游ゴシック Medium"/>
+                <a:ea typeface="游ゴシック Medium"/>
+                <a:cs typeface="游ゴシック Medium"/>
+              </a:rPr>
+              <a:t>モデル品質・既存エコシステム・社内方針で決めます。用途が重なるため、基本はどれか1つを選びます。</a:t>
+            </a:r>
+          </a:p>
+        </p:txBody>
+      </p:sp>
+    </p:spTree>
+  </p:cSld>
+  <p:clrMapOvr>
+    <a:masterClrMapping/>
+  </p:clrMapOvr>
+</p:sld>
+</file>
+
+<file path=ppt/slides/slide11.xml><?xml version="1.0" encoding="utf-8"?>
+<p:sld xmlns:a="http://schemas.openxmlformats.org/drawingml/2006/main" xmlns:r="http://schemas.openxmlformats.org/officeDocument/2006/relationships" xmlns:p="http://schemas.openxmlformats.org/presentationml/2006/main">
+  <p:cSld>
+    <p:spTree>
+      <p:nvGrpSpPr>
+        <p:cNvPr id="1" name=""/>
+        <p:cNvGrpSpPr/>
+        <p:nvPr/>
+      </p:nvGrpSpPr>
+      <p:grpSpPr>
+        <a:xfrm>
+          <a:off x="0" y="0"/>
+          <a:ext cx="0" cy="0"/>
+          <a:chOff x="0" y="0"/>
+          <a:chExt cx="0" cy="0"/>
+        </a:xfrm>
+      </p:grpSpPr>
+      <p:sp>
+        <p:nvSpPr>
+          <p:cNvPr id="2" name="Title 1"/>
+          <p:cNvSpPr>
+            <a:spLocks noGrp="1"/>
+          </p:cNvSpPr>
+          <p:nvPr>
+            <p:ph type="title"/>
+          </p:nvPr>
+        </p:nvSpPr>
+        <p:spPr/>
+        <p:txBody>
+          <a:bodyPr/>
+          <a:lstStyle/>
+          <a:p>
+            <a:r>
+              <a:rPr>
+                <a:latin typeface="游ゴシック Medium"/>
+                <a:ea typeface="游ゴシック Medium"/>
+                <a:cs typeface="游ゴシック Medium"/>
+              </a:rPr>
+              <a:t>住み分けの一言</a:t>
+            </a:r>
+          </a:p>
+        </p:txBody>
+      </p:sp>
+      <p:sp>
+        <p:nvSpPr>
+          <p:cNvPr id="3" name="Rectangle 2"/>
+          <p:cNvSpPr/>
+          <p:nvPr/>
+        </p:nvSpPr>
+        <p:spPr>
+          <a:xfrm>
+            <a:off x="813816" y="1572768"/>
+            <a:ext cx="137160" cy="137160"/>
+          </a:xfrm>
+          <a:prstGeom prst="rect">
+            <a:avLst/>
+          </a:prstGeom>
+          <a:solidFill>
+            <a:srgbClr val="8FB9EC"/>
+          </a:solidFill>
+          <a:ln>
+            <a:noFill/>
+          </a:ln>
+          <a:effectLst/>
+        </p:spPr>
+        <p:style>
+          <a:lnRef idx="1">
+            <a:schemeClr val="accent1"/>
+          </a:lnRef>
+          <a:fillRef idx="3">
+            <a:schemeClr val="accent1"/>
+          </a:fillRef>
+          <a:effectRef idx="2">
+            <a:schemeClr val="accent1"/>
+          </a:effectRef>
+          <a:fontRef idx="minor">
+            <a:schemeClr val="lt1"/>
+          </a:fontRef>
+        </p:style>
+        <p:txBody>
+          <a:bodyPr rtlCol="0" anchor="ctr"/>
+          <a:lstStyle/>
+          <a:p>
+            <a:pPr algn="ctr"/>
+            <a:endParaRPr/>
+          </a:p>
+        </p:txBody>
+      </p:sp>
+      <p:sp>
+        <p:nvSpPr>
+          <p:cNvPr id="4" name="TextBox 3"/>
+          <p:cNvSpPr txBox="1"/>
+          <p:nvPr/>
+        </p:nvSpPr>
+        <p:spPr>
+          <a:xfrm>
+            <a:off x="1133856" y="1508760"/>
+            <a:ext cx="10241280" cy="822960"/>
+          </a:xfrm>
+          <a:prstGeom prst="rect">
+            <a:avLst/>
+          </a:prstGeom>
+          <a:noFill/>
+        </p:spPr>
+        <p:txBody>
+          <a:bodyPr wrap="square" lIns="0" tIns="0" rIns="0" bIns="0" anchor="t">
+            <a:spAutoFit/>
+          </a:bodyPr>
+          <a:lstStyle/>
+          <a:p>
+            <a:pPr algn="l">
+              <a:spcBef>
+                <a:spcPts val="0"/>
+              </a:spcBef>
+              <a:spcAft>
+                <a:spcPts val="300"/>
+              </a:spcAft>
+            </a:pPr>
+            <a:r>
+              <a:rPr sz="1600" b="1">
+                <a:solidFill>
+                  <a:srgbClr val="FFFFFF"/>
+                </a:solidFill>
+                <a:latin typeface="游ゴシック Medium"/>
+                <a:ea typeface="游ゴシック Medium"/>
+                <a:cs typeface="游ゴシック Medium"/>
+              </a:rPr>
+              <a:t>既存のMicrosoft世界に根ざし、社内データを自動で活用したいとき</a:t>
+            </a:r>
+          </a:p>
+          <a:p>
+            <a:pPr algn="l">
+              <a:spcBef>
+                <a:spcPts val="0"/>
+              </a:spcBef>
+              <a:spcAft>
+                <a:spcPts val="300"/>
+              </a:spcAft>
+            </a:pPr>
+            <a:r>
+              <a:rPr sz="1500" b="0">
+                <a:solidFill>
+                  <a:srgbClr val="8FB9EC"/>
+                </a:solidFill>
+                <a:latin typeface="游ゴシック Medium"/>
+                <a:ea typeface="游ゴシック Medium"/>
+                <a:cs typeface="游ゴシック Medium"/>
+              </a:rPr>
+              <a:t>→ Microsoft 365 Copilot</a:t>
+            </a:r>
+          </a:p>
+        </p:txBody>
+      </p:sp>
+      <p:sp>
+        <p:nvSpPr>
+          <p:cNvPr id="5" name="Rectangle 4"/>
+          <p:cNvSpPr/>
+          <p:nvPr/>
+        </p:nvSpPr>
+        <p:spPr>
+          <a:xfrm>
+            <a:off x="813816" y="2578608"/>
+            <a:ext cx="137160" cy="137160"/>
+          </a:xfrm>
+          <a:prstGeom prst="rect">
+            <a:avLst/>
+          </a:prstGeom>
+          <a:solidFill>
+            <a:srgbClr val="8FB9EC"/>
+          </a:solidFill>
+          <a:ln>
+            <a:noFill/>
+          </a:ln>
+          <a:effectLst/>
+        </p:spPr>
+        <p:style>
+          <a:lnRef idx="1">
+            <a:schemeClr val="accent1"/>
+          </a:lnRef>
+          <a:fillRef idx="3">
+            <a:schemeClr val="accent1"/>
+          </a:fillRef>
+          <a:effectRef idx="2">
+            <a:schemeClr val="accent1"/>
+          </a:effectRef>
+          <a:fontRef idx="minor">
+            <a:schemeClr val="lt1"/>
+          </a:fontRef>
+        </p:style>
+        <p:txBody>
+          <a:bodyPr rtlCol="0" anchor="ctr"/>
+          <a:lstStyle/>
+          <a:p>
+            <a:pPr algn="ctr"/>
+            <a:endParaRPr/>
+          </a:p>
+        </p:txBody>
+      </p:sp>
+      <p:sp>
+        <p:nvSpPr>
+          <p:cNvPr id="6" name="TextBox 5"/>
+          <p:cNvSpPr txBox="1"/>
+          <p:nvPr/>
+        </p:nvSpPr>
+        <p:spPr>
+          <a:xfrm>
+            <a:off x="1133856" y="2514600"/>
+            <a:ext cx="10241280" cy="822960"/>
+          </a:xfrm>
+          <a:prstGeom prst="rect">
+            <a:avLst/>
+          </a:prstGeom>
+          <a:noFill/>
+        </p:spPr>
+        <p:txBody>
+          <a:bodyPr wrap="square" lIns="0" tIns="0" rIns="0" bIns="0" anchor="t">
+            <a:spAutoFit/>
+          </a:bodyPr>
+          <a:lstStyle/>
+          <a:p>
+            <a:pPr algn="l">
+              <a:spcBef>
+                <a:spcPts val="0"/>
+              </a:spcBef>
+              <a:spcAft>
+                <a:spcPts val="300"/>
+              </a:spcAft>
+            </a:pPr>
+            <a:r>
+              <a:rPr sz="1600" b="1">
+                <a:solidFill>
+                  <a:srgbClr val="FFFFFF"/>
+                </a:solidFill>
+                <a:latin typeface="游ゴシック Medium"/>
+                <a:ea typeface="游ゴシック Medium"/>
+                <a:cs typeface="游ゴシック Medium"/>
+              </a:rPr>
+              <a:t>特定のデータや外部ツールを、独立した環境で完結させたいとき</a:t>
+            </a:r>
+          </a:p>
+          <a:p>
+            <a:pPr algn="l">
+              <a:spcBef>
+                <a:spcPts val="0"/>
+              </a:spcBef>
+              <a:spcAft>
+                <a:spcPts val="300"/>
+              </a:spcAft>
+            </a:pPr>
+            <a:r>
+              <a:rPr sz="1500" b="0">
+                <a:solidFill>
+                  <a:srgbClr val="8FB9EC"/>
+                </a:solidFill>
+                <a:latin typeface="游ゴシック Medium"/>
+                <a:ea typeface="游ゴシック Medium"/>
+                <a:cs typeface="游ゴシック Medium"/>
+              </a:rPr>
+              <a:t>→ Claude Cowork</a:t>
+            </a:r>
+          </a:p>
+        </p:txBody>
+      </p:sp>
+      <p:sp>
+        <p:nvSpPr>
+          <p:cNvPr id="7" name="Rectangle 6"/>
+          <p:cNvSpPr/>
+          <p:nvPr/>
+        </p:nvSpPr>
+        <p:spPr>
+          <a:xfrm>
+            <a:off x="813816" y="3584448"/>
+            <a:ext cx="137160" cy="137160"/>
+          </a:xfrm>
+          <a:prstGeom prst="rect">
+            <a:avLst/>
+          </a:prstGeom>
+          <a:solidFill>
+            <a:srgbClr val="8FB9EC"/>
+          </a:solidFill>
+          <a:ln>
+            <a:noFill/>
+          </a:ln>
+          <a:effectLst/>
+        </p:spPr>
+        <p:style>
+          <a:lnRef idx="1">
+            <a:schemeClr val="accent1"/>
+          </a:lnRef>
+          <a:fillRef idx="3">
+            <a:schemeClr val="accent1"/>
+          </a:fillRef>
+          <a:effectRef idx="2">
+            <a:schemeClr val="accent1"/>
+          </a:effectRef>
+          <a:fontRef idx="minor">
+            <a:schemeClr val="lt1"/>
+          </a:fontRef>
+        </p:style>
+        <p:txBody>
+          <a:bodyPr rtlCol="0" anchor="ctr"/>
+          <a:lstStyle/>
+          <a:p>
+            <a:pPr algn="ctr"/>
+            <a:endParaRPr/>
+          </a:p>
+        </p:txBody>
+      </p:sp>
+      <p:sp>
+        <p:nvSpPr>
+          <p:cNvPr id="8" name="TextBox 7"/>
+          <p:cNvSpPr txBox="1"/>
+          <p:nvPr/>
+        </p:nvSpPr>
+        <p:spPr>
+          <a:xfrm>
+            <a:off x="1133856" y="3520440"/>
+            <a:ext cx="10241280" cy="822960"/>
+          </a:xfrm>
+          <a:prstGeom prst="rect">
+            <a:avLst/>
+          </a:prstGeom>
+          <a:noFill/>
+        </p:spPr>
+        <p:txBody>
+          <a:bodyPr wrap="square" lIns="0" tIns="0" rIns="0" bIns="0" anchor="t">
+            <a:spAutoFit/>
+          </a:bodyPr>
+          <a:lstStyle/>
+          <a:p>
+            <a:pPr algn="l">
+              <a:spcBef>
+                <a:spcPts val="0"/>
+              </a:spcBef>
+              <a:spcAft>
+                <a:spcPts val="300"/>
+              </a:spcAft>
+            </a:pPr>
+            <a:r>
+              <a:rPr sz="1600" b="1">
+                <a:solidFill>
+                  <a:srgbClr val="FFFFFF"/>
+                </a:solidFill>
+                <a:latin typeface="游ゴシック Medium"/>
+                <a:ea typeface="游ゴシック Medium"/>
+                <a:cs typeface="游ゴシック Medium"/>
+              </a:rPr>
+              <a:t>コードを書く・自動化するなど開発そのものを任せたいとき</a:t>
+            </a:r>
+          </a:p>
+          <a:p>
+            <a:pPr algn="l">
+              <a:spcBef>
+                <a:spcPts val="0"/>
+              </a:spcBef>
+              <a:spcAft>
+                <a:spcPts val="300"/>
+              </a:spcAft>
+            </a:pPr>
+            <a:r>
+              <a:rPr sz="1500" b="0">
+                <a:solidFill>
+                  <a:srgbClr val="8FB9EC"/>
+                </a:solidFill>
+                <a:latin typeface="游ゴシック Medium"/>
+                <a:ea typeface="游ゴシック Medium"/>
+                <a:cs typeface="游ゴシック Medium"/>
+              </a:rPr>
+              <a:t>→ Claude Code / OpenAI Codex / Gemini CLI</a:t>
+            </a:r>
+          </a:p>
+        </p:txBody>
+      </p:sp>
+      <p:sp>
+        <p:nvSpPr>
+          <p:cNvPr id="9" name="TextBox 8"/>
+          <p:cNvSpPr txBox="1"/>
+          <p:nvPr/>
+        </p:nvSpPr>
+        <p:spPr>
+          <a:xfrm>
+            <a:off x="813816" y="4846320"/>
+            <a:ext cx="10561320" cy="731520"/>
+          </a:xfrm>
+          <a:prstGeom prst="rect">
+            <a:avLst/>
+          </a:prstGeom>
+          <a:noFill/>
+        </p:spPr>
+        <p:txBody>
+          <a:bodyPr wrap="square" lIns="0" tIns="0" rIns="0" bIns="0" anchor="t">
+            <a:spAutoFit/>
+          </a:bodyPr>
+          <a:lstStyle/>
+          <a:p>
+            <a:pPr algn="l">
+              <a:spcBef>
+                <a:spcPts val="0"/>
+              </a:spcBef>
+              <a:spcAft>
+                <a:spcPts val="400"/>
+              </a:spcAft>
+            </a:pPr>
+            <a:r>
+              <a:rPr sz="1300" b="1">
+                <a:solidFill>
+                  <a:srgbClr val="8FB9EC"/>
+                </a:solidFill>
+                <a:latin typeface="游ゴシック Medium"/>
+                <a:ea typeface="游ゴシック Medium"/>
+                <a:cs typeface="游ゴシック Medium"/>
+              </a:rPr>
+              <a:t>注意：</a:t>
+            </a:r>
+            <a:r>
+              <a:rPr sz="1300" b="0">
+                <a:solidFill>
+                  <a:srgbClr val="E8EDF4"/>
+                </a:solidFill>
+                <a:latin typeface="游ゴシック Medium"/>
+                <a:ea typeface="游ゴシック Medium"/>
+                <a:cs typeface="游ゴシック Medium"/>
+              </a:rPr>
+              <a:t>「Cowork」は両社が使う名称です。CopilotもClaudeを利用でき、モデルの違いより「どこに根ざすか」で選びます。</a:t>
+            </a:r>
+          </a:p>
+        </p:txBody>
+      </p:sp>
+    </p:spTree>
+  </p:cSld>
+  <p:clrMapOvr>
+    <a:masterClrMapping/>
+  </p:clrMapOvr>
+</p:sld>
+</file>
+
+<file path=ppt/slides/slide12.xml><?xml version="1.0" encoding="utf-8"?>
+<p:sld xmlns:a="http://schemas.openxmlformats.org/drawingml/2006/main" xmlns:p="http://schemas.openxmlformats.org/presentationml/2006/main" xmlns:r="http://schemas.openxmlformats.org/officeDocument/2006/relationships">
+  <p:cSld>
+    <p:spTree>
+      <p:nvGrpSpPr>
+        <p:cNvPr id="1" name=""/>
+        <p:cNvGrpSpPr/>
+        <p:nvPr/>
+      </p:nvGrpSpPr>
+      <p:grpSpPr/>
+      <p:sp>
+        <p:nvSpPr>
+          <p:cNvPr id="2" name="Title 1"/>
+          <p:cNvSpPr>
+            <a:spLocks noGrp="1"/>
+          </p:cNvSpPr>
+          <p:nvPr>
+            <p:ph type="title"/>
+          </p:nvPr>
+        </p:nvSpPr>
+        <p:spPr/>
+        <p:txBody>
+          <a:bodyPr/>
+          <a:lstStyle/>
+          <a:p>
+            <a:r>
+              <a:rPr>
+                <a:latin typeface="游ゴシック Medium"/>
+                <a:ea typeface="游ゴシック Medium"/>
+                <a:cs typeface="游ゴシック Medium"/>
+              </a:rPr>
+              <a:t>Claude Code でできること</a:t>
+            </a:r>
+          </a:p>
+        </p:txBody>
+      </p:sp>
+      <p:sp>
+        <p:nvSpPr>
+          <p:cNvPr id="3" name="TextBox 2"/>
+          <p:cNvSpPr txBox="1"/>
+          <p:nvPr/>
+        </p:nvSpPr>
+        <p:spPr>
+          <a:xfrm>
+            <a:off x="813816" y="1024128"/>
+            <a:ext cx="10561320" cy="457200"/>
+          </a:xfrm>
+          <a:prstGeom prst="rect">
+            <a:avLst/>
+          </a:prstGeom>
+          <a:noFill/>
+        </p:spPr>
+        <p:txBody>
+          <a:bodyPr wrap="square" anchor="t" lIns="0" rIns="0" tIns="0" bIns="0">
+            <a:spAutoFit/>
+          </a:bodyPr>
+          <a:lstStyle/>
+          <a:p>
+            <a:pPr algn="l">
+              <a:spcBef>
+                <a:spcPts val="0"/>
+              </a:spcBef>
+              <a:spcAft>
+                <a:spcPts val="400"/>
+              </a:spcAft>
+            </a:pPr>
+            <a:r>
+              <a:rPr sz="1300" b="0">
+                <a:solidFill>
+                  <a:srgbClr val="B9C6DA"/>
+                </a:solidFill>
+                <a:latin typeface="游ゴシック Medium"/>
+                <a:ea typeface="游ゴシック Medium"/>
+                <a:cs typeface="游ゴシック Medium"/>
+              </a:rPr>
+              <a:t>エンジニアが、ターミナルやIDEから開発そのものを任せられる自律エージェントです。</a:t>
             </a:r>
           </a:p>
         </p:txBody>
@@ -10091,7 +11441,7 @@
                 <a:ea typeface="游ゴシック Medium"/>
                 <a:cs typeface="游ゴシック Medium"/>
               </a:rPr>
-              <a:t>コード不要で自律実行</a:t>
+              <a:t>開発環境の中で動く</a:t>
             </a:r>
           </a:p>
         </p:txBody>
@@ -10135,7 +11485,7 @@
                 <a:ea typeface="游ゴシック Medium"/>
                 <a:cs typeface="游ゴシック Medium"/>
               </a:rPr>
-              <a:t>コマンドを書かずに、複数ステップの作業を計画→実行できる。</a:t>
+              <a:t>ターミナル(CLI)・デスクトップアプリ・IDEから、実際のプロジェクトの中で作業。</a:t>
             </a:r>
           </a:p>
         </p:txBody>
@@ -10223,7 +11573,7 @@
                 <a:ea typeface="游ゴシック Medium"/>
                 <a:cs typeface="游ゴシック Medium"/>
               </a:rPr>
-              <a:t>ローカルのファイルを直接扱う</a:t>
+              <a:t>コードを書く・動かす・直す</a:t>
             </a:r>
           </a:p>
         </p:txBody>
@@ -10267,7 +11617,7 @@
                 <a:ea typeface="游ゴシック Medium"/>
                 <a:cs typeface="游ゴシック Medium"/>
               </a:rPr>
-              <a:t>選んだフォルダのファイルを、アップロードなしで読み書き・新規作成。</a:t>
+              <a:t>コードを実行してテストし、エラーを自分で直す反復に強い。</a:t>
             </a:r>
           </a:p>
         </p:txBody>
@@ -10355,7 +11705,7 @@
                 <a:ea typeface="游ゴシック Medium"/>
                 <a:cs typeface="游ゴシック Medium"/>
               </a:rPr>
-              <a:t>Web・外部ツール・コードまで</a:t>
+              <a:t>開発ワークフローに対応</a:t>
             </a:r>
           </a:p>
         </p:txBody>
@@ -10399,7 +11749,7 @@
                 <a:ea typeface="游ゴシック Medium"/>
                 <a:cs typeface="游ゴシック Medium"/>
               </a:rPr>
-              <a:t>Web参照、外部ツール連携(MCP)、コード実行まで任せられる。</a:t>
+              <a:t>ファイル編集・git・ビルド・CI など、開発の一連の流れを自動化。</a:t>
             </a:r>
           </a:p>
         </p:txBody>
@@ -10487,7 +11837,7 @@
                 <a:ea typeface="游ゴシック Medium"/>
                 <a:cs typeface="游ゴシック Medium"/>
               </a:rPr>
-              <a:t>多様な成果物を生成</a:t>
+              <a:t>スキルやCLAUDE.mdで拡張</a:t>
             </a:r>
           </a:p>
         </p:txBody>
@@ -10531,7 +11881,7 @@
                 <a:ea typeface="游ゴシック Medium"/>
                 <a:cs typeface="游ゴシック Medium"/>
               </a:rPr>
-              <a:t>文書・スライド・表・レポートに加え、独自ツールやダッシュボードも。</a:t>
+              <a:t>よく使う手順をスキル化し、プロジェクトの決まり事を教えられる。</a:t>
             </a:r>
           </a:p>
         </p:txBody>
@@ -10619,7 +11969,7 @@
                 <a:ea typeface="游ゴシック Medium"/>
                 <a:cs typeface="游ゴシック Medium"/>
               </a:rPr>
-              <a:t>定期実行で自動化</a:t>
+              <a:t>外部ツール連携・データ処理</a:t>
             </a:r>
           </a:p>
         </p:txBody>
@@ -10663,7 +12013,7 @@
                 <a:ea typeface="游ゴシック Medium"/>
                 <a:cs typeface="游ゴシック Medium"/>
               </a:rPr>
-              <a:t>作ったタスクをスケジュール実行し、繰り返し処理を自動化できる。</a:t>
+              <a:t>MCPで外部ツールと連携、コマンド実行やデータ処理も任せられる。</a:t>
             </a:r>
           </a:p>
         </p:txBody>
@@ -10870,6 +12220,766 @@
       </p:grpSpPr>
       <p:sp>
         <p:nvSpPr>
+          <p:cNvPr id="2" name="Title 1"/>
+          <p:cNvSpPr>
+            <a:spLocks noGrp="1"/>
+          </p:cNvSpPr>
+          <p:nvPr>
+            <p:ph type="title"/>
+          </p:nvPr>
+        </p:nvSpPr>
+        <p:spPr/>
+        <p:txBody>
+          <a:bodyPr/>
+          <a:lstStyle/>
+          <a:p>
+            <a:r>
+              <a:rPr>
+                <a:latin typeface="游ゴシック Medium"/>
+                <a:ea typeface="游ゴシック Medium"/>
+                <a:cs typeface="游ゴシック Medium"/>
+              </a:rPr>
+              <a:t>Microsoft 365 Copilot でできること</a:t>
+            </a:r>
+          </a:p>
+        </p:txBody>
+      </p:sp>
+      <p:sp>
+        <p:nvSpPr>
+          <p:cNvPr id="3" name="TextBox 2"/>
+          <p:cNvSpPr txBox="1"/>
+          <p:nvPr/>
+        </p:nvSpPr>
+        <p:spPr>
+          <a:xfrm>
+            <a:off x="813816" y="1024128"/>
+            <a:ext cx="10561320" cy="457200"/>
+          </a:xfrm>
+          <a:prstGeom prst="rect">
+            <a:avLst/>
+          </a:prstGeom>
+          <a:noFill/>
+        </p:spPr>
+        <p:txBody>
+          <a:bodyPr wrap="square" lIns="0" tIns="0" rIns="0" bIns="0" anchor="t">
+            <a:spAutoFit/>
+          </a:bodyPr>
+          <a:lstStyle/>
+          <a:p>
+            <a:pPr algn="l">
+              <a:spcBef>
+                <a:spcPts val="0"/>
+              </a:spcBef>
+              <a:spcAft>
+                <a:spcPts val="400"/>
+              </a:spcAft>
+            </a:pPr>
+            <a:r>
+              <a:rPr sz="1300" b="0">
+                <a:solidFill>
+                  <a:srgbClr val="B9C6DA"/>
+                </a:solidFill>
+                <a:latin typeface="游ゴシック Medium"/>
+                <a:ea typeface="游ゴシック Medium"/>
+                <a:cs typeface="游ゴシック Medium"/>
+              </a:rPr>
+              <a:t>使い慣れた Microsoft 製品の中で、自社データを使って日常業務を支援します。</a:t>
+            </a:r>
+          </a:p>
+        </p:txBody>
+      </p:sp>
+      <p:sp>
+        <p:nvSpPr>
+          <p:cNvPr id="4" name="Rectangle 3"/>
+          <p:cNvSpPr/>
+          <p:nvPr/>
+        </p:nvSpPr>
+        <p:spPr>
+          <a:xfrm>
+            <a:off x="813816" y="1527048"/>
+            <a:ext cx="137160" cy="137160"/>
+          </a:xfrm>
+          <a:prstGeom prst="rect">
+            <a:avLst/>
+          </a:prstGeom>
+          <a:solidFill>
+            <a:srgbClr val="8FB9EC"/>
+          </a:solidFill>
+          <a:ln>
+            <a:noFill/>
+          </a:ln>
+          <a:effectLst/>
+        </p:spPr>
+        <p:style>
+          <a:lnRef idx="1">
+            <a:schemeClr val="accent1"/>
+          </a:lnRef>
+          <a:fillRef idx="3">
+            <a:schemeClr val="accent1"/>
+          </a:fillRef>
+          <a:effectRef idx="2">
+            <a:schemeClr val="accent1"/>
+          </a:effectRef>
+          <a:fontRef idx="minor">
+            <a:schemeClr val="lt1"/>
+          </a:fontRef>
+        </p:style>
+        <p:txBody>
+          <a:bodyPr rtlCol="0" anchor="ctr"/>
+          <a:lstStyle/>
+          <a:p>
+            <a:pPr algn="ctr"/>
+            <a:endParaRPr/>
+          </a:p>
+        </p:txBody>
+      </p:sp>
+      <p:sp>
+        <p:nvSpPr>
+          <p:cNvPr id="5" name="TextBox 4"/>
+          <p:cNvSpPr txBox="1"/>
+          <p:nvPr/>
+        </p:nvSpPr>
+        <p:spPr>
+          <a:xfrm>
+            <a:off x="1133856" y="1444752"/>
+            <a:ext cx="10241280" cy="365760"/>
+          </a:xfrm>
+          <a:prstGeom prst="rect">
+            <a:avLst/>
+          </a:prstGeom>
+          <a:noFill/>
+        </p:spPr>
+        <p:txBody>
+          <a:bodyPr wrap="square" lIns="0" tIns="0" rIns="0" bIns="0" anchor="t">
+            <a:spAutoFit/>
+          </a:bodyPr>
+          <a:lstStyle/>
+          <a:p>
+            <a:pPr algn="l">
+              <a:spcBef>
+                <a:spcPts val="0"/>
+              </a:spcBef>
+              <a:spcAft>
+                <a:spcPts val="400"/>
+              </a:spcAft>
+            </a:pPr>
+            <a:r>
+              <a:rPr sz="1600" b="1">
+                <a:solidFill>
+                  <a:srgbClr val="FFFFFF"/>
+                </a:solidFill>
+                <a:latin typeface="游ゴシック Medium"/>
+                <a:ea typeface="游ゴシック Medium"/>
+                <a:cs typeface="游ゴシック Medium"/>
+              </a:rPr>
+              <a:t>Officeアプリの中で使える</a:t>
+            </a:r>
+          </a:p>
+        </p:txBody>
+      </p:sp>
+      <p:sp>
+        <p:nvSpPr>
+          <p:cNvPr id="6" name="TextBox 5"/>
+          <p:cNvSpPr txBox="1"/>
+          <p:nvPr/>
+        </p:nvSpPr>
+        <p:spPr>
+          <a:xfrm>
+            <a:off x="1133856" y="1819656"/>
+            <a:ext cx="10241280" cy="411480"/>
+          </a:xfrm>
+          <a:prstGeom prst="rect">
+            <a:avLst/>
+          </a:prstGeom>
+          <a:noFill/>
+        </p:spPr>
+        <p:txBody>
+          <a:bodyPr wrap="square" lIns="0" tIns="0" rIns="0" bIns="0" anchor="t">
+            <a:spAutoFit/>
+          </a:bodyPr>
+          <a:lstStyle/>
+          <a:p>
+            <a:pPr algn="l">
+              <a:spcBef>
+                <a:spcPts val="0"/>
+              </a:spcBef>
+              <a:spcAft>
+                <a:spcPts val="400"/>
+              </a:spcAft>
+            </a:pPr>
+            <a:r>
+              <a:rPr sz="1300" b="0">
+                <a:solidFill>
+                  <a:srgbClr val="E8EDF4"/>
+                </a:solidFill>
+                <a:latin typeface="游ゴシック Medium"/>
+                <a:ea typeface="游ゴシック Medium"/>
+                <a:cs typeface="游ゴシック Medium"/>
+              </a:rPr>
+              <a:t>Word・Excel・PowerPoint・Outlook・Teams から直接呼び出せる。</a:t>
+            </a:r>
+          </a:p>
+        </p:txBody>
+      </p:sp>
+      <p:sp>
+        <p:nvSpPr>
+          <p:cNvPr id="7" name="Rectangle 6"/>
+          <p:cNvSpPr/>
+          <p:nvPr/>
+        </p:nvSpPr>
+        <p:spPr>
+          <a:xfrm>
+            <a:off x="813816" y="2309774"/>
+            <a:ext cx="137160" cy="137160"/>
+          </a:xfrm>
+          <a:prstGeom prst="rect">
+            <a:avLst/>
+          </a:prstGeom>
+          <a:solidFill>
+            <a:srgbClr val="8FB9EC"/>
+          </a:solidFill>
+          <a:ln>
+            <a:noFill/>
+          </a:ln>
+          <a:effectLst/>
+        </p:spPr>
+        <p:style>
+          <a:lnRef idx="1">
+            <a:schemeClr val="accent1"/>
+          </a:lnRef>
+          <a:fillRef idx="3">
+            <a:schemeClr val="accent1"/>
+          </a:fillRef>
+          <a:effectRef idx="2">
+            <a:schemeClr val="accent1"/>
+          </a:effectRef>
+          <a:fontRef idx="minor">
+            <a:schemeClr val="lt1"/>
+          </a:fontRef>
+        </p:style>
+        <p:txBody>
+          <a:bodyPr rtlCol="0" anchor="ctr"/>
+          <a:lstStyle/>
+          <a:p>
+            <a:pPr algn="ctr"/>
+            <a:endParaRPr/>
+          </a:p>
+        </p:txBody>
+      </p:sp>
+      <p:sp>
+        <p:nvSpPr>
+          <p:cNvPr id="8" name="TextBox 7"/>
+          <p:cNvSpPr txBox="1"/>
+          <p:nvPr/>
+        </p:nvSpPr>
+        <p:spPr>
+          <a:xfrm>
+            <a:off x="1133856" y="2227478"/>
+            <a:ext cx="10241280" cy="365760"/>
+          </a:xfrm>
+          <a:prstGeom prst="rect">
+            <a:avLst/>
+          </a:prstGeom>
+          <a:noFill/>
+        </p:spPr>
+        <p:txBody>
+          <a:bodyPr wrap="square" lIns="0" tIns="0" rIns="0" bIns="0" anchor="t">
+            <a:spAutoFit/>
+          </a:bodyPr>
+          <a:lstStyle/>
+          <a:p>
+            <a:pPr algn="l">
+              <a:spcBef>
+                <a:spcPts val="0"/>
+              </a:spcBef>
+              <a:spcAft>
+                <a:spcPts val="400"/>
+              </a:spcAft>
+            </a:pPr>
+            <a:r>
+              <a:rPr sz="1600" b="1">
+                <a:solidFill>
+                  <a:srgbClr val="FFFFFF"/>
+                </a:solidFill>
+                <a:latin typeface="游ゴシック Medium"/>
+                <a:ea typeface="游ゴシック Medium"/>
+                <a:cs typeface="游ゴシック Medium"/>
+              </a:rPr>
+              <a:t>自社データを自動で活用</a:t>
+            </a:r>
+          </a:p>
+        </p:txBody>
+      </p:sp>
+      <p:sp>
+        <p:nvSpPr>
+          <p:cNvPr id="9" name="TextBox 8"/>
+          <p:cNvSpPr txBox="1"/>
+          <p:nvPr/>
+        </p:nvSpPr>
+        <p:spPr>
+          <a:xfrm>
+            <a:off x="1133856" y="2602382"/>
+            <a:ext cx="10241280" cy="411480"/>
+          </a:xfrm>
+          <a:prstGeom prst="rect">
+            <a:avLst/>
+          </a:prstGeom>
+          <a:noFill/>
+        </p:spPr>
+        <p:txBody>
+          <a:bodyPr wrap="square" lIns="0" tIns="0" rIns="0" bIns="0" anchor="t">
+            <a:spAutoFit/>
+          </a:bodyPr>
+          <a:lstStyle/>
+          <a:p>
+            <a:pPr algn="l">
+              <a:spcBef>
+                <a:spcPts val="0"/>
+              </a:spcBef>
+              <a:spcAft>
+                <a:spcPts val="400"/>
+              </a:spcAft>
+            </a:pPr>
+            <a:r>
+              <a:rPr sz="1300" b="0">
+                <a:solidFill>
+                  <a:srgbClr val="E8EDF4"/>
+                </a:solidFill>
+                <a:latin typeface="游ゴシック Medium"/>
+                <a:ea typeface="游ゴシック Medium"/>
+                <a:cs typeface="游ゴシック Medium"/>
+              </a:rPr>
+              <a:t>メール・文書・会議・予定を参照して、要約・下書き・分析ができる。</a:t>
+            </a:r>
+          </a:p>
+        </p:txBody>
+      </p:sp>
+      <p:sp>
+        <p:nvSpPr>
+          <p:cNvPr id="10" name="Rectangle 9"/>
+          <p:cNvSpPr/>
+          <p:nvPr/>
+        </p:nvSpPr>
+        <p:spPr>
+          <a:xfrm>
+            <a:off x="813816" y="3092500"/>
+            <a:ext cx="137160" cy="137160"/>
+          </a:xfrm>
+          <a:prstGeom prst="rect">
+            <a:avLst/>
+          </a:prstGeom>
+          <a:solidFill>
+            <a:srgbClr val="8FB9EC"/>
+          </a:solidFill>
+          <a:ln>
+            <a:noFill/>
+          </a:ln>
+          <a:effectLst/>
+        </p:spPr>
+        <p:style>
+          <a:lnRef idx="1">
+            <a:schemeClr val="accent1"/>
+          </a:lnRef>
+          <a:fillRef idx="3">
+            <a:schemeClr val="accent1"/>
+          </a:fillRef>
+          <a:effectRef idx="2">
+            <a:schemeClr val="accent1"/>
+          </a:effectRef>
+          <a:fontRef idx="minor">
+            <a:schemeClr val="lt1"/>
+          </a:fontRef>
+        </p:style>
+        <p:txBody>
+          <a:bodyPr rtlCol="0" anchor="ctr"/>
+          <a:lstStyle/>
+          <a:p>
+            <a:pPr algn="ctr"/>
+            <a:endParaRPr/>
+          </a:p>
+        </p:txBody>
+      </p:sp>
+      <p:sp>
+        <p:nvSpPr>
+          <p:cNvPr id="11" name="TextBox 10"/>
+          <p:cNvSpPr txBox="1"/>
+          <p:nvPr/>
+        </p:nvSpPr>
+        <p:spPr>
+          <a:xfrm>
+            <a:off x="1133856" y="3010204"/>
+            <a:ext cx="10241280" cy="365760"/>
+          </a:xfrm>
+          <a:prstGeom prst="rect">
+            <a:avLst/>
+          </a:prstGeom>
+          <a:noFill/>
+        </p:spPr>
+        <p:txBody>
+          <a:bodyPr wrap="square" lIns="0" tIns="0" rIns="0" bIns="0" anchor="t">
+            <a:spAutoFit/>
+          </a:bodyPr>
+          <a:lstStyle/>
+          <a:p>
+            <a:pPr algn="l">
+              <a:spcBef>
+                <a:spcPts val="0"/>
+              </a:spcBef>
+              <a:spcAft>
+                <a:spcPts val="400"/>
+              </a:spcAft>
+            </a:pPr>
+            <a:r>
+              <a:rPr sz="1600" b="1">
+                <a:solidFill>
+                  <a:srgbClr val="FFFFFF"/>
+                </a:solidFill>
+                <a:latin typeface="游ゴシック Medium"/>
+                <a:ea typeface="游ゴシック Medium"/>
+                <a:cs typeface="游ゴシック Medium"/>
+              </a:rPr>
+              <a:t>会議・メールを効率化</a:t>
+            </a:r>
+          </a:p>
+        </p:txBody>
+      </p:sp>
+      <p:sp>
+        <p:nvSpPr>
+          <p:cNvPr id="12" name="TextBox 11"/>
+          <p:cNvSpPr txBox="1"/>
+          <p:nvPr/>
+        </p:nvSpPr>
+        <p:spPr>
+          <a:xfrm>
+            <a:off x="1133856" y="3385108"/>
+            <a:ext cx="10241280" cy="411480"/>
+          </a:xfrm>
+          <a:prstGeom prst="rect">
+            <a:avLst/>
+          </a:prstGeom>
+          <a:noFill/>
+        </p:spPr>
+        <p:txBody>
+          <a:bodyPr wrap="square" lIns="0" tIns="0" rIns="0" bIns="0" anchor="t">
+            <a:spAutoFit/>
+          </a:bodyPr>
+          <a:lstStyle/>
+          <a:p>
+            <a:pPr algn="l">
+              <a:spcBef>
+                <a:spcPts val="0"/>
+              </a:spcBef>
+              <a:spcAft>
+                <a:spcPts val="400"/>
+              </a:spcAft>
+            </a:pPr>
+            <a:r>
+              <a:rPr sz="1300" b="0">
+                <a:solidFill>
+                  <a:srgbClr val="E8EDF4"/>
+                </a:solidFill>
+                <a:latin typeface="游ゴシック Medium"/>
+                <a:ea typeface="游ゴシック Medium"/>
+                <a:cs typeface="游ゴシック Medium"/>
+              </a:rPr>
+              <a:t>Teams会議の要約やアクション抽出、メールの下書き・整理。</a:t>
+            </a:r>
+          </a:p>
+        </p:txBody>
+      </p:sp>
+      <p:sp>
+        <p:nvSpPr>
+          <p:cNvPr id="13" name="Rectangle 12"/>
+          <p:cNvSpPr/>
+          <p:nvPr/>
+        </p:nvSpPr>
+        <p:spPr>
+          <a:xfrm>
+            <a:off x="813816" y="3875227"/>
+            <a:ext cx="137160" cy="137160"/>
+          </a:xfrm>
+          <a:prstGeom prst="rect">
+            <a:avLst/>
+          </a:prstGeom>
+          <a:solidFill>
+            <a:srgbClr val="8FB9EC"/>
+          </a:solidFill>
+          <a:ln>
+            <a:noFill/>
+          </a:ln>
+          <a:effectLst/>
+        </p:spPr>
+        <p:style>
+          <a:lnRef idx="1">
+            <a:schemeClr val="accent1"/>
+          </a:lnRef>
+          <a:fillRef idx="3">
+            <a:schemeClr val="accent1"/>
+          </a:fillRef>
+          <a:effectRef idx="2">
+            <a:schemeClr val="accent1"/>
+          </a:effectRef>
+          <a:fontRef idx="minor">
+            <a:schemeClr val="lt1"/>
+          </a:fontRef>
+        </p:style>
+        <p:txBody>
+          <a:bodyPr rtlCol="0" anchor="ctr"/>
+          <a:lstStyle/>
+          <a:p>
+            <a:pPr algn="ctr"/>
+            <a:endParaRPr/>
+          </a:p>
+        </p:txBody>
+      </p:sp>
+      <p:sp>
+        <p:nvSpPr>
+          <p:cNvPr id="14" name="TextBox 13"/>
+          <p:cNvSpPr txBox="1"/>
+          <p:nvPr/>
+        </p:nvSpPr>
+        <p:spPr>
+          <a:xfrm>
+            <a:off x="1133856" y="3792931"/>
+            <a:ext cx="10241280" cy="365760"/>
+          </a:xfrm>
+          <a:prstGeom prst="rect">
+            <a:avLst/>
+          </a:prstGeom>
+          <a:noFill/>
+        </p:spPr>
+        <p:txBody>
+          <a:bodyPr wrap="square" lIns="0" tIns="0" rIns="0" bIns="0" anchor="t">
+            <a:spAutoFit/>
+          </a:bodyPr>
+          <a:lstStyle/>
+          <a:p>
+            <a:pPr algn="l">
+              <a:spcBef>
+                <a:spcPts val="0"/>
+              </a:spcBef>
+              <a:spcAft>
+                <a:spcPts val="400"/>
+              </a:spcAft>
+            </a:pPr>
+            <a:r>
+              <a:rPr sz="1600" b="1">
+                <a:solidFill>
+                  <a:srgbClr val="FFFFFF"/>
+                </a:solidFill>
+                <a:latin typeface="游ゴシック Medium"/>
+                <a:ea typeface="游ゴシック Medium"/>
+                <a:cs typeface="游ゴシック Medium"/>
+              </a:rPr>
+              <a:t>資料・データ作成</a:t>
+            </a:r>
+          </a:p>
+        </p:txBody>
+      </p:sp>
+      <p:sp>
+        <p:nvSpPr>
+          <p:cNvPr id="15" name="TextBox 14"/>
+          <p:cNvSpPr txBox="1"/>
+          <p:nvPr/>
+        </p:nvSpPr>
+        <p:spPr>
+          <a:xfrm>
+            <a:off x="1133856" y="4167835"/>
+            <a:ext cx="10241280" cy="411480"/>
+          </a:xfrm>
+          <a:prstGeom prst="rect">
+            <a:avLst/>
+          </a:prstGeom>
+          <a:noFill/>
+        </p:spPr>
+        <p:txBody>
+          <a:bodyPr wrap="square" lIns="0" tIns="0" rIns="0" bIns="0" anchor="t">
+            <a:spAutoFit/>
+          </a:bodyPr>
+          <a:lstStyle/>
+          <a:p>
+            <a:pPr algn="l">
+              <a:spcBef>
+                <a:spcPts val="0"/>
+              </a:spcBef>
+              <a:spcAft>
+                <a:spcPts val="400"/>
+              </a:spcAft>
+            </a:pPr>
+            <a:r>
+              <a:rPr sz="1300" b="0">
+                <a:solidFill>
+                  <a:srgbClr val="E8EDF4"/>
+                </a:solidFill>
+                <a:latin typeface="游ゴシック Medium"/>
+                <a:ea typeface="游ゴシック Medium"/>
+                <a:cs typeface="游ゴシック Medium"/>
+              </a:rPr>
+              <a:t>PowerPointのスライド生成、Excelのデータ分析・数式・グラフ作成。</a:t>
+            </a:r>
+          </a:p>
+        </p:txBody>
+      </p:sp>
+      <p:sp>
+        <p:nvSpPr>
+          <p:cNvPr id="16" name="Rectangle 15"/>
+          <p:cNvSpPr/>
+          <p:nvPr/>
+        </p:nvSpPr>
+        <p:spPr>
+          <a:xfrm>
+            <a:off x="813816" y="4657953"/>
+            <a:ext cx="137160" cy="137160"/>
+          </a:xfrm>
+          <a:prstGeom prst="rect">
+            <a:avLst/>
+          </a:prstGeom>
+          <a:solidFill>
+            <a:srgbClr val="8FB9EC"/>
+          </a:solidFill>
+          <a:ln>
+            <a:noFill/>
+          </a:ln>
+          <a:effectLst/>
+        </p:spPr>
+        <p:style>
+          <a:lnRef idx="1">
+            <a:schemeClr val="accent1"/>
+          </a:lnRef>
+          <a:fillRef idx="3">
+            <a:schemeClr val="accent1"/>
+          </a:fillRef>
+          <a:effectRef idx="2">
+            <a:schemeClr val="accent1"/>
+          </a:effectRef>
+          <a:fontRef idx="minor">
+            <a:schemeClr val="lt1"/>
+          </a:fontRef>
+        </p:style>
+        <p:txBody>
+          <a:bodyPr rtlCol="0" anchor="ctr"/>
+          <a:lstStyle/>
+          <a:p>
+            <a:pPr algn="ctr"/>
+            <a:endParaRPr/>
+          </a:p>
+        </p:txBody>
+      </p:sp>
+      <p:sp>
+        <p:nvSpPr>
+          <p:cNvPr id="17" name="TextBox 16"/>
+          <p:cNvSpPr txBox="1"/>
+          <p:nvPr/>
+        </p:nvSpPr>
+        <p:spPr>
+          <a:xfrm>
+            <a:off x="1133856" y="4575657"/>
+            <a:ext cx="10241280" cy="365760"/>
+          </a:xfrm>
+          <a:prstGeom prst="rect">
+            <a:avLst/>
+          </a:prstGeom>
+          <a:noFill/>
+        </p:spPr>
+        <p:txBody>
+          <a:bodyPr wrap="square" lIns="0" tIns="0" rIns="0" bIns="0" anchor="t">
+            <a:spAutoFit/>
+          </a:bodyPr>
+          <a:lstStyle/>
+          <a:p>
+            <a:pPr algn="l">
+              <a:spcBef>
+                <a:spcPts val="0"/>
+              </a:spcBef>
+              <a:spcAft>
+                <a:spcPts val="400"/>
+              </a:spcAft>
+            </a:pPr>
+            <a:r>
+              <a:rPr sz="1600" b="1">
+                <a:solidFill>
+                  <a:srgbClr val="FFFFFF"/>
+                </a:solidFill>
+                <a:latin typeface="游ゴシック Medium"/>
+                <a:ea typeface="游ゴシック Medium"/>
+                <a:cs typeface="游ゴシック Medium"/>
+              </a:rPr>
+              <a:t>エージェントで自動化</a:t>
+            </a:r>
+          </a:p>
+        </p:txBody>
+      </p:sp>
+      <p:sp>
+        <p:nvSpPr>
+          <p:cNvPr id="18" name="TextBox 17"/>
+          <p:cNvSpPr txBox="1"/>
+          <p:nvPr/>
+        </p:nvSpPr>
+        <p:spPr>
+          <a:xfrm>
+            <a:off x="1133856" y="4950561"/>
+            <a:ext cx="10241280" cy="411480"/>
+          </a:xfrm>
+          <a:prstGeom prst="rect">
+            <a:avLst/>
+          </a:prstGeom>
+          <a:noFill/>
+        </p:spPr>
+        <p:txBody>
+          <a:bodyPr wrap="square" lIns="0" tIns="0" rIns="0" bIns="0" anchor="t">
+            <a:spAutoFit/>
+          </a:bodyPr>
+          <a:lstStyle/>
+          <a:p>
+            <a:pPr algn="l">
+              <a:spcBef>
+                <a:spcPts val="0"/>
+              </a:spcBef>
+              <a:spcAft>
+                <a:spcPts val="400"/>
+              </a:spcAft>
+            </a:pPr>
+            <a:r>
+              <a:rPr sz="1300" b="0">
+                <a:solidFill>
+                  <a:srgbClr val="E8EDF4"/>
+                </a:solidFill>
+                <a:latin typeface="游ゴシック Medium"/>
+                <a:ea typeface="游ゴシック Medium"/>
+                <a:cs typeface="游ゴシック Medium"/>
+              </a:rPr>
+              <a:t>Copilot Studio で業務プロセス用のエージェントを作成できる。</a:t>
+            </a:r>
+          </a:p>
+        </p:txBody>
+      </p:sp>
+    </p:spTree>
+  </p:cSld>
+  <p:clrMapOvr>
+    <a:masterClrMapping/>
+  </p:clrMapOvr>
+</p:sld>
+</file>
+
+<file path=ppt/slides/slide4.xml><?xml version="1.0" encoding="utf-8"?>
+<p:sld xmlns:a="http://schemas.openxmlformats.org/drawingml/2006/main" xmlns:r="http://schemas.openxmlformats.org/officeDocument/2006/relationships" xmlns:p="http://schemas.openxmlformats.org/presentationml/2006/main">
+  <p:cSld>
+    <p:spTree>
+      <p:nvGrpSpPr>
+        <p:cNvPr id="1" name=""/>
+        <p:cNvGrpSpPr/>
+        <p:nvPr/>
+      </p:nvGrpSpPr>
+      <p:grpSpPr>
+        <a:xfrm>
+          <a:off x="0" y="0"/>
+          <a:ext cx="0" cy="0"/>
+          <a:chOff x="0" y="0"/>
+          <a:chExt cx="0" cy="0"/>
+        </a:xfrm>
+      </p:grpSpPr>
+      <p:sp>
+        <p:nvSpPr>
           <p:cNvPr id="4" name="タイトル 3">
             <a:extLst>
               <a:ext uri="{FF2B5EF4-FFF2-40B4-BE49-F238E27FC236}">
@@ -10897,12 +13007,70 @@
           </a:p>
         </p:txBody>
       </p:sp>
+      <p:sp>
+        <p:nvSpPr>
+          <p:cNvPr id="5" name="TextBox 2">
+            <a:extLst>
+              <a:ext uri="{FF2B5EF4-FFF2-40B4-BE49-F238E27FC236}">
+                <a16:creationId xmlns:a16="http://schemas.microsoft.com/office/drawing/2014/main" id="{5E6C7504-A2BD-274D-D8CC-A1D8B3CA005E}"/>
+              </a:ext>
+            </a:extLst>
+          </p:cNvPr>
+          <p:cNvSpPr txBox="1"/>
+          <p:nvPr/>
+        </p:nvSpPr>
+        <p:spPr>
+          <a:xfrm>
+            <a:off x="813816" y="1024128"/>
+            <a:ext cx="10561320" cy="200055"/>
+          </a:xfrm>
+          <a:prstGeom prst="rect">
+            <a:avLst/>
+          </a:prstGeom>
+          <a:noFill/>
+        </p:spPr>
+        <p:txBody>
+          <a:bodyPr wrap="square" lIns="0" tIns="0" rIns="0" bIns="0" anchor="t">
+            <a:spAutoFit/>
+          </a:bodyPr>
+          <a:lstStyle/>
+          <a:p>
+            <a:pPr algn="l">
+              <a:spcBef>
+                <a:spcPts val="0"/>
+              </a:spcBef>
+              <a:spcAft>
+                <a:spcPts val="400"/>
+              </a:spcAft>
+            </a:pPr>
+            <a:r>
+              <a:rPr lang="en-US" sz="1300" dirty="0" err="1">
+                <a:solidFill>
+                  <a:srgbClr val="B9C6DA"/>
+                </a:solidFill>
+                <a:latin typeface="游ゴシック Medium"/>
+                <a:ea typeface="游ゴシック Medium"/>
+                <a:cs typeface="游ゴシック Medium"/>
+              </a:rPr>
+              <a:t>プロジェクトを作成し、フォルダを指定することで包括的にファイルを扱う</a:t>
+            </a:r>
+            <a:endParaRPr sz="1300" b="0" dirty="0">
+              <a:solidFill>
+                <a:srgbClr val="B9C6DA"/>
+              </a:solidFill>
+              <a:latin typeface="游ゴシック Medium"/>
+              <a:ea typeface="游ゴシック Medium"/>
+              <a:cs typeface="游ゴシック Medium"/>
+            </a:endParaRPr>
+          </a:p>
+        </p:txBody>
+      </p:sp>
       <p:pic>
         <p:nvPicPr>
-          <p:cNvPr id="3" name="図 2">
+          <p:cNvPr id="6" name="図 5">
             <a:extLst>
               <a:ext uri="{FF2B5EF4-FFF2-40B4-BE49-F238E27FC236}">
-                <a16:creationId xmlns:a16="http://schemas.microsoft.com/office/drawing/2014/main" id="{C5E46195-B4B3-FFB3-4837-D89C5FCD7278}"/>
+                <a16:creationId xmlns:a16="http://schemas.microsoft.com/office/drawing/2014/main" id="{2D09A6CA-5D28-FE57-FFC8-2CACA3CC8996}"/>
               </a:ext>
             </a:extLst>
           </p:cNvPr>
@@ -10925,7 +13093,7 @@
         </p:blipFill>
         <p:spPr>
           <a:xfrm>
-            <a:off x="2209800" y="1430579"/>
+            <a:off x="2208276" y="1468740"/>
             <a:ext cx="7772400" cy="4606442"/>
           </a:xfrm>
           <a:prstGeom prst="rect">
@@ -10933,64 +13101,6 @@
           </a:prstGeom>
         </p:spPr>
       </p:pic>
-      <p:sp>
-        <p:nvSpPr>
-          <p:cNvPr id="5" name="TextBox 2">
-            <a:extLst>
-              <a:ext uri="{FF2B5EF4-FFF2-40B4-BE49-F238E27FC236}">
-                <a16:creationId xmlns:a16="http://schemas.microsoft.com/office/drawing/2014/main" id="{5E6C7504-A2BD-274D-D8CC-A1D8B3CA005E}"/>
-              </a:ext>
-            </a:extLst>
-          </p:cNvPr>
-          <p:cNvSpPr txBox="1"/>
-          <p:nvPr/>
-        </p:nvSpPr>
-        <p:spPr>
-          <a:xfrm>
-            <a:off x="813816" y="1024128"/>
-            <a:ext cx="10561320" cy="200055"/>
-          </a:xfrm>
-          <a:prstGeom prst="rect">
-            <a:avLst/>
-          </a:prstGeom>
-          <a:noFill/>
-        </p:spPr>
-        <p:txBody>
-          <a:bodyPr wrap="square" lIns="0" tIns="0" rIns="0" bIns="0" anchor="t">
-            <a:spAutoFit/>
-          </a:bodyPr>
-          <a:lstStyle/>
-          <a:p>
-            <a:pPr algn="l">
-              <a:spcBef>
-                <a:spcPts val="0"/>
-              </a:spcBef>
-              <a:spcAft>
-                <a:spcPts val="400"/>
-              </a:spcAft>
-            </a:pPr>
-            <a:r>
-              <a:rPr lang="en-US" sz="1300" dirty="0" err="1">
-                <a:solidFill>
-                  <a:srgbClr val="B9C6DA"/>
-                </a:solidFill>
-                <a:latin typeface="游ゴシック Medium"/>
-                <a:ea typeface="游ゴシック Medium"/>
-                <a:cs typeface="游ゴシック Medium"/>
-              </a:rPr>
-              <a:t>プロジェクトを作成し、フォルダを指定することで包括的にファイルを扱う</a:t>
-            </a:r>
-            <a:endParaRPr sz="1300" b="0" dirty="0">
-              <a:solidFill>
-                <a:srgbClr val="B9C6DA"/>
-              </a:solidFill>
-              <a:latin typeface="游ゴシック Medium"/>
-              <a:ea typeface="游ゴシック Medium"/>
-              <a:cs typeface="游ゴシック Medium"/>
-            </a:endParaRPr>
-          </a:p>
-        </p:txBody>
-      </p:sp>
     </p:spTree>
     <p:extLst>
       <p:ext uri="{BB962C8B-B14F-4D97-AF65-F5344CB8AC3E}">
@@ -11004,7 +13114,767 @@
 </p:sld>
 </file>
 
-<file path=ppt/slides/slide4.xml><?xml version="1.0" encoding="utf-8"?>
+<file path=ppt/slides/slide5.xml><?xml version="1.0" encoding="utf-8"?>
+<p:sld xmlns:a="http://schemas.openxmlformats.org/drawingml/2006/main" xmlns:r="http://schemas.openxmlformats.org/officeDocument/2006/relationships" xmlns:p="http://schemas.openxmlformats.org/presentationml/2006/main">
+  <p:cSld>
+    <p:spTree>
+      <p:nvGrpSpPr>
+        <p:cNvPr id="1" name=""/>
+        <p:cNvGrpSpPr/>
+        <p:nvPr/>
+      </p:nvGrpSpPr>
+      <p:grpSpPr>
+        <a:xfrm>
+          <a:off x="0" y="0"/>
+          <a:ext cx="0" cy="0"/>
+          <a:chOff x="0" y="0"/>
+          <a:chExt cx="0" cy="0"/>
+        </a:xfrm>
+      </p:grpSpPr>
+      <p:sp>
+        <p:nvSpPr>
+          <p:cNvPr id="2" name="Title 1"/>
+          <p:cNvSpPr>
+            <a:spLocks noGrp="1"/>
+          </p:cNvSpPr>
+          <p:nvPr>
+            <p:ph type="title"/>
+          </p:nvPr>
+        </p:nvSpPr>
+        <p:spPr/>
+        <p:txBody>
+          <a:bodyPr/>
+          <a:lstStyle/>
+          <a:p>
+            <a:r>
+              <a:rPr>
+                <a:latin typeface="游ゴシック Medium"/>
+                <a:ea typeface="游ゴシック Medium"/>
+                <a:cs typeface="游ゴシック Medium"/>
+              </a:rPr>
+              <a:t>Claude Cowork でできること</a:t>
+            </a:r>
+          </a:p>
+        </p:txBody>
+      </p:sp>
+      <p:sp>
+        <p:nvSpPr>
+          <p:cNvPr id="3" name="TextBox 2"/>
+          <p:cNvSpPr txBox="1"/>
+          <p:nvPr/>
+        </p:nvSpPr>
+        <p:spPr>
+          <a:xfrm>
+            <a:off x="813816" y="1024128"/>
+            <a:ext cx="10561320" cy="457200"/>
+          </a:xfrm>
+          <a:prstGeom prst="rect">
+            <a:avLst/>
+          </a:prstGeom>
+          <a:noFill/>
+        </p:spPr>
+        <p:txBody>
+          <a:bodyPr wrap="square" lIns="0" tIns="0" rIns="0" bIns="0" anchor="t">
+            <a:spAutoFit/>
+          </a:bodyPr>
+          <a:lstStyle/>
+          <a:p>
+            <a:pPr algn="l">
+              <a:spcBef>
+                <a:spcPts val="0"/>
+              </a:spcBef>
+              <a:spcAft>
+                <a:spcPts val="400"/>
+              </a:spcAft>
+            </a:pPr>
+            <a:r>
+              <a:rPr sz="1300" b="0">
+                <a:solidFill>
+                  <a:srgbClr val="B9C6DA"/>
+                </a:solidFill>
+                <a:latin typeface="游ゴシック Medium"/>
+                <a:ea typeface="游ゴシック Medium"/>
+                <a:cs typeface="游ゴシック Medium"/>
+              </a:rPr>
+              <a:t>ターミナル不要で、まとまった作業を丸ごと任せられる自律エージェントです。</a:t>
+            </a:r>
+          </a:p>
+        </p:txBody>
+      </p:sp>
+      <p:sp>
+        <p:nvSpPr>
+          <p:cNvPr id="4" name="Rectangle 3"/>
+          <p:cNvSpPr/>
+          <p:nvPr/>
+        </p:nvSpPr>
+        <p:spPr>
+          <a:xfrm>
+            <a:off x="813816" y="1527048"/>
+            <a:ext cx="137160" cy="137160"/>
+          </a:xfrm>
+          <a:prstGeom prst="rect">
+            <a:avLst/>
+          </a:prstGeom>
+          <a:solidFill>
+            <a:srgbClr val="8FB9EC"/>
+          </a:solidFill>
+          <a:ln>
+            <a:noFill/>
+          </a:ln>
+          <a:effectLst/>
+        </p:spPr>
+        <p:style>
+          <a:lnRef idx="1">
+            <a:schemeClr val="accent1"/>
+          </a:lnRef>
+          <a:fillRef idx="3">
+            <a:schemeClr val="accent1"/>
+          </a:fillRef>
+          <a:effectRef idx="2">
+            <a:schemeClr val="accent1"/>
+          </a:effectRef>
+          <a:fontRef idx="minor">
+            <a:schemeClr val="lt1"/>
+          </a:fontRef>
+        </p:style>
+        <p:txBody>
+          <a:bodyPr rtlCol="0" anchor="ctr"/>
+          <a:lstStyle/>
+          <a:p>
+            <a:pPr algn="ctr"/>
+            <a:endParaRPr/>
+          </a:p>
+        </p:txBody>
+      </p:sp>
+      <p:sp>
+        <p:nvSpPr>
+          <p:cNvPr id="5" name="TextBox 4"/>
+          <p:cNvSpPr txBox="1"/>
+          <p:nvPr/>
+        </p:nvSpPr>
+        <p:spPr>
+          <a:xfrm>
+            <a:off x="1133856" y="1444752"/>
+            <a:ext cx="10241280" cy="365760"/>
+          </a:xfrm>
+          <a:prstGeom prst="rect">
+            <a:avLst/>
+          </a:prstGeom>
+          <a:noFill/>
+        </p:spPr>
+        <p:txBody>
+          <a:bodyPr wrap="square" lIns="0" tIns="0" rIns="0" bIns="0" anchor="t">
+            <a:spAutoFit/>
+          </a:bodyPr>
+          <a:lstStyle/>
+          <a:p>
+            <a:pPr algn="l">
+              <a:spcBef>
+                <a:spcPts val="0"/>
+              </a:spcBef>
+              <a:spcAft>
+                <a:spcPts val="400"/>
+              </a:spcAft>
+            </a:pPr>
+            <a:r>
+              <a:rPr sz="1600" b="1">
+                <a:solidFill>
+                  <a:srgbClr val="FFFFFF"/>
+                </a:solidFill>
+                <a:latin typeface="游ゴシック Medium"/>
+                <a:ea typeface="游ゴシック Medium"/>
+                <a:cs typeface="游ゴシック Medium"/>
+              </a:rPr>
+              <a:t>コード不要で自律実行</a:t>
+            </a:r>
+          </a:p>
+        </p:txBody>
+      </p:sp>
+      <p:sp>
+        <p:nvSpPr>
+          <p:cNvPr id="6" name="TextBox 5"/>
+          <p:cNvSpPr txBox="1"/>
+          <p:nvPr/>
+        </p:nvSpPr>
+        <p:spPr>
+          <a:xfrm>
+            <a:off x="1133856" y="1819656"/>
+            <a:ext cx="10241280" cy="411480"/>
+          </a:xfrm>
+          <a:prstGeom prst="rect">
+            <a:avLst/>
+          </a:prstGeom>
+          <a:noFill/>
+        </p:spPr>
+        <p:txBody>
+          <a:bodyPr wrap="square" lIns="0" tIns="0" rIns="0" bIns="0" anchor="t">
+            <a:spAutoFit/>
+          </a:bodyPr>
+          <a:lstStyle/>
+          <a:p>
+            <a:pPr algn="l">
+              <a:spcBef>
+                <a:spcPts val="0"/>
+              </a:spcBef>
+              <a:spcAft>
+                <a:spcPts val="400"/>
+              </a:spcAft>
+            </a:pPr>
+            <a:r>
+              <a:rPr sz="1300" b="0">
+                <a:solidFill>
+                  <a:srgbClr val="E8EDF4"/>
+                </a:solidFill>
+                <a:latin typeface="游ゴシック Medium"/>
+                <a:ea typeface="游ゴシック Medium"/>
+                <a:cs typeface="游ゴシック Medium"/>
+              </a:rPr>
+              <a:t>コマンドを書かずに、複数ステップの作業を計画→実行できる。</a:t>
+            </a:r>
+          </a:p>
+        </p:txBody>
+      </p:sp>
+      <p:sp>
+        <p:nvSpPr>
+          <p:cNvPr id="7" name="Rectangle 6"/>
+          <p:cNvSpPr/>
+          <p:nvPr/>
+        </p:nvSpPr>
+        <p:spPr>
+          <a:xfrm>
+            <a:off x="813816" y="2309774"/>
+            <a:ext cx="137160" cy="137160"/>
+          </a:xfrm>
+          <a:prstGeom prst="rect">
+            <a:avLst/>
+          </a:prstGeom>
+          <a:solidFill>
+            <a:srgbClr val="8FB9EC"/>
+          </a:solidFill>
+          <a:ln>
+            <a:noFill/>
+          </a:ln>
+          <a:effectLst/>
+        </p:spPr>
+        <p:style>
+          <a:lnRef idx="1">
+            <a:schemeClr val="accent1"/>
+          </a:lnRef>
+          <a:fillRef idx="3">
+            <a:schemeClr val="accent1"/>
+          </a:fillRef>
+          <a:effectRef idx="2">
+            <a:schemeClr val="accent1"/>
+          </a:effectRef>
+          <a:fontRef idx="minor">
+            <a:schemeClr val="lt1"/>
+          </a:fontRef>
+        </p:style>
+        <p:txBody>
+          <a:bodyPr rtlCol="0" anchor="ctr"/>
+          <a:lstStyle/>
+          <a:p>
+            <a:pPr algn="ctr"/>
+            <a:endParaRPr/>
+          </a:p>
+        </p:txBody>
+      </p:sp>
+      <p:sp>
+        <p:nvSpPr>
+          <p:cNvPr id="8" name="TextBox 7"/>
+          <p:cNvSpPr txBox="1"/>
+          <p:nvPr/>
+        </p:nvSpPr>
+        <p:spPr>
+          <a:xfrm>
+            <a:off x="1133856" y="2227478"/>
+            <a:ext cx="10241280" cy="365760"/>
+          </a:xfrm>
+          <a:prstGeom prst="rect">
+            <a:avLst/>
+          </a:prstGeom>
+          <a:noFill/>
+        </p:spPr>
+        <p:txBody>
+          <a:bodyPr wrap="square" lIns="0" tIns="0" rIns="0" bIns="0" anchor="t">
+            <a:spAutoFit/>
+          </a:bodyPr>
+          <a:lstStyle/>
+          <a:p>
+            <a:pPr algn="l">
+              <a:spcBef>
+                <a:spcPts val="0"/>
+              </a:spcBef>
+              <a:spcAft>
+                <a:spcPts val="400"/>
+              </a:spcAft>
+            </a:pPr>
+            <a:r>
+              <a:rPr sz="1600" b="1">
+                <a:solidFill>
+                  <a:srgbClr val="FFFFFF"/>
+                </a:solidFill>
+                <a:latin typeface="游ゴシック Medium"/>
+                <a:ea typeface="游ゴシック Medium"/>
+                <a:cs typeface="游ゴシック Medium"/>
+              </a:rPr>
+              <a:t>ローカルのファイルを直接扱う</a:t>
+            </a:r>
+          </a:p>
+        </p:txBody>
+      </p:sp>
+      <p:sp>
+        <p:nvSpPr>
+          <p:cNvPr id="9" name="TextBox 8"/>
+          <p:cNvSpPr txBox="1"/>
+          <p:nvPr/>
+        </p:nvSpPr>
+        <p:spPr>
+          <a:xfrm>
+            <a:off x="1133856" y="2602382"/>
+            <a:ext cx="10241280" cy="411480"/>
+          </a:xfrm>
+          <a:prstGeom prst="rect">
+            <a:avLst/>
+          </a:prstGeom>
+          <a:noFill/>
+        </p:spPr>
+        <p:txBody>
+          <a:bodyPr wrap="square" lIns="0" tIns="0" rIns="0" bIns="0" anchor="t">
+            <a:spAutoFit/>
+          </a:bodyPr>
+          <a:lstStyle/>
+          <a:p>
+            <a:pPr algn="l">
+              <a:spcBef>
+                <a:spcPts val="0"/>
+              </a:spcBef>
+              <a:spcAft>
+                <a:spcPts val="400"/>
+              </a:spcAft>
+            </a:pPr>
+            <a:r>
+              <a:rPr sz="1300" b="0">
+                <a:solidFill>
+                  <a:srgbClr val="E8EDF4"/>
+                </a:solidFill>
+                <a:latin typeface="游ゴシック Medium"/>
+                <a:ea typeface="游ゴシック Medium"/>
+                <a:cs typeface="游ゴシック Medium"/>
+              </a:rPr>
+              <a:t>選んだフォルダのファイルを、アップロードなしで読み書き・新規作成。</a:t>
+            </a:r>
+          </a:p>
+        </p:txBody>
+      </p:sp>
+      <p:sp>
+        <p:nvSpPr>
+          <p:cNvPr id="10" name="Rectangle 9"/>
+          <p:cNvSpPr/>
+          <p:nvPr/>
+        </p:nvSpPr>
+        <p:spPr>
+          <a:xfrm>
+            <a:off x="813816" y="3092500"/>
+            <a:ext cx="137160" cy="137160"/>
+          </a:xfrm>
+          <a:prstGeom prst="rect">
+            <a:avLst/>
+          </a:prstGeom>
+          <a:solidFill>
+            <a:srgbClr val="8FB9EC"/>
+          </a:solidFill>
+          <a:ln>
+            <a:noFill/>
+          </a:ln>
+          <a:effectLst/>
+        </p:spPr>
+        <p:style>
+          <a:lnRef idx="1">
+            <a:schemeClr val="accent1"/>
+          </a:lnRef>
+          <a:fillRef idx="3">
+            <a:schemeClr val="accent1"/>
+          </a:fillRef>
+          <a:effectRef idx="2">
+            <a:schemeClr val="accent1"/>
+          </a:effectRef>
+          <a:fontRef idx="minor">
+            <a:schemeClr val="lt1"/>
+          </a:fontRef>
+        </p:style>
+        <p:txBody>
+          <a:bodyPr rtlCol="0" anchor="ctr"/>
+          <a:lstStyle/>
+          <a:p>
+            <a:pPr algn="ctr"/>
+            <a:endParaRPr/>
+          </a:p>
+        </p:txBody>
+      </p:sp>
+      <p:sp>
+        <p:nvSpPr>
+          <p:cNvPr id="11" name="TextBox 10"/>
+          <p:cNvSpPr txBox="1"/>
+          <p:nvPr/>
+        </p:nvSpPr>
+        <p:spPr>
+          <a:xfrm>
+            <a:off x="1133856" y="3010204"/>
+            <a:ext cx="10241280" cy="365760"/>
+          </a:xfrm>
+          <a:prstGeom prst="rect">
+            <a:avLst/>
+          </a:prstGeom>
+          <a:noFill/>
+        </p:spPr>
+        <p:txBody>
+          <a:bodyPr wrap="square" lIns="0" tIns="0" rIns="0" bIns="0" anchor="t">
+            <a:spAutoFit/>
+          </a:bodyPr>
+          <a:lstStyle/>
+          <a:p>
+            <a:pPr algn="l">
+              <a:spcBef>
+                <a:spcPts val="0"/>
+              </a:spcBef>
+              <a:spcAft>
+                <a:spcPts val="400"/>
+              </a:spcAft>
+            </a:pPr>
+            <a:r>
+              <a:rPr sz="1600" b="1">
+                <a:solidFill>
+                  <a:srgbClr val="FFFFFF"/>
+                </a:solidFill>
+                <a:latin typeface="游ゴシック Medium"/>
+                <a:ea typeface="游ゴシック Medium"/>
+                <a:cs typeface="游ゴシック Medium"/>
+              </a:rPr>
+              <a:t>Web・外部ツール・コードまで</a:t>
+            </a:r>
+          </a:p>
+        </p:txBody>
+      </p:sp>
+      <p:sp>
+        <p:nvSpPr>
+          <p:cNvPr id="12" name="TextBox 11"/>
+          <p:cNvSpPr txBox="1"/>
+          <p:nvPr/>
+        </p:nvSpPr>
+        <p:spPr>
+          <a:xfrm>
+            <a:off x="1133856" y="3385108"/>
+            <a:ext cx="10241280" cy="411480"/>
+          </a:xfrm>
+          <a:prstGeom prst="rect">
+            <a:avLst/>
+          </a:prstGeom>
+          <a:noFill/>
+        </p:spPr>
+        <p:txBody>
+          <a:bodyPr wrap="square" lIns="0" tIns="0" rIns="0" bIns="0" anchor="t">
+            <a:spAutoFit/>
+          </a:bodyPr>
+          <a:lstStyle/>
+          <a:p>
+            <a:pPr algn="l">
+              <a:spcBef>
+                <a:spcPts val="0"/>
+              </a:spcBef>
+              <a:spcAft>
+                <a:spcPts val="400"/>
+              </a:spcAft>
+            </a:pPr>
+            <a:r>
+              <a:rPr sz="1300" b="0">
+                <a:solidFill>
+                  <a:srgbClr val="E8EDF4"/>
+                </a:solidFill>
+                <a:latin typeface="游ゴシック Medium"/>
+                <a:ea typeface="游ゴシック Medium"/>
+                <a:cs typeface="游ゴシック Medium"/>
+              </a:rPr>
+              <a:t>Web参照、外部ツール連携(MCP)、コード実行まで任せられる。</a:t>
+            </a:r>
+          </a:p>
+        </p:txBody>
+      </p:sp>
+      <p:sp>
+        <p:nvSpPr>
+          <p:cNvPr id="13" name="Rectangle 12"/>
+          <p:cNvSpPr/>
+          <p:nvPr/>
+        </p:nvSpPr>
+        <p:spPr>
+          <a:xfrm>
+            <a:off x="813816" y="3875227"/>
+            <a:ext cx="137160" cy="137160"/>
+          </a:xfrm>
+          <a:prstGeom prst="rect">
+            <a:avLst/>
+          </a:prstGeom>
+          <a:solidFill>
+            <a:srgbClr val="8FB9EC"/>
+          </a:solidFill>
+          <a:ln>
+            <a:noFill/>
+          </a:ln>
+          <a:effectLst/>
+        </p:spPr>
+        <p:style>
+          <a:lnRef idx="1">
+            <a:schemeClr val="accent1"/>
+          </a:lnRef>
+          <a:fillRef idx="3">
+            <a:schemeClr val="accent1"/>
+          </a:fillRef>
+          <a:effectRef idx="2">
+            <a:schemeClr val="accent1"/>
+          </a:effectRef>
+          <a:fontRef idx="minor">
+            <a:schemeClr val="lt1"/>
+          </a:fontRef>
+        </p:style>
+        <p:txBody>
+          <a:bodyPr rtlCol="0" anchor="ctr"/>
+          <a:lstStyle/>
+          <a:p>
+            <a:pPr algn="ctr"/>
+            <a:endParaRPr/>
+          </a:p>
+        </p:txBody>
+      </p:sp>
+      <p:sp>
+        <p:nvSpPr>
+          <p:cNvPr id="14" name="TextBox 13"/>
+          <p:cNvSpPr txBox="1"/>
+          <p:nvPr/>
+        </p:nvSpPr>
+        <p:spPr>
+          <a:xfrm>
+            <a:off x="1133856" y="3792931"/>
+            <a:ext cx="10241280" cy="365760"/>
+          </a:xfrm>
+          <a:prstGeom prst="rect">
+            <a:avLst/>
+          </a:prstGeom>
+          <a:noFill/>
+        </p:spPr>
+        <p:txBody>
+          <a:bodyPr wrap="square" lIns="0" tIns="0" rIns="0" bIns="0" anchor="t">
+            <a:spAutoFit/>
+          </a:bodyPr>
+          <a:lstStyle/>
+          <a:p>
+            <a:pPr algn="l">
+              <a:spcBef>
+                <a:spcPts val="0"/>
+              </a:spcBef>
+              <a:spcAft>
+                <a:spcPts val="400"/>
+              </a:spcAft>
+            </a:pPr>
+            <a:r>
+              <a:rPr sz="1600" b="1">
+                <a:solidFill>
+                  <a:srgbClr val="FFFFFF"/>
+                </a:solidFill>
+                <a:latin typeface="游ゴシック Medium"/>
+                <a:ea typeface="游ゴシック Medium"/>
+                <a:cs typeface="游ゴシック Medium"/>
+              </a:rPr>
+              <a:t>多様な成果物を生成</a:t>
+            </a:r>
+          </a:p>
+        </p:txBody>
+      </p:sp>
+      <p:sp>
+        <p:nvSpPr>
+          <p:cNvPr id="15" name="TextBox 14"/>
+          <p:cNvSpPr txBox="1"/>
+          <p:nvPr/>
+        </p:nvSpPr>
+        <p:spPr>
+          <a:xfrm>
+            <a:off x="1133856" y="4167835"/>
+            <a:ext cx="10241280" cy="411480"/>
+          </a:xfrm>
+          <a:prstGeom prst="rect">
+            <a:avLst/>
+          </a:prstGeom>
+          <a:noFill/>
+        </p:spPr>
+        <p:txBody>
+          <a:bodyPr wrap="square" lIns="0" tIns="0" rIns="0" bIns="0" anchor="t">
+            <a:spAutoFit/>
+          </a:bodyPr>
+          <a:lstStyle/>
+          <a:p>
+            <a:pPr algn="l">
+              <a:spcBef>
+                <a:spcPts val="0"/>
+              </a:spcBef>
+              <a:spcAft>
+                <a:spcPts val="400"/>
+              </a:spcAft>
+            </a:pPr>
+            <a:r>
+              <a:rPr sz="1300" b="0">
+                <a:solidFill>
+                  <a:srgbClr val="E8EDF4"/>
+                </a:solidFill>
+                <a:latin typeface="游ゴシック Medium"/>
+                <a:ea typeface="游ゴシック Medium"/>
+                <a:cs typeface="游ゴシック Medium"/>
+              </a:rPr>
+              <a:t>文書・スライド・表・レポートに加え、独自ツールやダッシュボードも。</a:t>
+            </a:r>
+          </a:p>
+        </p:txBody>
+      </p:sp>
+      <p:sp>
+        <p:nvSpPr>
+          <p:cNvPr id="16" name="Rectangle 15"/>
+          <p:cNvSpPr/>
+          <p:nvPr/>
+        </p:nvSpPr>
+        <p:spPr>
+          <a:xfrm>
+            <a:off x="813816" y="4657953"/>
+            <a:ext cx="137160" cy="137160"/>
+          </a:xfrm>
+          <a:prstGeom prst="rect">
+            <a:avLst/>
+          </a:prstGeom>
+          <a:solidFill>
+            <a:srgbClr val="8FB9EC"/>
+          </a:solidFill>
+          <a:ln>
+            <a:noFill/>
+          </a:ln>
+          <a:effectLst/>
+        </p:spPr>
+        <p:style>
+          <a:lnRef idx="1">
+            <a:schemeClr val="accent1"/>
+          </a:lnRef>
+          <a:fillRef idx="3">
+            <a:schemeClr val="accent1"/>
+          </a:fillRef>
+          <a:effectRef idx="2">
+            <a:schemeClr val="accent1"/>
+          </a:effectRef>
+          <a:fontRef idx="minor">
+            <a:schemeClr val="lt1"/>
+          </a:fontRef>
+        </p:style>
+        <p:txBody>
+          <a:bodyPr rtlCol="0" anchor="ctr"/>
+          <a:lstStyle/>
+          <a:p>
+            <a:pPr algn="ctr"/>
+            <a:endParaRPr/>
+          </a:p>
+        </p:txBody>
+      </p:sp>
+      <p:sp>
+        <p:nvSpPr>
+          <p:cNvPr id="17" name="TextBox 16"/>
+          <p:cNvSpPr txBox="1"/>
+          <p:nvPr/>
+        </p:nvSpPr>
+        <p:spPr>
+          <a:xfrm>
+            <a:off x="1133856" y="4575657"/>
+            <a:ext cx="10241280" cy="365760"/>
+          </a:xfrm>
+          <a:prstGeom prst="rect">
+            <a:avLst/>
+          </a:prstGeom>
+          <a:noFill/>
+        </p:spPr>
+        <p:txBody>
+          <a:bodyPr wrap="square" lIns="0" tIns="0" rIns="0" bIns="0" anchor="t">
+            <a:spAutoFit/>
+          </a:bodyPr>
+          <a:lstStyle/>
+          <a:p>
+            <a:pPr algn="l">
+              <a:spcBef>
+                <a:spcPts val="0"/>
+              </a:spcBef>
+              <a:spcAft>
+                <a:spcPts val="400"/>
+              </a:spcAft>
+            </a:pPr>
+            <a:r>
+              <a:rPr sz="1600" b="1">
+                <a:solidFill>
+                  <a:srgbClr val="FFFFFF"/>
+                </a:solidFill>
+                <a:latin typeface="游ゴシック Medium"/>
+                <a:ea typeface="游ゴシック Medium"/>
+                <a:cs typeface="游ゴシック Medium"/>
+              </a:rPr>
+              <a:t>定期実行で自動化</a:t>
+            </a:r>
+          </a:p>
+        </p:txBody>
+      </p:sp>
+      <p:sp>
+        <p:nvSpPr>
+          <p:cNvPr id="18" name="TextBox 17"/>
+          <p:cNvSpPr txBox="1"/>
+          <p:nvPr/>
+        </p:nvSpPr>
+        <p:spPr>
+          <a:xfrm>
+            <a:off x="1133856" y="4950561"/>
+            <a:ext cx="10241280" cy="411480"/>
+          </a:xfrm>
+          <a:prstGeom prst="rect">
+            <a:avLst/>
+          </a:prstGeom>
+          <a:noFill/>
+        </p:spPr>
+        <p:txBody>
+          <a:bodyPr wrap="square" lIns="0" tIns="0" rIns="0" bIns="0" anchor="t">
+            <a:spAutoFit/>
+          </a:bodyPr>
+          <a:lstStyle/>
+          <a:p>
+            <a:pPr algn="l">
+              <a:spcBef>
+                <a:spcPts val="0"/>
+              </a:spcBef>
+              <a:spcAft>
+                <a:spcPts val="400"/>
+              </a:spcAft>
+            </a:pPr>
+            <a:r>
+              <a:rPr sz="1300" b="0">
+                <a:solidFill>
+                  <a:srgbClr val="E8EDF4"/>
+                </a:solidFill>
+                <a:latin typeface="游ゴシック Medium"/>
+                <a:ea typeface="游ゴシック Medium"/>
+                <a:cs typeface="游ゴシック Medium"/>
+              </a:rPr>
+              <a:t>作ったタスクをスケジュール実行し、繰り返し処理を自動化できる。</a:t>
+            </a:r>
+          </a:p>
+        </p:txBody>
+      </p:sp>
+    </p:spTree>
+  </p:cSld>
+  <p:clrMapOvr>
+    <a:masterClrMapping/>
+  </p:clrMapOvr>
+</p:sld>
+</file>
+
+<file path=ppt/slides/slide6.xml><?xml version="1.0" encoding="utf-8"?>
 <p:sld xmlns:a="http://schemas.openxmlformats.org/drawingml/2006/main" xmlns:r="http://schemas.openxmlformats.org/officeDocument/2006/relationships" xmlns:p="http://schemas.openxmlformats.org/presentationml/2006/main">
   <p:cSld>
     <p:spTree>
@@ -11862,7 +14732,7 @@
 </p:sld>
 </file>
 
-<file path=ppt/slides/slide5.xml><?xml version="1.0" encoding="utf-8"?>
+<file path=ppt/slides/slide7.xml><?xml version="1.0" encoding="utf-8"?>
 <p:sld xmlns:a="http://schemas.openxmlformats.org/drawingml/2006/main" xmlns:r="http://schemas.openxmlformats.org/officeDocument/2006/relationships" xmlns:p="http://schemas.openxmlformats.org/presentationml/2006/main">
   <p:cSld>
     <p:spTree>
@@ -12614,7 +15484,171 @@
 </p:sld>
 </file>
 
-<file path=ppt/slides/slide6.xml><?xml version="1.0" encoding="utf-8"?>
+<file path=ppt/slides/slide8.xml><?xml version="1.0" encoding="utf-8"?>
+<p:sld xmlns:a="http://schemas.openxmlformats.org/drawingml/2006/main" xmlns:r="http://schemas.openxmlformats.org/officeDocument/2006/relationships" xmlns:p="http://schemas.openxmlformats.org/presentationml/2006/main">
+  <p:cSld>
+    <p:spTree>
+      <p:nvGrpSpPr>
+        <p:cNvPr id="1" name=""/>
+        <p:cNvGrpSpPr/>
+        <p:nvPr/>
+      </p:nvGrpSpPr>
+      <p:grpSpPr>
+        <a:xfrm>
+          <a:off x="0" y="0"/>
+          <a:ext cx="0" cy="0"/>
+          <a:chOff x="0" y="0"/>
+          <a:chExt cx="0" cy="0"/>
+        </a:xfrm>
+      </p:grpSpPr>
+      <p:sp>
+        <p:nvSpPr>
+          <p:cNvPr id="4" name="タイトル 3">
+            <a:extLst>
+              <a:ext uri="{FF2B5EF4-FFF2-40B4-BE49-F238E27FC236}">
+                <a16:creationId xmlns:a16="http://schemas.microsoft.com/office/drawing/2014/main" id="{097E97DB-B53A-043D-E3F7-908B7EB6F271}"/>
+              </a:ext>
+            </a:extLst>
+          </p:cNvPr>
+          <p:cNvSpPr>
+            <a:spLocks noGrp="1"/>
+          </p:cNvSpPr>
+          <p:nvPr>
+            <p:ph type="title"/>
+          </p:nvPr>
+        </p:nvSpPr>
+        <p:spPr/>
+        <p:txBody>
+          <a:bodyPr/>
+          <a:lstStyle/>
+          <a:p>
+            <a:r>
+              <a:rPr lang="en-US" altLang="ja-JP" dirty="0"/>
+              <a:t>Claude Code</a:t>
+            </a:r>
+            <a:endParaRPr lang="ja-JP" altLang="en-US"/>
+          </a:p>
+        </p:txBody>
+      </p:sp>
+      <p:sp>
+        <p:nvSpPr>
+          <p:cNvPr id="8" name="TextBox 2">
+            <a:extLst>
+              <a:ext uri="{FF2B5EF4-FFF2-40B4-BE49-F238E27FC236}">
+                <a16:creationId xmlns:a16="http://schemas.microsoft.com/office/drawing/2014/main" id="{2494084B-435C-753D-B27E-EEC95279D1F1}"/>
+              </a:ext>
+            </a:extLst>
+          </p:cNvPr>
+          <p:cNvSpPr txBox="1"/>
+          <p:nvPr/>
+        </p:nvSpPr>
+        <p:spPr>
+          <a:xfrm>
+            <a:off x="813816" y="1024128"/>
+            <a:ext cx="10561320" cy="200055"/>
+          </a:xfrm>
+          <a:prstGeom prst="rect">
+            <a:avLst/>
+          </a:prstGeom>
+          <a:noFill/>
+        </p:spPr>
+        <p:txBody>
+          <a:bodyPr wrap="square" lIns="0" tIns="0" rIns="0" bIns="0" anchor="t">
+            <a:spAutoFit/>
+          </a:bodyPr>
+          <a:lstStyle/>
+          <a:p>
+            <a:pPr algn="l">
+              <a:spcBef>
+                <a:spcPts val="0"/>
+              </a:spcBef>
+              <a:spcAft>
+                <a:spcPts val="400"/>
+              </a:spcAft>
+            </a:pPr>
+            <a:r>
+              <a:rPr lang="en-US" sz="1300" b="0" dirty="0">
+                <a:solidFill>
+                  <a:srgbClr val="B9C6DA"/>
+                </a:solidFill>
+                <a:latin typeface="游ゴシック Medium"/>
+                <a:ea typeface="游ゴシック Medium"/>
+                <a:cs typeface="游ゴシック Medium"/>
+              </a:rPr>
+              <a:t>Claude Cowork </a:t>
+            </a:r>
+            <a:r>
+              <a:rPr lang="en-US" sz="1300" b="0" dirty="0" err="1">
+                <a:solidFill>
+                  <a:srgbClr val="B9C6DA"/>
+                </a:solidFill>
+                <a:latin typeface="游ゴシック Medium"/>
+                <a:ea typeface="游ゴシック Medium"/>
+                <a:cs typeface="游ゴシック Medium"/>
+              </a:rPr>
+              <a:t>よりも、コードの実装などに特化</a:t>
+            </a:r>
+            <a:endParaRPr lang="en-US" sz="1300" b="0" dirty="0">
+              <a:solidFill>
+                <a:srgbClr val="B9C6DA"/>
+              </a:solidFill>
+              <a:latin typeface="游ゴシック Medium"/>
+              <a:ea typeface="游ゴシック Medium"/>
+              <a:cs typeface="游ゴシック Medium"/>
+            </a:endParaRPr>
+          </a:p>
+        </p:txBody>
+      </p:sp>
+      <p:pic>
+        <p:nvPicPr>
+          <p:cNvPr id="6" name="図 5">
+            <a:extLst>
+              <a:ext uri="{FF2B5EF4-FFF2-40B4-BE49-F238E27FC236}">
+                <a16:creationId xmlns:a16="http://schemas.microsoft.com/office/drawing/2014/main" id="{A0A07DAD-5113-385F-6437-A524E1903485}"/>
+              </a:ext>
+            </a:extLst>
+          </p:cNvPr>
+          <p:cNvPicPr>
+            <a:picLocks noChangeAspect="1"/>
+          </p:cNvPicPr>
+          <p:nvPr/>
+        </p:nvPicPr>
+        <p:blipFill>
+          <a:blip r:embed="rId2">
+            <a:extLst>
+              <a:ext uri="{28A0092B-C50C-407E-A947-70E740481C1C}">
+                <a14:useLocalDpi xmlns:a14="http://schemas.microsoft.com/office/drawing/2010/main" val="0"/>
+              </a:ext>
+            </a:extLst>
+          </a:blip>
+          <a:stretch>
+            <a:fillRect/>
+          </a:stretch>
+        </p:blipFill>
+        <p:spPr>
+          <a:xfrm>
+            <a:off x="2208276" y="1468740"/>
+            <a:ext cx="7772400" cy="4925765"/>
+          </a:xfrm>
+          <a:prstGeom prst="rect">
+            <a:avLst/>
+          </a:prstGeom>
+        </p:spPr>
+      </p:pic>
+    </p:spTree>
+    <p:extLst>
+      <p:ext uri="{BB962C8B-B14F-4D97-AF65-F5344CB8AC3E}">
+        <p14:creationId xmlns:p14="http://schemas.microsoft.com/office/powerpoint/2010/main" val="2542293945"/>
+      </p:ext>
+    </p:extLst>
+  </p:cSld>
+  <p:clrMapOvr>
+    <a:masterClrMapping/>
+  </p:clrMapOvr>
+</p:sld>
+</file>
+
+<file path=ppt/slides/slide9.xml><?xml version="1.0" encoding="utf-8"?>
 <p:sld xmlns:a="http://schemas.openxmlformats.org/drawingml/2006/main" xmlns:r="http://schemas.openxmlformats.org/officeDocument/2006/relationships" xmlns:p="http://schemas.openxmlformats.org/presentationml/2006/main">
   <p:cSld>
     <p:spTree>
@@ -13355,2102 +16389,6 @@
                 <a:cs typeface="游ゴシック Medium"/>
               </a:rPr>
               <a:t>・コードやCLIで作り込み・自動化・リポジトリ操作をしたいとき → Claude Code</a:t>
-            </a:r>
-          </a:p>
-        </p:txBody>
-      </p:sp>
-    </p:spTree>
-  </p:cSld>
-  <p:clrMapOvr>
-    <a:masterClrMapping/>
-  </p:clrMapOvr>
-</p:sld>
-</file>
-
-<file path=ppt/slides/slide7.xml><?xml version="1.0" encoding="utf-8"?>
-<p:sld xmlns:a="http://schemas.openxmlformats.org/drawingml/2006/main" xmlns:r="http://schemas.openxmlformats.org/officeDocument/2006/relationships" xmlns:p="http://schemas.openxmlformats.org/presentationml/2006/main">
-  <p:cSld>
-    <p:spTree>
-      <p:nvGrpSpPr>
-        <p:cNvPr id="1" name=""/>
-        <p:cNvGrpSpPr/>
-        <p:nvPr/>
-      </p:nvGrpSpPr>
-      <p:grpSpPr>
-        <a:xfrm>
-          <a:off x="0" y="0"/>
-          <a:ext cx="0" cy="0"/>
-          <a:chOff x="0" y="0"/>
-          <a:chExt cx="0" cy="0"/>
-        </a:xfrm>
-      </p:grpSpPr>
-      <p:sp>
-        <p:nvSpPr>
-          <p:cNvPr id="2" name="Title 1"/>
-          <p:cNvSpPr>
-            <a:spLocks noGrp="1"/>
-          </p:cNvSpPr>
-          <p:nvPr>
-            <p:ph type="title"/>
-          </p:nvPr>
-        </p:nvSpPr>
-        <p:spPr/>
-        <p:txBody>
-          <a:bodyPr/>
-          <a:lstStyle/>
-          <a:p>
-            <a:r>
-              <a:rPr>
-                <a:latin typeface="游ゴシック Medium"/>
-                <a:ea typeface="游ゴシック Medium"/>
-                <a:cs typeface="游ゴシック Medium"/>
-              </a:rPr>
-              <a:t>【参考】Claude Code と同じ土俵の競合ツール</a:t>
-            </a:r>
-          </a:p>
-        </p:txBody>
-      </p:sp>
-      <p:sp>
-        <p:nvSpPr>
-          <p:cNvPr id="3" name="TextBox 2"/>
-          <p:cNvSpPr txBox="1"/>
-          <p:nvPr/>
-        </p:nvSpPr>
-        <p:spPr>
-          <a:xfrm>
-            <a:off x="813816" y="1024128"/>
-            <a:ext cx="10561320" cy="457200"/>
-          </a:xfrm>
-          <a:prstGeom prst="rect">
-            <a:avLst/>
-          </a:prstGeom>
-          <a:noFill/>
-        </p:spPr>
-        <p:txBody>
-          <a:bodyPr wrap="square" lIns="0" tIns="0" rIns="0" bIns="0" anchor="t">
-            <a:spAutoFit/>
-          </a:bodyPr>
-          <a:lstStyle/>
-          <a:p>
-            <a:pPr algn="l">
-              <a:spcBef>
-                <a:spcPts val="0"/>
-              </a:spcBef>
-              <a:spcAft>
-                <a:spcPts val="400"/>
-              </a:spcAft>
-            </a:pPr>
-            <a:r>
-              <a:rPr sz="1300" b="0">
-                <a:solidFill>
-                  <a:srgbClr val="B9C6DA"/>
-                </a:solidFill>
-                <a:latin typeface="游ゴシック Medium"/>
-                <a:ea typeface="游ゴシック Medium"/>
-                <a:cs typeface="游ゴシック Medium"/>
-              </a:rPr>
-              <a:t>Claude Code と同じ土俵のツール。ターミナル(CLI)からコードやファイルを自律操作して開発を進めます。</a:t>
-            </a:r>
-          </a:p>
-        </p:txBody>
-      </p:sp>
-      <p:sp>
-        <p:nvSpPr>
-          <p:cNvPr id="4" name="Rectangle 3"/>
-          <p:cNvSpPr/>
-          <p:nvPr/>
-        </p:nvSpPr>
-        <p:spPr>
-          <a:xfrm>
-            <a:off x="813816" y="1600200"/>
-            <a:ext cx="3346704" cy="2834640"/>
-          </a:xfrm>
-          <a:prstGeom prst="rect">
-            <a:avLst/>
-          </a:prstGeom>
-          <a:solidFill>
-            <a:srgbClr val="FFFFFF"/>
-          </a:solidFill>
-          <a:ln w="12700">
-            <a:solidFill>
-              <a:srgbClr val="D9DEE4"/>
-            </a:solidFill>
-          </a:ln>
-          <a:effectLst/>
-        </p:spPr>
-        <p:style>
-          <a:lnRef idx="1">
-            <a:schemeClr val="accent1"/>
-          </a:lnRef>
-          <a:fillRef idx="3">
-            <a:schemeClr val="accent1"/>
-          </a:fillRef>
-          <a:effectRef idx="2">
-            <a:schemeClr val="accent1"/>
-          </a:effectRef>
-          <a:fontRef idx="minor">
-            <a:schemeClr val="lt1"/>
-          </a:fontRef>
-        </p:style>
-        <p:txBody>
-          <a:bodyPr rtlCol="0" anchor="ctr"/>
-          <a:lstStyle/>
-          <a:p>
-            <a:pPr algn="ctr"/>
-            <a:endParaRPr/>
-          </a:p>
-        </p:txBody>
-      </p:sp>
-      <p:sp>
-        <p:nvSpPr>
-          <p:cNvPr id="5" name="TextBox 4"/>
-          <p:cNvSpPr txBox="1"/>
-          <p:nvPr/>
-        </p:nvSpPr>
-        <p:spPr>
-          <a:xfrm>
-            <a:off x="1069848" y="1819656"/>
-            <a:ext cx="2834640" cy="411480"/>
-          </a:xfrm>
-          <a:prstGeom prst="rect">
-            <a:avLst/>
-          </a:prstGeom>
-          <a:noFill/>
-        </p:spPr>
-        <p:txBody>
-          <a:bodyPr wrap="square" lIns="0" tIns="0" rIns="0" bIns="0" anchor="t">
-            <a:spAutoFit/>
-          </a:bodyPr>
-          <a:lstStyle/>
-          <a:p>
-            <a:pPr algn="l">
-              <a:spcBef>
-                <a:spcPts val="0"/>
-              </a:spcBef>
-              <a:spcAft>
-                <a:spcPts val="400"/>
-              </a:spcAft>
-            </a:pPr>
-            <a:r>
-              <a:rPr sz="1700" b="1">
-                <a:solidFill>
-                  <a:srgbClr val="005CCA"/>
-                </a:solidFill>
-                <a:latin typeface="游ゴシック Medium"/>
-                <a:ea typeface="游ゴシック Medium"/>
-                <a:cs typeface="游ゴシック Medium"/>
-              </a:rPr>
-              <a:t>Claude Code</a:t>
-            </a:r>
-          </a:p>
-        </p:txBody>
-      </p:sp>
-      <p:sp>
-        <p:nvSpPr>
-          <p:cNvPr id="6" name="TextBox 5"/>
-          <p:cNvSpPr txBox="1"/>
-          <p:nvPr/>
-        </p:nvSpPr>
-        <p:spPr>
-          <a:xfrm>
-            <a:off x="1069848" y="2203704"/>
-            <a:ext cx="2834640" cy="274320"/>
-          </a:xfrm>
-          <a:prstGeom prst="rect">
-            <a:avLst/>
-          </a:prstGeom>
-          <a:noFill/>
-        </p:spPr>
-        <p:txBody>
-          <a:bodyPr wrap="square" lIns="0" tIns="0" rIns="0" bIns="0" anchor="t">
-            <a:spAutoFit/>
-          </a:bodyPr>
-          <a:lstStyle/>
-          <a:p>
-            <a:pPr algn="l">
-              <a:spcBef>
-                <a:spcPts val="0"/>
-              </a:spcBef>
-              <a:spcAft>
-                <a:spcPts val="400"/>
-              </a:spcAft>
-            </a:pPr>
-            <a:r>
-              <a:rPr sz="1100" b="0">
-                <a:solidFill>
-                  <a:srgbClr val="6B7177"/>
-                </a:solidFill>
-                <a:latin typeface="游ゴシック Medium"/>
-                <a:ea typeface="游ゴシック Medium"/>
-                <a:cs typeface="游ゴシック Medium"/>
-              </a:rPr>
-              <a:t>Anthropic</a:t>
-            </a:r>
-          </a:p>
-        </p:txBody>
-      </p:sp>
-      <p:sp>
-        <p:nvSpPr>
-          <p:cNvPr id="7" name="TextBox 6"/>
-          <p:cNvSpPr txBox="1"/>
-          <p:nvPr/>
-        </p:nvSpPr>
-        <p:spPr>
-          <a:xfrm>
-            <a:off x="1069848" y="2587752"/>
-            <a:ext cx="2834640" cy="1737360"/>
-          </a:xfrm>
-          <a:prstGeom prst="rect">
-            <a:avLst/>
-          </a:prstGeom>
-          <a:noFill/>
-        </p:spPr>
-        <p:txBody>
-          <a:bodyPr wrap="square" lIns="0" tIns="0" rIns="0" bIns="0" anchor="t">
-            <a:spAutoFit/>
-          </a:bodyPr>
-          <a:lstStyle/>
-          <a:p>
-            <a:pPr algn="l">
-              <a:spcBef>
-                <a:spcPts val="0"/>
-              </a:spcBef>
-              <a:spcAft>
-                <a:spcPts val="800"/>
-              </a:spcAft>
-            </a:pPr>
-            <a:r>
-              <a:rPr sz="1100" b="1">
-                <a:solidFill>
-                  <a:srgbClr val="262B30"/>
-                </a:solidFill>
-                <a:latin typeface="游ゴシック Medium"/>
-                <a:ea typeface="游ゴシック Medium"/>
-                <a:cs typeface="游ゴシック Medium"/>
-              </a:rPr>
-              <a:t>形態：</a:t>
-            </a:r>
-            <a:r>
-              <a:rPr sz="1100" b="0">
-                <a:solidFill>
-                  <a:srgbClr val="262B30"/>
-                </a:solidFill>
-                <a:latin typeface="游ゴシック Medium"/>
-                <a:ea typeface="游ゴシック Medium"/>
-                <a:cs typeface="游ゴシック Medium"/>
-              </a:rPr>
-              <a:t>CLI＋デスクトップの自律型</a:t>
-            </a:r>
-          </a:p>
-          <a:p>
-            <a:pPr algn="l">
-              <a:spcBef>
-                <a:spcPts val="0"/>
-              </a:spcBef>
-              <a:spcAft>
-                <a:spcPts val="800"/>
-              </a:spcAft>
-            </a:pPr>
-            <a:r>
-              <a:rPr sz="1100" b="1">
-                <a:solidFill>
-                  <a:srgbClr val="262B30"/>
-                </a:solidFill>
-                <a:latin typeface="游ゴシック Medium"/>
-                <a:ea typeface="游ゴシック Medium"/>
-                <a:cs typeface="游ゴシック Medium"/>
-              </a:rPr>
-              <a:t>モデル：</a:t>
-            </a:r>
-            <a:r>
-              <a:rPr sz="1100" b="0">
-                <a:solidFill>
-                  <a:srgbClr val="262B30"/>
-                </a:solidFill>
-                <a:latin typeface="游ゴシック Medium"/>
-                <a:ea typeface="游ゴシック Medium"/>
-                <a:cs typeface="游ゴシック Medium"/>
-              </a:rPr>
-              <a:t>Claude</a:t>
-            </a:r>
-          </a:p>
-          <a:p>
-            <a:pPr algn="l">
-              <a:spcBef>
-                <a:spcPts val="0"/>
-              </a:spcBef>
-              <a:spcAft>
-                <a:spcPts val="800"/>
-              </a:spcAft>
-            </a:pPr>
-            <a:r>
-              <a:rPr sz="1100" b="1">
-                <a:solidFill>
-                  <a:srgbClr val="262B30"/>
-                </a:solidFill>
-                <a:latin typeface="游ゴシック Medium"/>
-                <a:ea typeface="游ゴシック Medium"/>
-                <a:cs typeface="游ゴシック Medium"/>
-              </a:rPr>
-              <a:t>特徴：</a:t>
-            </a:r>
-            <a:r>
-              <a:rPr sz="1100" b="0">
-                <a:solidFill>
-                  <a:srgbClr val="262B30"/>
-                </a:solidFill>
-                <a:latin typeface="游ゴシック Medium"/>
-                <a:ea typeface="游ゴシック Medium"/>
-                <a:cs typeface="游ゴシック Medium"/>
-              </a:rPr>
-              <a:t>スキルやMCPで拡張できる</a:t>
-            </a:r>
-          </a:p>
-        </p:txBody>
-      </p:sp>
-      <p:sp>
-        <p:nvSpPr>
-          <p:cNvPr id="8" name="Rectangle 7"/>
-          <p:cNvSpPr/>
-          <p:nvPr/>
-        </p:nvSpPr>
-        <p:spPr>
-          <a:xfrm>
-            <a:off x="4421124" y="1600200"/>
-            <a:ext cx="3346704" cy="2834640"/>
-          </a:xfrm>
-          <a:prstGeom prst="rect">
-            <a:avLst/>
-          </a:prstGeom>
-          <a:solidFill>
-            <a:srgbClr val="FFFFFF"/>
-          </a:solidFill>
-          <a:ln w="12700">
-            <a:solidFill>
-              <a:srgbClr val="D9DEE4"/>
-            </a:solidFill>
-          </a:ln>
-          <a:effectLst/>
-        </p:spPr>
-        <p:style>
-          <a:lnRef idx="1">
-            <a:schemeClr val="accent1"/>
-          </a:lnRef>
-          <a:fillRef idx="3">
-            <a:schemeClr val="accent1"/>
-          </a:fillRef>
-          <a:effectRef idx="2">
-            <a:schemeClr val="accent1"/>
-          </a:effectRef>
-          <a:fontRef idx="minor">
-            <a:schemeClr val="lt1"/>
-          </a:fontRef>
-        </p:style>
-        <p:txBody>
-          <a:bodyPr rtlCol="0" anchor="ctr"/>
-          <a:lstStyle/>
-          <a:p>
-            <a:pPr algn="ctr"/>
-            <a:endParaRPr/>
-          </a:p>
-        </p:txBody>
-      </p:sp>
-      <p:sp>
-        <p:nvSpPr>
-          <p:cNvPr id="9" name="TextBox 8"/>
-          <p:cNvSpPr txBox="1"/>
-          <p:nvPr/>
-        </p:nvSpPr>
-        <p:spPr>
-          <a:xfrm>
-            <a:off x="4677156" y="1819656"/>
-            <a:ext cx="2834640" cy="411480"/>
-          </a:xfrm>
-          <a:prstGeom prst="rect">
-            <a:avLst/>
-          </a:prstGeom>
-          <a:noFill/>
-        </p:spPr>
-        <p:txBody>
-          <a:bodyPr wrap="square" lIns="0" tIns="0" rIns="0" bIns="0" anchor="t">
-            <a:spAutoFit/>
-          </a:bodyPr>
-          <a:lstStyle/>
-          <a:p>
-            <a:pPr algn="l">
-              <a:spcBef>
-                <a:spcPts val="0"/>
-              </a:spcBef>
-              <a:spcAft>
-                <a:spcPts val="400"/>
-              </a:spcAft>
-            </a:pPr>
-            <a:r>
-              <a:rPr sz="1700" b="1">
-                <a:solidFill>
-                  <a:srgbClr val="005CCA"/>
-                </a:solidFill>
-                <a:latin typeface="游ゴシック Medium"/>
-                <a:ea typeface="游ゴシック Medium"/>
-                <a:cs typeface="游ゴシック Medium"/>
-              </a:rPr>
-              <a:t>OpenAI Codex</a:t>
-            </a:r>
-          </a:p>
-        </p:txBody>
-      </p:sp>
-      <p:sp>
-        <p:nvSpPr>
-          <p:cNvPr id="10" name="TextBox 9"/>
-          <p:cNvSpPr txBox="1"/>
-          <p:nvPr/>
-        </p:nvSpPr>
-        <p:spPr>
-          <a:xfrm>
-            <a:off x="4677156" y="2203704"/>
-            <a:ext cx="2834640" cy="274320"/>
-          </a:xfrm>
-          <a:prstGeom prst="rect">
-            <a:avLst/>
-          </a:prstGeom>
-          <a:noFill/>
-        </p:spPr>
-        <p:txBody>
-          <a:bodyPr wrap="square" lIns="0" tIns="0" rIns="0" bIns="0" anchor="t">
-            <a:spAutoFit/>
-          </a:bodyPr>
-          <a:lstStyle/>
-          <a:p>
-            <a:pPr algn="l">
-              <a:spcBef>
-                <a:spcPts val="0"/>
-              </a:spcBef>
-              <a:spcAft>
-                <a:spcPts val="400"/>
-              </a:spcAft>
-            </a:pPr>
-            <a:r>
-              <a:rPr sz="1100" b="0">
-                <a:solidFill>
-                  <a:srgbClr val="6B7177"/>
-                </a:solidFill>
-                <a:latin typeface="游ゴシック Medium"/>
-                <a:ea typeface="游ゴシック Medium"/>
-                <a:cs typeface="游ゴシック Medium"/>
-              </a:rPr>
-              <a:t>OpenAI</a:t>
-            </a:r>
-          </a:p>
-        </p:txBody>
-      </p:sp>
-      <p:sp>
-        <p:nvSpPr>
-          <p:cNvPr id="11" name="TextBox 10"/>
-          <p:cNvSpPr txBox="1"/>
-          <p:nvPr/>
-        </p:nvSpPr>
-        <p:spPr>
-          <a:xfrm>
-            <a:off x="4677156" y="2587752"/>
-            <a:ext cx="2834640" cy="1737360"/>
-          </a:xfrm>
-          <a:prstGeom prst="rect">
-            <a:avLst/>
-          </a:prstGeom>
-          <a:noFill/>
-        </p:spPr>
-        <p:txBody>
-          <a:bodyPr wrap="square" lIns="0" tIns="0" rIns="0" bIns="0" anchor="t">
-            <a:spAutoFit/>
-          </a:bodyPr>
-          <a:lstStyle/>
-          <a:p>
-            <a:pPr algn="l">
-              <a:spcBef>
-                <a:spcPts val="0"/>
-              </a:spcBef>
-              <a:spcAft>
-                <a:spcPts val="800"/>
-              </a:spcAft>
-            </a:pPr>
-            <a:r>
-              <a:rPr sz="1100" b="1">
-                <a:solidFill>
-                  <a:srgbClr val="262B30"/>
-                </a:solidFill>
-                <a:latin typeface="游ゴシック Medium"/>
-                <a:ea typeface="游ゴシック Medium"/>
-                <a:cs typeface="游ゴシック Medium"/>
-              </a:rPr>
-              <a:t>形態：</a:t>
-            </a:r>
-            <a:r>
-              <a:rPr sz="1100" b="0">
-                <a:solidFill>
-                  <a:srgbClr val="262B30"/>
-                </a:solidFill>
-                <a:latin typeface="游ゴシック Medium"/>
-                <a:ea typeface="游ゴシック Medium"/>
-                <a:cs typeface="游ゴシック Medium"/>
-              </a:rPr>
-              <a:t>CLI(OSS)＋クラウド＋IDE拡張</a:t>
-            </a:r>
-          </a:p>
-          <a:p>
-            <a:pPr algn="l">
-              <a:spcBef>
-                <a:spcPts val="0"/>
-              </a:spcBef>
-              <a:spcAft>
-                <a:spcPts val="800"/>
-              </a:spcAft>
-            </a:pPr>
-            <a:r>
-              <a:rPr sz="1100" b="1">
-                <a:solidFill>
-                  <a:srgbClr val="262B30"/>
-                </a:solidFill>
-                <a:latin typeface="游ゴシック Medium"/>
-                <a:ea typeface="游ゴシック Medium"/>
-                <a:cs typeface="游ゴシック Medium"/>
-              </a:rPr>
-              <a:t>モデル：</a:t>
-            </a:r>
-            <a:r>
-              <a:rPr sz="1100" b="0">
-                <a:solidFill>
-                  <a:srgbClr val="262B30"/>
-                </a:solidFill>
-                <a:latin typeface="游ゴシック Medium"/>
-                <a:ea typeface="游ゴシック Medium"/>
-                <a:cs typeface="游ゴシック Medium"/>
-              </a:rPr>
-              <a:t>GPT-5-codex 系</a:t>
-            </a:r>
-          </a:p>
-          <a:p>
-            <a:pPr algn="l">
-              <a:spcBef>
-                <a:spcPts val="0"/>
-              </a:spcBef>
-              <a:spcAft>
-                <a:spcPts val="800"/>
-              </a:spcAft>
-            </a:pPr>
-            <a:r>
-              <a:rPr sz="1100" b="1">
-                <a:solidFill>
-                  <a:srgbClr val="262B30"/>
-                </a:solidFill>
-                <a:latin typeface="游ゴシック Medium"/>
-                <a:ea typeface="游ゴシック Medium"/>
-                <a:cs typeface="游ゴシック Medium"/>
-              </a:rPr>
-              <a:t>特徴：</a:t>
-            </a:r>
-            <a:r>
-              <a:rPr sz="1100" b="0">
-                <a:solidFill>
-                  <a:srgbClr val="262B30"/>
-                </a:solidFill>
-                <a:latin typeface="游ゴシック Medium"/>
-                <a:ea typeface="游ゴシック Medium"/>
-                <a:cs typeface="游ゴシック Medium"/>
-              </a:rPr>
-              <a:t>ローカルとクラウドを行き来</a:t>
-            </a:r>
-          </a:p>
-        </p:txBody>
-      </p:sp>
-      <p:sp>
-        <p:nvSpPr>
-          <p:cNvPr id="12" name="Rectangle 11"/>
-          <p:cNvSpPr/>
-          <p:nvPr/>
-        </p:nvSpPr>
-        <p:spPr>
-          <a:xfrm>
-            <a:off x="8028432" y="1600200"/>
-            <a:ext cx="3346704" cy="2834640"/>
-          </a:xfrm>
-          <a:prstGeom prst="rect">
-            <a:avLst/>
-          </a:prstGeom>
-          <a:solidFill>
-            <a:srgbClr val="FFFFFF"/>
-          </a:solidFill>
-          <a:ln w="12700">
-            <a:solidFill>
-              <a:srgbClr val="D9DEE4"/>
-            </a:solidFill>
-          </a:ln>
-          <a:effectLst/>
-        </p:spPr>
-        <p:style>
-          <a:lnRef idx="1">
-            <a:schemeClr val="accent1"/>
-          </a:lnRef>
-          <a:fillRef idx="3">
-            <a:schemeClr val="accent1"/>
-          </a:fillRef>
-          <a:effectRef idx="2">
-            <a:schemeClr val="accent1"/>
-          </a:effectRef>
-          <a:fontRef idx="minor">
-            <a:schemeClr val="lt1"/>
-          </a:fontRef>
-        </p:style>
-        <p:txBody>
-          <a:bodyPr rtlCol="0" anchor="ctr"/>
-          <a:lstStyle/>
-          <a:p>
-            <a:pPr algn="ctr"/>
-            <a:endParaRPr/>
-          </a:p>
-        </p:txBody>
-      </p:sp>
-      <p:sp>
-        <p:nvSpPr>
-          <p:cNvPr id="13" name="TextBox 12"/>
-          <p:cNvSpPr txBox="1"/>
-          <p:nvPr/>
-        </p:nvSpPr>
-        <p:spPr>
-          <a:xfrm>
-            <a:off x="8284464" y="1819656"/>
-            <a:ext cx="2834640" cy="411480"/>
-          </a:xfrm>
-          <a:prstGeom prst="rect">
-            <a:avLst/>
-          </a:prstGeom>
-          <a:noFill/>
-        </p:spPr>
-        <p:txBody>
-          <a:bodyPr wrap="square" lIns="0" tIns="0" rIns="0" bIns="0" anchor="t">
-            <a:spAutoFit/>
-          </a:bodyPr>
-          <a:lstStyle/>
-          <a:p>
-            <a:pPr algn="l">
-              <a:spcBef>
-                <a:spcPts val="0"/>
-              </a:spcBef>
-              <a:spcAft>
-                <a:spcPts val="400"/>
-              </a:spcAft>
-            </a:pPr>
-            <a:r>
-              <a:rPr sz="1700" b="1">
-                <a:solidFill>
-                  <a:srgbClr val="005CCA"/>
-                </a:solidFill>
-                <a:latin typeface="游ゴシック Medium"/>
-                <a:ea typeface="游ゴシック Medium"/>
-                <a:cs typeface="游ゴシック Medium"/>
-              </a:rPr>
-              <a:t>Gemini CLI</a:t>
-            </a:r>
-          </a:p>
-        </p:txBody>
-      </p:sp>
-      <p:sp>
-        <p:nvSpPr>
-          <p:cNvPr id="14" name="TextBox 13"/>
-          <p:cNvSpPr txBox="1"/>
-          <p:nvPr/>
-        </p:nvSpPr>
-        <p:spPr>
-          <a:xfrm>
-            <a:off x="8284464" y="2203704"/>
-            <a:ext cx="2834640" cy="274320"/>
-          </a:xfrm>
-          <a:prstGeom prst="rect">
-            <a:avLst/>
-          </a:prstGeom>
-          <a:noFill/>
-        </p:spPr>
-        <p:txBody>
-          <a:bodyPr wrap="square" lIns="0" tIns="0" rIns="0" bIns="0" anchor="t">
-            <a:spAutoFit/>
-          </a:bodyPr>
-          <a:lstStyle/>
-          <a:p>
-            <a:pPr algn="l">
-              <a:spcBef>
-                <a:spcPts val="0"/>
-              </a:spcBef>
-              <a:spcAft>
-                <a:spcPts val="400"/>
-              </a:spcAft>
-            </a:pPr>
-            <a:r>
-              <a:rPr sz="1100" b="0">
-                <a:solidFill>
-                  <a:srgbClr val="6B7177"/>
-                </a:solidFill>
-                <a:latin typeface="游ゴシック Medium"/>
-                <a:ea typeface="游ゴシック Medium"/>
-                <a:cs typeface="游ゴシック Medium"/>
-              </a:rPr>
-              <a:t>Google</a:t>
-            </a:r>
-          </a:p>
-        </p:txBody>
-      </p:sp>
-      <p:sp>
-        <p:nvSpPr>
-          <p:cNvPr id="15" name="TextBox 14"/>
-          <p:cNvSpPr txBox="1"/>
-          <p:nvPr/>
-        </p:nvSpPr>
-        <p:spPr>
-          <a:xfrm>
-            <a:off x="8284464" y="2587752"/>
-            <a:ext cx="2834640" cy="1737360"/>
-          </a:xfrm>
-          <a:prstGeom prst="rect">
-            <a:avLst/>
-          </a:prstGeom>
-          <a:noFill/>
-        </p:spPr>
-        <p:txBody>
-          <a:bodyPr wrap="square" lIns="0" tIns="0" rIns="0" bIns="0" anchor="t">
-            <a:spAutoFit/>
-          </a:bodyPr>
-          <a:lstStyle/>
-          <a:p>
-            <a:pPr algn="l">
-              <a:spcBef>
-                <a:spcPts val="0"/>
-              </a:spcBef>
-              <a:spcAft>
-                <a:spcPts val="800"/>
-              </a:spcAft>
-            </a:pPr>
-            <a:r>
-              <a:rPr sz="1100" b="1">
-                <a:solidFill>
-                  <a:srgbClr val="262B30"/>
-                </a:solidFill>
-                <a:latin typeface="游ゴシック Medium"/>
-                <a:ea typeface="游ゴシック Medium"/>
-                <a:cs typeface="游ゴシック Medium"/>
-              </a:rPr>
-              <a:t>形態：</a:t>
-            </a:r>
-            <a:r>
-              <a:rPr sz="1100" b="0">
-                <a:solidFill>
-                  <a:srgbClr val="262B30"/>
-                </a:solidFill>
-                <a:latin typeface="游ゴシック Medium"/>
-                <a:ea typeface="游ゴシック Medium"/>
-                <a:cs typeface="游ゴシック Medium"/>
-              </a:rPr>
-              <a:t>OSSのターミナル型エージェント</a:t>
-            </a:r>
-          </a:p>
-          <a:p>
-            <a:pPr algn="l">
-              <a:spcBef>
-                <a:spcPts val="0"/>
-              </a:spcBef>
-              <a:spcAft>
-                <a:spcPts val="800"/>
-              </a:spcAft>
-            </a:pPr>
-            <a:r>
-              <a:rPr sz="1100" b="1">
-                <a:solidFill>
-                  <a:srgbClr val="262B30"/>
-                </a:solidFill>
-                <a:latin typeface="游ゴシック Medium"/>
-                <a:ea typeface="游ゴシック Medium"/>
-                <a:cs typeface="游ゴシック Medium"/>
-              </a:rPr>
-              <a:t>モデル：</a:t>
-            </a:r>
-            <a:r>
-              <a:rPr sz="1100" b="0">
-                <a:solidFill>
-                  <a:srgbClr val="262B30"/>
-                </a:solidFill>
-                <a:latin typeface="游ゴシック Medium"/>
-                <a:ea typeface="游ゴシック Medium"/>
-                <a:cs typeface="游ゴシック Medium"/>
-              </a:rPr>
-              <a:t>Gemini</a:t>
-            </a:r>
-          </a:p>
-          <a:p>
-            <a:pPr algn="l">
-              <a:spcBef>
-                <a:spcPts val="0"/>
-              </a:spcBef>
-              <a:spcAft>
-                <a:spcPts val="800"/>
-              </a:spcAft>
-            </a:pPr>
-            <a:r>
-              <a:rPr sz="1100" b="1">
-                <a:solidFill>
-                  <a:srgbClr val="262B30"/>
-                </a:solidFill>
-                <a:latin typeface="游ゴシック Medium"/>
-                <a:ea typeface="游ゴシック Medium"/>
-                <a:cs typeface="游ゴシック Medium"/>
-              </a:rPr>
-              <a:t>特徴：</a:t>
-            </a:r>
-            <a:r>
-              <a:rPr sz="1100" b="0">
-                <a:solidFill>
-                  <a:srgbClr val="262B30"/>
-                </a:solidFill>
-                <a:latin typeface="游ゴシック Medium"/>
-                <a:ea typeface="游ゴシック Medium"/>
-                <a:cs typeface="游ゴシック Medium"/>
-              </a:rPr>
-              <a:t>後継のAntigravity CLIへ移行中</a:t>
-            </a:r>
-          </a:p>
-        </p:txBody>
-      </p:sp>
-      <p:sp>
-        <p:nvSpPr>
-          <p:cNvPr id="16" name="TextBox 15"/>
-          <p:cNvSpPr txBox="1"/>
-          <p:nvPr/>
-        </p:nvSpPr>
-        <p:spPr>
-          <a:xfrm>
-            <a:off x="813816" y="4663440"/>
-            <a:ext cx="10561320" cy="640080"/>
-          </a:xfrm>
-          <a:prstGeom prst="rect">
-            <a:avLst/>
-          </a:prstGeom>
-          <a:noFill/>
-        </p:spPr>
-        <p:txBody>
-          <a:bodyPr wrap="square" lIns="0" tIns="0" rIns="0" bIns="0" anchor="t">
-            <a:spAutoFit/>
-          </a:bodyPr>
-          <a:lstStyle/>
-          <a:p>
-            <a:pPr algn="l">
-              <a:spcBef>
-                <a:spcPts val="0"/>
-              </a:spcBef>
-              <a:spcAft>
-                <a:spcPts val="400"/>
-              </a:spcAft>
-            </a:pPr>
-            <a:r>
-              <a:rPr sz="1400" b="1">
-                <a:solidFill>
-                  <a:srgbClr val="8FB9EC"/>
-                </a:solidFill>
-                <a:latin typeface="游ゴシック Medium"/>
-                <a:ea typeface="游ゴシック Medium"/>
-                <a:cs typeface="游ゴシック Medium"/>
-              </a:rPr>
-              <a:t>選ぶ基準：</a:t>
-            </a:r>
-            <a:r>
-              <a:rPr sz="1400" b="0">
-                <a:solidFill>
-                  <a:srgbClr val="E8EDF4"/>
-                </a:solidFill>
-                <a:latin typeface="游ゴシック Medium"/>
-                <a:ea typeface="游ゴシック Medium"/>
-                <a:cs typeface="游ゴシック Medium"/>
-              </a:rPr>
-              <a:t>モデル品質・既存エコシステム・社内方針で決めます。用途が重なるため、基本はどれか1つを選びます。</a:t>
-            </a:r>
-          </a:p>
-        </p:txBody>
-      </p:sp>
-    </p:spTree>
-  </p:cSld>
-  <p:clrMapOvr>
-    <a:masterClrMapping/>
-  </p:clrMapOvr>
-</p:sld>
-</file>
-
-<file path=ppt/slides/slide8.xml><?xml version="1.0" encoding="utf-8"?>
-<p:sld xmlns:a="http://schemas.openxmlformats.org/drawingml/2006/main" xmlns:r="http://schemas.openxmlformats.org/officeDocument/2006/relationships" xmlns:p="http://schemas.openxmlformats.org/presentationml/2006/main">
-  <p:cSld>
-    <p:spTree>
-      <p:nvGrpSpPr>
-        <p:cNvPr id="1" name=""/>
-        <p:cNvGrpSpPr/>
-        <p:nvPr/>
-      </p:nvGrpSpPr>
-      <p:grpSpPr>
-        <a:xfrm>
-          <a:off x="0" y="0"/>
-          <a:ext cx="0" cy="0"/>
-          <a:chOff x="0" y="0"/>
-          <a:chExt cx="0" cy="0"/>
-        </a:xfrm>
-      </p:grpSpPr>
-      <p:sp>
-        <p:nvSpPr>
-          <p:cNvPr id="2" name="Title 1"/>
-          <p:cNvSpPr>
-            <a:spLocks noGrp="1"/>
-          </p:cNvSpPr>
-          <p:nvPr>
-            <p:ph type="title"/>
-          </p:nvPr>
-        </p:nvSpPr>
-        <p:spPr/>
-        <p:txBody>
-          <a:bodyPr/>
-          <a:lstStyle/>
-          <a:p>
-            <a:r>
-              <a:rPr>
-                <a:latin typeface="游ゴシック Medium"/>
-                <a:ea typeface="游ゴシック Medium"/>
-                <a:cs typeface="游ゴシック Medium"/>
-              </a:rPr>
-              <a:t>住み分けの一言</a:t>
-            </a:r>
-          </a:p>
-        </p:txBody>
-      </p:sp>
-      <p:sp>
-        <p:nvSpPr>
-          <p:cNvPr id="3" name="Rectangle 2"/>
-          <p:cNvSpPr/>
-          <p:nvPr/>
-        </p:nvSpPr>
-        <p:spPr>
-          <a:xfrm>
-            <a:off x="813816" y="1572768"/>
-            <a:ext cx="137160" cy="137160"/>
-          </a:xfrm>
-          <a:prstGeom prst="rect">
-            <a:avLst/>
-          </a:prstGeom>
-          <a:solidFill>
-            <a:srgbClr val="8FB9EC"/>
-          </a:solidFill>
-          <a:ln>
-            <a:noFill/>
-          </a:ln>
-          <a:effectLst/>
-        </p:spPr>
-        <p:style>
-          <a:lnRef idx="1">
-            <a:schemeClr val="accent1"/>
-          </a:lnRef>
-          <a:fillRef idx="3">
-            <a:schemeClr val="accent1"/>
-          </a:fillRef>
-          <a:effectRef idx="2">
-            <a:schemeClr val="accent1"/>
-          </a:effectRef>
-          <a:fontRef idx="minor">
-            <a:schemeClr val="lt1"/>
-          </a:fontRef>
-        </p:style>
-        <p:txBody>
-          <a:bodyPr rtlCol="0" anchor="ctr"/>
-          <a:lstStyle/>
-          <a:p>
-            <a:pPr algn="ctr"/>
-            <a:endParaRPr/>
-          </a:p>
-        </p:txBody>
-      </p:sp>
-      <p:sp>
-        <p:nvSpPr>
-          <p:cNvPr id="4" name="TextBox 3"/>
-          <p:cNvSpPr txBox="1"/>
-          <p:nvPr/>
-        </p:nvSpPr>
-        <p:spPr>
-          <a:xfrm>
-            <a:off x="1133856" y="1508760"/>
-            <a:ext cx="10241280" cy="822960"/>
-          </a:xfrm>
-          <a:prstGeom prst="rect">
-            <a:avLst/>
-          </a:prstGeom>
-          <a:noFill/>
-        </p:spPr>
-        <p:txBody>
-          <a:bodyPr wrap="square" lIns="0" tIns="0" rIns="0" bIns="0" anchor="t">
-            <a:spAutoFit/>
-          </a:bodyPr>
-          <a:lstStyle/>
-          <a:p>
-            <a:pPr algn="l">
-              <a:spcBef>
-                <a:spcPts val="0"/>
-              </a:spcBef>
-              <a:spcAft>
-                <a:spcPts val="300"/>
-              </a:spcAft>
-            </a:pPr>
-            <a:r>
-              <a:rPr sz="1600" b="1">
-                <a:solidFill>
-                  <a:srgbClr val="FFFFFF"/>
-                </a:solidFill>
-                <a:latin typeface="游ゴシック Medium"/>
-                <a:ea typeface="游ゴシック Medium"/>
-                <a:cs typeface="游ゴシック Medium"/>
-              </a:rPr>
-              <a:t>既存のMicrosoft世界に根ざし、社内データを自動で活用したいとき</a:t>
-            </a:r>
-          </a:p>
-          <a:p>
-            <a:pPr algn="l">
-              <a:spcBef>
-                <a:spcPts val="0"/>
-              </a:spcBef>
-              <a:spcAft>
-                <a:spcPts val="300"/>
-              </a:spcAft>
-            </a:pPr>
-            <a:r>
-              <a:rPr sz="1500" b="0">
-                <a:solidFill>
-                  <a:srgbClr val="8FB9EC"/>
-                </a:solidFill>
-                <a:latin typeface="游ゴシック Medium"/>
-                <a:ea typeface="游ゴシック Medium"/>
-                <a:cs typeface="游ゴシック Medium"/>
-              </a:rPr>
-              <a:t>→ Microsoft 365 Copilot</a:t>
-            </a:r>
-          </a:p>
-        </p:txBody>
-      </p:sp>
-      <p:sp>
-        <p:nvSpPr>
-          <p:cNvPr id="5" name="Rectangle 4"/>
-          <p:cNvSpPr/>
-          <p:nvPr/>
-        </p:nvSpPr>
-        <p:spPr>
-          <a:xfrm>
-            <a:off x="813816" y="2578608"/>
-            <a:ext cx="137160" cy="137160"/>
-          </a:xfrm>
-          <a:prstGeom prst="rect">
-            <a:avLst/>
-          </a:prstGeom>
-          <a:solidFill>
-            <a:srgbClr val="8FB9EC"/>
-          </a:solidFill>
-          <a:ln>
-            <a:noFill/>
-          </a:ln>
-          <a:effectLst/>
-        </p:spPr>
-        <p:style>
-          <a:lnRef idx="1">
-            <a:schemeClr val="accent1"/>
-          </a:lnRef>
-          <a:fillRef idx="3">
-            <a:schemeClr val="accent1"/>
-          </a:fillRef>
-          <a:effectRef idx="2">
-            <a:schemeClr val="accent1"/>
-          </a:effectRef>
-          <a:fontRef idx="minor">
-            <a:schemeClr val="lt1"/>
-          </a:fontRef>
-        </p:style>
-        <p:txBody>
-          <a:bodyPr rtlCol="0" anchor="ctr"/>
-          <a:lstStyle/>
-          <a:p>
-            <a:pPr algn="ctr"/>
-            <a:endParaRPr/>
-          </a:p>
-        </p:txBody>
-      </p:sp>
-      <p:sp>
-        <p:nvSpPr>
-          <p:cNvPr id="6" name="TextBox 5"/>
-          <p:cNvSpPr txBox="1"/>
-          <p:nvPr/>
-        </p:nvSpPr>
-        <p:spPr>
-          <a:xfrm>
-            <a:off x="1133856" y="2514600"/>
-            <a:ext cx="10241280" cy="822960"/>
-          </a:xfrm>
-          <a:prstGeom prst="rect">
-            <a:avLst/>
-          </a:prstGeom>
-          <a:noFill/>
-        </p:spPr>
-        <p:txBody>
-          <a:bodyPr wrap="square" lIns="0" tIns="0" rIns="0" bIns="0" anchor="t">
-            <a:spAutoFit/>
-          </a:bodyPr>
-          <a:lstStyle/>
-          <a:p>
-            <a:pPr algn="l">
-              <a:spcBef>
-                <a:spcPts val="0"/>
-              </a:spcBef>
-              <a:spcAft>
-                <a:spcPts val="300"/>
-              </a:spcAft>
-            </a:pPr>
-            <a:r>
-              <a:rPr sz="1600" b="1">
-                <a:solidFill>
-                  <a:srgbClr val="FFFFFF"/>
-                </a:solidFill>
-                <a:latin typeface="游ゴシック Medium"/>
-                <a:ea typeface="游ゴシック Medium"/>
-                <a:cs typeface="游ゴシック Medium"/>
-              </a:rPr>
-              <a:t>特定のデータや外部ツールを、独立した環境で完結させたいとき</a:t>
-            </a:r>
-          </a:p>
-          <a:p>
-            <a:pPr algn="l">
-              <a:spcBef>
-                <a:spcPts val="0"/>
-              </a:spcBef>
-              <a:spcAft>
-                <a:spcPts val="300"/>
-              </a:spcAft>
-            </a:pPr>
-            <a:r>
-              <a:rPr sz="1500" b="0">
-                <a:solidFill>
-                  <a:srgbClr val="8FB9EC"/>
-                </a:solidFill>
-                <a:latin typeface="游ゴシック Medium"/>
-                <a:ea typeface="游ゴシック Medium"/>
-                <a:cs typeface="游ゴシック Medium"/>
-              </a:rPr>
-              <a:t>→ Claude Cowork</a:t>
-            </a:r>
-          </a:p>
-        </p:txBody>
-      </p:sp>
-      <p:sp>
-        <p:nvSpPr>
-          <p:cNvPr id="7" name="Rectangle 6"/>
-          <p:cNvSpPr/>
-          <p:nvPr/>
-        </p:nvSpPr>
-        <p:spPr>
-          <a:xfrm>
-            <a:off x="813816" y="3584448"/>
-            <a:ext cx="137160" cy="137160"/>
-          </a:xfrm>
-          <a:prstGeom prst="rect">
-            <a:avLst/>
-          </a:prstGeom>
-          <a:solidFill>
-            <a:srgbClr val="8FB9EC"/>
-          </a:solidFill>
-          <a:ln>
-            <a:noFill/>
-          </a:ln>
-          <a:effectLst/>
-        </p:spPr>
-        <p:style>
-          <a:lnRef idx="1">
-            <a:schemeClr val="accent1"/>
-          </a:lnRef>
-          <a:fillRef idx="3">
-            <a:schemeClr val="accent1"/>
-          </a:fillRef>
-          <a:effectRef idx="2">
-            <a:schemeClr val="accent1"/>
-          </a:effectRef>
-          <a:fontRef idx="minor">
-            <a:schemeClr val="lt1"/>
-          </a:fontRef>
-        </p:style>
-        <p:txBody>
-          <a:bodyPr rtlCol="0" anchor="ctr"/>
-          <a:lstStyle/>
-          <a:p>
-            <a:pPr algn="ctr"/>
-            <a:endParaRPr/>
-          </a:p>
-        </p:txBody>
-      </p:sp>
-      <p:sp>
-        <p:nvSpPr>
-          <p:cNvPr id="8" name="TextBox 7"/>
-          <p:cNvSpPr txBox="1"/>
-          <p:nvPr/>
-        </p:nvSpPr>
-        <p:spPr>
-          <a:xfrm>
-            <a:off x="1133856" y="3520440"/>
-            <a:ext cx="10241280" cy="822960"/>
-          </a:xfrm>
-          <a:prstGeom prst="rect">
-            <a:avLst/>
-          </a:prstGeom>
-          <a:noFill/>
-        </p:spPr>
-        <p:txBody>
-          <a:bodyPr wrap="square" lIns="0" tIns="0" rIns="0" bIns="0" anchor="t">
-            <a:spAutoFit/>
-          </a:bodyPr>
-          <a:lstStyle/>
-          <a:p>
-            <a:pPr algn="l">
-              <a:spcBef>
-                <a:spcPts val="0"/>
-              </a:spcBef>
-              <a:spcAft>
-                <a:spcPts val="300"/>
-              </a:spcAft>
-            </a:pPr>
-            <a:r>
-              <a:rPr sz="1600" b="1">
-                <a:solidFill>
-                  <a:srgbClr val="FFFFFF"/>
-                </a:solidFill>
-                <a:latin typeface="游ゴシック Medium"/>
-                <a:ea typeface="游ゴシック Medium"/>
-                <a:cs typeface="游ゴシック Medium"/>
-              </a:rPr>
-              <a:t>コードを書く・自動化するなど開発そのものを任せたいとき</a:t>
-            </a:r>
-          </a:p>
-          <a:p>
-            <a:pPr algn="l">
-              <a:spcBef>
-                <a:spcPts val="0"/>
-              </a:spcBef>
-              <a:spcAft>
-                <a:spcPts val="300"/>
-              </a:spcAft>
-            </a:pPr>
-            <a:r>
-              <a:rPr sz="1500" b="0">
-                <a:solidFill>
-                  <a:srgbClr val="8FB9EC"/>
-                </a:solidFill>
-                <a:latin typeface="游ゴシック Medium"/>
-                <a:ea typeface="游ゴシック Medium"/>
-                <a:cs typeface="游ゴシック Medium"/>
-              </a:rPr>
-              <a:t>→ Claude Code / OpenAI Codex / Gemini CLI</a:t>
-            </a:r>
-          </a:p>
-        </p:txBody>
-      </p:sp>
-      <p:sp>
-        <p:nvSpPr>
-          <p:cNvPr id="9" name="TextBox 8"/>
-          <p:cNvSpPr txBox="1"/>
-          <p:nvPr/>
-        </p:nvSpPr>
-        <p:spPr>
-          <a:xfrm>
-            <a:off x="813816" y="4846320"/>
-            <a:ext cx="10561320" cy="731520"/>
-          </a:xfrm>
-          <a:prstGeom prst="rect">
-            <a:avLst/>
-          </a:prstGeom>
-          <a:noFill/>
-        </p:spPr>
-        <p:txBody>
-          <a:bodyPr wrap="square" lIns="0" tIns="0" rIns="0" bIns="0" anchor="t">
-            <a:spAutoFit/>
-          </a:bodyPr>
-          <a:lstStyle/>
-          <a:p>
-            <a:pPr algn="l">
-              <a:spcBef>
-                <a:spcPts val="0"/>
-              </a:spcBef>
-              <a:spcAft>
-                <a:spcPts val="400"/>
-              </a:spcAft>
-            </a:pPr>
-            <a:r>
-              <a:rPr sz="1300" b="1">
-                <a:solidFill>
-                  <a:srgbClr val="8FB9EC"/>
-                </a:solidFill>
-                <a:latin typeface="游ゴシック Medium"/>
-                <a:ea typeface="游ゴシック Medium"/>
-                <a:cs typeface="游ゴシック Medium"/>
-              </a:rPr>
-              <a:t>注意：</a:t>
-            </a:r>
-            <a:r>
-              <a:rPr sz="1300" b="0">
-                <a:solidFill>
-                  <a:srgbClr val="E8EDF4"/>
-                </a:solidFill>
-                <a:latin typeface="游ゴシック Medium"/>
-                <a:ea typeface="游ゴシック Medium"/>
-                <a:cs typeface="游ゴシック Medium"/>
-              </a:rPr>
-              <a:t>「Cowork」は両社が使う名称です。CopilotもClaudeを利用でき、モデルの違いより「どこに根ざすか」で選びます。</a:t>
-            </a:r>
-          </a:p>
-        </p:txBody>
-      </p:sp>
-    </p:spTree>
-  </p:cSld>
-  <p:clrMapOvr>
-    <a:masterClrMapping/>
-  </p:clrMapOvr>
-</p:sld>
-</file>
-
-<file path=ppt/slides/slide9.xml><?xml version="1.0" encoding="utf-8"?>
-<p:sld xmlns:a="http://schemas.openxmlformats.org/drawingml/2006/main" xmlns:p="http://schemas.openxmlformats.org/presentationml/2006/main" xmlns:r="http://schemas.openxmlformats.org/officeDocument/2006/relationships">
-  <p:cSld>
-    <p:spTree>
-      <p:nvGrpSpPr>
-        <p:cNvPr id="1" name=""/>
-        <p:cNvGrpSpPr/>
-        <p:nvPr/>
-      </p:nvGrpSpPr>
-      <p:grpSpPr/>
-      <p:sp>
-        <p:nvSpPr>
-          <p:cNvPr id="2" name="Title 1"/>
-          <p:cNvSpPr>
-            <a:spLocks noGrp="1"/>
-          </p:cNvSpPr>
-          <p:nvPr>
-            <p:ph type="title"/>
-          </p:nvPr>
-        </p:nvSpPr>
-        <p:spPr/>
-        <p:txBody>
-          <a:bodyPr/>
-          <a:lstStyle/>
-          <a:p>
-            <a:r>
-              <a:rPr>
-                <a:latin typeface="游ゴシック Medium"/>
-                <a:ea typeface="游ゴシック Medium"/>
-                <a:cs typeface="游ゴシック Medium"/>
-              </a:rPr>
-              <a:t>Microsoft 365 Copilot でできること</a:t>
-            </a:r>
-          </a:p>
-        </p:txBody>
-      </p:sp>
-      <p:sp>
-        <p:nvSpPr>
-          <p:cNvPr id="3" name="TextBox 2"/>
-          <p:cNvSpPr txBox="1"/>
-          <p:nvPr/>
-        </p:nvSpPr>
-        <p:spPr>
-          <a:xfrm>
-            <a:off x="813816" y="1024128"/>
-            <a:ext cx="10561320" cy="457200"/>
-          </a:xfrm>
-          <a:prstGeom prst="rect">
-            <a:avLst/>
-          </a:prstGeom>
-          <a:noFill/>
-        </p:spPr>
-        <p:txBody>
-          <a:bodyPr wrap="square" anchor="t" lIns="0" rIns="0" tIns="0" bIns="0">
-            <a:spAutoFit/>
-          </a:bodyPr>
-          <a:lstStyle/>
-          <a:p>
-            <a:pPr algn="l">
-              <a:spcBef>
-                <a:spcPts val="0"/>
-              </a:spcBef>
-              <a:spcAft>
-                <a:spcPts val="400"/>
-              </a:spcAft>
-            </a:pPr>
-            <a:r>
-              <a:rPr sz="1300" b="0">
-                <a:solidFill>
-                  <a:srgbClr val="B9C6DA"/>
-                </a:solidFill>
-                <a:latin typeface="游ゴシック Medium"/>
-                <a:ea typeface="游ゴシック Medium"/>
-                <a:cs typeface="游ゴシック Medium"/>
-              </a:rPr>
-              <a:t>使い慣れた Microsoft 製品の中で、自社データを使って日常業務を支援します。</a:t>
-            </a:r>
-          </a:p>
-        </p:txBody>
-      </p:sp>
-      <p:sp>
-        <p:nvSpPr>
-          <p:cNvPr id="4" name="Rectangle 3"/>
-          <p:cNvSpPr/>
-          <p:nvPr/>
-        </p:nvSpPr>
-        <p:spPr>
-          <a:xfrm>
-            <a:off x="813816" y="1527048"/>
-            <a:ext cx="137160" cy="137160"/>
-          </a:xfrm>
-          <a:prstGeom prst="rect">
-            <a:avLst/>
-          </a:prstGeom>
-          <a:solidFill>
-            <a:srgbClr val="8FB9EC"/>
-          </a:solidFill>
-          <a:ln>
-            <a:noFill/>
-          </a:ln>
-          <a:effectLst/>
-        </p:spPr>
-        <p:style>
-          <a:lnRef idx="1">
-            <a:schemeClr val="accent1"/>
-          </a:lnRef>
-          <a:fillRef idx="3">
-            <a:schemeClr val="accent1"/>
-          </a:fillRef>
-          <a:effectRef idx="2">
-            <a:schemeClr val="accent1"/>
-          </a:effectRef>
-          <a:fontRef idx="minor">
-            <a:schemeClr val="lt1"/>
-          </a:fontRef>
-        </p:style>
-        <p:txBody>
-          <a:bodyPr rtlCol="0" anchor="ctr"/>
-          <a:lstStyle/>
-          <a:p>
-            <a:pPr algn="ctr"/>
-          </a:p>
-        </p:txBody>
-      </p:sp>
-      <p:sp>
-        <p:nvSpPr>
-          <p:cNvPr id="5" name="TextBox 4"/>
-          <p:cNvSpPr txBox="1"/>
-          <p:nvPr/>
-        </p:nvSpPr>
-        <p:spPr>
-          <a:xfrm>
-            <a:off x="1133856" y="1444752"/>
-            <a:ext cx="10241280" cy="365760"/>
-          </a:xfrm>
-          <a:prstGeom prst="rect">
-            <a:avLst/>
-          </a:prstGeom>
-          <a:noFill/>
-        </p:spPr>
-        <p:txBody>
-          <a:bodyPr wrap="square" anchor="t" lIns="0" rIns="0" tIns="0" bIns="0">
-            <a:spAutoFit/>
-          </a:bodyPr>
-          <a:lstStyle/>
-          <a:p>
-            <a:pPr algn="l">
-              <a:spcBef>
-                <a:spcPts val="0"/>
-              </a:spcBef>
-              <a:spcAft>
-                <a:spcPts val="400"/>
-              </a:spcAft>
-            </a:pPr>
-            <a:r>
-              <a:rPr sz="1600" b="1">
-                <a:solidFill>
-                  <a:srgbClr val="FFFFFF"/>
-                </a:solidFill>
-                <a:latin typeface="游ゴシック Medium"/>
-                <a:ea typeface="游ゴシック Medium"/>
-                <a:cs typeface="游ゴシック Medium"/>
-              </a:rPr>
-              <a:t>Officeアプリの中で使える</a:t>
-            </a:r>
-          </a:p>
-        </p:txBody>
-      </p:sp>
-      <p:sp>
-        <p:nvSpPr>
-          <p:cNvPr id="6" name="TextBox 5"/>
-          <p:cNvSpPr txBox="1"/>
-          <p:nvPr/>
-        </p:nvSpPr>
-        <p:spPr>
-          <a:xfrm>
-            <a:off x="1133856" y="1819656"/>
-            <a:ext cx="10241280" cy="411480"/>
-          </a:xfrm>
-          <a:prstGeom prst="rect">
-            <a:avLst/>
-          </a:prstGeom>
-          <a:noFill/>
-        </p:spPr>
-        <p:txBody>
-          <a:bodyPr wrap="square" anchor="t" lIns="0" rIns="0" tIns="0" bIns="0">
-            <a:spAutoFit/>
-          </a:bodyPr>
-          <a:lstStyle/>
-          <a:p>
-            <a:pPr algn="l">
-              <a:spcBef>
-                <a:spcPts val="0"/>
-              </a:spcBef>
-              <a:spcAft>
-                <a:spcPts val="400"/>
-              </a:spcAft>
-            </a:pPr>
-            <a:r>
-              <a:rPr sz="1300" b="0">
-                <a:solidFill>
-                  <a:srgbClr val="E8EDF4"/>
-                </a:solidFill>
-                <a:latin typeface="游ゴシック Medium"/>
-                <a:ea typeface="游ゴシック Medium"/>
-                <a:cs typeface="游ゴシック Medium"/>
-              </a:rPr>
-              <a:t>Word・Excel・PowerPoint・Outlook・Teams から直接呼び出せる。</a:t>
-            </a:r>
-          </a:p>
-        </p:txBody>
-      </p:sp>
-      <p:sp>
-        <p:nvSpPr>
-          <p:cNvPr id="7" name="Rectangle 6"/>
-          <p:cNvSpPr/>
-          <p:nvPr/>
-        </p:nvSpPr>
-        <p:spPr>
-          <a:xfrm>
-            <a:off x="813816" y="2309774"/>
-            <a:ext cx="137160" cy="137160"/>
-          </a:xfrm>
-          <a:prstGeom prst="rect">
-            <a:avLst/>
-          </a:prstGeom>
-          <a:solidFill>
-            <a:srgbClr val="8FB9EC"/>
-          </a:solidFill>
-          <a:ln>
-            <a:noFill/>
-          </a:ln>
-          <a:effectLst/>
-        </p:spPr>
-        <p:style>
-          <a:lnRef idx="1">
-            <a:schemeClr val="accent1"/>
-          </a:lnRef>
-          <a:fillRef idx="3">
-            <a:schemeClr val="accent1"/>
-          </a:fillRef>
-          <a:effectRef idx="2">
-            <a:schemeClr val="accent1"/>
-          </a:effectRef>
-          <a:fontRef idx="minor">
-            <a:schemeClr val="lt1"/>
-          </a:fontRef>
-        </p:style>
-        <p:txBody>
-          <a:bodyPr rtlCol="0" anchor="ctr"/>
-          <a:lstStyle/>
-          <a:p>
-            <a:pPr algn="ctr"/>
-          </a:p>
-        </p:txBody>
-      </p:sp>
-      <p:sp>
-        <p:nvSpPr>
-          <p:cNvPr id="8" name="TextBox 7"/>
-          <p:cNvSpPr txBox="1"/>
-          <p:nvPr/>
-        </p:nvSpPr>
-        <p:spPr>
-          <a:xfrm>
-            <a:off x="1133856" y="2227478"/>
-            <a:ext cx="10241280" cy="365760"/>
-          </a:xfrm>
-          <a:prstGeom prst="rect">
-            <a:avLst/>
-          </a:prstGeom>
-          <a:noFill/>
-        </p:spPr>
-        <p:txBody>
-          <a:bodyPr wrap="square" anchor="t" lIns="0" rIns="0" tIns="0" bIns="0">
-            <a:spAutoFit/>
-          </a:bodyPr>
-          <a:lstStyle/>
-          <a:p>
-            <a:pPr algn="l">
-              <a:spcBef>
-                <a:spcPts val="0"/>
-              </a:spcBef>
-              <a:spcAft>
-                <a:spcPts val="400"/>
-              </a:spcAft>
-            </a:pPr>
-            <a:r>
-              <a:rPr sz="1600" b="1">
-                <a:solidFill>
-                  <a:srgbClr val="FFFFFF"/>
-                </a:solidFill>
-                <a:latin typeface="游ゴシック Medium"/>
-                <a:ea typeface="游ゴシック Medium"/>
-                <a:cs typeface="游ゴシック Medium"/>
-              </a:rPr>
-              <a:t>自社データを自動で活用</a:t>
-            </a:r>
-          </a:p>
-        </p:txBody>
-      </p:sp>
-      <p:sp>
-        <p:nvSpPr>
-          <p:cNvPr id="9" name="TextBox 8"/>
-          <p:cNvSpPr txBox="1"/>
-          <p:nvPr/>
-        </p:nvSpPr>
-        <p:spPr>
-          <a:xfrm>
-            <a:off x="1133856" y="2602382"/>
-            <a:ext cx="10241280" cy="411480"/>
-          </a:xfrm>
-          <a:prstGeom prst="rect">
-            <a:avLst/>
-          </a:prstGeom>
-          <a:noFill/>
-        </p:spPr>
-        <p:txBody>
-          <a:bodyPr wrap="square" anchor="t" lIns="0" rIns="0" tIns="0" bIns="0">
-            <a:spAutoFit/>
-          </a:bodyPr>
-          <a:lstStyle/>
-          <a:p>
-            <a:pPr algn="l">
-              <a:spcBef>
-                <a:spcPts val="0"/>
-              </a:spcBef>
-              <a:spcAft>
-                <a:spcPts val="400"/>
-              </a:spcAft>
-            </a:pPr>
-            <a:r>
-              <a:rPr sz="1300" b="0">
-                <a:solidFill>
-                  <a:srgbClr val="E8EDF4"/>
-                </a:solidFill>
-                <a:latin typeface="游ゴシック Medium"/>
-                <a:ea typeface="游ゴシック Medium"/>
-                <a:cs typeface="游ゴシック Medium"/>
-              </a:rPr>
-              <a:t>メール・文書・会議・予定を参照して、要約・下書き・分析ができる。</a:t>
-            </a:r>
-          </a:p>
-        </p:txBody>
-      </p:sp>
-      <p:sp>
-        <p:nvSpPr>
-          <p:cNvPr id="10" name="Rectangle 9"/>
-          <p:cNvSpPr/>
-          <p:nvPr/>
-        </p:nvSpPr>
-        <p:spPr>
-          <a:xfrm>
-            <a:off x="813816" y="3092500"/>
-            <a:ext cx="137160" cy="137160"/>
-          </a:xfrm>
-          <a:prstGeom prst="rect">
-            <a:avLst/>
-          </a:prstGeom>
-          <a:solidFill>
-            <a:srgbClr val="8FB9EC"/>
-          </a:solidFill>
-          <a:ln>
-            <a:noFill/>
-          </a:ln>
-          <a:effectLst/>
-        </p:spPr>
-        <p:style>
-          <a:lnRef idx="1">
-            <a:schemeClr val="accent1"/>
-          </a:lnRef>
-          <a:fillRef idx="3">
-            <a:schemeClr val="accent1"/>
-          </a:fillRef>
-          <a:effectRef idx="2">
-            <a:schemeClr val="accent1"/>
-          </a:effectRef>
-          <a:fontRef idx="minor">
-            <a:schemeClr val="lt1"/>
-          </a:fontRef>
-        </p:style>
-        <p:txBody>
-          <a:bodyPr rtlCol="0" anchor="ctr"/>
-          <a:lstStyle/>
-          <a:p>
-            <a:pPr algn="ctr"/>
-          </a:p>
-        </p:txBody>
-      </p:sp>
-      <p:sp>
-        <p:nvSpPr>
-          <p:cNvPr id="11" name="TextBox 10"/>
-          <p:cNvSpPr txBox="1"/>
-          <p:nvPr/>
-        </p:nvSpPr>
-        <p:spPr>
-          <a:xfrm>
-            <a:off x="1133856" y="3010204"/>
-            <a:ext cx="10241280" cy="365760"/>
-          </a:xfrm>
-          <a:prstGeom prst="rect">
-            <a:avLst/>
-          </a:prstGeom>
-          <a:noFill/>
-        </p:spPr>
-        <p:txBody>
-          <a:bodyPr wrap="square" anchor="t" lIns="0" rIns="0" tIns="0" bIns="0">
-            <a:spAutoFit/>
-          </a:bodyPr>
-          <a:lstStyle/>
-          <a:p>
-            <a:pPr algn="l">
-              <a:spcBef>
-                <a:spcPts val="0"/>
-              </a:spcBef>
-              <a:spcAft>
-                <a:spcPts val="400"/>
-              </a:spcAft>
-            </a:pPr>
-            <a:r>
-              <a:rPr sz="1600" b="1">
-                <a:solidFill>
-                  <a:srgbClr val="FFFFFF"/>
-                </a:solidFill>
-                <a:latin typeface="游ゴシック Medium"/>
-                <a:ea typeface="游ゴシック Medium"/>
-                <a:cs typeface="游ゴシック Medium"/>
-              </a:rPr>
-              <a:t>会議・メールを効率化</a:t>
-            </a:r>
-          </a:p>
-        </p:txBody>
-      </p:sp>
-      <p:sp>
-        <p:nvSpPr>
-          <p:cNvPr id="12" name="TextBox 11"/>
-          <p:cNvSpPr txBox="1"/>
-          <p:nvPr/>
-        </p:nvSpPr>
-        <p:spPr>
-          <a:xfrm>
-            <a:off x="1133856" y="3385108"/>
-            <a:ext cx="10241280" cy="411480"/>
-          </a:xfrm>
-          <a:prstGeom prst="rect">
-            <a:avLst/>
-          </a:prstGeom>
-          <a:noFill/>
-        </p:spPr>
-        <p:txBody>
-          <a:bodyPr wrap="square" anchor="t" lIns="0" rIns="0" tIns="0" bIns="0">
-            <a:spAutoFit/>
-          </a:bodyPr>
-          <a:lstStyle/>
-          <a:p>
-            <a:pPr algn="l">
-              <a:spcBef>
-                <a:spcPts val="0"/>
-              </a:spcBef>
-              <a:spcAft>
-                <a:spcPts val="400"/>
-              </a:spcAft>
-            </a:pPr>
-            <a:r>
-              <a:rPr sz="1300" b="0">
-                <a:solidFill>
-                  <a:srgbClr val="E8EDF4"/>
-                </a:solidFill>
-                <a:latin typeface="游ゴシック Medium"/>
-                <a:ea typeface="游ゴシック Medium"/>
-                <a:cs typeface="游ゴシック Medium"/>
-              </a:rPr>
-              <a:t>Teams会議の要約やアクション抽出、メールの下書き・整理。</a:t>
-            </a:r>
-          </a:p>
-        </p:txBody>
-      </p:sp>
-      <p:sp>
-        <p:nvSpPr>
-          <p:cNvPr id="13" name="Rectangle 12"/>
-          <p:cNvSpPr/>
-          <p:nvPr/>
-        </p:nvSpPr>
-        <p:spPr>
-          <a:xfrm>
-            <a:off x="813816" y="3875227"/>
-            <a:ext cx="137160" cy="137160"/>
-          </a:xfrm>
-          <a:prstGeom prst="rect">
-            <a:avLst/>
-          </a:prstGeom>
-          <a:solidFill>
-            <a:srgbClr val="8FB9EC"/>
-          </a:solidFill>
-          <a:ln>
-            <a:noFill/>
-          </a:ln>
-          <a:effectLst/>
-        </p:spPr>
-        <p:style>
-          <a:lnRef idx="1">
-            <a:schemeClr val="accent1"/>
-          </a:lnRef>
-          <a:fillRef idx="3">
-            <a:schemeClr val="accent1"/>
-          </a:fillRef>
-          <a:effectRef idx="2">
-            <a:schemeClr val="accent1"/>
-          </a:effectRef>
-          <a:fontRef idx="minor">
-            <a:schemeClr val="lt1"/>
-          </a:fontRef>
-        </p:style>
-        <p:txBody>
-          <a:bodyPr rtlCol="0" anchor="ctr"/>
-          <a:lstStyle/>
-          <a:p>
-            <a:pPr algn="ctr"/>
-          </a:p>
-        </p:txBody>
-      </p:sp>
-      <p:sp>
-        <p:nvSpPr>
-          <p:cNvPr id="14" name="TextBox 13"/>
-          <p:cNvSpPr txBox="1"/>
-          <p:nvPr/>
-        </p:nvSpPr>
-        <p:spPr>
-          <a:xfrm>
-            <a:off x="1133856" y="3792931"/>
-            <a:ext cx="10241280" cy="365760"/>
-          </a:xfrm>
-          <a:prstGeom prst="rect">
-            <a:avLst/>
-          </a:prstGeom>
-          <a:noFill/>
-        </p:spPr>
-        <p:txBody>
-          <a:bodyPr wrap="square" anchor="t" lIns="0" rIns="0" tIns="0" bIns="0">
-            <a:spAutoFit/>
-          </a:bodyPr>
-          <a:lstStyle/>
-          <a:p>
-            <a:pPr algn="l">
-              <a:spcBef>
-                <a:spcPts val="0"/>
-              </a:spcBef>
-              <a:spcAft>
-                <a:spcPts val="400"/>
-              </a:spcAft>
-            </a:pPr>
-            <a:r>
-              <a:rPr sz="1600" b="1">
-                <a:solidFill>
-                  <a:srgbClr val="FFFFFF"/>
-                </a:solidFill>
-                <a:latin typeface="游ゴシック Medium"/>
-                <a:ea typeface="游ゴシック Medium"/>
-                <a:cs typeface="游ゴシック Medium"/>
-              </a:rPr>
-              <a:t>資料・データ作成</a:t>
-            </a:r>
-          </a:p>
-        </p:txBody>
-      </p:sp>
-      <p:sp>
-        <p:nvSpPr>
-          <p:cNvPr id="15" name="TextBox 14"/>
-          <p:cNvSpPr txBox="1"/>
-          <p:nvPr/>
-        </p:nvSpPr>
-        <p:spPr>
-          <a:xfrm>
-            <a:off x="1133856" y="4167835"/>
-            <a:ext cx="10241280" cy="411480"/>
-          </a:xfrm>
-          <a:prstGeom prst="rect">
-            <a:avLst/>
-          </a:prstGeom>
-          <a:noFill/>
-        </p:spPr>
-        <p:txBody>
-          <a:bodyPr wrap="square" anchor="t" lIns="0" rIns="0" tIns="0" bIns="0">
-            <a:spAutoFit/>
-          </a:bodyPr>
-          <a:lstStyle/>
-          <a:p>
-            <a:pPr algn="l">
-              <a:spcBef>
-                <a:spcPts val="0"/>
-              </a:spcBef>
-              <a:spcAft>
-                <a:spcPts val="400"/>
-              </a:spcAft>
-            </a:pPr>
-            <a:r>
-              <a:rPr sz="1300" b="0">
-                <a:solidFill>
-                  <a:srgbClr val="E8EDF4"/>
-                </a:solidFill>
-                <a:latin typeface="游ゴシック Medium"/>
-                <a:ea typeface="游ゴシック Medium"/>
-                <a:cs typeface="游ゴシック Medium"/>
-              </a:rPr>
-              <a:t>PowerPointのスライド生成、Excelのデータ分析・数式・グラフ作成。</a:t>
-            </a:r>
-          </a:p>
-        </p:txBody>
-      </p:sp>
-      <p:sp>
-        <p:nvSpPr>
-          <p:cNvPr id="16" name="Rectangle 15"/>
-          <p:cNvSpPr/>
-          <p:nvPr/>
-        </p:nvSpPr>
-        <p:spPr>
-          <a:xfrm>
-            <a:off x="813816" y="4657953"/>
-            <a:ext cx="137160" cy="137160"/>
-          </a:xfrm>
-          <a:prstGeom prst="rect">
-            <a:avLst/>
-          </a:prstGeom>
-          <a:solidFill>
-            <a:srgbClr val="8FB9EC"/>
-          </a:solidFill>
-          <a:ln>
-            <a:noFill/>
-          </a:ln>
-          <a:effectLst/>
-        </p:spPr>
-        <p:style>
-          <a:lnRef idx="1">
-            <a:schemeClr val="accent1"/>
-          </a:lnRef>
-          <a:fillRef idx="3">
-            <a:schemeClr val="accent1"/>
-          </a:fillRef>
-          <a:effectRef idx="2">
-            <a:schemeClr val="accent1"/>
-          </a:effectRef>
-          <a:fontRef idx="minor">
-            <a:schemeClr val="lt1"/>
-          </a:fontRef>
-        </p:style>
-        <p:txBody>
-          <a:bodyPr rtlCol="0" anchor="ctr"/>
-          <a:lstStyle/>
-          <a:p>
-            <a:pPr algn="ctr"/>
-          </a:p>
-        </p:txBody>
-      </p:sp>
-      <p:sp>
-        <p:nvSpPr>
-          <p:cNvPr id="17" name="TextBox 16"/>
-          <p:cNvSpPr txBox="1"/>
-          <p:nvPr/>
-        </p:nvSpPr>
-        <p:spPr>
-          <a:xfrm>
-            <a:off x="1133856" y="4575657"/>
-            <a:ext cx="10241280" cy="365760"/>
-          </a:xfrm>
-          <a:prstGeom prst="rect">
-            <a:avLst/>
-          </a:prstGeom>
-          <a:noFill/>
-        </p:spPr>
-        <p:txBody>
-          <a:bodyPr wrap="square" anchor="t" lIns="0" rIns="0" tIns="0" bIns="0">
-            <a:spAutoFit/>
-          </a:bodyPr>
-          <a:lstStyle/>
-          <a:p>
-            <a:pPr algn="l">
-              <a:spcBef>
-                <a:spcPts val="0"/>
-              </a:spcBef>
-              <a:spcAft>
-                <a:spcPts val="400"/>
-              </a:spcAft>
-            </a:pPr>
-            <a:r>
-              <a:rPr sz="1600" b="1">
-                <a:solidFill>
-                  <a:srgbClr val="FFFFFF"/>
-                </a:solidFill>
-                <a:latin typeface="游ゴシック Medium"/>
-                <a:ea typeface="游ゴシック Medium"/>
-                <a:cs typeface="游ゴシック Medium"/>
-              </a:rPr>
-              <a:t>エージェントで自動化</a:t>
-            </a:r>
-          </a:p>
-        </p:txBody>
-      </p:sp>
-      <p:sp>
-        <p:nvSpPr>
-          <p:cNvPr id="18" name="TextBox 17"/>
-          <p:cNvSpPr txBox="1"/>
-          <p:nvPr/>
-        </p:nvSpPr>
-        <p:spPr>
-          <a:xfrm>
-            <a:off x="1133856" y="4950561"/>
-            <a:ext cx="10241280" cy="411480"/>
-          </a:xfrm>
-          <a:prstGeom prst="rect">
-            <a:avLst/>
-          </a:prstGeom>
-          <a:noFill/>
-        </p:spPr>
-        <p:txBody>
-          <a:bodyPr wrap="square" anchor="t" lIns="0" rIns="0" tIns="0" bIns="0">
-            <a:spAutoFit/>
-          </a:bodyPr>
-          <a:lstStyle/>
-          <a:p>
-            <a:pPr algn="l">
-              <a:spcBef>
-                <a:spcPts val="0"/>
-              </a:spcBef>
-              <a:spcAft>
-                <a:spcPts val="400"/>
-              </a:spcAft>
-            </a:pPr>
-            <a:r>
-              <a:rPr sz="1300" b="0">
-                <a:solidFill>
-                  <a:srgbClr val="E8EDF4"/>
-                </a:solidFill>
-                <a:latin typeface="游ゴシック Medium"/>
-                <a:ea typeface="游ゴシック Medium"/>
-                <a:cs typeface="游ゴシック Medium"/>
-              </a:rPr>
-              <a:t>Copilot Studio で業務プロセス用のエージェントを作成できる。</a:t>
             </a:r>
           </a:p>
         </p:txBody>
@@ -16053,6 +16991,26 @@
 </file>
 
 <file path=customXml/item1.xml><?xml version="1.0" encoding="utf-8"?>
+<p:properties xmlns:p="http://schemas.microsoft.com/office/2006/metadata/properties" xmlns:xsi="http://www.w3.org/2001/XMLSchema-instance" xmlns:pc="http://schemas.microsoft.com/office/infopath/2007/PartnerControls">
+  <documentManagement>
+    <TaxCatchAll xmlns="5d54735c-8563-480c-aa17-13e507c6fcf6" xsi:nil="true"/>
+    <lcf76f155ced4ddcb4097134ff3c332f xmlns="768ecba8-f556-413e-93cf-a669b10e85e2">
+      <Terms xmlns="http://schemas.microsoft.com/office/infopath/2007/PartnerControls"/>
+    </lcf76f155ced4ddcb4097134ff3c332f>
+  </documentManagement>
+</p:properties>
+</file>
+
+<file path=customXml/item2.xml><?xml version="1.0" encoding="utf-8"?>
+<?mso-contentType ?>
+<FormTemplates xmlns="http://schemas.microsoft.com/sharepoint/v3/contenttype/forms">
+  <Display>DocumentLibraryForm</Display>
+  <Edit>DocumentLibraryForm</Edit>
+  <New>DocumentLibraryForm</New>
+</FormTemplates>
+</file>
+
+<file path=customXml/item3.xml><?xml version="1.0" encoding="utf-8"?>
 <ct:contentTypeSchema xmlns:ct="http://schemas.microsoft.com/office/2006/metadata/contentType" xmlns:ma="http://schemas.microsoft.com/office/2006/metadata/properties/metaAttributes" ct:_="" ma:_="" ma:contentTypeName="ドキュメント" ma:contentTypeID="0x010100CAA98F3332D97A45A4456E8DA039AEBC" ma:contentTypeVersion="12" ma:contentTypeDescription="新しいドキュメントを作成します。" ma:contentTypeScope="" ma:versionID="a9dd5d2222e388c7d315e043965fb87e">
   <xsd:schema xmlns:xsd="http://www.w3.org/2001/XMLSchema" xmlns:xs="http://www.w3.org/2001/XMLSchema" xmlns:p="http://schemas.microsoft.com/office/2006/metadata/properties" xmlns:ns2="768ecba8-f556-413e-93cf-a669b10e85e2" xmlns:ns3="5d54735c-8563-480c-aa17-13e507c6fcf6" targetNamespace="http://schemas.microsoft.com/office/2006/metadata/properties" ma:root="true" ma:fieldsID="3be956df6bb9cabc9cd1a95b5e82f7fe" ns2:_="" ns3:_="">
     <xsd:import namespace="768ecba8-f556-413e-93cf-a669b10e85e2"/>
@@ -16253,27 +17211,26 @@
 </ct:contentTypeSchema>
 </file>
 
-<file path=customXml/item2.xml><?xml version="1.0" encoding="utf-8"?>
-<?mso-contentType ?>
-<FormTemplates xmlns="http://schemas.microsoft.com/sharepoint/v3/contenttype/forms">
-  <Display>DocumentLibraryForm</Display>
-  <Edit>DocumentLibraryForm</Edit>
-  <New>DocumentLibraryForm</New>
-</FormTemplates>
+<file path=customXml/itemProps1.xml><?xml version="1.0" encoding="utf-8"?>
+<ds:datastoreItem xmlns:ds="http://schemas.openxmlformats.org/officeDocument/2006/customXml" ds:itemID="{3FFB5523-FEB7-4908-9109-C2FCB7452423}">
+  <ds:schemaRefs>
+    <ds:schemaRef ds:uri="http://schemas.microsoft.com/office/2006/metadata/properties"/>
+    <ds:schemaRef ds:uri="http://schemas.microsoft.com/office/infopath/2007/PartnerControls"/>
+    <ds:schemaRef ds:uri="5d54735c-8563-480c-aa17-13e507c6fcf6"/>
+    <ds:schemaRef ds:uri="768ecba8-f556-413e-93cf-a669b10e85e2"/>
+  </ds:schemaRefs>
+</ds:datastoreItem>
 </file>
 
-<file path=customXml/item3.xml><?xml version="1.0" encoding="utf-8"?>
-<p:properties xmlns:p="http://schemas.microsoft.com/office/2006/metadata/properties" xmlns:xsi="http://www.w3.org/2001/XMLSchema-instance" xmlns:pc="http://schemas.microsoft.com/office/infopath/2007/PartnerControls">
-  <documentManagement>
-    <TaxCatchAll xmlns="5d54735c-8563-480c-aa17-13e507c6fcf6" xsi:nil="true"/>
-    <lcf76f155ced4ddcb4097134ff3c332f xmlns="768ecba8-f556-413e-93cf-a669b10e85e2">
-      <Terms xmlns="http://schemas.microsoft.com/office/infopath/2007/PartnerControls"/>
-    </lcf76f155ced4ddcb4097134ff3c332f>
-  </documentManagement>
-</p:properties>
+<file path=customXml/itemProps2.xml><?xml version="1.0" encoding="utf-8"?>
+<ds:datastoreItem xmlns:ds="http://schemas.openxmlformats.org/officeDocument/2006/customXml" ds:itemID="{458AE83B-8FBF-46E4-95C5-6FC34C176263}">
+  <ds:schemaRefs>
+    <ds:schemaRef ds:uri="http://schemas.microsoft.com/sharepoint/v3/contenttype/forms"/>
+  </ds:schemaRefs>
+</ds:datastoreItem>
 </file>
 
-<file path=customXml/itemProps1.xml><?xml version="1.0" encoding="utf-8"?>
+<file path=customXml/itemProps3.xml><?xml version="1.0" encoding="utf-8"?>
 <ds:datastoreItem xmlns:ds="http://schemas.openxmlformats.org/officeDocument/2006/customXml" ds:itemID="{B1F9275D-B4EB-4C8E-9255-310B2138FDF9}">
   <ds:schemaRefs>
     <ds:schemaRef ds:uri="http://schemas.microsoft.com/office/2006/metadata/contentType"/>
@@ -16290,23 +17247,4 @@
     <ds:schemaRef ds:uri="http://schemas.microsoft.com/internal/obd"/>
   </ds:schemaRefs>
 </ds:datastoreItem>
-</file>
-
-<file path=customXml/itemProps2.xml><?xml version="1.0" encoding="utf-8"?>
-<ds:datastoreItem xmlns:ds="http://schemas.openxmlformats.org/officeDocument/2006/customXml" ds:itemID="{458AE83B-8FBF-46E4-95C5-6FC34C176263}">
-  <ds:schemaRefs>
-    <ds:schemaRef ds:uri="http://schemas.microsoft.com/sharepoint/v3/contenttype/forms"/>
-  </ds:schemaRefs>
-</ds:datastoreItem>
-</file>
-
-<file path=customXml/itemProps3.xml><?xml version="1.0" encoding="utf-8"?>
-<ds:datastoreItem xmlns:ds="http://schemas.openxmlformats.org/officeDocument/2006/customXml" ds:itemID="{3FFB5523-FEB7-4908-9109-C2FCB7452423}">
-  <ds:schemaRefs>
-    <ds:schemaRef ds:uri="http://schemas.microsoft.com/office/2006/metadata/properties"/>
-    <ds:schemaRef ds:uri="http://schemas.microsoft.com/office/infopath/2007/PartnerControls"/>
-    <ds:schemaRef ds:uri="5d54735c-8563-480c-aa17-13e507c6fcf6"/>
-    <ds:schemaRef ds:uri="768ecba8-f556-413e-93cf-a669b10e85e2"/>
-  </ds:schemaRefs>
-</ds:datastoreItem>
 </file>
--- a/配布/Copilot_Cowork_競合比較.pptx
+++ b/配布/Copilot_Cowork_競合比較.pptx
@@ -5,7 +5,7 @@
     <p:sldMasterId id="2147483705" r:id="rId4"/>
   </p:sldMasterIdLst>
   <p:notesMasterIdLst>
-    <p:notesMasterId r:id="rId16"/>
+    <p:notesMasterId r:id="rId17"/>
   </p:notesMasterIdLst>
   <p:sldIdLst>
     <p:sldId id="256" r:id="rId5"/>
@@ -16,10 +16,10 @@
     <p:sldId id="257" r:id="rId10"/>
     <p:sldId id="258" r:id="rId11"/>
     <p:sldId id="266" r:id="rId12"/>
-    <p:sldId id="267" r:id="rId22"/>
-    <p:sldId id="259" r:id="rId13"/>
-    <p:sldId id="260" r:id="rId14"/>
-    <p:sldId id="261" r:id="rId15"/>
+    <p:sldId id="267" r:id="rId13"/>
+    <p:sldId id="259" r:id="rId14"/>
+    <p:sldId id="260" r:id="rId15"/>
+    <p:sldId id="261" r:id="rId16"/>
   </p:sldIdLst>
   <p:sldSz cx="12192000" cy="6858000"/>
   <p:notesSz cx="6858000" cy="9144000"/>
@@ -9802,40 +9802,41 @@
         </p:nvSpPr>
         <p:spPr/>
         <p:txBody>
-          <a:bodyPr/>
+          <a:bodyPr>
+            <a:normAutofit fontScale="90000"/>
+          </a:bodyPr>
           <a:lstStyle/>
           <a:p>
             <a:r>
-              <a:rPr dirty="0">
+              <a:rPr dirty="0"/>
+              <a:t>Claude Cowork </a:t>
+            </a:r>
+            <a:r>
+              <a:rPr lang="ja-JP" altLang="en-US"/>
+              <a:t>と</a:t>
+            </a:r>
+            <a:br>
+              <a:rPr lang="en-US" altLang="ja-JP" dirty="0">
                 <a:latin typeface="游ゴシック Medium"/>
                 <a:ea typeface="游ゴシック Medium"/>
                 <a:cs typeface="游ゴシック Medium"/>
               </a:rPr>
-              <a:t>Claude Code / </a:t>
-            </a:r>
-            <a:r>
-              <a:rPr dirty="0" err="1">
-                <a:latin typeface="游ゴシック Medium"/>
-                <a:ea typeface="游ゴシック Medium"/>
-                <a:cs typeface="游ゴシック Medium"/>
-              </a:rPr>
-              <a:t>Cowork</a:t>
-            </a:r>
-            <a:r>
-              <a:rPr dirty="0">
-                <a:latin typeface="游ゴシック Medium"/>
-                <a:ea typeface="游ゴシック Medium"/>
-                <a:cs typeface="游ゴシック Medium"/>
-              </a:rPr>
+            </a:br>
+            <a:r>
+              <a:rPr lang="en-US" dirty="0"/>
+              <a:t>Microsoft 356 </a:t>
+            </a:r>
+            <a:r>
+              <a:rPr lang="en-US" dirty="0" err="1"/>
+              <a:t>Cpilot</a:t>
+            </a:r>
+            <a:r>
+              <a:rPr lang="en-US" dirty="0"/>
               <a:t> </a:t>
             </a:r>
             <a:r>
-              <a:rPr dirty="0" err="1">
-                <a:latin typeface="游ゴシック Medium"/>
-                <a:ea typeface="游ゴシック Medium"/>
-                <a:cs typeface="游ゴシック Medium"/>
-              </a:rPr>
-              <a:t>と周辺ツールの位置づけ</a:t>
+              <a:rPr dirty="0" err="1"/>
+              <a:t>の位置づけ</a:t>
             </a:r>
             <a:endParaRPr dirty="0">
               <a:latin typeface="游ゴシック Medium"/>
@@ -9963,11 +9964,756 @@
           <a:lstStyle/>
           <a:p>
             <a:r>
-              <a:rPr>
+              <a:rPr/>
+              <a:t>Claude Cowork と Claude Code の使い分け</a:t>
+            </a:r>
+          </a:p>
+        </p:txBody>
+      </p:sp>
+      <p:sp>
+        <p:nvSpPr>
+          <p:cNvPr id="3" name="TextBox 2"/>
+          <p:cNvSpPr txBox="1"/>
+          <p:nvPr/>
+        </p:nvSpPr>
+        <p:spPr>
+          <a:xfrm>
+            <a:off x="813816" y="1024128"/>
+            <a:ext cx="10561320" cy="548640"/>
+          </a:xfrm>
+          <a:prstGeom prst="rect">
+            <a:avLst/>
+          </a:prstGeom>
+          <a:noFill/>
+        </p:spPr>
+        <p:txBody>
+          <a:bodyPr wrap="square" lIns="0" tIns="0" rIns="0" bIns="0" anchor="t">
+            <a:spAutoFit/>
+          </a:bodyPr>
+          <a:lstStyle/>
+          <a:p>
+            <a:pPr algn="l">
+              <a:spcBef>
+                <a:spcPts val="0"/>
+              </a:spcBef>
+              <a:spcAft>
+                <a:spcPts val="400"/>
+              </a:spcAft>
+            </a:pPr>
+            <a:r>
+              <a:rPr sz="1300" b="0">
+                <a:solidFill>
+                  <a:srgbClr val="B9C6DA"/>
+                </a:solidFill>
                 <a:latin typeface="游ゴシック Medium"/>
                 <a:ea typeface="游ゴシック Medium"/>
                 <a:cs typeface="游ゴシック Medium"/>
               </a:rPr>
+              <a:t>できること自体は同じClaudeでほぼ共通（MCP・コード実行・デスクトップアプリもどちらにもあります）。違いは“何に向くか・誰向けか”です。</a:t>
+            </a:r>
+          </a:p>
+        </p:txBody>
+      </p:sp>
+      <p:sp>
+        <p:nvSpPr>
+          <p:cNvPr id="4" name="Rectangle 3"/>
+          <p:cNvSpPr/>
+          <p:nvPr/>
+        </p:nvSpPr>
+        <p:spPr>
+          <a:xfrm>
+            <a:off x="813816" y="1783080"/>
+            <a:ext cx="5193792" cy="2743200"/>
+          </a:xfrm>
+          <a:prstGeom prst="rect">
+            <a:avLst/>
+          </a:prstGeom>
+          <a:solidFill>
+            <a:srgbClr val="FFFFFF"/>
+          </a:solidFill>
+          <a:ln w="12700">
+            <a:solidFill>
+              <a:srgbClr val="D9DEE4"/>
+            </a:solidFill>
+          </a:ln>
+          <a:effectLst/>
+        </p:spPr>
+        <p:style>
+          <a:lnRef idx="1">
+            <a:schemeClr val="accent1"/>
+          </a:lnRef>
+          <a:fillRef idx="3">
+            <a:schemeClr val="accent1"/>
+          </a:fillRef>
+          <a:effectRef idx="2">
+            <a:schemeClr val="accent1"/>
+          </a:effectRef>
+          <a:fontRef idx="minor">
+            <a:schemeClr val="lt1"/>
+          </a:fontRef>
+        </p:style>
+        <p:txBody>
+          <a:bodyPr rtlCol="0" anchor="ctr"/>
+          <a:lstStyle/>
+          <a:p>
+            <a:pPr algn="ctr"/>
+            <a:endParaRPr/>
+          </a:p>
+        </p:txBody>
+      </p:sp>
+      <p:sp>
+        <p:nvSpPr>
+          <p:cNvPr id="5" name="TextBox 4"/>
+          <p:cNvSpPr txBox="1"/>
+          <p:nvPr/>
+        </p:nvSpPr>
+        <p:spPr>
+          <a:xfrm>
+            <a:off x="1088136" y="2011680"/>
+            <a:ext cx="4645152" cy="457200"/>
+          </a:xfrm>
+          <a:prstGeom prst="rect">
+            <a:avLst/>
+          </a:prstGeom>
+          <a:noFill/>
+        </p:spPr>
+        <p:txBody>
+          <a:bodyPr wrap="square" lIns="0" tIns="0" rIns="0" bIns="0" anchor="t">
+            <a:spAutoFit/>
+          </a:bodyPr>
+          <a:lstStyle/>
+          <a:p>
+            <a:pPr algn="l">
+              <a:spcBef>
+                <a:spcPts val="0"/>
+              </a:spcBef>
+              <a:spcAft>
+                <a:spcPts val="400"/>
+              </a:spcAft>
+            </a:pPr>
+            <a:r>
+              <a:rPr sz="1900" b="1">
+                <a:solidFill>
+                  <a:srgbClr val="005CCA"/>
+                </a:solidFill>
+                <a:latin typeface="游ゴシック Medium"/>
+                <a:ea typeface="游ゴシック Medium"/>
+                <a:cs typeface="游ゴシック Medium"/>
+              </a:rPr>
+              <a:t>Claude Cowork</a:t>
+            </a:r>
+          </a:p>
+        </p:txBody>
+      </p:sp>
+      <p:sp>
+        <p:nvSpPr>
+          <p:cNvPr id="6" name="TextBox 5"/>
+          <p:cNvSpPr txBox="1"/>
+          <p:nvPr/>
+        </p:nvSpPr>
+        <p:spPr>
+          <a:xfrm>
+            <a:off x="1088136" y="2441448"/>
+            <a:ext cx="4645152" cy="320040"/>
+          </a:xfrm>
+          <a:prstGeom prst="rect">
+            <a:avLst/>
+          </a:prstGeom>
+          <a:noFill/>
+        </p:spPr>
+        <p:txBody>
+          <a:bodyPr wrap="square" lIns="0" tIns="0" rIns="0" bIns="0" anchor="t">
+            <a:spAutoFit/>
+          </a:bodyPr>
+          <a:lstStyle/>
+          <a:p>
+            <a:pPr algn="l">
+              <a:spcBef>
+                <a:spcPts val="0"/>
+              </a:spcBef>
+              <a:spcAft>
+                <a:spcPts val="400"/>
+              </a:spcAft>
+            </a:pPr>
+            <a:r>
+              <a:rPr sz="1200" b="1">
+                <a:solidFill>
+                  <a:srgbClr val="262B30"/>
+                </a:solidFill>
+                <a:latin typeface="游ゴシック Medium"/>
+                <a:ea typeface="游ゴシック Medium"/>
+                <a:cs typeface="游ゴシック Medium"/>
+              </a:rPr>
+              <a:t>一般業務むけ（コード不要）</a:t>
+            </a:r>
+          </a:p>
+        </p:txBody>
+      </p:sp>
+      <p:sp>
+        <p:nvSpPr>
+          <p:cNvPr id="7" name="TextBox 6"/>
+          <p:cNvSpPr txBox="1"/>
+          <p:nvPr/>
+        </p:nvSpPr>
+        <p:spPr>
+          <a:xfrm>
+            <a:off x="1088136" y="2862072"/>
+            <a:ext cx="4645152" cy="1554480"/>
+          </a:xfrm>
+          <a:prstGeom prst="rect">
+            <a:avLst/>
+          </a:prstGeom>
+          <a:noFill/>
+        </p:spPr>
+        <p:txBody>
+          <a:bodyPr wrap="square" lIns="0" tIns="0" rIns="0" bIns="0" anchor="t">
+            <a:spAutoFit/>
+          </a:bodyPr>
+          <a:lstStyle/>
+          <a:p>
+            <a:pPr algn="l">
+              <a:spcBef>
+                <a:spcPts val="0"/>
+              </a:spcBef>
+              <a:spcAft>
+                <a:spcPts val="800"/>
+              </a:spcAft>
+            </a:pPr>
+            <a:r>
+              <a:rPr sz="1200" b="1">
+                <a:solidFill>
+                  <a:srgbClr val="005CCA"/>
+                </a:solidFill>
+                <a:latin typeface="游ゴシック Medium"/>
+                <a:ea typeface="游ゴシック Medium"/>
+                <a:cs typeface="游ゴシック Medium"/>
+              </a:rPr>
+              <a:t>•  </a:t>
+            </a:r>
+            <a:r>
+              <a:rPr sz="1200" b="0">
+                <a:solidFill>
+                  <a:srgbClr val="262B30"/>
+                </a:solidFill>
+                <a:latin typeface="游ゴシック Medium"/>
+                <a:ea typeface="游ゴシック Medium"/>
+                <a:cs typeface="游ゴシック Medium"/>
+              </a:rPr>
+              <a:t>業務ユーザー（非エンジニア）向け</a:t>
+            </a:r>
+          </a:p>
+          <a:p>
+            <a:pPr algn="l">
+              <a:spcBef>
+                <a:spcPts val="0"/>
+              </a:spcBef>
+              <a:spcAft>
+                <a:spcPts val="800"/>
+              </a:spcAft>
+            </a:pPr>
+            <a:r>
+              <a:rPr sz="1200" b="1">
+                <a:solidFill>
+                  <a:srgbClr val="005CCA"/>
+                </a:solidFill>
+                <a:latin typeface="游ゴシック Medium"/>
+                <a:ea typeface="游ゴシック Medium"/>
+                <a:cs typeface="游ゴシック Medium"/>
+              </a:rPr>
+              <a:t>•  </a:t>
+            </a:r>
+            <a:r>
+              <a:rPr sz="1200" b="0">
+                <a:solidFill>
+                  <a:srgbClr val="262B30"/>
+                </a:solidFill>
+                <a:latin typeface="游ゴシック Medium"/>
+                <a:ea typeface="游ゴシック Medium"/>
+                <a:cs typeface="游ゴシック Medium"/>
+              </a:rPr>
+              <a:t>文書・スライド・表づくり、調査・データ整理に</a:t>
+            </a:r>
+          </a:p>
+          <a:p>
+            <a:pPr algn="l">
+              <a:spcBef>
+                <a:spcPts val="0"/>
+              </a:spcBef>
+              <a:spcAft>
+                <a:spcPts val="800"/>
+              </a:spcAft>
+            </a:pPr>
+            <a:r>
+              <a:rPr sz="1200" b="1">
+                <a:solidFill>
+                  <a:srgbClr val="005CCA"/>
+                </a:solidFill>
+                <a:latin typeface="游ゴシック Medium"/>
+                <a:ea typeface="游ゴシック Medium"/>
+                <a:cs typeface="游ゴシック Medium"/>
+              </a:rPr>
+              <a:t>•  </a:t>
+            </a:r>
+            <a:r>
+              <a:rPr sz="1200" b="0">
+                <a:solidFill>
+                  <a:srgbClr val="262B30"/>
+                </a:solidFill>
+                <a:latin typeface="游ゴシック Medium"/>
+                <a:ea typeface="游ゴシック Medium"/>
+                <a:cs typeface="游ゴシック Medium"/>
+              </a:rPr>
+              <a:t>デスクトップアプリ/Webで対話しながら使う</a:t>
+            </a:r>
+          </a:p>
+          <a:p>
+            <a:pPr algn="l">
+              <a:spcBef>
+                <a:spcPts val="0"/>
+              </a:spcBef>
+              <a:spcAft>
+                <a:spcPts val="800"/>
+              </a:spcAft>
+            </a:pPr>
+            <a:r>
+              <a:rPr sz="1200" b="1">
+                <a:solidFill>
+                  <a:srgbClr val="005CCA"/>
+                </a:solidFill>
+                <a:latin typeface="游ゴシック Medium"/>
+                <a:ea typeface="游ゴシック Medium"/>
+                <a:cs typeface="游ゴシック Medium"/>
+              </a:rPr>
+              <a:t>•  </a:t>
+            </a:r>
+            <a:r>
+              <a:rPr sz="1200" b="0">
+                <a:solidFill>
+                  <a:srgbClr val="262B30"/>
+                </a:solidFill>
+                <a:latin typeface="游ゴシック Medium"/>
+                <a:ea typeface="游ゴシック Medium"/>
+                <a:cs typeface="游ゴシック Medium"/>
+              </a:rPr>
+              <a:t>コードやコマンドを書かなくてよい</a:t>
+            </a:r>
+          </a:p>
+        </p:txBody>
+      </p:sp>
+      <p:sp>
+        <p:nvSpPr>
+          <p:cNvPr id="8" name="Rectangle 7"/>
+          <p:cNvSpPr/>
+          <p:nvPr/>
+        </p:nvSpPr>
+        <p:spPr>
+          <a:xfrm>
+            <a:off x="6181344" y="1783080"/>
+            <a:ext cx="5193792" cy="2743200"/>
+          </a:xfrm>
+          <a:prstGeom prst="rect">
+            <a:avLst/>
+          </a:prstGeom>
+          <a:solidFill>
+            <a:srgbClr val="FFFFFF"/>
+          </a:solidFill>
+          <a:ln w="12700">
+            <a:solidFill>
+              <a:srgbClr val="D9DEE4"/>
+            </a:solidFill>
+          </a:ln>
+          <a:effectLst/>
+        </p:spPr>
+        <p:style>
+          <a:lnRef idx="1">
+            <a:schemeClr val="accent1"/>
+          </a:lnRef>
+          <a:fillRef idx="3">
+            <a:schemeClr val="accent1"/>
+          </a:fillRef>
+          <a:effectRef idx="2">
+            <a:schemeClr val="accent1"/>
+          </a:effectRef>
+          <a:fontRef idx="minor">
+            <a:schemeClr val="lt1"/>
+          </a:fontRef>
+        </p:style>
+        <p:txBody>
+          <a:bodyPr rtlCol="0" anchor="ctr"/>
+          <a:lstStyle/>
+          <a:p>
+            <a:pPr algn="ctr"/>
+            <a:endParaRPr/>
+          </a:p>
+        </p:txBody>
+      </p:sp>
+      <p:sp>
+        <p:nvSpPr>
+          <p:cNvPr id="9" name="TextBox 8"/>
+          <p:cNvSpPr txBox="1"/>
+          <p:nvPr/>
+        </p:nvSpPr>
+        <p:spPr>
+          <a:xfrm>
+            <a:off x="6455664" y="2011680"/>
+            <a:ext cx="4645152" cy="457200"/>
+          </a:xfrm>
+          <a:prstGeom prst="rect">
+            <a:avLst/>
+          </a:prstGeom>
+          <a:noFill/>
+        </p:spPr>
+        <p:txBody>
+          <a:bodyPr wrap="square" lIns="0" tIns="0" rIns="0" bIns="0" anchor="t">
+            <a:spAutoFit/>
+          </a:bodyPr>
+          <a:lstStyle/>
+          <a:p>
+            <a:pPr algn="l">
+              <a:spcBef>
+                <a:spcPts val="0"/>
+              </a:spcBef>
+              <a:spcAft>
+                <a:spcPts val="400"/>
+              </a:spcAft>
+            </a:pPr>
+            <a:r>
+              <a:rPr sz="1900" b="1">
+                <a:solidFill>
+                  <a:srgbClr val="005CCA"/>
+                </a:solidFill>
+                <a:latin typeface="游ゴシック Medium"/>
+                <a:ea typeface="游ゴシック Medium"/>
+                <a:cs typeface="游ゴシック Medium"/>
+              </a:rPr>
+              <a:t>Claude Code</a:t>
+            </a:r>
+          </a:p>
+        </p:txBody>
+      </p:sp>
+      <p:sp>
+        <p:nvSpPr>
+          <p:cNvPr id="10" name="TextBox 9"/>
+          <p:cNvSpPr txBox="1"/>
+          <p:nvPr/>
+        </p:nvSpPr>
+        <p:spPr>
+          <a:xfrm>
+            <a:off x="6455664" y="2441448"/>
+            <a:ext cx="4645152" cy="320040"/>
+          </a:xfrm>
+          <a:prstGeom prst="rect">
+            <a:avLst/>
+          </a:prstGeom>
+          <a:noFill/>
+        </p:spPr>
+        <p:txBody>
+          <a:bodyPr wrap="square" lIns="0" tIns="0" rIns="0" bIns="0" anchor="t">
+            <a:spAutoFit/>
+          </a:bodyPr>
+          <a:lstStyle/>
+          <a:p>
+            <a:pPr algn="l">
+              <a:spcBef>
+                <a:spcPts val="0"/>
+              </a:spcBef>
+              <a:spcAft>
+                <a:spcPts val="400"/>
+              </a:spcAft>
+            </a:pPr>
+            <a:r>
+              <a:rPr sz="1200" b="1">
+                <a:solidFill>
+                  <a:srgbClr val="262B30"/>
+                </a:solidFill>
+                <a:latin typeface="游ゴシック Medium"/>
+                <a:ea typeface="游ゴシック Medium"/>
+                <a:cs typeface="游ゴシック Medium"/>
+              </a:rPr>
+              <a:t>ソフトウェア開発むけ（エンジニア）</a:t>
+            </a:r>
+          </a:p>
+        </p:txBody>
+      </p:sp>
+      <p:sp>
+        <p:nvSpPr>
+          <p:cNvPr id="11" name="TextBox 10"/>
+          <p:cNvSpPr txBox="1"/>
+          <p:nvPr/>
+        </p:nvSpPr>
+        <p:spPr>
+          <a:xfrm>
+            <a:off x="6455664" y="2862072"/>
+            <a:ext cx="4645152" cy="1554480"/>
+          </a:xfrm>
+          <a:prstGeom prst="rect">
+            <a:avLst/>
+          </a:prstGeom>
+          <a:noFill/>
+        </p:spPr>
+        <p:txBody>
+          <a:bodyPr wrap="square" lIns="0" tIns="0" rIns="0" bIns="0" anchor="t">
+            <a:spAutoFit/>
+          </a:bodyPr>
+          <a:lstStyle/>
+          <a:p>
+            <a:pPr algn="l">
+              <a:spcBef>
+                <a:spcPts val="0"/>
+              </a:spcBef>
+              <a:spcAft>
+                <a:spcPts val="800"/>
+              </a:spcAft>
+            </a:pPr>
+            <a:r>
+              <a:rPr sz="1200" b="1">
+                <a:solidFill>
+                  <a:srgbClr val="005CCA"/>
+                </a:solidFill>
+                <a:latin typeface="游ゴシック Medium"/>
+                <a:ea typeface="游ゴシック Medium"/>
+                <a:cs typeface="游ゴシック Medium"/>
+              </a:rPr>
+              <a:t>•  </a:t>
+            </a:r>
+            <a:r>
+              <a:rPr sz="1200" b="0">
+                <a:solidFill>
+                  <a:srgbClr val="262B30"/>
+                </a:solidFill>
+                <a:latin typeface="游ゴシック Medium"/>
+                <a:ea typeface="游ゴシック Medium"/>
+                <a:cs typeface="游ゴシック Medium"/>
+              </a:rPr>
+              <a:t>エンジニア・開発者向け</a:t>
+            </a:r>
+          </a:p>
+          <a:p>
+            <a:pPr algn="l">
+              <a:spcBef>
+                <a:spcPts val="0"/>
+              </a:spcBef>
+              <a:spcAft>
+                <a:spcPts val="800"/>
+              </a:spcAft>
+            </a:pPr>
+            <a:r>
+              <a:rPr sz="1200" b="1">
+                <a:solidFill>
+                  <a:srgbClr val="005CCA"/>
+                </a:solidFill>
+                <a:latin typeface="游ゴシック Medium"/>
+                <a:ea typeface="游ゴシック Medium"/>
+                <a:cs typeface="游ゴシック Medium"/>
+              </a:rPr>
+              <a:t>•  </a:t>
+            </a:r>
+            <a:r>
+              <a:rPr sz="1200" b="0">
+                <a:solidFill>
+                  <a:srgbClr val="262B30"/>
+                </a:solidFill>
+                <a:latin typeface="游ゴシック Medium"/>
+                <a:ea typeface="游ゴシック Medium"/>
+                <a:cs typeface="游ゴシック Medium"/>
+              </a:rPr>
+              <a:t>コードを書く・動かす・テストして自分で直す</a:t>
+            </a:r>
+          </a:p>
+          <a:p>
+            <a:pPr algn="l">
+              <a:spcBef>
+                <a:spcPts val="0"/>
+              </a:spcBef>
+              <a:spcAft>
+                <a:spcPts val="800"/>
+              </a:spcAft>
+            </a:pPr>
+            <a:r>
+              <a:rPr sz="1200" b="1">
+                <a:solidFill>
+                  <a:srgbClr val="005CCA"/>
+                </a:solidFill>
+                <a:latin typeface="游ゴシック Medium"/>
+                <a:ea typeface="游ゴシック Medium"/>
+                <a:cs typeface="游ゴシック Medium"/>
+              </a:rPr>
+              <a:t>•  </a:t>
+            </a:r>
+            <a:r>
+              <a:rPr sz="1200" b="0">
+                <a:solidFill>
+                  <a:srgbClr val="262B30"/>
+                </a:solidFill>
+                <a:latin typeface="游ゴシック Medium"/>
+                <a:ea typeface="游ゴシック Medium"/>
+                <a:cs typeface="游ゴシック Medium"/>
+              </a:rPr>
+              <a:t>実際のプロジェクトの中で作業（git・ビルド・CI）</a:t>
+            </a:r>
+          </a:p>
+          <a:p>
+            <a:pPr algn="l">
+              <a:spcBef>
+                <a:spcPts val="0"/>
+              </a:spcBef>
+              <a:spcAft>
+                <a:spcPts val="800"/>
+              </a:spcAft>
+            </a:pPr>
+            <a:r>
+              <a:rPr sz="1200" b="1">
+                <a:solidFill>
+                  <a:srgbClr val="005CCA"/>
+                </a:solidFill>
+                <a:latin typeface="游ゴシック Medium"/>
+                <a:ea typeface="游ゴシック Medium"/>
+                <a:cs typeface="游ゴシック Medium"/>
+              </a:rPr>
+              <a:t>•  </a:t>
+            </a:r>
+            <a:r>
+              <a:rPr sz="1200" b="0">
+                <a:solidFill>
+                  <a:srgbClr val="262B30"/>
+                </a:solidFill>
+                <a:latin typeface="游ゴシック Medium"/>
+                <a:ea typeface="游ゴシック Medium"/>
+                <a:cs typeface="游ゴシック Medium"/>
+              </a:rPr>
+              <a:t>ターミナル(CLI)やIDEからも使える</a:t>
+            </a:r>
+          </a:p>
+        </p:txBody>
+      </p:sp>
+      <p:sp>
+        <p:nvSpPr>
+          <p:cNvPr id="12" name="TextBox 11"/>
+          <p:cNvSpPr txBox="1"/>
+          <p:nvPr/>
+        </p:nvSpPr>
+        <p:spPr>
+          <a:xfrm>
+            <a:off x="813816" y="4709160"/>
+            <a:ext cx="10561320" cy="914400"/>
+          </a:xfrm>
+          <a:prstGeom prst="rect">
+            <a:avLst/>
+          </a:prstGeom>
+          <a:noFill/>
+        </p:spPr>
+        <p:txBody>
+          <a:bodyPr wrap="square" lIns="0" tIns="0" rIns="0" bIns="0" anchor="t">
+            <a:spAutoFit/>
+          </a:bodyPr>
+          <a:lstStyle/>
+          <a:p>
+            <a:pPr algn="l">
+              <a:spcBef>
+                <a:spcPts val="0"/>
+              </a:spcBef>
+              <a:spcAft>
+                <a:spcPts val="500"/>
+              </a:spcAft>
+            </a:pPr>
+            <a:r>
+              <a:rPr sz="1400" b="1">
+                <a:solidFill>
+                  <a:srgbClr val="8FB9EC"/>
+                </a:solidFill>
+                <a:latin typeface="游ゴシック Medium"/>
+                <a:ea typeface="游ゴシック Medium"/>
+                <a:cs typeface="游ゴシック Medium"/>
+              </a:rPr>
+              <a:t>使い分け：</a:t>
+            </a:r>
+          </a:p>
+          <a:p>
+            <a:pPr algn="l">
+              <a:spcBef>
+                <a:spcPts val="0"/>
+              </a:spcBef>
+              <a:spcAft>
+                <a:spcPts val="500"/>
+              </a:spcAft>
+            </a:pPr>
+            <a:r>
+              <a:rPr sz="1300" b="0">
+                <a:solidFill>
+                  <a:srgbClr val="E8EDF4"/>
+                </a:solidFill>
+                <a:latin typeface="游ゴシック Medium"/>
+                <a:ea typeface="游ゴシック Medium"/>
+                <a:cs typeface="游ゴシック Medium"/>
+              </a:rPr>
+              <a:t>・コーディングは不要で、日常業務のタスク（調査・資料・データ整理）を任せたいとき → Claude Cowork</a:t>
+            </a:r>
+          </a:p>
+          <a:p>
+            <a:pPr algn="l">
+              <a:spcBef>
+                <a:spcPts val="0"/>
+              </a:spcBef>
+              <a:spcAft>
+                <a:spcPts val="500"/>
+              </a:spcAft>
+            </a:pPr>
+            <a:r>
+              <a:rPr sz="1300" b="0">
+                <a:solidFill>
+                  <a:srgbClr val="E8EDF4"/>
+                </a:solidFill>
+                <a:latin typeface="游ゴシック Medium"/>
+                <a:ea typeface="游ゴシック Medium"/>
+                <a:cs typeface="游ゴシック Medium"/>
+              </a:rPr>
+              <a:t>・コードやCLIで作り込み・自動化・リポジトリ操作をしたいとき → Claude Code</a:t>
+            </a:r>
+          </a:p>
+        </p:txBody>
+      </p:sp>
+    </p:spTree>
+  </p:cSld>
+  <p:clrMapOvr>
+    <a:masterClrMapping/>
+  </p:clrMapOvr>
+</p:sld>
+</file>
+
+<file path=ppt/slides/slide11.xml><?xml version="1.0" encoding="utf-8"?>
+<p:sld xmlns:a="http://schemas.openxmlformats.org/drawingml/2006/main" xmlns:r="http://schemas.openxmlformats.org/officeDocument/2006/relationships" xmlns:p="http://schemas.openxmlformats.org/presentationml/2006/main">
+  <p:cSld>
+    <p:spTree>
+      <p:nvGrpSpPr>
+        <p:cNvPr id="1" name=""/>
+        <p:cNvGrpSpPr/>
+        <p:nvPr/>
+      </p:nvGrpSpPr>
+      <p:grpSpPr>
+        <a:xfrm>
+          <a:off x="0" y="0"/>
+          <a:ext cx="0" cy="0"/>
+          <a:chOff x="0" y="0"/>
+          <a:chExt cx="0" cy="0"/>
+        </a:xfrm>
+      </p:grpSpPr>
+      <p:sp>
+        <p:nvSpPr>
+          <p:cNvPr id="2" name="Title 1"/>
+          <p:cNvSpPr>
+            <a:spLocks noGrp="1"/>
+          </p:cNvSpPr>
+          <p:nvPr>
+            <p:ph type="title"/>
+          </p:nvPr>
+        </p:nvSpPr>
+        <p:spPr/>
+        <p:txBody>
+          <a:bodyPr/>
+          <a:lstStyle/>
+          <a:p>
+            <a:r>
+              <a:rPr/>
               <a:t>【参考】Claude Code と同じ土俵の競合ツール</a:t>
             </a:r>
           </a:p>
@@ -10779,61 +11525,6 @@
           </a:p>
         </p:txBody>
       </p:sp>
-      <p:sp>
-        <p:nvSpPr>
-          <p:cNvPr id="16" name="TextBox 15"/>
-          <p:cNvSpPr txBox="1"/>
-          <p:nvPr/>
-        </p:nvSpPr>
-        <p:spPr>
-          <a:xfrm>
-            <a:off x="813816" y="4663440"/>
-            <a:ext cx="10561320" cy="640080"/>
-          </a:xfrm>
-          <a:prstGeom prst="rect">
-            <a:avLst/>
-          </a:prstGeom>
-          <a:noFill/>
-        </p:spPr>
-        <p:txBody>
-          <a:bodyPr wrap="square" lIns="0" tIns="0" rIns="0" bIns="0" anchor="t">
-            <a:spAutoFit/>
-          </a:bodyPr>
-          <a:lstStyle/>
-          <a:p>
-            <a:pPr algn="l">
-              <a:spcBef>
-                <a:spcPts val="0"/>
-              </a:spcBef>
-              <a:spcAft>
-                <a:spcPts val="400"/>
-              </a:spcAft>
-            </a:pPr>
-            <a:r>
-              <a:rPr sz="1400" b="1">
-                <a:solidFill>
-                  <a:srgbClr val="8FB9EC"/>
-                </a:solidFill>
-                <a:latin typeface="游ゴシック Medium"/>
-                <a:ea typeface="游ゴシック Medium"/>
-                <a:cs typeface="游ゴシック Medium"/>
-              </a:rPr>
-              <a:t>選ぶ基準：</a:t>
-            </a:r>
-            <a:r>
-              <a:rPr sz="1400" b="0">
-                <a:solidFill>
-                  <a:srgbClr val="E8EDF4"/>
-                </a:solidFill>
-                <a:latin typeface="游ゴシック Medium"/>
-                <a:ea typeface="游ゴシック Medium"/>
-                <a:cs typeface="游ゴシック Medium"/>
-              </a:rPr>
-              <a:t>モデル品質・既存エコシステム・社内方針で決めます。用途が重なるため、基本はどれか1つを選びます。</a:t>
-            </a:r>
-          </a:p>
-        </p:txBody>
-      </p:sp>
     </p:spTree>
   </p:cSld>
   <p:clrMapOvr>
@@ -10842,7 +11533,7 @@
 </p:sld>
 </file>
 
-<file path=ppt/slides/slide11.xml><?xml version="1.0" encoding="utf-8"?>
+<file path=ppt/slides/slide12.xml><?xml version="1.0" encoding="utf-8"?>
 <p:sld xmlns:a="http://schemas.openxmlformats.org/drawingml/2006/main" xmlns:r="http://schemas.openxmlformats.org/officeDocument/2006/relationships" xmlns:p="http://schemas.openxmlformats.org/presentationml/2006/main">
   <p:cSld>
     <p:spTree>
@@ -10875,13 +11566,14 @@
           <a:lstStyle/>
           <a:p>
             <a:r>
-              <a:rPr>
-                <a:latin typeface="游ゴシック Medium"/>
-                <a:ea typeface="游ゴシック Medium"/>
-                <a:cs typeface="游ゴシック Medium"/>
-              </a:rPr>
-              <a:t>住み分けの一言</a:t>
-            </a:r>
+              <a:rPr lang="ja-JP" altLang="en-US"/>
+              <a:t>まとめ</a:t>
+            </a:r>
+            <a:endParaRPr>
+              <a:latin typeface="游ゴシック Medium"/>
+              <a:ea typeface="游ゴシック Medium"/>
+              <a:cs typeface="游ゴシック Medium"/>
+            </a:endParaRPr>
           </a:p>
         </p:txBody>
       </p:sp>
@@ -11159,7 +11851,7 @@
         <p:spPr>
           <a:xfrm>
             <a:off x="1133856" y="3520440"/>
-            <a:ext cx="10241280" cy="822960"/>
+            <a:ext cx="10241280" cy="515526"/>
           </a:xfrm>
           <a:prstGeom prst="rect">
             <a:avLst/>
@@ -11181,7 +11873,7 @@
               </a:spcAft>
             </a:pPr>
             <a:r>
-              <a:rPr sz="1600" b="1">
+              <a:rPr sz="1600" b="1" dirty="0" err="1">
                 <a:solidFill>
                   <a:srgbClr val="FFFFFF"/>
                 </a:solidFill>
@@ -11191,6 +11883,14 @@
               </a:rPr>
               <a:t>コードを書く・自動化するなど開発そのものを任せたいとき</a:t>
             </a:r>
+            <a:endParaRPr sz="1600" b="1" dirty="0">
+              <a:solidFill>
+                <a:srgbClr val="FFFFFF"/>
+              </a:solidFill>
+              <a:latin typeface="游ゴシック Medium"/>
+              <a:ea typeface="游ゴシック Medium"/>
+              <a:cs typeface="游ゴシック Medium"/>
+            </a:endParaRPr>
           </a:p>
           <a:p>
             <a:pPr algn="l">
@@ -11202,7 +11902,7 @@
               </a:spcAft>
             </a:pPr>
             <a:r>
-              <a:rPr sz="1500" b="0">
+              <a:rPr sz="1500" b="0" dirty="0">
                 <a:solidFill>
                   <a:srgbClr val="8FB9EC"/>
                 </a:solidFill>
@@ -11210,810 +11910,7 @@
                 <a:ea typeface="游ゴシック Medium"/>
                 <a:cs typeface="游ゴシック Medium"/>
               </a:rPr>
-              <a:t>→ Claude Code / OpenAI Codex / Gemini CLI</a:t>
-            </a:r>
-          </a:p>
-        </p:txBody>
-      </p:sp>
-      <p:sp>
-        <p:nvSpPr>
-          <p:cNvPr id="9" name="TextBox 8"/>
-          <p:cNvSpPr txBox="1"/>
-          <p:nvPr/>
-        </p:nvSpPr>
-        <p:spPr>
-          <a:xfrm>
-            <a:off x="813816" y="4846320"/>
-            <a:ext cx="10561320" cy="731520"/>
-          </a:xfrm>
-          <a:prstGeom prst="rect">
-            <a:avLst/>
-          </a:prstGeom>
-          <a:noFill/>
-        </p:spPr>
-        <p:txBody>
-          <a:bodyPr wrap="square" lIns="0" tIns="0" rIns="0" bIns="0" anchor="t">
-            <a:spAutoFit/>
-          </a:bodyPr>
-          <a:lstStyle/>
-          <a:p>
-            <a:pPr algn="l">
-              <a:spcBef>
-                <a:spcPts val="0"/>
-              </a:spcBef>
-              <a:spcAft>
-                <a:spcPts val="400"/>
-              </a:spcAft>
-            </a:pPr>
-            <a:r>
-              <a:rPr sz="1300" b="1">
-                <a:solidFill>
-                  <a:srgbClr val="8FB9EC"/>
-                </a:solidFill>
-                <a:latin typeface="游ゴシック Medium"/>
-                <a:ea typeface="游ゴシック Medium"/>
-                <a:cs typeface="游ゴシック Medium"/>
-              </a:rPr>
-              <a:t>注意：</a:t>
-            </a:r>
-            <a:r>
-              <a:rPr sz="1300" b="0">
-                <a:solidFill>
-                  <a:srgbClr val="E8EDF4"/>
-                </a:solidFill>
-                <a:latin typeface="游ゴシック Medium"/>
-                <a:ea typeface="游ゴシック Medium"/>
-                <a:cs typeface="游ゴシック Medium"/>
-              </a:rPr>
-              <a:t>「Cowork」は両社が使う名称です。CopilotもClaudeを利用でき、モデルの違いより「どこに根ざすか」で選びます。</a:t>
-            </a:r>
-          </a:p>
-        </p:txBody>
-      </p:sp>
-    </p:spTree>
-  </p:cSld>
-  <p:clrMapOvr>
-    <a:masterClrMapping/>
-  </p:clrMapOvr>
-</p:sld>
-</file>
-
-<file path=ppt/slides/slide12.xml><?xml version="1.0" encoding="utf-8"?>
-<p:sld xmlns:a="http://schemas.openxmlformats.org/drawingml/2006/main" xmlns:p="http://schemas.openxmlformats.org/presentationml/2006/main" xmlns:r="http://schemas.openxmlformats.org/officeDocument/2006/relationships">
-  <p:cSld>
-    <p:spTree>
-      <p:nvGrpSpPr>
-        <p:cNvPr id="1" name=""/>
-        <p:cNvGrpSpPr/>
-        <p:nvPr/>
-      </p:nvGrpSpPr>
-      <p:grpSpPr/>
-      <p:sp>
-        <p:nvSpPr>
-          <p:cNvPr id="2" name="Title 1"/>
-          <p:cNvSpPr>
-            <a:spLocks noGrp="1"/>
-          </p:cNvSpPr>
-          <p:nvPr>
-            <p:ph type="title"/>
-          </p:nvPr>
-        </p:nvSpPr>
-        <p:spPr/>
-        <p:txBody>
-          <a:bodyPr/>
-          <a:lstStyle/>
-          <a:p>
-            <a:r>
-              <a:rPr>
-                <a:latin typeface="游ゴシック Medium"/>
-                <a:ea typeface="游ゴシック Medium"/>
-                <a:cs typeface="游ゴシック Medium"/>
-              </a:rPr>
-              <a:t>Claude Code でできること</a:t>
-            </a:r>
-          </a:p>
-        </p:txBody>
-      </p:sp>
-      <p:sp>
-        <p:nvSpPr>
-          <p:cNvPr id="3" name="TextBox 2"/>
-          <p:cNvSpPr txBox="1"/>
-          <p:nvPr/>
-        </p:nvSpPr>
-        <p:spPr>
-          <a:xfrm>
-            <a:off x="813816" y="1024128"/>
-            <a:ext cx="10561320" cy="457200"/>
-          </a:xfrm>
-          <a:prstGeom prst="rect">
-            <a:avLst/>
-          </a:prstGeom>
-          <a:noFill/>
-        </p:spPr>
-        <p:txBody>
-          <a:bodyPr wrap="square" anchor="t" lIns="0" rIns="0" tIns="0" bIns="0">
-            <a:spAutoFit/>
-          </a:bodyPr>
-          <a:lstStyle/>
-          <a:p>
-            <a:pPr algn="l">
-              <a:spcBef>
-                <a:spcPts val="0"/>
-              </a:spcBef>
-              <a:spcAft>
-                <a:spcPts val="400"/>
-              </a:spcAft>
-            </a:pPr>
-            <a:r>
-              <a:rPr sz="1300" b="0">
-                <a:solidFill>
-                  <a:srgbClr val="B9C6DA"/>
-                </a:solidFill>
-                <a:latin typeface="游ゴシック Medium"/>
-                <a:ea typeface="游ゴシック Medium"/>
-                <a:cs typeface="游ゴシック Medium"/>
-              </a:rPr>
-              <a:t>エンジニアが、ターミナルやIDEから開発そのものを任せられる自律エージェントです。</a:t>
-            </a:r>
-          </a:p>
-        </p:txBody>
-      </p:sp>
-      <p:sp>
-        <p:nvSpPr>
-          <p:cNvPr id="4" name="Rectangle 3"/>
-          <p:cNvSpPr/>
-          <p:nvPr/>
-        </p:nvSpPr>
-        <p:spPr>
-          <a:xfrm>
-            <a:off x="813816" y="1527048"/>
-            <a:ext cx="137160" cy="137160"/>
-          </a:xfrm>
-          <a:prstGeom prst="rect">
-            <a:avLst/>
-          </a:prstGeom>
-          <a:solidFill>
-            <a:srgbClr val="8FB9EC"/>
-          </a:solidFill>
-          <a:ln>
-            <a:noFill/>
-          </a:ln>
-          <a:effectLst/>
-        </p:spPr>
-        <p:style>
-          <a:lnRef idx="1">
-            <a:schemeClr val="accent1"/>
-          </a:lnRef>
-          <a:fillRef idx="3">
-            <a:schemeClr val="accent1"/>
-          </a:fillRef>
-          <a:effectRef idx="2">
-            <a:schemeClr val="accent1"/>
-          </a:effectRef>
-          <a:fontRef idx="minor">
-            <a:schemeClr val="lt1"/>
-          </a:fontRef>
-        </p:style>
-        <p:txBody>
-          <a:bodyPr rtlCol="0" anchor="ctr"/>
-          <a:lstStyle/>
-          <a:p>
-            <a:pPr algn="ctr"/>
-          </a:p>
-        </p:txBody>
-      </p:sp>
-      <p:sp>
-        <p:nvSpPr>
-          <p:cNvPr id="5" name="TextBox 4"/>
-          <p:cNvSpPr txBox="1"/>
-          <p:nvPr/>
-        </p:nvSpPr>
-        <p:spPr>
-          <a:xfrm>
-            <a:off x="1133856" y="1444752"/>
-            <a:ext cx="10241280" cy="365760"/>
-          </a:xfrm>
-          <a:prstGeom prst="rect">
-            <a:avLst/>
-          </a:prstGeom>
-          <a:noFill/>
-        </p:spPr>
-        <p:txBody>
-          <a:bodyPr wrap="square" anchor="t" lIns="0" rIns="0" tIns="0" bIns="0">
-            <a:spAutoFit/>
-          </a:bodyPr>
-          <a:lstStyle/>
-          <a:p>
-            <a:pPr algn="l">
-              <a:spcBef>
-                <a:spcPts val="0"/>
-              </a:spcBef>
-              <a:spcAft>
-                <a:spcPts val="400"/>
-              </a:spcAft>
-            </a:pPr>
-            <a:r>
-              <a:rPr sz="1600" b="1">
-                <a:solidFill>
-                  <a:srgbClr val="FFFFFF"/>
-                </a:solidFill>
-                <a:latin typeface="游ゴシック Medium"/>
-                <a:ea typeface="游ゴシック Medium"/>
-                <a:cs typeface="游ゴシック Medium"/>
-              </a:rPr>
-              <a:t>開発環境の中で動く</a:t>
-            </a:r>
-          </a:p>
-        </p:txBody>
-      </p:sp>
-      <p:sp>
-        <p:nvSpPr>
-          <p:cNvPr id="6" name="TextBox 5"/>
-          <p:cNvSpPr txBox="1"/>
-          <p:nvPr/>
-        </p:nvSpPr>
-        <p:spPr>
-          <a:xfrm>
-            <a:off x="1133856" y="1819656"/>
-            <a:ext cx="10241280" cy="411480"/>
-          </a:xfrm>
-          <a:prstGeom prst="rect">
-            <a:avLst/>
-          </a:prstGeom>
-          <a:noFill/>
-        </p:spPr>
-        <p:txBody>
-          <a:bodyPr wrap="square" anchor="t" lIns="0" rIns="0" tIns="0" bIns="0">
-            <a:spAutoFit/>
-          </a:bodyPr>
-          <a:lstStyle/>
-          <a:p>
-            <a:pPr algn="l">
-              <a:spcBef>
-                <a:spcPts val="0"/>
-              </a:spcBef>
-              <a:spcAft>
-                <a:spcPts val="400"/>
-              </a:spcAft>
-            </a:pPr>
-            <a:r>
-              <a:rPr sz="1300" b="0">
-                <a:solidFill>
-                  <a:srgbClr val="E8EDF4"/>
-                </a:solidFill>
-                <a:latin typeface="游ゴシック Medium"/>
-                <a:ea typeface="游ゴシック Medium"/>
-                <a:cs typeface="游ゴシック Medium"/>
-              </a:rPr>
-              <a:t>ターミナル(CLI)・デスクトップアプリ・IDEから、実際のプロジェクトの中で作業。</a:t>
-            </a:r>
-          </a:p>
-        </p:txBody>
-      </p:sp>
-      <p:sp>
-        <p:nvSpPr>
-          <p:cNvPr id="7" name="Rectangle 6"/>
-          <p:cNvSpPr/>
-          <p:nvPr/>
-        </p:nvSpPr>
-        <p:spPr>
-          <a:xfrm>
-            <a:off x="813816" y="2309774"/>
-            <a:ext cx="137160" cy="137160"/>
-          </a:xfrm>
-          <a:prstGeom prst="rect">
-            <a:avLst/>
-          </a:prstGeom>
-          <a:solidFill>
-            <a:srgbClr val="8FB9EC"/>
-          </a:solidFill>
-          <a:ln>
-            <a:noFill/>
-          </a:ln>
-          <a:effectLst/>
-        </p:spPr>
-        <p:style>
-          <a:lnRef idx="1">
-            <a:schemeClr val="accent1"/>
-          </a:lnRef>
-          <a:fillRef idx="3">
-            <a:schemeClr val="accent1"/>
-          </a:fillRef>
-          <a:effectRef idx="2">
-            <a:schemeClr val="accent1"/>
-          </a:effectRef>
-          <a:fontRef idx="minor">
-            <a:schemeClr val="lt1"/>
-          </a:fontRef>
-        </p:style>
-        <p:txBody>
-          <a:bodyPr rtlCol="0" anchor="ctr"/>
-          <a:lstStyle/>
-          <a:p>
-            <a:pPr algn="ctr"/>
-          </a:p>
-        </p:txBody>
-      </p:sp>
-      <p:sp>
-        <p:nvSpPr>
-          <p:cNvPr id="8" name="TextBox 7"/>
-          <p:cNvSpPr txBox="1"/>
-          <p:nvPr/>
-        </p:nvSpPr>
-        <p:spPr>
-          <a:xfrm>
-            <a:off x="1133856" y="2227478"/>
-            <a:ext cx="10241280" cy="365760"/>
-          </a:xfrm>
-          <a:prstGeom prst="rect">
-            <a:avLst/>
-          </a:prstGeom>
-          <a:noFill/>
-        </p:spPr>
-        <p:txBody>
-          <a:bodyPr wrap="square" anchor="t" lIns="0" rIns="0" tIns="0" bIns="0">
-            <a:spAutoFit/>
-          </a:bodyPr>
-          <a:lstStyle/>
-          <a:p>
-            <a:pPr algn="l">
-              <a:spcBef>
-                <a:spcPts val="0"/>
-              </a:spcBef>
-              <a:spcAft>
-                <a:spcPts val="400"/>
-              </a:spcAft>
-            </a:pPr>
-            <a:r>
-              <a:rPr sz="1600" b="1">
-                <a:solidFill>
-                  <a:srgbClr val="FFFFFF"/>
-                </a:solidFill>
-                <a:latin typeface="游ゴシック Medium"/>
-                <a:ea typeface="游ゴシック Medium"/>
-                <a:cs typeface="游ゴシック Medium"/>
-              </a:rPr>
-              <a:t>コードを書く・動かす・直す</a:t>
-            </a:r>
-          </a:p>
-        </p:txBody>
-      </p:sp>
-      <p:sp>
-        <p:nvSpPr>
-          <p:cNvPr id="9" name="TextBox 8"/>
-          <p:cNvSpPr txBox="1"/>
-          <p:nvPr/>
-        </p:nvSpPr>
-        <p:spPr>
-          <a:xfrm>
-            <a:off x="1133856" y="2602382"/>
-            <a:ext cx="10241280" cy="411480"/>
-          </a:xfrm>
-          <a:prstGeom prst="rect">
-            <a:avLst/>
-          </a:prstGeom>
-          <a:noFill/>
-        </p:spPr>
-        <p:txBody>
-          <a:bodyPr wrap="square" anchor="t" lIns="0" rIns="0" tIns="0" bIns="0">
-            <a:spAutoFit/>
-          </a:bodyPr>
-          <a:lstStyle/>
-          <a:p>
-            <a:pPr algn="l">
-              <a:spcBef>
-                <a:spcPts val="0"/>
-              </a:spcBef>
-              <a:spcAft>
-                <a:spcPts val="400"/>
-              </a:spcAft>
-            </a:pPr>
-            <a:r>
-              <a:rPr sz="1300" b="0">
-                <a:solidFill>
-                  <a:srgbClr val="E8EDF4"/>
-                </a:solidFill>
-                <a:latin typeface="游ゴシック Medium"/>
-                <a:ea typeface="游ゴシック Medium"/>
-                <a:cs typeface="游ゴシック Medium"/>
-              </a:rPr>
-              <a:t>コードを実行してテストし、エラーを自分で直す反復に強い。</a:t>
-            </a:r>
-          </a:p>
-        </p:txBody>
-      </p:sp>
-      <p:sp>
-        <p:nvSpPr>
-          <p:cNvPr id="10" name="Rectangle 9"/>
-          <p:cNvSpPr/>
-          <p:nvPr/>
-        </p:nvSpPr>
-        <p:spPr>
-          <a:xfrm>
-            <a:off x="813816" y="3092500"/>
-            <a:ext cx="137160" cy="137160"/>
-          </a:xfrm>
-          <a:prstGeom prst="rect">
-            <a:avLst/>
-          </a:prstGeom>
-          <a:solidFill>
-            <a:srgbClr val="8FB9EC"/>
-          </a:solidFill>
-          <a:ln>
-            <a:noFill/>
-          </a:ln>
-          <a:effectLst/>
-        </p:spPr>
-        <p:style>
-          <a:lnRef idx="1">
-            <a:schemeClr val="accent1"/>
-          </a:lnRef>
-          <a:fillRef idx="3">
-            <a:schemeClr val="accent1"/>
-          </a:fillRef>
-          <a:effectRef idx="2">
-            <a:schemeClr val="accent1"/>
-          </a:effectRef>
-          <a:fontRef idx="minor">
-            <a:schemeClr val="lt1"/>
-          </a:fontRef>
-        </p:style>
-        <p:txBody>
-          <a:bodyPr rtlCol="0" anchor="ctr"/>
-          <a:lstStyle/>
-          <a:p>
-            <a:pPr algn="ctr"/>
-          </a:p>
-        </p:txBody>
-      </p:sp>
-      <p:sp>
-        <p:nvSpPr>
-          <p:cNvPr id="11" name="TextBox 10"/>
-          <p:cNvSpPr txBox="1"/>
-          <p:nvPr/>
-        </p:nvSpPr>
-        <p:spPr>
-          <a:xfrm>
-            <a:off x="1133856" y="3010204"/>
-            <a:ext cx="10241280" cy="365760"/>
-          </a:xfrm>
-          <a:prstGeom prst="rect">
-            <a:avLst/>
-          </a:prstGeom>
-          <a:noFill/>
-        </p:spPr>
-        <p:txBody>
-          <a:bodyPr wrap="square" anchor="t" lIns="0" rIns="0" tIns="0" bIns="0">
-            <a:spAutoFit/>
-          </a:bodyPr>
-          <a:lstStyle/>
-          <a:p>
-            <a:pPr algn="l">
-              <a:spcBef>
-                <a:spcPts val="0"/>
-              </a:spcBef>
-              <a:spcAft>
-                <a:spcPts val="400"/>
-              </a:spcAft>
-            </a:pPr>
-            <a:r>
-              <a:rPr sz="1600" b="1">
-                <a:solidFill>
-                  <a:srgbClr val="FFFFFF"/>
-                </a:solidFill>
-                <a:latin typeface="游ゴシック Medium"/>
-                <a:ea typeface="游ゴシック Medium"/>
-                <a:cs typeface="游ゴシック Medium"/>
-              </a:rPr>
-              <a:t>開発ワークフローに対応</a:t>
-            </a:r>
-          </a:p>
-        </p:txBody>
-      </p:sp>
-      <p:sp>
-        <p:nvSpPr>
-          <p:cNvPr id="12" name="TextBox 11"/>
-          <p:cNvSpPr txBox="1"/>
-          <p:nvPr/>
-        </p:nvSpPr>
-        <p:spPr>
-          <a:xfrm>
-            <a:off x="1133856" y="3385108"/>
-            <a:ext cx="10241280" cy="411480"/>
-          </a:xfrm>
-          <a:prstGeom prst="rect">
-            <a:avLst/>
-          </a:prstGeom>
-          <a:noFill/>
-        </p:spPr>
-        <p:txBody>
-          <a:bodyPr wrap="square" anchor="t" lIns="0" rIns="0" tIns="0" bIns="0">
-            <a:spAutoFit/>
-          </a:bodyPr>
-          <a:lstStyle/>
-          <a:p>
-            <a:pPr algn="l">
-              <a:spcBef>
-                <a:spcPts val="0"/>
-              </a:spcBef>
-              <a:spcAft>
-                <a:spcPts val="400"/>
-              </a:spcAft>
-            </a:pPr>
-            <a:r>
-              <a:rPr sz="1300" b="0">
-                <a:solidFill>
-                  <a:srgbClr val="E8EDF4"/>
-                </a:solidFill>
-                <a:latin typeface="游ゴシック Medium"/>
-                <a:ea typeface="游ゴシック Medium"/>
-                <a:cs typeface="游ゴシック Medium"/>
-              </a:rPr>
-              <a:t>ファイル編集・git・ビルド・CI など、開発の一連の流れを自動化。</a:t>
-            </a:r>
-          </a:p>
-        </p:txBody>
-      </p:sp>
-      <p:sp>
-        <p:nvSpPr>
-          <p:cNvPr id="13" name="Rectangle 12"/>
-          <p:cNvSpPr/>
-          <p:nvPr/>
-        </p:nvSpPr>
-        <p:spPr>
-          <a:xfrm>
-            <a:off x="813816" y="3875227"/>
-            <a:ext cx="137160" cy="137160"/>
-          </a:xfrm>
-          <a:prstGeom prst="rect">
-            <a:avLst/>
-          </a:prstGeom>
-          <a:solidFill>
-            <a:srgbClr val="8FB9EC"/>
-          </a:solidFill>
-          <a:ln>
-            <a:noFill/>
-          </a:ln>
-          <a:effectLst/>
-        </p:spPr>
-        <p:style>
-          <a:lnRef idx="1">
-            <a:schemeClr val="accent1"/>
-          </a:lnRef>
-          <a:fillRef idx="3">
-            <a:schemeClr val="accent1"/>
-          </a:fillRef>
-          <a:effectRef idx="2">
-            <a:schemeClr val="accent1"/>
-          </a:effectRef>
-          <a:fontRef idx="minor">
-            <a:schemeClr val="lt1"/>
-          </a:fontRef>
-        </p:style>
-        <p:txBody>
-          <a:bodyPr rtlCol="0" anchor="ctr"/>
-          <a:lstStyle/>
-          <a:p>
-            <a:pPr algn="ctr"/>
-          </a:p>
-        </p:txBody>
-      </p:sp>
-      <p:sp>
-        <p:nvSpPr>
-          <p:cNvPr id="14" name="TextBox 13"/>
-          <p:cNvSpPr txBox="1"/>
-          <p:nvPr/>
-        </p:nvSpPr>
-        <p:spPr>
-          <a:xfrm>
-            <a:off x="1133856" y="3792931"/>
-            <a:ext cx="10241280" cy="365760"/>
-          </a:xfrm>
-          <a:prstGeom prst="rect">
-            <a:avLst/>
-          </a:prstGeom>
-          <a:noFill/>
-        </p:spPr>
-        <p:txBody>
-          <a:bodyPr wrap="square" anchor="t" lIns="0" rIns="0" tIns="0" bIns="0">
-            <a:spAutoFit/>
-          </a:bodyPr>
-          <a:lstStyle/>
-          <a:p>
-            <a:pPr algn="l">
-              <a:spcBef>
-                <a:spcPts val="0"/>
-              </a:spcBef>
-              <a:spcAft>
-                <a:spcPts val="400"/>
-              </a:spcAft>
-            </a:pPr>
-            <a:r>
-              <a:rPr sz="1600" b="1">
-                <a:solidFill>
-                  <a:srgbClr val="FFFFFF"/>
-                </a:solidFill>
-                <a:latin typeface="游ゴシック Medium"/>
-                <a:ea typeface="游ゴシック Medium"/>
-                <a:cs typeface="游ゴシック Medium"/>
-              </a:rPr>
-              <a:t>スキルやCLAUDE.mdで拡張</a:t>
-            </a:r>
-          </a:p>
-        </p:txBody>
-      </p:sp>
-      <p:sp>
-        <p:nvSpPr>
-          <p:cNvPr id="15" name="TextBox 14"/>
-          <p:cNvSpPr txBox="1"/>
-          <p:nvPr/>
-        </p:nvSpPr>
-        <p:spPr>
-          <a:xfrm>
-            <a:off x="1133856" y="4167835"/>
-            <a:ext cx="10241280" cy="411480"/>
-          </a:xfrm>
-          <a:prstGeom prst="rect">
-            <a:avLst/>
-          </a:prstGeom>
-          <a:noFill/>
-        </p:spPr>
-        <p:txBody>
-          <a:bodyPr wrap="square" anchor="t" lIns="0" rIns="0" tIns="0" bIns="0">
-            <a:spAutoFit/>
-          </a:bodyPr>
-          <a:lstStyle/>
-          <a:p>
-            <a:pPr algn="l">
-              <a:spcBef>
-                <a:spcPts val="0"/>
-              </a:spcBef>
-              <a:spcAft>
-                <a:spcPts val="400"/>
-              </a:spcAft>
-            </a:pPr>
-            <a:r>
-              <a:rPr sz="1300" b="0">
-                <a:solidFill>
-                  <a:srgbClr val="E8EDF4"/>
-                </a:solidFill>
-                <a:latin typeface="游ゴシック Medium"/>
-                <a:ea typeface="游ゴシック Medium"/>
-                <a:cs typeface="游ゴシック Medium"/>
-              </a:rPr>
-              <a:t>よく使う手順をスキル化し、プロジェクトの決まり事を教えられる。</a:t>
-            </a:r>
-          </a:p>
-        </p:txBody>
-      </p:sp>
-      <p:sp>
-        <p:nvSpPr>
-          <p:cNvPr id="16" name="Rectangle 15"/>
-          <p:cNvSpPr/>
-          <p:nvPr/>
-        </p:nvSpPr>
-        <p:spPr>
-          <a:xfrm>
-            <a:off x="813816" y="4657953"/>
-            <a:ext cx="137160" cy="137160"/>
-          </a:xfrm>
-          <a:prstGeom prst="rect">
-            <a:avLst/>
-          </a:prstGeom>
-          <a:solidFill>
-            <a:srgbClr val="8FB9EC"/>
-          </a:solidFill>
-          <a:ln>
-            <a:noFill/>
-          </a:ln>
-          <a:effectLst/>
-        </p:spPr>
-        <p:style>
-          <a:lnRef idx="1">
-            <a:schemeClr val="accent1"/>
-          </a:lnRef>
-          <a:fillRef idx="3">
-            <a:schemeClr val="accent1"/>
-          </a:fillRef>
-          <a:effectRef idx="2">
-            <a:schemeClr val="accent1"/>
-          </a:effectRef>
-          <a:fontRef idx="minor">
-            <a:schemeClr val="lt1"/>
-          </a:fontRef>
-        </p:style>
-        <p:txBody>
-          <a:bodyPr rtlCol="0" anchor="ctr"/>
-          <a:lstStyle/>
-          <a:p>
-            <a:pPr algn="ctr"/>
-          </a:p>
-        </p:txBody>
-      </p:sp>
-      <p:sp>
-        <p:nvSpPr>
-          <p:cNvPr id="17" name="TextBox 16"/>
-          <p:cNvSpPr txBox="1"/>
-          <p:nvPr/>
-        </p:nvSpPr>
-        <p:spPr>
-          <a:xfrm>
-            <a:off x="1133856" y="4575657"/>
-            <a:ext cx="10241280" cy="365760"/>
-          </a:xfrm>
-          <a:prstGeom prst="rect">
-            <a:avLst/>
-          </a:prstGeom>
-          <a:noFill/>
-        </p:spPr>
-        <p:txBody>
-          <a:bodyPr wrap="square" anchor="t" lIns="0" rIns="0" tIns="0" bIns="0">
-            <a:spAutoFit/>
-          </a:bodyPr>
-          <a:lstStyle/>
-          <a:p>
-            <a:pPr algn="l">
-              <a:spcBef>
-                <a:spcPts val="0"/>
-              </a:spcBef>
-              <a:spcAft>
-                <a:spcPts val="400"/>
-              </a:spcAft>
-            </a:pPr>
-            <a:r>
-              <a:rPr sz="1600" b="1">
-                <a:solidFill>
-                  <a:srgbClr val="FFFFFF"/>
-                </a:solidFill>
-                <a:latin typeface="游ゴシック Medium"/>
-                <a:ea typeface="游ゴシック Medium"/>
-                <a:cs typeface="游ゴシック Medium"/>
-              </a:rPr>
-              <a:t>外部ツール連携・データ処理</a:t>
-            </a:r>
-          </a:p>
-        </p:txBody>
-      </p:sp>
-      <p:sp>
-        <p:nvSpPr>
-          <p:cNvPr id="18" name="TextBox 17"/>
-          <p:cNvSpPr txBox="1"/>
-          <p:nvPr/>
-        </p:nvSpPr>
-        <p:spPr>
-          <a:xfrm>
-            <a:off x="1133856" y="4950561"/>
-            <a:ext cx="10241280" cy="411480"/>
-          </a:xfrm>
-          <a:prstGeom prst="rect">
-            <a:avLst/>
-          </a:prstGeom>
-          <a:noFill/>
-        </p:spPr>
-        <p:txBody>
-          <a:bodyPr wrap="square" anchor="t" lIns="0" rIns="0" tIns="0" bIns="0">
-            <a:spAutoFit/>
-          </a:bodyPr>
-          <a:lstStyle/>
-          <a:p>
-            <a:pPr algn="l">
-              <a:spcBef>
-                <a:spcPts val="0"/>
-              </a:spcBef>
-              <a:spcAft>
-                <a:spcPts val="400"/>
-              </a:spcAft>
-            </a:pPr>
-            <a:r>
-              <a:rPr sz="1300" b="0">
-                <a:solidFill>
-                  <a:srgbClr val="E8EDF4"/>
-                </a:solidFill>
-                <a:latin typeface="游ゴシック Medium"/>
-                <a:ea typeface="游ゴシック Medium"/>
-                <a:cs typeface="游ゴシック Medium"/>
-              </a:rPr>
-              <a:t>MCPで外部ツールと連携、コマンド実行やデータ処理も任せられる。</a:t>
+              <a:t>→ Claude Code</a:t>
             </a:r>
           </a:p>
         </p:txBody>
@@ -12234,11 +12131,7 @@
           <a:lstStyle/>
           <a:p>
             <a:r>
-              <a:rPr>
-                <a:latin typeface="游ゴシック Medium"/>
-                <a:ea typeface="游ゴシック Medium"/>
-                <a:cs typeface="游ゴシック Medium"/>
-              </a:rPr>
+              <a:rPr/>
               <a:t>Microsoft 365 Copilot でできること</a:t>
             </a:r>
           </a:p>
@@ -13147,11 +13040,7 @@
           <a:lstStyle/>
           <a:p>
             <a:r>
-              <a:rPr>
-                <a:latin typeface="游ゴシック Medium"/>
-                <a:ea typeface="游ゴシック Medium"/>
-                <a:cs typeface="游ゴシック Medium"/>
-              </a:rPr>
+              <a:rPr/>
               <a:t>Claude Cowork でできること</a:t>
             </a:r>
           </a:p>
@@ -13907,11 +13796,7 @@
           <a:lstStyle/>
           <a:p>
             <a:r>
-              <a:rPr>
-                <a:latin typeface="游ゴシック Medium"/>
-                <a:ea typeface="游ゴシック Medium"/>
-                <a:cs typeface="游ゴシック Medium"/>
-              </a:rPr>
+              <a:rPr/>
               <a:t>Microsoft 365 Copilot と Claude Cowork の住み分け</a:t>
             </a:r>
           </a:p>
@@ -13926,7 +13811,7 @@
         <p:spPr>
           <a:xfrm>
             <a:off x="813816" y="1024128"/>
-            <a:ext cx="10561320" cy="457200"/>
+            <a:ext cx="10561320" cy="200055"/>
           </a:xfrm>
           <a:prstGeom prst="rect">
             <a:avLst/>
@@ -13948,7 +13833,7 @@
               </a:spcAft>
             </a:pPr>
             <a:r>
-              <a:rPr sz="1300" b="0" dirty="0" err="1">
+              <a:rPr lang="ja-JP" altLang="en-US" sz="1300" b="0">
                 <a:solidFill>
                   <a:srgbClr val="B9C6DA"/>
                 </a:solidFill>
@@ -13956,19 +13841,16 @@
                 <a:ea typeface="游ゴシック Medium"/>
                 <a:cs typeface="游ゴシック Medium"/>
               </a:rPr>
-              <a:t>似た作業はどちらもできます。差が出るのは、仕事の“難所”がどちらの強みに当たるかです</a:t>
-            </a:r>
-            <a:r>
-              <a:rPr sz="1300" b="0" dirty="0">
-                <a:solidFill>
-                  <a:srgbClr val="B9C6DA"/>
-                </a:solidFill>
-                <a:latin typeface="游ゴシック Medium"/>
-                <a:ea typeface="游ゴシック Medium"/>
-                <a:cs typeface="游ゴシック Medium"/>
-              </a:rPr>
-              <a:t>。</a:t>
-            </a:r>
+              <a:t>特徴の比較表</a:t>
+            </a:r>
+            <a:endParaRPr sz="1300" b="0" dirty="0">
+              <a:solidFill>
+                <a:srgbClr val="B9C6DA"/>
+              </a:solidFill>
+              <a:latin typeface="游ゴシック Medium"/>
+              <a:ea typeface="游ゴシック Medium"/>
+              <a:cs typeface="游ゴシック Medium"/>
+            </a:endParaRPr>
           </a:p>
         </p:txBody>
       </p:sp>
@@ -13978,7 +13860,13 @@
           <p:cNvGraphicFramePr>
             <a:graphicFrameLocks noGrp="1"/>
           </p:cNvGraphicFramePr>
-          <p:nvPr/>
+          <p:nvPr>
+            <p:extLst>
+              <p:ext uri="{D42A27DB-BD31-4B8C-83A1-F6EECF244321}">
+                <p14:modId xmlns:p14="http://schemas.microsoft.com/office/powerpoint/2010/main" val="3561914533"/>
+              </p:ext>
+            </p:extLst>
+          </p:nvPr>
         </p:nvGraphicFramePr>
         <p:xfrm>
           <a:off x="813816" y="1481328"/>
@@ -14044,7 +13932,7 @@
                     <a:lstStyle/>
                     <a:p>
                       <a:r>
-                        <a:rPr sz="1200" b="1">
+                        <a:rPr sz="1200" b="1" dirty="0">
                           <a:solidFill>
                             <a:srgbClr val="FFFFFF"/>
                           </a:solidFill>
@@ -14052,7 +13940,7 @@
                           <a:ea typeface="游ゴシック Medium"/>
                           <a:cs typeface="游ゴシック Medium"/>
                         </a:rPr>
-                        <a:t>Microsoft 365 Copilot（自社Cowork/Code含む）</a:t>
+                        <a:t>Microsoft 365 Copilot</a:t>
                       </a:r>
                     </a:p>
                   </a:txBody>
@@ -14281,7 +14169,7 @@
                     <a:lstStyle/>
                     <a:p>
                       <a:r>
-                        <a:rPr sz="1150" b="0">
+                        <a:rPr sz="1150" b="0" dirty="0" err="1">
                           <a:solidFill>
                             <a:srgbClr val="262B30"/>
                           </a:solidFill>
@@ -14289,7 +14177,72 @@
                           <a:ea typeface="游ゴシック Medium"/>
                           <a:cs typeface="游ゴシック Medium"/>
                         </a:rPr>
-                        <a:t>自社テナント(Graph / Work IQ)を自動参照（ローカルは個別アップロードのみ）</a:t>
+                        <a:t>自社テナント</a:t>
+                      </a:r>
+                      <a:r>
+                        <a:rPr sz="1150" b="0" dirty="0">
+                          <a:solidFill>
+                            <a:srgbClr val="262B30"/>
+                          </a:solidFill>
+                          <a:latin typeface="游ゴシック Medium"/>
+                          <a:ea typeface="游ゴシック Medium"/>
+                          <a:cs typeface="游ゴシック Medium"/>
+                        </a:rPr>
+                        <a:t>(Graph / Work IQ)</a:t>
+                      </a:r>
+                      <a:r>
+                        <a:rPr sz="1150" b="0" dirty="0" err="1">
+                          <a:solidFill>
+                            <a:srgbClr val="262B30"/>
+                          </a:solidFill>
+                          <a:latin typeface="游ゴシック Medium"/>
+                          <a:ea typeface="游ゴシック Medium"/>
+                          <a:cs typeface="游ゴシック Medium"/>
+                        </a:rPr>
+                        <a:t>を自動参照</a:t>
+                      </a:r>
+                      <a:endParaRPr lang="en-US" sz="1150" b="0" dirty="0">
+                        <a:solidFill>
+                          <a:srgbClr val="262B30"/>
+                        </a:solidFill>
+                        <a:latin typeface="游ゴシック Medium"/>
+                        <a:ea typeface="游ゴシック Medium"/>
+                        <a:cs typeface="游ゴシック Medium"/>
+                      </a:endParaRPr>
+                    </a:p>
+                    <a:p>
+                      <a:r>
+                        <a:rPr sz="1150" b="0" dirty="0">
+                          <a:solidFill>
+                            <a:srgbClr val="262B30"/>
+                          </a:solidFill>
+                          <a:latin typeface="游ゴシック Medium"/>
+                          <a:ea typeface="游ゴシック Medium"/>
+                          <a:cs typeface="游ゴシック Medium"/>
+                        </a:rPr>
+                        <a:t>（</a:t>
+                      </a:r>
+                      <a:r>
+                        <a:rPr sz="1150" b="0" dirty="0" err="1">
+                          <a:solidFill>
+                            <a:srgbClr val="262B30"/>
+                          </a:solidFill>
+                          <a:latin typeface="游ゴシック Medium"/>
+                          <a:ea typeface="游ゴシック Medium"/>
+                          <a:cs typeface="游ゴシック Medium"/>
+                        </a:rPr>
+                        <a:t>ローカルは個別アップロードのみ</a:t>
+                      </a:r>
+                      <a:r>
+                        <a:rPr sz="1150" b="0" dirty="0">
+                          <a:solidFill>
+                            <a:srgbClr val="262B30"/>
+                          </a:solidFill>
+                          <a:latin typeface="游ゴシック Medium"/>
+                          <a:ea typeface="游ゴシック Medium"/>
+                          <a:cs typeface="游ゴシック Medium"/>
+                        </a:rPr>
+                        <a:t>）</a:t>
                       </a:r>
                     </a:p>
                   </a:txBody>
@@ -14305,7 +14258,7 @@
                     <a:lstStyle/>
                     <a:p>
                       <a:r>
-                        <a:rPr sz="1150" b="0">
+                        <a:rPr sz="1150" b="0" dirty="0" err="1">
                           <a:solidFill>
                             <a:srgbClr val="262B30"/>
                           </a:solidFill>
@@ -14313,7 +14266,51 @@
                           <a:ea typeface="游ゴシック Medium"/>
                           <a:cs typeface="游ゴシック Medium"/>
                         </a:rPr>
-                        <a:t>渡したフォルダ＋Web＋外部ツール(MCP)</a:t>
+                        <a:t>渡したフォルダ</a:t>
+                      </a:r>
+                      <a:r>
+                        <a:rPr lang="ja-JP" altLang="en-US" sz="1150" b="0">
+                          <a:solidFill>
+                            <a:srgbClr val="262B30"/>
+                          </a:solidFill>
+                          <a:latin typeface="游ゴシック Medium"/>
+                          <a:ea typeface="游ゴシック Medium"/>
+                          <a:cs typeface="游ゴシック Medium"/>
+                        </a:rPr>
+                        <a:t>（ローカル）</a:t>
+                      </a:r>
+                      <a:r>
+                        <a:rPr sz="1150" b="0" dirty="0">
+                          <a:solidFill>
+                            <a:srgbClr val="262B30"/>
+                          </a:solidFill>
+                          <a:latin typeface="游ゴシック Medium"/>
+                          <a:ea typeface="游ゴシック Medium"/>
+                          <a:cs typeface="游ゴシック Medium"/>
+                        </a:rPr>
+                        <a:t>＋</a:t>
+                      </a:r>
+                      <a:r>
+                        <a:rPr sz="1150" b="0" dirty="0" err="1">
+                          <a:solidFill>
+                            <a:srgbClr val="262B30"/>
+                          </a:solidFill>
+                          <a:latin typeface="游ゴシック Medium"/>
+                          <a:ea typeface="游ゴシック Medium"/>
+                          <a:cs typeface="游ゴシック Medium"/>
+                        </a:rPr>
+                        <a:t>Web＋外部ツール</a:t>
+                      </a:r>
+                      <a:r>
+                        <a:rPr sz="1150" b="0" dirty="0">
+                          <a:solidFill>
+                            <a:srgbClr val="262B30"/>
+                          </a:solidFill>
+                          <a:latin typeface="游ゴシック Medium"/>
+                          <a:ea typeface="游ゴシック Medium"/>
+                          <a:cs typeface="游ゴシック Medium"/>
+                        </a:rPr>
+                        <a:t>(MCP)</a:t>
                       </a:r>
                     </a:p>
                   </a:txBody>
@@ -14384,7 +14381,7 @@
                     <a:lstStyle/>
                     <a:p>
                       <a:r>
-                        <a:rPr sz="1150" b="0">
+                        <a:rPr sz="1150" b="0" dirty="0" err="1">
                           <a:solidFill>
                             <a:srgbClr val="262B30"/>
                           </a:solidFill>
@@ -14394,6 +14391,14 @@
                         </a:rPr>
                         <a:t>多段処理・データ加工・独自成果物づくり</a:t>
                       </a:r>
+                      <a:endParaRPr sz="1150" b="0" dirty="0">
+                        <a:solidFill>
+                          <a:srgbClr val="262B30"/>
+                        </a:solidFill>
+                        <a:latin typeface="游ゴシック Medium"/>
+                        <a:ea typeface="游ゴシック Medium"/>
+                        <a:cs typeface="游ゴシック Medium"/>
+                      </a:endParaRPr>
                     </a:p>
                   </a:txBody>
                   <a:tcPr anchor="ctr">
@@ -14538,6 +14543,28 @@
               </a:spcAft>
             </a:pPr>
             <a:r>
+              <a:rPr lang="ja-JP" altLang="en-US" sz="1300" b="0">
+                <a:solidFill>
+                  <a:srgbClr val="E8EDF4"/>
+                </a:solidFill>
+                <a:latin typeface="游ゴシック Medium"/>
+                <a:ea typeface="游ゴシック Medium"/>
+                <a:cs typeface="游ゴシック Medium"/>
+              </a:rPr>
+              <a:t>　　</a:t>
+            </a:r>
+            <a:r>
+              <a:rPr lang="en-US" altLang="ja-JP" sz="1300" b="0" dirty="0">
+                <a:solidFill>
+                  <a:srgbClr val="E8EDF4"/>
+                </a:solidFill>
+                <a:latin typeface="游ゴシック Medium"/>
+                <a:ea typeface="游ゴシック Medium"/>
+                <a:cs typeface="游ゴシック Medium"/>
+              </a:rPr>
+              <a:t> </a:t>
+            </a:r>
+            <a:r>
               <a:rPr sz="1300" b="0" dirty="0" err="1">
                 <a:solidFill>
                   <a:srgbClr val="E8EDF4"/>
@@ -14603,124 +14630,6 @@
               </a:rPr>
               <a:t>。</a:t>
             </a:r>
-          </a:p>
-        </p:txBody>
-      </p:sp>
-      <p:sp>
-        <p:nvSpPr>
-          <p:cNvPr id="6" name="TextBox 5"/>
-          <p:cNvSpPr txBox="1"/>
-          <p:nvPr/>
-        </p:nvSpPr>
-        <p:spPr>
-          <a:xfrm>
-            <a:off x="813816" y="5029200"/>
-            <a:ext cx="10561320" cy="184666"/>
-          </a:xfrm>
-          <a:prstGeom prst="rect">
-            <a:avLst/>
-          </a:prstGeom>
-          <a:noFill/>
-        </p:spPr>
-        <p:txBody>
-          <a:bodyPr wrap="square" lIns="0" tIns="0" rIns="0" bIns="0" anchor="t">
-            <a:spAutoFit/>
-          </a:bodyPr>
-          <a:lstStyle/>
-          <a:p>
-            <a:pPr algn="l">
-              <a:spcBef>
-                <a:spcPts val="0"/>
-              </a:spcBef>
-              <a:spcAft>
-                <a:spcPts val="400"/>
-              </a:spcAft>
-            </a:pPr>
-            <a:r>
-              <a:rPr sz="1200" b="0" dirty="0" err="1">
-                <a:solidFill>
-                  <a:srgbClr val="E8EDF4"/>
-                </a:solidFill>
-                <a:latin typeface="游ゴシック Medium"/>
-                <a:ea typeface="游ゴシック Medium"/>
-                <a:cs typeface="游ゴシック Medium"/>
-              </a:rPr>
-              <a:t>統治は</a:t>
-            </a:r>
-            <a:r>
-              <a:rPr sz="1200" b="0" dirty="0">
-                <a:solidFill>
-                  <a:srgbClr val="E8EDF4"/>
-                </a:solidFill>
-                <a:latin typeface="游ゴシック Medium"/>
-                <a:ea typeface="游ゴシック Medium"/>
-                <a:cs typeface="游ゴシック Medium"/>
-              </a:rPr>
-              <a:t> Copilot </a:t>
-            </a:r>
-            <a:r>
-              <a:rPr sz="1200" b="0" dirty="0" err="1">
-                <a:solidFill>
-                  <a:srgbClr val="E8EDF4"/>
-                </a:solidFill>
-                <a:latin typeface="游ゴシック Medium"/>
-                <a:ea typeface="游ゴシック Medium"/>
-                <a:cs typeface="游ゴシック Medium"/>
-              </a:rPr>
-              <a:t>が</a:t>
-            </a:r>
-            <a:r>
-              <a:rPr sz="1200" b="0" dirty="0">
-                <a:solidFill>
-                  <a:srgbClr val="E8EDF4"/>
-                </a:solidFill>
-                <a:latin typeface="游ゴシック Medium"/>
-                <a:ea typeface="游ゴシック Medium"/>
-                <a:cs typeface="游ゴシック Medium"/>
-              </a:rPr>
-              <a:t> M365準拠、Cowork </a:t>
-            </a:r>
-            <a:r>
-              <a:rPr sz="1200" b="0" dirty="0" err="1">
-                <a:solidFill>
-                  <a:srgbClr val="E8EDF4"/>
-                </a:solidFill>
-                <a:latin typeface="游ゴシック Medium"/>
-                <a:ea typeface="游ゴシック Medium"/>
-                <a:cs typeface="游ゴシック Medium"/>
-              </a:rPr>
-              <a:t>は権限確認・フォルダ単位の制限。両者とも自律エージェント機能を持</a:t>
-            </a:r>
-            <a:r>
-              <a:rPr lang="en-US" sz="1200" dirty="0" err="1">
-                <a:solidFill>
-                  <a:srgbClr val="E8EDF4"/>
-                </a:solidFill>
-                <a:latin typeface="游ゴシック Medium"/>
-                <a:ea typeface="游ゴシック Medium"/>
-                <a:cs typeface="游ゴシック Medium"/>
-              </a:rPr>
-              <a:t>つ</a:t>
-            </a:r>
-            <a:r>
-              <a:rPr lang="en-US" sz="1200" dirty="0">
-                <a:solidFill>
-                  <a:srgbClr val="E8EDF4"/>
-                </a:solidFill>
-                <a:latin typeface="游ゴシック Medium"/>
-                <a:ea typeface="游ゴシック Medium"/>
-                <a:cs typeface="游ゴシック Medium"/>
-              </a:rPr>
-              <a:t>。</a:t>
-            </a:r>
-            <a:endParaRPr sz="1200" b="0" dirty="0">
-              <a:solidFill>
-                <a:srgbClr val="E8EDF4"/>
-              </a:solidFill>
-              <a:latin typeface="游ゴシック Medium"/>
-              <a:ea typeface="游ゴシック Medium"/>
-              <a:cs typeface="游ゴシック Medium"/>
-            </a:endParaRPr>
           </a:p>
         </p:txBody>
       </p:sp>
@@ -14765,43 +14674,23 @@
           <a:lstStyle/>
           <a:p>
             <a:r>
-              <a:rPr>
-                <a:latin typeface="游ゴシック Medium"/>
-                <a:ea typeface="游ゴシック Medium"/>
-                <a:cs typeface="游ゴシック Medium"/>
-              </a:rPr>
+              <a:rPr/>
               <a:t>Copilot</a:t>
             </a:r>
             <a:r>
-              <a:rPr lang="en-US" dirty="0">
-                <a:latin typeface="游ゴシック Medium"/>
-                <a:ea typeface="游ゴシック Medium"/>
-                <a:cs typeface="游ゴシック Medium"/>
-              </a:rPr>
+              <a:rPr lang="en-US" dirty="0"/>
               <a:t> </a:t>
             </a:r>
             <a:r>
-              <a:rPr lang="ja-JP" altLang="en-US">
-                <a:latin typeface="游ゴシック Medium"/>
-                <a:ea typeface="游ゴシック Medium"/>
-                <a:cs typeface="游ゴシック Medium"/>
-              </a:rPr>
+              <a:rPr lang="ja-JP" altLang="en-US"/>
               <a:t>に</a:t>
             </a:r>
             <a:r>
-              <a:rPr lang="en-US" altLang="ja-JP" dirty="0">
-                <a:latin typeface="游ゴシック Medium"/>
-                <a:ea typeface="游ゴシック Medium"/>
-                <a:cs typeface="游ゴシック Medium"/>
-              </a:rPr>
+              <a:rPr lang="en-US" altLang="ja-JP" dirty="0"/>
               <a:t> Claude Cowork </a:t>
             </a:r>
             <a:r>
-              <a:rPr lang="ja-JP" altLang="en-US">
-                <a:latin typeface="游ゴシック Medium"/>
-                <a:ea typeface="游ゴシック Medium"/>
-                <a:cs typeface="游ゴシック Medium"/>
-              </a:rPr>
+              <a:rPr lang="ja-JP" altLang="en-US"/>
               <a:t>を加えるメリット</a:t>
             </a:r>
             <a:endParaRPr>
@@ -15430,7 +15319,7 @@
         <p:spPr>
           <a:xfrm>
             <a:off x="813816" y="5120640"/>
-            <a:ext cx="10561320" cy="640080"/>
+            <a:ext cx="10561320" cy="215444"/>
           </a:xfrm>
           <a:prstGeom prst="rect">
             <a:avLst/>
@@ -15452,7 +15341,7 @@
               </a:spcAft>
             </a:pPr>
             <a:r>
-              <a:rPr sz="1400" b="1">
+              <a:rPr sz="1400" b="1" dirty="0" err="1">
                 <a:solidFill>
                   <a:srgbClr val="8FB9EC"/>
                 </a:solidFill>
@@ -15463,7 +15352,7 @@
               <a:t>ポイント：</a:t>
             </a:r>
             <a:r>
-              <a:rPr sz="1400" b="0">
+              <a:rPr sz="1400" b="0" dirty="0" err="1">
                 <a:solidFill>
                   <a:srgbClr val="E8EDF4"/>
                 </a:solidFill>
@@ -15471,7 +15360,29 @@
                 <a:ea typeface="游ゴシック Medium"/>
                 <a:cs typeface="游ゴシック Medium"/>
               </a:rPr>
-              <a:t>CopilotはOfficeの中と自社データに強く、Coworkはその範囲外のデータやタスクを担当します（補完の関係）。</a:t>
+              <a:t>CopilotはOfficeの中と自社データに強く、Coworkはその範囲外のデータやタスクを担当</a:t>
+            </a:r>
+            <a:r>
+              <a:rPr lang="en-US" sz="1400" dirty="0" err="1">
+                <a:solidFill>
+                  <a:srgbClr val="E8EDF4"/>
+                </a:solidFill>
+                <a:latin typeface="游ゴシック Medium"/>
+                <a:ea typeface="游ゴシック Medium"/>
+                <a:cs typeface="游ゴシック Medium"/>
+              </a:rPr>
+              <a:t>させやすい</a:t>
+            </a:r>
+            <a:r>
+              <a:rPr sz="1400" b="0" dirty="0">
+                <a:solidFill>
+                  <a:srgbClr val="E8EDF4"/>
+                </a:solidFill>
+                <a:latin typeface="游ゴシック Medium"/>
+                <a:ea typeface="游ゴシック Medium"/>
+                <a:cs typeface="游ゴシック Medium"/>
+              </a:rPr>
+              <a:t>。</a:t>
             </a:r>
           </a:p>
         </p:txBody>
@@ -15681,12 +15592,8 @@
           <a:lstStyle/>
           <a:p>
             <a:r>
-              <a:rPr>
-                <a:latin typeface="游ゴシック Medium"/>
-                <a:ea typeface="游ゴシック Medium"/>
-                <a:cs typeface="游ゴシック Medium"/>
-              </a:rPr>
-              <a:t>Claude Cowork と Claude Code の使い分け</a:t>
+              <a:rPr/>
+              <a:t>Claude Code でできること</a:t>
             </a:r>
           </a:p>
         </p:txBody>
@@ -15700,7 +15607,7 @@
         <p:spPr>
           <a:xfrm>
             <a:off x="813816" y="1024128"/>
-            <a:ext cx="10561320" cy="548640"/>
+            <a:ext cx="10561320" cy="457200"/>
           </a:xfrm>
           <a:prstGeom prst="rect">
             <a:avLst/>
@@ -15730,7 +15637,7 @@
                 <a:ea typeface="游ゴシック Medium"/>
                 <a:cs typeface="游ゴシック Medium"/>
               </a:rPr>
-              <a:t>できること自体は同じClaudeでほぼ共通（MCP・コード実行・デスクトップアプリもどちらにもあります）。違いは“何に向くか・誰向けか”です。</a:t>
+              <a:t>エンジニアが、ターミナルやIDEから開発そのものを任せられる自律エージェントです。</a:t>
             </a:r>
           </a:p>
         </p:txBody>
@@ -15743,19 +15650,17 @@
         </p:nvSpPr>
         <p:spPr>
           <a:xfrm>
-            <a:off x="813816" y="1783080"/>
-            <a:ext cx="5193792" cy="2743200"/>
+            <a:off x="813816" y="1527048"/>
+            <a:ext cx="137160" cy="137160"/>
           </a:xfrm>
           <a:prstGeom prst="rect">
             <a:avLst/>
           </a:prstGeom>
           <a:solidFill>
-            <a:srgbClr val="FFFFFF"/>
+            <a:srgbClr val="8FB9EC"/>
           </a:solidFill>
-          <a:ln w="12700">
-            <a:solidFill>
-              <a:srgbClr val="D9DEE4"/>
-            </a:solidFill>
+          <a:ln>
+            <a:noFill/>
           </a:ln>
           <a:effectLst/>
         </p:spPr>
@@ -15790,8 +15695,8 @@
         </p:nvSpPr>
         <p:spPr>
           <a:xfrm>
-            <a:off x="1088136" y="2011680"/>
-            <a:ext cx="4645152" cy="457200"/>
+            <a:off x="1133856" y="1444752"/>
+            <a:ext cx="10241280" cy="365760"/>
           </a:xfrm>
           <a:prstGeom prst="rect">
             <a:avLst/>
@@ -15813,15 +15718,15 @@
               </a:spcAft>
             </a:pPr>
             <a:r>
-              <a:rPr sz="1900" b="1">
-                <a:solidFill>
-                  <a:srgbClr val="005CCA"/>
+              <a:rPr sz="1600" b="1">
+                <a:solidFill>
+                  <a:srgbClr val="FFFFFF"/>
                 </a:solidFill>
                 <a:latin typeface="游ゴシック Medium"/>
                 <a:ea typeface="游ゴシック Medium"/>
                 <a:cs typeface="游ゴシック Medium"/>
               </a:rPr>
-              <a:t>Claude Cowork</a:t>
+              <a:t>開発環境の中で動く</a:t>
             </a:r>
           </a:p>
         </p:txBody>
@@ -15834,8 +15739,8 @@
         </p:nvSpPr>
         <p:spPr>
           <a:xfrm>
-            <a:off x="1088136" y="2441448"/>
-            <a:ext cx="4645152" cy="320040"/>
+            <a:off x="1133856" y="1819656"/>
+            <a:ext cx="10241280" cy="411480"/>
           </a:xfrm>
           <a:prstGeom prst="rect">
             <a:avLst/>
@@ -15857,191 +15762,38 @@
               </a:spcAft>
             </a:pPr>
             <a:r>
-              <a:rPr sz="1200" b="1">
-                <a:solidFill>
-                  <a:srgbClr val="262B30"/>
+              <a:rPr sz="1300" b="0">
+                <a:solidFill>
+                  <a:srgbClr val="E8EDF4"/>
                 </a:solidFill>
                 <a:latin typeface="游ゴシック Medium"/>
                 <a:ea typeface="游ゴシック Medium"/>
                 <a:cs typeface="游ゴシック Medium"/>
               </a:rPr>
-              <a:t>一般業務むけ（コード不要）</a:t>
-            </a:r>
-          </a:p>
-        </p:txBody>
-      </p:sp>
-      <p:sp>
-        <p:nvSpPr>
-          <p:cNvPr id="7" name="TextBox 6"/>
-          <p:cNvSpPr txBox="1"/>
+              <a:t>ターミナル(CLI)・デスクトップアプリ・IDEから、実際のプロジェクトの中で作業。</a:t>
+            </a:r>
+          </a:p>
+        </p:txBody>
+      </p:sp>
+      <p:sp>
+        <p:nvSpPr>
+          <p:cNvPr id="7" name="Rectangle 6"/>
+          <p:cNvSpPr/>
           <p:nvPr/>
         </p:nvSpPr>
         <p:spPr>
           <a:xfrm>
-            <a:off x="1088136" y="2862072"/>
-            <a:ext cx="4645152" cy="1554480"/>
-          </a:xfrm>
-          <a:prstGeom prst="rect">
-            <a:avLst/>
-          </a:prstGeom>
-          <a:noFill/>
-        </p:spPr>
-        <p:txBody>
-          <a:bodyPr wrap="square" lIns="0" tIns="0" rIns="0" bIns="0" anchor="t">
-            <a:spAutoFit/>
-          </a:bodyPr>
-          <a:lstStyle/>
-          <a:p>
-            <a:pPr algn="l">
-              <a:spcBef>
-                <a:spcPts val="0"/>
-              </a:spcBef>
-              <a:spcAft>
-                <a:spcPts val="800"/>
-              </a:spcAft>
-            </a:pPr>
-            <a:r>
-              <a:rPr sz="1200" b="1">
-                <a:solidFill>
-                  <a:srgbClr val="005CCA"/>
-                </a:solidFill>
-                <a:latin typeface="游ゴシック Medium"/>
-                <a:ea typeface="游ゴシック Medium"/>
-                <a:cs typeface="游ゴシック Medium"/>
-              </a:rPr>
-              <a:t>•  </a:t>
-            </a:r>
-            <a:r>
-              <a:rPr sz="1200" b="0">
-                <a:solidFill>
-                  <a:srgbClr val="262B30"/>
-                </a:solidFill>
-                <a:latin typeface="游ゴシック Medium"/>
-                <a:ea typeface="游ゴシック Medium"/>
-                <a:cs typeface="游ゴシック Medium"/>
-              </a:rPr>
-              <a:t>業務ユーザー（非エンジニア）向け</a:t>
-            </a:r>
-          </a:p>
-          <a:p>
-            <a:pPr algn="l">
-              <a:spcBef>
-                <a:spcPts val="0"/>
-              </a:spcBef>
-              <a:spcAft>
-                <a:spcPts val="800"/>
-              </a:spcAft>
-            </a:pPr>
-            <a:r>
-              <a:rPr sz="1200" b="1">
-                <a:solidFill>
-                  <a:srgbClr val="005CCA"/>
-                </a:solidFill>
-                <a:latin typeface="游ゴシック Medium"/>
-                <a:ea typeface="游ゴシック Medium"/>
-                <a:cs typeface="游ゴシック Medium"/>
-              </a:rPr>
-              <a:t>•  </a:t>
-            </a:r>
-            <a:r>
-              <a:rPr sz="1200" b="0">
-                <a:solidFill>
-                  <a:srgbClr val="262B30"/>
-                </a:solidFill>
-                <a:latin typeface="游ゴシック Medium"/>
-                <a:ea typeface="游ゴシック Medium"/>
-                <a:cs typeface="游ゴシック Medium"/>
-              </a:rPr>
-              <a:t>文書・スライド・表づくり、調査・データ整理に</a:t>
-            </a:r>
-          </a:p>
-          <a:p>
-            <a:pPr algn="l">
-              <a:spcBef>
-                <a:spcPts val="0"/>
-              </a:spcBef>
-              <a:spcAft>
-                <a:spcPts val="800"/>
-              </a:spcAft>
-            </a:pPr>
-            <a:r>
-              <a:rPr sz="1200" b="1">
-                <a:solidFill>
-                  <a:srgbClr val="005CCA"/>
-                </a:solidFill>
-                <a:latin typeface="游ゴシック Medium"/>
-                <a:ea typeface="游ゴシック Medium"/>
-                <a:cs typeface="游ゴシック Medium"/>
-              </a:rPr>
-              <a:t>•  </a:t>
-            </a:r>
-            <a:r>
-              <a:rPr sz="1200" b="0">
-                <a:solidFill>
-                  <a:srgbClr val="262B30"/>
-                </a:solidFill>
-                <a:latin typeface="游ゴシック Medium"/>
-                <a:ea typeface="游ゴシック Medium"/>
-                <a:cs typeface="游ゴシック Medium"/>
-              </a:rPr>
-              <a:t>デスクトップアプリ/Webで対話しながら使う</a:t>
-            </a:r>
-          </a:p>
-          <a:p>
-            <a:pPr algn="l">
-              <a:spcBef>
-                <a:spcPts val="0"/>
-              </a:spcBef>
-              <a:spcAft>
-                <a:spcPts val="800"/>
-              </a:spcAft>
-            </a:pPr>
-            <a:r>
-              <a:rPr sz="1200" b="1">
-                <a:solidFill>
-                  <a:srgbClr val="005CCA"/>
-                </a:solidFill>
-                <a:latin typeface="游ゴシック Medium"/>
-                <a:ea typeface="游ゴシック Medium"/>
-                <a:cs typeface="游ゴシック Medium"/>
-              </a:rPr>
-              <a:t>•  </a:t>
-            </a:r>
-            <a:r>
-              <a:rPr sz="1200" b="0">
-                <a:solidFill>
-                  <a:srgbClr val="262B30"/>
-                </a:solidFill>
-                <a:latin typeface="游ゴシック Medium"/>
-                <a:ea typeface="游ゴシック Medium"/>
-                <a:cs typeface="游ゴシック Medium"/>
-              </a:rPr>
-              <a:t>コードやコマンドを書かなくてよい</a:t>
-            </a:r>
-          </a:p>
-        </p:txBody>
-      </p:sp>
-      <p:sp>
-        <p:nvSpPr>
-          <p:cNvPr id="8" name="Rectangle 7"/>
-          <p:cNvSpPr/>
-          <p:nvPr/>
-        </p:nvSpPr>
-        <p:spPr>
-          <a:xfrm>
-            <a:off x="6181344" y="1783080"/>
-            <a:ext cx="5193792" cy="2743200"/>
+            <a:off x="813816" y="2309774"/>
+            <a:ext cx="137160" cy="137160"/>
           </a:xfrm>
           <a:prstGeom prst="rect">
             <a:avLst/>
           </a:prstGeom>
           <a:solidFill>
-            <a:srgbClr val="FFFFFF"/>
+            <a:srgbClr val="8FB9EC"/>
           </a:solidFill>
-          <a:ln w="12700">
-            <a:solidFill>
-              <a:srgbClr val="D9DEE4"/>
-            </a:solidFill>
+          <a:ln>
+            <a:noFill/>
           </a:ln>
           <a:effectLst/>
         </p:spPr>
@@ -16070,14 +15822,14 @@
       </p:sp>
       <p:sp>
         <p:nvSpPr>
-          <p:cNvPr id="9" name="TextBox 8"/>
+          <p:cNvPr id="8" name="TextBox 7"/>
           <p:cNvSpPr txBox="1"/>
           <p:nvPr/>
         </p:nvSpPr>
         <p:spPr>
           <a:xfrm>
-            <a:off x="6455664" y="2011680"/>
-            <a:ext cx="4645152" cy="457200"/>
+            <a:off x="1133856" y="2227478"/>
+            <a:ext cx="10241280" cy="365760"/>
           </a:xfrm>
           <a:prstGeom prst="rect">
             <a:avLst/>
@@ -16099,29 +15851,29 @@
               </a:spcAft>
             </a:pPr>
             <a:r>
-              <a:rPr sz="1900" b="1">
-                <a:solidFill>
-                  <a:srgbClr val="005CCA"/>
+              <a:rPr sz="1600" b="1">
+                <a:solidFill>
+                  <a:srgbClr val="FFFFFF"/>
                 </a:solidFill>
                 <a:latin typeface="游ゴシック Medium"/>
                 <a:ea typeface="游ゴシック Medium"/>
                 <a:cs typeface="游ゴシック Medium"/>
               </a:rPr>
-              <a:t>Claude Code</a:t>
-            </a:r>
-          </a:p>
-        </p:txBody>
-      </p:sp>
-      <p:sp>
-        <p:nvSpPr>
-          <p:cNvPr id="10" name="TextBox 9"/>
+              <a:t>コードを書く・動かす・直す</a:t>
+            </a:r>
+          </a:p>
+        </p:txBody>
+      </p:sp>
+      <p:sp>
+        <p:nvSpPr>
+          <p:cNvPr id="9" name="TextBox 8"/>
           <p:cNvSpPr txBox="1"/>
           <p:nvPr/>
         </p:nvSpPr>
         <p:spPr>
           <a:xfrm>
-            <a:off x="6455664" y="2441448"/>
-            <a:ext cx="4645152" cy="320040"/>
+            <a:off x="1133856" y="2602382"/>
+            <a:ext cx="10241280" cy="411480"/>
           </a:xfrm>
           <a:prstGeom prst="rect">
             <a:avLst/>
@@ -16143,16 +15895,61 @@
               </a:spcAft>
             </a:pPr>
             <a:r>
-              <a:rPr sz="1200" b="1">
-                <a:solidFill>
-                  <a:srgbClr val="262B30"/>
+              <a:rPr sz="1300" b="0">
+                <a:solidFill>
+                  <a:srgbClr val="E8EDF4"/>
                 </a:solidFill>
                 <a:latin typeface="游ゴシック Medium"/>
                 <a:ea typeface="游ゴシック Medium"/>
                 <a:cs typeface="游ゴシック Medium"/>
               </a:rPr>
-              <a:t>ソフトウェア開発むけ（エンジニア）</a:t>
-            </a:r>
+              <a:t>コードを実行してテストし、エラーを自分で直す反復に強い。</a:t>
+            </a:r>
+          </a:p>
+        </p:txBody>
+      </p:sp>
+      <p:sp>
+        <p:nvSpPr>
+          <p:cNvPr id="10" name="Rectangle 9"/>
+          <p:cNvSpPr/>
+          <p:nvPr/>
+        </p:nvSpPr>
+        <p:spPr>
+          <a:xfrm>
+            <a:off x="813816" y="3092500"/>
+            <a:ext cx="137160" cy="137160"/>
+          </a:xfrm>
+          <a:prstGeom prst="rect">
+            <a:avLst/>
+          </a:prstGeom>
+          <a:solidFill>
+            <a:srgbClr val="8FB9EC"/>
+          </a:solidFill>
+          <a:ln>
+            <a:noFill/>
+          </a:ln>
+          <a:effectLst/>
+        </p:spPr>
+        <p:style>
+          <a:lnRef idx="1">
+            <a:schemeClr val="accent1"/>
+          </a:lnRef>
+          <a:fillRef idx="3">
+            <a:schemeClr val="accent1"/>
+          </a:fillRef>
+          <a:effectRef idx="2">
+            <a:schemeClr val="accent1"/>
+          </a:effectRef>
+          <a:fontRef idx="minor">
+            <a:schemeClr val="lt1"/>
+          </a:fontRef>
+        </p:style>
+        <p:txBody>
+          <a:bodyPr rtlCol="0" anchor="ctr"/>
+          <a:lstStyle/>
+          <a:p>
+            <a:pPr algn="ctr"/>
+            <a:endParaRPr/>
           </a:p>
         </p:txBody>
       </p:sp>
@@ -16164,8 +15961,8 @@
         </p:nvSpPr>
         <p:spPr>
           <a:xfrm>
-            <a:off x="6455664" y="2862072"/>
-            <a:ext cx="4645152" cy="1554480"/>
+            <a:off x="1133856" y="3010204"/>
+            <a:ext cx="10241280" cy="365760"/>
           </a:xfrm>
           <a:prstGeom prst="rect">
             <a:avLst/>
@@ -16183,126 +15980,19 @@
                 <a:spcPts val="0"/>
               </a:spcBef>
               <a:spcAft>
-                <a:spcPts val="800"/>
+                <a:spcPts val="400"/>
               </a:spcAft>
             </a:pPr>
             <a:r>
-              <a:rPr sz="1200" b="1">
-                <a:solidFill>
-                  <a:srgbClr val="005CCA"/>
+              <a:rPr sz="1600" b="1">
+                <a:solidFill>
+                  <a:srgbClr val="FFFFFF"/>
                 </a:solidFill>
                 <a:latin typeface="游ゴシック Medium"/>
                 <a:ea typeface="游ゴシック Medium"/>
                 <a:cs typeface="游ゴシック Medium"/>
               </a:rPr>
-              <a:t>•  </a:t>
-            </a:r>
-            <a:r>
-              <a:rPr sz="1200" b="0">
-                <a:solidFill>
-                  <a:srgbClr val="262B30"/>
-                </a:solidFill>
-                <a:latin typeface="游ゴシック Medium"/>
-                <a:ea typeface="游ゴシック Medium"/>
-                <a:cs typeface="游ゴシック Medium"/>
-              </a:rPr>
-              <a:t>エンジニア・開発者向け</a:t>
-            </a:r>
-          </a:p>
-          <a:p>
-            <a:pPr algn="l">
-              <a:spcBef>
-                <a:spcPts val="0"/>
-              </a:spcBef>
-              <a:spcAft>
-                <a:spcPts val="800"/>
-              </a:spcAft>
-            </a:pPr>
-            <a:r>
-              <a:rPr sz="1200" b="1">
-                <a:solidFill>
-                  <a:srgbClr val="005CCA"/>
-                </a:solidFill>
-                <a:latin typeface="游ゴシック Medium"/>
-                <a:ea typeface="游ゴシック Medium"/>
-                <a:cs typeface="游ゴシック Medium"/>
-              </a:rPr>
-              <a:t>•  </a:t>
-            </a:r>
-            <a:r>
-              <a:rPr sz="1200" b="0">
-                <a:solidFill>
-                  <a:srgbClr val="262B30"/>
-                </a:solidFill>
-                <a:latin typeface="游ゴシック Medium"/>
-                <a:ea typeface="游ゴシック Medium"/>
-                <a:cs typeface="游ゴシック Medium"/>
-              </a:rPr>
-              <a:t>コードを書く・動かす・テストして自分で直す</a:t>
-            </a:r>
-          </a:p>
-          <a:p>
-            <a:pPr algn="l">
-              <a:spcBef>
-                <a:spcPts val="0"/>
-              </a:spcBef>
-              <a:spcAft>
-                <a:spcPts val="800"/>
-              </a:spcAft>
-            </a:pPr>
-            <a:r>
-              <a:rPr sz="1200" b="1">
-                <a:solidFill>
-                  <a:srgbClr val="005CCA"/>
-                </a:solidFill>
-                <a:latin typeface="游ゴシック Medium"/>
-                <a:ea typeface="游ゴシック Medium"/>
-                <a:cs typeface="游ゴシック Medium"/>
-              </a:rPr>
-              <a:t>•  </a:t>
-            </a:r>
-            <a:r>
-              <a:rPr sz="1200" b="0">
-                <a:solidFill>
-                  <a:srgbClr val="262B30"/>
-                </a:solidFill>
-                <a:latin typeface="游ゴシック Medium"/>
-                <a:ea typeface="游ゴシック Medium"/>
-                <a:cs typeface="游ゴシック Medium"/>
-              </a:rPr>
-              <a:t>実際のプロジェクトの中で作業（git・ビルド・CI）</a:t>
-            </a:r>
-          </a:p>
-          <a:p>
-            <a:pPr algn="l">
-              <a:spcBef>
-                <a:spcPts val="0"/>
-              </a:spcBef>
-              <a:spcAft>
-                <a:spcPts val="800"/>
-              </a:spcAft>
-            </a:pPr>
-            <a:r>
-              <a:rPr sz="1200" b="1">
-                <a:solidFill>
-                  <a:srgbClr val="005CCA"/>
-                </a:solidFill>
-                <a:latin typeface="游ゴシック Medium"/>
-                <a:ea typeface="游ゴシック Medium"/>
-                <a:cs typeface="游ゴシック Medium"/>
-              </a:rPr>
-              <a:t>•  </a:t>
-            </a:r>
-            <a:r>
-              <a:rPr sz="1200" b="0">
-                <a:solidFill>
-                  <a:srgbClr val="262B30"/>
-                </a:solidFill>
-                <a:latin typeface="游ゴシック Medium"/>
-                <a:ea typeface="游ゴシック Medium"/>
-                <a:cs typeface="游ゴシック Medium"/>
-              </a:rPr>
-              <a:t>ターミナル(CLI)やIDEからも使える</a:t>
+              <a:t>開発ワークフローに対応</a:t>
             </a:r>
           </a:p>
         </p:txBody>
@@ -16315,8 +16005,8 @@
         </p:nvSpPr>
         <p:spPr>
           <a:xfrm>
-            <a:off x="813816" y="4709160"/>
-            <a:ext cx="10561320" cy="914400"/>
+            <a:off x="1133856" y="3385108"/>
+            <a:ext cx="10241280" cy="411480"/>
           </a:xfrm>
           <a:prstGeom prst="rect">
             <a:avLst/>
@@ -16334,49 +16024,140 @@
                 <a:spcPts val="0"/>
               </a:spcBef>
               <a:spcAft>
-                <a:spcPts val="500"/>
+                <a:spcPts val="400"/>
               </a:spcAft>
             </a:pPr>
             <a:r>
-              <a:rPr sz="1400" b="1">
-                <a:solidFill>
-                  <a:srgbClr val="8FB9EC"/>
+              <a:rPr sz="1300" b="0">
+                <a:solidFill>
+                  <a:srgbClr val="E8EDF4"/>
                 </a:solidFill>
                 <a:latin typeface="游ゴシック Medium"/>
                 <a:ea typeface="游ゴシック Medium"/>
                 <a:cs typeface="游ゴシック Medium"/>
               </a:rPr>
-              <a:t>使い分け：</a:t>
-            </a:r>
-          </a:p>
+              <a:t>ファイル編集・git・ビルド・CI など、開発の一連の流れを自動化。</a:t>
+            </a:r>
+          </a:p>
+        </p:txBody>
+      </p:sp>
+      <p:sp>
+        <p:nvSpPr>
+          <p:cNvPr id="13" name="Rectangle 12"/>
+          <p:cNvSpPr/>
+          <p:nvPr/>
+        </p:nvSpPr>
+        <p:spPr>
+          <a:xfrm>
+            <a:off x="813816" y="3875227"/>
+            <a:ext cx="137160" cy="137160"/>
+          </a:xfrm>
+          <a:prstGeom prst="rect">
+            <a:avLst/>
+          </a:prstGeom>
+          <a:solidFill>
+            <a:srgbClr val="8FB9EC"/>
+          </a:solidFill>
+          <a:ln>
+            <a:noFill/>
+          </a:ln>
+          <a:effectLst/>
+        </p:spPr>
+        <p:style>
+          <a:lnRef idx="1">
+            <a:schemeClr val="accent1"/>
+          </a:lnRef>
+          <a:fillRef idx="3">
+            <a:schemeClr val="accent1"/>
+          </a:fillRef>
+          <a:effectRef idx="2">
+            <a:schemeClr val="accent1"/>
+          </a:effectRef>
+          <a:fontRef idx="minor">
+            <a:schemeClr val="lt1"/>
+          </a:fontRef>
+        </p:style>
+        <p:txBody>
+          <a:bodyPr rtlCol="0" anchor="ctr"/>
+          <a:lstStyle/>
+          <a:p>
+            <a:pPr algn="ctr"/>
+            <a:endParaRPr/>
+          </a:p>
+        </p:txBody>
+      </p:sp>
+      <p:sp>
+        <p:nvSpPr>
+          <p:cNvPr id="14" name="TextBox 13"/>
+          <p:cNvSpPr txBox="1"/>
+          <p:nvPr/>
+        </p:nvSpPr>
+        <p:spPr>
+          <a:xfrm>
+            <a:off x="1133856" y="3792931"/>
+            <a:ext cx="10241280" cy="365760"/>
+          </a:xfrm>
+          <a:prstGeom prst="rect">
+            <a:avLst/>
+          </a:prstGeom>
+          <a:noFill/>
+        </p:spPr>
+        <p:txBody>
+          <a:bodyPr wrap="square" lIns="0" tIns="0" rIns="0" bIns="0" anchor="t">
+            <a:spAutoFit/>
+          </a:bodyPr>
+          <a:lstStyle/>
           <a:p>
             <a:pPr algn="l">
               <a:spcBef>
                 <a:spcPts val="0"/>
               </a:spcBef>
               <a:spcAft>
-                <a:spcPts val="500"/>
+                <a:spcPts val="400"/>
               </a:spcAft>
             </a:pPr>
             <a:r>
-              <a:rPr sz="1300" b="0">
-                <a:solidFill>
-                  <a:srgbClr val="E8EDF4"/>
+              <a:rPr sz="1600" b="1">
+                <a:solidFill>
+                  <a:srgbClr val="FFFFFF"/>
                 </a:solidFill>
                 <a:latin typeface="游ゴシック Medium"/>
                 <a:ea typeface="游ゴシック Medium"/>
                 <a:cs typeface="游ゴシック Medium"/>
               </a:rPr>
-              <a:t>・コーディングは不要で、日常業務のタスク（調査・資料・データ整理）を任せたいとき → Claude Cowork</a:t>
-            </a:r>
-          </a:p>
+              <a:t>スキルやCLAUDE.mdで拡張</a:t>
+            </a:r>
+          </a:p>
+        </p:txBody>
+      </p:sp>
+      <p:sp>
+        <p:nvSpPr>
+          <p:cNvPr id="15" name="TextBox 14"/>
+          <p:cNvSpPr txBox="1"/>
+          <p:nvPr/>
+        </p:nvSpPr>
+        <p:spPr>
+          <a:xfrm>
+            <a:off x="1133856" y="4167835"/>
+            <a:ext cx="10241280" cy="411480"/>
+          </a:xfrm>
+          <a:prstGeom prst="rect">
+            <a:avLst/>
+          </a:prstGeom>
+          <a:noFill/>
+        </p:spPr>
+        <p:txBody>
+          <a:bodyPr wrap="square" lIns="0" tIns="0" rIns="0" bIns="0" anchor="t">
+            <a:spAutoFit/>
+          </a:bodyPr>
+          <a:lstStyle/>
           <a:p>
             <a:pPr algn="l">
               <a:spcBef>
                 <a:spcPts val="0"/>
               </a:spcBef>
               <a:spcAft>
-                <a:spcPts val="500"/>
+                <a:spcPts val="400"/>
               </a:spcAft>
             </a:pPr>
             <a:r>
@@ -16388,7 +16169,140 @@
                 <a:ea typeface="游ゴシック Medium"/>
                 <a:cs typeface="游ゴシック Medium"/>
               </a:rPr>
-              <a:t>・コードやCLIで作り込み・自動化・リポジトリ操作をしたいとき → Claude Code</a:t>
+              <a:t>よく使う手順をスキル化し、プロジェクトの決まり事を教えられる。</a:t>
+            </a:r>
+          </a:p>
+        </p:txBody>
+      </p:sp>
+      <p:sp>
+        <p:nvSpPr>
+          <p:cNvPr id="16" name="Rectangle 15"/>
+          <p:cNvSpPr/>
+          <p:nvPr/>
+        </p:nvSpPr>
+        <p:spPr>
+          <a:xfrm>
+            <a:off x="813816" y="4657953"/>
+            <a:ext cx="137160" cy="137160"/>
+          </a:xfrm>
+          <a:prstGeom prst="rect">
+            <a:avLst/>
+          </a:prstGeom>
+          <a:solidFill>
+            <a:srgbClr val="8FB9EC"/>
+          </a:solidFill>
+          <a:ln>
+            <a:noFill/>
+          </a:ln>
+          <a:effectLst/>
+        </p:spPr>
+        <p:style>
+          <a:lnRef idx="1">
+            <a:schemeClr val="accent1"/>
+          </a:lnRef>
+          <a:fillRef idx="3">
+            <a:schemeClr val="accent1"/>
+          </a:fillRef>
+          <a:effectRef idx="2">
+            <a:schemeClr val="accent1"/>
+          </a:effectRef>
+          <a:fontRef idx="minor">
+            <a:schemeClr val="lt1"/>
+          </a:fontRef>
+        </p:style>
+        <p:txBody>
+          <a:bodyPr rtlCol="0" anchor="ctr"/>
+          <a:lstStyle/>
+          <a:p>
+            <a:pPr algn="ctr"/>
+            <a:endParaRPr/>
+          </a:p>
+        </p:txBody>
+      </p:sp>
+      <p:sp>
+        <p:nvSpPr>
+          <p:cNvPr id="17" name="TextBox 16"/>
+          <p:cNvSpPr txBox="1"/>
+          <p:nvPr/>
+        </p:nvSpPr>
+        <p:spPr>
+          <a:xfrm>
+            <a:off x="1133856" y="4575657"/>
+            <a:ext cx="10241280" cy="365760"/>
+          </a:xfrm>
+          <a:prstGeom prst="rect">
+            <a:avLst/>
+          </a:prstGeom>
+          <a:noFill/>
+        </p:spPr>
+        <p:txBody>
+          <a:bodyPr wrap="square" lIns="0" tIns="0" rIns="0" bIns="0" anchor="t">
+            <a:spAutoFit/>
+          </a:bodyPr>
+          <a:lstStyle/>
+          <a:p>
+            <a:pPr algn="l">
+              <a:spcBef>
+                <a:spcPts val="0"/>
+              </a:spcBef>
+              <a:spcAft>
+                <a:spcPts val="400"/>
+              </a:spcAft>
+            </a:pPr>
+            <a:r>
+              <a:rPr sz="1600" b="1">
+                <a:solidFill>
+                  <a:srgbClr val="FFFFFF"/>
+                </a:solidFill>
+                <a:latin typeface="游ゴシック Medium"/>
+                <a:ea typeface="游ゴシック Medium"/>
+                <a:cs typeface="游ゴシック Medium"/>
+              </a:rPr>
+              <a:t>外部ツール連携・データ処理</a:t>
+            </a:r>
+          </a:p>
+        </p:txBody>
+      </p:sp>
+      <p:sp>
+        <p:nvSpPr>
+          <p:cNvPr id="18" name="TextBox 17"/>
+          <p:cNvSpPr txBox="1"/>
+          <p:nvPr/>
+        </p:nvSpPr>
+        <p:spPr>
+          <a:xfrm>
+            <a:off x="1133856" y="4950561"/>
+            <a:ext cx="10241280" cy="411480"/>
+          </a:xfrm>
+          <a:prstGeom prst="rect">
+            <a:avLst/>
+          </a:prstGeom>
+          <a:noFill/>
+        </p:spPr>
+        <p:txBody>
+          <a:bodyPr wrap="square" lIns="0" tIns="0" rIns="0" bIns="0" anchor="t">
+            <a:spAutoFit/>
+          </a:bodyPr>
+          <a:lstStyle/>
+          <a:p>
+            <a:pPr algn="l">
+              <a:spcBef>
+                <a:spcPts val="0"/>
+              </a:spcBef>
+              <a:spcAft>
+                <a:spcPts val="400"/>
+              </a:spcAft>
+            </a:pPr>
+            <a:r>
+              <a:rPr sz="1300" b="0">
+                <a:solidFill>
+                  <a:srgbClr val="E8EDF4"/>
+                </a:solidFill>
+                <a:latin typeface="游ゴシック Medium"/>
+                <a:ea typeface="游ゴシック Medium"/>
+                <a:cs typeface="游ゴシック Medium"/>
+              </a:rPr>
+              <a:t>MCPで外部ツールと連携、コマンド実行やデータ処理も任せられる。</a:t>
             </a:r>
           </a:p>
         </p:txBody>
@@ -16991,26 +16905,6 @@
 </file>
 
 <file path=customXml/item1.xml><?xml version="1.0" encoding="utf-8"?>
-<p:properties xmlns:p="http://schemas.microsoft.com/office/2006/metadata/properties" xmlns:xsi="http://www.w3.org/2001/XMLSchema-instance" xmlns:pc="http://schemas.microsoft.com/office/infopath/2007/PartnerControls">
-  <documentManagement>
-    <TaxCatchAll xmlns="5d54735c-8563-480c-aa17-13e507c6fcf6" xsi:nil="true"/>
-    <lcf76f155ced4ddcb4097134ff3c332f xmlns="768ecba8-f556-413e-93cf-a669b10e85e2">
-      <Terms xmlns="http://schemas.microsoft.com/office/infopath/2007/PartnerControls"/>
-    </lcf76f155ced4ddcb4097134ff3c332f>
-  </documentManagement>
-</p:properties>
-</file>
-
-<file path=customXml/item2.xml><?xml version="1.0" encoding="utf-8"?>
-<?mso-contentType ?>
-<FormTemplates xmlns="http://schemas.microsoft.com/sharepoint/v3/contenttype/forms">
-  <Display>DocumentLibraryForm</Display>
-  <Edit>DocumentLibraryForm</Edit>
-  <New>DocumentLibraryForm</New>
-</FormTemplates>
-</file>
-
-<file path=customXml/item3.xml><?xml version="1.0" encoding="utf-8"?>
 <ct:contentTypeSchema xmlns:ct="http://schemas.microsoft.com/office/2006/metadata/contentType" xmlns:ma="http://schemas.microsoft.com/office/2006/metadata/properties/metaAttributes" ct:_="" ma:_="" ma:contentTypeName="ドキュメント" ma:contentTypeID="0x010100CAA98F3332D97A45A4456E8DA039AEBC" ma:contentTypeVersion="12" ma:contentTypeDescription="新しいドキュメントを作成します。" ma:contentTypeScope="" ma:versionID="a9dd5d2222e388c7d315e043965fb87e">
   <xsd:schema xmlns:xsd="http://www.w3.org/2001/XMLSchema" xmlns:xs="http://www.w3.org/2001/XMLSchema" xmlns:p="http://schemas.microsoft.com/office/2006/metadata/properties" xmlns:ns2="768ecba8-f556-413e-93cf-a669b10e85e2" xmlns:ns3="5d54735c-8563-480c-aa17-13e507c6fcf6" targetNamespace="http://schemas.microsoft.com/office/2006/metadata/properties" ma:root="true" ma:fieldsID="3be956df6bb9cabc9cd1a95b5e82f7fe" ns2:_="" ns3:_="">
     <xsd:import namespace="768ecba8-f556-413e-93cf-a669b10e85e2"/>
@@ -17211,26 +17105,27 @@
 </ct:contentTypeSchema>
 </file>
 
-<file path=customXml/itemProps1.xml><?xml version="1.0" encoding="utf-8"?>
-<ds:datastoreItem xmlns:ds="http://schemas.openxmlformats.org/officeDocument/2006/customXml" ds:itemID="{3FFB5523-FEB7-4908-9109-C2FCB7452423}">
-  <ds:schemaRefs>
-    <ds:schemaRef ds:uri="http://schemas.microsoft.com/office/2006/metadata/properties"/>
-    <ds:schemaRef ds:uri="http://schemas.microsoft.com/office/infopath/2007/PartnerControls"/>
-    <ds:schemaRef ds:uri="5d54735c-8563-480c-aa17-13e507c6fcf6"/>
-    <ds:schemaRef ds:uri="768ecba8-f556-413e-93cf-a669b10e85e2"/>
-  </ds:schemaRefs>
-</ds:datastoreItem>
+<file path=customXml/item2.xml><?xml version="1.0" encoding="utf-8"?>
+<?mso-contentType ?>
+<FormTemplates xmlns="http://schemas.microsoft.com/sharepoint/v3/contenttype/forms">
+  <Display>DocumentLibraryForm</Display>
+  <Edit>DocumentLibraryForm</Edit>
+  <New>DocumentLibraryForm</New>
+</FormTemplates>
 </file>
 
-<file path=customXml/itemProps2.xml><?xml version="1.0" encoding="utf-8"?>
-<ds:datastoreItem xmlns:ds="http://schemas.openxmlformats.org/officeDocument/2006/customXml" ds:itemID="{458AE83B-8FBF-46E4-95C5-6FC34C176263}">
-  <ds:schemaRefs>
-    <ds:schemaRef ds:uri="http://schemas.microsoft.com/sharepoint/v3/contenttype/forms"/>
-  </ds:schemaRefs>
-</ds:datastoreItem>
+<file path=customXml/item3.xml><?xml version="1.0" encoding="utf-8"?>
+<p:properties xmlns:p="http://schemas.microsoft.com/office/2006/metadata/properties" xmlns:xsi="http://www.w3.org/2001/XMLSchema-instance" xmlns:pc="http://schemas.microsoft.com/office/infopath/2007/PartnerControls">
+  <documentManagement>
+    <TaxCatchAll xmlns="5d54735c-8563-480c-aa17-13e507c6fcf6" xsi:nil="true"/>
+    <lcf76f155ced4ddcb4097134ff3c332f xmlns="768ecba8-f556-413e-93cf-a669b10e85e2">
+      <Terms xmlns="http://schemas.microsoft.com/office/infopath/2007/PartnerControls"/>
+    </lcf76f155ced4ddcb4097134ff3c332f>
+  </documentManagement>
+</p:properties>
 </file>
 
-<file path=customXml/itemProps3.xml><?xml version="1.0" encoding="utf-8"?>
+<file path=customXml/itemProps1.xml><?xml version="1.0" encoding="utf-8"?>
 <ds:datastoreItem xmlns:ds="http://schemas.openxmlformats.org/officeDocument/2006/customXml" ds:itemID="{B1F9275D-B4EB-4C8E-9255-310B2138FDF9}">
   <ds:schemaRefs>
     <ds:schemaRef ds:uri="http://schemas.microsoft.com/office/2006/metadata/contentType"/>
@@ -17247,4 +17142,23 @@
     <ds:schemaRef ds:uri="http://schemas.microsoft.com/internal/obd"/>
   </ds:schemaRefs>
 </ds:datastoreItem>
+</file>
+
+<file path=customXml/itemProps2.xml><?xml version="1.0" encoding="utf-8"?>
+<ds:datastoreItem xmlns:ds="http://schemas.openxmlformats.org/officeDocument/2006/customXml" ds:itemID="{458AE83B-8FBF-46E4-95C5-6FC34C176263}">
+  <ds:schemaRefs>
+    <ds:schemaRef ds:uri="http://schemas.microsoft.com/sharepoint/v3/contenttype/forms"/>
+  </ds:schemaRefs>
+</ds:datastoreItem>
+</file>
+
+<file path=customXml/itemProps3.xml><?xml version="1.0" encoding="utf-8"?>
+<ds:datastoreItem xmlns:ds="http://schemas.openxmlformats.org/officeDocument/2006/customXml" ds:itemID="{3FFB5523-FEB7-4908-9109-C2FCB7452423}">
+  <ds:schemaRefs>
+    <ds:schemaRef ds:uri="http://schemas.microsoft.com/office/2006/metadata/properties"/>
+    <ds:schemaRef ds:uri="http://schemas.microsoft.com/office/infopath/2007/PartnerControls"/>
+    <ds:schemaRef ds:uri="5d54735c-8563-480c-aa17-13e507c6fcf6"/>
+    <ds:schemaRef ds:uri="768ecba8-f556-413e-93cf-a669b10e85e2"/>
+  </ds:schemaRefs>
+</ds:datastoreItem>
 </file>
--- a/配布/Copilot_Cowork_競合比較.pptx
+++ b/配布/Copilot_Cowork_競合比較.pptx
@@ -9800,7 +9800,12 @@
             <p:ph type="ctrTitle"/>
           </p:nvPr>
         </p:nvSpPr>
-        <p:spPr/>
+        <p:spPr>
+          <a:xfrm>
+            <a:off x="5207425" y="1989088"/>
+            <a:ext cx="6410353" cy="1371445"/>
+          </a:xfrm>
+        </p:spPr>
         <p:txBody>
           <a:bodyPr>
             <a:normAutofit fontScale="90000"/>
@@ -9824,15 +9829,7 @@
             </a:br>
             <a:r>
               <a:rPr lang="en-US" dirty="0"/>
-              <a:t>Microsoft 356 </a:t>
-            </a:r>
-            <a:r>
-              <a:rPr lang="en-US" dirty="0" err="1"/>
-              <a:t>Cpilot</a:t>
-            </a:r>
-            <a:r>
-              <a:rPr lang="en-US" dirty="0"/>
-              <a:t> </a:t>
+              <a:t>Microsoft 365 Copilot </a:t>
             </a:r>
             <a:r>
               <a:rPr dirty="0" err="1"/>
@@ -9964,7 +9961,6 @@
           <a:lstStyle/>
           <a:p>
             <a:r>
-              <a:rPr/>
               <a:t>Claude Cowork と Claude Code の使い分け</a:t>
             </a:r>
           </a:p>
@@ -10713,7 +10709,6 @@
           <a:lstStyle/>
           <a:p>
             <a:r>
-              <a:rPr/>
               <a:t>【参考】Claude Code と同じ土俵の競合ツール</a:t>
             </a:r>
           </a:p>
@@ -12131,7 +12126,6 @@
           <a:lstStyle/>
           <a:p>
             <a:r>
-              <a:rPr/>
               <a:t>Microsoft 365 Copilot でできること</a:t>
             </a:r>
           </a:p>
@@ -12434,7 +12428,7 @@
               </a:spcAft>
             </a:pPr>
             <a:r>
-              <a:rPr sz="1300" b="0">
+              <a:rPr sz="1300" b="0" dirty="0" err="1">
                 <a:solidFill>
                   <a:srgbClr val="E8EDF4"/>
                 </a:solidFill>
@@ -12442,7 +12436,18 @@
                 <a:ea typeface="游ゴシック Medium"/>
                 <a:cs typeface="游ゴシック Medium"/>
               </a:rPr>
-              <a:t>メール・文書・会議・予定を参照して、要約・下書き・分析ができる。</a:t>
+              <a:t>メール・文書・会議・予定を参照して、要約・下書き・分析ができる（自社データの自動参照は有償ライセンス時）。</a:t>
+            </a:r>
+            <a:r>
+              <a:rPr sz="1300" b="0" dirty="0">
+                <a:solidFill>
+                  <a:srgbClr val="E8EDF4"/>
+                </a:solidFill>
+                <a:latin typeface="游ゴシック Medium"/>
+                <a:ea typeface="游ゴシック Medium"/>
+                <a:cs typeface="游ゴシック Medium"/>
+              </a:rPr>
+              <a:t/>
             </a:r>
           </a:p>
         </p:txBody>
@@ -12945,7 +12950,7 @@
                 <a:ea typeface="游ゴシック Medium"/>
                 <a:cs typeface="游ゴシック Medium"/>
               </a:rPr>
-              <a:t>プロジェクトを作成し、フォルダを指定することで包括的にファイルを扱う</a:t>
+              <a:t>選んだフォルダのファイルを横断的に扱いながら、まとまった作業を任せられる自律エージェント。</a:t>
             </a:r>
             <a:endParaRPr sz="1300" b="0" dirty="0">
               <a:solidFill>
@@ -13040,7 +13045,6 @@
           <a:lstStyle/>
           <a:p>
             <a:r>
-              <a:rPr/>
               <a:t>Claude Cowork でできること</a:t>
             </a:r>
           </a:p>
@@ -13796,7 +13800,6 @@
           <a:lstStyle/>
           <a:p>
             <a:r>
-              <a:rPr/>
               <a:t>Microsoft 365 Copilot と Claude Cowork の住み分け</a:t>
             </a:r>
           </a:p>
@@ -14674,7 +14677,6 @@
           <a:lstStyle/>
           <a:p>
             <a:r>
-              <a:rPr/>
               <a:t>Copilot</a:t>
             </a:r>
             <a:r>
@@ -15592,7 +15594,6 @@
           <a:lstStyle/>
           <a:p>
             <a:r>
-              <a:rPr/>
               <a:t>Claude Code でできること</a:t>
             </a:r>
           </a:p>
@@ -16905,6 +16906,26 @@
 </file>
 
 <file path=customXml/item1.xml><?xml version="1.0" encoding="utf-8"?>
+<p:properties xmlns:p="http://schemas.microsoft.com/office/2006/metadata/properties" xmlns:xsi="http://www.w3.org/2001/XMLSchema-instance" xmlns:pc="http://schemas.microsoft.com/office/infopath/2007/PartnerControls">
+  <documentManagement>
+    <TaxCatchAll xmlns="5d54735c-8563-480c-aa17-13e507c6fcf6" xsi:nil="true"/>
+    <lcf76f155ced4ddcb4097134ff3c332f xmlns="768ecba8-f556-413e-93cf-a669b10e85e2">
+      <Terms xmlns="http://schemas.microsoft.com/office/infopath/2007/PartnerControls"/>
+    </lcf76f155ced4ddcb4097134ff3c332f>
+  </documentManagement>
+</p:properties>
+</file>
+
+<file path=customXml/item2.xml><?xml version="1.0" encoding="utf-8"?>
+<?mso-contentType ?>
+<FormTemplates xmlns="http://schemas.microsoft.com/sharepoint/v3/contenttype/forms">
+  <Display>DocumentLibraryForm</Display>
+  <Edit>DocumentLibraryForm</Edit>
+  <New>DocumentLibraryForm</New>
+</FormTemplates>
+</file>
+
+<file path=customXml/item3.xml><?xml version="1.0" encoding="utf-8"?>
 <ct:contentTypeSchema xmlns:ct="http://schemas.microsoft.com/office/2006/metadata/contentType" xmlns:ma="http://schemas.microsoft.com/office/2006/metadata/properties/metaAttributes" ct:_="" ma:_="" ma:contentTypeName="ドキュメント" ma:contentTypeID="0x010100CAA98F3332D97A45A4456E8DA039AEBC" ma:contentTypeVersion="12" ma:contentTypeDescription="新しいドキュメントを作成します。" ma:contentTypeScope="" ma:versionID="a9dd5d2222e388c7d315e043965fb87e">
   <xsd:schema xmlns:xsd="http://www.w3.org/2001/XMLSchema" xmlns:xs="http://www.w3.org/2001/XMLSchema" xmlns:p="http://schemas.microsoft.com/office/2006/metadata/properties" xmlns:ns2="768ecba8-f556-413e-93cf-a669b10e85e2" xmlns:ns3="5d54735c-8563-480c-aa17-13e507c6fcf6" targetNamespace="http://schemas.microsoft.com/office/2006/metadata/properties" ma:root="true" ma:fieldsID="3be956df6bb9cabc9cd1a95b5e82f7fe" ns2:_="" ns3:_="">
     <xsd:import namespace="768ecba8-f556-413e-93cf-a669b10e85e2"/>
@@ -17105,27 +17126,26 @@
 </ct:contentTypeSchema>
 </file>
 
-<file path=customXml/item2.xml><?xml version="1.0" encoding="utf-8"?>
-<?mso-contentType ?>
-<FormTemplates xmlns="http://schemas.microsoft.com/sharepoint/v3/contenttype/forms">
-  <Display>DocumentLibraryForm</Display>
-  <Edit>DocumentLibraryForm</Edit>
-  <New>DocumentLibraryForm</New>
-</FormTemplates>
+<file path=customXml/itemProps1.xml><?xml version="1.0" encoding="utf-8"?>
+<ds:datastoreItem xmlns:ds="http://schemas.openxmlformats.org/officeDocument/2006/customXml" ds:itemID="{3FFB5523-FEB7-4908-9109-C2FCB7452423}">
+  <ds:schemaRefs>
+    <ds:schemaRef ds:uri="http://schemas.microsoft.com/office/2006/metadata/properties"/>
+    <ds:schemaRef ds:uri="http://schemas.microsoft.com/office/infopath/2007/PartnerControls"/>
+    <ds:schemaRef ds:uri="5d54735c-8563-480c-aa17-13e507c6fcf6"/>
+    <ds:schemaRef ds:uri="768ecba8-f556-413e-93cf-a669b10e85e2"/>
+  </ds:schemaRefs>
+</ds:datastoreItem>
 </file>
 
-<file path=customXml/item3.xml><?xml version="1.0" encoding="utf-8"?>
-<p:properties xmlns:p="http://schemas.microsoft.com/office/2006/metadata/properties" xmlns:xsi="http://www.w3.org/2001/XMLSchema-instance" xmlns:pc="http://schemas.microsoft.com/office/infopath/2007/PartnerControls">
-  <documentManagement>
-    <TaxCatchAll xmlns="5d54735c-8563-480c-aa17-13e507c6fcf6" xsi:nil="true"/>
-    <lcf76f155ced4ddcb4097134ff3c332f xmlns="768ecba8-f556-413e-93cf-a669b10e85e2">
-      <Terms xmlns="http://schemas.microsoft.com/office/infopath/2007/PartnerControls"/>
-    </lcf76f155ced4ddcb4097134ff3c332f>
-  </documentManagement>
-</p:properties>
+<file path=customXml/itemProps2.xml><?xml version="1.0" encoding="utf-8"?>
+<ds:datastoreItem xmlns:ds="http://schemas.openxmlformats.org/officeDocument/2006/customXml" ds:itemID="{458AE83B-8FBF-46E4-95C5-6FC34C176263}">
+  <ds:schemaRefs>
+    <ds:schemaRef ds:uri="http://schemas.microsoft.com/sharepoint/v3/contenttype/forms"/>
+  </ds:schemaRefs>
+</ds:datastoreItem>
 </file>
 
-<file path=customXml/itemProps1.xml><?xml version="1.0" encoding="utf-8"?>
+<file path=customXml/itemProps3.xml><?xml version="1.0" encoding="utf-8"?>
 <ds:datastoreItem xmlns:ds="http://schemas.openxmlformats.org/officeDocument/2006/customXml" ds:itemID="{B1F9275D-B4EB-4C8E-9255-310B2138FDF9}">
   <ds:schemaRefs>
     <ds:schemaRef ds:uri="http://schemas.microsoft.com/office/2006/metadata/contentType"/>
@@ -17142,23 +17162,4 @@
     <ds:schemaRef ds:uri="http://schemas.microsoft.com/internal/obd"/>
   </ds:schemaRefs>
 </ds:datastoreItem>
-</file>
-
-<file path=customXml/itemProps2.xml><?xml version="1.0" encoding="utf-8"?>
-<ds:datastoreItem xmlns:ds="http://schemas.openxmlformats.org/officeDocument/2006/customXml" ds:itemID="{458AE83B-8FBF-46E4-95C5-6FC34C176263}">
-  <ds:schemaRefs>
-    <ds:schemaRef ds:uri="http://schemas.microsoft.com/sharepoint/v3/contenttype/forms"/>
-  </ds:schemaRefs>
-</ds:datastoreItem>
-</file>
-
-<file path=customXml/itemProps3.xml><?xml version="1.0" encoding="utf-8"?>
-<ds:datastoreItem xmlns:ds="http://schemas.openxmlformats.org/officeDocument/2006/customXml" ds:itemID="{3FFB5523-FEB7-4908-9109-C2FCB7452423}">
-  <ds:schemaRefs>
-    <ds:schemaRef ds:uri="http://schemas.microsoft.com/office/2006/metadata/properties"/>
-    <ds:schemaRef ds:uri="http://schemas.microsoft.com/office/infopath/2007/PartnerControls"/>
-    <ds:schemaRef ds:uri="5d54735c-8563-480c-aa17-13e507c6fcf6"/>
-    <ds:schemaRef ds:uri="768ecba8-f556-413e-93cf-a669b10e85e2"/>
-  </ds:schemaRefs>
-</ds:datastoreItem>
 </file>